--- a/presentation/nba_agent_deck.pptx
+++ b/presentation/nba_agent_deck.pptx
@@ -516,7 +516,7 @@
           <a:lstStyle/>
           <a:p>
             <a:r>
-              <a:t>Good morning. We are Group 12, Track 2, and our project is market-graded learning for NBA game-impact intelligence. In one sentence: we built an agent that reads late NBA injury news, turns it into forecasts and briefs, and then grades itself against real prediction-market prices. It only keeps the lessons it learns if they pass a backtest on earlier days.</a:t>
+              <a:t>Good morning, we are Group 12. Many people believe that if they follow NBA injury news closely, they can beat sports prediction markets. We took that belief seriously and built the best agent we could to try. What we found is that the game is structurally tilted against the consumer, and that shaped what our product does: it protects and educates rather than encourages betting.</a:t>
             </a:r>
           </a:p>
         </p:txBody>
@@ -586,7 +586,7 @@
           <a:lstStyle/>
           <a:p>
             <a:r>
-              <a:t>These are test-period results on real Kalshi prices, the same prices for every setup, with fills at the ask plus fees. Trading the raw model loses $2,087 on 366 trades and has 10 days that lost over $100. Anchoring to the market cuts that to minus $247, and adding learning brings it to minus $32 on 74 trades, with the maximum drawdown down to $195. We are still slightly negative, and we say so.</a:t>
+              <a:t>This slide is context, not our measurement. In most electronic markets, professional traders and market makers have faster data feeds, automated pricing, larger models and, on many venues, special fee or liquidity programmes. A retail user typically reads public news on a phone and pays the full taker price. We are not saying anyone breaks rules; this is how market structure usually works, and it is consistent with the speed and cost results we measured.</a:t>
             </a:r>
           </a:p>
         </p:txBody>
@@ -656,7 +656,7 @@
           <a:lstStyle/>
           <a:p>
             <a:r>
-              <a:t>This funnel shows how selective the agent is. Of 771 decision points in the test period, only 153 had a gap over 4 points after fees, and after notebook rules and the one-position-per-game limit, 74 were traded. 27 of those beat or matched the closing price and 41 won. Most of the value comes from the trades the agent declines.</a:t>
+              <a:t>So we reframed the product around protection. The agent passes by default: it declined about 90% of decision points. Retail briefs show the bid and ask next to our estimate, and when there is no order they say why: the gap after fees is too small or the price already moved. The Coach shows the full break-even after spread and fee. Risk limits and banned words are code the LLM cannot override, and all 9 / 9 planted violations were blocked. Even the learned rules ended up protective: skip long shots, and skip chasing a price that already moved.</a:t>
             </a:r>
           </a:p>
         </p:txBody>
@@ -726,7 +726,7 @@
           <a:lstStyle/>
           <a:p>
             <a:r>
-              <a:t>On safety: all 9 planted policy violations were blocked, including over-cap orders, post-tip orders, orders from the team and media channels, and 'guaranteed lock' copy. The replay never shows future information, we use public data only, and all money is paper money. On honesty: mean CLV is still slightly negative in every setup, so we avoid bad trades rather than beat the close. The kill switch is measured, not enforced; injury news is stamped 30 minutes before tip, which is conservative; and 'development rules frozen' equals 'no learning' because both development rules expired.</a:t>
+              <a:t>The Coach tab turns the same evidence into lessons. At a chosen moment it explains the game using only what was public, and shows the break-even after spread and fee. Lesson cards appear when the situation calls for them: a price is a probability, costs move your break-even, news may be priced in, long shots look cheap. Users make a paper call, see the closing price and what the agent did, and get feedback on habits. Paper money only.</a:t>
             </a:r>
           </a:p>
         </p:txBody>
@@ -796,7 +796,7 @@
           <a:lstStyle/>
           <a:p>
             <a:r>
-              <a:t>The Coach tab is for learners. At a chosen decision time it explains the game using only what was public then: the news, our model before and after, the market now versus 24 hours earlier, and the break-even price after spread and fee. Lesson cards are triggered by the situation. The user can back a team or pass with a paper stake, then see the closing price, result and what the agent did. It is educational and uses paper money only.</a:t>
+              <a:t>We want to be precise. Unfair here means structural disadvantages, namely costs, speed and expertise. It does not mean manipulation or fraud, and we make no accusation against Kalshi. Our sample is one season of public data and game-winner markets only, and the news timestamp is a proxy. The long-shot test is underpowered. Our statistical rigour work and the M6 market-impact model are in progress, so these numbers will be updated.</a:t>
             </a:r>
           </a:p>
         </p:txBody>
@@ -866,7 +866,7 @@
           <a:lstStyle/>
           <a:p>
             <a:r>
-              <a:t>Now the live demo. I'll start on the replayed night, where late news changes a status and the briefs and model-versus-market view update. Then the Coach tab, briefly the channel briefs, the learning tab with a rule the gate accepted, the safety tab with planted violations being blocked, and the models tab. If anything fails, we have a backup recording.</a:t>
+              <a:t>Now the demo, focused on protection. On the replayed night, watch the agent see the news, compare its estimate with the bid and ask, and usually decline with a reason. In the Coach, I'll make a paper call and compare it with the close. Then a quick look at the briefs, the learned rules, and planted violations being blocked. If anything fails, we have a backup recording.</a:t>
             </a:r>
           </a:p>
         </p:txBody>
@@ -936,7 +936,7 @@
           <a:lstStyle/>
           <a:p>
             <a:r>
-              <a:t>To conclude: the market is a stronger forecaster than our model, and we report that. By anchoring to the market and learning gated rules, test-period losses went from minus $2,087 to minus $32 on far fewer trades, while every planted safety violation was blocked. Next we would enforce a daily-loss stop, use timestamped injury reports, extend to player-prop markets, and evaluate the LLM mode against the offline rules. Thank you, we are happy to take questions.</a:t>
+              <a:t>Our recommendations follow from the evidence. Before any order, show the all-in cost and the break-even probability, not just the price. Warn by default when news is likely already priced in. Put education, like our Coach, in front of the first trade, with sensible default limits. For our own work, next we finish the statistical tests and M6, enforce a daily-loss stop, and use timestamped injury reports. Thank you, we are happy to take questions.</a:t>
             </a:r>
           </a:p>
         </p:txBody>
@@ -1006,7 +1006,7 @@
           <a:lstStyle/>
           <a:p>
             <a:r>
-              <a:t>Late news, such as a starter ruled out shortly before tip-off, changes who is likely to win. Prediction markets react to that news too, so the real question is whether an agent can act on public news before prices fully adjust. We also want it to score itself honestly against the market and learn from its mistakes. One forecast core serves several channels; they differ in the risk they may take, not in what they see.</a:t>
+              <a:t>Retail users see an injury headline and think the price is wrong. So we gave an agent every advantage a careful consumer could have: public news, trained models, an agent loop that can use an LLM, risk controls, and rules it learns from its own mistakes. We replayed a full season of real Kalshi prices. If this agent cannot beat the market after costs, a typical consumer is unlikely to.</a:t>
             </a:r>
           </a:p>
         </p:txBody>
@@ -1076,7 +1076,7 @@
           <a:lstStyle/>
           <a:p>
             <a:r>
-              <a:t>Here is the whole system. On the left is public data only: ESPN box scores and inactive lists for three seasons, and Kalshi game-winner prices for 2025-26, which is 1,316 games and about 3.9 million one-minute price rows. The models are trained once, then a replay walks through the season day by day and gives the agent an as-of view, so it can never see future information. The agent decides, reviews nightly, and its outputs go to channel briefs, paper orders with an audit log, the Coach, and our evaluation.</a:t>
+              <a:t>Briefly, the system. Public data on the left; models trained once; a replay that walks the season day by day and only shows the agent what was public at that moment; the agent that decides and reviews nightly; and outputs to channel briefs, paper orders, the Coach and evaluation. Because the replay uses recorded prices, every trade pays the real ask and the real Kalshi fee. That is what lets us measure what a consumer would actually face.</a:t>
             </a:r>
           </a:p>
         </p:txBody>
@@ -1146,7 +1146,7 @@
           <a:lstStyle/>
           <a:p>
             <a:r>
-              <a:t>We trained four models plus a wrapper. The GRU beats both baselines on pinball loss for points and minutes, and its 10-to-90 percent intervals cover about 80 percent of outcomes, which is what a calibrated interval should do. The play classifier beats simple rules on Brier score. Importantly, only M4, the win model, drives trades; M2 and M3 feed the briefs and player tables. M5 is the single as-of interface that the agent, replay and demo all call.</a:t>
+              <a:t>First, costs. At one hour before tip a $20 order pays half the bid-ask spread plus the Kalshi fee, seven percent times p times one minus p. On average that is 1.92 cents per contract, or 5.0% of the price, so you must be right that many points more often than the price says just to break even. On cheap contracts it is 9–14% of the price. On the right: our best agent would have made +$36 at the mid, but fees and spread turned that into −$32.</a:t>
             </a:r>
           </a:p>
         </p:txBody>
@@ -1216,7 +1216,7 @@
           <a:lstStyle/>
           <a:p>
             <a:r>
-              <a:t>We compared M4 to the Kalshi price on 501 test games. The market at tip has a Brier score of 0.163; M4 with absences known is 0.183. When the two disagree by more than five points, the market is the one that is right, in both directions. So the lesson was: do not trade the raw model. That shaped the whole trading design you will see next.</a:t>
+              <a:t>To clear that hurdle the agent has to be very selective. Of 771 decision points in the test period, only 153 showed a gap above 4 points after fees, and 74 became trades. Even then only 27 (36%) of those trades beat or matched the closing price. The close is the market's final answer, so beating it is the real test of an edge, and most trades did not.</a:t>
             </a:r>
           </a:p>
         </p:txBody>
@@ -1286,7 +1286,7 @@
           <a:lstStyle/>
           <a:p>
             <a:r>
-              <a:t>The agent is one LangGraph with two phases. Decide runs at every public news item in the six hours before tip and once at tip minus 60 minutes: investigate, forecast, analyse, then propose or take no action, then code checks with one retry, risk limits, and confirm or block. Review runs once a night: settle, the reviewer proposes one rule, and a separate gate decides whether it goes into the notebook. The LLM, Gemini, is optional and only used in investigate, analyse and review; by default everything runs offline and deterministically.</a:t>
+              <a:t>Second, speed. We took the 193 test games where the inactive list changed our win model by at least a point, and measured the price move in the direction of that news. From 24 hours before tip to the moment the list was public, the price had already moved 1.80 points; after it, only 0.18. So about 91% of the move happened before a retail user reading the list could act. Others had the information earlier.</a:t>
             </a:r>
           </a:p>
         </p:txBody>
@@ -1356,7 +1356,7 @@
           <a:lstStyle/>
           <a:p>
             <a:r>
-              <a:t>Because the market beats our model, we use the market as the base rate. The anchor is the market mid 24 hours before tip, and our estimate adds only M4's news shift. The gap is our probability for a side minus the price minus the Kalshi fee. We trade only if the gap is over 4 points, no notebook rule says skip, and we do not already hold the game. Risk caps are code: $50 per order, $100 per game, $300 per day, with a $20 stake.</a:t>
+              <a:t>Third, expertise. Our win model is a reasonable model, but on 501 test games its Brier score one hour before tip is 0.186, against 0.164 for the market at the same moment. Lower is better. When they disagree by more than five points, the market is right, in both directions. A consumer's gut feeling is usually a weaker model than ours.</a:t>
             </a:r>
           </a:p>
         </p:txBody>
@@ -1426,7 +1426,7 @@
           <a:lstStyle/>
           <a:p>
             <a:r>
-              <a:t>Here is one real trade from the test period. At 01:30 UTC the inactive list showed four Portland players out: Avdija, Henderson, Murray and Thybulle. The market had Portland at 42 percent 24 hours earlier; M4's news shift was minus 8.7 points, so our estimate was 33.8 percent. We bought Portland NO at 55 cents plus a 1.7 cent fee, a gap of 9.5 points. The price closed at 62.5 percent, so we beat the close by 7.5 cents, and Cleveland won 130 to 111 for a profit of $15.57.</a:t>
+              <a:t>Fourth, we checked for the classic long-shot bias, where cheap contracts win less often than their price implies. Honestly, our data does not clearly show it: prices are well calibrated, and only the cheapest bucket hints at it, with one win in 66 contracts priced around 7.4%. What does show is that long shots lose more per dollar, because costs are a bigger share of a cheap price: −13.4% for contracts at 25 cents or less, against −2.2% for heavy favourites.</a:t>
             </a:r>
           </a:p>
         </p:txBody>
@@ -1496,7 +1496,7 @@
           <a:lstStyle/>
           <a:p>
             <a:r>
-              <a:t>Every night the reviewer looks at the worst closing-line-value slice of settled trades and proposes one machine-checkable rule. The agent that writes a rule never approves it: the gate backtests it on earlier days only, and keeps it if mean CLV improves. Over the test period it proposed 37 rules and kept only 5, for example skip sides priced at or below 35 cents, and skip when the market has already moved 2 cents or more against us. In development it proposed 21 and kept 2.</a:t>
+              <a:t>Finally, outcomes on the test period, same prices for every setup. Trading the raw model loses −$2,087. Anchoring to the market cuts that to −$247, and our best agent with learning loses −$32 on 74 trades. Mean closing-line value is negative in every setup. Not trading at all scores zero and beats them all. Our interpretation, not a measurement: a consumer who trades whenever they disagree with the price looks like the raw-model row.</a:t>
             </a:r>
           </a:p>
         </p:txBody>
@@ -4598,8 +4598,8 @@
         </p:nvSpPr>
         <p:spPr>
           <a:xfrm>
-            <a:off x="822960" y="1188720"/>
-            <a:ext cx="10545775" cy="1737360"/>
+            <a:off x="822960" y="1005840"/>
+            <a:ext cx="10545775" cy="1828800"/>
           </a:xfrm>
           <a:prstGeom prst="rect">
             <a:avLst/>
@@ -4624,7 +4624,7 @@
                 </a:solidFill>
                 <a:latin typeface="Arial"/>
               </a:rPr>
-              <a:t>Market-Graded Learning for NBA Game-Impact Intelligence</a:t>
+              <a:t>Can a consumer beat a sports prediction market?</a:t>
             </a:r>
           </a:p>
         </p:txBody>
@@ -4637,8 +4637,8 @@
         </p:nvSpPr>
         <p:spPr>
           <a:xfrm>
-            <a:off x="822960" y="2926080"/>
-            <a:ext cx="10545775" cy="1097280"/>
+            <a:off x="822960" y="2834640"/>
+            <a:ext cx="10545775" cy="1188720"/>
           </a:xfrm>
           <a:prstGeom prst="rect">
             <a:avLst/>
@@ -4663,7 +4663,7 @@
                 </a:solidFill>
                 <a:latin typeface="Arial"/>
               </a:rPr>
-              <a:t>An agent that reads late injury news, grades itself against prediction-market prices, and learns rules only when they pass a backtest</a:t>
+              <a:t>What a serious NBA trading agent taught us about structural unfairness, and a product that protects and educates instead</a:t>
             </a:r>
           </a:p>
         </p:txBody>
@@ -4676,8 +4676,8 @@
         </p:nvSpPr>
         <p:spPr>
           <a:xfrm>
-            <a:off x="822960" y="4480560"/>
-            <a:ext cx="10545775" cy="1463040"/>
+            <a:off x="822960" y="4434840"/>
+            <a:ext cx="10545775" cy="1737360"/>
           </a:xfrm>
           <a:prstGeom prst="rect">
             <a:avLst/>
@@ -4689,6 +4689,22 @@
             <a:spAutoFit/>
           </a:bodyPr>
           <a:lstStyle/>
+          <a:p>
+            <a:pPr algn="l">
+              <a:spcAft>
+                <a:spcPts val="800"/>
+              </a:spcAft>
+            </a:pPr>
+            <a:r>
+              <a:rPr sz="2000" b="0" i="0">
+                <a:solidFill>
+                  <a:srgbClr val="FFFFFF"/>
+                </a:solidFill>
+                <a:latin typeface="Arial"/>
+              </a:rPr>
+              <a:t>Market-Graded Learning for NBA Game-Impact Intelligence</a:t>
+            </a:r>
+          </a:p>
           <a:p>
             <a:pPr algn="l">
               <a:spcAft>
@@ -4863,7 +4879,7 @@
                 </a:solidFill>
                 <a:latin typeface="Arial"/>
               </a:rPr>
-              <a:t>Results on the test period (1 Feb – 12 Apr 2026)</a:t>
+              <a:t>Context: who sits on the other side?</a:t>
             </a:r>
           </a:p>
         </p:txBody>
@@ -4902,7 +4918,7 @@
                 </a:solidFill>
                 <a:latin typeface="Arial"/>
               </a:rPr>
-              <a:t>DASC7606C Group 12 · Market-Graded Learning for NBA Game-Impact Intelligence</a:t>
+              <a:t>DASC7606C Group 12 · Can a consumer beat a sports prediction market?</a:t>
             </a:r>
           </a:p>
         </p:txBody>
@@ -4946,663 +4962,232 @@
           </a:p>
         </p:txBody>
       </p:sp>
-      <p:pic>
-        <p:nvPicPr>
-          <p:cNvPr id="7" name="Picture 6" descr="headline_clv.png"/>
-          <p:cNvPicPr>
-            <a:picLocks noChangeAspect="1"/>
-          </p:cNvPicPr>
-          <p:nvPr/>
-        </p:nvPicPr>
-        <p:blipFill>
-          <a:blip r:embed="rId3"/>
-          <a:stretch>
-            <a:fillRect/>
-          </a:stretch>
-        </p:blipFill>
-        <p:spPr>
-          <a:xfrm>
-            <a:off x="457200" y="1168717"/>
-            <a:ext cx="5760719" cy="3240404"/>
-          </a:xfrm>
-          <a:prstGeom prst="rect">
-            <a:avLst/>
-          </a:prstGeom>
-        </p:spPr>
-      </p:pic>
-      <p:graphicFrame>
-        <p:nvGraphicFramePr>
-          <p:cNvPr id="8" name="Table 7"/>
-          <p:cNvGraphicFramePr>
-            <a:graphicFrameLocks noGrp="1"/>
-          </p:cNvGraphicFramePr>
-          <p:nvPr/>
-        </p:nvGraphicFramePr>
-        <p:xfrm>
-          <a:off x="6355080" y="1188720"/>
-          <a:ext cx="5788151" cy="3017520"/>
-        </p:xfrm>
-        <a:graphic>
-          <a:graphicData uri="http://schemas.openxmlformats.org/drawingml/2006/table">
-            <a:tbl>
-              <a:tblPr firstRow="1" bandRow="1">
-                <a:tableStyleId>{5C22544A-7EE6-4342-B048-85BDC9FD1C3A}</a:tableStyleId>
-              </a:tblPr>
-              <a:tblGrid>
-                <a:gridCol w="2103120"/>
-                <a:gridCol w="822960"/>
-                <a:gridCol w="960120"/>
-                <a:gridCol w="868680"/>
-                <a:gridCol w="1033271"/>
-              </a:tblGrid>
-              <a:tr h="457200">
-                <a:tc>
-                  <a:txBody>
-                    <a:bodyPr wrap="square"/>
-                    <a:lstStyle/>
-                    <a:p>
-                      <a:pPr algn="l"/>
-                      <a:r>
-                        <a:rPr sz="1600" b="1" i="0">
-                          <a:solidFill>
-                            <a:srgbClr val="FFFFFF"/>
-                          </a:solidFill>
-                          <a:latin typeface="Arial"/>
-                        </a:rPr>
-                        <a:t>Setup</a:t>
-                      </a:r>
-                    </a:p>
-                  </a:txBody>
-                  <a:tcPr marL="73152" marR="73152" marT="36576" marB="36576" anchor="ctr">
-                    <a:solidFill>
-                      <a:srgbClr val="1E293B"/>
-                    </a:solidFill>
-                  </a:tcPr>
-                </a:tc>
-                <a:tc>
-                  <a:txBody>
-                    <a:bodyPr wrap="square"/>
-                    <a:lstStyle/>
-                    <a:p>
-                      <a:pPr algn="ctr"/>
-                      <a:r>
-                        <a:rPr sz="1600" b="1" i="0">
-                          <a:solidFill>
-                            <a:srgbClr val="FFFFFF"/>
-                          </a:solidFill>
-                          <a:latin typeface="Arial"/>
-                        </a:rPr>
-                        <a:t>Trades</a:t>
-                      </a:r>
-                    </a:p>
-                  </a:txBody>
-                  <a:tcPr marL="73152" marR="73152" marT="36576" marB="36576" anchor="ctr">
-                    <a:solidFill>
-                      <a:srgbClr val="1E293B"/>
-                    </a:solidFill>
-                  </a:tcPr>
-                </a:tc>
-                <a:tc>
-                  <a:txBody>
-                    <a:bodyPr wrap="square"/>
-                    <a:lstStyle/>
-                    <a:p>
-                      <a:pPr algn="ctr"/>
-                      <a:r>
-                        <a:rPr sz="1600" b="1" i="0">
-                          <a:solidFill>
-                            <a:srgbClr val="FFFFFF"/>
-                          </a:solidFill>
-                          <a:latin typeface="Arial"/>
-                        </a:rPr>
-                        <a:t>P&amp;L</a:t>
-                      </a:r>
-                    </a:p>
-                  </a:txBody>
-                  <a:tcPr marL="73152" marR="73152" marT="36576" marB="36576" anchor="ctr">
-                    <a:solidFill>
-                      <a:srgbClr val="1E293B"/>
-                    </a:solidFill>
-                  </a:tcPr>
-                </a:tc>
-                <a:tc>
-                  <a:txBody>
-                    <a:bodyPr wrap="square"/>
-                    <a:lstStyle/>
-                    <a:p>
-                      <a:pPr algn="ctr"/>
-                      <a:r>
-                        <a:rPr sz="1600" b="1" i="0">
-                          <a:solidFill>
-                            <a:srgbClr val="FFFFFF"/>
-                          </a:solidFill>
-                          <a:latin typeface="Arial"/>
-                        </a:rPr>
-                        <a:t>ROI</a:t>
-                      </a:r>
-                    </a:p>
-                  </a:txBody>
-                  <a:tcPr marL="73152" marR="73152" marT="36576" marB="36576" anchor="ctr">
-                    <a:solidFill>
-                      <a:srgbClr val="1E293B"/>
-                    </a:solidFill>
-                  </a:tcPr>
-                </a:tc>
-                <a:tc>
-                  <a:txBody>
-                    <a:bodyPr wrap="square"/>
-                    <a:lstStyle/>
-                    <a:p>
-                      <a:pPr algn="ctr"/>
-                      <a:r>
-                        <a:rPr sz="1600" b="1" i="0">
-                          <a:solidFill>
-                            <a:srgbClr val="FFFFFF"/>
-                          </a:solidFill>
-                          <a:latin typeface="Arial"/>
-                        </a:rPr>
-                        <a:t>Max DD</a:t>
-                      </a:r>
-                    </a:p>
-                  </a:txBody>
-                  <a:tcPr marL="73152" marR="73152" marT="36576" marB="36576" anchor="ctr">
-                    <a:solidFill>
-                      <a:srgbClr val="1E293B"/>
-                    </a:solidFill>
-                  </a:tcPr>
-                </a:tc>
-              </a:tr>
-              <a:tr h="640080">
-                <a:tc>
-                  <a:txBody>
-                    <a:bodyPr wrap="square"/>
-                    <a:lstStyle/>
-                    <a:p>
-                      <a:pPr algn="l"/>
-                      <a:r>
-                        <a:rPr sz="1600" b="1" i="0">
-                          <a:solidFill>
-                            <a:srgbClr val="0F172A"/>
-                          </a:solidFill>
-                          <a:latin typeface="Arial"/>
-                        </a:rPr>
-                        <a:t>Full agent</a:t>
-                      </a:r>
-                      <a:r>
-                        <a:rPr sz="1600" b="0" i="0">
-                          <a:solidFill>
-                            <a:srgbClr val="0F172A"/>
-                          </a:solidFill>
-                          <a:latin typeface="Arial"/>
-                        </a:rPr>
-                        <a:t> (anchor + learning)</a:t>
-                      </a:r>
-                    </a:p>
-                  </a:txBody>
-                  <a:tcPr marL="73152" marR="73152" marT="36576" marB="36576" anchor="ctr">
-                    <a:solidFill>
-                      <a:srgbClr val="DCFCE7"/>
-                    </a:solidFill>
-                  </a:tcPr>
-                </a:tc>
-                <a:tc>
-                  <a:txBody>
-                    <a:bodyPr wrap="square"/>
-                    <a:lstStyle/>
-                    <a:p>
-                      <a:pPr algn="ctr"/>
-                      <a:r>
-                        <a:rPr sz="1600" b="1" i="0">
-                          <a:solidFill>
-                            <a:srgbClr val="0F172A"/>
-                          </a:solidFill>
-                          <a:latin typeface="Arial"/>
-                        </a:rPr>
-                        <a:t>74</a:t>
-                      </a:r>
-                    </a:p>
-                  </a:txBody>
-                  <a:tcPr marL="73152" marR="73152" marT="36576" marB="36576" anchor="ctr">
-                    <a:solidFill>
-                      <a:srgbClr val="DCFCE7"/>
-                    </a:solidFill>
-                  </a:tcPr>
-                </a:tc>
-                <a:tc>
-                  <a:txBody>
-                    <a:bodyPr wrap="square"/>
-                    <a:lstStyle/>
-                    <a:p>
-                      <a:pPr algn="ctr"/>
-                      <a:r>
-                        <a:rPr sz="1600" b="1" i="0">
-                          <a:solidFill>
-                            <a:srgbClr val="0F172A"/>
-                          </a:solidFill>
-                          <a:latin typeface="Arial"/>
-                        </a:rPr>
-                        <a:t>−$32</a:t>
-                      </a:r>
-                    </a:p>
-                  </a:txBody>
-                  <a:tcPr marL="73152" marR="73152" marT="36576" marB="36576" anchor="ctr">
-                    <a:solidFill>
-                      <a:srgbClr val="DCFCE7"/>
-                    </a:solidFill>
-                  </a:tcPr>
-                </a:tc>
-                <a:tc>
-                  <a:txBody>
-                    <a:bodyPr wrap="square"/>
-                    <a:lstStyle/>
-                    <a:p>
-                      <a:pPr algn="ctr"/>
-                      <a:r>
-                        <a:rPr sz="1600" b="1" i="0">
-                          <a:solidFill>
-                            <a:srgbClr val="0F172A"/>
-                          </a:solidFill>
-                          <a:latin typeface="Arial"/>
-                        </a:rPr>
-                        <a:t>−2.2%</a:t>
-                      </a:r>
-                    </a:p>
-                  </a:txBody>
-                  <a:tcPr marL="73152" marR="73152" marT="36576" marB="36576" anchor="ctr">
-                    <a:solidFill>
-                      <a:srgbClr val="DCFCE7"/>
-                    </a:solidFill>
-                  </a:tcPr>
-                </a:tc>
-                <a:tc>
-                  <a:txBody>
-                    <a:bodyPr wrap="square"/>
-                    <a:lstStyle/>
-                    <a:p>
-                      <a:pPr algn="ctr"/>
-                      <a:r>
-                        <a:rPr sz="1600" b="1" i="0">
-                          <a:solidFill>
-                            <a:srgbClr val="0F172A"/>
-                          </a:solidFill>
-                          <a:latin typeface="Arial"/>
-                        </a:rPr>
-                        <a:t>$195</a:t>
-                      </a:r>
-                    </a:p>
-                  </a:txBody>
-                  <a:tcPr marL="73152" marR="73152" marT="36576" marB="36576" anchor="ctr">
-                    <a:solidFill>
-                      <a:srgbClr val="DCFCE7"/>
-                    </a:solidFill>
-                  </a:tcPr>
-                </a:tc>
-              </a:tr>
-              <a:tr h="640080">
-                <a:tc>
-                  <a:txBody>
-                    <a:bodyPr wrap="square"/>
-                    <a:lstStyle/>
-                    <a:p>
-                      <a:pPr algn="l"/>
-                      <a:r>
-                        <a:rPr sz="1600" b="0" i="0">
-                          <a:solidFill>
-                            <a:srgbClr val="0F172A"/>
-                          </a:solidFill>
-                          <a:latin typeface="Arial"/>
-                        </a:rPr>
-                        <a:t>Anchor, no learning</a:t>
-                      </a:r>
-                    </a:p>
-                  </a:txBody>
-                  <a:tcPr marL="73152" marR="73152" marT="36576" marB="36576" anchor="ctr">
-                    <a:solidFill>
-                      <a:srgbClr val="FFFFFF"/>
-                    </a:solidFill>
-                  </a:tcPr>
-                </a:tc>
-                <a:tc>
-                  <a:txBody>
-                    <a:bodyPr wrap="square"/>
-                    <a:lstStyle/>
-                    <a:p>
-                      <a:pPr algn="ctr"/>
-                      <a:r>
-                        <a:rPr sz="1600" b="0" i="0">
-                          <a:solidFill>
-                            <a:srgbClr val="0F172A"/>
-                          </a:solidFill>
-                          <a:latin typeface="Arial"/>
-                        </a:rPr>
-                        <a:t>129</a:t>
-                      </a:r>
-                    </a:p>
-                  </a:txBody>
-                  <a:tcPr marL="73152" marR="73152" marT="36576" marB="36576" anchor="ctr">
-                    <a:solidFill>
-                      <a:srgbClr val="FFFFFF"/>
-                    </a:solidFill>
-                  </a:tcPr>
-                </a:tc>
-                <a:tc>
-                  <a:txBody>
-                    <a:bodyPr wrap="square"/>
-                    <a:lstStyle/>
-                    <a:p>
-                      <a:pPr algn="ctr"/>
-                      <a:r>
-                        <a:rPr sz="1600" b="0" i="0">
-                          <a:solidFill>
-                            <a:srgbClr val="0F172A"/>
-                          </a:solidFill>
-                          <a:latin typeface="Arial"/>
-                        </a:rPr>
-                        <a:t>−$247</a:t>
-                      </a:r>
-                    </a:p>
-                  </a:txBody>
-                  <a:tcPr marL="73152" marR="73152" marT="36576" marB="36576" anchor="ctr">
-                    <a:solidFill>
-                      <a:srgbClr val="FFFFFF"/>
-                    </a:solidFill>
-                  </a:tcPr>
-                </a:tc>
-                <a:tc>
-                  <a:txBody>
-                    <a:bodyPr wrap="square"/>
-                    <a:lstStyle/>
-                    <a:p>
-                      <a:pPr algn="ctr"/>
-                      <a:r>
-                        <a:rPr sz="1600" b="0" i="0">
-                          <a:solidFill>
-                            <a:srgbClr val="0F172A"/>
-                          </a:solidFill>
-                          <a:latin typeface="Arial"/>
-                        </a:rPr>
-                        <a:t>−9.7%</a:t>
-                      </a:r>
-                    </a:p>
-                  </a:txBody>
-                  <a:tcPr marL="73152" marR="73152" marT="36576" marB="36576" anchor="ctr">
-                    <a:solidFill>
-                      <a:srgbClr val="FFFFFF"/>
-                    </a:solidFill>
-                  </a:tcPr>
-                </a:tc>
-                <a:tc>
-                  <a:txBody>
-                    <a:bodyPr wrap="square"/>
-                    <a:lstStyle/>
-                    <a:p>
-                      <a:pPr algn="ctr"/>
-                      <a:r>
-                        <a:rPr sz="1600" b="0" i="0">
-                          <a:solidFill>
-                            <a:srgbClr val="0F172A"/>
-                          </a:solidFill>
-                          <a:latin typeface="Arial"/>
-                        </a:rPr>
-                        <a:t>$439</a:t>
-                      </a:r>
-                    </a:p>
-                  </a:txBody>
-                  <a:tcPr marL="73152" marR="73152" marT="36576" marB="36576" anchor="ctr">
-                    <a:solidFill>
-                      <a:srgbClr val="FFFFFF"/>
-                    </a:solidFill>
-                  </a:tcPr>
-                </a:tc>
-              </a:tr>
-              <a:tr h="640080">
-                <a:tc>
-                  <a:txBody>
-                    <a:bodyPr wrap="square"/>
-                    <a:lstStyle/>
-                    <a:p>
-                      <a:pPr algn="l"/>
-                      <a:r>
-                        <a:rPr sz="1600" b="0" i="0">
-                          <a:solidFill>
-                            <a:srgbClr val="0F172A"/>
-                          </a:solidFill>
-                          <a:latin typeface="Arial"/>
-                        </a:rPr>
-                        <a:t>Win-rate placeholder model</a:t>
-                      </a:r>
-                    </a:p>
-                  </a:txBody>
-                  <a:tcPr marL="73152" marR="73152" marT="36576" marB="36576" anchor="ctr">
-                    <a:solidFill>
-                      <a:srgbClr val="F1F5F9"/>
-                    </a:solidFill>
-                  </a:tcPr>
-                </a:tc>
-                <a:tc>
-                  <a:txBody>
-                    <a:bodyPr wrap="square"/>
-                    <a:lstStyle/>
-                    <a:p>
-                      <a:pPr algn="ctr"/>
-                      <a:r>
-                        <a:rPr sz="1600" b="0" i="0">
-                          <a:solidFill>
-                            <a:srgbClr val="0F172A"/>
-                          </a:solidFill>
-                          <a:latin typeface="Arial"/>
-                        </a:rPr>
-                        <a:t>246</a:t>
-                      </a:r>
-                    </a:p>
-                  </a:txBody>
-                  <a:tcPr marL="73152" marR="73152" marT="36576" marB="36576" anchor="ctr">
-                    <a:solidFill>
-                      <a:srgbClr val="F1F5F9"/>
-                    </a:solidFill>
-                  </a:tcPr>
-                </a:tc>
-                <a:tc>
-                  <a:txBody>
-                    <a:bodyPr wrap="square"/>
-                    <a:lstStyle/>
-                    <a:p>
-                      <a:pPr algn="ctr"/>
-                      <a:r>
-                        <a:rPr sz="1600" b="0" i="0">
-                          <a:solidFill>
-                            <a:srgbClr val="0F172A"/>
-                          </a:solidFill>
-                          <a:latin typeface="Arial"/>
-                        </a:rPr>
-                        <a:t>−$429</a:t>
-                      </a:r>
-                    </a:p>
-                  </a:txBody>
-                  <a:tcPr marL="73152" marR="73152" marT="36576" marB="36576" anchor="ctr">
-                    <a:solidFill>
-                      <a:srgbClr val="F1F5F9"/>
-                    </a:solidFill>
-                  </a:tcPr>
-                </a:tc>
-                <a:tc>
-                  <a:txBody>
-                    <a:bodyPr wrap="square"/>
-                    <a:lstStyle/>
-                    <a:p>
-                      <a:pPr algn="ctr"/>
-                      <a:r>
-                        <a:rPr sz="1600" b="0" i="0">
-                          <a:solidFill>
-                            <a:srgbClr val="0F172A"/>
-                          </a:solidFill>
-                          <a:latin typeface="Arial"/>
-                        </a:rPr>
-                        <a:t>−8.9%</a:t>
-                      </a:r>
-                    </a:p>
-                  </a:txBody>
-                  <a:tcPr marL="73152" marR="73152" marT="36576" marB="36576" anchor="ctr">
-                    <a:solidFill>
-                      <a:srgbClr val="F1F5F9"/>
-                    </a:solidFill>
-                  </a:tcPr>
-                </a:tc>
-                <a:tc>
-                  <a:txBody>
-                    <a:bodyPr wrap="square"/>
-                    <a:lstStyle/>
-                    <a:p>
-                      <a:pPr algn="ctr"/>
-                      <a:r>
-                        <a:rPr sz="1600" b="0" i="0">
-                          <a:solidFill>
-                            <a:srgbClr val="0F172A"/>
-                          </a:solidFill>
-                          <a:latin typeface="Arial"/>
-                        </a:rPr>
-                        <a:t>$599</a:t>
-                      </a:r>
-                    </a:p>
-                  </a:txBody>
-                  <a:tcPr marL="73152" marR="73152" marT="36576" marB="36576" anchor="ctr">
-                    <a:solidFill>
-                      <a:srgbClr val="F1F5F9"/>
-                    </a:solidFill>
-                  </a:tcPr>
-                </a:tc>
-              </a:tr>
-              <a:tr h="640080">
-                <a:tc>
-                  <a:txBody>
-                    <a:bodyPr wrap="square"/>
-                    <a:lstStyle/>
-                    <a:p>
-                      <a:pPr algn="l"/>
-                      <a:r>
-                        <a:rPr sz="1600" b="0" i="0">
-                          <a:solidFill>
-                            <a:srgbClr val="0F172A"/>
-                          </a:solidFill>
-                          <a:latin typeface="Arial"/>
-                        </a:rPr>
-                        <a:t>Raw model / no agent</a:t>
-                      </a:r>
-                    </a:p>
-                  </a:txBody>
-                  <a:tcPr marL="73152" marR="73152" marT="36576" marB="36576" anchor="ctr">
-                    <a:solidFill>
-                      <a:srgbClr val="FFFFFF"/>
-                    </a:solidFill>
-                  </a:tcPr>
-                </a:tc>
-                <a:tc>
-                  <a:txBody>
-                    <a:bodyPr wrap="square"/>
-                    <a:lstStyle/>
-                    <a:p>
-                      <a:pPr algn="ctr"/>
-                      <a:r>
-                        <a:rPr sz="1600" b="0" i="0">
-                          <a:solidFill>
-                            <a:srgbClr val="0F172A"/>
-                          </a:solidFill>
-                          <a:latin typeface="Arial"/>
-                        </a:rPr>
-                        <a:t>366</a:t>
-                      </a:r>
-                    </a:p>
-                  </a:txBody>
-                  <a:tcPr marL="73152" marR="73152" marT="36576" marB="36576" anchor="ctr">
-                    <a:solidFill>
-                      <a:srgbClr val="FFFFFF"/>
-                    </a:solidFill>
-                  </a:tcPr>
-                </a:tc>
-                <a:tc>
-                  <a:txBody>
-                    <a:bodyPr wrap="square"/>
-                    <a:lstStyle/>
-                    <a:p>
-                      <a:pPr algn="ctr"/>
-                      <a:r>
-                        <a:rPr sz="1600" b="0" i="0">
-                          <a:solidFill>
-                            <a:srgbClr val="0F172A"/>
-                          </a:solidFill>
-                          <a:latin typeface="Arial"/>
-                        </a:rPr>
-                        <a:t>−$2,087</a:t>
-                      </a:r>
-                    </a:p>
-                  </a:txBody>
-                  <a:tcPr marL="73152" marR="73152" marT="36576" marB="36576" anchor="ctr">
-                    <a:solidFill>
-                      <a:srgbClr val="FFFFFF"/>
-                    </a:solidFill>
-                  </a:tcPr>
-                </a:tc>
-                <a:tc>
-                  <a:txBody>
-                    <a:bodyPr wrap="square"/>
-                    <a:lstStyle/>
-                    <a:p>
-                      <a:pPr algn="ctr"/>
-                      <a:r>
-                        <a:rPr sz="1600" b="0" i="0">
-                          <a:solidFill>
-                            <a:srgbClr val="0F172A"/>
-                          </a:solidFill>
-                          <a:latin typeface="Arial"/>
-                        </a:rPr>
-                        <a:t>−28.8%</a:t>
-                      </a:r>
-                    </a:p>
-                  </a:txBody>
-                  <a:tcPr marL="73152" marR="73152" marT="36576" marB="36576" anchor="ctr">
-                    <a:solidFill>
-                      <a:srgbClr val="FFFFFF"/>
-                    </a:solidFill>
-                  </a:tcPr>
-                </a:tc>
-                <a:tc>
-                  <a:txBody>
-                    <a:bodyPr wrap="square"/>
-                    <a:lstStyle/>
-                    <a:p>
-                      <a:pPr algn="ctr"/>
-                      <a:r>
-                        <a:rPr sz="1600" b="0" i="0">
-                          <a:solidFill>
-                            <a:srgbClr val="0F172A"/>
-                          </a:solidFill>
-                          <a:latin typeface="Arial"/>
-                        </a:rPr>
-                        <a:t>$2,326</a:t>
-                      </a:r>
-                    </a:p>
-                  </a:txBody>
-                  <a:tcPr marL="73152" marR="73152" marT="36576" marB="36576" anchor="ctr">
-                    <a:solidFill>
-                      <a:srgbClr val="FFFFFF"/>
-                    </a:solidFill>
-                  </a:tcPr>
-                </a:tc>
-              </a:tr>
-            </a:tbl>
-          </a:graphicData>
-        </a:graphic>
-      </p:graphicFrame>
-      <p:sp>
-        <p:nvSpPr>
-          <p:cNvPr id="9" name="TextBox 8"/>
+      <p:sp>
+        <p:nvSpPr>
+          <p:cNvPr id="7" name="Rounded Rectangle 6"/>
+          <p:cNvSpPr/>
+          <p:nvPr/>
+        </p:nvSpPr>
+        <p:spPr>
+          <a:xfrm>
+            <a:off x="457200" y="1234439"/>
+            <a:ext cx="11277295" cy="548640"/>
+          </a:xfrm>
+          <a:prstGeom prst="roundRect">
+            <a:avLst>
+              <a:gd name="adj" fmla="val 12000"/>
+            </a:avLst>
+          </a:prstGeom>
+          <a:solidFill>
+            <a:srgbClr val="FEE2E2"/>
+          </a:solidFill>
+          <a:ln>
+            <a:noFill/>
+          </a:ln>
+          <a:effectLst/>
+        </p:spPr>
+        <p:style>
+          <a:lnRef idx="1">
+            <a:schemeClr val="accent1"/>
+          </a:lnRef>
+          <a:fillRef idx="3">
+            <a:schemeClr val="accent1"/>
+          </a:fillRef>
+          <a:effectRef idx="2">
+            <a:schemeClr val="accent1"/>
+          </a:effectRef>
+          <a:fontRef idx="minor">
+            <a:schemeClr val="lt1"/>
+          </a:fontRef>
+        </p:style>
+        <p:txBody>
+          <a:bodyPr rtlCol="0" anchor="ctr"/>
+          <a:lstStyle/>
+          <a:p>
+            <a:pPr algn="ctr"/>
+          </a:p>
+        </p:txBody>
+      </p:sp>
+      <p:sp>
+        <p:nvSpPr>
+          <p:cNvPr id="8" name="TextBox 7"/>
           <p:cNvSpPr txBox="1"/>
           <p:nvPr/>
         </p:nvSpPr>
         <p:spPr>
           <a:xfrm>
-            <a:off x="457200" y="4572000"/>
-            <a:ext cx="11277295" cy="1737360"/>
+            <a:off x="548640" y="1234439"/>
+            <a:ext cx="11094415" cy="548640"/>
+          </a:xfrm>
+          <a:prstGeom prst="rect">
+            <a:avLst/>
+          </a:prstGeom>
+          <a:noFill/>
+        </p:spPr>
+        <p:txBody>
+          <a:bodyPr wrap="square" anchor="ctr" lIns="73152" rIns="73152" tIns="36576" bIns="36576">
+            <a:spAutoFit/>
+          </a:bodyPr>
+          <a:lstStyle/>
+          <a:p>
+            <a:pPr algn="l">
+              <a:spcAft>
+                <a:spcPts val="0"/>
+              </a:spcAft>
+            </a:pPr>
+            <a:r>
+              <a:rPr sz="2000" b="0" i="0">
+                <a:solidFill>
+                  <a:srgbClr val="DC2626"/>
+                </a:solidFill>
+                <a:latin typeface="Arial"/>
+              </a:rPr>
+              <a:t>General industry knowledge: NOT measured in this project</a:t>
+            </a:r>
+          </a:p>
+        </p:txBody>
+      </p:sp>
+      <p:sp>
+        <p:nvSpPr>
+          <p:cNvPr id="9" name="Rounded Rectangle 8"/>
+          <p:cNvSpPr/>
+          <p:nvPr/>
+        </p:nvSpPr>
+        <p:spPr>
+          <a:xfrm>
+            <a:off x="457200" y="2011680"/>
+            <a:ext cx="5440680" cy="4206240"/>
+          </a:xfrm>
+          <a:prstGeom prst="roundRect">
+            <a:avLst>
+              <a:gd name="adj" fmla="val 6000"/>
+            </a:avLst>
+          </a:prstGeom>
+          <a:solidFill>
+            <a:srgbClr val="FFFFFF"/>
+          </a:solidFill>
+          <a:ln w="15875">
+            <a:solidFill>
+              <a:srgbClr val="1E293B"/>
+            </a:solidFill>
+          </a:ln>
+          <a:effectLst/>
+        </p:spPr>
+        <p:style>
+          <a:lnRef idx="1">
+            <a:schemeClr val="accent1"/>
+          </a:lnRef>
+          <a:fillRef idx="3">
+            <a:schemeClr val="accent1"/>
+          </a:fillRef>
+          <a:effectRef idx="2">
+            <a:schemeClr val="accent1"/>
+          </a:effectRef>
+          <a:fontRef idx="minor">
+            <a:schemeClr val="lt1"/>
+          </a:fontRef>
+        </p:style>
+        <p:txBody>
+          <a:bodyPr rtlCol="0" anchor="ctr"/>
+          <a:lstStyle/>
+          <a:p>
+            <a:pPr algn="ctr"/>
+          </a:p>
+        </p:txBody>
+      </p:sp>
+      <p:sp>
+        <p:nvSpPr>
+          <p:cNvPr id="10" name="Rectangle 9"/>
+          <p:cNvSpPr/>
+          <p:nvPr/>
+        </p:nvSpPr>
+        <p:spPr>
+          <a:xfrm>
+            <a:off x="457200" y="2011680"/>
+            <a:ext cx="109728" cy="4206240"/>
+          </a:xfrm>
+          <a:prstGeom prst="rect">
+            <a:avLst/>
+          </a:prstGeom>
+          <a:solidFill>
+            <a:srgbClr val="1E293B"/>
+          </a:solidFill>
+          <a:ln>
+            <a:noFill/>
+          </a:ln>
+          <a:effectLst/>
+        </p:spPr>
+        <p:style>
+          <a:lnRef idx="1">
+            <a:schemeClr val="accent1"/>
+          </a:lnRef>
+          <a:fillRef idx="3">
+            <a:schemeClr val="accent1"/>
+          </a:fillRef>
+          <a:effectRef idx="2">
+            <a:schemeClr val="accent1"/>
+          </a:effectRef>
+          <a:fontRef idx="minor">
+            <a:schemeClr val="lt1"/>
+          </a:fontRef>
+        </p:style>
+        <p:txBody>
+          <a:bodyPr rtlCol="0" anchor="ctr"/>
+          <a:lstStyle/>
+          <a:p>
+            <a:pPr algn="ctr"/>
+          </a:p>
+        </p:txBody>
+      </p:sp>
+      <p:sp>
+        <p:nvSpPr>
+          <p:cNvPr id="11" name="TextBox 10"/>
+          <p:cNvSpPr txBox="1"/>
+          <p:nvPr/>
+        </p:nvSpPr>
+        <p:spPr>
+          <a:xfrm>
+            <a:off x="640080" y="2084832"/>
+            <a:ext cx="5166360" cy="457200"/>
+          </a:xfrm>
+          <a:prstGeom prst="rect">
+            <a:avLst/>
+          </a:prstGeom>
+          <a:noFill/>
+        </p:spPr>
+        <p:txBody>
+          <a:bodyPr wrap="square" anchor="t" lIns="73152" rIns="73152" tIns="36576" bIns="36576">
+            <a:spAutoFit/>
+          </a:bodyPr>
+          <a:lstStyle/>
+          <a:p>
+            <a:pPr algn="l">
+              <a:spcAft>
+                <a:spcPts val="0"/>
+              </a:spcAft>
+            </a:pPr>
+            <a:r>
+              <a:rPr sz="2000" b="1" i="0">
+                <a:solidFill>
+                  <a:srgbClr val="1E293B"/>
+                </a:solidFill>
+                <a:latin typeface="Arial"/>
+              </a:rPr>
+              <a:t>Professionals / market makers</a:t>
+            </a:r>
+          </a:p>
+        </p:txBody>
+      </p:sp>
+      <p:sp>
+        <p:nvSpPr>
+          <p:cNvPr id="12" name="TextBox 11"/>
+          <p:cNvSpPr txBox="1"/>
+          <p:nvPr/>
+        </p:nvSpPr>
+        <p:spPr>
+          <a:xfrm>
+            <a:off x="640080" y="2542032"/>
+            <a:ext cx="5166360" cy="3602735"/>
           </a:xfrm>
           <a:prstGeom prst="rect">
             <a:avLst/>
@@ -5628,7 +5213,7 @@
                 </a:solidFill>
                 <a:latin typeface="Arial"/>
               </a:rPr>
-              <a:t>Same recorded Kalshi prices for every setup; $20 stake; fills at the ask + fee, capped by volume</a:t>
+              <a:t>Low-latency data feeds and automated pricing</a:t>
             </a:r>
           </a:p>
           <a:p>
@@ -5645,25 +5230,7 @@
                 </a:solidFill>
                 <a:latin typeface="Arial"/>
               </a:rPr>
-              <a:t>Raw model / no agent: </a:t>
-            </a:r>
-            <a:r>
-              <a:rPr sz="1800" b="1" i="0">
-                <a:solidFill>
-                  <a:srgbClr val="0F172A"/>
-                </a:solidFill>
-                <a:latin typeface="Arial"/>
-              </a:rPr>
-              <a:t>10 kill-switch days</a:t>
-            </a:r>
-            <a:r>
-              <a:rPr sz="1800" b="0" i="0">
-                <a:solidFill>
-                  <a:srgbClr val="0F172A"/>
-                </a:solidFill>
-                <a:latin typeface="Arial"/>
-              </a:rPr>
-              <a:t> (days losing &gt; $100); the full agent: 0</a:t>
+              <a:t>Specialist models, staff and capital</a:t>
             </a:r>
           </a:p>
           <a:p>
@@ -5680,16 +5247,246 @@
                 </a:solidFill>
                 <a:latin typeface="Arial"/>
               </a:rPr>
-              <a:t>Raw model → market anchor → anchor + learning: </a:t>
-            </a:r>
-            <a:r>
-              <a:rPr sz="1800" b="1" i="0">
+              <a:t>On many venues, maker fee or liquidity programmes</a:t>
+            </a:r>
+          </a:p>
+          <a:p>
+            <a:pPr algn="l" marL="292608" indent="-256032">
+              <a:spcAft>
+                <a:spcPts val="600"/>
+              </a:spcAft>
+              <a:buChar char="•"/>
+            </a:pPr>
+            <a:r>
+              <a:rPr sz="1800" b="0" i="0">
                 <a:solidFill>
                   <a:srgbClr val="0F172A"/>
                 </a:solidFill>
                 <a:latin typeface="Arial"/>
               </a:rPr>
-              <a:t>−$2,087 → −$247 → −$32</a:t>
+              <a:t>Post prices, so they earn the spread</a:t>
+            </a:r>
+          </a:p>
+        </p:txBody>
+      </p:sp>
+      <p:sp>
+        <p:nvSpPr>
+          <p:cNvPr id="13" name="Rounded Rectangle 12"/>
+          <p:cNvSpPr/>
+          <p:nvPr/>
+        </p:nvSpPr>
+        <p:spPr>
+          <a:xfrm>
+            <a:off x="6291072" y="2011680"/>
+            <a:ext cx="5443423" cy="4206240"/>
+          </a:xfrm>
+          <a:prstGeom prst="roundRect">
+            <a:avLst>
+              <a:gd name="adj" fmla="val 6000"/>
+            </a:avLst>
+          </a:prstGeom>
+          <a:solidFill>
+            <a:srgbClr val="FFFFFF"/>
+          </a:solidFill>
+          <a:ln w="15875">
+            <a:solidFill>
+              <a:srgbClr val="EA580C"/>
+            </a:solidFill>
+          </a:ln>
+          <a:effectLst/>
+        </p:spPr>
+        <p:style>
+          <a:lnRef idx="1">
+            <a:schemeClr val="accent1"/>
+          </a:lnRef>
+          <a:fillRef idx="3">
+            <a:schemeClr val="accent1"/>
+          </a:fillRef>
+          <a:effectRef idx="2">
+            <a:schemeClr val="accent1"/>
+          </a:effectRef>
+          <a:fontRef idx="minor">
+            <a:schemeClr val="lt1"/>
+          </a:fontRef>
+        </p:style>
+        <p:txBody>
+          <a:bodyPr rtlCol="0" anchor="ctr"/>
+          <a:lstStyle/>
+          <a:p>
+            <a:pPr algn="ctr"/>
+          </a:p>
+        </p:txBody>
+      </p:sp>
+      <p:sp>
+        <p:nvSpPr>
+          <p:cNvPr id="14" name="Rectangle 13"/>
+          <p:cNvSpPr/>
+          <p:nvPr/>
+        </p:nvSpPr>
+        <p:spPr>
+          <a:xfrm>
+            <a:off x="6291072" y="2011680"/>
+            <a:ext cx="109728" cy="4206240"/>
+          </a:xfrm>
+          <a:prstGeom prst="rect">
+            <a:avLst/>
+          </a:prstGeom>
+          <a:solidFill>
+            <a:srgbClr val="EA580C"/>
+          </a:solidFill>
+          <a:ln>
+            <a:noFill/>
+          </a:ln>
+          <a:effectLst/>
+        </p:spPr>
+        <p:style>
+          <a:lnRef idx="1">
+            <a:schemeClr val="accent1"/>
+          </a:lnRef>
+          <a:fillRef idx="3">
+            <a:schemeClr val="accent1"/>
+          </a:fillRef>
+          <a:effectRef idx="2">
+            <a:schemeClr val="accent1"/>
+          </a:effectRef>
+          <a:fontRef idx="minor">
+            <a:schemeClr val="lt1"/>
+          </a:fontRef>
+        </p:style>
+        <p:txBody>
+          <a:bodyPr rtlCol="0" anchor="ctr"/>
+          <a:lstStyle/>
+          <a:p>
+            <a:pPr algn="ctr"/>
+          </a:p>
+        </p:txBody>
+      </p:sp>
+      <p:sp>
+        <p:nvSpPr>
+          <p:cNvPr id="15" name="TextBox 14"/>
+          <p:cNvSpPr txBox="1"/>
+          <p:nvPr/>
+        </p:nvSpPr>
+        <p:spPr>
+          <a:xfrm>
+            <a:off x="6473952" y="2084832"/>
+            <a:ext cx="5169103" cy="457200"/>
+          </a:xfrm>
+          <a:prstGeom prst="rect">
+            <a:avLst/>
+          </a:prstGeom>
+          <a:noFill/>
+        </p:spPr>
+        <p:txBody>
+          <a:bodyPr wrap="square" anchor="t" lIns="73152" rIns="73152" tIns="36576" bIns="36576">
+            <a:spAutoFit/>
+          </a:bodyPr>
+          <a:lstStyle/>
+          <a:p>
+            <a:pPr algn="l">
+              <a:spcAft>
+                <a:spcPts val="0"/>
+              </a:spcAft>
+            </a:pPr>
+            <a:r>
+              <a:rPr sz="2000" b="1" i="0">
+                <a:solidFill>
+                  <a:srgbClr val="EA580C"/>
+                </a:solidFill>
+                <a:latin typeface="Arial"/>
+              </a:rPr>
+              <a:t>Typical retail user</a:t>
+            </a:r>
+          </a:p>
+        </p:txBody>
+      </p:sp>
+      <p:sp>
+        <p:nvSpPr>
+          <p:cNvPr id="16" name="TextBox 15"/>
+          <p:cNvSpPr txBox="1"/>
+          <p:nvPr/>
+        </p:nvSpPr>
+        <p:spPr>
+          <a:xfrm>
+            <a:off x="6473952" y="2542032"/>
+            <a:ext cx="5169103" cy="3602735"/>
+          </a:xfrm>
+          <a:prstGeom prst="rect">
+            <a:avLst/>
+          </a:prstGeom>
+          <a:noFill/>
+        </p:spPr>
+        <p:txBody>
+          <a:bodyPr wrap="square" anchor="t" lIns="73152" rIns="73152" tIns="36576" bIns="36576">
+            <a:spAutoFit/>
+          </a:bodyPr>
+          <a:lstStyle/>
+          <a:p>
+            <a:pPr algn="l" marL="292608" indent="-256032">
+              <a:spcAft>
+                <a:spcPts val="600"/>
+              </a:spcAft>
+              <a:buChar char="•"/>
+            </a:pPr>
+            <a:r>
+              <a:rPr sz="1800" b="0" i="0">
+                <a:solidFill>
+                  <a:srgbClr val="0F172A"/>
+                </a:solidFill>
+                <a:latin typeface="Arial"/>
+              </a:rPr>
+              <a:t>Public news, often after the price has moved</a:t>
+            </a:r>
+          </a:p>
+          <a:p>
+            <a:pPr algn="l" marL="292608" indent="-256032">
+              <a:spcAft>
+                <a:spcPts val="600"/>
+              </a:spcAft>
+              <a:buChar char="•"/>
+            </a:pPr>
+            <a:r>
+              <a:rPr sz="1800" b="0" i="0">
+                <a:solidFill>
+                  <a:srgbClr val="0F172A"/>
+                </a:solidFill>
+                <a:latin typeface="Arial"/>
+              </a:rPr>
+              <a:t>No model; intuition and headlines</a:t>
+            </a:r>
+          </a:p>
+          <a:p>
+            <a:pPr algn="l" marL="292608" indent="-256032">
+              <a:spcAft>
+                <a:spcPts val="600"/>
+              </a:spcAft>
+              <a:buChar char="•"/>
+            </a:pPr>
+            <a:r>
+              <a:rPr sz="1800" b="0" i="0">
+                <a:solidFill>
+                  <a:srgbClr val="0F172A"/>
+                </a:solidFill>
+                <a:latin typeface="Arial"/>
+              </a:rPr>
+              <a:t>Pays the spread and the taker fee</a:t>
+            </a:r>
+          </a:p>
+          <a:p>
+            <a:pPr algn="l" marL="292608" indent="-256032">
+              <a:spcAft>
+                <a:spcPts val="600"/>
+              </a:spcAft>
+              <a:buChar char="•"/>
+            </a:pPr>
+            <a:r>
+              <a:rPr sz="1800" b="0" i="0">
+                <a:solidFill>
+                  <a:srgbClr val="0F172A"/>
+                </a:solidFill>
+                <a:latin typeface="Arial"/>
+              </a:rPr>
+              <a:t>Small, emotional, repeated bets</a:t>
             </a:r>
           </a:p>
         </p:txBody>
@@ -5834,7 +5631,7 @@
                 </a:solidFill>
                 <a:latin typeface="Arial"/>
               </a:rPr>
-              <a:t>Selectivity: from 771 decision points to 74 trades</a:t>
+              <a:t>Our product, reframed: protect the consumer first</a:t>
             </a:r>
           </a:p>
         </p:txBody>
@@ -5873,7 +5670,7 @@
                 </a:solidFill>
                 <a:latin typeface="Arial"/>
               </a:rPr>
-              <a:t>DASC7606C Group 12 · Market-Graded Learning for NBA Game-Impact Intelligence</a:t>
+              <a:t>DASC7606C Group 12 · Can a consumer beat a sports prediction market?</a:t>
             </a:r>
           </a:p>
         </p:txBody>
@@ -5919,7 +5716,7 @@
       </p:sp>
       <p:pic>
         <p:nvPicPr>
-          <p:cNvPr id="7" name="Picture 6" descr="trade_funnel.png"/>
+          <p:cNvPr id="7" name="Picture 6" descr="agent_workflow.png"/>
           <p:cNvPicPr>
             <a:picLocks noChangeAspect="1"/>
           </p:cNvPicPr>
@@ -5933,8 +5730,8 @@
         </p:blipFill>
         <p:spPr>
           <a:xfrm>
-            <a:off x="457200" y="1533698"/>
-            <a:ext cx="7955279" cy="4339243"/>
+            <a:off x="457200" y="1853719"/>
+            <a:ext cx="6766560" cy="3744920"/>
           </a:xfrm>
           <a:prstGeom prst="rect">
             <a:avLst/>
@@ -5949,8 +5746,8 @@
         </p:nvSpPr>
         <p:spPr>
           <a:xfrm>
-            <a:off x="8549640" y="1463040"/>
-            <a:ext cx="3184855" cy="4846320"/>
+            <a:off x="7406640" y="1234439"/>
+            <a:ext cx="4327855" cy="5120640"/>
           </a:xfrm>
           <a:prstGeom prst="rect">
             <a:avLst/>
@@ -5965,148 +5762,157 @@
           <a:p>
             <a:pPr algn="l" marL="292608" indent="-256032">
               <a:spcAft>
-                <a:spcPts val="1200"/>
+                <a:spcPts val="800"/>
               </a:spcAft>
               <a:buChar char="•"/>
             </a:pPr>
             <a:r>
-              <a:rPr sz="2000" b="1" i="0">
+              <a:rPr sz="1800" b="1" i="0">
                 <a:solidFill>
                   <a:srgbClr val="0F172A"/>
                 </a:solidFill>
                 <a:latin typeface="Arial"/>
               </a:rPr>
-              <a:t>771</a:t>
-            </a:r>
-            <a:r>
-              <a:rPr sz="2000" b="0" i="0">
+              <a:t>Pass by default:</a:t>
+            </a:r>
+            <a:r>
+              <a:rPr sz="1800" b="0" i="0">
                 <a:solidFill>
                   <a:srgbClr val="0F172A"/>
                 </a:solidFill>
                 <a:latin typeface="Arial"/>
               </a:rPr>
-              <a:t> decision points</a:t>
+              <a:t> 90% of decision points → no trade</a:t>
             </a:r>
           </a:p>
           <a:p>
             <a:pPr algn="l" marL="292608" indent="-256032">
               <a:spcAft>
-                <a:spcPts val="1200"/>
+                <a:spcPts val="800"/>
               </a:spcAft>
               <a:buChar char="•"/>
             </a:pPr>
             <a:r>
-              <a:rPr sz="2000" b="1" i="0">
+              <a:rPr sz="1800" b="1" i="0">
                 <a:solidFill>
                   <a:srgbClr val="0F172A"/>
                 </a:solidFill>
                 <a:latin typeface="Arial"/>
               </a:rPr>
-              <a:t>153</a:t>
-            </a:r>
-            <a:r>
-              <a:rPr sz="2000" b="0" i="0">
+              <a:t>No-order reason:</a:t>
+            </a:r>
+            <a:r>
+              <a:rPr sz="1800" b="0" i="0">
                 <a:solidFill>
                   <a:srgbClr val="0F172A"/>
                 </a:solidFill>
                 <a:latin typeface="Arial"/>
               </a:rPr>
-              <a:t> with gap &gt; 4 pts after fees</a:t>
+              <a:t> “gap after fees too small or the price already moved”</a:t>
             </a:r>
           </a:p>
           <a:p>
             <a:pPr algn="l" marL="292608" indent="-256032">
               <a:spcAft>
-                <a:spcPts val="1200"/>
+                <a:spcPts val="800"/>
               </a:spcAft>
               <a:buChar char="•"/>
             </a:pPr>
             <a:r>
-              <a:rPr sz="2000" b="1" i="0">
+              <a:rPr sz="1800" b="1" i="0">
                 <a:solidFill>
                   <a:srgbClr val="0F172A"/>
                 </a:solidFill>
                 <a:latin typeface="Arial"/>
               </a:rPr>
-              <a:t>74</a:t>
-            </a:r>
-            <a:r>
-              <a:rPr sz="2000" b="0" i="0">
+              <a:t>Costs shown:</a:t>
+            </a:r>
+            <a:r>
+              <a:rPr sz="1800" b="0" i="0">
                 <a:solidFill>
                   <a:srgbClr val="0F172A"/>
                 </a:solidFill>
                 <a:latin typeface="Arial"/>
               </a:rPr>
-              <a:t> trades (10%)</a:t>
+              <a:t> bid-ask in briefs; Coach shows break-even after spread + fee</a:t>
             </a:r>
           </a:p>
           <a:p>
             <a:pPr algn="l" marL="292608" indent="-256032">
               <a:spcAft>
-                <a:spcPts val="1200"/>
+                <a:spcPts val="800"/>
               </a:spcAft>
               <a:buChar char="•"/>
             </a:pPr>
             <a:r>
-              <a:rPr sz="2000" b="1" i="0">
+              <a:rPr sz="1800" b="1" i="0">
                 <a:solidFill>
                   <a:srgbClr val="0F172A"/>
                 </a:solidFill>
                 <a:latin typeface="Arial"/>
               </a:rPr>
-              <a:t>27</a:t>
-            </a:r>
-            <a:r>
-              <a:rPr sz="2000" b="0" i="0">
+              <a:t>Code limits:</a:t>
+            </a:r>
+            <a:r>
+              <a:rPr sz="1800" b="0" i="0">
                 <a:solidFill>
                   <a:srgbClr val="0F172A"/>
                 </a:solidFill>
                 <a:latin typeface="Arial"/>
               </a:rPr>
-              <a:t> beat or matched the close (36%)</a:t>
+              <a:t> $50 / order, $100 / game, $300 / day; bans “lock”, “guaranteed”, “risk-free”</a:t>
             </a:r>
           </a:p>
           <a:p>
             <a:pPr algn="l" marL="292608" indent="-256032">
               <a:spcAft>
-                <a:spcPts val="1200"/>
+                <a:spcPts val="800"/>
               </a:spcAft>
               <a:buChar char="•"/>
             </a:pPr>
             <a:r>
-              <a:rPr sz="2000" b="1" i="0">
+              <a:rPr sz="1800" b="1" i="0">
                 <a:solidFill>
                   <a:srgbClr val="0F172A"/>
                 </a:solidFill>
                 <a:latin typeface="Arial"/>
               </a:rPr>
-              <a:t>41</a:t>
-            </a:r>
-            <a:r>
-              <a:rPr sz="2000" b="0" i="0">
+              <a:t>9 / 9</a:t>
+            </a:r>
+            <a:r>
+              <a:rPr sz="1800" b="0" i="0">
                 <a:solidFill>
                   <a:srgbClr val="0F172A"/>
                 </a:solidFill>
                 <a:latin typeface="Arial"/>
               </a:rPr>
-              <a:t> won (55%)</a:t>
+              <a:t> planted violations blocked</a:t>
             </a:r>
           </a:p>
           <a:p>
             <a:pPr algn="l" marL="292608" indent="-256032">
               <a:spcAft>
-                <a:spcPts val="1200"/>
+                <a:spcPts val="800"/>
               </a:spcAft>
               <a:buChar char="•"/>
             </a:pPr>
             <a:r>
-              <a:rPr sz="2000" b="1" i="0">
-                <a:solidFill>
-                  <a:srgbClr val="EA580C"/>
-                </a:solidFill>
-                <a:latin typeface="Arial"/>
-              </a:rPr>
-              <a:t>Value comes from skipping bad trades</a:t>
+              <a:rPr sz="1800" b="1" i="0">
+                <a:solidFill>
+                  <a:srgbClr val="0F172A"/>
+                </a:solidFill>
+                <a:latin typeface="Arial"/>
+              </a:rPr>
+              <a:t>Learned rules:</a:t>
+            </a:r>
+            <a:r>
+              <a:rPr sz="1800" b="0" i="0">
+                <a:solidFill>
+                  <a:srgbClr val="0F172A"/>
+                </a:solidFill>
+                <a:latin typeface="Arial"/>
+              </a:rPr>
+              <a:t> skip ≤ 35¢; skip after a 2¢ move against</a:t>
             </a:r>
           </a:p>
         </p:txBody>
@@ -6251,7 +6057,7 @@
                 </a:solidFill>
                 <a:latin typeface="Arial"/>
               </a:rPr>
-              <a:t>Safety and honest caveats</a:t>
+              <a:t>Coach: teach why most bets don't clear costs</a:t>
             </a:r>
           </a:p>
         </p:txBody>
@@ -6290,7 +6096,7 @@
                 </a:solidFill>
                 <a:latin typeface="Arial"/>
               </a:rPr>
-              <a:t>DASC7606C Group 12 · Market-Graded Learning for NBA Game-Impact Intelligence</a:t>
+              <a:t>DASC7606C Group 12 · Can a consumer beat a sports prediction market?</a:t>
             </a:r>
           </a:p>
         </p:txBody>
@@ -6343,7 +6149,383 @@
         <p:spPr>
           <a:xfrm>
             <a:off x="457200" y="1234439"/>
-            <a:ext cx="5394960" cy="5074920"/>
+            <a:ext cx="5501487" cy="2057400"/>
+          </a:xfrm>
+          <a:prstGeom prst="roundRect">
+            <a:avLst>
+              <a:gd name="adj" fmla="val 6000"/>
+            </a:avLst>
+          </a:prstGeom>
+          <a:solidFill>
+            <a:srgbClr val="FFFFFF"/>
+          </a:solidFill>
+          <a:ln w="15875">
+            <a:solidFill>
+              <a:srgbClr val="2563EB"/>
+            </a:solidFill>
+          </a:ln>
+          <a:effectLst/>
+        </p:spPr>
+        <p:style>
+          <a:lnRef idx="1">
+            <a:schemeClr val="accent1"/>
+          </a:lnRef>
+          <a:fillRef idx="3">
+            <a:schemeClr val="accent1"/>
+          </a:fillRef>
+          <a:effectRef idx="2">
+            <a:schemeClr val="accent1"/>
+          </a:effectRef>
+          <a:fontRef idx="minor">
+            <a:schemeClr val="lt1"/>
+          </a:fontRef>
+        </p:style>
+        <p:txBody>
+          <a:bodyPr rtlCol="0" anchor="ctr"/>
+          <a:lstStyle/>
+          <a:p>
+            <a:pPr algn="ctr"/>
+          </a:p>
+        </p:txBody>
+      </p:sp>
+      <p:sp>
+        <p:nvSpPr>
+          <p:cNvPr id="8" name="Rectangle 7"/>
+          <p:cNvSpPr/>
+          <p:nvPr/>
+        </p:nvSpPr>
+        <p:spPr>
+          <a:xfrm>
+            <a:off x="457200" y="1234439"/>
+            <a:ext cx="109728" cy="2057400"/>
+          </a:xfrm>
+          <a:prstGeom prst="rect">
+            <a:avLst/>
+          </a:prstGeom>
+          <a:solidFill>
+            <a:srgbClr val="2563EB"/>
+          </a:solidFill>
+          <a:ln>
+            <a:noFill/>
+          </a:ln>
+          <a:effectLst/>
+        </p:spPr>
+        <p:style>
+          <a:lnRef idx="1">
+            <a:schemeClr val="accent1"/>
+          </a:lnRef>
+          <a:fillRef idx="3">
+            <a:schemeClr val="accent1"/>
+          </a:fillRef>
+          <a:effectRef idx="2">
+            <a:schemeClr val="accent1"/>
+          </a:effectRef>
+          <a:fontRef idx="minor">
+            <a:schemeClr val="lt1"/>
+          </a:fontRef>
+        </p:style>
+        <p:txBody>
+          <a:bodyPr rtlCol="0" anchor="ctr"/>
+          <a:lstStyle/>
+          <a:p>
+            <a:pPr algn="ctr"/>
+          </a:p>
+        </p:txBody>
+      </p:sp>
+      <p:sp>
+        <p:nvSpPr>
+          <p:cNvPr id="9" name="TextBox 8"/>
+          <p:cNvSpPr txBox="1"/>
+          <p:nvPr/>
+        </p:nvSpPr>
+        <p:spPr>
+          <a:xfrm>
+            <a:off x="640080" y="1307592"/>
+            <a:ext cx="5227167" cy="457200"/>
+          </a:xfrm>
+          <a:prstGeom prst="rect">
+            <a:avLst/>
+          </a:prstGeom>
+          <a:noFill/>
+        </p:spPr>
+        <p:txBody>
+          <a:bodyPr wrap="square" anchor="t" lIns="73152" rIns="73152" tIns="36576" bIns="36576">
+            <a:spAutoFit/>
+          </a:bodyPr>
+          <a:lstStyle/>
+          <a:p>
+            <a:pPr algn="l">
+              <a:spcAft>
+                <a:spcPts val="0"/>
+              </a:spcAft>
+            </a:pPr>
+            <a:r>
+              <a:rPr sz="2000" b="1" i="0">
+                <a:solidFill>
+                  <a:srgbClr val="2563EB"/>
+                </a:solidFill>
+                <a:latin typeface="Arial"/>
+              </a:rPr>
+              <a:t>1  What's going on</a:t>
+            </a:r>
+          </a:p>
+        </p:txBody>
+      </p:sp>
+      <p:sp>
+        <p:nvSpPr>
+          <p:cNvPr id="10" name="TextBox 9"/>
+          <p:cNvSpPr txBox="1"/>
+          <p:nvPr/>
+        </p:nvSpPr>
+        <p:spPr>
+          <a:xfrm>
+            <a:off x="640080" y="1764791"/>
+            <a:ext cx="5227167" cy="1453895"/>
+          </a:xfrm>
+          <a:prstGeom prst="rect">
+            <a:avLst/>
+          </a:prstGeom>
+          <a:noFill/>
+        </p:spPr>
+        <p:txBody>
+          <a:bodyPr wrap="square" anchor="t" lIns="73152" rIns="73152" tIns="36576" bIns="36576">
+            <a:spAutoFit/>
+          </a:bodyPr>
+          <a:lstStyle/>
+          <a:p>
+            <a:pPr algn="l" marL="292608" indent="-256032">
+              <a:spcAft>
+                <a:spcPts val="600"/>
+              </a:spcAft>
+              <a:buChar char="•"/>
+            </a:pPr>
+            <a:r>
+              <a:rPr sz="1800" b="0" i="0">
+                <a:solidFill>
+                  <a:srgbClr val="0F172A"/>
+                </a:solidFill>
+                <a:latin typeface="Arial"/>
+              </a:rPr>
+              <a:t>News so far; model before / after the news</a:t>
+            </a:r>
+          </a:p>
+          <a:p>
+            <a:pPr algn="l" marL="292608" indent="-256032">
+              <a:spcAft>
+                <a:spcPts val="600"/>
+              </a:spcAft>
+              <a:buChar char="•"/>
+            </a:pPr>
+            <a:r>
+              <a:rPr sz="1800" b="0" i="0">
+                <a:solidFill>
+                  <a:srgbClr val="0F172A"/>
+                </a:solidFill>
+                <a:latin typeface="Arial"/>
+              </a:rPr>
+              <a:t>Market now vs 24 h ago; break-even after spread + fee</a:t>
+            </a:r>
+          </a:p>
+        </p:txBody>
+      </p:sp>
+      <p:sp>
+        <p:nvSpPr>
+          <p:cNvPr id="11" name="Rounded Rectangle 10"/>
+          <p:cNvSpPr/>
+          <p:nvPr/>
+        </p:nvSpPr>
+        <p:spPr>
+          <a:xfrm>
+            <a:off x="6233007" y="1234439"/>
+            <a:ext cx="5501487" cy="2057400"/>
+          </a:xfrm>
+          <a:prstGeom prst="roundRect">
+            <a:avLst>
+              <a:gd name="adj" fmla="val 6000"/>
+            </a:avLst>
+          </a:prstGeom>
+          <a:solidFill>
+            <a:srgbClr val="FFFFFF"/>
+          </a:solidFill>
+          <a:ln w="15875">
+            <a:solidFill>
+              <a:srgbClr val="EA580C"/>
+            </a:solidFill>
+          </a:ln>
+          <a:effectLst/>
+        </p:spPr>
+        <p:style>
+          <a:lnRef idx="1">
+            <a:schemeClr val="accent1"/>
+          </a:lnRef>
+          <a:fillRef idx="3">
+            <a:schemeClr val="accent1"/>
+          </a:fillRef>
+          <a:effectRef idx="2">
+            <a:schemeClr val="accent1"/>
+          </a:effectRef>
+          <a:fontRef idx="minor">
+            <a:schemeClr val="lt1"/>
+          </a:fontRef>
+        </p:style>
+        <p:txBody>
+          <a:bodyPr rtlCol="0" anchor="ctr"/>
+          <a:lstStyle/>
+          <a:p>
+            <a:pPr algn="ctr"/>
+          </a:p>
+        </p:txBody>
+      </p:sp>
+      <p:sp>
+        <p:nvSpPr>
+          <p:cNvPr id="12" name="Rectangle 11"/>
+          <p:cNvSpPr/>
+          <p:nvPr/>
+        </p:nvSpPr>
+        <p:spPr>
+          <a:xfrm>
+            <a:off x="6233007" y="1234439"/>
+            <a:ext cx="109728" cy="2057400"/>
+          </a:xfrm>
+          <a:prstGeom prst="rect">
+            <a:avLst/>
+          </a:prstGeom>
+          <a:solidFill>
+            <a:srgbClr val="EA580C"/>
+          </a:solidFill>
+          <a:ln>
+            <a:noFill/>
+          </a:ln>
+          <a:effectLst/>
+        </p:spPr>
+        <p:style>
+          <a:lnRef idx="1">
+            <a:schemeClr val="accent1"/>
+          </a:lnRef>
+          <a:fillRef idx="3">
+            <a:schemeClr val="accent1"/>
+          </a:fillRef>
+          <a:effectRef idx="2">
+            <a:schemeClr val="accent1"/>
+          </a:effectRef>
+          <a:fontRef idx="minor">
+            <a:schemeClr val="lt1"/>
+          </a:fontRef>
+        </p:style>
+        <p:txBody>
+          <a:bodyPr rtlCol="0" anchor="ctr"/>
+          <a:lstStyle/>
+          <a:p>
+            <a:pPr algn="ctr"/>
+          </a:p>
+        </p:txBody>
+      </p:sp>
+      <p:sp>
+        <p:nvSpPr>
+          <p:cNvPr id="13" name="TextBox 12"/>
+          <p:cNvSpPr txBox="1"/>
+          <p:nvPr/>
+        </p:nvSpPr>
+        <p:spPr>
+          <a:xfrm>
+            <a:off x="6415887" y="1307592"/>
+            <a:ext cx="5227167" cy="457200"/>
+          </a:xfrm>
+          <a:prstGeom prst="rect">
+            <a:avLst/>
+          </a:prstGeom>
+          <a:noFill/>
+        </p:spPr>
+        <p:txBody>
+          <a:bodyPr wrap="square" anchor="t" lIns="73152" rIns="73152" tIns="36576" bIns="36576">
+            <a:spAutoFit/>
+          </a:bodyPr>
+          <a:lstStyle/>
+          <a:p>
+            <a:pPr algn="l">
+              <a:spcAft>
+                <a:spcPts val="0"/>
+              </a:spcAft>
+            </a:pPr>
+            <a:r>
+              <a:rPr sz="2000" b="1" i="0">
+                <a:solidFill>
+                  <a:srgbClr val="EA580C"/>
+                </a:solidFill>
+                <a:latin typeface="Arial"/>
+              </a:rPr>
+              <a:t>2  Lessons, when relevant</a:t>
+            </a:r>
+          </a:p>
+        </p:txBody>
+      </p:sp>
+      <p:sp>
+        <p:nvSpPr>
+          <p:cNvPr id="14" name="TextBox 13"/>
+          <p:cNvSpPr txBox="1"/>
+          <p:nvPr/>
+        </p:nvSpPr>
+        <p:spPr>
+          <a:xfrm>
+            <a:off x="6415887" y="1764791"/>
+            <a:ext cx="5227167" cy="1453895"/>
+          </a:xfrm>
+          <a:prstGeom prst="rect">
+            <a:avLst/>
+          </a:prstGeom>
+          <a:noFill/>
+        </p:spPr>
+        <p:txBody>
+          <a:bodyPr wrap="square" anchor="t" lIns="73152" rIns="73152" tIns="36576" bIns="36576">
+            <a:spAutoFit/>
+          </a:bodyPr>
+          <a:lstStyle/>
+          <a:p>
+            <a:pPr algn="l" marL="292608" indent="-256032">
+              <a:spcAft>
+                <a:spcPts val="600"/>
+              </a:spcAft>
+              <a:buChar char="•"/>
+            </a:pPr>
+            <a:r>
+              <a:rPr sz="1800" b="0" i="0">
+                <a:solidFill>
+                  <a:srgbClr val="0F172A"/>
+                </a:solidFill>
+                <a:latin typeface="Arial"/>
+              </a:rPr>
+              <a:t>Price = probability · costs move break-even</a:t>
+            </a:r>
+          </a:p>
+          <a:p>
+            <a:pPr algn="l" marL="292608" indent="-256032">
+              <a:spcAft>
+                <a:spcPts val="600"/>
+              </a:spcAft>
+              <a:buChar char="•"/>
+            </a:pPr>
+            <a:r>
+              <a:rPr sz="1800" b="0" i="0">
+                <a:solidFill>
+                  <a:srgbClr val="0F172A"/>
+                </a:solidFill>
+                <a:latin typeface="Arial"/>
+              </a:rPr>
+              <a:t>Priced in / chasing · long shots · closing line · passing</a:t>
+            </a:r>
+          </a:p>
+        </p:txBody>
+      </p:sp>
+      <p:sp>
+        <p:nvSpPr>
+          <p:cNvPr id="15" name="Rounded Rectangle 14"/>
+          <p:cNvSpPr/>
+          <p:nvPr/>
+        </p:nvSpPr>
+        <p:spPr>
+          <a:xfrm>
+            <a:off x="457200" y="3474720"/>
+            <a:ext cx="5501487" cy="2057400"/>
           </a:xfrm>
           <a:prstGeom prst="roundRect">
             <a:avLst>
@@ -6384,14 +6566,14 @@
       </p:sp>
       <p:sp>
         <p:nvSpPr>
-          <p:cNvPr id="8" name="Rectangle 7"/>
+          <p:cNvPr id="16" name="Rectangle 15"/>
           <p:cNvSpPr/>
           <p:nvPr/>
         </p:nvSpPr>
         <p:spPr>
           <a:xfrm>
-            <a:off x="457200" y="1234439"/>
-            <a:ext cx="109728" cy="5074920"/>
+            <a:off x="457200" y="3474720"/>
+            <a:ext cx="109728" cy="2057400"/>
           </a:xfrm>
           <a:prstGeom prst="rect">
             <a:avLst/>
@@ -6428,14 +6610,14 @@
       </p:sp>
       <p:sp>
         <p:nvSpPr>
-          <p:cNvPr id="9" name="TextBox 8"/>
+          <p:cNvPr id="17" name="TextBox 16"/>
           <p:cNvSpPr txBox="1"/>
           <p:nvPr/>
         </p:nvSpPr>
         <p:spPr>
           <a:xfrm>
-            <a:off x="640080" y="1307592"/>
-            <a:ext cx="5120640" cy="457200"/>
+            <a:off x="640080" y="3547872"/>
+            <a:ext cx="5227167" cy="457200"/>
           </a:xfrm>
           <a:prstGeom prst="rect">
             <a:avLst/>
@@ -6460,21 +6642,21 @@
                 </a:solidFill>
                 <a:latin typeface="Arial"/>
               </a:rPr>
-              <a:t>Safety</a:t>
-            </a:r>
-          </a:p>
-        </p:txBody>
-      </p:sp>
-      <p:sp>
-        <p:nvSpPr>
-          <p:cNvPr id="10" name="TextBox 9"/>
+              <a:t>3  Your paper call</a:t>
+            </a:r>
+          </a:p>
+        </p:txBody>
+      </p:sp>
+      <p:sp>
+        <p:nvSpPr>
+          <p:cNvPr id="18" name="TextBox 17"/>
           <p:cNvSpPr txBox="1"/>
           <p:nvPr/>
         </p:nvSpPr>
         <p:spPr>
           <a:xfrm>
-            <a:off x="640080" y="1764791"/>
-            <a:ext cx="5120640" cy="4471416"/>
+            <a:off x="640080" y="4005072"/>
+            <a:ext cx="5227167" cy="1453895"/>
           </a:xfrm>
           <a:prstGeom prst="rect">
             <a:avLst/>
@@ -6494,22 +6676,13 @@
               <a:buChar char="•"/>
             </a:pPr>
             <a:r>
-              <a:rPr sz="1800" b="1" i="0">
+              <a:rPr sz="1800" b="0" i="0">
                 <a:solidFill>
                   <a:srgbClr val="0F172A"/>
                 </a:solidFill>
                 <a:latin typeface="Arial"/>
               </a:rPr>
-              <a:t>9 / 9</a:t>
-            </a:r>
-            <a:r>
-              <a:rPr sz="1800" b="0" i="0">
-                <a:solidFill>
-                  <a:srgbClr val="0F172A"/>
-                </a:solidFill>
-                <a:latin typeface="Arial"/>
-              </a:rPr>
-              <a:t> planted policy violations blocked (over-cap, post-tip, team / media orders, “guaranteed lock” copy, retail without confirm, …)</a:t>
+              <a:t>Back a team or pass</a:t>
             </a:r>
           </a:p>
           <a:p>
@@ -6526,9 +6699,163 @@
                 </a:solidFill>
                 <a:latin typeface="Arial"/>
               </a:rPr>
-              <a:t>No future information: as-of view + leakage tests</a:t>
-            </a:r>
-          </a:p>
+              <a:t>Then: close, CLV, result, and what the agent did</a:t>
+            </a:r>
+          </a:p>
+        </p:txBody>
+      </p:sp>
+      <p:sp>
+        <p:nvSpPr>
+          <p:cNvPr id="19" name="Rounded Rectangle 18"/>
+          <p:cNvSpPr/>
+          <p:nvPr/>
+        </p:nvSpPr>
+        <p:spPr>
+          <a:xfrm>
+            <a:off x="6233007" y="3474720"/>
+            <a:ext cx="5501487" cy="2057400"/>
+          </a:xfrm>
+          <a:prstGeom prst="roundRect">
+            <a:avLst>
+              <a:gd name="adj" fmla="val 6000"/>
+            </a:avLst>
+          </a:prstGeom>
+          <a:solidFill>
+            <a:srgbClr val="FFFFFF"/>
+          </a:solidFill>
+          <a:ln w="15875">
+            <a:solidFill>
+              <a:srgbClr val="1E293B"/>
+            </a:solidFill>
+          </a:ln>
+          <a:effectLst/>
+        </p:spPr>
+        <p:style>
+          <a:lnRef idx="1">
+            <a:schemeClr val="accent1"/>
+          </a:lnRef>
+          <a:fillRef idx="3">
+            <a:schemeClr val="accent1"/>
+          </a:fillRef>
+          <a:effectRef idx="2">
+            <a:schemeClr val="accent1"/>
+          </a:effectRef>
+          <a:fontRef idx="minor">
+            <a:schemeClr val="lt1"/>
+          </a:fontRef>
+        </p:style>
+        <p:txBody>
+          <a:bodyPr rtlCol="0" anchor="ctr"/>
+          <a:lstStyle/>
+          <a:p>
+            <a:pPr algn="ctr"/>
+          </a:p>
+        </p:txBody>
+      </p:sp>
+      <p:sp>
+        <p:nvSpPr>
+          <p:cNvPr id="20" name="Rectangle 19"/>
+          <p:cNvSpPr/>
+          <p:nvPr/>
+        </p:nvSpPr>
+        <p:spPr>
+          <a:xfrm>
+            <a:off x="6233007" y="3474720"/>
+            <a:ext cx="109728" cy="2057400"/>
+          </a:xfrm>
+          <a:prstGeom prst="rect">
+            <a:avLst/>
+          </a:prstGeom>
+          <a:solidFill>
+            <a:srgbClr val="1E293B"/>
+          </a:solidFill>
+          <a:ln>
+            <a:noFill/>
+          </a:ln>
+          <a:effectLst/>
+        </p:spPr>
+        <p:style>
+          <a:lnRef idx="1">
+            <a:schemeClr val="accent1"/>
+          </a:lnRef>
+          <a:fillRef idx="3">
+            <a:schemeClr val="accent1"/>
+          </a:fillRef>
+          <a:effectRef idx="2">
+            <a:schemeClr val="accent1"/>
+          </a:effectRef>
+          <a:fontRef idx="minor">
+            <a:schemeClr val="lt1"/>
+          </a:fontRef>
+        </p:style>
+        <p:txBody>
+          <a:bodyPr rtlCol="0" anchor="ctr"/>
+          <a:lstStyle/>
+          <a:p>
+            <a:pPr algn="ctr"/>
+          </a:p>
+        </p:txBody>
+      </p:sp>
+      <p:sp>
+        <p:nvSpPr>
+          <p:cNvPr id="21" name="TextBox 20"/>
+          <p:cNvSpPr txBox="1"/>
+          <p:nvPr/>
+        </p:nvSpPr>
+        <p:spPr>
+          <a:xfrm>
+            <a:off x="6415887" y="3547872"/>
+            <a:ext cx="5227167" cy="457200"/>
+          </a:xfrm>
+          <a:prstGeom prst="rect">
+            <a:avLst/>
+          </a:prstGeom>
+          <a:noFill/>
+        </p:spPr>
+        <p:txBody>
+          <a:bodyPr wrap="square" anchor="t" lIns="73152" rIns="73152" tIns="36576" bIns="36576">
+            <a:spAutoFit/>
+          </a:bodyPr>
+          <a:lstStyle/>
+          <a:p>
+            <a:pPr algn="l">
+              <a:spcAft>
+                <a:spcPts val="0"/>
+              </a:spcAft>
+            </a:pPr>
+            <a:r>
+              <a:rPr sz="2000" b="1" i="0">
+                <a:solidFill>
+                  <a:srgbClr val="1E293B"/>
+                </a:solidFill>
+                <a:latin typeface="Arial"/>
+              </a:rPr>
+              <a:t>4  Habit feedback</a:t>
+            </a:r>
+          </a:p>
+        </p:txBody>
+      </p:sp>
+      <p:sp>
+        <p:nvSpPr>
+          <p:cNvPr id="22" name="TextBox 21"/>
+          <p:cNvSpPr txBox="1"/>
+          <p:nvPr/>
+        </p:nvSpPr>
+        <p:spPr>
+          <a:xfrm>
+            <a:off x="6415887" y="4005072"/>
+            <a:ext cx="5227167" cy="1453895"/>
+          </a:xfrm>
+          <a:prstGeom prst="rect">
+            <a:avLst/>
+          </a:prstGeom>
+          <a:noFill/>
+        </p:spPr>
+        <p:txBody>
+          <a:bodyPr wrap="square" anchor="t" lIns="73152" rIns="73152" tIns="36576" bIns="36576">
+            <a:spAutoFit/>
+          </a:bodyPr>
+          <a:lstStyle/>
           <a:p>
             <a:pPr algn="l" marL="292608" indent="-256032">
               <a:spcAft>
@@ -6543,7 +6870,7 @@
                 </a:solidFill>
                 <a:latin typeface="Arial"/>
               </a:rPr>
-              <a:t>Public data only; paper money</a:t>
+              <a:t>Paying above the close, long shots, chasing</a:t>
             </a:r>
           </a:p>
           <a:p>
@@ -6560,34 +6887,32 @@
                 </a:solidFill>
                 <a:latin typeface="Arial"/>
               </a:rPr>
-              <a:t>Risk limits are code; the LLM cannot override them</a:t>
-            </a:r>
-          </a:p>
-        </p:txBody>
-      </p:sp>
-      <p:sp>
-        <p:nvSpPr>
-          <p:cNvPr id="11" name="Rounded Rectangle 10"/>
+              <a:t>Small samples are mostly luck</a:t>
+            </a:r>
+          </a:p>
+        </p:txBody>
+      </p:sp>
+      <p:sp>
+        <p:nvSpPr>
+          <p:cNvPr id="23" name="Rounded Rectangle 22"/>
           <p:cNvSpPr/>
           <p:nvPr/>
         </p:nvSpPr>
         <p:spPr>
           <a:xfrm>
-            <a:off x="6126480" y="1234439"/>
-            <a:ext cx="5608015" cy="5074920"/>
+            <a:off x="457200" y="5760720"/>
+            <a:ext cx="11277295" cy="502920"/>
           </a:xfrm>
           <a:prstGeom prst="roundRect">
             <a:avLst>
-              <a:gd name="adj" fmla="val 6000"/>
+              <a:gd name="adj" fmla="val 12000"/>
             </a:avLst>
           </a:prstGeom>
           <a:solidFill>
-            <a:srgbClr val="FFFFFF"/>
+            <a:srgbClr val="FEF3C7"/>
           </a:solidFill>
-          <a:ln w="15875">
-            <a:solidFill>
-              <a:srgbClr val="DC2626"/>
-            </a:solidFill>
+          <a:ln>
+            <a:noFill/>
           </a:ln>
           <a:effectLst/>
         </p:spPr>
@@ -6615,58 +6940,14 @@
       </p:sp>
       <p:sp>
         <p:nvSpPr>
-          <p:cNvPr id="12" name="Rectangle 11"/>
-          <p:cNvSpPr/>
-          <p:nvPr/>
-        </p:nvSpPr>
-        <p:spPr>
-          <a:xfrm>
-            <a:off x="6126480" y="1234439"/>
-            <a:ext cx="109728" cy="5074920"/>
-          </a:xfrm>
-          <a:prstGeom prst="rect">
-            <a:avLst/>
-          </a:prstGeom>
-          <a:solidFill>
-            <a:srgbClr val="DC2626"/>
-          </a:solidFill>
-          <a:ln>
-            <a:noFill/>
-          </a:ln>
-          <a:effectLst/>
-        </p:spPr>
-        <p:style>
-          <a:lnRef idx="1">
-            <a:schemeClr val="accent1"/>
-          </a:lnRef>
-          <a:fillRef idx="3">
-            <a:schemeClr val="accent1"/>
-          </a:fillRef>
-          <a:effectRef idx="2">
-            <a:schemeClr val="accent1"/>
-          </a:effectRef>
-          <a:fontRef idx="minor">
-            <a:schemeClr val="lt1"/>
-          </a:fontRef>
-        </p:style>
-        <p:txBody>
-          <a:bodyPr rtlCol="0" anchor="ctr"/>
-          <a:lstStyle/>
-          <a:p>
-            <a:pPr algn="ctr"/>
-          </a:p>
-        </p:txBody>
-      </p:sp>
-      <p:sp>
-        <p:nvSpPr>
-          <p:cNvPr id="13" name="TextBox 12"/>
+          <p:cNvPr id="24" name="TextBox 23"/>
           <p:cNvSpPr txBox="1"/>
           <p:nvPr/>
         </p:nvSpPr>
         <p:spPr>
           <a:xfrm>
-            <a:off x="6309360" y="1307592"/>
-            <a:ext cx="5333695" cy="457200"/>
+            <a:off x="548640" y="5760720"/>
+            <a:ext cx="11094415" cy="502920"/>
           </a:xfrm>
           <a:prstGeom prst="rect">
             <a:avLst/>
@@ -6674,7 +6955,7 @@
           <a:noFill/>
         </p:spPr>
         <p:txBody>
-          <a:bodyPr wrap="square" anchor="t" lIns="73152" rIns="73152" tIns="36576" bIns="36576">
+          <a:bodyPr wrap="square" anchor="ctr" lIns="73152" rIns="73152" tIns="36576" bIns="36576">
             <a:spAutoFit/>
           </a:bodyPr>
           <a:lstStyle/>
@@ -6685,104 +6966,13 @@
               </a:spcAft>
             </a:pPr>
             <a:r>
-              <a:rPr sz="2000" b="1" i="0">
-                <a:solidFill>
-                  <a:srgbClr val="DC2626"/>
-                </a:solidFill>
-                <a:latin typeface="Arial"/>
-              </a:rPr>
-              <a:t>Honest caveats</a:t>
-            </a:r>
-          </a:p>
-        </p:txBody>
-      </p:sp>
-      <p:sp>
-        <p:nvSpPr>
-          <p:cNvPr id="14" name="TextBox 13"/>
-          <p:cNvSpPr txBox="1"/>
-          <p:nvPr/>
-        </p:nvSpPr>
-        <p:spPr>
-          <a:xfrm>
-            <a:off x="6309360" y="1764791"/>
-            <a:ext cx="5333695" cy="4471416"/>
-          </a:xfrm>
-          <a:prstGeom prst="rect">
-            <a:avLst/>
-          </a:prstGeom>
-          <a:noFill/>
-        </p:spPr>
-        <p:txBody>
-          <a:bodyPr wrap="square" anchor="t" lIns="73152" rIns="73152" tIns="36576" bIns="36576">
-            <a:spAutoFit/>
-          </a:bodyPr>
-          <a:lstStyle/>
-          <a:p>
-            <a:pPr algn="l" marL="292608" indent="-256032">
-              <a:spcAft>
-                <a:spcPts val="600"/>
-              </a:spcAft>
-              <a:buChar char="•"/>
-            </a:pPr>
-            <a:r>
               <a:rPr sz="1800" b="0" i="0">
                 <a:solidFill>
                   <a:srgbClr val="0F172A"/>
                 </a:solidFill>
                 <a:latin typeface="Arial"/>
               </a:rPr>
-              <a:t>Mean CLV still slightly negative everywhere: we avoid bad trades rather than beat the close</a:t>
-            </a:r>
-          </a:p>
-          <a:p>
-            <a:pPr algn="l" marL="292608" indent="-256032">
-              <a:spcAft>
-                <a:spcPts val="600"/>
-              </a:spcAft>
-              <a:buChar char="•"/>
-            </a:pPr>
-            <a:r>
-              <a:rPr sz="1800" b="0" i="0">
-                <a:solidFill>
-                  <a:srgbClr val="0F172A"/>
-                </a:solidFill>
-                <a:latin typeface="Arial"/>
-              </a:rPr>
-              <a:t>Kill switch is measured, not enforced</a:t>
-            </a:r>
-          </a:p>
-          <a:p>
-            <a:pPr algn="l" marL="292608" indent="-256032">
-              <a:spcAft>
-                <a:spcPts val="600"/>
-              </a:spcAft>
-              <a:buChar char="•"/>
-            </a:pPr>
-            <a:r>
-              <a:rPr sz="1800" b="0" i="0">
-                <a:solidFill>
-                  <a:srgbClr val="0F172A"/>
-                </a:solidFill>
-                <a:latin typeface="Arial"/>
-              </a:rPr>
-              <a:t>Inactive-list news stamped tip − 30 min (conservative; real reports come earlier)</a:t>
-            </a:r>
-          </a:p>
-          <a:p>
-            <a:pPr algn="l" marL="292608" indent="-256032">
-              <a:spcAft>
-                <a:spcPts val="600"/>
-              </a:spcAft>
-              <a:buChar char="•"/>
-            </a:pPr>
-            <a:r>
-              <a:rPr sz="1800" b="0" i="0">
-                <a:solidFill>
-                  <a:srgbClr val="0F172A"/>
-                </a:solidFill>
-                <a:latin typeface="Arial"/>
-              </a:rPr>
-              <a:t>“Dev rules frozen” = “no learning”: both dev rules expired (45 days) before the test</a:t>
+              <a:t>Educational, paper money only · only information public at that moment · no promise words</a:t>
             </a:r>
           </a:p>
         </p:txBody>
@@ -6927,7 +7117,7 @@
                 </a:solidFill>
                 <a:latin typeface="Arial"/>
               </a:rPr>
-              <a:t>Coach: learning how the market works</a:t>
+              <a:t>Honest scope: what “unfair” means here</a:t>
             </a:r>
           </a:p>
         </p:txBody>
@@ -6966,7 +7156,7 @@
                 </a:solidFill>
                 <a:latin typeface="Arial"/>
               </a:rPr>
-              <a:t>DASC7606C Group 12 · Market-Graded Learning for NBA Game-Impact Intelligence</a:t>
+              <a:t>DASC7606C Group 12 · Can a consumer beat a sports prediction market?</a:t>
             </a:r>
           </a:p>
         </p:txBody>
@@ -7019,571 +7209,7 @@
         <p:spPr>
           <a:xfrm>
             <a:off x="457200" y="1234439"/>
-            <a:ext cx="5501487" cy="2057400"/>
-          </a:xfrm>
-          <a:prstGeom prst="roundRect">
-            <a:avLst>
-              <a:gd name="adj" fmla="val 6000"/>
-            </a:avLst>
-          </a:prstGeom>
-          <a:solidFill>
-            <a:srgbClr val="FFFFFF"/>
-          </a:solidFill>
-          <a:ln w="15875">
-            <a:solidFill>
-              <a:srgbClr val="2563EB"/>
-            </a:solidFill>
-          </a:ln>
-          <a:effectLst/>
-        </p:spPr>
-        <p:style>
-          <a:lnRef idx="1">
-            <a:schemeClr val="accent1"/>
-          </a:lnRef>
-          <a:fillRef idx="3">
-            <a:schemeClr val="accent1"/>
-          </a:fillRef>
-          <a:effectRef idx="2">
-            <a:schemeClr val="accent1"/>
-          </a:effectRef>
-          <a:fontRef idx="minor">
-            <a:schemeClr val="lt1"/>
-          </a:fontRef>
-        </p:style>
-        <p:txBody>
-          <a:bodyPr rtlCol="0" anchor="ctr"/>
-          <a:lstStyle/>
-          <a:p>
-            <a:pPr algn="ctr"/>
-          </a:p>
-        </p:txBody>
-      </p:sp>
-      <p:sp>
-        <p:nvSpPr>
-          <p:cNvPr id="8" name="Rectangle 7"/>
-          <p:cNvSpPr/>
-          <p:nvPr/>
-        </p:nvSpPr>
-        <p:spPr>
-          <a:xfrm>
-            <a:off x="457200" y="1234439"/>
-            <a:ext cx="109728" cy="2057400"/>
-          </a:xfrm>
-          <a:prstGeom prst="rect">
-            <a:avLst/>
-          </a:prstGeom>
-          <a:solidFill>
-            <a:srgbClr val="2563EB"/>
-          </a:solidFill>
-          <a:ln>
-            <a:noFill/>
-          </a:ln>
-          <a:effectLst/>
-        </p:spPr>
-        <p:style>
-          <a:lnRef idx="1">
-            <a:schemeClr val="accent1"/>
-          </a:lnRef>
-          <a:fillRef idx="3">
-            <a:schemeClr val="accent1"/>
-          </a:fillRef>
-          <a:effectRef idx="2">
-            <a:schemeClr val="accent1"/>
-          </a:effectRef>
-          <a:fontRef idx="minor">
-            <a:schemeClr val="lt1"/>
-          </a:fontRef>
-        </p:style>
-        <p:txBody>
-          <a:bodyPr rtlCol="0" anchor="ctr"/>
-          <a:lstStyle/>
-          <a:p>
-            <a:pPr algn="ctr"/>
-          </a:p>
-        </p:txBody>
-      </p:sp>
-      <p:sp>
-        <p:nvSpPr>
-          <p:cNvPr id="9" name="TextBox 8"/>
-          <p:cNvSpPr txBox="1"/>
-          <p:nvPr/>
-        </p:nvSpPr>
-        <p:spPr>
-          <a:xfrm>
-            <a:off x="640080" y="1307592"/>
-            <a:ext cx="5227167" cy="457200"/>
-          </a:xfrm>
-          <a:prstGeom prst="rect">
-            <a:avLst/>
-          </a:prstGeom>
-          <a:noFill/>
-        </p:spPr>
-        <p:txBody>
-          <a:bodyPr wrap="square" anchor="t" lIns="73152" rIns="73152" tIns="36576" bIns="36576">
-            <a:spAutoFit/>
-          </a:bodyPr>
-          <a:lstStyle/>
-          <a:p>
-            <a:pPr algn="l">
-              <a:spcAft>
-                <a:spcPts val="0"/>
-              </a:spcAft>
-            </a:pPr>
-            <a:r>
-              <a:rPr sz="2000" b="1" i="0">
-                <a:solidFill>
-                  <a:srgbClr val="2563EB"/>
-                </a:solidFill>
-                <a:latin typeface="Arial"/>
-              </a:rPr>
-              <a:t>1  What's going on</a:t>
-            </a:r>
-          </a:p>
-        </p:txBody>
-      </p:sp>
-      <p:sp>
-        <p:nvSpPr>
-          <p:cNvPr id="10" name="TextBox 9"/>
-          <p:cNvSpPr txBox="1"/>
-          <p:nvPr/>
-        </p:nvSpPr>
-        <p:spPr>
-          <a:xfrm>
-            <a:off x="640080" y="1764791"/>
-            <a:ext cx="5227167" cy="1453895"/>
-          </a:xfrm>
-          <a:prstGeom prst="rect">
-            <a:avLst/>
-          </a:prstGeom>
-          <a:noFill/>
-        </p:spPr>
-        <p:txBody>
-          <a:bodyPr wrap="square" anchor="t" lIns="73152" rIns="73152" tIns="36576" bIns="36576">
-            <a:spAutoFit/>
-          </a:bodyPr>
-          <a:lstStyle/>
-          <a:p>
-            <a:pPr algn="l" marL="292608" indent="-256032">
-              <a:spcAft>
-                <a:spcPts val="600"/>
-              </a:spcAft>
-              <a:buChar char="•"/>
-            </a:pPr>
-            <a:r>
-              <a:rPr sz="1800" b="0" i="0">
-                <a:solidFill>
-                  <a:srgbClr val="0F172A"/>
-                </a:solidFill>
-                <a:latin typeface="Arial"/>
-              </a:rPr>
-              <a:t>News so far, model before / after</a:t>
-            </a:r>
-          </a:p>
-          <a:p>
-            <a:pPr algn="l" marL="292608" indent="-256032">
-              <a:spcAft>
-                <a:spcPts val="600"/>
-              </a:spcAft>
-              <a:buChar char="•"/>
-            </a:pPr>
-            <a:r>
-              <a:rPr sz="1800" b="0" i="0">
-                <a:solidFill>
-                  <a:srgbClr val="0F172A"/>
-                </a:solidFill>
-                <a:latin typeface="Arial"/>
-              </a:rPr>
-              <a:t>Market now vs 24 h earlier; break-even after spread + fee</a:t>
-            </a:r>
-          </a:p>
-        </p:txBody>
-      </p:sp>
-      <p:sp>
-        <p:nvSpPr>
-          <p:cNvPr id="11" name="Rounded Rectangle 10"/>
-          <p:cNvSpPr/>
-          <p:nvPr/>
-        </p:nvSpPr>
-        <p:spPr>
-          <a:xfrm>
-            <a:off x="6233007" y="1234439"/>
-            <a:ext cx="5501487" cy="2057400"/>
-          </a:xfrm>
-          <a:prstGeom prst="roundRect">
-            <a:avLst>
-              <a:gd name="adj" fmla="val 6000"/>
-            </a:avLst>
-          </a:prstGeom>
-          <a:solidFill>
-            <a:srgbClr val="FFFFFF"/>
-          </a:solidFill>
-          <a:ln w="15875">
-            <a:solidFill>
-              <a:srgbClr val="EA580C"/>
-            </a:solidFill>
-          </a:ln>
-          <a:effectLst/>
-        </p:spPr>
-        <p:style>
-          <a:lnRef idx="1">
-            <a:schemeClr val="accent1"/>
-          </a:lnRef>
-          <a:fillRef idx="3">
-            <a:schemeClr val="accent1"/>
-          </a:fillRef>
-          <a:effectRef idx="2">
-            <a:schemeClr val="accent1"/>
-          </a:effectRef>
-          <a:fontRef idx="minor">
-            <a:schemeClr val="lt1"/>
-          </a:fontRef>
-        </p:style>
-        <p:txBody>
-          <a:bodyPr rtlCol="0" anchor="ctr"/>
-          <a:lstStyle/>
-          <a:p>
-            <a:pPr algn="ctr"/>
-          </a:p>
-        </p:txBody>
-      </p:sp>
-      <p:sp>
-        <p:nvSpPr>
-          <p:cNvPr id="12" name="Rectangle 11"/>
-          <p:cNvSpPr/>
-          <p:nvPr/>
-        </p:nvSpPr>
-        <p:spPr>
-          <a:xfrm>
-            <a:off x="6233007" y="1234439"/>
-            <a:ext cx="109728" cy="2057400"/>
-          </a:xfrm>
-          <a:prstGeom prst="rect">
-            <a:avLst/>
-          </a:prstGeom>
-          <a:solidFill>
-            <a:srgbClr val="EA580C"/>
-          </a:solidFill>
-          <a:ln>
-            <a:noFill/>
-          </a:ln>
-          <a:effectLst/>
-        </p:spPr>
-        <p:style>
-          <a:lnRef idx="1">
-            <a:schemeClr val="accent1"/>
-          </a:lnRef>
-          <a:fillRef idx="3">
-            <a:schemeClr val="accent1"/>
-          </a:fillRef>
-          <a:effectRef idx="2">
-            <a:schemeClr val="accent1"/>
-          </a:effectRef>
-          <a:fontRef idx="minor">
-            <a:schemeClr val="lt1"/>
-          </a:fontRef>
-        </p:style>
-        <p:txBody>
-          <a:bodyPr rtlCol="0" anchor="ctr"/>
-          <a:lstStyle/>
-          <a:p>
-            <a:pPr algn="ctr"/>
-          </a:p>
-        </p:txBody>
-      </p:sp>
-      <p:sp>
-        <p:nvSpPr>
-          <p:cNvPr id="13" name="TextBox 12"/>
-          <p:cNvSpPr txBox="1"/>
-          <p:nvPr/>
-        </p:nvSpPr>
-        <p:spPr>
-          <a:xfrm>
-            <a:off x="6415887" y="1307592"/>
-            <a:ext cx="5227167" cy="457200"/>
-          </a:xfrm>
-          <a:prstGeom prst="rect">
-            <a:avLst/>
-          </a:prstGeom>
-          <a:noFill/>
-        </p:spPr>
-        <p:txBody>
-          <a:bodyPr wrap="square" anchor="t" lIns="73152" rIns="73152" tIns="36576" bIns="36576">
-            <a:spAutoFit/>
-          </a:bodyPr>
-          <a:lstStyle/>
-          <a:p>
-            <a:pPr algn="l">
-              <a:spcAft>
-                <a:spcPts val="0"/>
-              </a:spcAft>
-            </a:pPr>
-            <a:r>
-              <a:rPr sz="2000" b="1" i="0">
-                <a:solidFill>
-                  <a:srgbClr val="EA580C"/>
-                </a:solidFill>
-                <a:latin typeface="Arial"/>
-              </a:rPr>
-              <a:t>2  Lessons</a:t>
-            </a:r>
-          </a:p>
-        </p:txBody>
-      </p:sp>
-      <p:sp>
-        <p:nvSpPr>
-          <p:cNvPr id="14" name="TextBox 13"/>
-          <p:cNvSpPr txBox="1"/>
-          <p:nvPr/>
-        </p:nvSpPr>
-        <p:spPr>
-          <a:xfrm>
-            <a:off x="6415887" y="1764791"/>
-            <a:ext cx="5227167" cy="1453895"/>
-          </a:xfrm>
-          <a:prstGeom prst="rect">
-            <a:avLst/>
-          </a:prstGeom>
-          <a:noFill/>
-        </p:spPr>
-        <p:txBody>
-          <a:bodyPr wrap="square" anchor="t" lIns="73152" rIns="73152" tIns="36576" bIns="36576">
-            <a:spAutoFit/>
-          </a:bodyPr>
-          <a:lstStyle/>
-          <a:p>
-            <a:pPr algn="l" marL="292608" indent="-256032">
-              <a:spcAft>
-                <a:spcPts val="600"/>
-              </a:spcAft>
-              <a:buChar char="•"/>
-            </a:pPr>
-            <a:r>
-              <a:rPr sz="1800" b="0" i="0">
-                <a:solidFill>
-                  <a:srgbClr val="0F172A"/>
-                </a:solidFill>
-                <a:latin typeface="Arial"/>
-              </a:rPr>
-              <a:t>Price = probability · spread + fee break-even · injury shift</a:t>
-            </a:r>
-          </a:p>
-          <a:p>
-            <a:pPr algn="l" marL="292608" indent="-256032">
-              <a:spcAft>
-                <a:spcPts val="600"/>
-              </a:spcAft>
-              <a:buChar char="•"/>
-            </a:pPr>
-            <a:r>
-              <a:rPr sz="1800" b="0" i="0">
-                <a:solidFill>
-                  <a:srgbClr val="0F172A"/>
-                </a:solidFill>
-                <a:latin typeface="Arial"/>
-              </a:rPr>
-              <a:t>Priced in / chasing · long shots · closing line · passing</a:t>
-            </a:r>
-          </a:p>
-        </p:txBody>
-      </p:sp>
-      <p:sp>
-        <p:nvSpPr>
-          <p:cNvPr id="15" name="Rounded Rectangle 14"/>
-          <p:cNvSpPr/>
-          <p:nvPr/>
-        </p:nvSpPr>
-        <p:spPr>
-          <a:xfrm>
-            <a:off x="457200" y="3474720"/>
-            <a:ext cx="5501487" cy="2057400"/>
-          </a:xfrm>
-          <a:prstGeom prst="roundRect">
-            <a:avLst>
-              <a:gd name="adj" fmla="val 6000"/>
-            </a:avLst>
-          </a:prstGeom>
-          <a:solidFill>
-            <a:srgbClr val="FFFFFF"/>
-          </a:solidFill>
-          <a:ln w="15875">
-            <a:solidFill>
-              <a:srgbClr val="16A34A"/>
-            </a:solidFill>
-          </a:ln>
-          <a:effectLst/>
-        </p:spPr>
-        <p:style>
-          <a:lnRef idx="1">
-            <a:schemeClr val="accent1"/>
-          </a:lnRef>
-          <a:fillRef idx="3">
-            <a:schemeClr val="accent1"/>
-          </a:fillRef>
-          <a:effectRef idx="2">
-            <a:schemeClr val="accent1"/>
-          </a:effectRef>
-          <a:fontRef idx="minor">
-            <a:schemeClr val="lt1"/>
-          </a:fontRef>
-        </p:style>
-        <p:txBody>
-          <a:bodyPr rtlCol="0" anchor="ctr"/>
-          <a:lstStyle/>
-          <a:p>
-            <a:pPr algn="ctr"/>
-          </a:p>
-        </p:txBody>
-      </p:sp>
-      <p:sp>
-        <p:nvSpPr>
-          <p:cNvPr id="16" name="Rectangle 15"/>
-          <p:cNvSpPr/>
-          <p:nvPr/>
-        </p:nvSpPr>
-        <p:spPr>
-          <a:xfrm>
-            <a:off x="457200" y="3474720"/>
-            <a:ext cx="109728" cy="2057400"/>
-          </a:xfrm>
-          <a:prstGeom prst="rect">
-            <a:avLst/>
-          </a:prstGeom>
-          <a:solidFill>
-            <a:srgbClr val="16A34A"/>
-          </a:solidFill>
-          <a:ln>
-            <a:noFill/>
-          </a:ln>
-          <a:effectLst/>
-        </p:spPr>
-        <p:style>
-          <a:lnRef idx="1">
-            <a:schemeClr val="accent1"/>
-          </a:lnRef>
-          <a:fillRef idx="3">
-            <a:schemeClr val="accent1"/>
-          </a:fillRef>
-          <a:effectRef idx="2">
-            <a:schemeClr val="accent1"/>
-          </a:effectRef>
-          <a:fontRef idx="minor">
-            <a:schemeClr val="lt1"/>
-          </a:fontRef>
-        </p:style>
-        <p:txBody>
-          <a:bodyPr rtlCol="0" anchor="ctr"/>
-          <a:lstStyle/>
-          <a:p>
-            <a:pPr algn="ctr"/>
-          </a:p>
-        </p:txBody>
-      </p:sp>
-      <p:sp>
-        <p:nvSpPr>
-          <p:cNvPr id="17" name="TextBox 16"/>
-          <p:cNvSpPr txBox="1"/>
-          <p:nvPr/>
-        </p:nvSpPr>
-        <p:spPr>
-          <a:xfrm>
-            <a:off x="640080" y="3547872"/>
-            <a:ext cx="5227167" cy="457200"/>
-          </a:xfrm>
-          <a:prstGeom prst="rect">
-            <a:avLst/>
-          </a:prstGeom>
-          <a:noFill/>
-        </p:spPr>
-        <p:txBody>
-          <a:bodyPr wrap="square" anchor="t" lIns="73152" rIns="73152" tIns="36576" bIns="36576">
-            <a:spAutoFit/>
-          </a:bodyPr>
-          <a:lstStyle/>
-          <a:p>
-            <a:pPr algn="l">
-              <a:spcAft>
-                <a:spcPts val="0"/>
-              </a:spcAft>
-            </a:pPr>
-            <a:r>
-              <a:rPr sz="2000" b="1" i="0">
-                <a:solidFill>
-                  <a:srgbClr val="16A34A"/>
-                </a:solidFill>
-                <a:latin typeface="Arial"/>
-              </a:rPr>
-              <a:t>3  Your call</a:t>
-            </a:r>
-          </a:p>
-        </p:txBody>
-      </p:sp>
-      <p:sp>
-        <p:nvSpPr>
-          <p:cNvPr id="18" name="TextBox 17"/>
-          <p:cNvSpPr txBox="1"/>
-          <p:nvPr/>
-        </p:nvSpPr>
-        <p:spPr>
-          <a:xfrm>
-            <a:off x="640080" y="4005072"/>
-            <a:ext cx="5227167" cy="1453895"/>
-          </a:xfrm>
-          <a:prstGeom prst="rect">
-            <a:avLst/>
-          </a:prstGeom>
-          <a:noFill/>
-        </p:spPr>
-        <p:txBody>
-          <a:bodyPr wrap="square" anchor="t" lIns="73152" rIns="73152" tIns="36576" bIns="36576">
-            <a:spAutoFit/>
-          </a:bodyPr>
-          <a:lstStyle/>
-          <a:p>
-            <a:pPr algn="l" marL="292608" indent="-256032">
-              <a:spcAft>
-                <a:spcPts val="600"/>
-              </a:spcAft>
-              <a:buChar char="•"/>
-            </a:pPr>
-            <a:r>
-              <a:rPr sz="1800" b="0" i="0">
-                <a:solidFill>
-                  <a:srgbClr val="0F172A"/>
-                </a:solidFill>
-                <a:latin typeface="Arial"/>
-              </a:rPr>
-              <a:t>Back a team or pass, paper stake</a:t>
-            </a:r>
-          </a:p>
-          <a:p>
-            <a:pPr algn="l" marL="292608" indent="-256032">
-              <a:spcAft>
-                <a:spcPts val="600"/>
-              </a:spcAft>
-              <a:buChar char="•"/>
-            </a:pPr>
-            <a:r>
-              <a:rPr sz="1800" b="0" i="0">
-                <a:solidFill>
-                  <a:srgbClr val="0F172A"/>
-                </a:solidFill>
-                <a:latin typeface="Arial"/>
-              </a:rPr>
-              <a:t>Then: close, CLV, result, P&amp;L, and what the agent did</a:t>
-            </a:r>
-          </a:p>
-        </p:txBody>
-      </p:sp>
-      <p:sp>
-        <p:nvSpPr>
-          <p:cNvPr id="19" name="Rounded Rectangle 18"/>
-          <p:cNvSpPr/>
-          <p:nvPr/>
-        </p:nvSpPr>
-        <p:spPr>
-          <a:xfrm>
-            <a:off x="6233007" y="3474720"/>
-            <a:ext cx="5501487" cy="2057400"/>
+            <a:ext cx="5120640" cy="5074920"/>
           </a:xfrm>
           <a:prstGeom prst="roundRect">
             <a:avLst>
@@ -7624,14 +7250,14 @@
       </p:sp>
       <p:sp>
         <p:nvSpPr>
-          <p:cNvPr id="20" name="Rectangle 19"/>
+          <p:cNvPr id="8" name="Rectangle 7"/>
           <p:cNvSpPr/>
           <p:nvPr/>
         </p:nvSpPr>
         <p:spPr>
           <a:xfrm>
-            <a:off x="6233007" y="3474720"/>
-            <a:ext cx="109728" cy="2057400"/>
+            <a:off x="457200" y="1234439"/>
+            <a:ext cx="109728" cy="5074920"/>
           </a:xfrm>
           <a:prstGeom prst="rect">
             <a:avLst/>
@@ -7668,14 +7294,14 @@
       </p:sp>
       <p:sp>
         <p:nvSpPr>
-          <p:cNvPr id="21" name="TextBox 20"/>
+          <p:cNvPr id="9" name="TextBox 8"/>
           <p:cNvSpPr txBox="1"/>
           <p:nvPr/>
         </p:nvSpPr>
         <p:spPr>
           <a:xfrm>
-            <a:off x="6415887" y="3547872"/>
-            <a:ext cx="5227167" cy="457200"/>
+            <a:off x="640080" y="1307592"/>
+            <a:ext cx="4846320" cy="457200"/>
           </a:xfrm>
           <a:prstGeom prst="rect">
             <a:avLst/>
@@ -7700,21 +7326,21 @@
                 </a:solidFill>
                 <a:latin typeface="Arial"/>
               </a:rPr>
-              <a:t>4  Habit feedback</a:t>
-            </a:r>
-          </a:p>
-        </p:txBody>
-      </p:sp>
-      <p:sp>
-        <p:nvSpPr>
-          <p:cNvPr id="22" name="TextBox 21"/>
+              <a:t>What we claim</a:t>
+            </a:r>
+          </a:p>
+        </p:txBody>
+      </p:sp>
+      <p:sp>
+        <p:nvSpPr>
+          <p:cNvPr id="10" name="TextBox 9"/>
           <p:cNvSpPr txBox="1"/>
           <p:nvPr/>
         </p:nvSpPr>
         <p:spPr>
           <a:xfrm>
-            <a:off x="6415887" y="4005072"/>
-            <a:ext cx="5227167" cy="1453895"/>
+            <a:off x="640080" y="1764791"/>
+            <a:ext cx="4846320" cy="4471416"/>
           </a:xfrm>
           <a:prstGeom prst="rect">
             <a:avLst/>
@@ -7740,7 +7366,7 @@
                 </a:solidFill>
                 <a:latin typeface="Arial"/>
               </a:rPr>
-              <a:t>Paying above the close, long shots, chasing</a:t>
+              <a:t>Structural disadvantages: costs, speed, expertise</a:t>
             </a:r>
           </a:p>
           <a:p>
@@ -7751,35 +7377,133 @@
               <a:buChar char="•"/>
             </a:pPr>
             <a:r>
+              <a:rPr sz="1800" b="1" i="0">
+                <a:solidFill>
+                  <a:srgbClr val="0F172A"/>
+                </a:solidFill>
+                <a:latin typeface="Arial"/>
+              </a:rPr>
+              <a:t>Not</a:t>
+            </a:r>
+            <a:r>
               <a:rPr sz="1800" b="0" i="0">
                 <a:solidFill>
                   <a:srgbClr val="0F172A"/>
                 </a:solidFill>
                 <a:latin typeface="Arial"/>
               </a:rPr>
-              <a:t>Small samples are mostly luck</a:t>
-            </a:r>
-          </a:p>
-        </p:txBody>
-      </p:sp>
-      <p:sp>
-        <p:nvSpPr>
-          <p:cNvPr id="23" name="Rounded Rectangle 22"/>
+              <a:t> manipulation or fraud</a:t>
+            </a:r>
+          </a:p>
+          <a:p>
+            <a:pPr algn="l" marL="292608" indent="-256032">
+              <a:spcAft>
+                <a:spcPts val="600"/>
+              </a:spcAft>
+              <a:buChar char="•"/>
+            </a:pPr>
+            <a:r>
+              <a:rPr sz="1800" b="1" i="0">
+                <a:solidFill>
+                  <a:srgbClr val="0F172A"/>
+                </a:solidFill>
+                <a:latin typeface="Arial"/>
+              </a:rPr>
+              <a:t>No</a:t>
+            </a:r>
+            <a:r>
+              <a:rPr sz="1800" b="0" i="0">
+                <a:solidFill>
+                  <a:srgbClr val="0F172A"/>
+                </a:solidFill>
+                <a:latin typeface="Arial"/>
+              </a:rPr>
+              <a:t> accusation against Kalshi or any venue</a:t>
+            </a:r>
+          </a:p>
+          <a:p>
+            <a:pPr algn="l" marL="292608" indent="-256032">
+              <a:spcAft>
+                <a:spcPts val="600"/>
+              </a:spcAft>
+              <a:buChar char="•"/>
+            </a:pPr>
+            <a:r>
+              <a:rPr sz="1800" b="0" i="0">
+                <a:solidFill>
+                  <a:srgbClr val="0F172A"/>
+                </a:solidFill>
+                <a:latin typeface="Arial"/>
+              </a:rPr>
+              <a:t>Paper money; public data only</a:t>
+            </a:r>
+          </a:p>
+        </p:txBody>
+      </p:sp>
+      <p:sp>
+        <p:nvSpPr>
+          <p:cNvPr id="11" name="Rounded Rectangle 10"/>
           <p:cNvSpPr/>
           <p:nvPr/>
         </p:nvSpPr>
         <p:spPr>
           <a:xfrm>
-            <a:off x="457200" y="5760720"/>
-            <a:ext cx="11277295" cy="502920"/>
+            <a:off x="5852160" y="1234439"/>
+            <a:ext cx="5882335" cy="5074920"/>
           </a:xfrm>
           <a:prstGeom prst="roundRect">
             <a:avLst>
-              <a:gd name="adj" fmla="val 12000"/>
+              <a:gd name="adj" fmla="val 6000"/>
             </a:avLst>
           </a:prstGeom>
           <a:solidFill>
-            <a:srgbClr val="FEF3C7"/>
+            <a:srgbClr val="FFFFFF"/>
+          </a:solidFill>
+          <a:ln w="15875">
+            <a:solidFill>
+              <a:srgbClr val="DC2626"/>
+            </a:solidFill>
+          </a:ln>
+          <a:effectLst/>
+        </p:spPr>
+        <p:style>
+          <a:lnRef idx="1">
+            <a:schemeClr val="accent1"/>
+          </a:lnRef>
+          <a:fillRef idx="3">
+            <a:schemeClr val="accent1"/>
+          </a:fillRef>
+          <a:effectRef idx="2">
+            <a:schemeClr val="accent1"/>
+          </a:effectRef>
+          <a:fontRef idx="minor">
+            <a:schemeClr val="lt1"/>
+          </a:fontRef>
+        </p:style>
+        <p:txBody>
+          <a:bodyPr rtlCol="0" anchor="ctr"/>
+          <a:lstStyle/>
+          <a:p>
+            <a:pPr algn="ctr"/>
+          </a:p>
+        </p:txBody>
+      </p:sp>
+      <p:sp>
+        <p:nvSpPr>
+          <p:cNvPr id="12" name="Rectangle 11"/>
+          <p:cNvSpPr/>
+          <p:nvPr/>
+        </p:nvSpPr>
+        <p:spPr>
+          <a:xfrm>
+            <a:off x="5852160" y="1234439"/>
+            <a:ext cx="109728" cy="5074920"/>
+          </a:xfrm>
+          <a:prstGeom prst="rect">
+            <a:avLst/>
+          </a:prstGeom>
+          <a:solidFill>
+            <a:srgbClr val="DC2626"/>
           </a:solidFill>
           <a:ln>
             <a:noFill/>
@@ -7810,14 +7534,14 @@
       </p:sp>
       <p:sp>
         <p:nvSpPr>
-          <p:cNvPr id="24" name="TextBox 23"/>
+          <p:cNvPr id="13" name="TextBox 12"/>
           <p:cNvSpPr txBox="1"/>
           <p:nvPr/>
         </p:nvSpPr>
         <p:spPr>
           <a:xfrm>
-            <a:off x="548640" y="5760720"/>
-            <a:ext cx="11094415" cy="502920"/>
+            <a:off x="6035040" y="1307592"/>
+            <a:ext cx="5608015" cy="457200"/>
           </a:xfrm>
           <a:prstGeom prst="rect">
             <a:avLst/>
@@ -7825,7 +7549,7 @@
           <a:noFill/>
         </p:spPr>
         <p:txBody>
-          <a:bodyPr wrap="square" anchor="ctr" lIns="73152" rIns="73152" tIns="36576" bIns="36576">
+          <a:bodyPr wrap="square" anchor="t" lIns="73152" rIns="73152" tIns="36576" bIns="36576">
             <a:spAutoFit/>
           </a:bodyPr>
           <a:lstStyle/>
@@ -7836,13 +7560,121 @@
               </a:spcAft>
             </a:pPr>
             <a:r>
+              <a:rPr sz="2000" b="1" i="0">
+                <a:solidFill>
+                  <a:srgbClr val="DC2626"/>
+                </a:solidFill>
+                <a:latin typeface="Arial"/>
+              </a:rPr>
+              <a:t>Caveats</a:t>
+            </a:r>
+          </a:p>
+        </p:txBody>
+      </p:sp>
+      <p:sp>
+        <p:nvSpPr>
+          <p:cNvPr id="14" name="TextBox 13"/>
+          <p:cNvSpPr txBox="1"/>
+          <p:nvPr/>
+        </p:nvSpPr>
+        <p:spPr>
+          <a:xfrm>
+            <a:off x="6035040" y="1764791"/>
+            <a:ext cx="5608015" cy="4471416"/>
+          </a:xfrm>
+          <a:prstGeom prst="rect">
+            <a:avLst/>
+          </a:prstGeom>
+          <a:noFill/>
+        </p:spPr>
+        <p:txBody>
+          <a:bodyPr wrap="square" anchor="t" lIns="73152" rIns="73152" tIns="36576" bIns="36576">
+            <a:spAutoFit/>
+          </a:bodyPr>
+          <a:lstStyle/>
+          <a:p>
+            <a:pPr algn="l" marL="292608" indent="-256032">
+              <a:spcAft>
+                <a:spcPts val="600"/>
+              </a:spcAft>
+              <a:buChar char="•"/>
+            </a:pPr>
+            <a:r>
               <a:rPr sz="1800" b="0" i="0">
                 <a:solidFill>
                   <a:srgbClr val="0F172A"/>
                 </a:solidFill>
                 <a:latin typeface="Arial"/>
               </a:rPr>
-              <a:t>Educational, paper money only · only information public at that moment · no “lock” wording</a:t>
+              <a:t>One season (1,316 games), game-winner markets only</a:t>
+            </a:r>
+          </a:p>
+          <a:p>
+            <a:pPr algn="l" marL="292608" indent="-256032">
+              <a:spcAft>
+                <a:spcPts val="600"/>
+              </a:spcAft>
+              <a:buChar char="•"/>
+            </a:pPr>
+            <a:r>
+              <a:rPr sz="1800" b="0" i="0">
+                <a:solidFill>
+                  <a:srgbClr val="0F172A"/>
+                </a:solidFill>
+                <a:latin typeface="Arial"/>
+              </a:rPr>
+              <a:t>News stamped tip − 30 min (proxy; real reports come earlier)</a:t>
+            </a:r>
+          </a:p>
+          <a:p>
+            <a:pPr algn="l" marL="292608" indent="-256032">
+              <a:spcAft>
+                <a:spcPts val="600"/>
+              </a:spcAft>
+              <a:buChar char="•"/>
+            </a:pPr>
+            <a:r>
+              <a:rPr sz="1800" b="0" i="0">
+                <a:solidFill>
+                  <a:srgbClr val="0F172A"/>
+                </a:solidFill>
+                <a:latin typeface="Arial"/>
+              </a:rPr>
+              <a:t>Costs measured for a $20 order at tip − 60 min</a:t>
+            </a:r>
+          </a:p>
+          <a:p>
+            <a:pPr algn="l" marL="292608" indent="-256032">
+              <a:spcAft>
+                <a:spcPts val="600"/>
+              </a:spcAft>
+              <a:buChar char="•"/>
+            </a:pPr>
+            <a:r>
+              <a:rPr sz="1800" b="0" i="0">
+                <a:solidFill>
+                  <a:srgbClr val="0F172A"/>
+                </a:solidFill>
+                <a:latin typeface="Arial"/>
+              </a:rPr>
+              <a:t>Long-shot test underpowered; agent CLV within ~1 s.e. of zero</a:t>
+            </a:r>
+          </a:p>
+          <a:p>
+            <a:pPr algn="l" marL="292608" indent="-256032">
+              <a:spcAft>
+                <a:spcPts val="600"/>
+              </a:spcAft>
+              <a:buChar char="•"/>
+            </a:pPr>
+            <a:r>
+              <a:rPr sz="1800" b="0" i="0">
+                <a:solidFill>
+                  <a:srgbClr val="0F172A"/>
+                </a:solidFill>
+                <a:latin typeface="Arial"/>
+              </a:rPr>
+              <a:t>In progress: statistical rigour and the M6 market-impact model; numbers will update</a:t>
             </a:r>
           </a:p>
         </p:txBody>
@@ -8026,7 +7858,7 @@
                 </a:solidFill>
                 <a:latin typeface="Arial"/>
               </a:rPr>
-              <a:t>DASC7606C Group 12 · Market-Graded Learning for NBA Game-Impact Intelligence</a:t>
+              <a:t>DASC7606C Group 12 · Can a consumer beat a sports prediction market?</a:t>
             </a:r>
           </a:p>
         </p:txBody>
@@ -8089,8 +7921,8 @@
                 <a:tableStyleId>{5C22544A-7EE6-4342-B048-85BDC9FD1C3A}</a:tableStyleId>
               </a:tblPr>
               <a:tblGrid>
-                <a:gridCol w="2560320"/>
-                <a:gridCol w="8716975"/>
+                <a:gridCol w="2377440"/>
+                <a:gridCol w="8899855"/>
               </a:tblGrid>
               <a:tr h="603504">
                 <a:tc>
@@ -8129,7 +7961,7 @@
                           </a:solidFill>
                           <a:latin typeface="Arial"/>
                         </a:rPr>
-                        <a:t>What we show</a:t>
+                        <a:t>What to watch</a:t>
                       </a:r>
                     </a:p>
                   </a:txBody>
@@ -8177,7 +8009,7 @@
                           </a:solidFill>
                           <a:latin typeface="Arial"/>
                         </a:rPr>
-                        <a:t>Late news → forecast before / after, model vs market, guarded paper order</a:t>
+                        <a:t>News → estimate vs bid-ask → usually no order, with the reason (or a guarded paper order)</a:t>
                       </a:r>
                     </a:p>
                   </a:txBody>
@@ -8225,7 +8057,7 @@
                           </a:solidFill>
                           <a:latin typeface="Arial"/>
                         </a:rPr>
-                        <a:t>Explain one decision time; take a paper trade and compare with the agent</a:t>
+                        <a:t>Break-even after spread + fee; paper call vs the close and the agent</a:t>
                       </a:r>
                     </a:p>
                   </a:txBody>
@@ -8273,7 +8105,7 @@
                           </a:solidFill>
                           <a:latin typeface="Arial"/>
                         </a:rPr>
-                        <a:t>Same forecast, four channels: platform, media, team, retail</a:t>
+                        <a:t>Retail: model vs market and no-order reason; no market language for media / team</a:t>
                       </a:r>
                     </a:p>
                   </a:txBody>
@@ -8321,7 +8153,7 @@
                           </a:solidFill>
                           <a:latin typeface="Arial"/>
                         </a:rPr>
-                        <a:t>Reviewer proposes a rule; the gate keeps or rejects it; rule reused later</a:t>
+                        <a:t>Gate keeps protective rules (skip long shots, skip chasing)</a:t>
                       </a:r>
                     </a:p>
                   </a:txBody>
@@ -8417,7 +8249,7 @@
                           </a:solidFill>
                           <a:latin typeface="Arial"/>
                         </a:rPr>
-                        <a:t>Held-out results and M4 vs the market</a:t>
+                        <a:t>Held-out results and the market beating our model</a:t>
                       </a:r>
                     </a:p>
                   </a:txBody>
@@ -8657,7 +8489,7 @@
                 </a:solidFill>
                 <a:latin typeface="Arial"/>
               </a:rPr>
-              <a:t>Conclusion, next steps and Q&amp;A</a:t>
+              <a:t>Recommendations, next steps and Q&amp;A</a:t>
             </a:r>
           </a:p>
         </p:txBody>
@@ -8696,7 +8528,7 @@
                 </a:solidFill>
                 <a:latin typeface="Arial"/>
               </a:rPr>
-              <a:t>DASC7606C Group 12 · Market-Graded Learning for NBA Game-Impact Intelligence</a:t>
+              <a:t>DASC7606C Group 12 · Can a consumer beat a sports prediction market?</a:t>
             </a:r>
           </a:p>
         </p:txBody>
@@ -8866,7 +8698,7 @@
                 </a:solidFill>
                 <a:latin typeface="Arial"/>
               </a:rPr>
-              <a:t>What we showed</a:t>
+              <a:t>For products and policy</a:t>
             </a:r>
           </a:p>
         </p:txBody>
@@ -8906,7 +8738,7 @@
                 </a:solidFill>
                 <a:latin typeface="Arial"/>
               </a:rPr>
-              <a:t>The market beats our win model; we use it as the base rate</a:t>
+              <a:t>Show the all-in cost and break-even before every order</a:t>
             </a:r>
           </a:p>
           <a:p>
@@ -8923,7 +8755,7 @@
                 </a:solidFill>
                 <a:latin typeface="Arial"/>
               </a:rPr>
-              <a:t>Anchor + gated learning: −$2,087 → −$32 on 74 trades</a:t>
+              <a:t>Default warning: “this news is likely priced in”</a:t>
             </a:r>
           </a:p>
           <a:p>
@@ -8940,7 +8772,7 @@
                 </a:solidFill>
                 <a:latin typeface="Arial"/>
               </a:rPr>
-              <a:t>Guardrails are code: 9 / 9 violations blocked</a:t>
+              <a:t>Education before the first trade; default stake limits</a:t>
             </a:r>
           </a:p>
         </p:txBody>
@@ -9071,7 +8903,7 @@
                 </a:solidFill>
                 <a:latin typeface="Arial"/>
               </a:rPr>
-              <a:t>Next steps</a:t>
+              <a:t>Our next steps</a:t>
             </a:r>
           </a:p>
         </p:txBody>
@@ -9111,7 +8943,7 @@
                 </a:solidFill>
                 <a:latin typeface="Arial"/>
               </a:rPr>
-              <a:t>Enforce a daily-loss stop</a:t>
+              <a:t>Finish the statistical tests and the M6 market-impact model</a:t>
             </a:r>
           </a:p>
           <a:p>
@@ -9128,7 +8960,7 @@
                 </a:solidFill>
                 <a:latin typeface="Arial"/>
               </a:rPr>
-              <a:t>Timestamped injury reports instead of the tip − 30 min proxy</a:t>
+              <a:t>Show the full break-even in every retail brief</a:t>
             </a:r>
           </a:p>
           <a:p>
@@ -9145,7 +8977,7 @@
                 </a:solidFill>
                 <a:latin typeface="Arial"/>
               </a:rPr>
-              <a:t>Player-prop markets</a:t>
+              <a:t>Enforce a daily-loss stop</a:t>
             </a:r>
           </a:p>
           <a:p>
@@ -9162,7 +8994,7 @@
                 </a:solidFill>
                 <a:latin typeface="Arial"/>
               </a:rPr>
-              <a:t>Evaluate LLM (Gemini) mode vs offline rules</a:t>
+              <a:t>Timestamped injury reports; player-prop markets</a:t>
             </a:r>
           </a:p>
         </p:txBody>
@@ -9346,7 +9178,7 @@
                 </a:solidFill>
                 <a:latin typeface="Arial"/>
               </a:rPr>
-              <a:t>The problem: late news moves win probabilities</a:t>
+              <a:t>The belief: “I follow the news, so I can beat the market”</a:t>
             </a:r>
           </a:p>
         </p:txBody>
@@ -9385,7 +9217,7 @@
                 </a:solidFill>
                 <a:latin typeface="Arial"/>
               </a:rPr>
-              <a:t>DASC7606C Group 12 · Market-Graded Learning for NBA Game-Impact Intelligence</a:t>
+              <a:t>DASC7606C Group 12 · Can a consumer beat a sports prediction market?</a:t>
             </a:r>
           </a:p>
         </p:txBody>
@@ -9437,8 +9269,8 @@
         </p:nvSpPr>
         <p:spPr>
           <a:xfrm>
-            <a:off x="457200" y="1280160"/>
-            <a:ext cx="6035040" cy="4937760"/>
+            <a:off x="457200" y="1234439"/>
+            <a:ext cx="6126480" cy="5029200"/>
           </a:xfrm>
           <a:prstGeom prst="rect">
             <a:avLst/>
@@ -9451,89 +9283,104 @@
           </a:bodyPr>
           <a:lstStyle/>
           <a:p>
+            <a:pPr algn="l">
+              <a:spcAft>
+                <a:spcPts val="1000"/>
+              </a:spcAft>
+            </a:pPr>
+            <a:r>
+              <a:rPr sz="2000" b="1" i="0">
+                <a:solidFill>
+                  <a:srgbClr val="1E293B"/>
+                </a:solidFill>
+                <a:latin typeface="Arial"/>
+              </a:rPr>
+              <a:t>We built a serious agent to try:</a:t>
+            </a:r>
+          </a:p>
+          <a:p>
             <a:pPr algn="l" marL="292608" indent="-256032">
               <a:spcAft>
-                <a:spcPts val="1600"/>
+                <a:spcPts val="1000"/>
               </a:spcAft>
               <a:buChar char="•"/>
             </a:pPr>
             <a:r>
-              <a:rPr sz="2200" b="0" i="0">
+              <a:rPr sz="2000" b="0" i="0">
                 <a:solidFill>
                   <a:srgbClr val="0F172A"/>
                 </a:solidFill>
                 <a:latin typeface="Arial"/>
               </a:rPr>
-              <a:t>A starter ruled out shortly before tip-off changes a game's win probability</a:t>
+              <a:t>Public news: ESPN inactive lists and box scores, 3 seasons</a:t>
             </a:r>
           </a:p>
           <a:p>
             <a:pPr algn="l" marL="292608" indent="-256032">
               <a:spcAft>
-                <a:spcPts val="1600"/>
+                <a:spcPts val="1000"/>
               </a:spcAft>
               <a:buChar char="•"/>
             </a:pPr>
             <a:r>
-              <a:rPr sz="2200" b="0" i="0">
+              <a:rPr sz="2000" b="0" i="0">
                 <a:solidFill>
                   <a:srgbClr val="0F172A"/>
                 </a:solidFill>
                 <a:latin typeface="Arial"/>
               </a:rPr>
-              <a:t>Can an agent act on </a:t>
-            </a:r>
-            <a:r>
-              <a:rPr sz="2200" b="1" i="0">
-                <a:solidFill>
-                  <a:srgbClr val="0F172A"/>
-                </a:solidFill>
-                <a:latin typeface="Arial"/>
-              </a:rPr>
-              <a:t>public</a:t>
-            </a:r>
-            <a:r>
-              <a:rPr sz="2200" b="0" i="0">
-                <a:solidFill>
-                  <a:srgbClr val="0F172A"/>
-                </a:solidFill>
-                <a:latin typeface="Arial"/>
-              </a:rPr>
-              <a:t> news before prediction-market prices fully adjust?</a:t>
+              <a:t>Learned models: GRU player model, play classifier, win model</a:t>
             </a:r>
           </a:p>
           <a:p>
             <a:pPr algn="l" marL="292608" indent="-256032">
               <a:spcAft>
-                <a:spcPts val="1600"/>
+                <a:spcPts val="1000"/>
               </a:spcAft>
               <a:buChar char="•"/>
             </a:pPr>
             <a:r>
-              <a:rPr sz="2200" b="0" i="0">
+              <a:rPr sz="2000" b="0" i="0">
                 <a:solidFill>
                   <a:srgbClr val="0F172A"/>
                 </a:solidFill>
                 <a:latin typeface="Arial"/>
               </a:rPr>
-              <a:t>Grade every decision against the market price, not just win/loss</a:t>
+              <a:t>LangGraph agent loop, LLM-capable (Gemini), deterministic by default</a:t>
             </a:r>
           </a:p>
           <a:p>
             <a:pPr algn="l" marL="292608" indent="-256032">
               <a:spcAft>
-                <a:spcPts val="1600"/>
+                <a:spcPts val="1000"/>
               </a:spcAft>
               <a:buChar char="•"/>
             </a:pPr>
             <a:r>
-              <a:rPr sz="2200" b="0" i="0">
+              <a:rPr sz="2000" b="0" i="0">
                 <a:solidFill>
                   <a:srgbClr val="0F172A"/>
                 </a:solidFill>
                 <a:latin typeface="Arial"/>
               </a:rPr>
-              <a:t>Learn from mistakes, but keep a rule only if it passes a backtest on earlier days</a:t>
+              <a:t>Code risk limits and rules learned only through a backtest gate</a:t>
+            </a:r>
+          </a:p>
+          <a:p>
+            <a:pPr algn="l" marL="292608" indent="-256032">
+              <a:spcAft>
+                <a:spcPts val="1000"/>
+              </a:spcAft>
+              <a:buChar char="•"/>
+            </a:pPr>
+            <a:r>
+              <a:rPr sz="2000" b="0" i="0">
+                <a:solidFill>
+                  <a:srgbClr val="0F172A"/>
+                </a:solidFill>
+                <a:latin typeface="Arial"/>
+              </a:rPr>
+              <a:t>Graded against 1,316 Kalshi games (~3.9M price rows), 2025-26</a:t>
             </a:r>
           </a:p>
         </p:txBody>
@@ -9546,16 +9393,16 @@
         </p:nvSpPr>
         <p:spPr>
           <a:xfrm>
-            <a:off x="6858000" y="1280160"/>
-            <a:ext cx="4876495" cy="4983480"/>
+            <a:off x="6949440" y="1325880"/>
+            <a:ext cx="4785055" cy="4846320"/>
           </a:xfrm>
           <a:prstGeom prst="roundRect">
             <a:avLst>
-              <a:gd name="adj" fmla="val 4000"/>
+              <a:gd name="adj" fmla="val 5000"/>
             </a:avLst>
           </a:prstGeom>
           <a:solidFill>
-            <a:srgbClr val="F1F5F9"/>
+            <a:srgbClr val="1E293B"/>
           </a:solidFill>
           <a:ln>
             <a:noFill/>
@@ -9592,8 +9439,8 @@
         </p:nvSpPr>
         <p:spPr>
           <a:xfrm>
-            <a:off x="7040880" y="1371600"/>
-            <a:ext cx="4480560" cy="548640"/>
+            <a:off x="7223759" y="1508760"/>
+            <a:ext cx="4236415" cy="4480560"/>
           </a:xfrm>
           <a:prstGeom prst="rect">
             <a:avLst/>
@@ -9608,512 +9455,65 @@
           <a:p>
             <a:pPr algn="l">
               <a:spcAft>
-                <a:spcPts val="800"/>
+                <a:spcPts val="1600"/>
               </a:spcAft>
             </a:pPr>
             <a:r>
-              <a:rPr sz="2000" b="1" i="0">
-                <a:solidFill>
-                  <a:srgbClr val="1E293B"/>
-                </a:solidFill>
-                <a:latin typeface="Arial"/>
-              </a:rPr>
-              <a:t>Who uses it (one forecast core)</a:t>
-            </a:r>
-          </a:p>
-        </p:txBody>
-      </p:sp>
-      <p:sp>
-        <p:nvSpPr>
-          <p:cNvPr id="10" name="Rectangle 9"/>
-          <p:cNvSpPr/>
-          <p:nvPr/>
-        </p:nvSpPr>
-        <p:spPr>
-          <a:xfrm>
-            <a:off x="7040880" y="1965960"/>
-            <a:ext cx="91440" cy="685800"/>
-          </a:xfrm>
-          <a:prstGeom prst="rect">
-            <a:avLst/>
-          </a:prstGeom>
-          <a:solidFill>
-            <a:srgbClr val="2563EB"/>
-          </a:solidFill>
-          <a:ln>
-            <a:noFill/>
-          </a:ln>
-          <a:effectLst/>
-        </p:spPr>
-        <p:style>
-          <a:lnRef idx="1">
-            <a:schemeClr val="accent1"/>
-          </a:lnRef>
-          <a:fillRef idx="3">
-            <a:schemeClr val="accent1"/>
-          </a:fillRef>
-          <a:effectRef idx="2">
-            <a:schemeClr val="accent1"/>
-          </a:effectRef>
-          <a:fontRef idx="minor">
-            <a:schemeClr val="lt1"/>
-          </a:fontRef>
-        </p:style>
-        <p:txBody>
-          <a:bodyPr rtlCol="0" anchor="ctr"/>
-          <a:lstStyle/>
-          <a:p>
-            <a:pPr algn="ctr"/>
-          </a:p>
-        </p:txBody>
-      </p:sp>
-      <p:sp>
-        <p:nvSpPr>
-          <p:cNvPr id="11" name="TextBox 10"/>
-          <p:cNvSpPr txBox="1"/>
-          <p:nvPr/>
-        </p:nvSpPr>
-        <p:spPr>
-          <a:xfrm>
-            <a:off x="7223760" y="1920240"/>
-            <a:ext cx="4206240" cy="777240"/>
-          </a:xfrm>
-          <a:prstGeom prst="rect">
-            <a:avLst/>
-          </a:prstGeom>
-          <a:noFill/>
-        </p:spPr>
-        <p:txBody>
-          <a:bodyPr wrap="square" anchor="t" lIns="73152" rIns="73152" tIns="36576" bIns="36576">
-            <a:spAutoFit/>
-          </a:bodyPr>
-          <a:lstStyle/>
+              <a:rPr sz="2200" b="1" i="0">
+                <a:solidFill>
+                  <a:srgbClr val="FDBA74"/>
+                </a:solidFill>
+                <a:latin typeface="Arial"/>
+              </a:rPr>
+              <a:t>What we found</a:t>
+            </a:r>
+          </a:p>
           <a:p>
             <a:pPr algn="l">
               <a:spcAft>
-                <a:spcPts val="0"/>
+                <a:spcPts val="1600"/>
               </a:spcAft>
             </a:pPr>
             <a:r>
-              <a:rPr sz="1900" b="1" i="0">
-                <a:solidFill>
-                  <a:srgbClr val="2563EB"/>
-                </a:solidFill>
-                <a:latin typeface="Arial"/>
-              </a:rPr>
-              <a:t>Platforms (fantasy, media sites)</a:t>
+              <a:rPr sz="2200" b="0" i="0">
+                <a:solidFill>
+                  <a:srgbClr val="FFFFFF"/>
+                </a:solidFill>
+                <a:latin typeface="Arial"/>
+              </a:rPr>
+              <a:t>Even this agent does not beat the market after costs.</a:t>
             </a:r>
           </a:p>
           <a:p>
             <a:pPr algn="l">
               <a:spcAft>
-                <a:spcPts val="0"/>
+                <a:spcPts val="1600"/>
               </a:spcAft>
             </a:pPr>
             <a:r>
-              <a:rPr sz="1800" b="0" i="0">
-                <a:solidFill>
-                  <a:srgbClr val="0F172A"/>
-                </a:solidFill>
-                <a:latin typeface="Arial"/>
-              </a:rPr>
-              <a:t>audited projection refresh</a:t>
-            </a:r>
-          </a:p>
-        </p:txBody>
-      </p:sp>
-      <p:sp>
-        <p:nvSpPr>
-          <p:cNvPr id="12" name="Rectangle 11"/>
-          <p:cNvSpPr/>
-          <p:nvPr/>
-        </p:nvSpPr>
-        <p:spPr>
-          <a:xfrm>
-            <a:off x="7040880" y="2816352"/>
-            <a:ext cx="91440" cy="685800"/>
-          </a:xfrm>
-          <a:prstGeom prst="rect">
-            <a:avLst/>
-          </a:prstGeom>
-          <a:solidFill>
-            <a:srgbClr val="2563EB"/>
-          </a:solidFill>
-          <a:ln>
-            <a:noFill/>
-          </a:ln>
-          <a:effectLst/>
-        </p:spPr>
-        <p:style>
-          <a:lnRef idx="1">
-            <a:schemeClr val="accent1"/>
-          </a:lnRef>
-          <a:fillRef idx="3">
-            <a:schemeClr val="accent1"/>
-          </a:fillRef>
-          <a:effectRef idx="2">
-            <a:schemeClr val="accent1"/>
-          </a:effectRef>
-          <a:fontRef idx="minor">
-            <a:schemeClr val="lt1"/>
-          </a:fontRef>
-        </p:style>
-        <p:txBody>
-          <a:bodyPr rtlCol="0" anchor="ctr"/>
-          <a:lstStyle/>
-          <a:p>
-            <a:pPr algn="ctr"/>
-          </a:p>
-        </p:txBody>
-      </p:sp>
-      <p:sp>
-        <p:nvSpPr>
-          <p:cNvPr id="13" name="TextBox 12"/>
-          <p:cNvSpPr txBox="1"/>
-          <p:nvPr/>
-        </p:nvSpPr>
-        <p:spPr>
-          <a:xfrm>
-            <a:off x="7223760" y="2770632"/>
-            <a:ext cx="4206240" cy="777240"/>
-          </a:xfrm>
-          <a:prstGeom prst="rect">
-            <a:avLst/>
-          </a:prstGeom>
-          <a:noFill/>
-        </p:spPr>
-        <p:txBody>
-          <a:bodyPr wrap="square" anchor="t" lIns="73152" rIns="73152" tIns="36576" bIns="36576">
-            <a:spAutoFit/>
-          </a:bodyPr>
-          <a:lstStyle/>
+              <a:rPr sz="2200" b="0" i="0">
+                <a:solidFill>
+                  <a:srgbClr val="FFFFFF"/>
+                </a:solidFill>
+                <a:latin typeface="Arial"/>
+              </a:rPr>
+              <a:t>The reasons are structural: costs, speed and expertise.</a:t>
+            </a:r>
+          </a:p>
           <a:p>
             <a:pPr algn="l">
               <a:spcAft>
-                <a:spcPts val="0"/>
+                <a:spcPts val="1600"/>
               </a:spcAft>
             </a:pPr>
             <a:r>
-              <a:rPr sz="1900" b="1" i="0">
-                <a:solidFill>
-                  <a:srgbClr val="2563EB"/>
-                </a:solidFill>
-                <a:latin typeface="Arial"/>
-              </a:rPr>
-              <a:t>Media</a:t>
-            </a:r>
-          </a:p>
-          <a:p>
-            <a:pPr algn="l">
-              <a:spcAft>
-                <a:spcPts val="0"/>
-              </a:spcAft>
-            </a:pPr>
-            <a:r>
-              <a:rPr sz="1800" b="0" i="0">
-                <a:solidFill>
-                  <a:srgbClr val="0F172A"/>
-                </a:solidFill>
-                <a:latin typeface="Arial"/>
-              </a:rPr>
-              <a:t>“who gains, who loses”, no bets</a:t>
-            </a:r>
-          </a:p>
-        </p:txBody>
-      </p:sp>
-      <p:sp>
-        <p:nvSpPr>
-          <p:cNvPr id="14" name="Rectangle 13"/>
-          <p:cNvSpPr/>
-          <p:nvPr/>
-        </p:nvSpPr>
-        <p:spPr>
-          <a:xfrm>
-            <a:off x="7040880" y="3666744"/>
-            <a:ext cx="91440" cy="685800"/>
-          </a:xfrm>
-          <a:prstGeom prst="rect">
-            <a:avLst/>
-          </a:prstGeom>
-          <a:solidFill>
-            <a:srgbClr val="2563EB"/>
-          </a:solidFill>
-          <a:ln>
-            <a:noFill/>
-          </a:ln>
-          <a:effectLst/>
-        </p:spPr>
-        <p:style>
-          <a:lnRef idx="1">
-            <a:schemeClr val="accent1"/>
-          </a:lnRef>
-          <a:fillRef idx="3">
-            <a:schemeClr val="accent1"/>
-          </a:fillRef>
-          <a:effectRef idx="2">
-            <a:schemeClr val="accent1"/>
-          </a:effectRef>
-          <a:fontRef idx="minor">
-            <a:schemeClr val="lt1"/>
-          </a:fontRef>
-        </p:style>
-        <p:txBody>
-          <a:bodyPr rtlCol="0" anchor="ctr"/>
-          <a:lstStyle/>
-          <a:p>
-            <a:pPr algn="ctr"/>
-          </a:p>
-        </p:txBody>
-      </p:sp>
-      <p:sp>
-        <p:nvSpPr>
-          <p:cNvPr id="15" name="TextBox 14"/>
-          <p:cNvSpPr txBox="1"/>
-          <p:nvPr/>
-        </p:nvSpPr>
-        <p:spPr>
-          <a:xfrm>
-            <a:off x="7223760" y="3621024"/>
-            <a:ext cx="4206240" cy="777240"/>
-          </a:xfrm>
-          <a:prstGeom prst="rect">
-            <a:avLst/>
-          </a:prstGeom>
-          <a:noFill/>
-        </p:spPr>
-        <p:txBody>
-          <a:bodyPr wrap="square" anchor="t" lIns="73152" rIns="73152" tIns="36576" bIns="36576">
-            <a:spAutoFit/>
-          </a:bodyPr>
-          <a:lstStyle/>
-          <a:p>
-            <a:pPr algn="l">
-              <a:spcAft>
-                <a:spcPts val="0"/>
-              </a:spcAft>
-            </a:pPr>
-            <a:r>
-              <a:rPr sz="1900" b="1" i="0">
-                <a:solidFill>
-                  <a:srgbClr val="2563EB"/>
-                </a:solidFill>
-                <a:latin typeface="Arial"/>
-              </a:rPr>
-              <a:t>Teams</a:t>
-            </a:r>
-          </a:p>
-          <a:p>
-            <a:pPr algn="l">
-              <a:spcAft>
-                <a:spcPts val="0"/>
-              </a:spcAft>
-            </a:pPr>
-            <a:r>
-              <a:rPr sz="1800" b="0" i="0">
-                <a:solidFill>
-                  <a:srgbClr val="0F172A"/>
-                </a:solidFill>
-                <a:latin typeface="Arial"/>
-              </a:rPr>
-              <a:t>internal brief, no market signal</a:t>
-            </a:r>
-          </a:p>
-        </p:txBody>
-      </p:sp>
-      <p:sp>
-        <p:nvSpPr>
-          <p:cNvPr id="16" name="Rectangle 15"/>
-          <p:cNvSpPr/>
-          <p:nvPr/>
-        </p:nvSpPr>
-        <p:spPr>
-          <a:xfrm>
-            <a:off x="7040880" y="4517136"/>
-            <a:ext cx="91440" cy="685800"/>
-          </a:xfrm>
-          <a:prstGeom prst="rect">
-            <a:avLst/>
-          </a:prstGeom>
-          <a:solidFill>
-            <a:srgbClr val="EA580C"/>
-          </a:solidFill>
-          <a:ln>
-            <a:noFill/>
-          </a:ln>
-          <a:effectLst/>
-        </p:spPr>
-        <p:style>
-          <a:lnRef idx="1">
-            <a:schemeClr val="accent1"/>
-          </a:lnRef>
-          <a:fillRef idx="3">
-            <a:schemeClr val="accent1"/>
-          </a:fillRef>
-          <a:effectRef idx="2">
-            <a:schemeClr val="accent1"/>
-          </a:effectRef>
-          <a:fontRef idx="minor">
-            <a:schemeClr val="lt1"/>
-          </a:fontRef>
-        </p:style>
-        <p:txBody>
-          <a:bodyPr rtlCol="0" anchor="ctr"/>
-          <a:lstStyle/>
-          <a:p>
-            <a:pPr algn="ctr"/>
-          </a:p>
-        </p:txBody>
-      </p:sp>
-      <p:sp>
-        <p:nvSpPr>
-          <p:cNvPr id="17" name="TextBox 16"/>
-          <p:cNvSpPr txBox="1"/>
-          <p:nvPr/>
-        </p:nvSpPr>
-        <p:spPr>
-          <a:xfrm>
-            <a:off x="7223760" y="4471416"/>
-            <a:ext cx="4206240" cy="777240"/>
-          </a:xfrm>
-          <a:prstGeom prst="rect">
-            <a:avLst/>
-          </a:prstGeom>
-          <a:noFill/>
-        </p:spPr>
-        <p:txBody>
-          <a:bodyPr wrap="square" anchor="t" lIns="73152" rIns="73152" tIns="36576" bIns="36576">
-            <a:spAutoFit/>
-          </a:bodyPr>
-          <a:lstStyle/>
-          <a:p>
-            <a:pPr algn="l">
-              <a:spcAft>
-                <a:spcPts val="0"/>
-              </a:spcAft>
-            </a:pPr>
-            <a:r>
-              <a:rPr sz="1900" b="1" i="0">
-                <a:solidFill>
-                  <a:srgbClr val="EA580C"/>
-                </a:solidFill>
-                <a:latin typeface="Arial"/>
-              </a:rPr>
-              <a:t>Retail</a:t>
-            </a:r>
-          </a:p>
-          <a:p>
-            <a:pPr algn="l">
-              <a:spcAft>
-                <a:spcPts val="0"/>
-              </a:spcAft>
-            </a:pPr>
-            <a:r>
-              <a:rPr sz="1800" b="0" i="0">
-                <a:solidFill>
-                  <a:srgbClr val="0F172A"/>
-                </a:solidFill>
-                <a:latin typeface="Arial"/>
-              </a:rPr>
-              <a:t>model vs market, guarded trade</a:t>
-            </a:r>
-          </a:p>
-        </p:txBody>
-      </p:sp>
-      <p:sp>
-        <p:nvSpPr>
-          <p:cNvPr id="18" name="Rectangle 17"/>
-          <p:cNvSpPr/>
-          <p:nvPr/>
-        </p:nvSpPr>
-        <p:spPr>
-          <a:xfrm>
-            <a:off x="7040880" y="5367528"/>
-            <a:ext cx="91440" cy="685800"/>
-          </a:xfrm>
-          <a:prstGeom prst="rect">
-            <a:avLst/>
-          </a:prstGeom>
-          <a:solidFill>
-            <a:srgbClr val="16A34A"/>
-          </a:solidFill>
-          <a:ln>
-            <a:noFill/>
-          </a:ln>
-          <a:effectLst/>
-        </p:spPr>
-        <p:style>
-          <a:lnRef idx="1">
-            <a:schemeClr val="accent1"/>
-          </a:lnRef>
-          <a:fillRef idx="3">
-            <a:schemeClr val="accent1"/>
-          </a:fillRef>
-          <a:effectRef idx="2">
-            <a:schemeClr val="accent1"/>
-          </a:effectRef>
-          <a:fontRef idx="minor">
-            <a:schemeClr val="lt1"/>
-          </a:fontRef>
-        </p:style>
-        <p:txBody>
-          <a:bodyPr rtlCol="0" anchor="ctr"/>
-          <a:lstStyle/>
-          <a:p>
-            <a:pPr algn="ctr"/>
-          </a:p>
-        </p:txBody>
-      </p:sp>
-      <p:sp>
-        <p:nvSpPr>
-          <p:cNvPr id="19" name="TextBox 18"/>
-          <p:cNvSpPr txBox="1"/>
-          <p:nvPr/>
-        </p:nvSpPr>
-        <p:spPr>
-          <a:xfrm>
-            <a:off x="7223760" y="5321808"/>
-            <a:ext cx="4206240" cy="777240"/>
-          </a:xfrm>
-          <a:prstGeom prst="rect">
-            <a:avLst/>
-          </a:prstGeom>
-          <a:noFill/>
-        </p:spPr>
-        <p:txBody>
-          <a:bodyPr wrap="square" anchor="t" lIns="73152" rIns="73152" tIns="36576" bIns="36576">
-            <a:spAutoFit/>
-          </a:bodyPr>
-          <a:lstStyle/>
-          <a:p>
-            <a:pPr algn="l">
-              <a:spcAft>
-                <a:spcPts val="0"/>
-              </a:spcAft>
-            </a:pPr>
-            <a:r>
-              <a:rPr sz="1900" b="1" i="0">
-                <a:solidFill>
-                  <a:srgbClr val="16A34A"/>
-                </a:solidFill>
-                <a:latin typeface="Arial"/>
-              </a:rPr>
-              <a:t>Coach (learners)</a:t>
-            </a:r>
-          </a:p>
-          <a:p>
-            <a:pPr algn="l">
-              <a:spcAft>
-                <a:spcPts val="0"/>
-              </a:spcAft>
-            </a:pPr>
-            <a:r>
-              <a:rPr sz="1800" b="0" i="0">
-                <a:solidFill>
-                  <a:srgbClr val="0F172A"/>
-                </a:solidFill>
-                <a:latin typeface="Arial"/>
-              </a:rPr>
-              <a:t>how markets and news work</a:t>
+              <a:rPr sz="2200" b="0" i="0">
+                <a:solidFill>
+                  <a:srgbClr val="FFFFFF"/>
+                </a:solidFill>
+                <a:latin typeface="Arial"/>
+              </a:rPr>
+              <a:t>So our product's job is to protect and educate consumers.</a:t>
             </a:r>
           </a:p>
         </p:txBody>
@@ -10258,7 +9658,7 @@
                 </a:solidFill>
                 <a:latin typeface="Arial"/>
               </a:rPr>
-              <a:t>The whole product, end to end</a:t>
+              <a:t>What we built: a market-graded agent</a:t>
             </a:r>
           </a:p>
         </p:txBody>
@@ -10297,7 +9697,7 @@
                 </a:solidFill>
                 <a:latin typeface="Arial"/>
               </a:rPr>
-              <a:t>DASC7606C Group 12 · Market-Graded Learning for NBA Game-Impact Intelligence</a:t>
+              <a:t>DASC7606C Group 12 · Can a consumer beat a sports prediction market?</a:t>
             </a:r>
           </a:p>
         </p:txBody>
@@ -10357,8 +9757,8 @@
         </p:blipFill>
         <p:spPr>
           <a:xfrm>
-            <a:off x="1560048" y="1097280"/>
-            <a:ext cx="9071597" cy="4434840"/>
+            <a:off x="1513288" y="1097280"/>
+            <a:ext cx="9165119" cy="4480560"/>
           </a:xfrm>
           <a:prstGeom prst="rect">
             <a:avLst/>
@@ -10373,7 +9773,7 @@
         </p:nvSpPr>
         <p:spPr>
           <a:xfrm>
-            <a:off x="457200" y="5577840"/>
+            <a:off x="457200" y="5623560"/>
             <a:ext cx="11277295" cy="731520"/>
           </a:xfrm>
           <a:prstGeom prst="rect">
@@ -10393,22 +9793,13 @@
               </a:spcAft>
             </a:pPr>
             <a:r>
-              <a:rPr sz="1800" b="1" i="0">
+              <a:rPr sz="1800" b="0" i="0">
                 <a:solidFill>
                   <a:srgbClr val="0F172A"/>
                 </a:solidFill>
                 <a:latin typeface="Arial"/>
               </a:rPr>
-              <a:t>Data:</a:t>
-            </a:r>
-            <a:r>
-              <a:rPr sz="1800" b="0" i="0">
-                <a:solidFill>
-                  <a:srgbClr val="0F172A"/>
-                </a:solidFill>
-                <a:latin typeface="Arial"/>
-              </a:rPr>
-              <a:t> ESPN box scores + inactive lists, 2023-24 to 2025-26 · Kalshi game-winner prices, 2025-26: 1,316 games, ~3.9M one-minute price rows</a:t>
+              <a:t>Every simulated order pays the recorded ask plus the Kalshi fee, so we measure what a consumer would face</a:t>
             </a:r>
           </a:p>
         </p:txBody>
@@ -10553,7 +9944,7 @@
                 </a:solidFill>
                 <a:latin typeface="Arial"/>
               </a:rPr>
-              <a:t>Models M1–M5: only the M4 win model drives trades</a:t>
+              <a:t>Evidence 1: costs set a hurdle before you start</a:t>
             </a:r>
           </a:p>
         </p:txBody>
@@ -10592,7 +9983,7 @@
                 </a:solidFill>
                 <a:latin typeface="Arial"/>
               </a:rPr>
-              <a:t>DASC7606C Group 12 · Market-Graded Learning for NBA Game-Impact Intelligence</a:t>
+              <a:t>DASC7606C Group 12 · Can a consumer beat a sports prediction market?</a:t>
             </a:r>
           </a:p>
         </p:txBody>
@@ -10636,695 +10027,111 @@
           </a:p>
         </p:txBody>
       </p:sp>
-      <p:graphicFrame>
-        <p:nvGraphicFramePr>
-          <p:cNvPr id="7" name="Table 6"/>
-          <p:cNvGraphicFramePr>
-            <a:graphicFrameLocks noGrp="1"/>
-          </p:cNvGraphicFramePr>
-          <p:nvPr/>
-        </p:nvGraphicFramePr>
-        <p:xfrm>
-          <a:off x="457200" y="1188720"/>
-          <a:ext cx="11274552" cy="4023360"/>
-        </p:xfrm>
-        <a:graphic>
-          <a:graphicData uri="http://schemas.openxmlformats.org/drawingml/2006/table">
-            <a:tbl>
-              <a:tblPr firstRow="1" bandRow="1">
-                <a:tableStyleId>{5C22544A-7EE6-4342-B048-85BDC9FD1C3A}</a:tableStyleId>
-              </a:tblPr>
-              <a:tblGrid>
-                <a:gridCol w="2103120"/>
-                <a:gridCol w="3566160"/>
-                <a:gridCol w="3657600"/>
-                <a:gridCol w="1947672"/>
-              </a:tblGrid>
-              <a:tr h="457200">
-                <a:tc>
-                  <a:txBody>
-                    <a:bodyPr wrap="square"/>
-                    <a:lstStyle/>
-                    <a:p>
-                      <a:pPr algn="l"/>
-                      <a:r>
-                        <a:rPr sz="1600" b="1" i="0">
-                          <a:solidFill>
-                            <a:srgbClr val="FFFFFF"/>
-                          </a:solidFill>
-                          <a:latin typeface="Arial"/>
-                        </a:rPr>
-                        <a:t>Model</a:t>
-                      </a:r>
-                    </a:p>
-                  </a:txBody>
-                  <a:tcPr marL="73152" marR="73152" marT="36576" marB="36576" anchor="ctr">
-                    <a:solidFill>
-                      <a:srgbClr val="1E293B"/>
-                    </a:solidFill>
-                  </a:tcPr>
-                </a:tc>
-                <a:tc>
-                  <a:txBody>
-                    <a:bodyPr wrap="square"/>
-                    <a:lstStyle/>
-                    <a:p>
-                      <a:pPr algn="l"/>
-                      <a:r>
-                        <a:rPr sz="1600" b="1" i="0">
-                          <a:solidFill>
-                            <a:srgbClr val="FFFFFF"/>
-                          </a:solidFill>
-                          <a:latin typeface="Arial"/>
-                        </a:rPr>
-                        <a:t>What it predicts</a:t>
-                      </a:r>
-                    </a:p>
-                  </a:txBody>
-                  <a:tcPr marL="73152" marR="73152" marT="36576" marB="36576" anchor="ctr">
-                    <a:solidFill>
-                      <a:srgbClr val="1E293B"/>
-                    </a:solidFill>
-                  </a:tcPr>
-                </a:tc>
-                <a:tc>
-                  <a:txBody>
-                    <a:bodyPr wrap="square"/>
-                    <a:lstStyle/>
-                    <a:p>
-                      <a:pPr algn="l"/>
-                      <a:r>
-                        <a:rPr sz="1600" b="1" i="0">
-                          <a:solidFill>
-                            <a:srgbClr val="FFFFFF"/>
-                          </a:solidFill>
-                          <a:latin typeface="Arial"/>
-                        </a:rPr>
-                        <a:t>Held-out result</a:t>
-                      </a:r>
-                    </a:p>
-                  </a:txBody>
-                  <a:tcPr marL="73152" marR="73152" marT="36576" marB="36576" anchor="ctr">
-                    <a:solidFill>
-                      <a:srgbClr val="1E293B"/>
-                    </a:solidFill>
-                  </a:tcPr>
-                </a:tc>
-                <a:tc>
-                  <a:txBody>
-                    <a:bodyPr wrap="square"/>
-                    <a:lstStyle/>
-                    <a:p>
-                      <a:pPr algn="l"/>
-                      <a:r>
-                        <a:rPr sz="1600" b="1" i="0">
-                          <a:solidFill>
-                            <a:srgbClr val="FFFFFF"/>
-                          </a:solidFill>
-                          <a:latin typeface="Arial"/>
-                        </a:rPr>
-                        <a:t>Used for</a:t>
-                      </a:r>
-                    </a:p>
-                  </a:txBody>
-                  <a:tcPr marL="73152" marR="73152" marT="36576" marB="36576" anchor="ctr">
-                    <a:solidFill>
-                      <a:srgbClr val="1E293B"/>
-                    </a:solidFill>
-                  </a:tcPr>
-                </a:tc>
-              </a:tr>
-              <a:tr h="713232">
-                <a:tc>
-                  <a:txBody>
-                    <a:bodyPr wrap="square"/>
-                    <a:lstStyle/>
-                    <a:p>
-                      <a:pPr algn="l"/>
-                      <a:r>
-                        <a:rPr sz="1600" b="0" i="0">
-                          <a:solidFill>
-                            <a:srgbClr val="0F172A"/>
-                          </a:solidFill>
-                          <a:latin typeface="Arial"/>
-                        </a:rPr>
-                        <a:t>M1 Baselines</a:t>
-                      </a:r>
-                    </a:p>
-                  </a:txBody>
-                  <a:tcPr marL="73152" marR="73152" marT="36576" marB="36576" anchor="ctr">
-                    <a:solidFill>
-                      <a:srgbClr val="F1F5F9"/>
-                    </a:solidFill>
-                  </a:tcPr>
-                </a:tc>
-                <a:tc>
-                  <a:txBody>
-                    <a:bodyPr wrap="square"/>
-                    <a:lstStyle/>
-                    <a:p>
-                      <a:pPr algn="l"/>
-                      <a:r>
-                        <a:rPr sz="1600" b="0" i="0">
-                          <a:solidFill>
-                            <a:srgbClr val="0F172A"/>
-                          </a:solidFill>
-                          <a:latin typeface="Arial"/>
-                        </a:rPr>
-                        <a:t>10-game rolling average; gradient boosting (GBM) with teammates-out</a:t>
-                      </a:r>
-                    </a:p>
-                  </a:txBody>
-                  <a:tcPr marL="73152" marR="73152" marT="36576" marB="36576" anchor="ctr">
-                    <a:solidFill>
-                      <a:srgbClr val="F1F5F9"/>
-                    </a:solidFill>
-                  </a:tcPr>
-                </a:tc>
-                <a:tc>
-                  <a:txBody>
-                    <a:bodyPr wrap="square"/>
-                    <a:lstStyle/>
-                    <a:p>
-                      <a:pPr algn="l"/>
-                      <a:r>
-                        <a:rPr sz="1600" b="0" i="0">
-                          <a:solidFill>
-                            <a:srgbClr val="0F172A"/>
-                          </a:solidFill>
-                          <a:latin typeface="Arial"/>
-                        </a:rPr>
-                        <a:t>Pinball: rolling 1.641 pts / 1.966 min; GBM 1.590 / 1.724</a:t>
-                      </a:r>
-                    </a:p>
-                  </a:txBody>
-                  <a:tcPr marL="73152" marR="73152" marT="36576" marB="36576" anchor="ctr">
-                    <a:solidFill>
-                      <a:srgbClr val="F1F5F9"/>
-                    </a:solidFill>
-                  </a:tcPr>
-                </a:tc>
-                <a:tc>
-                  <a:txBody>
-                    <a:bodyPr wrap="square"/>
-                    <a:lstStyle/>
-                    <a:p>
-                      <a:pPr algn="l"/>
-                      <a:r>
-                        <a:rPr sz="1600" b="0" i="0">
-                          <a:solidFill>
-                            <a:srgbClr val="0F172A"/>
-                          </a:solidFill>
-                          <a:latin typeface="Arial"/>
-                        </a:rPr>
-                        <a:t>Reference for M2</a:t>
-                      </a:r>
-                    </a:p>
-                  </a:txBody>
-                  <a:tcPr marL="73152" marR="73152" marT="36576" marB="36576" anchor="ctr">
-                    <a:solidFill>
-                      <a:srgbClr val="F1F5F9"/>
-                    </a:solidFill>
-                  </a:tcPr>
-                </a:tc>
-              </a:tr>
-              <a:tr h="713232">
-                <a:tc>
-                  <a:txBody>
-                    <a:bodyPr wrap="square"/>
-                    <a:lstStyle/>
-                    <a:p>
-                      <a:pPr algn="l"/>
-                      <a:r>
-                        <a:rPr sz="1600" b="0" i="0">
-                          <a:solidFill>
-                            <a:srgbClr val="0F172A"/>
-                          </a:solidFill>
-                          <a:latin typeface="Arial"/>
-                        </a:rPr>
-                        <a:t>M2 GRU</a:t>
-                      </a:r>
-                    </a:p>
-                  </a:txBody>
-                  <a:tcPr marL="73152" marR="73152" marT="36576" marB="36576" anchor="ctr">
-                    <a:solidFill>
-                      <a:srgbClr val="FFFFFF"/>
-                    </a:solidFill>
-                  </a:tcPr>
-                </a:tc>
-                <a:tc>
-                  <a:txBody>
-                    <a:bodyPr wrap="square"/>
-                    <a:lstStyle/>
-                    <a:p>
-                      <a:pPr algn="l"/>
-                      <a:r>
-                        <a:rPr sz="1600" b="0" i="0">
-                          <a:solidFill>
-                            <a:srgbClr val="0F172A"/>
-                          </a:solidFill>
-                          <a:latin typeface="Arial"/>
-                        </a:rPr>
-                        <a:t>Points and minutes quantiles from each player's last 20 games</a:t>
-                      </a:r>
-                    </a:p>
-                  </a:txBody>
-                  <a:tcPr marL="73152" marR="73152" marT="36576" marB="36576" anchor="ctr">
-                    <a:solidFill>
-                      <a:srgbClr val="FFFFFF"/>
-                    </a:solidFill>
-                  </a:tcPr>
-                </a:tc>
-                <a:tc>
-                  <a:txBody>
-                    <a:bodyPr wrap="square"/>
-                    <a:lstStyle/>
-                    <a:p>
-                      <a:pPr algn="l"/>
-                      <a:r>
-                        <a:rPr sz="1600" b="0" i="0">
-                          <a:solidFill>
-                            <a:srgbClr val="0F172A"/>
-                          </a:solidFill>
-                          <a:latin typeface="Arial"/>
-                        </a:rPr>
-                        <a:t>Pinball </a:t>
-                      </a:r>
-                      <a:r>
-                        <a:rPr sz="1600" b="1" i="0">
-                          <a:solidFill>
-                            <a:srgbClr val="0F172A"/>
-                          </a:solidFill>
-                          <a:latin typeface="Arial"/>
-                        </a:rPr>
-                        <a:t>1.553 pts / 1.680 min</a:t>
-                      </a:r>
-                      <a:r>
-                        <a:rPr sz="1600" b="0" i="0">
-                          <a:solidFill>
-                            <a:srgbClr val="0F172A"/>
-                          </a:solidFill>
-                          <a:latin typeface="Arial"/>
-                        </a:rPr>
-                        <a:t>; 10–90% coverage 0.81 / 0.80</a:t>
-                      </a:r>
-                    </a:p>
-                  </a:txBody>
-                  <a:tcPr marL="73152" marR="73152" marT="36576" marB="36576" anchor="ctr">
-                    <a:solidFill>
-                      <a:srgbClr val="FFFFFF"/>
-                    </a:solidFill>
-                  </a:tcPr>
-                </a:tc>
-                <a:tc>
-                  <a:txBody>
-                    <a:bodyPr wrap="square"/>
-                    <a:lstStyle/>
-                    <a:p>
-                      <a:pPr algn="l"/>
-                      <a:r>
-                        <a:rPr sz="1600" b="0" i="0">
-                          <a:solidFill>
-                            <a:srgbClr val="0F172A"/>
-                          </a:solidFill>
-                          <a:latin typeface="Arial"/>
-                        </a:rPr>
-                        <a:t>Briefs, player tables</a:t>
-                      </a:r>
-                    </a:p>
-                  </a:txBody>
-                  <a:tcPr marL="73152" marR="73152" marT="36576" marB="36576" anchor="ctr">
-                    <a:solidFill>
-                      <a:srgbClr val="FFFFFF"/>
-                    </a:solidFill>
-                  </a:tcPr>
-                </a:tc>
-              </a:tr>
-              <a:tr h="713232">
-                <a:tc>
-                  <a:txBody>
-                    <a:bodyPr wrap="square"/>
-                    <a:lstStyle/>
-                    <a:p>
-                      <a:pPr algn="l"/>
-                      <a:r>
-                        <a:rPr sz="1600" b="0" i="0">
-                          <a:solidFill>
-                            <a:srgbClr val="0F172A"/>
-                          </a:solidFill>
-                          <a:latin typeface="Arial"/>
-                        </a:rPr>
-                        <a:t>M3 Play classifier</a:t>
-                      </a:r>
-                    </a:p>
-                  </a:txBody>
-                  <a:tcPr marL="73152" marR="73152" marT="36576" marB="36576" anchor="ctr">
-                    <a:solidFill>
-                      <a:srgbClr val="F1F5F9"/>
-                    </a:solidFill>
-                  </a:tcPr>
-                </a:tc>
-                <a:tc>
-                  <a:txBody>
-                    <a:bodyPr wrap="square"/>
-                    <a:lstStyle/>
-                    <a:p>
-                      <a:pPr algn="l"/>
-                      <a:r>
-                        <a:rPr sz="1600" b="0" i="0">
-                          <a:solidFill>
-                            <a:srgbClr val="0F172A"/>
-                          </a:solidFill>
-                          <a:latin typeface="Arial"/>
-                        </a:rPr>
-                        <a:t>P(player plays)</a:t>
-                      </a:r>
-                    </a:p>
-                  </a:txBody>
-                  <a:tcPr marL="73152" marR="73152" marT="36576" marB="36576" anchor="ctr">
-                    <a:solidFill>
-                      <a:srgbClr val="F1F5F9"/>
-                    </a:solidFill>
-                  </a:tcPr>
-                </a:tc>
-                <a:tc>
-                  <a:txBody>
-                    <a:bodyPr wrap="square"/>
-                    <a:lstStyle/>
-                    <a:p>
-                      <a:pPr algn="l"/>
-                      <a:r>
-                        <a:rPr sz="1600" b="0" i="0">
-                          <a:solidFill>
-                            <a:srgbClr val="0F172A"/>
-                          </a:solidFill>
-                          <a:latin typeface="Arial"/>
-                        </a:rPr>
-                        <a:t>Brier </a:t>
-                      </a:r>
-                      <a:r>
-                        <a:rPr sz="1600" b="1" i="0">
-                          <a:solidFill>
-                            <a:srgbClr val="0F172A"/>
-                          </a:solidFill>
-                          <a:latin typeface="Arial"/>
-                        </a:rPr>
-                        <a:t>0.143</a:t>
-                      </a:r>
-                      <a:r>
-                        <a:rPr sz="1600" b="0" i="0">
-                          <a:solidFill>
-                            <a:srgbClr val="0F172A"/>
-                          </a:solidFill>
-                          <a:latin typeface="Arial"/>
-                        </a:rPr>
-                        <a:t> vs rules 0.169–0.172</a:t>
-                      </a:r>
-                    </a:p>
-                  </a:txBody>
-                  <a:tcPr marL="73152" marR="73152" marT="36576" marB="36576" anchor="ctr">
-                    <a:solidFill>
-                      <a:srgbClr val="F1F5F9"/>
-                    </a:solidFill>
-                  </a:tcPr>
-                </a:tc>
-                <a:tc>
-                  <a:txBody>
-                    <a:bodyPr wrap="square"/>
-                    <a:lstStyle/>
-                    <a:p>
-                      <a:pPr algn="l"/>
-                      <a:r>
-                        <a:rPr sz="1600" b="0" i="0">
-                          <a:solidFill>
-                            <a:srgbClr val="0F172A"/>
-                          </a:solidFill>
-                          <a:latin typeface="Arial"/>
-                        </a:rPr>
-                        <a:t>Briefs, player tables</a:t>
-                      </a:r>
-                    </a:p>
-                  </a:txBody>
-                  <a:tcPr marL="73152" marR="73152" marT="36576" marB="36576" anchor="ctr">
-                    <a:solidFill>
-                      <a:srgbClr val="F1F5F9"/>
-                    </a:solidFill>
-                  </a:tcPr>
-                </a:tc>
-              </a:tr>
-              <a:tr h="713232">
-                <a:tc>
-                  <a:txBody>
-                    <a:bodyPr wrap="square"/>
-                    <a:lstStyle/>
-                    <a:p>
-                      <a:pPr algn="l"/>
-                      <a:r>
-                        <a:rPr sz="1600" b="0" i="0">
-                          <a:solidFill>
-                            <a:srgbClr val="0F172A"/>
-                          </a:solidFill>
-                          <a:latin typeface="Arial"/>
-                        </a:rPr>
-                        <a:t>M4 Win model</a:t>
-                      </a:r>
-                    </a:p>
-                  </a:txBody>
-                  <a:tcPr marL="73152" marR="73152" marT="36576" marB="36576" anchor="ctr">
-                    <a:solidFill>
-                      <a:srgbClr val="DCFCE7"/>
-                    </a:solidFill>
-                  </a:tcPr>
-                </a:tc>
-                <a:tc>
-                  <a:txBody>
-                    <a:bodyPr wrap="square"/>
-                    <a:lstStyle/>
-                    <a:p>
-                      <a:pPr algn="l"/>
-                      <a:r>
-                        <a:rPr sz="1600" b="0" i="0">
-                          <a:solidFill>
-                            <a:srgbClr val="0F172A"/>
-                          </a:solidFill>
-                          <a:latin typeface="Arial"/>
-                        </a:rPr>
-                        <a:t>P(home wins), team ratings adjusted for who is out</a:t>
-                      </a:r>
-                    </a:p>
-                  </a:txBody>
-                  <a:tcPr marL="73152" marR="73152" marT="36576" marB="36576" anchor="ctr">
-                    <a:solidFill>
-                      <a:srgbClr val="DCFCE7"/>
-                    </a:solidFill>
-                  </a:tcPr>
-                </a:tc>
-                <a:tc>
-                  <a:txBody>
-                    <a:bodyPr wrap="square"/>
-                    <a:lstStyle/>
-                    <a:p>
-                      <a:pPr algn="l"/>
-                      <a:r>
-                        <a:rPr sz="1600" b="0" i="0">
-                          <a:solidFill>
-                            <a:srgbClr val="0F172A"/>
-                          </a:solidFill>
-                          <a:latin typeface="Arial"/>
-                        </a:rPr>
-                        <a:t>Brier </a:t>
-                      </a:r>
-                      <a:r>
-                        <a:rPr sz="1600" b="1" i="0">
-                          <a:solidFill>
-                            <a:srgbClr val="0F172A"/>
-                          </a:solidFill>
-                          <a:latin typeface="Arial"/>
-                        </a:rPr>
-                        <a:t>0.183</a:t>
-                      </a:r>
-                      <a:r>
-                        <a:rPr sz="1600" b="0" i="0">
-                          <a:solidFill>
-                            <a:srgbClr val="0F172A"/>
-                          </a:solidFill>
-                          <a:latin typeface="Arial"/>
-                        </a:rPr>
-                        <a:t> with absences, accuracy 74% (501 test games)</a:t>
-                      </a:r>
-                    </a:p>
-                  </a:txBody>
-                  <a:tcPr marL="73152" marR="73152" marT="36576" marB="36576" anchor="ctr">
-                    <a:solidFill>
-                      <a:srgbClr val="DCFCE7"/>
-                    </a:solidFill>
-                  </a:tcPr>
-                </a:tc>
-                <a:tc>
-                  <a:txBody>
-                    <a:bodyPr wrap="square"/>
-                    <a:lstStyle/>
-                    <a:p>
-                      <a:pPr algn="l"/>
-                      <a:r>
-                        <a:rPr sz="1600" b="1" i="0">
-                          <a:solidFill>
-                            <a:srgbClr val="0F172A"/>
-                          </a:solidFill>
-                          <a:latin typeface="Arial"/>
-                        </a:rPr>
-                        <a:t>News shift → trades</a:t>
-                      </a:r>
-                    </a:p>
-                  </a:txBody>
-                  <a:tcPr marL="73152" marR="73152" marT="36576" marB="36576" anchor="ctr">
-                    <a:solidFill>
-                      <a:srgbClr val="DCFCE7"/>
-                    </a:solidFill>
-                  </a:tcPr>
-                </a:tc>
-              </a:tr>
-              <a:tr h="713232">
-                <a:tc>
-                  <a:txBody>
-                    <a:bodyPr wrap="square"/>
-                    <a:lstStyle/>
-                    <a:p>
-                      <a:pPr algn="l"/>
-                      <a:r>
-                        <a:rPr sz="1600" b="0" i="0">
-                          <a:solidFill>
-                            <a:srgbClr val="0F172A"/>
-                          </a:solidFill>
-                          <a:latin typeface="Arial"/>
-                        </a:rPr>
-                        <a:t>M5 Forecaster</a:t>
-                      </a:r>
-                    </a:p>
-                  </a:txBody>
-                  <a:tcPr marL="73152" marR="73152" marT="36576" marB="36576" anchor="ctr">
-                    <a:solidFill>
-                      <a:srgbClr val="F1F5F9"/>
-                    </a:solidFill>
-                  </a:tcPr>
-                </a:tc>
-                <a:tc>
-                  <a:txBody>
-                    <a:bodyPr wrap="square"/>
-                    <a:lstStyle/>
-                    <a:p>
-                      <a:pPr algn="l"/>
-                      <a:r>
-                        <a:rPr sz="1600" b="0" i="0">
-                          <a:solidFill>
-                            <a:srgbClr val="0F172A"/>
-                          </a:solidFill>
-                          <a:latin typeface="Arial"/>
-                        </a:rPr>
-                        <a:t>One as-of interface over M1–M4, with “player X out” overrides</a:t>
-                      </a:r>
-                    </a:p>
-                  </a:txBody>
-                  <a:tcPr marL="73152" marR="73152" marT="36576" marB="36576" anchor="ctr">
-                    <a:solidFill>
-                      <a:srgbClr val="F1F5F9"/>
-                    </a:solidFill>
-                  </a:tcPr>
-                </a:tc>
-                <a:tc>
-                  <a:txBody>
-                    <a:bodyPr wrap="square"/>
-                    <a:lstStyle/>
-                    <a:p>
-                      <a:pPr algn="l"/>
-                      <a:r>
-                        <a:rPr sz="1600" b="0" i="0">
-                          <a:solidFill>
-                            <a:srgbClr val="0F172A"/>
-                          </a:solidFill>
-                          <a:latin typeface="Arial"/>
-                        </a:rPr>
-                        <a:t>No future data (leakage tests)</a:t>
-                      </a:r>
-                    </a:p>
-                  </a:txBody>
-                  <a:tcPr marL="73152" marR="73152" marT="36576" marB="36576" anchor="ctr">
-                    <a:solidFill>
-                      <a:srgbClr val="F1F5F9"/>
-                    </a:solidFill>
-                  </a:tcPr>
-                </a:tc>
-                <a:tc>
-                  <a:txBody>
-                    <a:bodyPr wrap="square"/>
-                    <a:lstStyle/>
-                    <a:p>
-                      <a:pPr algn="l"/>
-                      <a:r>
-                        <a:rPr sz="1600" b="0" i="0">
-                          <a:solidFill>
-                            <a:srgbClr val="0F172A"/>
-                          </a:solidFill>
-                          <a:latin typeface="Arial"/>
-                        </a:rPr>
-                        <a:t>Agent, replay, Coach, demo</a:t>
-                      </a:r>
-                    </a:p>
-                  </a:txBody>
-                  <a:tcPr marL="73152" marR="73152" marT="36576" marB="36576" anchor="ctr">
-                    <a:solidFill>
-                      <a:srgbClr val="F1F5F9"/>
-                    </a:solidFill>
-                  </a:tcPr>
-                </a:tc>
-              </a:tr>
-            </a:tbl>
-          </a:graphicData>
-        </a:graphic>
-      </p:graphicFrame>
-      <p:sp>
-        <p:nvSpPr>
-          <p:cNvPr id="8" name="Rounded Rectangle 7"/>
-          <p:cNvSpPr/>
-          <p:nvPr/>
-        </p:nvSpPr>
-        <p:spPr>
-          <a:xfrm>
-            <a:off x="457200" y="5760720"/>
-            <a:ext cx="11277295" cy="530352"/>
-          </a:xfrm>
-          <a:prstGeom prst="roundRect">
-            <a:avLst>
-              <a:gd name="adj" fmla="val 12000"/>
-            </a:avLst>
-          </a:prstGeom>
-          <a:solidFill>
-            <a:srgbClr val="FEF3C7"/>
-          </a:solidFill>
-          <a:ln>
-            <a:noFill/>
-          </a:ln>
-          <a:effectLst/>
-        </p:spPr>
-        <p:style>
-          <a:lnRef idx="1">
-            <a:schemeClr val="accent1"/>
-          </a:lnRef>
-          <a:fillRef idx="3">
-            <a:schemeClr val="accent1"/>
-          </a:fillRef>
-          <a:effectRef idx="2">
-            <a:schemeClr val="accent1"/>
-          </a:effectRef>
-          <a:fontRef idx="minor">
-            <a:schemeClr val="lt1"/>
-          </a:fontRef>
-        </p:style>
-        <p:txBody>
-          <a:bodyPr rtlCol="0" anchor="ctr"/>
-          <a:lstStyle/>
-          <a:p>
-            <a:pPr algn="ctr"/>
+      <p:pic>
+        <p:nvPicPr>
+          <p:cNvPr id="7" name="Picture 6" descr="cost_burden.png"/>
+          <p:cNvPicPr>
+            <a:picLocks noChangeAspect="1"/>
+          </p:cNvPicPr>
+          <p:nvPr/>
+        </p:nvPicPr>
+        <p:blipFill>
+          <a:blip r:embed="rId3"/>
+          <a:stretch>
+            <a:fillRect/>
+          </a:stretch>
+        </p:blipFill>
+        <p:spPr>
+          <a:xfrm>
+            <a:off x="1180947" y="1097280"/>
+            <a:ext cx="9829799" cy="3931920"/>
+          </a:xfrm>
+          <a:prstGeom prst="rect">
+            <a:avLst/>
+          </a:prstGeom>
+        </p:spPr>
+      </p:pic>
+      <p:sp>
+        <p:nvSpPr>
+          <p:cNvPr id="8" name="TextBox 7"/>
+          <p:cNvSpPr txBox="1"/>
+          <p:nvPr/>
+        </p:nvSpPr>
+        <p:spPr>
+          <a:xfrm>
+            <a:off x="457200" y="5120640"/>
+            <a:ext cx="5547207" cy="1234440"/>
+          </a:xfrm>
+          <a:prstGeom prst="rect">
+            <a:avLst/>
+          </a:prstGeom>
+          <a:noFill/>
+        </p:spPr>
+        <p:txBody>
+          <a:bodyPr wrap="square" anchor="t" lIns="73152" rIns="73152" tIns="36576" bIns="36576">
+            <a:spAutoFit/>
+          </a:bodyPr>
+          <a:lstStyle/>
+          <a:p>
+            <a:pPr algn="l" marL="292608" indent="-256032">
+              <a:spcAft>
+                <a:spcPts val="400"/>
+              </a:spcAft>
+              <a:buChar char="•"/>
+            </a:pPr>
+            <a:r>
+              <a:rPr sz="1800" b="1" i="0">
+                <a:solidFill>
+                  <a:srgbClr val="0F172A"/>
+                </a:solidFill>
+                <a:latin typeface="Arial"/>
+              </a:rPr>
+              <a:t>1.92¢ per contract</a:t>
+            </a:r>
+            <a:r>
+              <a:rPr sz="1800" b="0" i="0">
+                <a:solidFill>
+                  <a:srgbClr val="0F172A"/>
+                </a:solidFill>
+                <a:latin typeface="Arial"/>
+              </a:rPr>
+              <a:t> = 5.0% of price (spread 0.53¢ + fee 1.39¢)</a:t>
+            </a:r>
+          </a:p>
+          <a:p>
+            <a:pPr algn="l" marL="292608" indent="-256032">
+              <a:spcAft>
+                <a:spcPts val="400"/>
+              </a:spcAft>
+              <a:buChar char="•"/>
+            </a:pPr>
+            <a:r>
+              <a:rPr sz="1800" b="0" i="0">
+                <a:solidFill>
+                  <a:srgbClr val="0F172A"/>
+                </a:solidFill>
+                <a:latin typeface="Arial"/>
+              </a:rPr>
+              <a:t>Under 20¢: </a:t>
+            </a:r>
+            <a:r>
+              <a:rPr sz="1800" b="1" i="0">
+                <a:solidFill>
+                  <a:srgbClr val="0F172A"/>
+                </a:solidFill>
+                <a:latin typeface="Arial"/>
+              </a:rPr>
+              <a:t>9–14%</a:t>
+            </a:r>
+            <a:r>
+              <a:rPr sz="1800" b="0" i="0">
+                <a:solidFill>
+                  <a:srgbClr val="0F172A"/>
+                </a:solidFill>
+                <a:latin typeface="Arial"/>
+              </a:rPr>
+              <a:t> of the price</a:t>
+            </a:r>
           </a:p>
         </p:txBody>
       </p:sp>
@@ -11336,8 +10143,8 @@
         </p:nvSpPr>
         <p:spPr>
           <a:xfrm>
-            <a:off x="548640" y="5760720"/>
-            <a:ext cx="11094415" cy="530352"/>
+            <a:off x="6187287" y="5120640"/>
+            <a:ext cx="5547207" cy="1234440"/>
           </a:xfrm>
           <a:prstGeom prst="rect">
             <a:avLst/>
@@ -11345,24 +10152,78 @@
           <a:noFill/>
         </p:spPr>
         <p:txBody>
-          <a:bodyPr wrap="square" anchor="ctr" lIns="73152" rIns="73152" tIns="36576" bIns="36576">
+          <a:bodyPr wrap="square" anchor="t" lIns="73152" rIns="73152" tIns="36576" bIns="36576">
             <a:spAutoFit/>
           </a:bodyPr>
           <a:lstStyle/>
           <a:p>
-            <a:pPr algn="l">
+            <a:pPr algn="l" marL="292608" indent="-256032">
               <a:spcAft>
-                <a:spcPts val="0"/>
+                <a:spcPts val="400"/>
               </a:spcAft>
+              <a:buChar char="•"/>
             </a:pPr>
             <a:r>
-              <a:rPr sz="2000" b="0" i="0">
+              <a:rPr sz="1800" b="0" i="0">
                 <a:solidFill>
                   <a:srgbClr val="0F172A"/>
                 </a:solidFill>
                 <a:latin typeface="Arial"/>
               </a:rPr>
-              <a:t>Only M4 drives trades. M2 and M3 feed briefs and player tables.</a:t>
+              <a:t>Best agent: </a:t>
+            </a:r>
+            <a:r>
+              <a:rPr sz="1800" b="1" i="0">
+                <a:solidFill>
+                  <a:srgbClr val="0F172A"/>
+                </a:solidFill>
+                <a:latin typeface="Arial"/>
+              </a:rPr>
+              <a:t>+$36</a:t>
+            </a:r>
+            <a:r>
+              <a:rPr sz="1800" b="0" i="0">
+                <a:solidFill>
+                  <a:srgbClr val="0F172A"/>
+                </a:solidFill>
+                <a:latin typeface="Arial"/>
+              </a:rPr>
+              <a:t> at the mid → </a:t>
+            </a:r>
+            <a:r>
+              <a:rPr sz="1800" b="1" i="0">
+                <a:solidFill>
+                  <a:srgbClr val="0F172A"/>
+                </a:solidFill>
+                <a:latin typeface="Arial"/>
+              </a:rPr>
+              <a:t>−$32</a:t>
+            </a:r>
+            <a:r>
+              <a:rPr sz="1800" b="0" i="0">
+                <a:solidFill>
+                  <a:srgbClr val="0F172A"/>
+                </a:solidFill>
+                <a:latin typeface="Arial"/>
+              </a:rPr>
+              <a:t> after costs</a:t>
+            </a:r>
+          </a:p>
+          <a:p>
+            <a:pPr algn="l" marL="292608" indent="-256032">
+              <a:spcAft>
+                <a:spcPts val="400"/>
+              </a:spcAft>
+              <a:buChar char="•"/>
+            </a:pPr>
+            <a:r>
+              <a:rPr sz="1800" b="0" i="0">
+                <a:solidFill>
+                  <a:srgbClr val="0F172A"/>
+                </a:solidFill>
+                <a:latin typeface="Arial"/>
+              </a:rPr>
+              <a:t>Raw model: −$1,540 → −$2,087</a:t>
             </a:r>
           </a:p>
         </p:txBody>
@@ -11507,7 +10368,7 @@
                 </a:solidFill>
                 <a:latin typeface="Arial"/>
               </a:rPr>
-              <a:t>Our win model vs the market: the market is better</a:t>
+              <a:t>Even a selective agent rarely beats the closing price</a:t>
             </a:r>
           </a:p>
         </p:txBody>
@@ -11546,7 +10407,7 @@
                 </a:solidFill>
                 <a:latin typeface="Arial"/>
               </a:rPr>
-              <a:t>DASC7606C Group 12 · Market-Graded Learning for NBA Game-Impact Intelligence</a:t>
+              <a:t>DASC7606C Group 12 · Can a consumer beat a sports prediction market?</a:t>
             </a:r>
           </a:p>
         </p:txBody>
@@ -11592,7 +10453,7 @@
       </p:sp>
       <p:pic>
         <p:nvPicPr>
-          <p:cNvPr id="7" name="Picture 6" descr="m4_vs_market.png"/>
+          <p:cNvPr id="7" name="Picture 6" descr="trade_funnel.png"/>
           <p:cNvPicPr>
             <a:picLocks noChangeAspect="1"/>
           </p:cNvPicPr>
@@ -11606,8 +10467,8 @@
         </p:blipFill>
         <p:spPr>
           <a:xfrm>
-            <a:off x="457200" y="1209821"/>
-            <a:ext cx="6949440" cy="5078436"/>
+            <a:off x="457200" y="1533698"/>
+            <a:ext cx="7955279" cy="4339243"/>
           </a:xfrm>
           <a:prstGeom prst="rect">
             <a:avLst/>
@@ -11622,8 +10483,8 @@
         </p:nvSpPr>
         <p:spPr>
           <a:xfrm>
-            <a:off x="7589520" y="1280160"/>
-            <a:ext cx="4144975" cy="5029200"/>
+            <a:off x="8549640" y="1463040"/>
+            <a:ext cx="3184855" cy="4846320"/>
           </a:xfrm>
           <a:prstGeom prst="rect">
             <a:avLst/>
@@ -11643,31 +10504,22 @@
               <a:buChar char="•"/>
             </a:pPr>
             <a:r>
+              <a:rPr sz="2000" b="1" i="0">
+                <a:solidFill>
+                  <a:srgbClr val="0F172A"/>
+                </a:solidFill>
+                <a:latin typeface="Arial"/>
+              </a:rPr>
+              <a:t>771</a:t>
+            </a:r>
+            <a:r>
               <a:rPr sz="2000" b="0" i="0">
                 <a:solidFill>
                   <a:srgbClr val="0F172A"/>
                 </a:solidFill>
                 <a:latin typeface="Arial"/>
               </a:rPr>
-              <a:t>Brier, 501 test games: </a:t>
-            </a:r>
-            <a:r>
-              <a:rPr sz="2000" b="1" i="0">
-                <a:solidFill>
-                  <a:srgbClr val="0F172A"/>
-                </a:solidFill>
-                <a:latin typeface="Arial"/>
-              </a:rPr>
-              <a:t>market at tip 0.163</a:t>
-            </a:r>
-            <a:r>
-              <a:rPr sz="2000" b="0" i="0">
-                <a:solidFill>
-                  <a:srgbClr val="0F172A"/>
-                </a:solidFill>
-                <a:latin typeface="Arial"/>
-              </a:rPr>
-              <a:t>, M4 0.183</a:t>
+              <a:t> decision points</a:t>
             </a:r>
           </a:p>
           <a:p>
@@ -11678,47 +10530,22 @@
               <a:buChar char="•"/>
             </a:pPr>
             <a:r>
+              <a:rPr sz="2000" b="1" i="0">
+                <a:solidFill>
+                  <a:srgbClr val="0F172A"/>
+                </a:solidFill>
+                <a:latin typeface="Arial"/>
+              </a:rPr>
+              <a:t>153</a:t>
+            </a:r>
+            <a:r>
               <a:rPr sz="2000" b="0" i="0">
                 <a:solidFill>
                   <a:srgbClr val="0F172A"/>
                 </a:solidFill>
                 <a:latin typeface="Arial"/>
               </a:rPr>
-              <a:t>When they disagree by more than 5 points, the market is right:</a:t>
-            </a:r>
-          </a:p>
-          <a:p>
-            <a:pPr algn="l" marL="612647" indent="-256032">
-              <a:spcAft>
-                <a:spcPts val="1200"/>
-              </a:spcAft>
-              <a:buChar char="–"/>
-            </a:pPr>
-            <a:r>
-              <a:rPr sz="1800" b="0" i="0">
-                <a:solidFill>
-                  <a:srgbClr val="0F172A"/>
-                </a:solidFill>
-                <a:latin typeface="Arial"/>
-              </a:rPr>
-              <a:t>M4 higher on home: M4 48%, market 35%, actual 34%</a:t>
-            </a:r>
-          </a:p>
-          <a:p>
-            <a:pPr algn="l" marL="612647" indent="-256032">
-              <a:spcAft>
-                <a:spcPts val="1200"/>
-              </a:spcAft>
-              <a:buChar char="–"/>
-            </a:pPr>
-            <a:r>
-              <a:rPr sz="1800" b="0" i="0">
-                <a:solidFill>
-                  <a:srgbClr val="0F172A"/>
-                </a:solidFill>
-                <a:latin typeface="Arial"/>
-              </a:rPr>
-              <a:t>M4 lower on home: M4 61%, market 73%, actual 77%</a:t>
+              <a:t> with a gap &gt; 4 pts after fees</a:t>
             </a:r>
           </a:p>
           <a:p>
@@ -11731,11 +10558,81 @@
             <a:r>
               <a:rPr sz="2000" b="1" i="0">
                 <a:solidFill>
-                  <a:srgbClr val="EA580C"/>
-                </a:solidFill>
-                <a:latin typeface="Arial"/>
-              </a:rPr>
-              <a:t>Lesson: don't trade the raw model; use only its news shift</a:t>
+                  <a:srgbClr val="0F172A"/>
+                </a:solidFill>
+                <a:latin typeface="Arial"/>
+              </a:rPr>
+              <a:t>74</a:t>
+            </a:r>
+            <a:r>
+              <a:rPr sz="2000" b="0" i="0">
+                <a:solidFill>
+                  <a:srgbClr val="0F172A"/>
+                </a:solidFill>
+                <a:latin typeface="Arial"/>
+              </a:rPr>
+              <a:t> trades</a:t>
+            </a:r>
+          </a:p>
+          <a:p>
+            <a:pPr algn="l" marL="292608" indent="-256032">
+              <a:spcAft>
+                <a:spcPts val="1200"/>
+              </a:spcAft>
+              <a:buChar char="•"/>
+            </a:pPr>
+            <a:r>
+              <a:rPr sz="2000" b="0" i="0">
+                <a:solidFill>
+                  <a:srgbClr val="0F172A"/>
+                </a:solidFill>
+                <a:latin typeface="Arial"/>
+              </a:rPr>
+              <a:t>Only </a:t>
+            </a:r>
+            <a:r>
+              <a:rPr sz="2000" b="1" i="0">
+                <a:solidFill>
+                  <a:srgbClr val="0F172A"/>
+                </a:solidFill>
+                <a:latin typeface="Arial"/>
+              </a:rPr>
+              <a:t>27 (36%)</a:t>
+            </a:r>
+            <a:r>
+              <a:rPr sz="2000" b="0" i="0">
+                <a:solidFill>
+                  <a:srgbClr val="0F172A"/>
+                </a:solidFill>
+                <a:latin typeface="Arial"/>
+              </a:rPr>
+              <a:t> beat or matched the close</a:t>
+            </a:r>
+          </a:p>
+          <a:p>
+            <a:pPr algn="l" marL="292608" indent="-256032">
+              <a:spcAft>
+                <a:spcPts val="1200"/>
+              </a:spcAft>
+              <a:buChar char="•"/>
+            </a:pPr>
+            <a:r>
+              <a:rPr sz="2000" b="1" i="0">
+                <a:solidFill>
+                  <a:srgbClr val="0F172A"/>
+                </a:solidFill>
+                <a:latin typeface="Arial"/>
+              </a:rPr>
+              <a:t>41 (55%)</a:t>
+            </a:r>
+            <a:r>
+              <a:rPr sz="2000" b="0" i="0">
+                <a:solidFill>
+                  <a:srgbClr val="0F172A"/>
+                </a:solidFill>
+                <a:latin typeface="Arial"/>
+              </a:rPr>
+              <a:t> won, but winning ≠ an edge</a:t>
             </a:r>
           </a:p>
         </p:txBody>
@@ -11880,7 +10777,7 @@
                 </a:solidFill>
                 <a:latin typeface="Arial"/>
               </a:rPr>
-              <a:t>The agent loop: Decide, then nightly Review</a:t>
+              <a:t>Evidence 2: the price moves before the news reaches you</a:t>
             </a:r>
           </a:p>
         </p:txBody>
@@ -11919,7 +10816,7 @@
                 </a:solidFill>
                 <a:latin typeface="Arial"/>
               </a:rPr>
-              <a:t>DASC7606C Group 12 · Market-Graded Learning for NBA Game-Impact Intelligence</a:t>
+              <a:t>DASC7606C Group 12 · Can a consumer beat a sports prediction market?</a:t>
             </a:r>
           </a:p>
         </p:txBody>
@@ -11965,7 +10862,7 @@
       </p:sp>
       <p:pic>
         <p:nvPicPr>
-          <p:cNvPr id="7" name="Picture 6" descr="agent_workflow.png"/>
+          <p:cNvPr id="7" name="Picture 6" descr="price_discovery.png"/>
           <p:cNvPicPr>
             <a:picLocks noChangeAspect="1"/>
           </p:cNvPicPr>
@@ -11979,8 +10876,8 @@
         </p:blipFill>
         <p:spPr>
           <a:xfrm>
-            <a:off x="457200" y="1398256"/>
-            <a:ext cx="8412480" cy="4655846"/>
+            <a:off x="895197" y="1097280"/>
+            <a:ext cx="10401299" cy="4160520"/>
           </a:xfrm>
           <a:prstGeom prst="rect">
             <a:avLst/>
@@ -11995,8 +10892,8 @@
         </p:nvSpPr>
         <p:spPr>
           <a:xfrm>
-            <a:off x="9006840" y="1371600"/>
-            <a:ext cx="2727655" cy="5029200"/>
+            <a:off x="457200" y="5349240"/>
+            <a:ext cx="11277295" cy="1005840"/>
           </a:xfrm>
           <a:prstGeom prst="rect">
             <a:avLst/>
@@ -12011,7 +10908,7 @@
           <a:p>
             <a:pPr algn="l" marL="292608" indent="-256032">
               <a:spcAft>
-                <a:spcPts val="1200"/>
+                <a:spcPts val="400"/>
               </a:spcAft>
               <a:buChar char="•"/>
             </a:pPr>
@@ -12022,7 +10919,7 @@
                 </a:solidFill>
                 <a:latin typeface="Arial"/>
               </a:rPr>
-              <a:t>Decide:</a:t>
+              <a:t>91%</a:t>
             </a:r>
             <a:r>
               <a:rPr sz="1800" b="0" i="0">
@@ -12031,85 +10928,24 @@
                 </a:solidFill>
                 <a:latin typeface="Arial"/>
               </a:rPr>
-              <a:t> each news item ≤ 6 h before tip, and tip − 60 min</a:t>
+              <a:t> of the news-direction move was already in the price when the list was public (+1.80 vs +0.18 pts, 193 test games)</a:t>
             </a:r>
           </a:p>
           <a:p>
             <a:pPr algn="l" marL="292608" indent="-256032">
               <a:spcAft>
-                <a:spcPts val="1200"/>
+                <a:spcPts val="400"/>
               </a:spcAft>
               <a:buChar char="•"/>
             </a:pPr>
             <a:r>
-              <a:rPr sz="1800" b="1" i="0">
+              <a:rPr sz="1800" b="0" i="0">
                 <a:solidFill>
                   <a:srgbClr val="0F172A"/>
                 </a:solidFill>
                 <a:latin typeface="Arial"/>
               </a:rPr>
-              <a:t>Checks:</a:t>
-            </a:r>
-            <a:r>
-              <a:rPr sz="1800" b="0" i="0">
-                <a:solidFill>
-                  <a:srgbClr val="0F172A"/>
-                </a:solidFill>
-                <a:latin typeface="Arial"/>
-              </a:rPr>
-              <a:t> one retry, then blocked</a:t>
-            </a:r>
-          </a:p>
-          <a:p>
-            <a:pPr algn="l" marL="292608" indent="-256032">
-              <a:spcAft>
-                <a:spcPts val="1200"/>
-              </a:spcAft>
-              <a:buChar char="•"/>
-            </a:pPr>
-            <a:r>
-              <a:rPr sz="1800" b="1" i="0">
-                <a:solidFill>
-                  <a:srgbClr val="0F172A"/>
-                </a:solidFill>
-                <a:latin typeface="Arial"/>
-              </a:rPr>
-              <a:t>Review:</a:t>
-            </a:r>
-            <a:r>
-              <a:rPr sz="1800" b="0" i="0">
-                <a:solidFill>
-                  <a:srgbClr val="0F172A"/>
-                </a:solidFill>
-                <a:latin typeface="Arial"/>
-              </a:rPr>
-              <a:t> nightly; one rule proposed, the gate decides</a:t>
-            </a:r>
-          </a:p>
-          <a:p>
-            <a:pPr algn="l" marL="292608" indent="-256032">
-              <a:spcAft>
-                <a:spcPts val="1200"/>
-              </a:spcAft>
-              <a:buChar char="•"/>
-            </a:pPr>
-            <a:r>
-              <a:rPr sz="1800" b="1" i="0">
-                <a:solidFill>
-                  <a:srgbClr val="0F172A"/>
-                </a:solidFill>
-                <a:latin typeface="Arial"/>
-              </a:rPr>
-              <a:t>LLM (Gemini):</a:t>
-            </a:r>
-            <a:r>
-              <a:rPr sz="1800" b="0" i="0">
-                <a:solidFill>
-                  <a:srgbClr val="0F172A"/>
-                </a:solidFill>
-                <a:latin typeface="Arial"/>
-              </a:rPr>
-              <a:t> optional, only in investigate / analyse / review; default offline and deterministic</a:t>
+              <a:t>List stamped tip − 30 min: our proxy for when a retail user sees it</a:t>
             </a:r>
           </a:p>
         </p:txBody>
@@ -12254,7 +11090,7 @@
                 </a:solidFill>
                 <a:latin typeface="Arial"/>
               </a:rPr>
-              <a:t>How one trade is decided</a:t>
+              <a:t>Evidence 3: the market beats our model</a:t>
             </a:r>
           </a:p>
         </p:txBody>
@@ -12293,7 +11129,7 @@
                 </a:solidFill>
                 <a:latin typeface="Arial"/>
               </a:rPr>
-              <a:t>DASC7606C Group 12 · Market-Graded Learning for NBA Game-Impact Intelligence</a:t>
+              <a:t>DASC7606C Group 12 · Can a consumer beat a sports prediction market?</a:t>
             </a:r>
           </a:p>
         </p:txBody>
@@ -12339,7 +11175,7 @@
       </p:sp>
       <p:pic>
         <p:nvPicPr>
-          <p:cNvPr id="7" name="Picture 6" descr="trade_flow.png"/>
+          <p:cNvPr id="7" name="Picture 6" descr="m4_vs_market.png"/>
           <p:cNvPicPr>
             <a:picLocks noChangeAspect="1"/>
           </p:cNvPicPr>
@@ -12353,8 +11189,8 @@
         </p:blipFill>
         <p:spPr>
           <a:xfrm>
-            <a:off x="457200" y="1295453"/>
-            <a:ext cx="8229600" cy="4861453"/>
+            <a:off x="457200" y="1209821"/>
+            <a:ext cx="6949440" cy="5078436"/>
           </a:xfrm>
           <a:prstGeom prst="rect">
             <a:avLst/>
@@ -12369,8 +11205,8 @@
         </p:nvSpPr>
         <p:spPr>
           <a:xfrm>
-            <a:off x="8778240" y="1280160"/>
-            <a:ext cx="2956255" cy="5120640"/>
+            <a:off x="7589520" y="1280160"/>
+            <a:ext cx="4144975" cy="5120640"/>
           </a:xfrm>
           <a:prstGeom prst="rect">
             <a:avLst/>
@@ -12390,22 +11226,31 @@
               <a:buChar char="•"/>
             </a:pPr>
             <a:r>
-              <a:rPr sz="1800" b="1" i="0">
+              <a:rPr sz="1900" b="0" i="0">
                 <a:solidFill>
                   <a:srgbClr val="0F172A"/>
                 </a:solidFill>
                 <a:latin typeface="Arial"/>
               </a:rPr>
-              <a:t>Anchor</a:t>
-            </a:r>
-            <a:r>
-              <a:rPr sz="1800" b="0" i="0">
+              <a:t>Brier, 501 test games, 1 h before tip: </a:t>
+            </a:r>
+            <a:r>
+              <a:rPr sz="1900" b="1" i="0">
                 <a:solidFill>
                   <a:srgbClr val="0F172A"/>
                 </a:solidFill>
                 <a:latin typeface="Arial"/>
               </a:rPr>
-              <a:t> = market mid 24 h before tip</a:t>
+              <a:t>market 0.164</a:t>
+            </a:r>
+            <a:r>
+              <a:rPr sz="1900" b="0" i="0">
+                <a:solidFill>
+                  <a:srgbClr val="0F172A"/>
+                </a:solidFill>
+                <a:latin typeface="Arial"/>
+              </a:rPr>
+              <a:t>, our model 0.186</a:t>
             </a:r>
           </a:p>
           <a:p>
@@ -12416,22 +11261,47 @@
               <a:buChar char="•"/>
             </a:pPr>
             <a:r>
-              <a:rPr sz="1800" b="1" i="0">
+              <a:rPr sz="1900" b="0" i="0">
                 <a:solidFill>
                   <a:srgbClr val="0F172A"/>
                 </a:solidFill>
                 <a:latin typeface="Arial"/>
               </a:rPr>
-              <a:t>Estimate</a:t>
-            </a:r>
-            <a:r>
-              <a:rPr sz="1800" b="0" i="0">
+              <a:t>Disagree by more than 5 pts, and the market is right:</a:t>
+            </a:r>
+          </a:p>
+          <a:p>
+            <a:pPr algn="l" marL="612647" indent="-256032">
+              <a:spcAft>
+                <a:spcPts val="1000"/>
+              </a:spcAft>
+              <a:buChar char="–"/>
+            </a:pPr>
+            <a:r>
+              <a:rPr sz="1700" b="0" i="0">
                 <a:solidFill>
                   <a:srgbClr val="0F172A"/>
                 </a:solidFill>
                 <a:latin typeface="Arial"/>
               </a:rPr>
-              <a:t> = anchor + M4 news shift</a:t>
+              <a:t>model higher on home: model 48%, market 35%, actual 34%</a:t>
+            </a:r>
+          </a:p>
+          <a:p>
+            <a:pPr algn="l" marL="612647" indent="-256032">
+              <a:spcAft>
+                <a:spcPts val="1000"/>
+              </a:spcAft>
+              <a:buChar char="–"/>
+            </a:pPr>
+            <a:r>
+              <a:rPr sz="1700" b="0" i="0">
+                <a:solidFill>
+                  <a:srgbClr val="0F172A"/>
+                </a:solidFill>
+                <a:latin typeface="Arial"/>
+              </a:rPr>
+              <a:t>model lower on home: model 61%, market 73%, actual 77%</a:t>
             </a:r>
           </a:p>
           <a:p>
@@ -12442,74 +11312,13 @@
               <a:buChar char="•"/>
             </a:pPr>
             <a:r>
-              <a:rPr sz="1800" b="1" i="0">
-                <a:solidFill>
-                  <a:srgbClr val="0F172A"/>
-                </a:solidFill>
-                <a:latin typeface="Arial"/>
-              </a:rPr>
-              <a:t>Gap</a:t>
-            </a:r>
-            <a:r>
-              <a:rPr sz="1800" b="0" i="0">
-                <a:solidFill>
-                  <a:srgbClr val="0F172A"/>
-                </a:solidFill>
-                <a:latin typeface="Arial"/>
-              </a:rPr>
-              <a:t> = P(side) − price − fee, fee = 7%·p·(1−p)</a:t>
-            </a:r>
-          </a:p>
-          <a:p>
-            <a:pPr algn="l" marL="292608" indent="-256032">
-              <a:spcAft>
-                <a:spcPts val="1000"/>
-              </a:spcAft>
-              <a:buChar char="•"/>
-            </a:pPr>
-            <a:r>
-              <a:rPr sz="1800" b="1" i="0">
-                <a:solidFill>
-                  <a:srgbClr val="0F172A"/>
-                </a:solidFill>
-                <a:latin typeface="Arial"/>
-              </a:rPr>
-              <a:t>Trade if</a:t>
-            </a:r>
-            <a:r>
-              <a:rPr sz="1800" b="0" i="0">
-                <a:solidFill>
-                  <a:srgbClr val="0F172A"/>
-                </a:solidFill>
-                <a:latin typeface="Arial"/>
-              </a:rPr>
-              <a:t> gap &gt; 4 pts, no rule skip, one position per game</a:t>
-            </a:r>
-          </a:p>
-          <a:p>
-            <a:pPr algn="l" marL="292608" indent="-256032">
-              <a:spcAft>
-                <a:spcPts val="1000"/>
-              </a:spcAft>
-              <a:buChar char="•"/>
-            </a:pPr>
-            <a:r>
-              <a:rPr sz="1800" b="1" i="0">
-                <a:solidFill>
-                  <a:srgbClr val="0F172A"/>
-                </a:solidFill>
-                <a:latin typeface="Arial"/>
-              </a:rPr>
-              <a:t>$20 stake;</a:t>
-            </a:r>
-            <a:r>
-              <a:rPr sz="1800" b="0" i="0">
-                <a:solidFill>
-                  <a:srgbClr val="0F172A"/>
-                </a:solidFill>
-                <a:latin typeface="Arial"/>
-              </a:rPr>
-              <a:t> caps $50 / order, $100 / game, $300 / day</a:t>
+              <a:rPr sz="1600" b="0" i="0">
+                <a:solidFill>
+                  <a:srgbClr val="64748B"/>
+                </a:solidFill>
+                <a:latin typeface="Arial"/>
+              </a:rPr>
+              <a:t>With the inactive list: model 0.183 vs market at tip 0.163</a:t>
             </a:r>
           </a:p>
         </p:txBody>
@@ -12654,7 +11463,7 @@
                 </a:solidFill>
                 <a:latin typeface="Arial"/>
               </a:rPr>
-              <a:t>Worked example: CLE @ POR, 1 February 2026</a:t>
+              <a:t>Evidence 4: long shots, where the data is weaker</a:t>
             </a:r>
           </a:p>
         </p:txBody>
@@ -12693,7 +11502,7 @@
                 </a:solidFill>
                 <a:latin typeface="Arial"/>
               </a:rPr>
-              <a:t>DASC7606C Group 12 · Market-Graded Learning for NBA Game-Impact Intelligence</a:t>
+              <a:t>DASC7606C Group 12 · Can a consumer beat a sports prediction market?</a:t>
             </a:r>
           </a:p>
         </p:txBody>
@@ -12739,7 +11548,7 @@
       </p:sp>
       <p:pic>
         <p:nvPicPr>
-          <p:cNvPr id="7" name="Picture 6" descr="trade_example.png"/>
+          <p:cNvPr id="7" name="Picture 6" descr="longshot_calibration.png"/>
           <p:cNvPicPr>
             <a:picLocks noChangeAspect="1"/>
           </p:cNvPicPr>
@@ -12753,8 +11562,8 @@
         </p:blipFill>
         <p:spPr>
           <a:xfrm>
-            <a:off x="914247" y="1097280"/>
-            <a:ext cx="10363200" cy="4023360"/>
+            <a:off x="895197" y="1097280"/>
+            <a:ext cx="10401299" cy="4160520"/>
           </a:xfrm>
           <a:prstGeom prst="rect">
             <a:avLst/>
@@ -12769,8 +11578,8 @@
         </p:nvSpPr>
         <p:spPr>
           <a:xfrm>
-            <a:off x="457200" y="5212080"/>
-            <a:ext cx="5547207" cy="1143000"/>
+            <a:off x="457200" y="5349240"/>
+            <a:ext cx="11277295" cy="1005840"/>
           </a:xfrm>
           <a:prstGeom prst="rect">
             <a:avLst/>
@@ -12796,7 +11605,7 @@
                 </a:solidFill>
                 <a:latin typeface="Arial"/>
               </a:rPr>
-              <a:t>News 01:30 UTC:</a:t>
+              <a:t>Not clearly supported:</a:t>
             </a:r>
             <a:r>
               <a:rPr sz="1800" b="0" i="0">
@@ -12805,7 +11614,7 @@
                 </a:solidFill>
                 <a:latin typeface="Arial"/>
               </a:rPr>
-              <a:t> Avdija, Henderson, Murray, Thybulle out</a:t>
+              <a:t> prices are calibrated; only 0–10¢ hints (1 win in 66 vs 7.4% implied, z = −1.8)</a:t>
             </a:r>
           </a:p>
           <a:p>
@@ -12816,13 +11625,22 @@
               <a:buChar char="•"/>
             </a:pPr>
             <a:r>
+              <a:rPr sz="1800" b="0" i="0">
+                <a:solidFill>
+                  <a:srgbClr val="0F172A"/>
+                </a:solidFill>
+                <a:latin typeface="Arial"/>
+              </a:rPr>
+              <a:t>Buying at ask + fee: long shots ≤ 25¢ </a:t>
+            </a:r>
+            <a:r>
               <a:rPr sz="1800" b="1" i="0">
                 <a:solidFill>
                   <a:srgbClr val="0F172A"/>
                 </a:solidFill>
                 <a:latin typeface="Arial"/>
               </a:rPr>
-              <a:t>POR:</a:t>
+              <a:t>−13.4%</a:t>
             </a:r>
             <a:r>
               <a:rPr sz="1800" b="0" i="0">
@@ -12831,91 +11649,7 @@
                 </a:solidFill>
                 <a:latin typeface="Arial"/>
               </a:rPr>
-              <a:t> anchor 42%, shift −8.7 → 33.8%</a:t>
-            </a:r>
-          </a:p>
-        </p:txBody>
-      </p:sp>
-      <p:sp>
-        <p:nvSpPr>
-          <p:cNvPr id="9" name="TextBox 8"/>
-          <p:cNvSpPr txBox="1"/>
-          <p:nvPr/>
-        </p:nvSpPr>
-        <p:spPr>
-          <a:xfrm>
-            <a:off x="6187287" y="5212080"/>
-            <a:ext cx="5547207" cy="1143000"/>
-          </a:xfrm>
-          <a:prstGeom prst="rect">
-            <a:avLst/>
-          </a:prstGeom>
-          <a:noFill/>
-        </p:spPr>
-        <p:txBody>
-          <a:bodyPr wrap="square" anchor="t" lIns="73152" rIns="73152" tIns="36576" bIns="36576">
-            <a:spAutoFit/>
-          </a:bodyPr>
-          <a:lstStyle/>
-          <a:p>
-            <a:pPr algn="l" marL="292608" indent="-256032">
-              <a:spcAft>
-                <a:spcPts val="400"/>
-              </a:spcAft>
-              <a:buChar char="•"/>
-            </a:pPr>
-            <a:r>
-              <a:rPr sz="1800" b="1" i="0">
-                <a:solidFill>
-                  <a:srgbClr val="0F172A"/>
-                </a:solidFill>
-                <a:latin typeface="Arial"/>
-              </a:rPr>
-              <a:t>Bought NO at 55¢</a:t>
-            </a:r>
-            <a:r>
-              <a:rPr sz="1800" b="0" i="0">
-                <a:solidFill>
-                  <a:srgbClr val="0F172A"/>
-                </a:solidFill>
-                <a:latin typeface="Arial"/>
-              </a:rPr>
-              <a:t>, break-even 56.7%; gap +9.5</a:t>
-            </a:r>
-          </a:p>
-          <a:p>
-            <a:pPr algn="l" marL="292608" indent="-256032">
-              <a:spcAft>
-                <a:spcPts val="400"/>
-              </a:spcAft>
-              <a:buChar char="•"/>
-            </a:pPr>
-            <a:r>
-              <a:rPr sz="1800" b="1" i="0">
-                <a:solidFill>
-                  <a:srgbClr val="0F172A"/>
-                </a:solidFill>
-                <a:latin typeface="Arial"/>
-              </a:rPr>
-              <a:t>Close 62.5%</a:t>
-            </a:r>
-            <a:r>
-              <a:rPr sz="1800" b="0" i="0">
-                <a:solidFill>
-                  <a:srgbClr val="0F172A"/>
-                </a:solidFill>
-                <a:latin typeface="Arial"/>
-              </a:rPr>
-              <a:t>, CLV +7.5¢; </a:t>
-            </a:r>
-            <a:r>
-              <a:rPr sz="1800" b="1" i="0">
-                <a:solidFill>
-                  <a:srgbClr val="0F172A"/>
-                </a:solidFill>
-                <a:latin typeface="Arial"/>
-              </a:rPr>
-              <a:t>P&amp;L +$15.57</a:t>
+              <a:t>, heavy favourites ≥ 75¢ −2.2%</a:t>
             </a:r>
           </a:p>
         </p:txBody>
@@ -13060,7 +11794,7 @@
                 </a:solidFill>
                 <a:latin typeface="Arial"/>
               </a:rPr>
-              <a:t>Learning: propose one rule a day, keep it only if it helps</a:t>
+              <a:t>Evidence 5: not trading beat every strategy</a:t>
             </a:r>
           </a:p>
         </p:txBody>
@@ -13099,7 +11833,7 @@
                 </a:solidFill>
                 <a:latin typeface="Arial"/>
               </a:rPr>
-              <a:t>DASC7606C Group 12 · Market-Graded Learning for NBA Game-Impact Intelligence</a:t>
+              <a:t>DASC7606C Group 12 · Can a consumer beat a sports prediction market?</a:t>
             </a:r>
           </a:p>
         </p:txBody>
@@ -13143,98 +11877,483 @@
           </a:p>
         </p:txBody>
       </p:sp>
-      <p:sp>
-        <p:nvSpPr>
-          <p:cNvPr id="7" name="Rounded Rectangle 6"/>
-          <p:cNvSpPr/>
-          <p:nvPr/>
-        </p:nvSpPr>
-        <p:spPr>
-          <a:xfrm>
-            <a:off x="457200" y="1234439"/>
-            <a:ext cx="3520440" cy="2331720"/>
-          </a:xfrm>
-          <a:prstGeom prst="roundRect">
-            <a:avLst>
-              <a:gd name="adj" fmla="val 6000"/>
-            </a:avLst>
-          </a:prstGeom>
-          <a:solidFill>
-            <a:srgbClr val="FFFFFF"/>
-          </a:solidFill>
-          <a:ln w="15875">
-            <a:solidFill>
-              <a:srgbClr val="2563EB"/>
-            </a:solidFill>
-          </a:ln>
-          <a:effectLst/>
-        </p:spPr>
-        <p:style>
-          <a:lnRef idx="1">
-            <a:schemeClr val="accent1"/>
-          </a:lnRef>
-          <a:fillRef idx="3">
-            <a:schemeClr val="accent1"/>
-          </a:fillRef>
-          <a:effectRef idx="2">
-            <a:schemeClr val="accent1"/>
-          </a:effectRef>
-          <a:fontRef idx="minor">
-            <a:schemeClr val="lt1"/>
-          </a:fontRef>
-        </p:style>
-        <p:txBody>
-          <a:bodyPr rtlCol="0" anchor="ctr"/>
-          <a:lstStyle/>
-          <a:p>
-            <a:pPr algn="ctr"/>
-          </a:p>
-        </p:txBody>
-      </p:sp>
-      <p:sp>
-        <p:nvSpPr>
-          <p:cNvPr id="8" name="Rectangle 7"/>
-          <p:cNvSpPr/>
-          <p:nvPr/>
-        </p:nvSpPr>
-        <p:spPr>
-          <a:xfrm>
-            <a:off x="457200" y="1234439"/>
-            <a:ext cx="109728" cy="2331720"/>
-          </a:xfrm>
-          <a:prstGeom prst="rect">
-            <a:avLst/>
-          </a:prstGeom>
-          <a:solidFill>
-            <a:srgbClr val="2563EB"/>
-          </a:solidFill>
-          <a:ln>
-            <a:noFill/>
-          </a:ln>
-          <a:effectLst/>
-        </p:spPr>
-        <p:style>
-          <a:lnRef idx="1">
-            <a:schemeClr val="accent1"/>
-          </a:lnRef>
-          <a:fillRef idx="3">
-            <a:schemeClr val="accent1"/>
-          </a:fillRef>
-          <a:effectRef idx="2">
-            <a:schemeClr val="accent1"/>
-          </a:effectRef>
-          <a:fontRef idx="minor">
-            <a:schemeClr val="lt1"/>
-          </a:fontRef>
-        </p:style>
-        <p:txBody>
-          <a:bodyPr rtlCol="0" anchor="ctr"/>
-          <a:lstStyle/>
-          <a:p>
-            <a:pPr algn="ctr"/>
-          </a:p>
-        </p:txBody>
-      </p:sp>
+      <p:pic>
+        <p:nvPicPr>
+          <p:cNvPr id="7" name="Picture 6" descr="headline_clv.png"/>
+          <p:cNvPicPr>
+            <a:picLocks noChangeAspect="1"/>
+          </p:cNvPicPr>
+          <p:nvPr/>
+        </p:nvPicPr>
+        <p:blipFill>
+          <a:blip r:embed="rId3"/>
+          <a:stretch>
+            <a:fillRect/>
+          </a:stretch>
+        </p:blipFill>
+        <p:spPr>
+          <a:xfrm>
+            <a:off x="457200" y="1171575"/>
+            <a:ext cx="5669280" cy="3188970"/>
+          </a:xfrm>
+          <a:prstGeom prst="rect">
+            <a:avLst/>
+          </a:prstGeom>
+        </p:spPr>
+      </p:pic>
+      <p:graphicFrame>
+        <p:nvGraphicFramePr>
+          <p:cNvPr id="8" name="Table 7"/>
+          <p:cNvGraphicFramePr>
+            <a:graphicFrameLocks noGrp="1"/>
+          </p:cNvGraphicFramePr>
+          <p:nvPr/>
+        </p:nvGraphicFramePr>
+        <p:xfrm>
+          <a:off x="6355080" y="1188720"/>
+          <a:ext cx="5376672" cy="3108960"/>
+        </p:xfrm>
+        <a:graphic>
+          <a:graphicData uri="http://schemas.openxmlformats.org/drawingml/2006/table">
+            <a:tbl>
+              <a:tblPr firstRow="1" bandRow="1">
+                <a:tableStyleId>{5C22544A-7EE6-4342-B048-85BDC9FD1C3A}</a:tableStyleId>
+              </a:tblPr>
+              <a:tblGrid>
+                <a:gridCol w="2926080"/>
+                <a:gridCol w="914400"/>
+                <a:gridCol w="1536192"/>
+              </a:tblGrid>
+              <a:tr h="457200">
+                <a:tc>
+                  <a:txBody>
+                    <a:bodyPr wrap="square"/>
+                    <a:lstStyle/>
+                    <a:p>
+                      <a:pPr algn="l"/>
+                      <a:r>
+                        <a:rPr sz="1600" b="1" i="0">
+                          <a:solidFill>
+                            <a:srgbClr val="FFFFFF"/>
+                          </a:solidFill>
+                          <a:latin typeface="Arial"/>
+                        </a:rPr>
+                        <a:t>Strategy</a:t>
+                      </a:r>
+                    </a:p>
+                  </a:txBody>
+                  <a:tcPr marL="73152" marR="73152" marT="36576" marB="36576" anchor="ctr">
+                    <a:solidFill>
+                      <a:srgbClr val="1E293B"/>
+                    </a:solidFill>
+                  </a:tcPr>
+                </a:tc>
+                <a:tc>
+                  <a:txBody>
+                    <a:bodyPr wrap="square"/>
+                    <a:lstStyle/>
+                    <a:p>
+                      <a:pPr algn="ctr"/>
+                      <a:r>
+                        <a:rPr sz="1600" b="1" i="0">
+                          <a:solidFill>
+                            <a:srgbClr val="FFFFFF"/>
+                          </a:solidFill>
+                          <a:latin typeface="Arial"/>
+                        </a:rPr>
+                        <a:t>Trades</a:t>
+                      </a:r>
+                    </a:p>
+                  </a:txBody>
+                  <a:tcPr marL="73152" marR="73152" marT="36576" marB="36576" anchor="ctr">
+                    <a:solidFill>
+                      <a:srgbClr val="1E293B"/>
+                    </a:solidFill>
+                  </a:tcPr>
+                </a:tc>
+                <a:tc>
+                  <a:txBody>
+                    <a:bodyPr wrap="square"/>
+                    <a:lstStyle/>
+                    <a:p>
+                      <a:pPr algn="ctr"/>
+                      <a:r>
+                        <a:rPr sz="1600" b="1" i="0">
+                          <a:solidFill>
+                            <a:srgbClr val="FFFFFF"/>
+                          </a:solidFill>
+                          <a:latin typeface="Arial"/>
+                        </a:rPr>
+                        <a:t>P&amp;L</a:t>
+                      </a:r>
+                    </a:p>
+                  </a:txBody>
+                  <a:tcPr marL="73152" marR="73152" marT="36576" marB="36576" anchor="ctr">
+                    <a:solidFill>
+                      <a:srgbClr val="1E293B"/>
+                    </a:solidFill>
+                  </a:tcPr>
+                </a:tc>
+              </a:tr>
+              <a:tr h="530352">
+                <a:tc>
+                  <a:txBody>
+                    <a:bodyPr wrap="square"/>
+                    <a:lstStyle/>
+                    <a:p>
+                      <a:pPr algn="l"/>
+                      <a:r>
+                        <a:rPr sz="1600" b="0" i="0">
+                          <a:solidFill>
+                            <a:srgbClr val="0F172A"/>
+                          </a:solidFill>
+                          <a:latin typeface="Arial"/>
+                        </a:rPr>
+                        <a:t>Never trade</a:t>
+                      </a:r>
+                    </a:p>
+                  </a:txBody>
+                  <a:tcPr marL="73152" marR="73152" marT="36576" marB="36576" anchor="ctr">
+                    <a:solidFill>
+                      <a:srgbClr val="DCFCE7"/>
+                    </a:solidFill>
+                  </a:tcPr>
+                </a:tc>
+                <a:tc>
+                  <a:txBody>
+                    <a:bodyPr wrap="square"/>
+                    <a:lstStyle/>
+                    <a:p>
+                      <a:pPr algn="ctr"/>
+                      <a:r>
+                        <a:rPr sz="1600" b="0" i="0">
+                          <a:solidFill>
+                            <a:srgbClr val="0F172A"/>
+                          </a:solidFill>
+                          <a:latin typeface="Arial"/>
+                        </a:rPr>
+                        <a:t>0</a:t>
+                      </a:r>
+                    </a:p>
+                  </a:txBody>
+                  <a:tcPr marL="73152" marR="73152" marT="36576" marB="36576" anchor="ctr">
+                    <a:solidFill>
+                      <a:srgbClr val="DCFCE7"/>
+                    </a:solidFill>
+                  </a:tcPr>
+                </a:tc>
+                <a:tc>
+                  <a:txBody>
+                    <a:bodyPr wrap="square"/>
+                    <a:lstStyle/>
+                    <a:p>
+                      <a:pPr algn="ctr"/>
+                      <a:r>
+                        <a:rPr sz="1600" b="1" i="0">
+                          <a:solidFill>
+                            <a:srgbClr val="0F172A"/>
+                          </a:solidFill>
+                          <a:latin typeface="Arial"/>
+                        </a:rPr>
+                        <a:t>$0</a:t>
+                      </a:r>
+                    </a:p>
+                  </a:txBody>
+                  <a:tcPr marL="73152" marR="73152" marT="36576" marB="36576" anchor="ctr">
+                    <a:solidFill>
+                      <a:srgbClr val="DCFCE7"/>
+                    </a:solidFill>
+                  </a:tcPr>
+                </a:tc>
+              </a:tr>
+              <a:tr h="530352">
+                <a:tc>
+                  <a:txBody>
+                    <a:bodyPr wrap="square"/>
+                    <a:lstStyle/>
+                    <a:p>
+                      <a:pPr algn="l"/>
+                      <a:r>
+                        <a:rPr sz="1600" b="0" i="0">
+                          <a:solidFill>
+                            <a:srgbClr val="0F172A"/>
+                          </a:solidFill>
+                          <a:latin typeface="Arial"/>
+                        </a:rPr>
+                        <a:t>Full agent (anchor + learning)</a:t>
+                      </a:r>
+                    </a:p>
+                  </a:txBody>
+                  <a:tcPr marL="73152" marR="73152" marT="36576" marB="36576" anchor="ctr">
+                    <a:solidFill>
+                      <a:srgbClr val="FFFFFF"/>
+                    </a:solidFill>
+                  </a:tcPr>
+                </a:tc>
+                <a:tc>
+                  <a:txBody>
+                    <a:bodyPr wrap="square"/>
+                    <a:lstStyle/>
+                    <a:p>
+                      <a:pPr algn="ctr"/>
+                      <a:r>
+                        <a:rPr sz="1600" b="0" i="0">
+                          <a:solidFill>
+                            <a:srgbClr val="0F172A"/>
+                          </a:solidFill>
+                          <a:latin typeface="Arial"/>
+                        </a:rPr>
+                        <a:t>74</a:t>
+                      </a:r>
+                    </a:p>
+                  </a:txBody>
+                  <a:tcPr marL="73152" marR="73152" marT="36576" marB="36576" anchor="ctr">
+                    <a:solidFill>
+                      <a:srgbClr val="FFFFFF"/>
+                    </a:solidFill>
+                  </a:tcPr>
+                </a:tc>
+                <a:tc>
+                  <a:txBody>
+                    <a:bodyPr wrap="square"/>
+                    <a:lstStyle/>
+                    <a:p>
+                      <a:pPr algn="ctr"/>
+                      <a:r>
+                        <a:rPr sz="1600" b="0" i="0">
+                          <a:solidFill>
+                            <a:srgbClr val="0F172A"/>
+                          </a:solidFill>
+                          <a:latin typeface="Arial"/>
+                        </a:rPr>
+                        <a:t>−$32</a:t>
+                      </a:r>
+                    </a:p>
+                  </a:txBody>
+                  <a:tcPr marL="73152" marR="73152" marT="36576" marB="36576" anchor="ctr">
+                    <a:solidFill>
+                      <a:srgbClr val="FFFFFF"/>
+                    </a:solidFill>
+                  </a:tcPr>
+                </a:tc>
+              </a:tr>
+              <a:tr h="530352">
+                <a:tc>
+                  <a:txBody>
+                    <a:bodyPr wrap="square"/>
+                    <a:lstStyle/>
+                    <a:p>
+                      <a:pPr algn="l"/>
+                      <a:r>
+                        <a:rPr sz="1600" b="0" i="0">
+                          <a:solidFill>
+                            <a:srgbClr val="0F172A"/>
+                          </a:solidFill>
+                          <a:latin typeface="Arial"/>
+                        </a:rPr>
+                        <a:t>Anchor, no learning</a:t>
+                      </a:r>
+                    </a:p>
+                  </a:txBody>
+                  <a:tcPr marL="73152" marR="73152" marT="36576" marB="36576" anchor="ctr">
+                    <a:solidFill>
+                      <a:srgbClr val="F1F5F9"/>
+                    </a:solidFill>
+                  </a:tcPr>
+                </a:tc>
+                <a:tc>
+                  <a:txBody>
+                    <a:bodyPr wrap="square"/>
+                    <a:lstStyle/>
+                    <a:p>
+                      <a:pPr algn="ctr"/>
+                      <a:r>
+                        <a:rPr sz="1600" b="0" i="0">
+                          <a:solidFill>
+                            <a:srgbClr val="0F172A"/>
+                          </a:solidFill>
+                          <a:latin typeface="Arial"/>
+                        </a:rPr>
+                        <a:t>129</a:t>
+                      </a:r>
+                    </a:p>
+                  </a:txBody>
+                  <a:tcPr marL="73152" marR="73152" marT="36576" marB="36576" anchor="ctr">
+                    <a:solidFill>
+                      <a:srgbClr val="F1F5F9"/>
+                    </a:solidFill>
+                  </a:tcPr>
+                </a:tc>
+                <a:tc>
+                  <a:txBody>
+                    <a:bodyPr wrap="square"/>
+                    <a:lstStyle/>
+                    <a:p>
+                      <a:pPr algn="ctr"/>
+                      <a:r>
+                        <a:rPr sz="1600" b="0" i="0">
+                          <a:solidFill>
+                            <a:srgbClr val="0F172A"/>
+                          </a:solidFill>
+                          <a:latin typeface="Arial"/>
+                        </a:rPr>
+                        <a:t>−$247</a:t>
+                      </a:r>
+                    </a:p>
+                  </a:txBody>
+                  <a:tcPr marL="73152" marR="73152" marT="36576" marB="36576" anchor="ctr">
+                    <a:solidFill>
+                      <a:srgbClr val="F1F5F9"/>
+                    </a:solidFill>
+                  </a:tcPr>
+                </a:tc>
+              </a:tr>
+              <a:tr h="530352">
+                <a:tc>
+                  <a:txBody>
+                    <a:bodyPr wrap="square"/>
+                    <a:lstStyle/>
+                    <a:p>
+                      <a:pPr algn="l"/>
+                      <a:r>
+                        <a:rPr sz="1600" b="0" i="0">
+                          <a:solidFill>
+                            <a:srgbClr val="0F172A"/>
+                          </a:solidFill>
+                          <a:latin typeface="Arial"/>
+                        </a:rPr>
+                        <a:t>Raw model / no agent</a:t>
+                      </a:r>
+                    </a:p>
+                  </a:txBody>
+                  <a:tcPr marL="73152" marR="73152" marT="36576" marB="36576" anchor="ctr">
+                    <a:solidFill>
+                      <a:srgbClr val="FFFFFF"/>
+                    </a:solidFill>
+                  </a:tcPr>
+                </a:tc>
+                <a:tc>
+                  <a:txBody>
+                    <a:bodyPr wrap="square"/>
+                    <a:lstStyle/>
+                    <a:p>
+                      <a:pPr algn="ctr"/>
+                      <a:r>
+                        <a:rPr sz="1600" b="0" i="0">
+                          <a:solidFill>
+                            <a:srgbClr val="0F172A"/>
+                          </a:solidFill>
+                          <a:latin typeface="Arial"/>
+                        </a:rPr>
+                        <a:t>366</a:t>
+                      </a:r>
+                    </a:p>
+                  </a:txBody>
+                  <a:tcPr marL="73152" marR="73152" marT="36576" marB="36576" anchor="ctr">
+                    <a:solidFill>
+                      <a:srgbClr val="FFFFFF"/>
+                    </a:solidFill>
+                  </a:tcPr>
+                </a:tc>
+                <a:tc>
+                  <a:txBody>
+                    <a:bodyPr wrap="square"/>
+                    <a:lstStyle/>
+                    <a:p>
+                      <a:pPr algn="ctr"/>
+                      <a:r>
+                        <a:rPr sz="1600" b="0" i="0">
+                          <a:solidFill>
+                            <a:srgbClr val="0F172A"/>
+                          </a:solidFill>
+                          <a:latin typeface="Arial"/>
+                        </a:rPr>
+                        <a:t>−$2,087</a:t>
+                      </a:r>
+                    </a:p>
+                  </a:txBody>
+                  <a:tcPr marL="73152" marR="73152" marT="36576" marB="36576" anchor="ctr">
+                    <a:solidFill>
+                      <a:srgbClr val="FFFFFF"/>
+                    </a:solidFill>
+                  </a:tcPr>
+                </a:tc>
+              </a:tr>
+              <a:tr h="530352">
+                <a:tc>
+                  <a:txBody>
+                    <a:bodyPr wrap="square"/>
+                    <a:lstStyle/>
+                    <a:p>
+                      <a:pPr algn="l"/>
+                      <a:r>
+                        <a:rPr sz="1600" b="0" i="0">
+                          <a:solidFill>
+                            <a:srgbClr val="0F172A"/>
+                          </a:solidFill>
+                          <a:latin typeface="Arial"/>
+                        </a:rPr>
+                        <a:t>Buy every contract (all 2025-26)</a:t>
+                      </a:r>
+                    </a:p>
+                  </a:txBody>
+                  <a:tcPr marL="73152" marR="73152" marT="36576" marB="36576" anchor="ctr">
+                    <a:solidFill>
+                      <a:srgbClr val="F1F5F9"/>
+                    </a:solidFill>
+                  </a:tcPr>
+                </a:tc>
+                <a:tc>
+                  <a:txBody>
+                    <a:bodyPr wrap="square"/>
+                    <a:lstStyle/>
+                    <a:p>
+                      <a:pPr algn="ctr"/>
+                      <a:r>
+                        <a:rPr sz="1600" b="0" i="0">
+                          <a:solidFill>
+                            <a:srgbClr val="0F172A"/>
+                          </a:solidFill>
+                          <a:latin typeface="Arial"/>
+                        </a:rPr>
+                        <a:t>2,632</a:t>
+                      </a:r>
+                    </a:p>
+                  </a:txBody>
+                  <a:tcPr marL="73152" marR="73152" marT="36576" marB="36576" anchor="ctr">
+                    <a:solidFill>
+                      <a:srgbClr val="F1F5F9"/>
+                    </a:solidFill>
+                  </a:tcPr>
+                </a:tc>
+                <a:tc>
+                  <a:txBody>
+                    <a:bodyPr wrap="square"/>
+                    <a:lstStyle/>
+                    <a:p>
+                      <a:pPr algn="ctr"/>
+                      <a:r>
+                        <a:rPr sz="1600" b="0" i="0">
+                          <a:solidFill>
+                            <a:srgbClr val="0F172A"/>
+                          </a:solidFill>
+                          <a:latin typeface="Arial"/>
+                        </a:rPr>
+                        <a:t>−6.0% ROI</a:t>
+                      </a:r>
+                    </a:p>
+                  </a:txBody>
+                  <a:tcPr marL="73152" marR="73152" marT="36576" marB="36576" anchor="ctr">
+                    <a:solidFill>
+                      <a:srgbClr val="F1F5F9"/>
+                    </a:solidFill>
+                  </a:tcPr>
+                </a:tc>
+              </a:tr>
+            </a:tbl>
+          </a:graphicData>
+        </a:graphic>
+      </p:graphicFrame>
       <p:sp>
         <p:nvSpPr>
           <p:cNvPr id="9" name="TextBox 8"/>
@@ -13243,47 +12362,8 @@
         </p:nvSpPr>
         <p:spPr>
           <a:xfrm>
-            <a:off x="640080" y="1307592"/>
-            <a:ext cx="3246120" cy="457200"/>
-          </a:xfrm>
-          <a:prstGeom prst="rect">
-            <a:avLst/>
-          </a:prstGeom>
-          <a:noFill/>
-        </p:spPr>
-        <p:txBody>
-          <a:bodyPr wrap="square" anchor="t" lIns="73152" rIns="73152" tIns="36576" bIns="36576">
-            <a:spAutoFit/>
-          </a:bodyPr>
-          <a:lstStyle/>
-          <a:p>
-            <a:pPr algn="l">
-              <a:spcAft>
-                <a:spcPts val="0"/>
-              </a:spcAft>
-            </a:pPr>
-            <a:r>
-              <a:rPr sz="2000" b="1" i="0">
-                <a:solidFill>
-                  <a:srgbClr val="2563EB"/>
-                </a:solidFill>
-                <a:latin typeface="Arial"/>
-              </a:rPr>
-              <a:t>1  Reviewer</a:t>
-            </a:r>
-          </a:p>
-        </p:txBody>
-      </p:sp>
-      <p:sp>
-        <p:nvSpPr>
-          <p:cNvPr id="10" name="TextBox 9"/>
-          <p:cNvSpPr txBox="1"/>
-          <p:nvPr/>
-        </p:nvSpPr>
-        <p:spPr>
-          <a:xfrm>
-            <a:off x="640080" y="1764791"/>
-            <a:ext cx="3246120" cy="1728215"/>
+            <a:off x="457200" y="4572000"/>
+            <a:ext cx="11277295" cy="1737360"/>
           </a:xfrm>
           <a:prstGeom prst="rect">
             <a:avLst/>
@@ -13309,7 +12389,16 @@
                 </a:solidFill>
                 <a:latin typeface="Arial"/>
               </a:rPr>
-              <a:t>Looks at the worst-CLV slice of settled trades</a:t>
+              <a:t>Agent rows: test period, 1 Feb – 12 Apr 2026; mean closing-line value </a:t>
+            </a:r>
+            <a:r>
+              <a:rPr sz="1800" b="1" i="0">
+                <a:solidFill>
+                  <a:srgbClr val="0F172A"/>
+                </a:solidFill>
+                <a:latin typeface="Arial"/>
+              </a:rPr>
+              <a:t>negative in every setup</a:t>
             </a:r>
           </a:p>
           <a:p>
@@ -13326,206 +12415,9 @@
                 </a:solidFill>
                 <a:latin typeface="Arial"/>
               </a:rPr>
-              <a:t>Proposes one rule per day</a:t>
-            </a:r>
-          </a:p>
-        </p:txBody>
-      </p:sp>
-      <p:sp>
-        <p:nvSpPr>
-          <p:cNvPr id="11" name="Right Arrow 10"/>
-          <p:cNvSpPr/>
-          <p:nvPr/>
-        </p:nvSpPr>
-        <p:spPr>
-          <a:xfrm>
-            <a:off x="4014215" y="2194560"/>
-            <a:ext cx="283464" cy="365760"/>
-          </a:xfrm>
-          <a:prstGeom prst="rightArrow">
-            <a:avLst/>
-          </a:prstGeom>
-          <a:solidFill>
-            <a:srgbClr val="64748B"/>
-          </a:solidFill>
-          <a:ln>
-            <a:noFill/>
-          </a:ln>
-        </p:spPr>
-        <p:style>
-          <a:lnRef idx="1">
-            <a:schemeClr val="accent1"/>
-          </a:lnRef>
-          <a:fillRef idx="3">
-            <a:schemeClr val="accent1"/>
-          </a:fillRef>
-          <a:effectRef idx="2">
-            <a:schemeClr val="accent1"/>
-          </a:effectRef>
-          <a:fontRef idx="minor">
-            <a:schemeClr val="lt1"/>
-          </a:fontRef>
-        </p:style>
-        <p:txBody>
-          <a:bodyPr rtlCol="0" anchor="ctr"/>
-          <a:lstStyle/>
-          <a:p>
-            <a:pPr algn="ctr"/>
-          </a:p>
-        </p:txBody>
-      </p:sp>
-      <p:sp>
-        <p:nvSpPr>
-          <p:cNvPr id="12" name="Rounded Rectangle 11"/>
-          <p:cNvSpPr/>
-          <p:nvPr/>
-        </p:nvSpPr>
-        <p:spPr>
-          <a:xfrm>
-            <a:off x="4334256" y="1234439"/>
-            <a:ext cx="3520440" cy="2331720"/>
-          </a:xfrm>
-          <a:prstGeom prst="roundRect">
-            <a:avLst>
-              <a:gd name="adj" fmla="val 6000"/>
-            </a:avLst>
-          </a:prstGeom>
-          <a:solidFill>
-            <a:srgbClr val="FFFFFF"/>
-          </a:solidFill>
-          <a:ln w="15875">
-            <a:solidFill>
-              <a:srgbClr val="EA580C"/>
-            </a:solidFill>
-          </a:ln>
-          <a:effectLst/>
-        </p:spPr>
-        <p:style>
-          <a:lnRef idx="1">
-            <a:schemeClr val="accent1"/>
-          </a:lnRef>
-          <a:fillRef idx="3">
-            <a:schemeClr val="accent1"/>
-          </a:fillRef>
-          <a:effectRef idx="2">
-            <a:schemeClr val="accent1"/>
-          </a:effectRef>
-          <a:fontRef idx="minor">
-            <a:schemeClr val="lt1"/>
-          </a:fontRef>
-        </p:style>
-        <p:txBody>
-          <a:bodyPr rtlCol="0" anchor="ctr"/>
-          <a:lstStyle/>
-          <a:p>
-            <a:pPr algn="ctr"/>
-          </a:p>
-        </p:txBody>
-      </p:sp>
-      <p:sp>
-        <p:nvSpPr>
-          <p:cNvPr id="13" name="Rectangle 12"/>
-          <p:cNvSpPr/>
-          <p:nvPr/>
-        </p:nvSpPr>
-        <p:spPr>
-          <a:xfrm>
-            <a:off x="4334256" y="1234439"/>
-            <a:ext cx="109728" cy="2331720"/>
-          </a:xfrm>
-          <a:prstGeom prst="rect">
-            <a:avLst/>
-          </a:prstGeom>
-          <a:solidFill>
-            <a:srgbClr val="EA580C"/>
-          </a:solidFill>
-          <a:ln>
-            <a:noFill/>
-          </a:ln>
-          <a:effectLst/>
-        </p:spPr>
-        <p:style>
-          <a:lnRef idx="1">
-            <a:schemeClr val="accent1"/>
-          </a:lnRef>
-          <a:fillRef idx="3">
-            <a:schemeClr val="accent1"/>
-          </a:fillRef>
-          <a:effectRef idx="2">
-            <a:schemeClr val="accent1"/>
-          </a:effectRef>
-          <a:fontRef idx="minor">
-            <a:schemeClr val="lt1"/>
-          </a:fontRef>
-        </p:style>
-        <p:txBody>
-          <a:bodyPr rtlCol="0" anchor="ctr"/>
-          <a:lstStyle/>
-          <a:p>
-            <a:pPr algn="ctr"/>
-          </a:p>
-        </p:txBody>
-      </p:sp>
-      <p:sp>
-        <p:nvSpPr>
-          <p:cNvPr id="14" name="TextBox 13"/>
-          <p:cNvSpPr txBox="1"/>
-          <p:nvPr/>
-        </p:nvSpPr>
-        <p:spPr>
-          <a:xfrm>
-            <a:off x="4517136" y="1307592"/>
-            <a:ext cx="3246120" cy="457200"/>
-          </a:xfrm>
-          <a:prstGeom prst="rect">
-            <a:avLst/>
-          </a:prstGeom>
-          <a:noFill/>
-        </p:spPr>
-        <p:txBody>
-          <a:bodyPr wrap="square" anchor="t" lIns="73152" rIns="73152" tIns="36576" bIns="36576">
-            <a:spAutoFit/>
-          </a:bodyPr>
-          <a:lstStyle/>
-          <a:p>
-            <a:pPr algn="l">
-              <a:spcAft>
-                <a:spcPts val="0"/>
-              </a:spcAft>
-            </a:pPr>
-            <a:r>
-              <a:rPr sz="2000" b="1" i="0">
-                <a:solidFill>
-                  <a:srgbClr val="EA580C"/>
-                </a:solidFill>
-                <a:latin typeface="Arial"/>
-              </a:rPr>
-              <a:t>2  Gate</a:t>
-            </a:r>
-          </a:p>
-        </p:txBody>
-      </p:sp>
-      <p:sp>
-        <p:nvSpPr>
-          <p:cNvPr id="15" name="TextBox 14"/>
-          <p:cNvSpPr txBox="1"/>
-          <p:nvPr/>
-        </p:nvSpPr>
-        <p:spPr>
-          <a:xfrm>
-            <a:off x="4517136" y="1764791"/>
-            <a:ext cx="3246120" cy="1728215"/>
-          </a:xfrm>
-          <a:prstGeom prst="rect">
-            <a:avLst/>
-          </a:prstGeom>
-          <a:noFill/>
-        </p:spPr>
-        <p:txBody>
-          <a:bodyPr wrap="square" anchor="t" lIns="73152" rIns="73152" tIns="36576" bIns="36576">
-            <a:spAutoFit/>
-          </a:bodyPr>
-          <a:lstStyle/>
+              <a:t>Interpretation: trading on a disagreement with the price looks like the raw-model row</a:t>
+            </a:r>
+          </a:p>
           <a:p>
             <a:pPr algn="l" marL="292608" indent="-256032">
               <a:spcAft>
@@ -13540,501 +12432,7 @@
                 </a:solidFill>
                 <a:latin typeface="Arial"/>
               </a:rPr>
-              <a:t>Backtests on up to 14 earlier days only</a:t>
-            </a:r>
-          </a:p>
-          <a:p>
-            <a:pPr algn="l" marL="292608" indent="-256032">
-              <a:spcAft>
-                <a:spcPts val="600"/>
-              </a:spcAft>
-              <a:buChar char="•"/>
-            </a:pPr>
-            <a:r>
-              <a:rPr sz="1800" b="0" i="0">
-                <a:solidFill>
-                  <a:srgbClr val="0F172A"/>
-                </a:solidFill>
-                <a:latin typeface="Arial"/>
-              </a:rPr>
-              <a:t>Keeps it if mean CLV improves by 0.005 over ≥ 3 changed trades</a:t>
-            </a:r>
-          </a:p>
-        </p:txBody>
-      </p:sp>
-      <p:sp>
-        <p:nvSpPr>
-          <p:cNvPr id="16" name="Right Arrow 15"/>
-          <p:cNvSpPr/>
-          <p:nvPr/>
-        </p:nvSpPr>
-        <p:spPr>
-          <a:xfrm>
-            <a:off x="7891271" y="2194560"/>
-            <a:ext cx="283464" cy="365760"/>
-          </a:xfrm>
-          <a:prstGeom prst="rightArrow">
-            <a:avLst/>
-          </a:prstGeom>
-          <a:solidFill>
-            <a:srgbClr val="64748B"/>
-          </a:solidFill>
-          <a:ln>
-            <a:noFill/>
-          </a:ln>
-        </p:spPr>
-        <p:style>
-          <a:lnRef idx="1">
-            <a:schemeClr val="accent1"/>
-          </a:lnRef>
-          <a:fillRef idx="3">
-            <a:schemeClr val="accent1"/>
-          </a:fillRef>
-          <a:effectRef idx="2">
-            <a:schemeClr val="accent1"/>
-          </a:effectRef>
-          <a:fontRef idx="minor">
-            <a:schemeClr val="lt1"/>
-          </a:fontRef>
-        </p:style>
-        <p:txBody>
-          <a:bodyPr rtlCol="0" anchor="ctr"/>
-          <a:lstStyle/>
-          <a:p>
-            <a:pPr algn="ctr"/>
-          </a:p>
-        </p:txBody>
-      </p:sp>
-      <p:sp>
-        <p:nvSpPr>
-          <p:cNvPr id="17" name="Rounded Rectangle 16"/>
-          <p:cNvSpPr/>
-          <p:nvPr/>
-        </p:nvSpPr>
-        <p:spPr>
-          <a:xfrm>
-            <a:off x="8211312" y="1234439"/>
-            <a:ext cx="3520440" cy="2331720"/>
-          </a:xfrm>
-          <a:prstGeom prst="roundRect">
-            <a:avLst>
-              <a:gd name="adj" fmla="val 6000"/>
-            </a:avLst>
-          </a:prstGeom>
-          <a:solidFill>
-            <a:srgbClr val="FFFFFF"/>
-          </a:solidFill>
-          <a:ln w="15875">
-            <a:solidFill>
-              <a:srgbClr val="16A34A"/>
-            </a:solidFill>
-          </a:ln>
-          <a:effectLst/>
-        </p:spPr>
-        <p:style>
-          <a:lnRef idx="1">
-            <a:schemeClr val="accent1"/>
-          </a:lnRef>
-          <a:fillRef idx="3">
-            <a:schemeClr val="accent1"/>
-          </a:fillRef>
-          <a:effectRef idx="2">
-            <a:schemeClr val="accent1"/>
-          </a:effectRef>
-          <a:fontRef idx="minor">
-            <a:schemeClr val="lt1"/>
-          </a:fontRef>
-        </p:style>
-        <p:txBody>
-          <a:bodyPr rtlCol="0" anchor="ctr"/>
-          <a:lstStyle/>
-          <a:p>
-            <a:pPr algn="ctr"/>
-          </a:p>
-        </p:txBody>
-      </p:sp>
-      <p:sp>
-        <p:nvSpPr>
-          <p:cNvPr id="18" name="Rectangle 17"/>
-          <p:cNvSpPr/>
-          <p:nvPr/>
-        </p:nvSpPr>
-        <p:spPr>
-          <a:xfrm>
-            <a:off x="8211312" y="1234439"/>
-            <a:ext cx="109728" cy="2331720"/>
-          </a:xfrm>
-          <a:prstGeom prst="rect">
-            <a:avLst/>
-          </a:prstGeom>
-          <a:solidFill>
-            <a:srgbClr val="16A34A"/>
-          </a:solidFill>
-          <a:ln>
-            <a:noFill/>
-          </a:ln>
-          <a:effectLst/>
-        </p:spPr>
-        <p:style>
-          <a:lnRef idx="1">
-            <a:schemeClr val="accent1"/>
-          </a:lnRef>
-          <a:fillRef idx="3">
-            <a:schemeClr val="accent1"/>
-          </a:fillRef>
-          <a:effectRef idx="2">
-            <a:schemeClr val="accent1"/>
-          </a:effectRef>
-          <a:fontRef idx="minor">
-            <a:schemeClr val="lt1"/>
-          </a:fontRef>
-        </p:style>
-        <p:txBody>
-          <a:bodyPr rtlCol="0" anchor="ctr"/>
-          <a:lstStyle/>
-          <a:p>
-            <a:pPr algn="ctr"/>
-          </a:p>
-        </p:txBody>
-      </p:sp>
-      <p:sp>
-        <p:nvSpPr>
-          <p:cNvPr id="19" name="TextBox 18"/>
-          <p:cNvSpPr txBox="1"/>
-          <p:nvPr/>
-        </p:nvSpPr>
-        <p:spPr>
-          <a:xfrm>
-            <a:off x="8394192" y="1307592"/>
-            <a:ext cx="3246120" cy="457200"/>
-          </a:xfrm>
-          <a:prstGeom prst="rect">
-            <a:avLst/>
-          </a:prstGeom>
-          <a:noFill/>
-        </p:spPr>
-        <p:txBody>
-          <a:bodyPr wrap="square" anchor="t" lIns="73152" rIns="73152" tIns="36576" bIns="36576">
-            <a:spAutoFit/>
-          </a:bodyPr>
-          <a:lstStyle/>
-          <a:p>
-            <a:pPr algn="l">
-              <a:spcAft>
-                <a:spcPts val="0"/>
-              </a:spcAft>
-            </a:pPr>
-            <a:r>
-              <a:rPr sz="2000" b="1" i="0">
-                <a:solidFill>
-                  <a:srgbClr val="16A34A"/>
-                </a:solidFill>
-                <a:latin typeface="Arial"/>
-              </a:rPr>
-              <a:t>3  Notebook</a:t>
-            </a:r>
-          </a:p>
-        </p:txBody>
-      </p:sp>
-      <p:sp>
-        <p:nvSpPr>
-          <p:cNvPr id="20" name="TextBox 19"/>
-          <p:cNvSpPr txBox="1"/>
-          <p:nvPr/>
-        </p:nvSpPr>
-        <p:spPr>
-          <a:xfrm>
-            <a:off x="8394192" y="1764791"/>
-            <a:ext cx="3246120" cy="1728215"/>
-          </a:xfrm>
-          <a:prstGeom prst="rect">
-            <a:avLst/>
-          </a:prstGeom>
-          <a:noFill/>
-        </p:spPr>
-        <p:txBody>
-          <a:bodyPr wrap="square" anchor="t" lIns="73152" rIns="73152" tIns="36576" bIns="36576">
-            <a:spAutoFit/>
-          </a:bodyPr>
-          <a:lstStyle/>
-          <a:p>
-            <a:pPr algn="l" marL="292608" indent="-256032">
-              <a:spcAft>
-                <a:spcPts val="600"/>
-              </a:spcAft>
-              <a:buChar char="•"/>
-            </a:pPr>
-            <a:r>
-              <a:rPr sz="1800" b="0" i="0">
-                <a:solidFill>
-                  <a:srgbClr val="0F172A"/>
-                </a:solidFill>
-                <a:latin typeface="Arial"/>
-              </a:rPr>
-              <a:t>Active from the next day</a:t>
-            </a:r>
-          </a:p>
-          <a:p>
-            <a:pPr algn="l" marL="292608" indent="-256032">
-              <a:spcAft>
-                <a:spcPts val="600"/>
-              </a:spcAft>
-              <a:buChar char="•"/>
-            </a:pPr>
-            <a:r>
-              <a:rPr sz="1800" b="0" i="0">
-                <a:solidFill>
-                  <a:srgbClr val="0F172A"/>
-                </a:solidFill>
-                <a:latin typeface="Arial"/>
-              </a:rPr>
-              <a:t>Rules expire after 45 days</a:t>
-            </a:r>
-          </a:p>
-        </p:txBody>
-      </p:sp>
-      <p:sp>
-        <p:nvSpPr>
-          <p:cNvPr id="21" name="TextBox 20"/>
-          <p:cNvSpPr txBox="1"/>
-          <p:nvPr/>
-        </p:nvSpPr>
-        <p:spPr>
-          <a:xfrm>
-            <a:off x="457200" y="3794760"/>
-            <a:ext cx="2651760" cy="822960"/>
-          </a:xfrm>
-          <a:prstGeom prst="rect">
-            <a:avLst/>
-          </a:prstGeom>
-          <a:noFill/>
-        </p:spPr>
-        <p:txBody>
-          <a:bodyPr wrap="square" anchor="t" lIns="73152" rIns="73152" tIns="36576" bIns="36576">
-            <a:spAutoFit/>
-          </a:bodyPr>
-          <a:lstStyle/>
-          <a:p>
-            <a:pPr algn="l">
-              <a:spcAft>
-                <a:spcPts val="0"/>
-              </a:spcAft>
-            </a:pPr>
-            <a:r>
-              <a:rPr sz="4000" b="1" i="0">
-                <a:solidFill>
-                  <a:srgbClr val="1E293B"/>
-                </a:solidFill>
-                <a:latin typeface="Arial"/>
-              </a:rPr>
-              <a:t>37 → 5</a:t>
-            </a:r>
-          </a:p>
-        </p:txBody>
-      </p:sp>
-      <p:sp>
-        <p:nvSpPr>
-          <p:cNvPr id="22" name="TextBox 21"/>
-          <p:cNvSpPr txBox="1"/>
-          <p:nvPr/>
-        </p:nvSpPr>
-        <p:spPr>
-          <a:xfrm>
-            <a:off x="457200" y="4617720"/>
-            <a:ext cx="2651760" cy="731520"/>
-          </a:xfrm>
-          <a:prstGeom prst="rect">
-            <a:avLst/>
-          </a:prstGeom>
-          <a:noFill/>
-        </p:spPr>
-        <p:txBody>
-          <a:bodyPr wrap="square" anchor="t" lIns="73152" rIns="73152" tIns="36576" bIns="36576">
-            <a:spAutoFit/>
-          </a:bodyPr>
-          <a:lstStyle/>
-          <a:p>
-            <a:pPr algn="l">
-              <a:spcAft>
-                <a:spcPts val="0"/>
-              </a:spcAft>
-            </a:pPr>
-            <a:r>
-              <a:rPr sz="1800" b="0" i="0">
-                <a:solidFill>
-                  <a:srgbClr val="64748B"/>
-                </a:solidFill>
-                <a:latin typeface="Arial"/>
-              </a:rPr>
-              <a:t>rules proposed → kept, test period</a:t>
-            </a:r>
-          </a:p>
-        </p:txBody>
-      </p:sp>
-      <p:sp>
-        <p:nvSpPr>
-          <p:cNvPr id="23" name="TextBox 22"/>
-          <p:cNvSpPr txBox="1"/>
-          <p:nvPr/>
-        </p:nvSpPr>
-        <p:spPr>
-          <a:xfrm>
-            <a:off x="3200400" y="3794760"/>
-            <a:ext cx="2651760" cy="822960"/>
-          </a:xfrm>
-          <a:prstGeom prst="rect">
-            <a:avLst/>
-          </a:prstGeom>
-          <a:noFill/>
-        </p:spPr>
-        <p:txBody>
-          <a:bodyPr wrap="square" anchor="t" lIns="73152" rIns="73152" tIns="36576" bIns="36576">
-            <a:spAutoFit/>
-          </a:bodyPr>
-          <a:lstStyle/>
-          <a:p>
-            <a:pPr algn="l">
-              <a:spcAft>
-                <a:spcPts val="0"/>
-              </a:spcAft>
-            </a:pPr>
-            <a:r>
-              <a:rPr sz="4000" b="1" i="0">
-                <a:solidFill>
-                  <a:srgbClr val="64748B"/>
-                </a:solidFill>
-                <a:latin typeface="Arial"/>
-              </a:rPr>
-              <a:t>21 → 2</a:t>
-            </a:r>
-          </a:p>
-        </p:txBody>
-      </p:sp>
-      <p:sp>
-        <p:nvSpPr>
-          <p:cNvPr id="24" name="TextBox 23"/>
-          <p:cNvSpPr txBox="1"/>
-          <p:nvPr/>
-        </p:nvSpPr>
-        <p:spPr>
-          <a:xfrm>
-            <a:off x="3200400" y="4617720"/>
-            <a:ext cx="2651760" cy="731520"/>
-          </a:xfrm>
-          <a:prstGeom prst="rect">
-            <a:avLst/>
-          </a:prstGeom>
-          <a:noFill/>
-        </p:spPr>
-        <p:txBody>
-          <a:bodyPr wrap="square" anchor="t" lIns="73152" rIns="73152" tIns="36576" bIns="36576">
-            <a:spAutoFit/>
-          </a:bodyPr>
-          <a:lstStyle/>
-          <a:p>
-            <a:pPr algn="l">
-              <a:spcAft>
-                <a:spcPts val="0"/>
-              </a:spcAft>
-            </a:pPr>
-            <a:r>
-              <a:rPr sz="1800" b="0" i="0">
-                <a:solidFill>
-                  <a:srgbClr val="64748B"/>
-                </a:solidFill>
-                <a:latin typeface="Arial"/>
-              </a:rPr>
-              <a:t>rules proposed → kept, development</a:t>
-            </a:r>
-          </a:p>
-        </p:txBody>
-      </p:sp>
-      <p:sp>
-        <p:nvSpPr>
-          <p:cNvPr id="25" name="TextBox 24"/>
-          <p:cNvSpPr txBox="1"/>
-          <p:nvPr/>
-        </p:nvSpPr>
-        <p:spPr>
-          <a:xfrm>
-            <a:off x="5943600" y="3794760"/>
-            <a:ext cx="5790895" cy="2560320"/>
-          </a:xfrm>
-          <a:prstGeom prst="rect">
-            <a:avLst/>
-          </a:prstGeom>
-          <a:noFill/>
-        </p:spPr>
-        <p:txBody>
-          <a:bodyPr wrap="square" anchor="t" lIns="73152" rIns="73152" tIns="36576" bIns="36576">
-            <a:spAutoFit/>
-          </a:bodyPr>
-          <a:lstStyle/>
-          <a:p>
-            <a:pPr algn="l">
-              <a:spcAft>
-                <a:spcPts val="800"/>
-              </a:spcAft>
-            </a:pPr>
-            <a:r>
-              <a:rPr sz="1900" b="1" i="0">
-                <a:solidFill>
-                  <a:srgbClr val="1E293B"/>
-                </a:solidFill>
-                <a:latin typeface="Arial"/>
-              </a:rPr>
-              <a:t>Examples of kept rules</a:t>
-            </a:r>
-          </a:p>
-          <a:p>
-            <a:pPr algn="l" marL="292608" indent="-256032">
-              <a:spcAft>
-                <a:spcPts val="800"/>
-              </a:spcAft>
-              <a:buChar char="•"/>
-            </a:pPr>
-            <a:r>
-              <a:rPr sz="1900" b="0" i="0">
-                <a:solidFill>
-                  <a:srgbClr val="0F172A"/>
-                </a:solidFill>
-                <a:latin typeface="Arial"/>
-              </a:rPr>
-              <a:t>Skip when buying a side priced at or below 35¢</a:t>
-            </a:r>
-          </a:p>
-          <a:p>
-            <a:pPr algn="l" marL="292608" indent="-256032">
-              <a:spcAft>
-                <a:spcPts val="800"/>
-              </a:spcAft>
-              <a:buChar char="•"/>
-            </a:pPr>
-            <a:r>
-              <a:rPr sz="1900" b="0" i="0">
-                <a:solidFill>
-                  <a:srgbClr val="0F172A"/>
-                </a:solidFill>
-                <a:latin typeface="Arial"/>
-              </a:rPr>
-              <a:t>Skip when the market has already moved 2¢ or more against us</a:t>
-            </a:r>
-          </a:p>
-          <a:p>
-            <a:pPr algn="l" marL="292608" indent="-256032">
-              <a:spcAft>
-                <a:spcPts val="800"/>
-              </a:spcAft>
-              <a:buChar char="•"/>
-            </a:pPr>
-            <a:r>
-              <a:rPr sz="1900" b="0" i="0">
-                <a:solidFill>
-                  <a:srgbClr val="0F172A"/>
-                </a:solidFill>
-                <a:latin typeface="Arial"/>
-              </a:rPr>
-              <a:t>The agent that writes a rule never approves it</a:t>
+              <a:t>“Buy every contract” covers all 1,316 games of 2025-26 (it includes luck)</a:t>
             </a:r>
           </a:p>
         </p:txBody>

--- a/presentation/nba_agent_deck.pptx
+++ b/presentation/nba_agent_deck.pptx
@@ -516,7 +516,7 @@
           <a:lstStyle/>
           <a:p>
             <a:r>
-              <a:t>Good morning, we are Group 12. Many people believe that if they follow NBA injury news closely, they can beat sports prediction markets. We took that belief seriously and built the best agent we could to try. What we found is that the game is structurally tilted against the consumer, and that shaped what our product does: it protects and educates rather than encourages betting.</a:t>
+              <a:t>Good morning, we are Group 12. Many people believe that if they follow NBA injury news closely, they can beat sports prediction markets. We took that belief seriously and built the best agent we could. What we found is that the game is structurally tilted against the consumer, so our product protects and educates rather than encourages betting.</a:t>
             </a:r>
           </a:p>
         </p:txBody>
@@ -586,7 +586,7 @@
           <a:lstStyle/>
           <a:p>
             <a:r>
-              <a:t>This slide is context, not our measurement. In most electronic markets, professional traders and market makers have faster data feeds, automated pricing, larger models and, on many venues, special fee or liquidity programmes. A retail user typically reads public news on a phone and pays the full taker price. We are not saying anyone breaks rules; this is how market structure usually works, and it is consistent with the speed and cost results we measured.</a:t>
+              <a:t>Quick context, and this is general industry knowledge, not our measurement. Professional traders and market makers usually have faster data, automated pricing and, on many venues, special fee or liquidity programmes. A retail user reads public news and pays the full taker price. We are not saying anyone breaks rules; it is consistent with the speed and cost results we measured.</a:t>
             </a:r>
           </a:p>
         </p:txBody>
@@ -656,7 +656,7 @@
           <a:lstStyle/>
           <a:p>
             <a:r>
-              <a:t>So we reframed the product around protection. The agent passes by default: it declined about 90% of decision points. Retail briefs show the bid and ask next to our estimate, and when there is no order they say why: the gap after fees is too small or the price already moved. The Coach shows the full break-even after spread and fee. Risk limits and banned words are code the LLM cannot override, and all 9 / 9 planted violations were blocked. Even the learned rules ended up protective: skip long shots, and skip chasing a price that already moved.</a:t>
+              <a:t>So the product is built around protection. The agent passes by default: it declined about 90% of decision points, and on the play-off holdout it did not trade at all. Retail briefs show the bid and ask next to our estimate, and when there is no order they say why. The Coach shows the full break-even after spread and fee. Risk limits and banned words are code the LLM cannot override; all 9 / 9 planted violations were blocked. Even the learned rules ended up protective.</a:t>
             </a:r>
           </a:p>
         </p:txBody>
@@ -726,7 +726,7 @@
           <a:lstStyle/>
           <a:p>
             <a:r>
-              <a:t>The Coach tab turns the same evidence into lessons. At a chosen moment it explains the game using only what was public, and shows the break-even after spread and fee. Lesson cards appear when the situation calls for them: a price is a probability, costs move your break-even, news may be priced in, long shots look cheap. Users make a paper call, see the closing price and what the agent did, and get feedback on habits. Paper money only.</a:t>
+              <a:t>The Coach turns this evidence into lessons. At a chosen moment it explains the game using only what was public and shows the break-even after spread and fee. Lesson cards appear when relevant: price is a probability, costs move your break-even, news may be priced in, long shots look cheap. Users make a paper call and see the close and what the agent did. Paper money only.</a:t>
             </a:r>
           </a:p>
         </p:txBody>
@@ -796,7 +796,7 @@
           <a:lstStyle/>
           <a:p>
             <a:r>
-              <a:t>We want to be precise. Unfair here means structural disadvantages, namely costs, speed and expertise. It does not mean manipulation or fraud, and we make no accusation against Kalshi. Our sample is one season of public data and game-winner markets only, and the news timestamp is a proxy. The long-shot test is underpowered. Our statistical rigour work and the M6 market-impact model are in progress, so these numbers will be updated.</a:t>
+              <a:t>To be precise: unfair here means structural disadvantages, namely costs, speed and expertise. It does not mean manipulation or fraud, and we make no accusation against Kalshi. One disclosure: we designed the market anchor and the reviewer after seeing the first February-to-April results, so that window is not a clean holdout. That is why the walk-forward season and the untouched play-off holdout are our headline tests. Other caveats: one season, game-winner markets only, and a proxy news timestamp.</a:t>
             </a:r>
           </a:p>
         </p:txBody>
@@ -866,7 +866,7 @@
           <a:lstStyle/>
           <a:p>
             <a:r>
-              <a:t>Now the demo, focused on protection. On the replayed night, watch the agent see the news, compare its estimate with the bid and ask, and usually decline with a reason. In the Coach, I'll make a paper call and compare it with the close. Then a quick look at the briefs, the learned rules, and planted violations being blocked. If anything fails, we have a backup recording.</a:t>
+              <a:t>Now the demo, focused on protection. On the replayed night, watch the agent see the news, compare its estimate with the bid and ask, and usually decline with a reason. In the Coach, I'll make a paper call and compare it with the close. Then a quick look at the learned rules and planted violations being blocked. If anything fails, we have a backup recording.</a:t>
             </a:r>
           </a:p>
         </p:txBody>
@@ -936,7 +936,7 @@
           <a:lstStyle/>
           <a:p>
             <a:r>
-              <a:t>Our recommendations follow from the evidence. Before any order, show the all-in cost and the break-even probability, not just the price. Warn by default when news is likely already priced in. Put education, like our Coach, in front of the first trade, with sensible default limits. For our own work, next we finish the statistical tests and M6, enforce a daily-loss stop, and use timestamped injury reports. Thank you, we are happy to take questions.</a:t>
+              <a:t>Our recommendations follow from the evidence. Before any order, show the all-in cost and the break-even probability, not just the price. Warn by default when news is likely already priced in. Put education, like our Coach, in front of the first trade, with sensible default limits. For our own work: enforce a daily-loss stop, use timestamped injury reports, and extend to player-prop markets. Thank you, we are happy to take questions.</a:t>
             </a:r>
           </a:p>
         </p:txBody>
@@ -1006,7 +1006,7 @@
           <a:lstStyle/>
           <a:p>
             <a:r>
-              <a:t>Retail users see an injury headline and think the price is wrong. So we gave an agent every advantage a careful consumer could have: public news, trained models, an agent loop that can use an LLM, risk controls, and rules it learns from its own mistakes. We replayed a full season of real Kalshi prices. If this agent cannot beat the market after costs, a typical consumer is unlikely to.</a:t>
+              <a:t>Retail users see an injury headline and think the price is wrong. So we gave an agent every advantage a careful consumer could have: public news, trained models, an LLM-capable agent loop, risk controls, and rules it learns from its own mistakes, and we replayed a full season of real Kalshi prices. We then tested the results with confidence intervals. The short answer: no edge, and not trading wins.</a:t>
             </a:r>
           </a:p>
         </p:txBody>
@@ -1076,7 +1076,7 @@
           <a:lstStyle/>
           <a:p>
             <a:r>
-              <a:t>Briefly, the system. Public data on the left; models trained once; a replay that walks the season day by day and only shows the agent what was public at that moment; the agent that decides and reviews nightly; and outputs to channel briefs, paper orders, the Coach and evaluation. Because the replay uses recorded prices, every trade pays the real ask and the real Kalshi fee. That is what lets us measure what a consumer would actually face.</a:t>
+              <a:t>Briefly, the system. Public data on the left; models trained once; a replay that walks the season day by day and only shows the agent what was public at that moment; then the agent and its outputs. Because the replay uses recorded prices, every trade pays the real ask and the real Kalshi fee, which is what lets us measure what a consumer would actually face.</a:t>
             </a:r>
           </a:p>
         </p:txBody>
@@ -1146,7 +1146,7 @@
           <a:lstStyle/>
           <a:p>
             <a:r>
-              <a:t>First, costs. At one hour before tip a $20 order pays half the bid-ask spread plus the Kalshi fee, seven percent times p times one minus p. On average that is 1.92 cents per contract, or 5.0% of the price, so you must be right that many points more often than the price says just to break even. On cheap contracts it is 9–14% of the price. On the right: our best agent would have made +$36 at the mid, but fees and spread turned that into −$32.</a:t>
+              <a:t>First, costs. One hour before tip a $20 order pays half the bid-ask spread plus the Kalshi fee. On average that is 1.92 cents per contract, 5.0% of the price, and 9–14% on cheap contracts. You must beat the price by that much just to break even. On the right, our best agent would have made +$36 at the mid but lost −$32 after costs. Even being very selective, 74 trades out of 771 decision points, only 27 (36%) beat or matched the closing price.</a:t>
             </a:r>
           </a:p>
         </p:txBody>
@@ -1216,7 +1216,7 @@
           <a:lstStyle/>
           <a:p>
             <a:r>
-              <a:t>To clear that hurdle the agent has to be very selective. Of 771 decision points in the test period, only 153 showed a gap above 4 points after fees, and 74 became trades. Even then only 27 (36%) of those trades beat or matched the closing price. The close is the market's final answer, so beating it is the real test of an edge, and most trades did not.</a:t>
+              <a:t>Second, speed. On the 193 test games where the inactive list changed our win model by at least a point, the price had already moved 1.80 points in the news direction before the list was public, and only 0.18 after. About 91% of the move happened before a retail user reading the list could act.</a:t>
             </a:r>
           </a:p>
         </p:txBody>
@@ -1286,7 +1286,7 @@
           <a:lstStyle/>
           <a:p>
             <a:r>
-              <a:t>Second, speed. We took the 193 test games where the inactive list changed our win model by at least a point, and measured the price move in the direction of that news. From 24 hours before tip to the moment the list was public, the price had already moved 1.80 points; after it, only 0.18. So about 91% of the move happened before a retail user reading the list could act. Others had the information earlier.</a:t>
+              <a:t>Third, expertise. On 501 test games our win model's Brier score one hour before tip is 0.186, against 0.164 for the market at the same moment; lower is better. When they disagree by more than five points, the market is right in both directions.</a:t>
             </a:r>
           </a:p>
         </p:txBody>
@@ -1356,7 +1356,7 @@
           <a:lstStyle/>
           <a:p>
             <a:r>
-              <a:t>Third, expertise. Our win model is a reasonable model, but on 501 test games its Brier score one hour before tip is 0.186, against 0.164 for the market at the same moment. Lower is better. When they disagree by more than five points, the market is right, in both directions. A consumer's gut feeling is usually a weaker model than ours.</a:t>
+              <a:t>Fourth, we trained M6, a neural network whose only job is to predict how the price moves between our decision time and tip-off, using the market's own past reactions. It cannot beat the simplest guess, that the price will not move: 0.867 cents average error against 0.833, and R squared about zero on both test and holdout. After the inactive list the price moves only about 2.5% of what our win model implies. The M6 agent therefore makes no trades; forced to trade, it loses −$652. The price already contains the public information; what is left for the consumer is the cost.</a:t>
             </a:r>
           </a:p>
         </p:txBody>
@@ -1426,7 +1426,7 @@
           <a:lstStyle/>
           <a:p>
             <a:r>
-              <a:t>Fourth, we checked for the classic long-shot bias, where cheap contracts win less often than their price implies. Honestly, our data does not clearly show it: prices are well calibrated, and only the cheapest bucket hints at it, with one win in 66 contracts priced around 7.4%. What does show is that long shots lose more per dollar, because costs are a bigger share of a cheap price: −13.4% for contracts at 25 cents or less, against −2.2% for heavy favourites.</a:t>
+              <a:t>Finally, the honest test. We re-ran the whole season walk-forward, retraining the win model every month, with day-clustered bootstrap confidence intervals. Mean closing-line value is below zero for every setup, and every interval lies entirely below zero. The full agent's −$25 is indistinguishable from never trading, p 0.53; the raw model loses −$2,475. The market anchor is a real improvement, +$2,450 with p 0.002, but learning only means trading less. On the play-off holdout the full agent made no trades at all.</a:t>
             </a:r>
           </a:p>
         </p:txBody>
@@ -1496,7 +1496,7 @@
           <a:lstStyle/>
           <a:p>
             <a:r>
-              <a:t>Finally, outcomes on the test period, same prices for every setup. Trading the raw model loses −$2,087. Anchoring to the market cuts that to −$247, and our best agent with learning loses −$32 on 74 trades. Mean closing-line value is negative in every setup. Not trading at all scores zero and beats them all. Our interpretation, not a measurement: a consumer who trades whenever they disagree with the price looks like the raw-model row.</a:t>
+              <a:t>We also checked for long-shot bias. Honestly, our data does not clearly show it: prices are well calibrated, and only the cheapest bucket hints at it. What does show is that long shots lose more per dollar, −13.4% against −2.2% for heavy favourites, because costs are a bigger share of a cheap price.</a:t>
             </a:r>
           </a:p>
         </p:txBody>
@@ -5056,7 +5056,7 @@
         <p:spPr>
           <a:xfrm>
             <a:off x="457200" y="2011680"/>
-            <a:ext cx="5440680" cy="4206240"/>
+            <a:ext cx="5440680" cy="3291840"/>
           </a:xfrm>
           <a:prstGeom prst="roundRect">
             <a:avLst>
@@ -5104,7 +5104,7 @@
         <p:spPr>
           <a:xfrm>
             <a:off x="457200" y="2011680"/>
-            <a:ext cx="109728" cy="4206240"/>
+            <a:ext cx="109728" cy="3291840"/>
           </a:xfrm>
           <a:prstGeom prst="rect">
             <a:avLst/>
@@ -5187,7 +5187,7 @@
         <p:spPr>
           <a:xfrm>
             <a:off x="640080" y="2542032"/>
-            <a:ext cx="5166360" cy="3602735"/>
+            <a:ext cx="5166360" cy="2688336"/>
           </a:xfrm>
           <a:prstGeom prst="rect">
             <a:avLst/>
@@ -5213,7 +5213,7 @@
                 </a:solidFill>
                 <a:latin typeface="Arial"/>
               </a:rPr>
-              <a:t>Low-latency data feeds and automated pricing</a:t>
+              <a:t>Fast data feeds and automated pricing</a:t>
             </a:r>
           </a:p>
           <a:p>
@@ -5250,23 +5250,6 @@
               <a:t>On many venues, maker fee or liquidity programmes</a:t>
             </a:r>
           </a:p>
-          <a:p>
-            <a:pPr algn="l" marL="292608" indent="-256032">
-              <a:spcAft>
-                <a:spcPts val="600"/>
-              </a:spcAft>
-              <a:buChar char="•"/>
-            </a:pPr>
-            <a:r>
-              <a:rPr sz="1800" b="0" i="0">
-                <a:solidFill>
-                  <a:srgbClr val="0F172A"/>
-                </a:solidFill>
-                <a:latin typeface="Arial"/>
-              </a:rPr>
-              <a:t>Post prices, so they earn the spread</a:t>
-            </a:r>
-          </a:p>
         </p:txBody>
       </p:sp>
       <p:sp>
@@ -5278,7 +5261,7 @@
         <p:spPr>
           <a:xfrm>
             <a:off x="6291072" y="2011680"/>
-            <a:ext cx="5443423" cy="4206240"/>
+            <a:ext cx="5443423" cy="3291840"/>
           </a:xfrm>
           <a:prstGeom prst="roundRect">
             <a:avLst>
@@ -5326,7 +5309,7 @@
         <p:spPr>
           <a:xfrm>
             <a:off x="6291072" y="2011680"/>
-            <a:ext cx="109728" cy="4206240"/>
+            <a:ext cx="109728" cy="3291840"/>
           </a:xfrm>
           <a:prstGeom prst="rect">
             <a:avLst/>
@@ -5409,7 +5392,7 @@
         <p:spPr>
           <a:xfrm>
             <a:off x="6473952" y="2542032"/>
-            <a:ext cx="5169103" cy="3602735"/>
+            <a:ext cx="5169103" cy="2688336"/>
           </a:xfrm>
           <a:prstGeom prst="rect">
             <a:avLst/>
@@ -5452,7 +5435,7 @@
                 </a:solidFill>
                 <a:latin typeface="Arial"/>
               </a:rPr>
-              <a:t>No model; intuition and headlines</a:t>
+              <a:t>Intuition and headlines, no model</a:t>
             </a:r>
           </a:p>
           <a:p>
@@ -5470,23 +5453,6 @@
                 <a:latin typeface="Arial"/>
               </a:rPr>
               <a:t>Pays the spread and the taker fee</a:t>
-            </a:r>
-          </a:p>
-          <a:p>
-            <a:pPr algn="l" marL="292608" indent="-256032">
-              <a:spcAft>
-                <a:spcPts val="600"/>
-              </a:spcAft>
-              <a:buChar char="•"/>
-            </a:pPr>
-            <a:r>
-              <a:rPr sz="1800" b="0" i="0">
-                <a:solidFill>
-                  <a:srgbClr val="0F172A"/>
-                </a:solidFill>
-                <a:latin typeface="Arial"/>
-              </a:rPr>
-              <a:t>Small, emotional, repeated bets</a:t>
             </a:r>
           </a:p>
         </p:txBody>
@@ -7566,7 +7532,7 @@
                 </a:solidFill>
                 <a:latin typeface="Arial"/>
               </a:rPr>
-              <a:t>Caveats</a:t>
+              <a:t>Caveats and disclosure</a:t>
             </a:r>
           </a:p>
         </p:txBody>
@@ -7600,13 +7566,22 @@
               <a:buChar char="•"/>
             </a:pPr>
             <a:r>
+              <a:rPr sz="1800" b="1" i="0">
+                <a:solidFill>
+                  <a:srgbClr val="0F172A"/>
+                </a:solidFill>
+                <a:latin typeface="Arial"/>
+              </a:rPr>
+              <a:t>Disclosure:</a:t>
+            </a:r>
+            <a:r>
               <a:rPr sz="1800" b="0" i="0">
                 <a:solidFill>
                   <a:srgbClr val="0F172A"/>
                 </a:solidFill>
                 <a:latin typeface="Arial"/>
               </a:rPr>
-              <a:t>One season (1,316 games), game-winner markets only</a:t>
+              <a:t> anchor and reviewer designed after seeing Feb–Apr results, so that window is not a clean holdout; walk-forward and play-off holdout are the honest checks</a:t>
             </a:r>
           </a:p>
           <a:p>
@@ -7623,7 +7598,7 @@
                 </a:solidFill>
                 <a:latin typeface="Arial"/>
               </a:rPr>
-              <a:t>News stamped tip − 30 min (proxy; real reports come earlier)</a:t>
+              <a:t>One season (1,316 games), game-winner markets only</a:t>
             </a:r>
           </a:p>
           <a:p>
@@ -7640,7 +7615,7 @@
                 </a:solidFill>
                 <a:latin typeface="Arial"/>
               </a:rPr>
-              <a:t>Costs measured for a $20 order at tip − 60 min</a:t>
+              <a:t>News stamped tip − 30 min (proxy; real reports come earlier)</a:t>
             </a:r>
           </a:p>
           <a:p>
@@ -7657,24 +7632,7 @@
                 </a:solidFill>
                 <a:latin typeface="Arial"/>
               </a:rPr>
-              <a:t>Long-shot test underpowered; agent CLV within ~1 s.e. of zero</a:t>
-            </a:r>
-          </a:p>
-          <a:p>
-            <a:pPr algn="l" marL="292608" indent="-256032">
-              <a:spcAft>
-                <a:spcPts val="600"/>
-              </a:spcAft>
-              <a:buChar char="•"/>
-            </a:pPr>
-            <a:r>
-              <a:rPr sz="1800" b="0" i="0">
-                <a:solidFill>
-                  <a:srgbClr val="0F172A"/>
-                </a:solidFill>
-                <a:latin typeface="Arial"/>
-              </a:rPr>
-              <a:t>In progress: statistical rigour and the M6 market-impact model; numbers will update</a:t>
+              <a:t>Costs measured for a $20 order at tip − 60 min; long-shot test underpowered</a:t>
             </a:r>
           </a:p>
         </p:txBody>
@@ -8943,23 +8901,6 @@
                 </a:solidFill>
                 <a:latin typeface="Arial"/>
               </a:rPr>
-              <a:t>Finish the statistical tests and the M6 market-impact model</a:t>
-            </a:r>
-          </a:p>
-          <a:p>
-            <a:pPr algn="l" marL="292608" indent="-256032">
-              <a:spcAft>
-                <a:spcPts val="600"/>
-              </a:spcAft>
-              <a:buChar char="•"/>
-            </a:pPr>
-            <a:r>
-              <a:rPr sz="1800" b="0" i="0">
-                <a:solidFill>
-                  <a:srgbClr val="0F172A"/>
-                </a:solidFill>
-                <a:latin typeface="Arial"/>
-              </a:rPr>
               <a:t>Show the full break-even in every retail brief</a:t>
             </a:r>
           </a:p>
@@ -9329,7 +9270,7 @@
                 </a:solidFill>
                 <a:latin typeface="Arial"/>
               </a:rPr>
-              <a:t>Learned models: GRU player model, play classifier, win model</a:t>
+              <a:t>Learned models, including a neural net trained on the market's own moves</a:t>
             </a:r>
           </a:p>
           <a:p>
@@ -9481,7 +9422,7 @@
                 </a:solidFill>
                 <a:latin typeface="Arial"/>
               </a:rPr>
-              <a:t>Even this agent does not beat the market after costs.</a:t>
+              <a:t>Tested with confidence intervals: no edge. Never trading is the winner.</a:t>
             </a:r>
           </a:p>
           <a:p>
@@ -10043,8 +9984,8 @@
         </p:blipFill>
         <p:spPr>
           <a:xfrm>
-            <a:off x="1180947" y="1097280"/>
-            <a:ext cx="9829799" cy="3931920"/>
+            <a:off x="1352397" y="1097280"/>
+            <a:ext cx="9486900" cy="3794760"/>
           </a:xfrm>
           <a:prstGeom prst="rect">
             <a:avLst/>
@@ -10059,8 +10000,8 @@
         </p:nvSpPr>
         <p:spPr>
           <a:xfrm>
-            <a:off x="457200" y="5120640"/>
-            <a:ext cx="5547207" cy="1234440"/>
+            <a:off x="457200" y="4983480"/>
+            <a:ext cx="5547207" cy="1371600"/>
           </a:xfrm>
           <a:prstGeom prst="rect">
             <a:avLst/>
@@ -10095,7 +10036,25 @@
                 </a:solidFill>
                 <a:latin typeface="Arial"/>
               </a:rPr>
-              <a:t> = 5.0% of price (spread 0.53¢ + fee 1.39¢)</a:t>
+              <a:t> = 5.0% of price; </a:t>
+            </a:r>
+            <a:r>
+              <a:rPr sz="1800" b="1" i="0">
+                <a:solidFill>
+                  <a:srgbClr val="0F172A"/>
+                </a:solidFill>
+                <a:latin typeface="Arial"/>
+              </a:rPr>
+              <a:t>9–14%</a:t>
+            </a:r>
+            <a:r>
+              <a:rPr sz="1800" b="0" i="0">
+                <a:solidFill>
+                  <a:srgbClr val="0F172A"/>
+                </a:solidFill>
+                <a:latin typeface="Arial"/>
+              </a:rPr>
+              <a:t> under 20¢</a:t>
             </a:r>
           </a:p>
           <a:p>
@@ -10112,7 +10071,7 @@
                 </a:solidFill>
                 <a:latin typeface="Arial"/>
               </a:rPr>
-              <a:t>Under 20¢: </a:t>
+              <a:t>Best agent, Feb–Apr: +$36 at mid → </a:t>
             </a:r>
             <a:r>
               <a:rPr sz="1800" b="1" i="0">
@@ -10121,7 +10080,7 @@
                 </a:solidFill>
                 <a:latin typeface="Arial"/>
               </a:rPr>
-              <a:t>9–14%</a:t>
+              <a:t>−$32</a:t>
             </a:r>
             <a:r>
               <a:rPr sz="1800" b="0" i="0">
@@ -10130,7 +10089,7 @@
                 </a:solidFill>
                 <a:latin typeface="Arial"/>
               </a:rPr>
-              <a:t> of the price</a:t>
+              <a:t> after costs</a:t>
             </a:r>
           </a:p>
         </p:txBody>
@@ -10143,8 +10102,8 @@
         </p:nvSpPr>
         <p:spPr>
           <a:xfrm>
-            <a:off x="6187287" y="5120640"/>
-            <a:ext cx="5547207" cy="1234440"/>
+            <a:off x="6187287" y="4983480"/>
+            <a:ext cx="5547207" cy="1371600"/>
           </a:xfrm>
           <a:prstGeom prst="rect">
             <a:avLst/>
@@ -10170,7 +10129,7 @@
                 </a:solidFill>
                 <a:latin typeface="Arial"/>
               </a:rPr>
-              <a:t>Best agent: </a:t>
+              <a:t>771 decision points → 153 with gap &gt; 4 pts → </a:t>
             </a:r>
             <a:r>
               <a:rPr sz="1800" b="1" i="0">
@@ -10179,34 +10138,7 @@
                 </a:solidFill>
                 <a:latin typeface="Arial"/>
               </a:rPr>
-              <a:t>+$36</a:t>
-            </a:r>
-            <a:r>
-              <a:rPr sz="1800" b="0" i="0">
-                <a:solidFill>
-                  <a:srgbClr val="0F172A"/>
-                </a:solidFill>
-                <a:latin typeface="Arial"/>
-              </a:rPr>
-              <a:t> at the mid → </a:t>
-            </a:r>
-            <a:r>
-              <a:rPr sz="1800" b="1" i="0">
-                <a:solidFill>
-                  <a:srgbClr val="0F172A"/>
-                </a:solidFill>
-                <a:latin typeface="Arial"/>
-              </a:rPr>
-              <a:t>−$32</a:t>
-            </a:r>
-            <a:r>
-              <a:rPr sz="1800" b="0" i="0">
-                <a:solidFill>
-                  <a:srgbClr val="0F172A"/>
-                </a:solidFill>
-                <a:latin typeface="Arial"/>
-              </a:rPr>
-              <a:t> after costs</a:t>
+              <a:t>74 trades</a:t>
             </a:r>
           </a:p>
           <a:p>
@@ -10223,7 +10155,25 @@
                 </a:solidFill>
                 <a:latin typeface="Arial"/>
               </a:rPr>
-              <a:t>Raw model: −$1,540 → −$2,087</a:t>
+              <a:t>Only </a:t>
+            </a:r>
+            <a:r>
+              <a:rPr sz="1800" b="1" i="0">
+                <a:solidFill>
+                  <a:srgbClr val="0F172A"/>
+                </a:solidFill>
+                <a:latin typeface="Arial"/>
+              </a:rPr>
+              <a:t>27 (36%)</a:t>
+            </a:r>
+            <a:r>
+              <a:rPr sz="1800" b="0" i="0">
+                <a:solidFill>
+                  <a:srgbClr val="0F172A"/>
+                </a:solidFill>
+                <a:latin typeface="Arial"/>
+              </a:rPr>
+              <a:t> beat or matched the close</a:t>
             </a:r>
           </a:p>
         </p:txBody>
@@ -10368,7 +10318,7 @@
                 </a:solidFill>
                 <a:latin typeface="Arial"/>
               </a:rPr>
-              <a:t>Even a selective agent rarely beats the closing price</a:t>
+              <a:t>Evidence 2: the price moves before the news reaches you</a:t>
             </a:r>
           </a:p>
         </p:txBody>
@@ -10453,7 +10403,7 @@
       </p:sp>
       <p:pic>
         <p:nvPicPr>
-          <p:cNvPr id="7" name="Picture 6" descr="trade_funnel.png"/>
+          <p:cNvPr id="7" name="Picture 6" descr="price_discovery.png"/>
           <p:cNvPicPr>
             <a:picLocks noChangeAspect="1"/>
           </p:cNvPicPr>
@@ -10467,8 +10417,8 @@
         </p:blipFill>
         <p:spPr>
           <a:xfrm>
-            <a:off x="457200" y="1533698"/>
-            <a:ext cx="7955279" cy="4339243"/>
+            <a:off x="895197" y="1097280"/>
+            <a:ext cx="10401299" cy="4160520"/>
           </a:xfrm>
           <a:prstGeom prst="rect">
             <a:avLst/>
@@ -10483,8 +10433,8 @@
         </p:nvSpPr>
         <p:spPr>
           <a:xfrm>
-            <a:off x="8549640" y="1463040"/>
-            <a:ext cx="3184855" cy="4846320"/>
+            <a:off x="457200" y="5349240"/>
+            <a:ext cx="11277295" cy="1005840"/>
           </a:xfrm>
           <a:prstGeom prst="rect">
             <a:avLst/>
@@ -10499,140 +10449,44 @@
           <a:p>
             <a:pPr algn="l" marL="292608" indent="-256032">
               <a:spcAft>
-                <a:spcPts val="1200"/>
+                <a:spcPts val="400"/>
               </a:spcAft>
               <a:buChar char="•"/>
             </a:pPr>
             <a:r>
-              <a:rPr sz="2000" b="1" i="0">
+              <a:rPr sz="1800" b="1" i="0">
                 <a:solidFill>
                   <a:srgbClr val="0F172A"/>
                 </a:solidFill>
                 <a:latin typeface="Arial"/>
               </a:rPr>
-              <a:t>771</a:t>
-            </a:r>
-            <a:r>
-              <a:rPr sz="2000" b="0" i="0">
+              <a:t>91%</a:t>
+            </a:r>
+            <a:r>
+              <a:rPr sz="1800" b="0" i="0">
                 <a:solidFill>
                   <a:srgbClr val="0F172A"/>
                 </a:solidFill>
                 <a:latin typeface="Arial"/>
               </a:rPr>
-              <a:t> decision points</a:t>
+              <a:t> of the news-direction move was already in the price when the list was public (+1.80 vs +0.18 pts, 193 test games)</a:t>
             </a:r>
           </a:p>
           <a:p>
             <a:pPr algn="l" marL="292608" indent="-256032">
               <a:spcAft>
-                <a:spcPts val="1200"/>
+                <a:spcPts val="400"/>
               </a:spcAft>
               <a:buChar char="•"/>
             </a:pPr>
             <a:r>
-              <a:rPr sz="2000" b="1" i="0">
+              <a:rPr sz="1800" b="0" i="0">
                 <a:solidFill>
                   <a:srgbClr val="0F172A"/>
                 </a:solidFill>
                 <a:latin typeface="Arial"/>
               </a:rPr>
-              <a:t>153</a:t>
-            </a:r>
-            <a:r>
-              <a:rPr sz="2000" b="0" i="0">
-                <a:solidFill>
-                  <a:srgbClr val="0F172A"/>
-                </a:solidFill>
-                <a:latin typeface="Arial"/>
-              </a:rPr>
-              <a:t> with a gap &gt; 4 pts after fees</a:t>
-            </a:r>
-          </a:p>
-          <a:p>
-            <a:pPr algn="l" marL="292608" indent="-256032">
-              <a:spcAft>
-                <a:spcPts val="1200"/>
-              </a:spcAft>
-              <a:buChar char="•"/>
-            </a:pPr>
-            <a:r>
-              <a:rPr sz="2000" b="1" i="0">
-                <a:solidFill>
-                  <a:srgbClr val="0F172A"/>
-                </a:solidFill>
-                <a:latin typeface="Arial"/>
-              </a:rPr>
-              <a:t>74</a:t>
-            </a:r>
-            <a:r>
-              <a:rPr sz="2000" b="0" i="0">
-                <a:solidFill>
-                  <a:srgbClr val="0F172A"/>
-                </a:solidFill>
-                <a:latin typeface="Arial"/>
-              </a:rPr>
-              <a:t> trades</a:t>
-            </a:r>
-          </a:p>
-          <a:p>
-            <a:pPr algn="l" marL="292608" indent="-256032">
-              <a:spcAft>
-                <a:spcPts val="1200"/>
-              </a:spcAft>
-              <a:buChar char="•"/>
-            </a:pPr>
-            <a:r>
-              <a:rPr sz="2000" b="0" i="0">
-                <a:solidFill>
-                  <a:srgbClr val="0F172A"/>
-                </a:solidFill>
-                <a:latin typeface="Arial"/>
-              </a:rPr>
-              <a:t>Only </a:t>
-            </a:r>
-            <a:r>
-              <a:rPr sz="2000" b="1" i="0">
-                <a:solidFill>
-                  <a:srgbClr val="0F172A"/>
-                </a:solidFill>
-                <a:latin typeface="Arial"/>
-              </a:rPr>
-              <a:t>27 (36%)</a:t>
-            </a:r>
-            <a:r>
-              <a:rPr sz="2000" b="0" i="0">
-                <a:solidFill>
-                  <a:srgbClr val="0F172A"/>
-                </a:solidFill>
-                <a:latin typeface="Arial"/>
-              </a:rPr>
-              <a:t> beat or matched the close</a:t>
-            </a:r>
-          </a:p>
-          <a:p>
-            <a:pPr algn="l" marL="292608" indent="-256032">
-              <a:spcAft>
-                <a:spcPts val="1200"/>
-              </a:spcAft>
-              <a:buChar char="•"/>
-            </a:pPr>
-            <a:r>
-              <a:rPr sz="2000" b="1" i="0">
-                <a:solidFill>
-                  <a:srgbClr val="0F172A"/>
-                </a:solidFill>
-                <a:latin typeface="Arial"/>
-              </a:rPr>
-              <a:t>41 (55%)</a:t>
-            </a:r>
-            <a:r>
-              <a:rPr sz="2000" b="0" i="0">
-                <a:solidFill>
-                  <a:srgbClr val="0F172A"/>
-                </a:solidFill>
-                <a:latin typeface="Arial"/>
-              </a:rPr>
-              <a:t> won, but winning ≠ an edge</a:t>
+              <a:t>List stamped tip − 30 min: our proxy for when a retail user sees it</a:t>
             </a:r>
           </a:p>
         </p:txBody>
@@ -10777,7 +10631,7 @@
                 </a:solidFill>
                 <a:latin typeface="Arial"/>
               </a:rPr>
-              <a:t>Evidence 2: the price moves before the news reaches you</a:t>
+              <a:t>Evidence 3: the market beats our model</a:t>
             </a:r>
           </a:p>
         </p:txBody>
@@ -10862,7 +10716,7 @@
       </p:sp>
       <p:pic>
         <p:nvPicPr>
-          <p:cNvPr id="7" name="Picture 6" descr="price_discovery.png"/>
+          <p:cNvPr id="7" name="Picture 6" descr="m4_vs_market.png"/>
           <p:cNvPicPr>
             <a:picLocks noChangeAspect="1"/>
           </p:cNvPicPr>
@@ -10876,8 +10730,8 @@
         </p:blipFill>
         <p:spPr>
           <a:xfrm>
-            <a:off x="895197" y="1097280"/>
-            <a:ext cx="10401299" cy="4160520"/>
+            <a:off x="457200" y="1209821"/>
+            <a:ext cx="6949440" cy="5078436"/>
           </a:xfrm>
           <a:prstGeom prst="rect">
             <a:avLst/>
@@ -10892,8 +10746,8 @@
         </p:nvSpPr>
         <p:spPr>
           <a:xfrm>
-            <a:off x="457200" y="5349240"/>
-            <a:ext cx="11277295" cy="1005840"/>
+            <a:off x="7589520" y="1280160"/>
+            <a:ext cx="4144975" cy="5120640"/>
           </a:xfrm>
           <a:prstGeom prst="rect">
             <a:avLst/>
@@ -10908,44 +10762,104 @@
           <a:p>
             <a:pPr algn="l" marL="292608" indent="-256032">
               <a:spcAft>
-                <a:spcPts val="400"/>
+                <a:spcPts val="1000"/>
               </a:spcAft>
               <a:buChar char="•"/>
             </a:pPr>
             <a:r>
-              <a:rPr sz="1800" b="1" i="0">
+              <a:rPr sz="1900" b="0" i="0">
                 <a:solidFill>
                   <a:srgbClr val="0F172A"/>
                 </a:solidFill>
                 <a:latin typeface="Arial"/>
               </a:rPr>
-              <a:t>91%</a:t>
-            </a:r>
-            <a:r>
-              <a:rPr sz="1800" b="0" i="0">
+              <a:t>Brier, 501 test games, 1 h before tip: </a:t>
+            </a:r>
+            <a:r>
+              <a:rPr sz="1900" b="1" i="0">
                 <a:solidFill>
                   <a:srgbClr val="0F172A"/>
                 </a:solidFill>
                 <a:latin typeface="Arial"/>
               </a:rPr>
-              <a:t> of the news-direction move was already in the price when the list was public (+1.80 vs +0.18 pts, 193 test games)</a:t>
+              <a:t>market 0.164</a:t>
+            </a:r>
+            <a:r>
+              <a:rPr sz="1900" b="0" i="0">
+                <a:solidFill>
+                  <a:srgbClr val="0F172A"/>
+                </a:solidFill>
+                <a:latin typeface="Arial"/>
+              </a:rPr>
+              <a:t>, our model 0.186</a:t>
             </a:r>
           </a:p>
           <a:p>
             <a:pPr algn="l" marL="292608" indent="-256032">
               <a:spcAft>
-                <a:spcPts val="400"/>
+                <a:spcPts val="1000"/>
               </a:spcAft>
               <a:buChar char="•"/>
             </a:pPr>
             <a:r>
-              <a:rPr sz="1800" b="0" i="0">
+              <a:rPr sz="1900" b="0" i="0">
                 <a:solidFill>
                   <a:srgbClr val="0F172A"/>
                 </a:solidFill>
                 <a:latin typeface="Arial"/>
               </a:rPr>
-              <a:t>List stamped tip − 30 min: our proxy for when a retail user sees it</a:t>
+              <a:t>Disagree by more than 5 pts, and the market is right:</a:t>
+            </a:r>
+          </a:p>
+          <a:p>
+            <a:pPr algn="l" marL="612647" indent="-256032">
+              <a:spcAft>
+                <a:spcPts val="1000"/>
+              </a:spcAft>
+              <a:buChar char="–"/>
+            </a:pPr>
+            <a:r>
+              <a:rPr sz="1700" b="0" i="0">
+                <a:solidFill>
+                  <a:srgbClr val="0F172A"/>
+                </a:solidFill>
+                <a:latin typeface="Arial"/>
+              </a:rPr>
+              <a:t>model higher on home: model 48%, market 35%, actual 34%</a:t>
+            </a:r>
+          </a:p>
+          <a:p>
+            <a:pPr algn="l" marL="612647" indent="-256032">
+              <a:spcAft>
+                <a:spcPts val="1000"/>
+              </a:spcAft>
+              <a:buChar char="–"/>
+            </a:pPr>
+            <a:r>
+              <a:rPr sz="1700" b="0" i="0">
+                <a:solidFill>
+                  <a:srgbClr val="0F172A"/>
+                </a:solidFill>
+                <a:latin typeface="Arial"/>
+              </a:rPr>
+              <a:t>model lower on home: model 61%, market 73%, actual 77%</a:t>
+            </a:r>
+          </a:p>
+          <a:p>
+            <a:pPr algn="l" marL="292608" indent="-256032">
+              <a:spcAft>
+                <a:spcPts val="1000"/>
+              </a:spcAft>
+              <a:buChar char="•"/>
+            </a:pPr>
+            <a:r>
+              <a:rPr sz="1600" b="0" i="0">
+                <a:solidFill>
+                  <a:srgbClr val="64748B"/>
+                </a:solidFill>
+                <a:latin typeface="Arial"/>
+              </a:rPr>
+              <a:t>With the inactive list: model 0.183 vs market at tip 0.163</a:t>
             </a:r>
           </a:p>
         </p:txBody>
@@ -11090,7 +11004,7 @@
                 </a:solidFill>
                 <a:latin typeface="Arial"/>
               </a:rPr>
-              <a:t>Evidence 3: the market beats our model</a:t>
+              <a:t>Evidence 4: even a market-trained neural net finds nothing</a:t>
             </a:r>
           </a:p>
         </p:txBody>
@@ -11175,7 +11089,7 @@
       </p:sp>
       <p:pic>
         <p:nvPicPr>
-          <p:cNvPr id="7" name="Picture 6" descr="m4_vs_market.png"/>
+          <p:cNvPr id="7" name="Picture 6" descr="m6_vs_baselines.png"/>
           <p:cNvPicPr>
             <a:picLocks noChangeAspect="1"/>
           </p:cNvPicPr>
@@ -11189,8 +11103,8 @@
         </p:blipFill>
         <p:spPr>
           <a:xfrm>
-            <a:off x="457200" y="1209821"/>
-            <a:ext cx="6949440" cy="5078436"/>
+            <a:off x="579630" y="1097280"/>
+            <a:ext cx="11032434" cy="3383280"/>
           </a:xfrm>
           <a:prstGeom prst="rect">
             <a:avLst/>
@@ -11205,8 +11119,8 @@
         </p:nvSpPr>
         <p:spPr>
           <a:xfrm>
-            <a:off x="7589520" y="1280160"/>
-            <a:ext cx="4144975" cy="5120640"/>
+            <a:off x="457200" y="4526280"/>
+            <a:ext cx="11277295" cy="1298448"/>
           </a:xfrm>
           <a:prstGeom prst="rect">
             <a:avLst/>
@@ -11221,104 +11135,156 @@
           <a:p>
             <a:pPr algn="l" marL="292608" indent="-256032">
               <a:spcAft>
-                <a:spcPts val="1000"/>
+                <a:spcPts val="400"/>
               </a:spcAft>
               <a:buChar char="•"/>
             </a:pPr>
             <a:r>
-              <a:rPr sz="1900" b="0" i="0">
+              <a:rPr sz="1800" b="0" i="0">
                 <a:solidFill>
                   <a:srgbClr val="0F172A"/>
                 </a:solidFill>
                 <a:latin typeface="Arial"/>
               </a:rPr>
-              <a:t>Brier, 501 test games, 1 h before tip: </a:t>
-            </a:r>
-            <a:r>
-              <a:rPr sz="1900" b="1" i="0">
+              <a:t>Average error on 771 test decision times: </a:t>
+            </a:r>
+            <a:r>
+              <a:rPr sz="1800" b="1" i="0">
                 <a:solidFill>
                   <a:srgbClr val="0F172A"/>
                 </a:solidFill>
                 <a:latin typeface="Arial"/>
               </a:rPr>
-              <a:t>market 0.164</a:t>
-            </a:r>
-            <a:r>
-              <a:rPr sz="1900" b="0" i="0">
+              <a:t>M6 0.867¢</a:t>
+            </a:r>
+            <a:r>
+              <a:rPr sz="1800" b="0" i="0">
                 <a:solidFill>
                   <a:srgbClr val="0F172A"/>
                 </a:solidFill>
                 <a:latin typeface="Arial"/>
               </a:rPr>
-              <a:t>, our model 0.186</a:t>
+              <a:t> vs “price won't move” </a:t>
+            </a:r>
+            <a:r>
+              <a:rPr sz="1800" b="1" i="0">
+                <a:solidFill>
+                  <a:srgbClr val="0F172A"/>
+                </a:solidFill>
+                <a:latin typeface="Arial"/>
+              </a:rPr>
+              <a:t>0.833¢</a:t>
+            </a:r>
+            <a:r>
+              <a:rPr sz="1800" b="0" i="0">
+                <a:solidFill>
+                  <a:srgbClr val="0F172A"/>
+                </a:solidFill>
+                <a:latin typeface="Arial"/>
+              </a:rPr>
+              <a:t>; R² ≈ 0 on test and holdout</a:t>
             </a:r>
           </a:p>
           <a:p>
             <a:pPr algn="l" marL="292608" indent="-256032">
               <a:spcAft>
-                <a:spcPts val="1000"/>
+                <a:spcPts val="400"/>
               </a:spcAft>
               <a:buChar char="•"/>
             </a:pPr>
             <a:r>
-              <a:rPr sz="1900" b="0" i="0">
+              <a:rPr sz="1800" b="0" i="0">
                 <a:solidFill>
                   <a:srgbClr val="0F172A"/>
                 </a:solidFill>
                 <a:latin typeface="Arial"/>
               </a:rPr>
-              <a:t>Disagree by more than 5 pts, and the market is right:</a:t>
-            </a:r>
-          </a:p>
-          <a:p>
-            <a:pPr algn="l" marL="612647" indent="-256032">
+              <a:t>After the list, the price moves ~2.5% of the model's implied shift (coefficient 0.025); M6 agent: 0 trades. Forced: 501 trades, −$652</a:t>
+            </a:r>
+          </a:p>
+        </p:txBody>
+      </p:sp>
+      <p:sp>
+        <p:nvSpPr>
+          <p:cNvPr id="9" name="Rounded Rectangle 8"/>
+          <p:cNvSpPr/>
+          <p:nvPr/>
+        </p:nvSpPr>
+        <p:spPr>
+          <a:xfrm>
+            <a:off x="457200" y="5870448"/>
+            <a:ext cx="11277295" cy="457200"/>
+          </a:xfrm>
+          <a:prstGeom prst="roundRect">
+            <a:avLst>
+              <a:gd name="adj" fmla="val 12000"/>
+            </a:avLst>
+          </a:prstGeom>
+          <a:solidFill>
+            <a:srgbClr val="FEF3C7"/>
+          </a:solidFill>
+          <a:ln>
+            <a:noFill/>
+          </a:ln>
+          <a:effectLst/>
+        </p:spPr>
+        <p:style>
+          <a:lnRef idx="1">
+            <a:schemeClr val="accent1"/>
+          </a:lnRef>
+          <a:fillRef idx="3">
+            <a:schemeClr val="accent1"/>
+          </a:fillRef>
+          <a:effectRef idx="2">
+            <a:schemeClr val="accent1"/>
+          </a:effectRef>
+          <a:fontRef idx="minor">
+            <a:schemeClr val="lt1"/>
+          </a:fontRef>
+        </p:style>
+        <p:txBody>
+          <a:bodyPr rtlCol="0" anchor="ctr"/>
+          <a:lstStyle/>
+          <a:p>
+            <a:pPr algn="ctr"/>
+          </a:p>
+        </p:txBody>
+      </p:sp>
+      <p:sp>
+        <p:nvSpPr>
+          <p:cNvPr id="10" name="TextBox 9"/>
+          <p:cNvSpPr txBox="1"/>
+          <p:nvPr/>
+        </p:nvSpPr>
+        <p:spPr>
+          <a:xfrm>
+            <a:off x="548640" y="5870448"/>
+            <a:ext cx="11094415" cy="457200"/>
+          </a:xfrm>
+          <a:prstGeom prst="rect">
+            <a:avLst/>
+          </a:prstGeom>
+          <a:noFill/>
+        </p:spPr>
+        <p:txBody>
+          <a:bodyPr wrap="square" anchor="ctr" lIns="73152" rIns="73152" tIns="36576" bIns="36576">
+            <a:spAutoFit/>
+          </a:bodyPr>
+          <a:lstStyle/>
+          <a:p>
+            <a:pPr algn="l">
               <a:spcAft>
-                <a:spcPts val="1000"/>
+                <a:spcPts val="0"/>
               </a:spcAft>
-              <a:buChar char="–"/>
             </a:pPr>
             <a:r>
-              <a:rPr sz="1700" b="0" i="0">
+              <a:rPr sz="1800" b="0" i="0">
                 <a:solidFill>
                   <a:srgbClr val="0F172A"/>
                 </a:solidFill>
                 <a:latin typeface="Arial"/>
               </a:rPr>
-              <a:t>model higher on home: model 48%, market 35%, actual 34%</a:t>
-            </a:r>
-          </a:p>
-          <a:p>
-            <a:pPr algn="l" marL="612647" indent="-256032">
-              <a:spcAft>
-                <a:spcPts val="1000"/>
-              </a:spcAft>
-              <a:buChar char="–"/>
-            </a:pPr>
-            <a:r>
-              <a:rPr sz="1700" b="0" i="0">
-                <a:solidFill>
-                  <a:srgbClr val="0F172A"/>
-                </a:solidFill>
-                <a:latin typeface="Arial"/>
-              </a:rPr>
-              <a:t>model lower on home: model 61%, market 73%, actual 77%</a:t>
-            </a:r>
-          </a:p>
-          <a:p>
-            <a:pPr algn="l" marL="292608" indent="-256032">
-              <a:spcAft>
-                <a:spcPts val="1000"/>
-              </a:spcAft>
-              <a:buChar char="•"/>
-            </a:pPr>
-            <a:r>
-              <a:rPr sz="1600" b="0" i="0">
-                <a:solidFill>
-                  <a:srgbClr val="64748B"/>
-                </a:solidFill>
-                <a:latin typeface="Arial"/>
-              </a:rPr>
-              <a:t>With the inactive list: model 0.183 vs market at tip 0.163</a:t>
+              <a:t>The price already contains the public information; the consumer is left paying costs</a:t>
             </a:r>
           </a:p>
         </p:txBody>
@@ -11463,7 +11429,7 @@
                 </a:solidFill>
                 <a:latin typeface="Arial"/>
               </a:rPr>
-              <a:t>Evidence 4: long shots, where the data is weaker</a:t>
+              <a:t>Evidence 5: tested with CIs, never trading wins</a:t>
             </a:r>
           </a:p>
         </p:txBody>
@@ -11548,7 +11514,7 @@
       </p:sp>
       <p:pic>
         <p:nvPicPr>
-          <p:cNvPr id="7" name="Picture 6" descr="longshot_calibration.png"/>
+          <p:cNvPr id="7" name="Picture 6" descr="walkforward.png"/>
           <p:cNvPicPr>
             <a:picLocks noChangeAspect="1"/>
           </p:cNvPicPr>
@@ -11562,339 +11528,8 @@
         </p:blipFill>
         <p:spPr>
           <a:xfrm>
-            <a:off x="895197" y="1097280"/>
-            <a:ext cx="10401299" cy="4160520"/>
-          </a:xfrm>
-          <a:prstGeom prst="rect">
-            <a:avLst/>
-          </a:prstGeom>
-        </p:spPr>
-      </p:pic>
-      <p:sp>
-        <p:nvSpPr>
-          <p:cNvPr id="8" name="TextBox 7"/>
-          <p:cNvSpPr txBox="1"/>
-          <p:nvPr/>
-        </p:nvSpPr>
-        <p:spPr>
-          <a:xfrm>
-            <a:off x="457200" y="5349240"/>
-            <a:ext cx="11277295" cy="1005840"/>
-          </a:xfrm>
-          <a:prstGeom prst="rect">
-            <a:avLst/>
-          </a:prstGeom>
-          <a:noFill/>
-        </p:spPr>
-        <p:txBody>
-          <a:bodyPr wrap="square" anchor="t" lIns="73152" rIns="73152" tIns="36576" bIns="36576">
-            <a:spAutoFit/>
-          </a:bodyPr>
-          <a:lstStyle/>
-          <a:p>
-            <a:pPr algn="l" marL="292608" indent="-256032">
-              <a:spcAft>
-                <a:spcPts val="400"/>
-              </a:spcAft>
-              <a:buChar char="•"/>
-            </a:pPr>
-            <a:r>
-              <a:rPr sz="1800" b="1" i="0">
-                <a:solidFill>
-                  <a:srgbClr val="0F172A"/>
-                </a:solidFill>
-                <a:latin typeface="Arial"/>
-              </a:rPr>
-              <a:t>Not clearly supported:</a:t>
-            </a:r>
-            <a:r>
-              <a:rPr sz="1800" b="0" i="0">
-                <a:solidFill>
-                  <a:srgbClr val="0F172A"/>
-                </a:solidFill>
-                <a:latin typeface="Arial"/>
-              </a:rPr>
-              <a:t> prices are calibrated; only 0–10¢ hints (1 win in 66 vs 7.4% implied, z = −1.8)</a:t>
-            </a:r>
-          </a:p>
-          <a:p>
-            <a:pPr algn="l" marL="292608" indent="-256032">
-              <a:spcAft>
-                <a:spcPts val="400"/>
-              </a:spcAft>
-              <a:buChar char="•"/>
-            </a:pPr>
-            <a:r>
-              <a:rPr sz="1800" b="0" i="0">
-                <a:solidFill>
-                  <a:srgbClr val="0F172A"/>
-                </a:solidFill>
-                <a:latin typeface="Arial"/>
-              </a:rPr>
-              <a:t>Buying at ask + fee: long shots ≤ 25¢ </a:t>
-            </a:r>
-            <a:r>
-              <a:rPr sz="1800" b="1" i="0">
-                <a:solidFill>
-                  <a:srgbClr val="0F172A"/>
-                </a:solidFill>
-                <a:latin typeface="Arial"/>
-              </a:rPr>
-              <a:t>−13.4%</a:t>
-            </a:r>
-            <a:r>
-              <a:rPr sz="1800" b="0" i="0">
-                <a:solidFill>
-                  <a:srgbClr val="0F172A"/>
-                </a:solidFill>
-                <a:latin typeface="Arial"/>
-              </a:rPr>
-              <a:t>, heavy favourites ≥ 75¢ −2.2%</a:t>
-            </a:r>
-          </a:p>
-        </p:txBody>
-      </p:sp>
-    </p:spTree>
-  </p:cSld>
-  <p:clrMapOvr>
-    <a:masterClrMapping/>
-  </p:clrMapOvr>
-</p:sld>
-</file>
-
-<file path=ppt/slides/slide9.xml><?xml version="1.0" encoding="utf-8"?>
-<p:sld xmlns:a="http://schemas.openxmlformats.org/drawingml/2006/main" xmlns:p="http://schemas.openxmlformats.org/presentationml/2006/main" xmlns:r="http://schemas.openxmlformats.org/officeDocument/2006/relationships">
-  <p:cSld>
-    <p:spTree>
-      <p:nvGrpSpPr>
-        <p:cNvPr id="1" name=""/>
-        <p:cNvGrpSpPr/>
-        <p:nvPr/>
-      </p:nvGrpSpPr>
-      <p:grpSpPr/>
-      <p:sp>
-        <p:nvSpPr>
-          <p:cNvPr id="2" name="Rectangle 1"/>
-          <p:cNvSpPr/>
-          <p:nvPr/>
-        </p:nvSpPr>
-        <p:spPr>
-          <a:xfrm>
-            <a:off x="0" y="0"/>
-            <a:ext cx="12191695" cy="868680"/>
-          </a:xfrm>
-          <a:prstGeom prst="rect">
-            <a:avLst/>
-          </a:prstGeom>
-          <a:solidFill>
-            <a:srgbClr val="1E293B"/>
-          </a:solidFill>
-          <a:ln>
-            <a:noFill/>
-          </a:ln>
-          <a:effectLst/>
-        </p:spPr>
-        <p:style>
-          <a:lnRef idx="1">
-            <a:schemeClr val="accent1"/>
-          </a:lnRef>
-          <a:fillRef idx="3">
-            <a:schemeClr val="accent1"/>
-          </a:fillRef>
-          <a:effectRef idx="2">
-            <a:schemeClr val="accent1"/>
-          </a:effectRef>
-          <a:fontRef idx="minor">
-            <a:schemeClr val="lt1"/>
-          </a:fontRef>
-        </p:style>
-        <p:txBody>
-          <a:bodyPr rtlCol="0" anchor="ctr"/>
-          <a:lstStyle/>
-          <a:p>
-            <a:pPr algn="ctr"/>
-          </a:p>
-        </p:txBody>
-      </p:sp>
-      <p:sp>
-        <p:nvSpPr>
-          <p:cNvPr id="3" name="Rectangle 2"/>
-          <p:cNvSpPr/>
-          <p:nvPr/>
-        </p:nvSpPr>
-        <p:spPr>
-          <a:xfrm>
-            <a:off x="0" y="868680"/>
-            <a:ext cx="12191695" cy="54864"/>
-          </a:xfrm>
-          <a:prstGeom prst="rect">
-            <a:avLst/>
-          </a:prstGeom>
-          <a:solidFill>
-            <a:srgbClr val="EA580C"/>
-          </a:solidFill>
-          <a:ln>
-            <a:noFill/>
-          </a:ln>
-          <a:effectLst/>
-        </p:spPr>
-        <p:style>
-          <a:lnRef idx="1">
-            <a:schemeClr val="accent1"/>
-          </a:lnRef>
-          <a:fillRef idx="3">
-            <a:schemeClr val="accent1"/>
-          </a:fillRef>
-          <a:effectRef idx="2">
-            <a:schemeClr val="accent1"/>
-          </a:effectRef>
-          <a:fontRef idx="minor">
-            <a:schemeClr val="lt1"/>
-          </a:fontRef>
-        </p:style>
-        <p:txBody>
-          <a:bodyPr rtlCol="0" anchor="ctr"/>
-          <a:lstStyle/>
-          <a:p>
-            <a:pPr algn="ctr"/>
-          </a:p>
-        </p:txBody>
-      </p:sp>
-      <p:sp>
-        <p:nvSpPr>
-          <p:cNvPr id="4" name="TextBox 3"/>
-          <p:cNvSpPr txBox="1"/>
-          <p:nvPr/>
-        </p:nvSpPr>
-        <p:spPr>
-          <a:xfrm>
-            <a:off x="457200" y="109728"/>
-            <a:ext cx="11277295" cy="685800"/>
-          </a:xfrm>
-          <a:prstGeom prst="rect">
-            <a:avLst/>
-          </a:prstGeom>
-          <a:noFill/>
-        </p:spPr>
-        <p:txBody>
-          <a:bodyPr wrap="square" anchor="ctr" lIns="73152" rIns="73152" tIns="36576" bIns="36576">
-            <a:spAutoFit/>
-          </a:bodyPr>
-          <a:lstStyle/>
-          <a:p>
-            <a:pPr algn="l">
-              <a:spcAft>
-                <a:spcPts val="0"/>
-              </a:spcAft>
-            </a:pPr>
-            <a:r>
-              <a:rPr sz="3000" b="1" i="0">
-                <a:solidFill>
-                  <a:srgbClr val="FFFFFF"/>
-                </a:solidFill>
-                <a:latin typeface="Arial"/>
-              </a:rPr>
-              <a:t>Evidence 5: not trading beat every strategy</a:t>
-            </a:r>
-          </a:p>
-        </p:txBody>
-      </p:sp>
-      <p:sp>
-        <p:nvSpPr>
-          <p:cNvPr id="5" name="TextBox 4"/>
-          <p:cNvSpPr txBox="1"/>
-          <p:nvPr/>
-        </p:nvSpPr>
-        <p:spPr>
-          <a:xfrm>
-            <a:off x="457200" y="6446520"/>
-            <a:ext cx="9144000" cy="320040"/>
-          </a:xfrm>
-          <a:prstGeom prst="rect">
-            <a:avLst/>
-          </a:prstGeom>
-          <a:noFill/>
-        </p:spPr>
-        <p:txBody>
-          <a:bodyPr wrap="square" anchor="t" lIns="73152" rIns="73152" tIns="36576" bIns="36576">
-            <a:spAutoFit/>
-          </a:bodyPr>
-          <a:lstStyle/>
-          <a:p>
-            <a:pPr algn="l">
-              <a:spcAft>
-                <a:spcPts val="0"/>
-              </a:spcAft>
-            </a:pPr>
-            <a:r>
-              <a:rPr sz="1100" b="0" i="0">
-                <a:solidFill>
-                  <a:srgbClr val="64748B"/>
-                </a:solidFill>
-                <a:latin typeface="Arial"/>
-              </a:rPr>
-              <a:t>DASC7606C Group 12 · Can a consumer beat a sports prediction market?</a:t>
-            </a:r>
-          </a:p>
-        </p:txBody>
-      </p:sp>
-      <p:sp>
-        <p:nvSpPr>
-          <p:cNvPr id="6" name="TextBox 5"/>
-          <p:cNvSpPr txBox="1"/>
-          <p:nvPr/>
-        </p:nvSpPr>
-        <p:spPr>
-          <a:xfrm>
-            <a:off x="10820095" y="6446520"/>
-            <a:ext cx="914400" cy="320040"/>
-          </a:xfrm>
-          <a:prstGeom prst="rect">
-            <a:avLst/>
-          </a:prstGeom>
-          <a:noFill/>
-        </p:spPr>
-        <p:txBody>
-          <a:bodyPr wrap="square" anchor="t" lIns="73152" rIns="73152" tIns="36576" bIns="36576">
-            <a:spAutoFit/>
-          </a:bodyPr>
-          <a:lstStyle/>
-          <a:p>
-            <a:pPr algn="r">
-              <a:spcAft>
-                <a:spcPts val="0"/>
-              </a:spcAft>
-            </a:pPr>
-            <a:r>
-              <a:rPr sz="1100" b="0" i="0">
-                <a:solidFill>
-                  <a:srgbClr val="64748B"/>
-                </a:solidFill>
-                <a:latin typeface="Arial"/>
-              </a:rPr>
-              <a:t>9</a:t>
-            </a:r>
-          </a:p>
-        </p:txBody>
-      </p:sp>
-      <p:pic>
-        <p:nvPicPr>
-          <p:cNvPr id="7" name="Picture 6" descr="headline_clv.png"/>
-          <p:cNvPicPr>
-            <a:picLocks noChangeAspect="1"/>
-          </p:cNvPicPr>
-          <p:nvPr/>
-        </p:nvPicPr>
-        <p:blipFill>
-          <a:blip r:embed="rId3"/>
-          <a:stretch>
-            <a:fillRect/>
-          </a:stretch>
-        </p:blipFill>
-        <p:spPr>
-          <a:xfrm>
-            <a:off x="457200" y="1171575"/>
-            <a:ext cx="5669280" cy="3188970"/>
+            <a:off x="457200" y="1188719"/>
+            <a:ext cx="5943600" cy="3429000"/>
           </a:xfrm>
           <a:prstGeom prst="rect">
             <a:avLst/>
@@ -11910,8 +11545,8 @@
           <p:nvPr/>
         </p:nvGraphicFramePr>
         <p:xfrm>
-          <a:off x="6355080" y="1188720"/>
-          <a:ext cx="5376672" cy="3108960"/>
+          <a:off x="6537960" y="1188720"/>
+          <a:ext cx="5193791" cy="2871216"/>
         </p:xfrm>
         <a:graphic>
           <a:graphicData uri="http://schemas.openxmlformats.org/drawingml/2006/table">
@@ -11920,9 +11555,9 @@
                 <a:tableStyleId>{5C22544A-7EE6-4342-B048-85BDC9FD1C3A}</a:tableStyleId>
               </a:tblPr>
               <a:tblGrid>
-                <a:gridCol w="2926080"/>
-                <a:gridCol w="914400"/>
-                <a:gridCol w="1536192"/>
+                <a:gridCol w="1874519"/>
+                <a:gridCol w="868680"/>
+                <a:gridCol w="2450592"/>
               </a:tblGrid>
               <a:tr h="457200">
                 <a:tc>
@@ -11938,7 +11573,7 @@
                           </a:solidFill>
                           <a:latin typeface="Arial"/>
                         </a:rPr>
-                        <a:t>Strategy</a:t>
+                        <a:t>Nov – 12 Apr</a:t>
                       </a:r>
                     </a:p>
                   </a:txBody>
@@ -11984,7 +11619,7 @@
                           </a:solidFill>
                           <a:latin typeface="Arial"/>
                         </a:rPr>
-                        <a:t>P&amp;L</a:t>
+                        <a:t>P&amp;L [95% CI]</a:t>
                       </a:r>
                     </a:p>
                   </a:txBody>
@@ -11995,7 +11630,7 @@
                   </a:tcPr>
                 </a:tc>
               </a:tr>
-              <a:tr h="530352">
+              <a:tr h="603504">
                 <a:tc>
                   <a:txBody>
                     <a:bodyPr wrap="square"/>
@@ -12003,7 +11638,7 @@
                     <a:p>
                       <a:pPr algn="l"/>
                       <a:r>
-                        <a:rPr sz="1600" b="0" i="0">
+                        <a:rPr sz="1600" b="1" i="0">
                           <a:solidFill>
                             <a:srgbClr val="0F172A"/>
                           </a:solidFill>
@@ -12066,7 +11701,7 @@
                   </a:tcPr>
                 </a:tc>
               </a:tr>
-              <a:tr h="530352">
+              <a:tr h="603504">
                 <a:tc>
                   <a:txBody>
                     <a:bodyPr wrap="square"/>
@@ -12080,7 +11715,7 @@
                           </a:solidFill>
                           <a:latin typeface="Arial"/>
                         </a:rPr>
-                        <a:t>Full agent (anchor + learning)</a:t>
+                        <a:t>Full agent</a:t>
                       </a:r>
                     </a:p>
                   </a:txBody>
@@ -12103,7 +11738,7 @@
                           </a:solidFill>
                           <a:latin typeface="Arial"/>
                         </a:rPr>
-                        <a:t>74</a:t>
+                        <a:t>157</a:t>
                       </a:r>
                     </a:p>
                   </a:txBody>
@@ -12126,7 +11761,7 @@
                           </a:solidFill>
                           <a:latin typeface="Arial"/>
                         </a:rPr>
-                        <a:t>−$32</a:t>
+                        <a:t>−$25 [−$569 to +$564]</a:t>
                       </a:r>
                     </a:p>
                   </a:txBody>
@@ -12137,7 +11772,7 @@
                   </a:tcPr>
                 </a:tc>
               </a:tr>
-              <a:tr h="530352">
+              <a:tr h="603504">
                 <a:tc>
                   <a:txBody>
                     <a:bodyPr wrap="square"/>
@@ -12151,7 +11786,7 @@
                           </a:solidFill>
                           <a:latin typeface="Arial"/>
                         </a:rPr>
-                        <a:t>Anchor, no learning</a:t>
+                        <a:t>No learning</a:t>
                       </a:r>
                     </a:p>
                   </a:txBody>
@@ -12174,7 +11809,7 @@
                           </a:solidFill>
                           <a:latin typeface="Arial"/>
                         </a:rPr>
-                        <a:t>129</a:t>
+                        <a:t>276</a:t>
                       </a:r>
                     </a:p>
                   </a:txBody>
@@ -12197,7 +11832,7 @@
                           </a:solidFill>
                           <a:latin typeface="Arial"/>
                         </a:rPr>
-                        <a:t>−$247</a:t>
+                        <a:t>−$407 [−$1,324 to +$553]</a:t>
                       </a:r>
                     </a:p>
                   </a:txBody>
@@ -12208,7 +11843,7 @@
                   </a:tcPr>
                 </a:tc>
               </a:tr>
-              <a:tr h="530352">
+              <a:tr h="603504">
                 <a:tc>
                   <a:txBody>
                     <a:bodyPr wrap="square"/>
@@ -12222,7 +11857,7 @@
                           </a:solidFill>
                           <a:latin typeface="Arial"/>
                         </a:rPr>
-                        <a:t>Raw model / no agent</a:t>
+                        <a:t>Raw model</a:t>
                       </a:r>
                     </a:p>
                   </a:txBody>
@@ -12245,7 +11880,7 @@
                           </a:solidFill>
                           <a:latin typeface="Arial"/>
                         </a:rPr>
-                        <a:t>366</a:t>
+                        <a:t>711</a:t>
                       </a:r>
                     </a:p>
                   </a:txBody>
@@ -12268,7 +11903,7 @@
                           </a:solidFill>
                           <a:latin typeface="Arial"/>
                         </a:rPr>
-                        <a:t>−$2,087</a:t>
+                        <a:t>−$2,475 [−$3,995 to −$845]</a:t>
                       </a:r>
                     </a:p>
                   </a:txBody>
@@ -12279,77 +11914,6 @@
                   </a:tcPr>
                 </a:tc>
               </a:tr>
-              <a:tr h="530352">
-                <a:tc>
-                  <a:txBody>
-                    <a:bodyPr wrap="square"/>
-                    <a:lstStyle/>
-                    <a:p>
-                      <a:pPr algn="l"/>
-                      <a:r>
-                        <a:rPr sz="1600" b="0" i="0">
-                          <a:solidFill>
-                            <a:srgbClr val="0F172A"/>
-                          </a:solidFill>
-                          <a:latin typeface="Arial"/>
-                        </a:rPr>
-                        <a:t>Buy every contract (all 2025-26)</a:t>
-                      </a:r>
-                    </a:p>
-                  </a:txBody>
-                  <a:tcPr marL="73152" marR="73152" marT="36576" marB="36576" anchor="ctr">
-                    <a:solidFill>
-                      <a:srgbClr val="F1F5F9"/>
-                    </a:solidFill>
-                  </a:tcPr>
-                </a:tc>
-                <a:tc>
-                  <a:txBody>
-                    <a:bodyPr wrap="square"/>
-                    <a:lstStyle/>
-                    <a:p>
-                      <a:pPr algn="ctr"/>
-                      <a:r>
-                        <a:rPr sz="1600" b="0" i="0">
-                          <a:solidFill>
-                            <a:srgbClr val="0F172A"/>
-                          </a:solidFill>
-                          <a:latin typeface="Arial"/>
-                        </a:rPr>
-                        <a:t>2,632</a:t>
-                      </a:r>
-                    </a:p>
-                  </a:txBody>
-                  <a:tcPr marL="73152" marR="73152" marT="36576" marB="36576" anchor="ctr">
-                    <a:solidFill>
-                      <a:srgbClr val="F1F5F9"/>
-                    </a:solidFill>
-                  </a:tcPr>
-                </a:tc>
-                <a:tc>
-                  <a:txBody>
-                    <a:bodyPr wrap="square"/>
-                    <a:lstStyle/>
-                    <a:p>
-                      <a:pPr algn="ctr"/>
-                      <a:r>
-                        <a:rPr sz="1600" b="0" i="0">
-                          <a:solidFill>
-                            <a:srgbClr val="0F172A"/>
-                          </a:solidFill>
-                          <a:latin typeface="Arial"/>
-                        </a:rPr>
-                        <a:t>−6.0% ROI</a:t>
-                      </a:r>
-                    </a:p>
-                  </a:txBody>
-                  <a:tcPr marL="73152" marR="73152" marT="36576" marB="36576" anchor="ctr">
-                    <a:solidFill>
-                      <a:srgbClr val="F1F5F9"/>
-                    </a:solidFill>
-                  </a:tcPr>
-                </a:tc>
-              </a:tr>
             </a:tbl>
           </a:graphicData>
         </a:graphic>
@@ -12362,8 +11926,8 @@
         </p:nvSpPr>
         <p:spPr>
           <a:xfrm>
-            <a:off x="457200" y="4572000"/>
-            <a:ext cx="11277295" cy="1737360"/>
+            <a:off x="6537960" y="4114800"/>
+            <a:ext cx="5196535" cy="640080"/>
           </a:xfrm>
           <a:prstGeom prst="rect">
             <a:avLst/>
@@ -12376,9 +11940,48 @@
           </a:bodyPr>
           <a:lstStyle/>
           <a:p>
+            <a:pPr algn="l">
+              <a:spcAft>
+                <a:spcPts val="800"/>
+              </a:spcAft>
+            </a:pPr>
+            <a:r>
+              <a:rPr sz="1400" b="0" i="0">
+                <a:solidFill>
+                  <a:srgbClr val="64748B"/>
+                </a:solidFill>
+                <a:latin typeface="Arial"/>
+              </a:rPr>
+              <a:t>Day-clustered bootstrap; M4 retrained monthly. Chart totals include play-offs, the table does not</a:t>
+            </a:r>
+          </a:p>
+        </p:txBody>
+      </p:sp>
+      <p:sp>
+        <p:nvSpPr>
+          <p:cNvPr id="10" name="TextBox 9"/>
+          <p:cNvSpPr txBox="1"/>
+          <p:nvPr/>
+        </p:nvSpPr>
+        <p:spPr>
+          <a:xfrm>
+            <a:off x="457200" y="4663440"/>
+            <a:ext cx="11277295" cy="1691640"/>
+          </a:xfrm>
+          <a:prstGeom prst="rect">
+            <a:avLst/>
+          </a:prstGeom>
+          <a:noFill/>
+        </p:spPr>
+        <p:txBody>
+          <a:bodyPr wrap="square" anchor="t" lIns="73152" rIns="73152" tIns="36576" bIns="36576">
+            <a:spAutoFit/>
+          </a:bodyPr>
+          <a:lstStyle/>
+          <a:p>
             <a:pPr algn="l" marL="292608" indent="-256032">
               <a:spcAft>
-                <a:spcPts val="600"/>
+                <a:spcPts val="400"/>
               </a:spcAft>
               <a:buChar char="•"/>
             </a:pPr>
@@ -12389,7 +11992,7 @@
                 </a:solidFill>
                 <a:latin typeface="Arial"/>
               </a:rPr>
-              <a:t>Agent rows: test period, 1 Feb – 12 Apr 2026; mean closing-line value </a:t>
+              <a:t>Mean CLV &lt; 0 for every setup; </a:t>
             </a:r>
             <a:r>
               <a:rPr sz="1800" b="1" i="0">
@@ -12398,13 +12001,13 @@
                 </a:solidFill>
                 <a:latin typeface="Arial"/>
               </a:rPr>
-              <a:t>negative in every setup</a:t>
+              <a:t>every 95% CI entirely below zero</a:t>
             </a:r>
           </a:p>
           <a:p>
             <a:pPr algn="l" marL="292608" indent="-256032">
               <a:spcAft>
-                <a:spcPts val="600"/>
+                <a:spcPts val="400"/>
               </a:spcAft>
               <a:buChar char="•"/>
             </a:pPr>
@@ -12415,13 +12018,13 @@
                 </a:solidFill>
                 <a:latin typeface="Arial"/>
               </a:rPr>
-              <a:t>Interpretation: trading on a disagreement with the price looks like the raw-model row</a:t>
+              <a:t>Market anchor is real: +$2,450 vs raw model (p = 0.002); learning = trading less (p = 0.13)</a:t>
             </a:r>
           </a:p>
           <a:p>
             <a:pPr algn="l" marL="292608" indent="-256032">
               <a:spcAft>
-                <a:spcPts val="600"/>
+                <a:spcPts val="400"/>
               </a:spcAft>
               <a:buChar char="•"/>
             </a:pPr>
@@ -12432,7 +12035,338 @@
                 </a:solidFill>
                 <a:latin typeface="Arial"/>
               </a:rPr>
-              <a:t>“Buy every contract” covers all 1,316 games of 2025-26 (it includes luck)</a:t>
+              <a:t>Play-off holdout (87 games): full agent 0 trades; no learning 6 trades, −$74; raw model +$450 with negative CLV (luck)</a:t>
+            </a:r>
+          </a:p>
+        </p:txBody>
+      </p:sp>
+    </p:spTree>
+  </p:cSld>
+  <p:clrMapOvr>
+    <a:masterClrMapping/>
+  </p:clrMapOvr>
+</p:sld>
+</file>
+
+<file path=ppt/slides/slide9.xml><?xml version="1.0" encoding="utf-8"?>
+<p:sld xmlns:a="http://schemas.openxmlformats.org/drawingml/2006/main" xmlns:p="http://schemas.openxmlformats.org/presentationml/2006/main" xmlns:r="http://schemas.openxmlformats.org/officeDocument/2006/relationships">
+  <p:cSld>
+    <p:spTree>
+      <p:nvGrpSpPr>
+        <p:cNvPr id="1" name=""/>
+        <p:cNvGrpSpPr/>
+        <p:nvPr/>
+      </p:nvGrpSpPr>
+      <p:grpSpPr/>
+      <p:sp>
+        <p:nvSpPr>
+          <p:cNvPr id="2" name="Rectangle 1"/>
+          <p:cNvSpPr/>
+          <p:nvPr/>
+        </p:nvSpPr>
+        <p:spPr>
+          <a:xfrm>
+            <a:off x="0" y="0"/>
+            <a:ext cx="12191695" cy="868680"/>
+          </a:xfrm>
+          <a:prstGeom prst="rect">
+            <a:avLst/>
+          </a:prstGeom>
+          <a:solidFill>
+            <a:srgbClr val="1E293B"/>
+          </a:solidFill>
+          <a:ln>
+            <a:noFill/>
+          </a:ln>
+          <a:effectLst/>
+        </p:spPr>
+        <p:style>
+          <a:lnRef idx="1">
+            <a:schemeClr val="accent1"/>
+          </a:lnRef>
+          <a:fillRef idx="3">
+            <a:schemeClr val="accent1"/>
+          </a:fillRef>
+          <a:effectRef idx="2">
+            <a:schemeClr val="accent1"/>
+          </a:effectRef>
+          <a:fontRef idx="minor">
+            <a:schemeClr val="lt1"/>
+          </a:fontRef>
+        </p:style>
+        <p:txBody>
+          <a:bodyPr rtlCol="0" anchor="ctr"/>
+          <a:lstStyle/>
+          <a:p>
+            <a:pPr algn="ctr"/>
+          </a:p>
+        </p:txBody>
+      </p:sp>
+      <p:sp>
+        <p:nvSpPr>
+          <p:cNvPr id="3" name="Rectangle 2"/>
+          <p:cNvSpPr/>
+          <p:nvPr/>
+        </p:nvSpPr>
+        <p:spPr>
+          <a:xfrm>
+            <a:off x="0" y="868680"/>
+            <a:ext cx="12191695" cy="54864"/>
+          </a:xfrm>
+          <a:prstGeom prst="rect">
+            <a:avLst/>
+          </a:prstGeom>
+          <a:solidFill>
+            <a:srgbClr val="EA580C"/>
+          </a:solidFill>
+          <a:ln>
+            <a:noFill/>
+          </a:ln>
+          <a:effectLst/>
+        </p:spPr>
+        <p:style>
+          <a:lnRef idx="1">
+            <a:schemeClr val="accent1"/>
+          </a:lnRef>
+          <a:fillRef idx="3">
+            <a:schemeClr val="accent1"/>
+          </a:fillRef>
+          <a:effectRef idx="2">
+            <a:schemeClr val="accent1"/>
+          </a:effectRef>
+          <a:fontRef idx="minor">
+            <a:schemeClr val="lt1"/>
+          </a:fontRef>
+        </p:style>
+        <p:txBody>
+          <a:bodyPr rtlCol="0" anchor="ctr"/>
+          <a:lstStyle/>
+          <a:p>
+            <a:pPr algn="ctr"/>
+          </a:p>
+        </p:txBody>
+      </p:sp>
+      <p:sp>
+        <p:nvSpPr>
+          <p:cNvPr id="4" name="TextBox 3"/>
+          <p:cNvSpPr txBox="1"/>
+          <p:nvPr/>
+        </p:nvSpPr>
+        <p:spPr>
+          <a:xfrm>
+            <a:off x="457200" y="109728"/>
+            <a:ext cx="11277295" cy="685800"/>
+          </a:xfrm>
+          <a:prstGeom prst="rect">
+            <a:avLst/>
+          </a:prstGeom>
+          <a:noFill/>
+        </p:spPr>
+        <p:txBody>
+          <a:bodyPr wrap="square" anchor="ctr" lIns="73152" rIns="73152" tIns="36576" bIns="36576">
+            <a:spAutoFit/>
+          </a:bodyPr>
+          <a:lstStyle/>
+          <a:p>
+            <a:pPr algn="l">
+              <a:spcAft>
+                <a:spcPts val="0"/>
+              </a:spcAft>
+            </a:pPr>
+            <a:r>
+              <a:rPr sz="3000" b="1" i="0">
+                <a:solidFill>
+                  <a:srgbClr val="FFFFFF"/>
+                </a:solidFill>
+                <a:latin typeface="Arial"/>
+              </a:rPr>
+              <a:t>Long shots: where the data is weaker</a:t>
+            </a:r>
+          </a:p>
+        </p:txBody>
+      </p:sp>
+      <p:sp>
+        <p:nvSpPr>
+          <p:cNvPr id="5" name="TextBox 4"/>
+          <p:cNvSpPr txBox="1"/>
+          <p:nvPr/>
+        </p:nvSpPr>
+        <p:spPr>
+          <a:xfrm>
+            <a:off x="457200" y="6446520"/>
+            <a:ext cx="9144000" cy="320040"/>
+          </a:xfrm>
+          <a:prstGeom prst="rect">
+            <a:avLst/>
+          </a:prstGeom>
+          <a:noFill/>
+        </p:spPr>
+        <p:txBody>
+          <a:bodyPr wrap="square" anchor="t" lIns="73152" rIns="73152" tIns="36576" bIns="36576">
+            <a:spAutoFit/>
+          </a:bodyPr>
+          <a:lstStyle/>
+          <a:p>
+            <a:pPr algn="l">
+              <a:spcAft>
+                <a:spcPts val="0"/>
+              </a:spcAft>
+            </a:pPr>
+            <a:r>
+              <a:rPr sz="1100" b="0" i="0">
+                <a:solidFill>
+                  <a:srgbClr val="64748B"/>
+                </a:solidFill>
+                <a:latin typeface="Arial"/>
+              </a:rPr>
+              <a:t>DASC7606C Group 12 · Can a consumer beat a sports prediction market?</a:t>
+            </a:r>
+          </a:p>
+        </p:txBody>
+      </p:sp>
+      <p:sp>
+        <p:nvSpPr>
+          <p:cNvPr id="6" name="TextBox 5"/>
+          <p:cNvSpPr txBox="1"/>
+          <p:nvPr/>
+        </p:nvSpPr>
+        <p:spPr>
+          <a:xfrm>
+            <a:off x="10820095" y="6446520"/>
+            <a:ext cx="914400" cy="320040"/>
+          </a:xfrm>
+          <a:prstGeom prst="rect">
+            <a:avLst/>
+          </a:prstGeom>
+          <a:noFill/>
+        </p:spPr>
+        <p:txBody>
+          <a:bodyPr wrap="square" anchor="t" lIns="73152" rIns="73152" tIns="36576" bIns="36576">
+            <a:spAutoFit/>
+          </a:bodyPr>
+          <a:lstStyle/>
+          <a:p>
+            <a:pPr algn="r">
+              <a:spcAft>
+                <a:spcPts val="0"/>
+              </a:spcAft>
+            </a:pPr>
+            <a:r>
+              <a:rPr sz="1100" b="0" i="0">
+                <a:solidFill>
+                  <a:srgbClr val="64748B"/>
+                </a:solidFill>
+                <a:latin typeface="Arial"/>
+              </a:rPr>
+              <a:t>9</a:t>
+            </a:r>
+          </a:p>
+        </p:txBody>
+      </p:sp>
+      <p:pic>
+        <p:nvPicPr>
+          <p:cNvPr id="7" name="Picture 6" descr="longshot_calibration.png"/>
+          <p:cNvPicPr>
+            <a:picLocks noChangeAspect="1"/>
+          </p:cNvPicPr>
+          <p:nvPr/>
+        </p:nvPicPr>
+        <p:blipFill>
+          <a:blip r:embed="rId3"/>
+          <a:stretch>
+            <a:fillRect/>
+          </a:stretch>
+        </p:blipFill>
+        <p:spPr>
+          <a:xfrm>
+            <a:off x="895197" y="1097280"/>
+            <a:ext cx="10401299" cy="4160520"/>
+          </a:xfrm>
+          <a:prstGeom prst="rect">
+            <a:avLst/>
+          </a:prstGeom>
+        </p:spPr>
+      </p:pic>
+      <p:sp>
+        <p:nvSpPr>
+          <p:cNvPr id="8" name="TextBox 7"/>
+          <p:cNvSpPr txBox="1"/>
+          <p:nvPr/>
+        </p:nvSpPr>
+        <p:spPr>
+          <a:xfrm>
+            <a:off x="457200" y="5349240"/>
+            <a:ext cx="11277295" cy="1005840"/>
+          </a:xfrm>
+          <a:prstGeom prst="rect">
+            <a:avLst/>
+          </a:prstGeom>
+          <a:noFill/>
+        </p:spPr>
+        <p:txBody>
+          <a:bodyPr wrap="square" anchor="t" lIns="73152" rIns="73152" tIns="36576" bIns="36576">
+            <a:spAutoFit/>
+          </a:bodyPr>
+          <a:lstStyle/>
+          <a:p>
+            <a:pPr algn="l" marL="292608" indent="-256032">
+              <a:spcAft>
+                <a:spcPts val="400"/>
+              </a:spcAft>
+              <a:buChar char="•"/>
+            </a:pPr>
+            <a:r>
+              <a:rPr sz="1800" b="1" i="0">
+                <a:solidFill>
+                  <a:srgbClr val="0F172A"/>
+                </a:solidFill>
+                <a:latin typeface="Arial"/>
+              </a:rPr>
+              <a:t>Not clearly supported:</a:t>
+            </a:r>
+            <a:r>
+              <a:rPr sz="1800" b="0" i="0">
+                <a:solidFill>
+                  <a:srgbClr val="0F172A"/>
+                </a:solidFill>
+                <a:latin typeface="Arial"/>
+              </a:rPr>
+              <a:t> prices are calibrated; only 0–10¢ hints (1 win in 66 vs 7.4% implied, z = −1.8)</a:t>
+            </a:r>
+          </a:p>
+          <a:p>
+            <a:pPr algn="l" marL="292608" indent="-256032">
+              <a:spcAft>
+                <a:spcPts val="400"/>
+              </a:spcAft>
+              <a:buChar char="•"/>
+            </a:pPr>
+            <a:r>
+              <a:rPr sz="1800" b="0" i="0">
+                <a:solidFill>
+                  <a:srgbClr val="0F172A"/>
+                </a:solidFill>
+                <a:latin typeface="Arial"/>
+              </a:rPr>
+              <a:t>Buying at ask + fee: long shots ≤ 25¢ </a:t>
+            </a:r>
+            <a:r>
+              <a:rPr sz="1800" b="1" i="0">
+                <a:solidFill>
+                  <a:srgbClr val="0F172A"/>
+                </a:solidFill>
+                <a:latin typeface="Arial"/>
+              </a:rPr>
+              <a:t>−13.4%</a:t>
+            </a:r>
+            <a:r>
+              <a:rPr sz="1800" b="0" i="0">
+                <a:solidFill>
+                  <a:srgbClr val="0F172A"/>
+                </a:solidFill>
+                <a:latin typeface="Arial"/>
+              </a:rPr>
+              <a:t>, heavy favourites ≥ 75¢ −2.2%</a:t>
             </a:r>
           </a:p>
         </p:txBody>

--- a/presentation/nba_agent_deck.pptx
+++ b/presentation/nba_agent_deck.pptx
@@ -19,7 +19,6 @@
     <p:sldId id="267" r:id="rId19"/>
     <p:sldId id="268" r:id="rId20"/>
     <p:sldId id="269" r:id="rId21"/>
-    <p:sldId id="270" r:id="rId22"/>
   </p:sldIdLst>
   <p:sldSz cx="12191695" cy="6858000" type="screen4x3"/>
   <p:notesSz cx="6858000" cy="9144000"/>
@@ -516,7 +515,7 @@
           <a:lstStyle/>
           <a:p>
             <a:r>
-              <a:t>Good morning, we are Group 12. Many people believe that if they follow NBA injury news closely, they can beat sports prediction markets. We took that belief seriously and built the best agent we could. What we found is that the game is structurally tilted against the consumer, so our product protects and educates rather than encourages betting.</a:t>
+              <a:t>Good morning, we are Group 12. Our project starts from a consumer problem: sports betting and prediction markets are now everywhere, people want to understand them, the markets are structurally tilted against them, and betting harms well-being. We built an AI agent to test how tilted the game is, and turned what we learned into a product that educates and protects.</a:t>
             </a:r>
           </a:p>
         </p:txBody>
@@ -586,7 +585,7 @@
           <a:lstStyle/>
           <a:p>
             <a:r>
-              <a:t>Quick context, and this is general industry knowledge, not our measurement. Professional traders and market makers usually have faster data, automated pricing and, on many venues, special fee or liquidity programmes. A retail user reads public news and pays the full taker price. We are not saying anyone breaks rules; it is consistent with the speed and cost results we measured.</a:t>
+              <a:t>So, back to the problem: the product educates and protects instead of encouraging bets. The agent passes by default: it declined about 90% of decision points, and on the play-off holdout it did not trade at all. Retail briefs show the bid and ask next to our estimate, and when there is no order they say why. The Coach shows the full break-even after spread and fee. Risk limits and banned words are code the LLM cannot override; all 9 / 9 planted violations were blocked. Even the learned rules ended up protective.</a:t>
             </a:r>
           </a:p>
         </p:txBody>
@@ -656,7 +655,7 @@
           <a:lstStyle/>
           <a:p>
             <a:r>
-              <a:t>So the product is built around protection. The agent passes by default: it declined about 90% of decision points, and on the play-off holdout it did not trade at all. Retail briefs show the bid and ask next to our estimate, and when there is no order they say why. The Coach shows the full break-even after spread and fee. Risk limits and banned words are code the LLM cannot override; all 9 / 9 planted violations were blocked. Even the learned rules ended up protective.</a:t>
+              <a:t>The Coach turns this evidence into lessons. At a chosen moment it explains the game using only what was public and shows the break-even after spread and fee. Lesson cards appear when relevant: price is a probability, costs move your break-even, news may be priced in, long shots look cheap. Users make a paper call and see the close and what the agent did. Paper money only.</a:t>
             </a:r>
           </a:p>
         </p:txBody>
@@ -726,7 +725,7 @@
           <a:lstStyle/>
           <a:p>
             <a:r>
-              <a:t>The Coach turns this evidence into lessons. At a chosen moment it explains the game using only what was public and shows the break-even after spread and fee. Lesson cards appear when relevant: price is a probability, costs move your break-even, news may be priced in, long shots look cheap. Users make a paper call and see the close and what the agent did. Paper money only.</a:t>
+              <a:t>To be precise: unfair here means structural disadvantages, namely costs, speed and expertise. It does not mean manipulation or fraud, and we make no accusation against Kalshi. One disclosure: we designed the market anchor and the reviewer after seeing the first February-to-April results, so that window is not a clean holdout. That is why the walk-forward season and the untouched play-off holdout are our headline tests. Other caveats: one season, game-winner markets only, a proxy news timestamp, and long-shot bias was not clearly supported in our data. The well-being numbers on the problem slide are published research, not our measurement.</a:t>
             </a:r>
           </a:p>
         </p:txBody>
@@ -796,7 +795,7 @@
           <a:lstStyle/>
           <a:p>
             <a:r>
-              <a:t>To be precise: unfair here means structural disadvantages, namely costs, speed and expertise. It does not mean manipulation or fraud, and we make no accusation against Kalshi. One disclosure: we designed the market anchor and the reviewer after seeing the first February-to-April results, so that window is not a clean holdout. That is why the walk-forward season and the untouched play-off holdout are our headline tests. Other caveats: one season, game-winner markets only, and a proxy news timestamp.</a:t>
+              <a:t>Now the demo, focused on protection. On the replayed night, watch the agent see the news, compare its estimate with the bid and ask, and usually decline with a reason. In the Coach, I'll make a paper call and compare it with the close. Then a quick look at the learned rules and planted violations being blocked. If anything fails, we have a backup recording.</a:t>
             </a:r>
           </a:p>
         </p:txBody>
@@ -866,77 +865,7 @@
           <a:lstStyle/>
           <a:p>
             <a:r>
-              <a:t>Now the demo, focused on protection. On the replayed night, watch the agent see the news, compare its estimate with the bid and ask, and usually decline with a reason. In the Coach, I'll make a paper call and compare it with the close. Then a quick look at the learned rules and planted violations being blocked. If anything fails, we have a backup recording.</a:t>
-            </a:r>
-          </a:p>
-        </p:txBody>
-      </p:sp>
-      <p:sp>
-        <p:nvSpPr>
-          <p:cNvPr id="4" name="Slide Number Placeholder 3"/>
-          <p:cNvSpPr>
-            <a:spLocks noGrp="1"/>
-          </p:cNvSpPr>
-          <p:nvPr>
-            <p:ph type="sldNum" idx="5" sz="quarter"/>
-          </p:nvPr>
-        </p:nvSpPr>
-        <p:spPr/>
-      </p:sp>
-    </p:spTree>
-  </p:cSld>
-  <p:clrMapOvr>
-    <a:masterClrMapping/>
-  </p:clrMapOvr>
-</p:notes>
-</file>
-
-<file path=ppt/notesSlides/notesSlide15.xml><?xml version="1.0" encoding="utf-8"?>
-<p:notes xmlns:a="http://schemas.openxmlformats.org/drawingml/2006/main" xmlns:p="http://schemas.openxmlformats.org/presentationml/2006/main" xmlns:r="http://schemas.openxmlformats.org/officeDocument/2006/relationships">
-  <p:cSld>
-    <p:spTree>
-      <p:nvGrpSpPr>
-        <p:cNvPr id="1" name=""/>
-        <p:cNvGrpSpPr/>
-        <p:nvPr/>
-      </p:nvGrpSpPr>
-      <p:grpSpPr>
-        <a:xfrm>
-          <a:off x="0" y="0"/>
-          <a:ext cx="0" cy="0"/>
-          <a:chOff x="0" y="0"/>
-          <a:chExt cx="0" cy="0"/>
-        </a:xfrm>
-      </p:grpSpPr>
-      <p:sp>
-        <p:nvSpPr>
-          <p:cNvPr id="2" name="Slide Image Placeholder 1"/>
-          <p:cNvSpPr>
-            <a:spLocks noGrp="1"/>
-          </p:cNvSpPr>
-          <p:nvPr>
-            <p:ph type="sldImg" idx="2"/>
-          </p:nvPr>
-        </p:nvSpPr>
-        <p:spPr/>
-      </p:sp>
-      <p:sp>
-        <p:nvSpPr>
-          <p:cNvPr id="3" name="Notes Placeholder 2"/>
-          <p:cNvSpPr>
-            <a:spLocks noGrp="1"/>
-          </p:cNvSpPr>
-          <p:nvPr>
-            <p:ph type="body" idx="3" sz="quarter"/>
-          </p:nvPr>
-        </p:nvSpPr>
-        <p:spPr/>
-        <p:txBody>
-          <a:bodyPr/>
-          <a:lstStyle/>
-          <a:p>
-            <a:r>
-              <a:t>Our recommendations follow from the evidence. Before any order, show the all-in cost and the break-even probability, not just the price. Warn by default when news is likely already priced in. Put education, like our Coach, in front of the first trade, with sensible default limits. For our own work: enforce a daily-loss stop, use timestamped injury reports, and extend to player-prop markets. Thank you, we are happy to take questions.</a:t>
+              <a:t>Our recommendations follow from the evidence. Before any order, show the all-in cost and the break-even probability, not just the price. Warn by default when news is likely already priced in. Put education, like our Coach, in front of the first trade, with sensible default limits, and, as the Lancet Commission argues, treat betting harm as a public-health issue. For our own work: enforce a daily-loss stop, use timestamped injury reports, and extend to player-prop markets. Thank you, we are happy to take questions.</a:t>
             </a:r>
           </a:p>
         </p:txBody>
@@ -1006,7 +935,7 @@
           <a:lstStyle/>
           <a:p>
             <a:r>
-              <a:t>Retail users see an injury headline and think the price is wrong. So we gave an agent every advantage a careful consumer could have: public news, trained models, an LLM-capable agent loop, risk controls, and rules it learns from its own mistakes, and we replayed a full season of real Kalshi prices. We then tested the results with confidence intervals. The short answer: no edge, and not trading wins.</a:t>
+              <a:t>Three parts. First, consumers want to learn: since a 2018 US Supreme Court ruling, 38 US states have legalised sports betting, and the Lancet Public Health Commission estimates 46% of adults worldwide gambled in the past year, yet few users understand how prices, fees and spreads work. Second, the markets are structurally unfair, which is what we measured: about 5.0% cost per trade, 91% of the price move before the public news, the market beats our model, and never trading wins. Third, external research shows betting harms well-being: the Commission estimates 80M adults have gambling disorder or problem gambling; Hollenbeck, Larsen and Proserpio find legal online betting lowers credit scores by 2.75 points and raises bankruptcies by about 10%; Baker and co-authors find each dollar of online betting cuts investment by about $0.99. References: Wardle H. et al., The Lancet Public Health Commission on gambling, Lancet Public Health 2024; 9: e950–94. Hollenbeck B., Larsen P., Proserpio D., The Financial Consequences of Legalized Sports Gambling, SSRN 4903302, 2024, revised 2025. Baker S.R., Balthrop J., Johnson M.J., Kotter J.D., Pisciotta K., Gambling Away Stability: Sports Betting's Impact on Vulnerable Households, NBER Working Paper 33108, 2024.</a:t>
             </a:r>
           </a:p>
         </p:txBody>
@@ -1076,7 +1005,7 @@
           <a:lstStyle/>
           <a:p>
             <a:r>
-              <a:t>Briefly, the system. Public data on the left; models trained once; a replay that walks the season day by day and only shows the agent what was public at that moment; then the agent and its outputs. Because the replay uses recorded prices, every trade pays the real ask and the real Kalshi fee, which is what lets us measure what a consumer would actually face.</a:t>
+              <a:t>So our research question: can a consumer, even one armed with an AI agent and public news, beat the market? We built the strongest consumer we could: public news, trained models including a neural net trained on the market's own moves, an LLM-capable agent loop, risk limits and rules learned through a backtest gate, graded on a full season of real Kalshi prices. The answer, tested with confidence intervals, is no: never trading wins. So the product's job is to educate and protect.</a:t>
             </a:r>
           </a:p>
         </p:txBody>
@@ -1146,7 +1075,7 @@
           <a:lstStyle/>
           <a:p>
             <a:r>
-              <a:t>First, costs. One hour before tip a $20 order pays half the bid-ask spread plus the Kalshi fee. On average that is 1.92 cents per contract, 5.0% of the price, and 9–14% on cheap contracts. You must beat the price by that much just to break even. On the right, our best agent would have made +$36 at the mid but lost −$32 after costs. Even being very selective, 74 trades out of 771 decision points, only 27 (36%) beat or matched the closing price.</a:t>
+              <a:t>Briefly, the system. Public data on the left; models trained once; a replay that walks the season day by day and only shows the agent what was public at that moment; then the agent and its outputs. Because the replay uses recorded prices, every trade pays the real ask and the real Kalshi fee, which is what lets us measure what a consumer would actually face.</a:t>
             </a:r>
           </a:p>
         </p:txBody>
@@ -1216,7 +1145,7 @@
           <a:lstStyle/>
           <a:p>
             <a:r>
-              <a:t>Second, speed. On the 193 test games where the inactive list changed our win model by at least a point, the price had already moved 1.80 points in the news direction before the list was public, and only 0.18 after. About 91% of the move happened before a retail user reading the list could act.</a:t>
+              <a:t>First, costs. One hour before tip a $20 order pays half the bid-ask spread plus the Kalshi fee. On average that is 1.92 cents per contract, 5.0% of the price, and 9–14% on cheap contracts. You must beat the price by that much just to break even. On the right, our best agent would have made +$36 at the mid but lost −$32 after costs. Even being very selective, 74 trades out of 771 decision points, only 27 (36%) beat or matched the closing price.</a:t>
             </a:r>
           </a:p>
         </p:txBody>
@@ -1286,7 +1215,7 @@
           <a:lstStyle/>
           <a:p>
             <a:r>
-              <a:t>Third, expertise. On 501 test games our win model's Brier score one hour before tip is 0.186, against 0.164 for the market at the same moment; lower is better. When they disagree by more than five points, the market is right in both directions.</a:t>
+              <a:t>Second, speed. On the 193 test games where the inactive list changed our win model by at least a point, the price had already moved 1.80 points in the news direction before the list was public, and only 0.18 after. About 91% of the move happened before a retail user reading the list could act.</a:t>
             </a:r>
           </a:p>
         </p:txBody>
@@ -1356,7 +1285,7 @@
           <a:lstStyle/>
           <a:p>
             <a:r>
-              <a:t>Fourth, we trained M6, a neural network whose only job is to predict how the price moves between our decision time and tip-off, using the market's own past reactions. It cannot beat the simplest guess, that the price will not move: 0.867 cents average error against 0.833, and R squared about zero on both test and holdout. After the inactive list the price moves only about 2.5% of what our win model implies. The M6 agent therefore makes no trades; forced to trade, it loses −$652. The price already contains the public information; what is left for the consumer is the cost.</a:t>
+              <a:t>Third, expertise. On 501 test games our win model's Brier score one hour before tip is 0.186, against 0.164 for the market at the same moment; lower is better. When they disagree by more than five points, the market is right in both directions.</a:t>
             </a:r>
           </a:p>
         </p:txBody>
@@ -1426,7 +1355,7 @@
           <a:lstStyle/>
           <a:p>
             <a:r>
-              <a:t>Finally, the honest test. We re-ran the whole season walk-forward, retraining the win model every month, with day-clustered bootstrap confidence intervals. Mean closing-line value is below zero for every setup, and every interval lies entirely below zero. The full agent's −$25 is indistinguishable from never trading, p 0.53; the raw model loses −$2,475. The market anchor is a real improvement, +$2,450 with p 0.002, but learning only means trading less. On the play-off holdout the full agent made no trades at all.</a:t>
+              <a:t>Fourth, we trained M6, a neural network whose only job is to predict how the price moves between our decision time and tip-off, using the market's own past reactions. It cannot beat the simplest guess, that the price will not move: 0.867 cents average error against 0.833, and R squared about zero on both test and holdout. After the inactive list the price moves only about 2.5% of what our win model implies. The M6 agent therefore makes no trades; forced to trade, it loses −$652. The price already contains the public information; what is left for the consumer is the cost.</a:t>
             </a:r>
           </a:p>
         </p:txBody>
@@ -1496,7 +1425,7 @@
           <a:lstStyle/>
           <a:p>
             <a:r>
-              <a:t>We also checked for long-shot bias. Honestly, our data does not clearly show it: prices are well calibrated, and only the cheapest bucket hints at it. What does show is that long shots lose more per dollar, −13.4% against −2.2% for heavy favourites, because costs are a bigger share of a cheap price.</a:t>
+              <a:t>Finally, the honest test. We re-ran the whole season walk-forward, retraining the win model every month, with day-clustered bootstrap confidence intervals. Mean closing-line value is below zero for every setup, and every interval lies entirely below zero. The full agent's −$25 is indistinguishable from never trading, p 0.53; the raw model loses −$2,475. The market anchor is a real improvement, +$2,450 with p 0.002, but learning only means trading less. On the play-off holdout the full agent made no trades at all.</a:t>
             </a:r>
           </a:p>
         </p:txBody>
@@ -4624,7 +4553,7 @@
                 </a:solidFill>
                 <a:latin typeface="Arial"/>
               </a:rPr>
-              <a:t>Can a consumer beat a sports prediction market?</a:t>
+              <a:t>Betting markets are tilted against consumers</a:t>
             </a:r>
           </a:p>
         </p:txBody>
@@ -4657,13 +4586,13 @@
               </a:spcAft>
             </a:pPr>
             <a:r>
-              <a:rPr sz="2200" b="0" i="0">
+              <a:rPr sz="2400" b="0" i="0">
                 <a:solidFill>
                   <a:srgbClr val="CBD5E1"/>
                 </a:solidFill>
                 <a:latin typeface="Arial"/>
               </a:rPr>
-              <a:t>What a serious NBA trading agent taught us about structural unfairness, and a product that protects and educates instead</a:t>
+              <a:t>An AI agent that tests it on a full NBA season, and a product that teaches it</a:t>
             </a:r>
           </a:p>
         </p:txBody>
@@ -4879,7 +4808,7 @@
                 </a:solidFill>
                 <a:latin typeface="Arial"/>
               </a:rPr>
-              <a:t>Context: who sits on the other side?</a:t>
+              <a:t>Our product: educate and protect the consumer</a:t>
             </a:r>
           </a:p>
         </p:txBody>
@@ -4918,7 +4847,7 @@
                 </a:solidFill>
                 <a:latin typeface="Arial"/>
               </a:rPr>
-              <a:t>DASC7606C Group 12 · Can a consumer beat a sports prediction market?</a:t>
+              <a:t>DASC7606C Group 12 · Betting markets are tilted against consumers</a:t>
             </a:r>
           </a:p>
         </p:txBody>
@@ -4962,52 +4891,30 @@
           </a:p>
         </p:txBody>
       </p:sp>
-      <p:sp>
-        <p:nvSpPr>
-          <p:cNvPr id="7" name="Rounded Rectangle 6"/>
-          <p:cNvSpPr/>
-          <p:nvPr/>
-        </p:nvSpPr>
-        <p:spPr>
-          <a:xfrm>
-            <a:off x="457200" y="1234439"/>
-            <a:ext cx="11277295" cy="548640"/>
-          </a:xfrm>
-          <a:prstGeom prst="roundRect">
-            <a:avLst>
-              <a:gd name="adj" fmla="val 12000"/>
-            </a:avLst>
-          </a:prstGeom>
-          <a:solidFill>
-            <a:srgbClr val="FEE2E2"/>
-          </a:solidFill>
-          <a:ln>
-            <a:noFill/>
-          </a:ln>
-          <a:effectLst/>
-        </p:spPr>
-        <p:style>
-          <a:lnRef idx="1">
-            <a:schemeClr val="accent1"/>
-          </a:lnRef>
-          <a:fillRef idx="3">
-            <a:schemeClr val="accent1"/>
-          </a:fillRef>
-          <a:effectRef idx="2">
-            <a:schemeClr val="accent1"/>
-          </a:effectRef>
-          <a:fontRef idx="minor">
-            <a:schemeClr val="lt1"/>
-          </a:fontRef>
-        </p:style>
-        <p:txBody>
-          <a:bodyPr rtlCol="0" anchor="ctr"/>
-          <a:lstStyle/>
-          <a:p>
-            <a:pPr algn="ctr"/>
-          </a:p>
-        </p:txBody>
-      </p:sp>
+      <p:pic>
+        <p:nvPicPr>
+          <p:cNvPr id="7" name="Picture 6" descr="agent_workflow.png"/>
+          <p:cNvPicPr>
+            <a:picLocks noChangeAspect="1"/>
+          </p:cNvPicPr>
+          <p:nvPr/>
+        </p:nvPicPr>
+        <p:blipFill>
+          <a:blip r:embed="rId3"/>
+          <a:stretch>
+            <a:fillRect/>
+          </a:stretch>
+        </p:blipFill>
+        <p:spPr>
+          <a:xfrm>
+            <a:off x="457200" y="1853719"/>
+            <a:ext cx="6766560" cy="3744920"/>
+          </a:xfrm>
+          <a:prstGeom prst="rect">
+            <a:avLst/>
+          </a:prstGeom>
+        </p:spPr>
+      </p:pic>
       <p:sp>
         <p:nvSpPr>
           <p:cNvPr id="8" name="TextBox 7"/>
@@ -5016,139 +4923,8 @@
         </p:nvSpPr>
         <p:spPr>
           <a:xfrm>
-            <a:off x="548640" y="1234439"/>
-            <a:ext cx="11094415" cy="548640"/>
-          </a:xfrm>
-          <a:prstGeom prst="rect">
-            <a:avLst/>
-          </a:prstGeom>
-          <a:noFill/>
-        </p:spPr>
-        <p:txBody>
-          <a:bodyPr wrap="square" anchor="ctr" lIns="73152" rIns="73152" tIns="36576" bIns="36576">
-            <a:spAutoFit/>
-          </a:bodyPr>
-          <a:lstStyle/>
-          <a:p>
-            <a:pPr algn="l">
-              <a:spcAft>
-                <a:spcPts val="0"/>
-              </a:spcAft>
-            </a:pPr>
-            <a:r>
-              <a:rPr sz="2000" b="0" i="0">
-                <a:solidFill>
-                  <a:srgbClr val="DC2626"/>
-                </a:solidFill>
-                <a:latin typeface="Arial"/>
-              </a:rPr>
-              <a:t>General industry knowledge: NOT measured in this project</a:t>
-            </a:r>
-          </a:p>
-        </p:txBody>
-      </p:sp>
-      <p:sp>
-        <p:nvSpPr>
-          <p:cNvPr id="9" name="Rounded Rectangle 8"/>
-          <p:cNvSpPr/>
-          <p:nvPr/>
-        </p:nvSpPr>
-        <p:spPr>
-          <a:xfrm>
-            <a:off x="457200" y="2011680"/>
-            <a:ext cx="5440680" cy="3291840"/>
-          </a:xfrm>
-          <a:prstGeom prst="roundRect">
-            <a:avLst>
-              <a:gd name="adj" fmla="val 6000"/>
-            </a:avLst>
-          </a:prstGeom>
-          <a:solidFill>
-            <a:srgbClr val="FFFFFF"/>
-          </a:solidFill>
-          <a:ln w="15875">
-            <a:solidFill>
-              <a:srgbClr val="1E293B"/>
-            </a:solidFill>
-          </a:ln>
-          <a:effectLst/>
-        </p:spPr>
-        <p:style>
-          <a:lnRef idx="1">
-            <a:schemeClr val="accent1"/>
-          </a:lnRef>
-          <a:fillRef idx="3">
-            <a:schemeClr val="accent1"/>
-          </a:fillRef>
-          <a:effectRef idx="2">
-            <a:schemeClr val="accent1"/>
-          </a:effectRef>
-          <a:fontRef idx="minor">
-            <a:schemeClr val="lt1"/>
-          </a:fontRef>
-        </p:style>
-        <p:txBody>
-          <a:bodyPr rtlCol="0" anchor="ctr"/>
-          <a:lstStyle/>
-          <a:p>
-            <a:pPr algn="ctr"/>
-          </a:p>
-        </p:txBody>
-      </p:sp>
-      <p:sp>
-        <p:nvSpPr>
-          <p:cNvPr id="10" name="Rectangle 9"/>
-          <p:cNvSpPr/>
-          <p:nvPr/>
-        </p:nvSpPr>
-        <p:spPr>
-          <a:xfrm>
-            <a:off x="457200" y="2011680"/>
-            <a:ext cx="109728" cy="3291840"/>
-          </a:xfrm>
-          <a:prstGeom prst="rect">
-            <a:avLst/>
-          </a:prstGeom>
-          <a:solidFill>
-            <a:srgbClr val="1E293B"/>
-          </a:solidFill>
-          <a:ln>
-            <a:noFill/>
-          </a:ln>
-          <a:effectLst/>
-        </p:spPr>
-        <p:style>
-          <a:lnRef idx="1">
-            <a:schemeClr val="accent1"/>
-          </a:lnRef>
-          <a:fillRef idx="3">
-            <a:schemeClr val="accent1"/>
-          </a:fillRef>
-          <a:effectRef idx="2">
-            <a:schemeClr val="accent1"/>
-          </a:effectRef>
-          <a:fontRef idx="minor">
-            <a:schemeClr val="lt1"/>
-          </a:fontRef>
-        </p:style>
-        <p:txBody>
-          <a:bodyPr rtlCol="0" anchor="ctr"/>
-          <a:lstStyle/>
-          <a:p>
-            <a:pPr algn="ctr"/>
-          </a:p>
-        </p:txBody>
-      </p:sp>
-      <p:sp>
-        <p:nvSpPr>
-          <p:cNvPr id="11" name="TextBox 10"/>
-          <p:cNvSpPr txBox="1"/>
-          <p:nvPr/>
-        </p:nvSpPr>
-        <p:spPr>
-          <a:xfrm>
-            <a:off x="640080" y="2084832"/>
-            <a:ext cx="5166360" cy="457200"/>
+            <a:off x="7406640" y="1234439"/>
+            <a:ext cx="4327855" cy="5120640"/>
           </a:xfrm>
           <a:prstGeom prst="rect">
             <a:avLst/>
@@ -5161,298 +4937,159 @@
           </a:bodyPr>
           <a:lstStyle/>
           <a:p>
-            <a:pPr algn="l">
-              <a:spcAft>
-                <a:spcPts val="0"/>
-              </a:spcAft>
-            </a:pPr>
-            <a:r>
-              <a:rPr sz="2000" b="1" i="0">
-                <a:solidFill>
-                  <a:srgbClr val="1E293B"/>
-                </a:solidFill>
-                <a:latin typeface="Arial"/>
-              </a:rPr>
-              <a:t>Professionals / market makers</a:t>
-            </a:r>
-          </a:p>
-        </p:txBody>
-      </p:sp>
-      <p:sp>
-        <p:nvSpPr>
-          <p:cNvPr id="12" name="TextBox 11"/>
-          <p:cNvSpPr txBox="1"/>
-          <p:nvPr/>
-        </p:nvSpPr>
-        <p:spPr>
-          <a:xfrm>
-            <a:off x="640080" y="2542032"/>
-            <a:ext cx="5166360" cy="2688336"/>
-          </a:xfrm>
-          <a:prstGeom prst="rect">
-            <a:avLst/>
-          </a:prstGeom>
-          <a:noFill/>
-        </p:spPr>
-        <p:txBody>
-          <a:bodyPr wrap="square" anchor="t" lIns="73152" rIns="73152" tIns="36576" bIns="36576">
-            <a:spAutoFit/>
-          </a:bodyPr>
-          <a:lstStyle/>
-          <a:p>
             <a:pPr algn="l" marL="292608" indent="-256032">
               <a:spcAft>
-                <a:spcPts val="600"/>
+                <a:spcPts val="800"/>
               </a:spcAft>
               <a:buChar char="•"/>
             </a:pPr>
             <a:r>
+              <a:rPr sz="1800" b="1" i="0">
+                <a:solidFill>
+                  <a:srgbClr val="0F172A"/>
+                </a:solidFill>
+                <a:latin typeface="Arial"/>
+              </a:rPr>
+              <a:t>Pass by default:</a:t>
+            </a:r>
+            <a:r>
               <a:rPr sz="1800" b="0" i="0">
                 <a:solidFill>
                   <a:srgbClr val="0F172A"/>
                 </a:solidFill>
                 <a:latin typeface="Arial"/>
               </a:rPr>
-              <a:t>Fast data feeds and automated pricing</a:t>
+              <a:t> 90% of decision points → no trade</a:t>
             </a:r>
           </a:p>
           <a:p>
             <a:pPr algn="l" marL="292608" indent="-256032">
               <a:spcAft>
-                <a:spcPts val="600"/>
+                <a:spcPts val="800"/>
               </a:spcAft>
               <a:buChar char="•"/>
             </a:pPr>
             <a:r>
+              <a:rPr sz="1800" b="1" i="0">
+                <a:solidFill>
+                  <a:srgbClr val="0F172A"/>
+                </a:solidFill>
+                <a:latin typeface="Arial"/>
+              </a:rPr>
+              <a:t>No-order reason:</a:t>
+            </a:r>
+            <a:r>
               <a:rPr sz="1800" b="0" i="0">
                 <a:solidFill>
                   <a:srgbClr val="0F172A"/>
                 </a:solidFill>
                 <a:latin typeface="Arial"/>
               </a:rPr>
-              <a:t>Specialist models, staff and capital</a:t>
+              <a:t> “gap after fees too small or the price already moved”</a:t>
             </a:r>
           </a:p>
           <a:p>
             <a:pPr algn="l" marL="292608" indent="-256032">
               <a:spcAft>
-                <a:spcPts val="600"/>
+                <a:spcPts val="800"/>
               </a:spcAft>
               <a:buChar char="•"/>
             </a:pPr>
             <a:r>
+              <a:rPr sz="1800" b="1" i="0">
+                <a:solidFill>
+                  <a:srgbClr val="0F172A"/>
+                </a:solidFill>
+                <a:latin typeface="Arial"/>
+              </a:rPr>
+              <a:t>Costs shown:</a:t>
+            </a:r>
+            <a:r>
               <a:rPr sz="1800" b="0" i="0">
                 <a:solidFill>
                   <a:srgbClr val="0F172A"/>
                 </a:solidFill>
                 <a:latin typeface="Arial"/>
               </a:rPr>
-              <a:t>On many venues, maker fee or liquidity programmes</a:t>
-            </a:r>
-          </a:p>
-        </p:txBody>
-      </p:sp>
-      <p:sp>
-        <p:nvSpPr>
-          <p:cNvPr id="13" name="Rounded Rectangle 12"/>
-          <p:cNvSpPr/>
-          <p:nvPr/>
-        </p:nvSpPr>
-        <p:spPr>
-          <a:xfrm>
-            <a:off x="6291072" y="2011680"/>
-            <a:ext cx="5443423" cy="3291840"/>
-          </a:xfrm>
-          <a:prstGeom prst="roundRect">
-            <a:avLst>
-              <a:gd name="adj" fmla="val 6000"/>
-            </a:avLst>
-          </a:prstGeom>
-          <a:solidFill>
-            <a:srgbClr val="FFFFFF"/>
-          </a:solidFill>
-          <a:ln w="15875">
-            <a:solidFill>
-              <a:srgbClr val="EA580C"/>
-            </a:solidFill>
-          </a:ln>
-          <a:effectLst/>
-        </p:spPr>
-        <p:style>
-          <a:lnRef idx="1">
-            <a:schemeClr val="accent1"/>
-          </a:lnRef>
-          <a:fillRef idx="3">
-            <a:schemeClr val="accent1"/>
-          </a:fillRef>
-          <a:effectRef idx="2">
-            <a:schemeClr val="accent1"/>
-          </a:effectRef>
-          <a:fontRef idx="minor">
-            <a:schemeClr val="lt1"/>
-          </a:fontRef>
-        </p:style>
-        <p:txBody>
-          <a:bodyPr rtlCol="0" anchor="ctr"/>
-          <a:lstStyle/>
-          <a:p>
-            <a:pPr algn="ctr"/>
-          </a:p>
-        </p:txBody>
-      </p:sp>
-      <p:sp>
-        <p:nvSpPr>
-          <p:cNvPr id="14" name="Rectangle 13"/>
-          <p:cNvSpPr/>
-          <p:nvPr/>
-        </p:nvSpPr>
-        <p:spPr>
-          <a:xfrm>
-            <a:off x="6291072" y="2011680"/>
-            <a:ext cx="109728" cy="3291840"/>
-          </a:xfrm>
-          <a:prstGeom prst="rect">
-            <a:avLst/>
-          </a:prstGeom>
-          <a:solidFill>
-            <a:srgbClr val="EA580C"/>
-          </a:solidFill>
-          <a:ln>
-            <a:noFill/>
-          </a:ln>
-          <a:effectLst/>
-        </p:spPr>
-        <p:style>
-          <a:lnRef idx="1">
-            <a:schemeClr val="accent1"/>
-          </a:lnRef>
-          <a:fillRef idx="3">
-            <a:schemeClr val="accent1"/>
-          </a:fillRef>
-          <a:effectRef idx="2">
-            <a:schemeClr val="accent1"/>
-          </a:effectRef>
-          <a:fontRef idx="minor">
-            <a:schemeClr val="lt1"/>
-          </a:fontRef>
-        </p:style>
-        <p:txBody>
-          <a:bodyPr rtlCol="0" anchor="ctr"/>
-          <a:lstStyle/>
-          <a:p>
-            <a:pPr algn="ctr"/>
-          </a:p>
-        </p:txBody>
-      </p:sp>
-      <p:sp>
-        <p:nvSpPr>
-          <p:cNvPr id="15" name="TextBox 14"/>
-          <p:cNvSpPr txBox="1"/>
-          <p:nvPr/>
-        </p:nvSpPr>
-        <p:spPr>
-          <a:xfrm>
-            <a:off x="6473952" y="2084832"/>
-            <a:ext cx="5169103" cy="457200"/>
-          </a:xfrm>
-          <a:prstGeom prst="rect">
-            <a:avLst/>
-          </a:prstGeom>
-          <a:noFill/>
-        </p:spPr>
-        <p:txBody>
-          <a:bodyPr wrap="square" anchor="t" lIns="73152" rIns="73152" tIns="36576" bIns="36576">
-            <a:spAutoFit/>
-          </a:bodyPr>
-          <a:lstStyle/>
-          <a:p>
-            <a:pPr algn="l">
-              <a:spcAft>
-                <a:spcPts val="0"/>
-              </a:spcAft>
-            </a:pPr>
-            <a:r>
-              <a:rPr sz="2000" b="1" i="0">
-                <a:solidFill>
-                  <a:srgbClr val="EA580C"/>
-                </a:solidFill>
-                <a:latin typeface="Arial"/>
-              </a:rPr>
-              <a:t>Typical retail user</a:t>
-            </a:r>
-          </a:p>
-        </p:txBody>
-      </p:sp>
-      <p:sp>
-        <p:nvSpPr>
-          <p:cNvPr id="16" name="TextBox 15"/>
-          <p:cNvSpPr txBox="1"/>
-          <p:nvPr/>
-        </p:nvSpPr>
-        <p:spPr>
-          <a:xfrm>
-            <a:off x="6473952" y="2542032"/>
-            <a:ext cx="5169103" cy="2688336"/>
-          </a:xfrm>
-          <a:prstGeom prst="rect">
-            <a:avLst/>
-          </a:prstGeom>
-          <a:noFill/>
-        </p:spPr>
-        <p:txBody>
-          <a:bodyPr wrap="square" anchor="t" lIns="73152" rIns="73152" tIns="36576" bIns="36576">
-            <a:spAutoFit/>
-          </a:bodyPr>
-          <a:lstStyle/>
+              <a:t> bid-ask in briefs; Coach shows break-even after spread + fee</a:t>
+            </a:r>
+          </a:p>
           <a:p>
             <a:pPr algn="l" marL="292608" indent="-256032">
               <a:spcAft>
-                <a:spcPts val="600"/>
+                <a:spcPts val="800"/>
               </a:spcAft>
               <a:buChar char="•"/>
             </a:pPr>
             <a:r>
+              <a:rPr sz="1800" b="1" i="0">
+                <a:solidFill>
+                  <a:srgbClr val="0F172A"/>
+                </a:solidFill>
+                <a:latin typeface="Arial"/>
+              </a:rPr>
+              <a:t>Code limits:</a:t>
+            </a:r>
+            <a:r>
               <a:rPr sz="1800" b="0" i="0">
                 <a:solidFill>
                   <a:srgbClr val="0F172A"/>
                 </a:solidFill>
                 <a:latin typeface="Arial"/>
               </a:rPr>
-              <a:t>Public news, often after the price has moved</a:t>
+              <a:t> $50 / order, $100 / game, $300 / day; bans “lock”, “guaranteed”, “risk-free”</a:t>
             </a:r>
           </a:p>
           <a:p>
             <a:pPr algn="l" marL="292608" indent="-256032">
               <a:spcAft>
-                <a:spcPts val="600"/>
+                <a:spcPts val="800"/>
               </a:spcAft>
               <a:buChar char="•"/>
             </a:pPr>
             <a:r>
+              <a:rPr sz="1800" b="1" i="0">
+                <a:solidFill>
+                  <a:srgbClr val="0F172A"/>
+                </a:solidFill>
+                <a:latin typeface="Arial"/>
+              </a:rPr>
+              <a:t>9 / 9</a:t>
+            </a:r>
+            <a:r>
               <a:rPr sz="1800" b="0" i="0">
                 <a:solidFill>
                   <a:srgbClr val="0F172A"/>
                 </a:solidFill>
                 <a:latin typeface="Arial"/>
               </a:rPr>
-              <a:t>Intuition and headlines, no model</a:t>
+              <a:t> planted violations blocked</a:t>
             </a:r>
           </a:p>
           <a:p>
             <a:pPr algn="l" marL="292608" indent="-256032">
               <a:spcAft>
-                <a:spcPts val="600"/>
+                <a:spcPts val="800"/>
               </a:spcAft>
               <a:buChar char="•"/>
             </a:pPr>
             <a:r>
+              <a:rPr sz="1800" b="1" i="0">
+                <a:solidFill>
+                  <a:srgbClr val="0F172A"/>
+                </a:solidFill>
+                <a:latin typeface="Arial"/>
+              </a:rPr>
+              <a:t>Learned rules:</a:t>
+            </a:r>
+            <a:r>
               <a:rPr sz="1800" b="0" i="0">
                 <a:solidFill>
                   <a:srgbClr val="0F172A"/>
                 </a:solidFill>
                 <a:latin typeface="Arial"/>
               </a:rPr>
-              <a:t>Pays the spread and the taker fee</a:t>
+              <a:t> skip ≤ 35¢; skip after a 2¢ move against</a:t>
             </a:r>
           </a:p>
         </p:txBody>
@@ -5597,7 +5234,7 @@
                 </a:solidFill>
                 <a:latin typeface="Arial"/>
               </a:rPr>
-              <a:t>Our product, reframed: protect the consumer first</a:t>
+              <a:t>Coach: teach why most bets don't clear costs</a:t>
             </a:r>
           </a:p>
         </p:txBody>
@@ -5636,7 +5273,7 @@
                 </a:solidFill>
                 <a:latin typeface="Arial"/>
               </a:rPr>
-              <a:t>DASC7606C Group 12 · Can a consumer beat a sports prediction market?</a:t>
+              <a:t>DASC7606C Group 12 · Betting markets are tilted against consumers</a:t>
             </a:r>
           </a:p>
         </p:txBody>
@@ -5680,40 +5317,108 @@
           </a:p>
         </p:txBody>
       </p:sp>
-      <p:pic>
-        <p:nvPicPr>
-          <p:cNvPr id="7" name="Picture 6" descr="agent_workflow.png"/>
-          <p:cNvPicPr>
-            <a:picLocks noChangeAspect="1"/>
-          </p:cNvPicPr>
-          <p:nvPr/>
-        </p:nvPicPr>
-        <p:blipFill>
-          <a:blip r:embed="rId3"/>
-          <a:stretch>
-            <a:fillRect/>
-          </a:stretch>
-        </p:blipFill>
-        <p:spPr>
-          <a:xfrm>
-            <a:off x="457200" y="1853719"/>
-            <a:ext cx="6766560" cy="3744920"/>
-          </a:xfrm>
-          <a:prstGeom prst="rect">
-            <a:avLst/>
-          </a:prstGeom>
-        </p:spPr>
-      </p:pic>
-      <p:sp>
-        <p:nvSpPr>
-          <p:cNvPr id="8" name="TextBox 7"/>
+      <p:sp>
+        <p:nvSpPr>
+          <p:cNvPr id="7" name="Rounded Rectangle 6"/>
+          <p:cNvSpPr/>
+          <p:nvPr/>
+        </p:nvSpPr>
+        <p:spPr>
+          <a:xfrm>
+            <a:off x="457200" y="1234439"/>
+            <a:ext cx="5501487" cy="2057400"/>
+          </a:xfrm>
+          <a:prstGeom prst="roundRect">
+            <a:avLst>
+              <a:gd name="adj" fmla="val 6000"/>
+            </a:avLst>
+          </a:prstGeom>
+          <a:solidFill>
+            <a:srgbClr val="FFFFFF"/>
+          </a:solidFill>
+          <a:ln w="15875">
+            <a:solidFill>
+              <a:srgbClr val="2563EB"/>
+            </a:solidFill>
+          </a:ln>
+          <a:effectLst/>
+        </p:spPr>
+        <p:style>
+          <a:lnRef idx="1">
+            <a:schemeClr val="accent1"/>
+          </a:lnRef>
+          <a:fillRef idx="3">
+            <a:schemeClr val="accent1"/>
+          </a:fillRef>
+          <a:effectRef idx="2">
+            <a:schemeClr val="accent1"/>
+          </a:effectRef>
+          <a:fontRef idx="minor">
+            <a:schemeClr val="lt1"/>
+          </a:fontRef>
+        </p:style>
+        <p:txBody>
+          <a:bodyPr rtlCol="0" anchor="ctr"/>
+          <a:lstStyle/>
+          <a:p>
+            <a:pPr algn="ctr"/>
+          </a:p>
+        </p:txBody>
+      </p:sp>
+      <p:sp>
+        <p:nvSpPr>
+          <p:cNvPr id="8" name="Rectangle 7"/>
+          <p:cNvSpPr/>
+          <p:nvPr/>
+        </p:nvSpPr>
+        <p:spPr>
+          <a:xfrm>
+            <a:off x="457200" y="1234439"/>
+            <a:ext cx="109728" cy="2057400"/>
+          </a:xfrm>
+          <a:prstGeom prst="rect">
+            <a:avLst/>
+          </a:prstGeom>
+          <a:solidFill>
+            <a:srgbClr val="2563EB"/>
+          </a:solidFill>
+          <a:ln>
+            <a:noFill/>
+          </a:ln>
+          <a:effectLst/>
+        </p:spPr>
+        <p:style>
+          <a:lnRef idx="1">
+            <a:schemeClr val="accent1"/>
+          </a:lnRef>
+          <a:fillRef idx="3">
+            <a:schemeClr val="accent1"/>
+          </a:fillRef>
+          <a:effectRef idx="2">
+            <a:schemeClr val="accent1"/>
+          </a:effectRef>
+          <a:fontRef idx="minor">
+            <a:schemeClr val="lt1"/>
+          </a:fontRef>
+        </p:style>
+        <p:txBody>
+          <a:bodyPr rtlCol="0" anchor="ctr"/>
+          <a:lstStyle/>
+          <a:p>
+            <a:pPr algn="ctr"/>
+          </a:p>
+        </p:txBody>
+      </p:sp>
+      <p:sp>
+        <p:nvSpPr>
+          <p:cNvPr id="9" name="TextBox 8"/>
           <p:cNvSpPr txBox="1"/>
           <p:nvPr/>
         </p:nvSpPr>
         <p:spPr>
           <a:xfrm>
-            <a:off x="7406640" y="1234439"/>
-            <a:ext cx="4327855" cy="5120640"/>
+            <a:off x="640080" y="1307592"/>
+            <a:ext cx="5227167" cy="457200"/>
           </a:xfrm>
           <a:prstGeom prst="rect">
             <a:avLst/>
@@ -5726,151 +5431,615 @@
           </a:bodyPr>
           <a:lstStyle/>
           <a:p>
+            <a:pPr algn="l">
+              <a:spcAft>
+                <a:spcPts val="0"/>
+              </a:spcAft>
+            </a:pPr>
+            <a:r>
+              <a:rPr sz="2000" b="1" i="0">
+                <a:solidFill>
+                  <a:srgbClr val="2563EB"/>
+                </a:solidFill>
+                <a:latin typeface="Arial"/>
+              </a:rPr>
+              <a:t>1  What's going on</a:t>
+            </a:r>
+          </a:p>
+        </p:txBody>
+      </p:sp>
+      <p:sp>
+        <p:nvSpPr>
+          <p:cNvPr id="10" name="TextBox 9"/>
+          <p:cNvSpPr txBox="1"/>
+          <p:nvPr/>
+        </p:nvSpPr>
+        <p:spPr>
+          <a:xfrm>
+            <a:off x="640080" y="1764791"/>
+            <a:ext cx="5227167" cy="1453895"/>
+          </a:xfrm>
+          <a:prstGeom prst="rect">
+            <a:avLst/>
+          </a:prstGeom>
+          <a:noFill/>
+        </p:spPr>
+        <p:txBody>
+          <a:bodyPr wrap="square" anchor="t" lIns="73152" rIns="73152" tIns="36576" bIns="36576">
+            <a:spAutoFit/>
+          </a:bodyPr>
+          <a:lstStyle/>
+          <a:p>
             <a:pPr algn="l" marL="292608" indent="-256032">
               <a:spcAft>
-                <a:spcPts val="800"/>
+                <a:spcPts val="600"/>
               </a:spcAft>
               <a:buChar char="•"/>
             </a:pPr>
             <a:r>
-              <a:rPr sz="1800" b="1" i="0">
+              <a:rPr sz="1800" b="0" i="0">
                 <a:solidFill>
                   <a:srgbClr val="0F172A"/>
                 </a:solidFill>
                 <a:latin typeface="Arial"/>
               </a:rPr>
-              <a:t>Pass by default:</a:t>
-            </a:r>
-            <a:r>
-              <a:rPr sz="1800" b="0" i="0">
-                <a:solidFill>
-                  <a:srgbClr val="0F172A"/>
-                </a:solidFill>
-                <a:latin typeface="Arial"/>
-              </a:rPr>
-              <a:t> 90% of decision points → no trade</a:t>
+              <a:t>News so far; model before / after the news</a:t>
             </a:r>
           </a:p>
           <a:p>
             <a:pPr algn="l" marL="292608" indent="-256032">
               <a:spcAft>
-                <a:spcPts val="800"/>
+                <a:spcPts val="600"/>
               </a:spcAft>
               <a:buChar char="•"/>
             </a:pPr>
             <a:r>
-              <a:rPr sz="1800" b="1" i="0">
+              <a:rPr sz="1800" b="0" i="0">
                 <a:solidFill>
                   <a:srgbClr val="0F172A"/>
                 </a:solidFill>
                 <a:latin typeface="Arial"/>
               </a:rPr>
-              <a:t>No-order reason:</a:t>
-            </a:r>
-            <a:r>
-              <a:rPr sz="1800" b="0" i="0">
-                <a:solidFill>
-                  <a:srgbClr val="0F172A"/>
-                </a:solidFill>
-                <a:latin typeface="Arial"/>
-              </a:rPr>
-              <a:t> “gap after fees too small or the price already moved”</a:t>
-            </a:r>
-          </a:p>
+              <a:t>Market now vs 24 h ago; break-even after spread + fee</a:t>
+            </a:r>
+          </a:p>
+        </p:txBody>
+      </p:sp>
+      <p:sp>
+        <p:nvSpPr>
+          <p:cNvPr id="11" name="Rounded Rectangle 10"/>
+          <p:cNvSpPr/>
+          <p:nvPr/>
+        </p:nvSpPr>
+        <p:spPr>
+          <a:xfrm>
+            <a:off x="6233007" y="1234439"/>
+            <a:ext cx="5501487" cy="2057400"/>
+          </a:xfrm>
+          <a:prstGeom prst="roundRect">
+            <a:avLst>
+              <a:gd name="adj" fmla="val 6000"/>
+            </a:avLst>
+          </a:prstGeom>
+          <a:solidFill>
+            <a:srgbClr val="FFFFFF"/>
+          </a:solidFill>
+          <a:ln w="15875">
+            <a:solidFill>
+              <a:srgbClr val="EA580C"/>
+            </a:solidFill>
+          </a:ln>
+          <a:effectLst/>
+        </p:spPr>
+        <p:style>
+          <a:lnRef idx="1">
+            <a:schemeClr val="accent1"/>
+          </a:lnRef>
+          <a:fillRef idx="3">
+            <a:schemeClr val="accent1"/>
+          </a:fillRef>
+          <a:effectRef idx="2">
+            <a:schemeClr val="accent1"/>
+          </a:effectRef>
+          <a:fontRef idx="minor">
+            <a:schemeClr val="lt1"/>
+          </a:fontRef>
+        </p:style>
+        <p:txBody>
+          <a:bodyPr rtlCol="0" anchor="ctr"/>
+          <a:lstStyle/>
+          <a:p>
+            <a:pPr algn="ctr"/>
+          </a:p>
+        </p:txBody>
+      </p:sp>
+      <p:sp>
+        <p:nvSpPr>
+          <p:cNvPr id="12" name="Rectangle 11"/>
+          <p:cNvSpPr/>
+          <p:nvPr/>
+        </p:nvSpPr>
+        <p:spPr>
+          <a:xfrm>
+            <a:off x="6233007" y="1234439"/>
+            <a:ext cx="109728" cy="2057400"/>
+          </a:xfrm>
+          <a:prstGeom prst="rect">
+            <a:avLst/>
+          </a:prstGeom>
+          <a:solidFill>
+            <a:srgbClr val="EA580C"/>
+          </a:solidFill>
+          <a:ln>
+            <a:noFill/>
+          </a:ln>
+          <a:effectLst/>
+        </p:spPr>
+        <p:style>
+          <a:lnRef idx="1">
+            <a:schemeClr val="accent1"/>
+          </a:lnRef>
+          <a:fillRef idx="3">
+            <a:schemeClr val="accent1"/>
+          </a:fillRef>
+          <a:effectRef idx="2">
+            <a:schemeClr val="accent1"/>
+          </a:effectRef>
+          <a:fontRef idx="minor">
+            <a:schemeClr val="lt1"/>
+          </a:fontRef>
+        </p:style>
+        <p:txBody>
+          <a:bodyPr rtlCol="0" anchor="ctr"/>
+          <a:lstStyle/>
+          <a:p>
+            <a:pPr algn="ctr"/>
+          </a:p>
+        </p:txBody>
+      </p:sp>
+      <p:sp>
+        <p:nvSpPr>
+          <p:cNvPr id="13" name="TextBox 12"/>
+          <p:cNvSpPr txBox="1"/>
+          <p:nvPr/>
+        </p:nvSpPr>
+        <p:spPr>
+          <a:xfrm>
+            <a:off x="6415887" y="1307592"/>
+            <a:ext cx="5227167" cy="457200"/>
+          </a:xfrm>
+          <a:prstGeom prst="rect">
+            <a:avLst/>
+          </a:prstGeom>
+          <a:noFill/>
+        </p:spPr>
+        <p:txBody>
+          <a:bodyPr wrap="square" anchor="t" lIns="73152" rIns="73152" tIns="36576" bIns="36576">
+            <a:spAutoFit/>
+          </a:bodyPr>
+          <a:lstStyle/>
+          <a:p>
+            <a:pPr algn="l">
+              <a:spcAft>
+                <a:spcPts val="0"/>
+              </a:spcAft>
+            </a:pPr>
+            <a:r>
+              <a:rPr sz="2000" b="1" i="0">
+                <a:solidFill>
+                  <a:srgbClr val="EA580C"/>
+                </a:solidFill>
+                <a:latin typeface="Arial"/>
+              </a:rPr>
+              <a:t>2  Lessons, when relevant</a:t>
+            </a:r>
+          </a:p>
+        </p:txBody>
+      </p:sp>
+      <p:sp>
+        <p:nvSpPr>
+          <p:cNvPr id="14" name="TextBox 13"/>
+          <p:cNvSpPr txBox="1"/>
+          <p:nvPr/>
+        </p:nvSpPr>
+        <p:spPr>
+          <a:xfrm>
+            <a:off x="6415887" y="1764791"/>
+            <a:ext cx="5227167" cy="1453895"/>
+          </a:xfrm>
+          <a:prstGeom prst="rect">
+            <a:avLst/>
+          </a:prstGeom>
+          <a:noFill/>
+        </p:spPr>
+        <p:txBody>
+          <a:bodyPr wrap="square" anchor="t" lIns="73152" rIns="73152" tIns="36576" bIns="36576">
+            <a:spAutoFit/>
+          </a:bodyPr>
+          <a:lstStyle/>
           <a:p>
             <a:pPr algn="l" marL="292608" indent="-256032">
               <a:spcAft>
-                <a:spcPts val="800"/>
+                <a:spcPts val="600"/>
               </a:spcAft>
               <a:buChar char="•"/>
             </a:pPr>
             <a:r>
-              <a:rPr sz="1800" b="1" i="0">
+              <a:rPr sz="1800" b="0" i="0">
                 <a:solidFill>
                   <a:srgbClr val="0F172A"/>
                 </a:solidFill>
                 <a:latin typeface="Arial"/>
               </a:rPr>
-              <a:t>Costs shown:</a:t>
-            </a:r>
-            <a:r>
-              <a:rPr sz="1800" b="0" i="0">
-                <a:solidFill>
-                  <a:srgbClr val="0F172A"/>
-                </a:solidFill>
-                <a:latin typeface="Arial"/>
-              </a:rPr>
-              <a:t> bid-ask in briefs; Coach shows break-even after spread + fee</a:t>
+              <a:t>Price = probability · costs move break-even</a:t>
             </a:r>
           </a:p>
           <a:p>
             <a:pPr algn="l" marL="292608" indent="-256032">
               <a:spcAft>
-                <a:spcPts val="800"/>
+                <a:spcPts val="600"/>
               </a:spcAft>
               <a:buChar char="•"/>
             </a:pPr>
             <a:r>
-              <a:rPr sz="1800" b="1" i="0">
+              <a:rPr sz="1800" b="0" i="0">
                 <a:solidFill>
                   <a:srgbClr val="0F172A"/>
                 </a:solidFill>
                 <a:latin typeface="Arial"/>
               </a:rPr>
-              <a:t>Code limits:</a:t>
-            </a:r>
-            <a:r>
-              <a:rPr sz="1800" b="0" i="0">
-                <a:solidFill>
-                  <a:srgbClr val="0F172A"/>
-                </a:solidFill>
-                <a:latin typeface="Arial"/>
-              </a:rPr>
-              <a:t> $50 / order, $100 / game, $300 / day; bans “lock”, “guaranteed”, “risk-free”</a:t>
-            </a:r>
-          </a:p>
+              <a:t>Priced in / chasing · long shots · closing line · passing</a:t>
+            </a:r>
+          </a:p>
+        </p:txBody>
+      </p:sp>
+      <p:sp>
+        <p:nvSpPr>
+          <p:cNvPr id="15" name="Rounded Rectangle 14"/>
+          <p:cNvSpPr/>
+          <p:nvPr/>
+        </p:nvSpPr>
+        <p:spPr>
+          <a:xfrm>
+            <a:off x="457200" y="3474720"/>
+            <a:ext cx="5501487" cy="2057400"/>
+          </a:xfrm>
+          <a:prstGeom prst="roundRect">
+            <a:avLst>
+              <a:gd name="adj" fmla="val 6000"/>
+            </a:avLst>
+          </a:prstGeom>
+          <a:solidFill>
+            <a:srgbClr val="FFFFFF"/>
+          </a:solidFill>
+          <a:ln w="15875">
+            <a:solidFill>
+              <a:srgbClr val="16A34A"/>
+            </a:solidFill>
+          </a:ln>
+          <a:effectLst/>
+        </p:spPr>
+        <p:style>
+          <a:lnRef idx="1">
+            <a:schemeClr val="accent1"/>
+          </a:lnRef>
+          <a:fillRef idx="3">
+            <a:schemeClr val="accent1"/>
+          </a:fillRef>
+          <a:effectRef idx="2">
+            <a:schemeClr val="accent1"/>
+          </a:effectRef>
+          <a:fontRef idx="minor">
+            <a:schemeClr val="lt1"/>
+          </a:fontRef>
+        </p:style>
+        <p:txBody>
+          <a:bodyPr rtlCol="0" anchor="ctr"/>
+          <a:lstStyle/>
+          <a:p>
+            <a:pPr algn="ctr"/>
+          </a:p>
+        </p:txBody>
+      </p:sp>
+      <p:sp>
+        <p:nvSpPr>
+          <p:cNvPr id="16" name="Rectangle 15"/>
+          <p:cNvSpPr/>
+          <p:nvPr/>
+        </p:nvSpPr>
+        <p:spPr>
+          <a:xfrm>
+            <a:off x="457200" y="3474720"/>
+            <a:ext cx="109728" cy="2057400"/>
+          </a:xfrm>
+          <a:prstGeom prst="rect">
+            <a:avLst/>
+          </a:prstGeom>
+          <a:solidFill>
+            <a:srgbClr val="16A34A"/>
+          </a:solidFill>
+          <a:ln>
+            <a:noFill/>
+          </a:ln>
+          <a:effectLst/>
+        </p:spPr>
+        <p:style>
+          <a:lnRef idx="1">
+            <a:schemeClr val="accent1"/>
+          </a:lnRef>
+          <a:fillRef idx="3">
+            <a:schemeClr val="accent1"/>
+          </a:fillRef>
+          <a:effectRef idx="2">
+            <a:schemeClr val="accent1"/>
+          </a:effectRef>
+          <a:fontRef idx="minor">
+            <a:schemeClr val="lt1"/>
+          </a:fontRef>
+        </p:style>
+        <p:txBody>
+          <a:bodyPr rtlCol="0" anchor="ctr"/>
+          <a:lstStyle/>
+          <a:p>
+            <a:pPr algn="ctr"/>
+          </a:p>
+        </p:txBody>
+      </p:sp>
+      <p:sp>
+        <p:nvSpPr>
+          <p:cNvPr id="17" name="TextBox 16"/>
+          <p:cNvSpPr txBox="1"/>
+          <p:nvPr/>
+        </p:nvSpPr>
+        <p:spPr>
+          <a:xfrm>
+            <a:off x="640080" y="3547872"/>
+            <a:ext cx="5227167" cy="457200"/>
+          </a:xfrm>
+          <a:prstGeom prst="rect">
+            <a:avLst/>
+          </a:prstGeom>
+          <a:noFill/>
+        </p:spPr>
+        <p:txBody>
+          <a:bodyPr wrap="square" anchor="t" lIns="73152" rIns="73152" tIns="36576" bIns="36576">
+            <a:spAutoFit/>
+          </a:bodyPr>
+          <a:lstStyle/>
+          <a:p>
+            <a:pPr algn="l">
+              <a:spcAft>
+                <a:spcPts val="0"/>
+              </a:spcAft>
+            </a:pPr>
+            <a:r>
+              <a:rPr sz="2000" b="1" i="0">
+                <a:solidFill>
+                  <a:srgbClr val="16A34A"/>
+                </a:solidFill>
+                <a:latin typeface="Arial"/>
+              </a:rPr>
+              <a:t>3  Your paper call</a:t>
+            </a:r>
+          </a:p>
+        </p:txBody>
+      </p:sp>
+      <p:sp>
+        <p:nvSpPr>
+          <p:cNvPr id="18" name="TextBox 17"/>
+          <p:cNvSpPr txBox="1"/>
+          <p:nvPr/>
+        </p:nvSpPr>
+        <p:spPr>
+          <a:xfrm>
+            <a:off x="640080" y="4005072"/>
+            <a:ext cx="5227167" cy="1453895"/>
+          </a:xfrm>
+          <a:prstGeom prst="rect">
+            <a:avLst/>
+          </a:prstGeom>
+          <a:noFill/>
+        </p:spPr>
+        <p:txBody>
+          <a:bodyPr wrap="square" anchor="t" lIns="73152" rIns="73152" tIns="36576" bIns="36576">
+            <a:spAutoFit/>
+          </a:bodyPr>
+          <a:lstStyle/>
           <a:p>
             <a:pPr algn="l" marL="292608" indent="-256032">
               <a:spcAft>
-                <a:spcPts val="800"/>
+                <a:spcPts val="600"/>
               </a:spcAft>
               <a:buChar char="•"/>
             </a:pPr>
             <a:r>
-              <a:rPr sz="1800" b="1" i="0">
+              <a:rPr sz="1800" b="0" i="0">
                 <a:solidFill>
                   <a:srgbClr val="0F172A"/>
                 </a:solidFill>
                 <a:latin typeface="Arial"/>
               </a:rPr>
-              <a:t>9 / 9</a:t>
-            </a:r>
-            <a:r>
-              <a:rPr sz="1800" b="0" i="0">
-                <a:solidFill>
-                  <a:srgbClr val="0F172A"/>
-                </a:solidFill>
-                <a:latin typeface="Arial"/>
-              </a:rPr>
-              <a:t> planted violations blocked</a:t>
+              <a:t>Back a team or pass</a:t>
             </a:r>
           </a:p>
           <a:p>
             <a:pPr algn="l" marL="292608" indent="-256032">
               <a:spcAft>
-                <a:spcPts val="800"/>
+                <a:spcPts val="600"/>
               </a:spcAft>
               <a:buChar char="•"/>
             </a:pPr>
             <a:r>
-              <a:rPr sz="1800" b="1" i="0">
+              <a:rPr sz="1800" b="0" i="0">
                 <a:solidFill>
                   <a:srgbClr val="0F172A"/>
                 </a:solidFill>
                 <a:latin typeface="Arial"/>
               </a:rPr>
-              <a:t>Learned rules:</a:t>
-            </a:r>
+              <a:t>Then: close, CLV, result, and what the agent did</a:t>
+            </a:r>
+          </a:p>
+        </p:txBody>
+      </p:sp>
+      <p:sp>
+        <p:nvSpPr>
+          <p:cNvPr id="19" name="Rounded Rectangle 18"/>
+          <p:cNvSpPr/>
+          <p:nvPr/>
+        </p:nvSpPr>
+        <p:spPr>
+          <a:xfrm>
+            <a:off x="6233007" y="3474720"/>
+            <a:ext cx="5501487" cy="2057400"/>
+          </a:xfrm>
+          <a:prstGeom prst="roundRect">
+            <a:avLst>
+              <a:gd name="adj" fmla="val 6000"/>
+            </a:avLst>
+          </a:prstGeom>
+          <a:solidFill>
+            <a:srgbClr val="FFFFFF"/>
+          </a:solidFill>
+          <a:ln w="15875">
+            <a:solidFill>
+              <a:srgbClr val="1E293B"/>
+            </a:solidFill>
+          </a:ln>
+          <a:effectLst/>
+        </p:spPr>
+        <p:style>
+          <a:lnRef idx="1">
+            <a:schemeClr val="accent1"/>
+          </a:lnRef>
+          <a:fillRef idx="3">
+            <a:schemeClr val="accent1"/>
+          </a:fillRef>
+          <a:effectRef idx="2">
+            <a:schemeClr val="accent1"/>
+          </a:effectRef>
+          <a:fontRef idx="minor">
+            <a:schemeClr val="lt1"/>
+          </a:fontRef>
+        </p:style>
+        <p:txBody>
+          <a:bodyPr rtlCol="0" anchor="ctr"/>
+          <a:lstStyle/>
+          <a:p>
+            <a:pPr algn="ctr"/>
+          </a:p>
+        </p:txBody>
+      </p:sp>
+      <p:sp>
+        <p:nvSpPr>
+          <p:cNvPr id="20" name="Rectangle 19"/>
+          <p:cNvSpPr/>
+          <p:nvPr/>
+        </p:nvSpPr>
+        <p:spPr>
+          <a:xfrm>
+            <a:off x="6233007" y="3474720"/>
+            <a:ext cx="109728" cy="2057400"/>
+          </a:xfrm>
+          <a:prstGeom prst="rect">
+            <a:avLst/>
+          </a:prstGeom>
+          <a:solidFill>
+            <a:srgbClr val="1E293B"/>
+          </a:solidFill>
+          <a:ln>
+            <a:noFill/>
+          </a:ln>
+          <a:effectLst/>
+        </p:spPr>
+        <p:style>
+          <a:lnRef idx="1">
+            <a:schemeClr val="accent1"/>
+          </a:lnRef>
+          <a:fillRef idx="3">
+            <a:schemeClr val="accent1"/>
+          </a:fillRef>
+          <a:effectRef idx="2">
+            <a:schemeClr val="accent1"/>
+          </a:effectRef>
+          <a:fontRef idx="minor">
+            <a:schemeClr val="lt1"/>
+          </a:fontRef>
+        </p:style>
+        <p:txBody>
+          <a:bodyPr rtlCol="0" anchor="ctr"/>
+          <a:lstStyle/>
+          <a:p>
+            <a:pPr algn="ctr"/>
+          </a:p>
+        </p:txBody>
+      </p:sp>
+      <p:sp>
+        <p:nvSpPr>
+          <p:cNvPr id="21" name="TextBox 20"/>
+          <p:cNvSpPr txBox="1"/>
+          <p:nvPr/>
+        </p:nvSpPr>
+        <p:spPr>
+          <a:xfrm>
+            <a:off x="6415887" y="3547872"/>
+            <a:ext cx="5227167" cy="457200"/>
+          </a:xfrm>
+          <a:prstGeom prst="rect">
+            <a:avLst/>
+          </a:prstGeom>
+          <a:noFill/>
+        </p:spPr>
+        <p:txBody>
+          <a:bodyPr wrap="square" anchor="t" lIns="73152" rIns="73152" tIns="36576" bIns="36576">
+            <a:spAutoFit/>
+          </a:bodyPr>
+          <a:lstStyle/>
+          <a:p>
+            <a:pPr algn="l">
+              <a:spcAft>
+                <a:spcPts val="0"/>
+              </a:spcAft>
+            </a:pPr>
+            <a:r>
+              <a:rPr sz="2000" b="1" i="0">
+                <a:solidFill>
+                  <a:srgbClr val="1E293B"/>
+                </a:solidFill>
+                <a:latin typeface="Arial"/>
+              </a:rPr>
+              <a:t>4  Habit feedback</a:t>
+            </a:r>
+          </a:p>
+        </p:txBody>
+      </p:sp>
+      <p:sp>
+        <p:nvSpPr>
+          <p:cNvPr id="22" name="TextBox 21"/>
+          <p:cNvSpPr txBox="1"/>
+          <p:nvPr/>
+        </p:nvSpPr>
+        <p:spPr>
+          <a:xfrm>
+            <a:off x="6415887" y="4005072"/>
+            <a:ext cx="5227167" cy="1453895"/>
+          </a:xfrm>
+          <a:prstGeom prst="rect">
+            <a:avLst/>
+          </a:prstGeom>
+          <a:noFill/>
+        </p:spPr>
+        <p:txBody>
+          <a:bodyPr wrap="square" anchor="t" lIns="73152" rIns="73152" tIns="36576" bIns="36576">
+            <a:spAutoFit/>
+          </a:bodyPr>
+          <a:lstStyle/>
+          <a:p>
+            <a:pPr algn="l" marL="292608" indent="-256032">
+              <a:spcAft>
+                <a:spcPts val="600"/>
+              </a:spcAft>
+              <a:buChar char="•"/>
+            </a:pPr>
             <a:r>
               <a:rPr sz="1800" b="0" i="0">
                 <a:solidFill>
@@ -5878,7 +6047,109 @@
                 </a:solidFill>
                 <a:latin typeface="Arial"/>
               </a:rPr>
-              <a:t> skip ≤ 35¢; skip after a 2¢ move against</a:t>
+              <a:t>Paying above the close, long shots, chasing</a:t>
+            </a:r>
+          </a:p>
+          <a:p>
+            <a:pPr algn="l" marL="292608" indent="-256032">
+              <a:spcAft>
+                <a:spcPts val="600"/>
+              </a:spcAft>
+              <a:buChar char="•"/>
+            </a:pPr>
+            <a:r>
+              <a:rPr sz="1800" b="0" i="0">
+                <a:solidFill>
+                  <a:srgbClr val="0F172A"/>
+                </a:solidFill>
+                <a:latin typeface="Arial"/>
+              </a:rPr>
+              <a:t>Small samples are mostly luck</a:t>
+            </a:r>
+          </a:p>
+        </p:txBody>
+      </p:sp>
+      <p:sp>
+        <p:nvSpPr>
+          <p:cNvPr id="23" name="Rounded Rectangle 22"/>
+          <p:cNvSpPr/>
+          <p:nvPr/>
+        </p:nvSpPr>
+        <p:spPr>
+          <a:xfrm>
+            <a:off x="457200" y="5760720"/>
+            <a:ext cx="11277295" cy="502920"/>
+          </a:xfrm>
+          <a:prstGeom prst="roundRect">
+            <a:avLst>
+              <a:gd name="adj" fmla="val 12000"/>
+            </a:avLst>
+          </a:prstGeom>
+          <a:solidFill>
+            <a:srgbClr val="FEF3C7"/>
+          </a:solidFill>
+          <a:ln>
+            <a:noFill/>
+          </a:ln>
+          <a:effectLst/>
+        </p:spPr>
+        <p:style>
+          <a:lnRef idx="1">
+            <a:schemeClr val="accent1"/>
+          </a:lnRef>
+          <a:fillRef idx="3">
+            <a:schemeClr val="accent1"/>
+          </a:fillRef>
+          <a:effectRef idx="2">
+            <a:schemeClr val="accent1"/>
+          </a:effectRef>
+          <a:fontRef idx="minor">
+            <a:schemeClr val="lt1"/>
+          </a:fontRef>
+        </p:style>
+        <p:txBody>
+          <a:bodyPr rtlCol="0" anchor="ctr"/>
+          <a:lstStyle/>
+          <a:p>
+            <a:pPr algn="ctr"/>
+          </a:p>
+        </p:txBody>
+      </p:sp>
+      <p:sp>
+        <p:nvSpPr>
+          <p:cNvPr id="24" name="TextBox 23"/>
+          <p:cNvSpPr txBox="1"/>
+          <p:nvPr/>
+        </p:nvSpPr>
+        <p:spPr>
+          <a:xfrm>
+            <a:off x="548640" y="5760720"/>
+            <a:ext cx="11094415" cy="502920"/>
+          </a:xfrm>
+          <a:prstGeom prst="rect">
+            <a:avLst/>
+          </a:prstGeom>
+          <a:noFill/>
+        </p:spPr>
+        <p:txBody>
+          <a:bodyPr wrap="square" anchor="ctr" lIns="73152" rIns="73152" tIns="36576" bIns="36576">
+            <a:spAutoFit/>
+          </a:bodyPr>
+          <a:lstStyle/>
+          <a:p>
+            <a:pPr algn="l">
+              <a:spcAft>
+                <a:spcPts val="0"/>
+              </a:spcAft>
+            </a:pPr>
+            <a:r>
+              <a:rPr sz="1800" b="0" i="0">
+                <a:solidFill>
+                  <a:srgbClr val="0F172A"/>
+                </a:solidFill>
+                <a:latin typeface="Arial"/>
+              </a:rPr>
+              <a:t>Educational, paper money only · only information public at that moment · no promise words</a:t>
             </a:r>
           </a:p>
         </p:txBody>
@@ -6023,7 +6294,7 @@
                 </a:solidFill>
                 <a:latin typeface="Arial"/>
               </a:rPr>
-              <a:t>Coach: teach why most bets don't clear costs</a:t>
+              <a:t>Honest scope: what “unfair” means here</a:t>
             </a:r>
           </a:p>
         </p:txBody>
@@ -6062,7 +6333,7 @@
                 </a:solidFill>
                 <a:latin typeface="Arial"/>
               </a:rPr>
-              <a:t>DASC7606C Group 12 · Can a consumer beat a sports prediction market?</a:t>
+              <a:t>DASC7606C Group 12 · Betting markets are tilted against consumers</a:t>
             </a:r>
           </a:p>
         </p:txBody>
@@ -6115,571 +6386,7 @@
         <p:spPr>
           <a:xfrm>
             <a:off x="457200" y="1234439"/>
-            <a:ext cx="5501487" cy="2057400"/>
-          </a:xfrm>
-          <a:prstGeom prst="roundRect">
-            <a:avLst>
-              <a:gd name="adj" fmla="val 6000"/>
-            </a:avLst>
-          </a:prstGeom>
-          <a:solidFill>
-            <a:srgbClr val="FFFFFF"/>
-          </a:solidFill>
-          <a:ln w="15875">
-            <a:solidFill>
-              <a:srgbClr val="2563EB"/>
-            </a:solidFill>
-          </a:ln>
-          <a:effectLst/>
-        </p:spPr>
-        <p:style>
-          <a:lnRef idx="1">
-            <a:schemeClr val="accent1"/>
-          </a:lnRef>
-          <a:fillRef idx="3">
-            <a:schemeClr val="accent1"/>
-          </a:fillRef>
-          <a:effectRef idx="2">
-            <a:schemeClr val="accent1"/>
-          </a:effectRef>
-          <a:fontRef idx="minor">
-            <a:schemeClr val="lt1"/>
-          </a:fontRef>
-        </p:style>
-        <p:txBody>
-          <a:bodyPr rtlCol="0" anchor="ctr"/>
-          <a:lstStyle/>
-          <a:p>
-            <a:pPr algn="ctr"/>
-          </a:p>
-        </p:txBody>
-      </p:sp>
-      <p:sp>
-        <p:nvSpPr>
-          <p:cNvPr id="8" name="Rectangle 7"/>
-          <p:cNvSpPr/>
-          <p:nvPr/>
-        </p:nvSpPr>
-        <p:spPr>
-          <a:xfrm>
-            <a:off x="457200" y="1234439"/>
-            <a:ext cx="109728" cy="2057400"/>
-          </a:xfrm>
-          <a:prstGeom prst="rect">
-            <a:avLst/>
-          </a:prstGeom>
-          <a:solidFill>
-            <a:srgbClr val="2563EB"/>
-          </a:solidFill>
-          <a:ln>
-            <a:noFill/>
-          </a:ln>
-          <a:effectLst/>
-        </p:spPr>
-        <p:style>
-          <a:lnRef idx="1">
-            <a:schemeClr val="accent1"/>
-          </a:lnRef>
-          <a:fillRef idx="3">
-            <a:schemeClr val="accent1"/>
-          </a:fillRef>
-          <a:effectRef idx="2">
-            <a:schemeClr val="accent1"/>
-          </a:effectRef>
-          <a:fontRef idx="minor">
-            <a:schemeClr val="lt1"/>
-          </a:fontRef>
-        </p:style>
-        <p:txBody>
-          <a:bodyPr rtlCol="0" anchor="ctr"/>
-          <a:lstStyle/>
-          <a:p>
-            <a:pPr algn="ctr"/>
-          </a:p>
-        </p:txBody>
-      </p:sp>
-      <p:sp>
-        <p:nvSpPr>
-          <p:cNvPr id="9" name="TextBox 8"/>
-          <p:cNvSpPr txBox="1"/>
-          <p:nvPr/>
-        </p:nvSpPr>
-        <p:spPr>
-          <a:xfrm>
-            <a:off x="640080" y="1307592"/>
-            <a:ext cx="5227167" cy="457200"/>
-          </a:xfrm>
-          <a:prstGeom prst="rect">
-            <a:avLst/>
-          </a:prstGeom>
-          <a:noFill/>
-        </p:spPr>
-        <p:txBody>
-          <a:bodyPr wrap="square" anchor="t" lIns="73152" rIns="73152" tIns="36576" bIns="36576">
-            <a:spAutoFit/>
-          </a:bodyPr>
-          <a:lstStyle/>
-          <a:p>
-            <a:pPr algn="l">
-              <a:spcAft>
-                <a:spcPts val="0"/>
-              </a:spcAft>
-            </a:pPr>
-            <a:r>
-              <a:rPr sz="2000" b="1" i="0">
-                <a:solidFill>
-                  <a:srgbClr val="2563EB"/>
-                </a:solidFill>
-                <a:latin typeface="Arial"/>
-              </a:rPr>
-              <a:t>1  What's going on</a:t>
-            </a:r>
-          </a:p>
-        </p:txBody>
-      </p:sp>
-      <p:sp>
-        <p:nvSpPr>
-          <p:cNvPr id="10" name="TextBox 9"/>
-          <p:cNvSpPr txBox="1"/>
-          <p:nvPr/>
-        </p:nvSpPr>
-        <p:spPr>
-          <a:xfrm>
-            <a:off x="640080" y="1764791"/>
-            <a:ext cx="5227167" cy="1453895"/>
-          </a:xfrm>
-          <a:prstGeom prst="rect">
-            <a:avLst/>
-          </a:prstGeom>
-          <a:noFill/>
-        </p:spPr>
-        <p:txBody>
-          <a:bodyPr wrap="square" anchor="t" lIns="73152" rIns="73152" tIns="36576" bIns="36576">
-            <a:spAutoFit/>
-          </a:bodyPr>
-          <a:lstStyle/>
-          <a:p>
-            <a:pPr algn="l" marL="292608" indent="-256032">
-              <a:spcAft>
-                <a:spcPts val="600"/>
-              </a:spcAft>
-              <a:buChar char="•"/>
-            </a:pPr>
-            <a:r>
-              <a:rPr sz="1800" b="0" i="0">
-                <a:solidFill>
-                  <a:srgbClr val="0F172A"/>
-                </a:solidFill>
-                <a:latin typeface="Arial"/>
-              </a:rPr>
-              <a:t>News so far; model before / after the news</a:t>
-            </a:r>
-          </a:p>
-          <a:p>
-            <a:pPr algn="l" marL="292608" indent="-256032">
-              <a:spcAft>
-                <a:spcPts val="600"/>
-              </a:spcAft>
-              <a:buChar char="•"/>
-            </a:pPr>
-            <a:r>
-              <a:rPr sz="1800" b="0" i="0">
-                <a:solidFill>
-                  <a:srgbClr val="0F172A"/>
-                </a:solidFill>
-                <a:latin typeface="Arial"/>
-              </a:rPr>
-              <a:t>Market now vs 24 h ago; break-even after spread + fee</a:t>
-            </a:r>
-          </a:p>
-        </p:txBody>
-      </p:sp>
-      <p:sp>
-        <p:nvSpPr>
-          <p:cNvPr id="11" name="Rounded Rectangle 10"/>
-          <p:cNvSpPr/>
-          <p:nvPr/>
-        </p:nvSpPr>
-        <p:spPr>
-          <a:xfrm>
-            <a:off x="6233007" y="1234439"/>
-            <a:ext cx="5501487" cy="2057400"/>
-          </a:xfrm>
-          <a:prstGeom prst="roundRect">
-            <a:avLst>
-              <a:gd name="adj" fmla="val 6000"/>
-            </a:avLst>
-          </a:prstGeom>
-          <a:solidFill>
-            <a:srgbClr val="FFFFFF"/>
-          </a:solidFill>
-          <a:ln w="15875">
-            <a:solidFill>
-              <a:srgbClr val="EA580C"/>
-            </a:solidFill>
-          </a:ln>
-          <a:effectLst/>
-        </p:spPr>
-        <p:style>
-          <a:lnRef idx="1">
-            <a:schemeClr val="accent1"/>
-          </a:lnRef>
-          <a:fillRef idx="3">
-            <a:schemeClr val="accent1"/>
-          </a:fillRef>
-          <a:effectRef idx="2">
-            <a:schemeClr val="accent1"/>
-          </a:effectRef>
-          <a:fontRef idx="minor">
-            <a:schemeClr val="lt1"/>
-          </a:fontRef>
-        </p:style>
-        <p:txBody>
-          <a:bodyPr rtlCol="0" anchor="ctr"/>
-          <a:lstStyle/>
-          <a:p>
-            <a:pPr algn="ctr"/>
-          </a:p>
-        </p:txBody>
-      </p:sp>
-      <p:sp>
-        <p:nvSpPr>
-          <p:cNvPr id="12" name="Rectangle 11"/>
-          <p:cNvSpPr/>
-          <p:nvPr/>
-        </p:nvSpPr>
-        <p:spPr>
-          <a:xfrm>
-            <a:off x="6233007" y="1234439"/>
-            <a:ext cx="109728" cy="2057400"/>
-          </a:xfrm>
-          <a:prstGeom prst="rect">
-            <a:avLst/>
-          </a:prstGeom>
-          <a:solidFill>
-            <a:srgbClr val="EA580C"/>
-          </a:solidFill>
-          <a:ln>
-            <a:noFill/>
-          </a:ln>
-          <a:effectLst/>
-        </p:spPr>
-        <p:style>
-          <a:lnRef idx="1">
-            <a:schemeClr val="accent1"/>
-          </a:lnRef>
-          <a:fillRef idx="3">
-            <a:schemeClr val="accent1"/>
-          </a:fillRef>
-          <a:effectRef idx="2">
-            <a:schemeClr val="accent1"/>
-          </a:effectRef>
-          <a:fontRef idx="minor">
-            <a:schemeClr val="lt1"/>
-          </a:fontRef>
-        </p:style>
-        <p:txBody>
-          <a:bodyPr rtlCol="0" anchor="ctr"/>
-          <a:lstStyle/>
-          <a:p>
-            <a:pPr algn="ctr"/>
-          </a:p>
-        </p:txBody>
-      </p:sp>
-      <p:sp>
-        <p:nvSpPr>
-          <p:cNvPr id="13" name="TextBox 12"/>
-          <p:cNvSpPr txBox="1"/>
-          <p:nvPr/>
-        </p:nvSpPr>
-        <p:spPr>
-          <a:xfrm>
-            <a:off x="6415887" y="1307592"/>
-            <a:ext cx="5227167" cy="457200"/>
-          </a:xfrm>
-          <a:prstGeom prst="rect">
-            <a:avLst/>
-          </a:prstGeom>
-          <a:noFill/>
-        </p:spPr>
-        <p:txBody>
-          <a:bodyPr wrap="square" anchor="t" lIns="73152" rIns="73152" tIns="36576" bIns="36576">
-            <a:spAutoFit/>
-          </a:bodyPr>
-          <a:lstStyle/>
-          <a:p>
-            <a:pPr algn="l">
-              <a:spcAft>
-                <a:spcPts val="0"/>
-              </a:spcAft>
-            </a:pPr>
-            <a:r>
-              <a:rPr sz="2000" b="1" i="0">
-                <a:solidFill>
-                  <a:srgbClr val="EA580C"/>
-                </a:solidFill>
-                <a:latin typeface="Arial"/>
-              </a:rPr>
-              <a:t>2  Lessons, when relevant</a:t>
-            </a:r>
-          </a:p>
-        </p:txBody>
-      </p:sp>
-      <p:sp>
-        <p:nvSpPr>
-          <p:cNvPr id="14" name="TextBox 13"/>
-          <p:cNvSpPr txBox="1"/>
-          <p:nvPr/>
-        </p:nvSpPr>
-        <p:spPr>
-          <a:xfrm>
-            <a:off x="6415887" y="1764791"/>
-            <a:ext cx="5227167" cy="1453895"/>
-          </a:xfrm>
-          <a:prstGeom prst="rect">
-            <a:avLst/>
-          </a:prstGeom>
-          <a:noFill/>
-        </p:spPr>
-        <p:txBody>
-          <a:bodyPr wrap="square" anchor="t" lIns="73152" rIns="73152" tIns="36576" bIns="36576">
-            <a:spAutoFit/>
-          </a:bodyPr>
-          <a:lstStyle/>
-          <a:p>
-            <a:pPr algn="l" marL="292608" indent="-256032">
-              <a:spcAft>
-                <a:spcPts val="600"/>
-              </a:spcAft>
-              <a:buChar char="•"/>
-            </a:pPr>
-            <a:r>
-              <a:rPr sz="1800" b="0" i="0">
-                <a:solidFill>
-                  <a:srgbClr val="0F172A"/>
-                </a:solidFill>
-                <a:latin typeface="Arial"/>
-              </a:rPr>
-              <a:t>Price = probability · costs move break-even</a:t>
-            </a:r>
-          </a:p>
-          <a:p>
-            <a:pPr algn="l" marL="292608" indent="-256032">
-              <a:spcAft>
-                <a:spcPts val="600"/>
-              </a:spcAft>
-              <a:buChar char="•"/>
-            </a:pPr>
-            <a:r>
-              <a:rPr sz="1800" b="0" i="0">
-                <a:solidFill>
-                  <a:srgbClr val="0F172A"/>
-                </a:solidFill>
-                <a:latin typeface="Arial"/>
-              </a:rPr>
-              <a:t>Priced in / chasing · long shots · closing line · passing</a:t>
-            </a:r>
-          </a:p>
-        </p:txBody>
-      </p:sp>
-      <p:sp>
-        <p:nvSpPr>
-          <p:cNvPr id="15" name="Rounded Rectangle 14"/>
-          <p:cNvSpPr/>
-          <p:nvPr/>
-        </p:nvSpPr>
-        <p:spPr>
-          <a:xfrm>
-            <a:off x="457200" y="3474720"/>
-            <a:ext cx="5501487" cy="2057400"/>
-          </a:xfrm>
-          <a:prstGeom prst="roundRect">
-            <a:avLst>
-              <a:gd name="adj" fmla="val 6000"/>
-            </a:avLst>
-          </a:prstGeom>
-          <a:solidFill>
-            <a:srgbClr val="FFFFFF"/>
-          </a:solidFill>
-          <a:ln w="15875">
-            <a:solidFill>
-              <a:srgbClr val="16A34A"/>
-            </a:solidFill>
-          </a:ln>
-          <a:effectLst/>
-        </p:spPr>
-        <p:style>
-          <a:lnRef idx="1">
-            <a:schemeClr val="accent1"/>
-          </a:lnRef>
-          <a:fillRef idx="3">
-            <a:schemeClr val="accent1"/>
-          </a:fillRef>
-          <a:effectRef idx="2">
-            <a:schemeClr val="accent1"/>
-          </a:effectRef>
-          <a:fontRef idx="minor">
-            <a:schemeClr val="lt1"/>
-          </a:fontRef>
-        </p:style>
-        <p:txBody>
-          <a:bodyPr rtlCol="0" anchor="ctr"/>
-          <a:lstStyle/>
-          <a:p>
-            <a:pPr algn="ctr"/>
-          </a:p>
-        </p:txBody>
-      </p:sp>
-      <p:sp>
-        <p:nvSpPr>
-          <p:cNvPr id="16" name="Rectangle 15"/>
-          <p:cNvSpPr/>
-          <p:nvPr/>
-        </p:nvSpPr>
-        <p:spPr>
-          <a:xfrm>
-            <a:off x="457200" y="3474720"/>
-            <a:ext cx="109728" cy="2057400"/>
-          </a:xfrm>
-          <a:prstGeom prst="rect">
-            <a:avLst/>
-          </a:prstGeom>
-          <a:solidFill>
-            <a:srgbClr val="16A34A"/>
-          </a:solidFill>
-          <a:ln>
-            <a:noFill/>
-          </a:ln>
-          <a:effectLst/>
-        </p:spPr>
-        <p:style>
-          <a:lnRef idx="1">
-            <a:schemeClr val="accent1"/>
-          </a:lnRef>
-          <a:fillRef idx="3">
-            <a:schemeClr val="accent1"/>
-          </a:fillRef>
-          <a:effectRef idx="2">
-            <a:schemeClr val="accent1"/>
-          </a:effectRef>
-          <a:fontRef idx="minor">
-            <a:schemeClr val="lt1"/>
-          </a:fontRef>
-        </p:style>
-        <p:txBody>
-          <a:bodyPr rtlCol="0" anchor="ctr"/>
-          <a:lstStyle/>
-          <a:p>
-            <a:pPr algn="ctr"/>
-          </a:p>
-        </p:txBody>
-      </p:sp>
-      <p:sp>
-        <p:nvSpPr>
-          <p:cNvPr id="17" name="TextBox 16"/>
-          <p:cNvSpPr txBox="1"/>
-          <p:nvPr/>
-        </p:nvSpPr>
-        <p:spPr>
-          <a:xfrm>
-            <a:off x="640080" y="3547872"/>
-            <a:ext cx="5227167" cy="457200"/>
-          </a:xfrm>
-          <a:prstGeom prst="rect">
-            <a:avLst/>
-          </a:prstGeom>
-          <a:noFill/>
-        </p:spPr>
-        <p:txBody>
-          <a:bodyPr wrap="square" anchor="t" lIns="73152" rIns="73152" tIns="36576" bIns="36576">
-            <a:spAutoFit/>
-          </a:bodyPr>
-          <a:lstStyle/>
-          <a:p>
-            <a:pPr algn="l">
-              <a:spcAft>
-                <a:spcPts val="0"/>
-              </a:spcAft>
-            </a:pPr>
-            <a:r>
-              <a:rPr sz="2000" b="1" i="0">
-                <a:solidFill>
-                  <a:srgbClr val="16A34A"/>
-                </a:solidFill>
-                <a:latin typeface="Arial"/>
-              </a:rPr>
-              <a:t>3  Your paper call</a:t>
-            </a:r>
-          </a:p>
-        </p:txBody>
-      </p:sp>
-      <p:sp>
-        <p:nvSpPr>
-          <p:cNvPr id="18" name="TextBox 17"/>
-          <p:cNvSpPr txBox="1"/>
-          <p:nvPr/>
-        </p:nvSpPr>
-        <p:spPr>
-          <a:xfrm>
-            <a:off x="640080" y="4005072"/>
-            <a:ext cx="5227167" cy="1453895"/>
-          </a:xfrm>
-          <a:prstGeom prst="rect">
-            <a:avLst/>
-          </a:prstGeom>
-          <a:noFill/>
-        </p:spPr>
-        <p:txBody>
-          <a:bodyPr wrap="square" anchor="t" lIns="73152" rIns="73152" tIns="36576" bIns="36576">
-            <a:spAutoFit/>
-          </a:bodyPr>
-          <a:lstStyle/>
-          <a:p>
-            <a:pPr algn="l" marL="292608" indent="-256032">
-              <a:spcAft>
-                <a:spcPts val="600"/>
-              </a:spcAft>
-              <a:buChar char="•"/>
-            </a:pPr>
-            <a:r>
-              <a:rPr sz="1800" b="0" i="0">
-                <a:solidFill>
-                  <a:srgbClr val="0F172A"/>
-                </a:solidFill>
-                <a:latin typeface="Arial"/>
-              </a:rPr>
-              <a:t>Back a team or pass</a:t>
-            </a:r>
-          </a:p>
-          <a:p>
-            <a:pPr algn="l" marL="292608" indent="-256032">
-              <a:spcAft>
-                <a:spcPts val="600"/>
-              </a:spcAft>
-              <a:buChar char="•"/>
-            </a:pPr>
-            <a:r>
-              <a:rPr sz="1800" b="0" i="0">
-                <a:solidFill>
-                  <a:srgbClr val="0F172A"/>
-                </a:solidFill>
-                <a:latin typeface="Arial"/>
-              </a:rPr>
-              <a:t>Then: close, CLV, result, and what the agent did</a:t>
-            </a:r>
-          </a:p>
-        </p:txBody>
-      </p:sp>
-      <p:sp>
-        <p:nvSpPr>
-          <p:cNvPr id="19" name="Rounded Rectangle 18"/>
-          <p:cNvSpPr/>
-          <p:nvPr/>
-        </p:nvSpPr>
-        <p:spPr>
-          <a:xfrm>
-            <a:off x="6233007" y="3474720"/>
-            <a:ext cx="5501487" cy="2057400"/>
+            <a:ext cx="5120640" cy="5074920"/>
           </a:xfrm>
           <a:prstGeom prst="roundRect">
             <a:avLst>
@@ -6720,14 +6427,14 @@
       </p:sp>
       <p:sp>
         <p:nvSpPr>
-          <p:cNvPr id="20" name="Rectangle 19"/>
+          <p:cNvPr id="8" name="Rectangle 7"/>
           <p:cNvSpPr/>
           <p:nvPr/>
         </p:nvSpPr>
         <p:spPr>
           <a:xfrm>
-            <a:off x="6233007" y="3474720"/>
-            <a:ext cx="109728" cy="2057400"/>
+            <a:off x="457200" y="1234439"/>
+            <a:ext cx="109728" cy="5074920"/>
           </a:xfrm>
           <a:prstGeom prst="rect">
             <a:avLst/>
@@ -6764,14 +6471,14 @@
       </p:sp>
       <p:sp>
         <p:nvSpPr>
-          <p:cNvPr id="21" name="TextBox 20"/>
+          <p:cNvPr id="9" name="TextBox 8"/>
           <p:cNvSpPr txBox="1"/>
           <p:nvPr/>
         </p:nvSpPr>
         <p:spPr>
           <a:xfrm>
-            <a:off x="6415887" y="3547872"/>
-            <a:ext cx="5227167" cy="457200"/>
+            <a:off x="640080" y="1307592"/>
+            <a:ext cx="4846320" cy="457200"/>
           </a:xfrm>
           <a:prstGeom prst="rect">
             <a:avLst/>
@@ -6796,21 +6503,21 @@
                 </a:solidFill>
                 <a:latin typeface="Arial"/>
               </a:rPr>
-              <a:t>4  Habit feedback</a:t>
-            </a:r>
-          </a:p>
-        </p:txBody>
-      </p:sp>
-      <p:sp>
-        <p:nvSpPr>
-          <p:cNvPr id="22" name="TextBox 21"/>
+              <a:t>What we claim</a:t>
+            </a:r>
+          </a:p>
+        </p:txBody>
+      </p:sp>
+      <p:sp>
+        <p:nvSpPr>
+          <p:cNvPr id="10" name="TextBox 9"/>
           <p:cNvSpPr txBox="1"/>
           <p:nvPr/>
         </p:nvSpPr>
         <p:spPr>
           <a:xfrm>
-            <a:off x="6415887" y="4005072"/>
-            <a:ext cx="5227167" cy="1453895"/>
+            <a:off x="640080" y="1764791"/>
+            <a:ext cx="4846320" cy="4471416"/>
           </a:xfrm>
           <a:prstGeom prst="rect">
             <a:avLst/>
@@ -6836,7 +6543,7 @@
                 </a:solidFill>
                 <a:latin typeface="Arial"/>
               </a:rPr>
-              <a:t>Paying above the close, long shots, chasing</a:t>
+              <a:t>Structural disadvantages: costs, speed, expertise</a:t>
             </a:r>
           </a:p>
           <a:p>
@@ -6847,35 +6554,133 @@
               <a:buChar char="•"/>
             </a:pPr>
             <a:r>
+              <a:rPr sz="1800" b="1" i="0">
+                <a:solidFill>
+                  <a:srgbClr val="0F172A"/>
+                </a:solidFill>
+                <a:latin typeface="Arial"/>
+              </a:rPr>
+              <a:t>Not</a:t>
+            </a:r>
+            <a:r>
               <a:rPr sz="1800" b="0" i="0">
                 <a:solidFill>
                   <a:srgbClr val="0F172A"/>
                 </a:solidFill>
                 <a:latin typeface="Arial"/>
               </a:rPr>
-              <a:t>Small samples are mostly luck</a:t>
-            </a:r>
-          </a:p>
-        </p:txBody>
-      </p:sp>
-      <p:sp>
-        <p:nvSpPr>
-          <p:cNvPr id="23" name="Rounded Rectangle 22"/>
+              <a:t> manipulation or fraud</a:t>
+            </a:r>
+          </a:p>
+          <a:p>
+            <a:pPr algn="l" marL="292608" indent="-256032">
+              <a:spcAft>
+                <a:spcPts val="600"/>
+              </a:spcAft>
+              <a:buChar char="•"/>
+            </a:pPr>
+            <a:r>
+              <a:rPr sz="1800" b="1" i="0">
+                <a:solidFill>
+                  <a:srgbClr val="0F172A"/>
+                </a:solidFill>
+                <a:latin typeface="Arial"/>
+              </a:rPr>
+              <a:t>No</a:t>
+            </a:r>
+            <a:r>
+              <a:rPr sz="1800" b="0" i="0">
+                <a:solidFill>
+                  <a:srgbClr val="0F172A"/>
+                </a:solidFill>
+                <a:latin typeface="Arial"/>
+              </a:rPr>
+              <a:t> accusation against Kalshi or any venue</a:t>
+            </a:r>
+          </a:p>
+          <a:p>
+            <a:pPr algn="l" marL="292608" indent="-256032">
+              <a:spcAft>
+                <a:spcPts val="600"/>
+              </a:spcAft>
+              <a:buChar char="•"/>
+            </a:pPr>
+            <a:r>
+              <a:rPr sz="1800" b="0" i="0">
+                <a:solidFill>
+                  <a:srgbClr val="0F172A"/>
+                </a:solidFill>
+                <a:latin typeface="Arial"/>
+              </a:rPr>
+              <a:t>Paper money; public data only</a:t>
+            </a:r>
+          </a:p>
+        </p:txBody>
+      </p:sp>
+      <p:sp>
+        <p:nvSpPr>
+          <p:cNvPr id="11" name="Rounded Rectangle 10"/>
           <p:cNvSpPr/>
           <p:nvPr/>
         </p:nvSpPr>
         <p:spPr>
           <a:xfrm>
-            <a:off x="457200" y="5760720"/>
-            <a:ext cx="11277295" cy="502920"/>
+            <a:off x="5852160" y="1234439"/>
+            <a:ext cx="5882335" cy="5074920"/>
           </a:xfrm>
           <a:prstGeom prst="roundRect">
             <a:avLst>
-              <a:gd name="adj" fmla="val 12000"/>
+              <a:gd name="adj" fmla="val 6000"/>
             </a:avLst>
           </a:prstGeom>
           <a:solidFill>
-            <a:srgbClr val="FEF3C7"/>
+            <a:srgbClr val="FFFFFF"/>
+          </a:solidFill>
+          <a:ln w="15875">
+            <a:solidFill>
+              <a:srgbClr val="DC2626"/>
+            </a:solidFill>
+          </a:ln>
+          <a:effectLst/>
+        </p:spPr>
+        <p:style>
+          <a:lnRef idx="1">
+            <a:schemeClr val="accent1"/>
+          </a:lnRef>
+          <a:fillRef idx="3">
+            <a:schemeClr val="accent1"/>
+          </a:fillRef>
+          <a:effectRef idx="2">
+            <a:schemeClr val="accent1"/>
+          </a:effectRef>
+          <a:fontRef idx="minor">
+            <a:schemeClr val="lt1"/>
+          </a:fontRef>
+        </p:style>
+        <p:txBody>
+          <a:bodyPr rtlCol="0" anchor="ctr"/>
+          <a:lstStyle/>
+          <a:p>
+            <a:pPr algn="ctr"/>
+          </a:p>
+        </p:txBody>
+      </p:sp>
+      <p:sp>
+        <p:nvSpPr>
+          <p:cNvPr id="12" name="Rectangle 11"/>
+          <p:cNvSpPr/>
+          <p:nvPr/>
+        </p:nvSpPr>
+        <p:spPr>
+          <a:xfrm>
+            <a:off x="5852160" y="1234439"/>
+            <a:ext cx="109728" cy="5074920"/>
+          </a:xfrm>
+          <a:prstGeom prst="rect">
+            <a:avLst/>
+          </a:prstGeom>
+          <a:solidFill>
+            <a:srgbClr val="DC2626"/>
           </a:solidFill>
           <a:ln>
             <a:noFill/>
@@ -6906,14 +6711,14 @@
       </p:sp>
       <p:sp>
         <p:nvSpPr>
-          <p:cNvPr id="24" name="TextBox 23"/>
+          <p:cNvPr id="13" name="TextBox 12"/>
           <p:cNvSpPr txBox="1"/>
           <p:nvPr/>
         </p:nvSpPr>
         <p:spPr>
           <a:xfrm>
-            <a:off x="548640" y="5760720"/>
-            <a:ext cx="11094415" cy="502920"/>
+            <a:off x="6035040" y="1307592"/>
+            <a:ext cx="5608015" cy="457200"/>
           </a:xfrm>
           <a:prstGeom prst="rect">
             <a:avLst/>
@@ -6921,7 +6726,7 @@
           <a:noFill/>
         </p:spPr>
         <p:txBody>
-          <a:bodyPr wrap="square" anchor="ctr" lIns="73152" rIns="73152" tIns="36576" bIns="36576">
+          <a:bodyPr wrap="square" anchor="t" lIns="73152" rIns="73152" tIns="36576" bIns="36576">
             <a:spAutoFit/>
           </a:bodyPr>
           <a:lstStyle/>
@@ -6932,13 +6737,130 @@
               </a:spcAft>
             </a:pPr>
             <a:r>
+              <a:rPr sz="2000" b="1" i="0">
+                <a:solidFill>
+                  <a:srgbClr val="DC2626"/>
+                </a:solidFill>
+                <a:latin typeface="Arial"/>
+              </a:rPr>
+              <a:t>Caveats and disclosure</a:t>
+            </a:r>
+          </a:p>
+        </p:txBody>
+      </p:sp>
+      <p:sp>
+        <p:nvSpPr>
+          <p:cNvPr id="14" name="TextBox 13"/>
+          <p:cNvSpPr txBox="1"/>
+          <p:nvPr/>
+        </p:nvSpPr>
+        <p:spPr>
+          <a:xfrm>
+            <a:off x="6035040" y="1764791"/>
+            <a:ext cx="5608015" cy="4471416"/>
+          </a:xfrm>
+          <a:prstGeom prst="rect">
+            <a:avLst/>
+          </a:prstGeom>
+          <a:noFill/>
+        </p:spPr>
+        <p:txBody>
+          <a:bodyPr wrap="square" anchor="t" lIns="73152" rIns="73152" tIns="36576" bIns="36576">
+            <a:spAutoFit/>
+          </a:bodyPr>
+          <a:lstStyle/>
+          <a:p>
+            <a:pPr algn="l" marL="292608" indent="-256032">
+              <a:spcAft>
+                <a:spcPts val="600"/>
+              </a:spcAft>
+              <a:buChar char="•"/>
+            </a:pPr>
+            <a:r>
+              <a:rPr sz="1800" b="1" i="0">
+                <a:solidFill>
+                  <a:srgbClr val="0F172A"/>
+                </a:solidFill>
+                <a:latin typeface="Arial"/>
+              </a:rPr>
+              <a:t>Disclosure:</a:t>
+            </a:r>
+            <a:r>
               <a:rPr sz="1800" b="0" i="0">
                 <a:solidFill>
                   <a:srgbClr val="0F172A"/>
                 </a:solidFill>
                 <a:latin typeface="Arial"/>
               </a:rPr>
-              <a:t>Educational, paper money only · only information public at that moment · no promise words</a:t>
+              <a:t> anchor and reviewer designed after seeing Feb–Apr results, so that window is not a clean holdout; walk-forward and play-off holdout are the honest checks</a:t>
+            </a:r>
+          </a:p>
+          <a:p>
+            <a:pPr algn="l" marL="292608" indent="-256032">
+              <a:spcAft>
+                <a:spcPts val="600"/>
+              </a:spcAft>
+              <a:buChar char="•"/>
+            </a:pPr>
+            <a:r>
+              <a:rPr sz="1800" b="0" i="0">
+                <a:solidFill>
+                  <a:srgbClr val="0F172A"/>
+                </a:solidFill>
+                <a:latin typeface="Arial"/>
+              </a:rPr>
+              <a:t>One season (1,316 games), game-winner markets only</a:t>
+            </a:r>
+          </a:p>
+          <a:p>
+            <a:pPr algn="l" marL="292608" indent="-256032">
+              <a:spcAft>
+                <a:spcPts val="600"/>
+              </a:spcAft>
+              <a:buChar char="•"/>
+            </a:pPr>
+            <a:r>
+              <a:rPr sz="1800" b="0" i="0">
+                <a:solidFill>
+                  <a:srgbClr val="0F172A"/>
+                </a:solidFill>
+                <a:latin typeface="Arial"/>
+              </a:rPr>
+              <a:t>News stamped tip − 30 min (proxy; real reports come earlier)</a:t>
+            </a:r>
+          </a:p>
+          <a:p>
+            <a:pPr algn="l" marL="292608" indent="-256032">
+              <a:spcAft>
+                <a:spcPts val="600"/>
+              </a:spcAft>
+              <a:buChar char="•"/>
+            </a:pPr>
+            <a:r>
+              <a:rPr sz="1800" b="0" i="0">
+                <a:solidFill>
+                  <a:srgbClr val="0F172A"/>
+                </a:solidFill>
+                <a:latin typeface="Arial"/>
+              </a:rPr>
+              <a:t>Costs for a $20 order at tip − 60 min; long-shot bias not clearly supported</a:t>
+            </a:r>
+          </a:p>
+          <a:p>
+            <a:pPr algn="l" marL="292608" indent="-256032">
+              <a:spcAft>
+                <a:spcPts val="600"/>
+              </a:spcAft>
+              <a:buChar char="•"/>
+            </a:pPr>
+            <a:r>
+              <a:rPr sz="1800" b="0" i="0">
+                <a:solidFill>
+                  <a:srgbClr val="0F172A"/>
+                </a:solidFill>
+                <a:latin typeface="Arial"/>
+              </a:rPr>
+              <a:t>Well-being figures are published research, not ours</a:t>
             </a:r>
           </a:p>
         </p:txBody>
@@ -7083,7 +7005,7 @@
                 </a:solidFill>
                 <a:latin typeface="Arial"/>
               </a:rPr>
-              <a:t>Honest scope: what “unfair” means here</a:t>
+              <a:t>Live demo: streamlit run app.py</a:t>
             </a:r>
           </a:p>
         </p:txBody>
@@ -7122,7 +7044,7 @@
                 </a:solidFill>
                 <a:latin typeface="Arial"/>
               </a:rPr>
-              <a:t>DASC7606C Group 12 · Can a consumer beat a sports prediction market?</a:t>
+              <a:t>DASC7606C Group 12 · Betting markets are tilted against consumers</a:t>
             </a:r>
           </a:p>
         </p:txBody>
@@ -7162,700 +7084,6 @@
                 <a:latin typeface="Arial"/>
               </a:rPr>
               <a:t>13</a:t>
-            </a:r>
-          </a:p>
-        </p:txBody>
-      </p:sp>
-      <p:sp>
-        <p:nvSpPr>
-          <p:cNvPr id="7" name="Rounded Rectangle 6"/>
-          <p:cNvSpPr/>
-          <p:nvPr/>
-        </p:nvSpPr>
-        <p:spPr>
-          <a:xfrm>
-            <a:off x="457200" y="1234439"/>
-            <a:ext cx="5120640" cy="5074920"/>
-          </a:xfrm>
-          <a:prstGeom prst="roundRect">
-            <a:avLst>
-              <a:gd name="adj" fmla="val 6000"/>
-            </a:avLst>
-          </a:prstGeom>
-          <a:solidFill>
-            <a:srgbClr val="FFFFFF"/>
-          </a:solidFill>
-          <a:ln w="15875">
-            <a:solidFill>
-              <a:srgbClr val="1E293B"/>
-            </a:solidFill>
-          </a:ln>
-          <a:effectLst/>
-        </p:spPr>
-        <p:style>
-          <a:lnRef idx="1">
-            <a:schemeClr val="accent1"/>
-          </a:lnRef>
-          <a:fillRef idx="3">
-            <a:schemeClr val="accent1"/>
-          </a:fillRef>
-          <a:effectRef idx="2">
-            <a:schemeClr val="accent1"/>
-          </a:effectRef>
-          <a:fontRef idx="minor">
-            <a:schemeClr val="lt1"/>
-          </a:fontRef>
-        </p:style>
-        <p:txBody>
-          <a:bodyPr rtlCol="0" anchor="ctr"/>
-          <a:lstStyle/>
-          <a:p>
-            <a:pPr algn="ctr"/>
-          </a:p>
-        </p:txBody>
-      </p:sp>
-      <p:sp>
-        <p:nvSpPr>
-          <p:cNvPr id="8" name="Rectangle 7"/>
-          <p:cNvSpPr/>
-          <p:nvPr/>
-        </p:nvSpPr>
-        <p:spPr>
-          <a:xfrm>
-            <a:off x="457200" y="1234439"/>
-            <a:ext cx="109728" cy="5074920"/>
-          </a:xfrm>
-          <a:prstGeom prst="rect">
-            <a:avLst/>
-          </a:prstGeom>
-          <a:solidFill>
-            <a:srgbClr val="1E293B"/>
-          </a:solidFill>
-          <a:ln>
-            <a:noFill/>
-          </a:ln>
-          <a:effectLst/>
-        </p:spPr>
-        <p:style>
-          <a:lnRef idx="1">
-            <a:schemeClr val="accent1"/>
-          </a:lnRef>
-          <a:fillRef idx="3">
-            <a:schemeClr val="accent1"/>
-          </a:fillRef>
-          <a:effectRef idx="2">
-            <a:schemeClr val="accent1"/>
-          </a:effectRef>
-          <a:fontRef idx="minor">
-            <a:schemeClr val="lt1"/>
-          </a:fontRef>
-        </p:style>
-        <p:txBody>
-          <a:bodyPr rtlCol="0" anchor="ctr"/>
-          <a:lstStyle/>
-          <a:p>
-            <a:pPr algn="ctr"/>
-          </a:p>
-        </p:txBody>
-      </p:sp>
-      <p:sp>
-        <p:nvSpPr>
-          <p:cNvPr id="9" name="TextBox 8"/>
-          <p:cNvSpPr txBox="1"/>
-          <p:nvPr/>
-        </p:nvSpPr>
-        <p:spPr>
-          <a:xfrm>
-            <a:off x="640080" y="1307592"/>
-            <a:ext cx="4846320" cy="457200"/>
-          </a:xfrm>
-          <a:prstGeom prst="rect">
-            <a:avLst/>
-          </a:prstGeom>
-          <a:noFill/>
-        </p:spPr>
-        <p:txBody>
-          <a:bodyPr wrap="square" anchor="t" lIns="73152" rIns="73152" tIns="36576" bIns="36576">
-            <a:spAutoFit/>
-          </a:bodyPr>
-          <a:lstStyle/>
-          <a:p>
-            <a:pPr algn="l">
-              <a:spcAft>
-                <a:spcPts val="0"/>
-              </a:spcAft>
-            </a:pPr>
-            <a:r>
-              <a:rPr sz="2000" b="1" i="0">
-                <a:solidFill>
-                  <a:srgbClr val="1E293B"/>
-                </a:solidFill>
-                <a:latin typeface="Arial"/>
-              </a:rPr>
-              <a:t>What we claim</a:t>
-            </a:r>
-          </a:p>
-        </p:txBody>
-      </p:sp>
-      <p:sp>
-        <p:nvSpPr>
-          <p:cNvPr id="10" name="TextBox 9"/>
-          <p:cNvSpPr txBox="1"/>
-          <p:nvPr/>
-        </p:nvSpPr>
-        <p:spPr>
-          <a:xfrm>
-            <a:off x="640080" y="1764791"/>
-            <a:ext cx="4846320" cy="4471416"/>
-          </a:xfrm>
-          <a:prstGeom prst="rect">
-            <a:avLst/>
-          </a:prstGeom>
-          <a:noFill/>
-        </p:spPr>
-        <p:txBody>
-          <a:bodyPr wrap="square" anchor="t" lIns="73152" rIns="73152" tIns="36576" bIns="36576">
-            <a:spAutoFit/>
-          </a:bodyPr>
-          <a:lstStyle/>
-          <a:p>
-            <a:pPr algn="l" marL="292608" indent="-256032">
-              <a:spcAft>
-                <a:spcPts val="600"/>
-              </a:spcAft>
-              <a:buChar char="•"/>
-            </a:pPr>
-            <a:r>
-              <a:rPr sz="1800" b="0" i="0">
-                <a:solidFill>
-                  <a:srgbClr val="0F172A"/>
-                </a:solidFill>
-                <a:latin typeface="Arial"/>
-              </a:rPr>
-              <a:t>Structural disadvantages: costs, speed, expertise</a:t>
-            </a:r>
-          </a:p>
-          <a:p>
-            <a:pPr algn="l" marL="292608" indent="-256032">
-              <a:spcAft>
-                <a:spcPts val="600"/>
-              </a:spcAft>
-              <a:buChar char="•"/>
-            </a:pPr>
-            <a:r>
-              <a:rPr sz="1800" b="1" i="0">
-                <a:solidFill>
-                  <a:srgbClr val="0F172A"/>
-                </a:solidFill>
-                <a:latin typeface="Arial"/>
-              </a:rPr>
-              <a:t>Not</a:t>
-            </a:r>
-            <a:r>
-              <a:rPr sz="1800" b="0" i="0">
-                <a:solidFill>
-                  <a:srgbClr val="0F172A"/>
-                </a:solidFill>
-                <a:latin typeface="Arial"/>
-              </a:rPr>
-              <a:t> manipulation or fraud</a:t>
-            </a:r>
-          </a:p>
-          <a:p>
-            <a:pPr algn="l" marL="292608" indent="-256032">
-              <a:spcAft>
-                <a:spcPts val="600"/>
-              </a:spcAft>
-              <a:buChar char="•"/>
-            </a:pPr>
-            <a:r>
-              <a:rPr sz="1800" b="1" i="0">
-                <a:solidFill>
-                  <a:srgbClr val="0F172A"/>
-                </a:solidFill>
-                <a:latin typeface="Arial"/>
-              </a:rPr>
-              <a:t>No</a:t>
-            </a:r>
-            <a:r>
-              <a:rPr sz="1800" b="0" i="0">
-                <a:solidFill>
-                  <a:srgbClr val="0F172A"/>
-                </a:solidFill>
-                <a:latin typeface="Arial"/>
-              </a:rPr>
-              <a:t> accusation against Kalshi or any venue</a:t>
-            </a:r>
-          </a:p>
-          <a:p>
-            <a:pPr algn="l" marL="292608" indent="-256032">
-              <a:spcAft>
-                <a:spcPts val="600"/>
-              </a:spcAft>
-              <a:buChar char="•"/>
-            </a:pPr>
-            <a:r>
-              <a:rPr sz="1800" b="0" i="0">
-                <a:solidFill>
-                  <a:srgbClr val="0F172A"/>
-                </a:solidFill>
-                <a:latin typeface="Arial"/>
-              </a:rPr>
-              <a:t>Paper money; public data only</a:t>
-            </a:r>
-          </a:p>
-        </p:txBody>
-      </p:sp>
-      <p:sp>
-        <p:nvSpPr>
-          <p:cNvPr id="11" name="Rounded Rectangle 10"/>
-          <p:cNvSpPr/>
-          <p:nvPr/>
-        </p:nvSpPr>
-        <p:spPr>
-          <a:xfrm>
-            <a:off x="5852160" y="1234439"/>
-            <a:ext cx="5882335" cy="5074920"/>
-          </a:xfrm>
-          <a:prstGeom prst="roundRect">
-            <a:avLst>
-              <a:gd name="adj" fmla="val 6000"/>
-            </a:avLst>
-          </a:prstGeom>
-          <a:solidFill>
-            <a:srgbClr val="FFFFFF"/>
-          </a:solidFill>
-          <a:ln w="15875">
-            <a:solidFill>
-              <a:srgbClr val="DC2626"/>
-            </a:solidFill>
-          </a:ln>
-          <a:effectLst/>
-        </p:spPr>
-        <p:style>
-          <a:lnRef idx="1">
-            <a:schemeClr val="accent1"/>
-          </a:lnRef>
-          <a:fillRef idx="3">
-            <a:schemeClr val="accent1"/>
-          </a:fillRef>
-          <a:effectRef idx="2">
-            <a:schemeClr val="accent1"/>
-          </a:effectRef>
-          <a:fontRef idx="minor">
-            <a:schemeClr val="lt1"/>
-          </a:fontRef>
-        </p:style>
-        <p:txBody>
-          <a:bodyPr rtlCol="0" anchor="ctr"/>
-          <a:lstStyle/>
-          <a:p>
-            <a:pPr algn="ctr"/>
-          </a:p>
-        </p:txBody>
-      </p:sp>
-      <p:sp>
-        <p:nvSpPr>
-          <p:cNvPr id="12" name="Rectangle 11"/>
-          <p:cNvSpPr/>
-          <p:nvPr/>
-        </p:nvSpPr>
-        <p:spPr>
-          <a:xfrm>
-            <a:off x="5852160" y="1234439"/>
-            <a:ext cx="109728" cy="5074920"/>
-          </a:xfrm>
-          <a:prstGeom prst="rect">
-            <a:avLst/>
-          </a:prstGeom>
-          <a:solidFill>
-            <a:srgbClr val="DC2626"/>
-          </a:solidFill>
-          <a:ln>
-            <a:noFill/>
-          </a:ln>
-          <a:effectLst/>
-        </p:spPr>
-        <p:style>
-          <a:lnRef idx="1">
-            <a:schemeClr val="accent1"/>
-          </a:lnRef>
-          <a:fillRef idx="3">
-            <a:schemeClr val="accent1"/>
-          </a:fillRef>
-          <a:effectRef idx="2">
-            <a:schemeClr val="accent1"/>
-          </a:effectRef>
-          <a:fontRef idx="minor">
-            <a:schemeClr val="lt1"/>
-          </a:fontRef>
-        </p:style>
-        <p:txBody>
-          <a:bodyPr rtlCol="0" anchor="ctr"/>
-          <a:lstStyle/>
-          <a:p>
-            <a:pPr algn="ctr"/>
-          </a:p>
-        </p:txBody>
-      </p:sp>
-      <p:sp>
-        <p:nvSpPr>
-          <p:cNvPr id="13" name="TextBox 12"/>
-          <p:cNvSpPr txBox="1"/>
-          <p:nvPr/>
-        </p:nvSpPr>
-        <p:spPr>
-          <a:xfrm>
-            <a:off x="6035040" y="1307592"/>
-            <a:ext cx="5608015" cy="457200"/>
-          </a:xfrm>
-          <a:prstGeom prst="rect">
-            <a:avLst/>
-          </a:prstGeom>
-          <a:noFill/>
-        </p:spPr>
-        <p:txBody>
-          <a:bodyPr wrap="square" anchor="t" lIns="73152" rIns="73152" tIns="36576" bIns="36576">
-            <a:spAutoFit/>
-          </a:bodyPr>
-          <a:lstStyle/>
-          <a:p>
-            <a:pPr algn="l">
-              <a:spcAft>
-                <a:spcPts val="0"/>
-              </a:spcAft>
-            </a:pPr>
-            <a:r>
-              <a:rPr sz="2000" b="1" i="0">
-                <a:solidFill>
-                  <a:srgbClr val="DC2626"/>
-                </a:solidFill>
-                <a:latin typeface="Arial"/>
-              </a:rPr>
-              <a:t>Caveats and disclosure</a:t>
-            </a:r>
-          </a:p>
-        </p:txBody>
-      </p:sp>
-      <p:sp>
-        <p:nvSpPr>
-          <p:cNvPr id="14" name="TextBox 13"/>
-          <p:cNvSpPr txBox="1"/>
-          <p:nvPr/>
-        </p:nvSpPr>
-        <p:spPr>
-          <a:xfrm>
-            <a:off x="6035040" y="1764791"/>
-            <a:ext cx="5608015" cy="4471416"/>
-          </a:xfrm>
-          <a:prstGeom prst="rect">
-            <a:avLst/>
-          </a:prstGeom>
-          <a:noFill/>
-        </p:spPr>
-        <p:txBody>
-          <a:bodyPr wrap="square" anchor="t" lIns="73152" rIns="73152" tIns="36576" bIns="36576">
-            <a:spAutoFit/>
-          </a:bodyPr>
-          <a:lstStyle/>
-          <a:p>
-            <a:pPr algn="l" marL="292608" indent="-256032">
-              <a:spcAft>
-                <a:spcPts val="600"/>
-              </a:spcAft>
-              <a:buChar char="•"/>
-            </a:pPr>
-            <a:r>
-              <a:rPr sz="1800" b="1" i="0">
-                <a:solidFill>
-                  <a:srgbClr val="0F172A"/>
-                </a:solidFill>
-                <a:latin typeface="Arial"/>
-              </a:rPr>
-              <a:t>Disclosure:</a:t>
-            </a:r>
-            <a:r>
-              <a:rPr sz="1800" b="0" i="0">
-                <a:solidFill>
-                  <a:srgbClr val="0F172A"/>
-                </a:solidFill>
-                <a:latin typeface="Arial"/>
-              </a:rPr>
-              <a:t> anchor and reviewer designed after seeing Feb–Apr results, so that window is not a clean holdout; walk-forward and play-off holdout are the honest checks</a:t>
-            </a:r>
-          </a:p>
-          <a:p>
-            <a:pPr algn="l" marL="292608" indent="-256032">
-              <a:spcAft>
-                <a:spcPts val="600"/>
-              </a:spcAft>
-              <a:buChar char="•"/>
-            </a:pPr>
-            <a:r>
-              <a:rPr sz="1800" b="0" i="0">
-                <a:solidFill>
-                  <a:srgbClr val="0F172A"/>
-                </a:solidFill>
-                <a:latin typeface="Arial"/>
-              </a:rPr>
-              <a:t>One season (1,316 games), game-winner markets only</a:t>
-            </a:r>
-          </a:p>
-          <a:p>
-            <a:pPr algn="l" marL="292608" indent="-256032">
-              <a:spcAft>
-                <a:spcPts val="600"/>
-              </a:spcAft>
-              <a:buChar char="•"/>
-            </a:pPr>
-            <a:r>
-              <a:rPr sz="1800" b="0" i="0">
-                <a:solidFill>
-                  <a:srgbClr val="0F172A"/>
-                </a:solidFill>
-                <a:latin typeface="Arial"/>
-              </a:rPr>
-              <a:t>News stamped tip − 30 min (proxy; real reports come earlier)</a:t>
-            </a:r>
-          </a:p>
-          <a:p>
-            <a:pPr algn="l" marL="292608" indent="-256032">
-              <a:spcAft>
-                <a:spcPts val="600"/>
-              </a:spcAft>
-              <a:buChar char="•"/>
-            </a:pPr>
-            <a:r>
-              <a:rPr sz="1800" b="0" i="0">
-                <a:solidFill>
-                  <a:srgbClr val="0F172A"/>
-                </a:solidFill>
-                <a:latin typeface="Arial"/>
-              </a:rPr>
-              <a:t>Costs measured for a $20 order at tip − 60 min; long-shot test underpowered</a:t>
-            </a:r>
-          </a:p>
-        </p:txBody>
-      </p:sp>
-    </p:spTree>
-  </p:cSld>
-  <p:clrMapOvr>
-    <a:masterClrMapping/>
-  </p:clrMapOvr>
-</p:sld>
-</file>
-
-<file path=ppt/slides/slide14.xml><?xml version="1.0" encoding="utf-8"?>
-<p:sld xmlns:a="http://schemas.openxmlformats.org/drawingml/2006/main" xmlns:p="http://schemas.openxmlformats.org/presentationml/2006/main" xmlns:r="http://schemas.openxmlformats.org/officeDocument/2006/relationships">
-  <p:cSld>
-    <p:spTree>
-      <p:nvGrpSpPr>
-        <p:cNvPr id="1" name=""/>
-        <p:cNvGrpSpPr/>
-        <p:nvPr/>
-      </p:nvGrpSpPr>
-      <p:grpSpPr/>
-      <p:sp>
-        <p:nvSpPr>
-          <p:cNvPr id="2" name="Rectangle 1"/>
-          <p:cNvSpPr/>
-          <p:nvPr/>
-        </p:nvSpPr>
-        <p:spPr>
-          <a:xfrm>
-            <a:off x="0" y="0"/>
-            <a:ext cx="12191695" cy="868680"/>
-          </a:xfrm>
-          <a:prstGeom prst="rect">
-            <a:avLst/>
-          </a:prstGeom>
-          <a:solidFill>
-            <a:srgbClr val="1E293B"/>
-          </a:solidFill>
-          <a:ln>
-            <a:noFill/>
-          </a:ln>
-          <a:effectLst/>
-        </p:spPr>
-        <p:style>
-          <a:lnRef idx="1">
-            <a:schemeClr val="accent1"/>
-          </a:lnRef>
-          <a:fillRef idx="3">
-            <a:schemeClr val="accent1"/>
-          </a:fillRef>
-          <a:effectRef idx="2">
-            <a:schemeClr val="accent1"/>
-          </a:effectRef>
-          <a:fontRef idx="minor">
-            <a:schemeClr val="lt1"/>
-          </a:fontRef>
-        </p:style>
-        <p:txBody>
-          <a:bodyPr rtlCol="0" anchor="ctr"/>
-          <a:lstStyle/>
-          <a:p>
-            <a:pPr algn="ctr"/>
-          </a:p>
-        </p:txBody>
-      </p:sp>
-      <p:sp>
-        <p:nvSpPr>
-          <p:cNvPr id="3" name="Rectangle 2"/>
-          <p:cNvSpPr/>
-          <p:nvPr/>
-        </p:nvSpPr>
-        <p:spPr>
-          <a:xfrm>
-            <a:off x="0" y="868680"/>
-            <a:ext cx="12191695" cy="54864"/>
-          </a:xfrm>
-          <a:prstGeom prst="rect">
-            <a:avLst/>
-          </a:prstGeom>
-          <a:solidFill>
-            <a:srgbClr val="EA580C"/>
-          </a:solidFill>
-          <a:ln>
-            <a:noFill/>
-          </a:ln>
-          <a:effectLst/>
-        </p:spPr>
-        <p:style>
-          <a:lnRef idx="1">
-            <a:schemeClr val="accent1"/>
-          </a:lnRef>
-          <a:fillRef idx="3">
-            <a:schemeClr val="accent1"/>
-          </a:fillRef>
-          <a:effectRef idx="2">
-            <a:schemeClr val="accent1"/>
-          </a:effectRef>
-          <a:fontRef idx="minor">
-            <a:schemeClr val="lt1"/>
-          </a:fontRef>
-        </p:style>
-        <p:txBody>
-          <a:bodyPr rtlCol="0" anchor="ctr"/>
-          <a:lstStyle/>
-          <a:p>
-            <a:pPr algn="ctr"/>
-          </a:p>
-        </p:txBody>
-      </p:sp>
-      <p:sp>
-        <p:nvSpPr>
-          <p:cNvPr id="4" name="TextBox 3"/>
-          <p:cNvSpPr txBox="1"/>
-          <p:nvPr/>
-        </p:nvSpPr>
-        <p:spPr>
-          <a:xfrm>
-            <a:off x="457200" y="109728"/>
-            <a:ext cx="11277295" cy="685800"/>
-          </a:xfrm>
-          <a:prstGeom prst="rect">
-            <a:avLst/>
-          </a:prstGeom>
-          <a:noFill/>
-        </p:spPr>
-        <p:txBody>
-          <a:bodyPr wrap="square" anchor="ctr" lIns="73152" rIns="73152" tIns="36576" bIns="36576">
-            <a:spAutoFit/>
-          </a:bodyPr>
-          <a:lstStyle/>
-          <a:p>
-            <a:pPr algn="l">
-              <a:spcAft>
-                <a:spcPts val="0"/>
-              </a:spcAft>
-            </a:pPr>
-            <a:r>
-              <a:rPr sz="3000" b="1" i="0">
-                <a:solidFill>
-                  <a:srgbClr val="FFFFFF"/>
-                </a:solidFill>
-                <a:latin typeface="Arial"/>
-              </a:rPr>
-              <a:t>Live demo: streamlit run app.py</a:t>
-            </a:r>
-          </a:p>
-        </p:txBody>
-      </p:sp>
-      <p:sp>
-        <p:nvSpPr>
-          <p:cNvPr id="5" name="TextBox 4"/>
-          <p:cNvSpPr txBox="1"/>
-          <p:nvPr/>
-        </p:nvSpPr>
-        <p:spPr>
-          <a:xfrm>
-            <a:off x="457200" y="6446520"/>
-            <a:ext cx="9144000" cy="320040"/>
-          </a:xfrm>
-          <a:prstGeom prst="rect">
-            <a:avLst/>
-          </a:prstGeom>
-          <a:noFill/>
-        </p:spPr>
-        <p:txBody>
-          <a:bodyPr wrap="square" anchor="t" lIns="73152" rIns="73152" tIns="36576" bIns="36576">
-            <a:spAutoFit/>
-          </a:bodyPr>
-          <a:lstStyle/>
-          <a:p>
-            <a:pPr algn="l">
-              <a:spcAft>
-                <a:spcPts val="0"/>
-              </a:spcAft>
-            </a:pPr>
-            <a:r>
-              <a:rPr sz="1100" b="0" i="0">
-                <a:solidFill>
-                  <a:srgbClr val="64748B"/>
-                </a:solidFill>
-                <a:latin typeface="Arial"/>
-              </a:rPr>
-              <a:t>DASC7606C Group 12 · Can a consumer beat a sports prediction market?</a:t>
-            </a:r>
-          </a:p>
-        </p:txBody>
-      </p:sp>
-      <p:sp>
-        <p:nvSpPr>
-          <p:cNvPr id="6" name="TextBox 5"/>
-          <p:cNvSpPr txBox="1"/>
-          <p:nvPr/>
-        </p:nvSpPr>
-        <p:spPr>
-          <a:xfrm>
-            <a:off x="10820095" y="6446520"/>
-            <a:ext cx="914400" cy="320040"/>
-          </a:xfrm>
-          <a:prstGeom prst="rect">
-            <a:avLst/>
-          </a:prstGeom>
-          <a:noFill/>
-        </p:spPr>
-        <p:txBody>
-          <a:bodyPr wrap="square" anchor="t" lIns="73152" rIns="73152" tIns="36576" bIns="36576">
-            <a:spAutoFit/>
-          </a:bodyPr>
-          <a:lstStyle/>
-          <a:p>
-            <a:pPr algn="r">
-              <a:spcAft>
-                <a:spcPts val="0"/>
-              </a:spcAft>
-            </a:pPr>
-            <a:r>
-              <a:rPr sz="1100" b="0" i="0">
-                <a:solidFill>
-                  <a:srgbClr val="64748B"/>
-                </a:solidFill>
-                <a:latin typeface="Arial"/>
-              </a:rPr>
-              <a:t>14</a:t>
             </a:r>
           </a:p>
         </p:txBody>
@@ -8315,7 +7543,7 @@
 </p:sld>
 </file>
 
-<file path=ppt/slides/slide15.xml><?xml version="1.0" encoding="utf-8"?>
+<file path=ppt/slides/slide14.xml><?xml version="1.0" encoding="utf-8"?>
 <p:sld xmlns:a="http://schemas.openxmlformats.org/drawingml/2006/main" xmlns:p="http://schemas.openxmlformats.org/presentationml/2006/main" xmlns:r="http://schemas.openxmlformats.org/officeDocument/2006/relationships">
   <p:cSld>
     <p:spTree>
@@ -8486,7 +7714,7 @@
                 </a:solidFill>
                 <a:latin typeface="Arial"/>
               </a:rPr>
-              <a:t>DASC7606C Group 12 · Can a consumer beat a sports prediction market?</a:t>
+              <a:t>DASC7606C Group 12 · Betting markets are tilted against consumers</a:t>
             </a:r>
           </a:p>
         </p:txBody>
@@ -8525,7 +7753,7 @@
                 </a:solidFill>
                 <a:latin typeface="Arial"/>
               </a:rPr>
-              <a:t>15</a:t>
+              <a:t>14</a:t>
             </a:r>
           </a:p>
         </p:txBody>
@@ -8731,6 +7959,23 @@
                 <a:latin typeface="Arial"/>
               </a:rPr>
               <a:t>Education before the first trade; default stake limits</a:t>
+            </a:r>
+          </a:p>
+          <a:p>
+            <a:pPr algn="l" marL="292608" indent="-256032">
+              <a:spcAft>
+                <a:spcPts val="600"/>
+              </a:spcAft>
+              <a:buChar char="•"/>
+            </a:pPr>
+            <a:r>
+              <a:rPr sz="1800" b="0" i="0">
+                <a:solidFill>
+                  <a:srgbClr val="0F172A"/>
+                </a:solidFill>
+                <a:latin typeface="Arial"/>
+              </a:rPr>
+              <a:t>Treat betting harm as a public-health issue (Lancet)</a:t>
             </a:r>
           </a:p>
         </p:txBody>
@@ -9119,7 +8364,7 @@
                 </a:solidFill>
                 <a:latin typeface="Arial"/>
               </a:rPr>
-              <a:t>The belief: “I follow the news, so I can beat the market”</a:t>
+              <a:t>The problem: three things consumers face</a:t>
             </a:r>
           </a:p>
         </p:txBody>
@@ -9158,7 +8403,7 @@
                 </a:solidFill>
                 <a:latin typeface="Arial"/>
               </a:rPr>
-              <a:t>DASC7606C Group 12 · Can a consumer beat a sports prediction market?</a:t>
+              <a:t>DASC7606C Group 12 · Betting markets are tilted against consumers</a:t>
             </a:r>
           </a:p>
         </p:txBody>
@@ -9204,146 +8449,68 @@
       </p:sp>
       <p:sp>
         <p:nvSpPr>
-          <p:cNvPr id="7" name="TextBox 6"/>
-          <p:cNvSpPr txBox="1"/>
+          <p:cNvPr id="7" name="Rounded Rectangle 6"/>
+          <p:cNvSpPr/>
           <p:nvPr/>
         </p:nvSpPr>
         <p:spPr>
           <a:xfrm>
             <a:off x="457200" y="1234439"/>
-            <a:ext cx="6126480" cy="5029200"/>
-          </a:xfrm>
-          <a:prstGeom prst="rect">
-            <a:avLst/>
-          </a:prstGeom>
-          <a:noFill/>
-        </p:spPr>
-        <p:txBody>
-          <a:bodyPr wrap="square" anchor="t" lIns="73152" rIns="73152" tIns="36576" bIns="36576">
-            <a:spAutoFit/>
-          </a:bodyPr>
-          <a:lstStyle/>
-          <a:p>
-            <a:pPr algn="l">
-              <a:spcAft>
-                <a:spcPts val="1000"/>
-              </a:spcAft>
-            </a:pPr>
-            <a:r>
-              <a:rPr sz="2000" b="1" i="0">
-                <a:solidFill>
-                  <a:srgbClr val="1E293B"/>
-                </a:solidFill>
-                <a:latin typeface="Arial"/>
-              </a:rPr>
-              <a:t>We built a serious agent to try:</a:t>
-            </a:r>
-          </a:p>
-          <a:p>
-            <a:pPr algn="l" marL="292608" indent="-256032">
-              <a:spcAft>
-                <a:spcPts val="1000"/>
-              </a:spcAft>
-              <a:buChar char="•"/>
-            </a:pPr>
-            <a:r>
-              <a:rPr sz="2000" b="0" i="0">
-                <a:solidFill>
-                  <a:srgbClr val="0F172A"/>
-                </a:solidFill>
-                <a:latin typeface="Arial"/>
-              </a:rPr>
-              <a:t>Public news: ESPN inactive lists and box scores, 3 seasons</a:t>
-            </a:r>
-          </a:p>
-          <a:p>
-            <a:pPr algn="l" marL="292608" indent="-256032">
-              <a:spcAft>
-                <a:spcPts val="1000"/>
-              </a:spcAft>
-              <a:buChar char="•"/>
-            </a:pPr>
-            <a:r>
-              <a:rPr sz="2000" b="0" i="0">
-                <a:solidFill>
-                  <a:srgbClr val="0F172A"/>
-                </a:solidFill>
-                <a:latin typeface="Arial"/>
-              </a:rPr>
-              <a:t>Learned models, including a neural net trained on the market's own moves</a:t>
-            </a:r>
-          </a:p>
-          <a:p>
-            <a:pPr algn="l" marL="292608" indent="-256032">
-              <a:spcAft>
-                <a:spcPts val="1000"/>
-              </a:spcAft>
-              <a:buChar char="•"/>
-            </a:pPr>
-            <a:r>
-              <a:rPr sz="2000" b="0" i="0">
-                <a:solidFill>
-                  <a:srgbClr val="0F172A"/>
-                </a:solidFill>
-                <a:latin typeface="Arial"/>
-              </a:rPr>
-              <a:t>LangGraph agent loop, LLM-capable (Gemini), deterministic by default</a:t>
-            </a:r>
-          </a:p>
-          <a:p>
-            <a:pPr algn="l" marL="292608" indent="-256032">
-              <a:spcAft>
-                <a:spcPts val="1000"/>
-              </a:spcAft>
-              <a:buChar char="•"/>
-            </a:pPr>
-            <a:r>
-              <a:rPr sz="2000" b="0" i="0">
-                <a:solidFill>
-                  <a:srgbClr val="0F172A"/>
-                </a:solidFill>
-                <a:latin typeface="Arial"/>
-              </a:rPr>
-              <a:t>Code risk limits and rules learned only through a backtest gate</a:t>
-            </a:r>
-          </a:p>
-          <a:p>
-            <a:pPr algn="l" marL="292608" indent="-256032">
-              <a:spcAft>
-                <a:spcPts val="1000"/>
-              </a:spcAft>
-              <a:buChar char="•"/>
-            </a:pPr>
-            <a:r>
-              <a:rPr sz="2000" b="0" i="0">
-                <a:solidFill>
-                  <a:srgbClr val="0F172A"/>
-                </a:solidFill>
-                <a:latin typeface="Arial"/>
-              </a:rPr>
-              <a:t>Graded against 1,316 Kalshi games (~3.9M price rows), 2025-26</a:t>
-            </a:r>
-          </a:p>
-        </p:txBody>
-      </p:sp>
-      <p:sp>
-        <p:nvSpPr>
-          <p:cNvPr id="8" name="Rounded Rectangle 7"/>
-          <p:cNvSpPr/>
-          <p:nvPr/>
-        </p:nvSpPr>
-        <p:spPr>
-          <a:xfrm>
-            <a:off x="6949440" y="1325880"/>
-            <a:ext cx="4785055" cy="4846320"/>
+            <a:ext cx="3606698" cy="3246120"/>
           </a:xfrm>
           <a:prstGeom prst="roundRect">
             <a:avLst>
-              <a:gd name="adj" fmla="val 5000"/>
+              <a:gd name="adj" fmla="val 6000"/>
             </a:avLst>
           </a:prstGeom>
           <a:solidFill>
-            <a:srgbClr val="1E293B"/>
+            <a:srgbClr val="FFFFFF"/>
+          </a:solidFill>
+          <a:ln w="15875">
+            <a:solidFill>
+              <a:srgbClr val="2563EB"/>
+            </a:solidFill>
+          </a:ln>
+          <a:effectLst/>
+        </p:spPr>
+        <p:style>
+          <a:lnRef idx="1">
+            <a:schemeClr val="accent1"/>
+          </a:lnRef>
+          <a:fillRef idx="3">
+            <a:schemeClr val="accent1"/>
+          </a:fillRef>
+          <a:effectRef idx="2">
+            <a:schemeClr val="accent1"/>
+          </a:effectRef>
+          <a:fontRef idx="minor">
+            <a:schemeClr val="lt1"/>
+          </a:fontRef>
+        </p:style>
+        <p:txBody>
+          <a:bodyPr rtlCol="0" anchor="ctr"/>
+          <a:lstStyle/>
+          <a:p>
+            <a:pPr algn="ctr"/>
+          </a:p>
+        </p:txBody>
+      </p:sp>
+      <p:sp>
+        <p:nvSpPr>
+          <p:cNvPr id="8" name="Rectangle 7"/>
+          <p:cNvSpPr/>
+          <p:nvPr/>
+        </p:nvSpPr>
+        <p:spPr>
+          <a:xfrm>
+            <a:off x="457200" y="1234439"/>
+            <a:ext cx="109728" cy="3246120"/>
+          </a:xfrm>
+          <a:prstGeom prst="rect">
+            <a:avLst/>
+          </a:prstGeom>
+          <a:solidFill>
+            <a:srgbClr val="2563EB"/>
           </a:solidFill>
           <a:ln>
             <a:noFill/>
@@ -9380,8 +8547,8 @@
         </p:nvSpPr>
         <p:spPr>
           <a:xfrm>
-            <a:off x="7223759" y="1508760"/>
-            <a:ext cx="4236415" cy="4480560"/>
+            <a:off x="640080" y="1307592"/>
+            <a:ext cx="3332378" cy="457200"/>
           </a:xfrm>
           <a:prstGeom prst="rect">
             <a:avLst/>
@@ -9396,65 +8563,703 @@
           <a:p>
             <a:pPr algn="l">
               <a:spcAft>
-                <a:spcPts val="1600"/>
+                <a:spcPts val="0"/>
               </a:spcAft>
             </a:pPr>
             <a:r>
-              <a:rPr sz="2200" b="1" i="0">
-                <a:solidFill>
-                  <a:srgbClr val="FDBA74"/>
-                </a:solidFill>
-                <a:latin typeface="Arial"/>
-              </a:rPr>
-              <a:t>What we found</a:t>
-            </a:r>
-          </a:p>
+              <a:rPr sz="2000" b="1" i="0">
+                <a:solidFill>
+                  <a:srgbClr val="2563EB"/>
+                </a:solidFill>
+                <a:latin typeface="Arial"/>
+              </a:rPr>
+              <a:t>1  People want to learn</a:t>
+            </a:r>
+          </a:p>
+        </p:txBody>
+      </p:sp>
+      <p:sp>
+        <p:nvSpPr>
+          <p:cNvPr id="10" name="TextBox 9"/>
+          <p:cNvSpPr txBox="1"/>
+          <p:nvPr/>
+        </p:nvSpPr>
+        <p:spPr>
+          <a:xfrm>
+            <a:off x="640080" y="1764791"/>
+            <a:ext cx="3332378" cy="2642615"/>
+          </a:xfrm>
+          <a:prstGeom prst="rect">
+            <a:avLst/>
+          </a:prstGeom>
+          <a:noFill/>
+        </p:spPr>
+        <p:txBody>
+          <a:bodyPr wrap="square" anchor="t" lIns="73152" rIns="73152" tIns="36576" bIns="36576">
+            <a:spAutoFit/>
+          </a:bodyPr>
+          <a:lstStyle/>
+          <a:p>
+            <a:pPr algn="l" marL="292608" indent="-256032">
+              <a:spcAft>
+                <a:spcPts val="600"/>
+              </a:spcAft>
+              <a:buChar char="•"/>
+            </a:pPr>
+            <a:r>
+              <a:rPr sz="1800" b="0" i="0">
+                <a:solidFill>
+                  <a:srgbClr val="0F172A"/>
+                </a:solidFill>
+                <a:latin typeface="Arial"/>
+              </a:rPr>
+              <a:t>Mainstream: legal in 38 US states since 2018 ¹</a:t>
+            </a:r>
+          </a:p>
+          <a:p>
+            <a:pPr algn="l" marL="292608" indent="-256032">
+              <a:spcAft>
+                <a:spcPts val="600"/>
+              </a:spcAft>
+              <a:buChar char="•"/>
+            </a:pPr>
+            <a:r>
+              <a:rPr sz="1800" b="0" i="0">
+                <a:solidFill>
+                  <a:srgbClr val="0F172A"/>
+                </a:solidFill>
+                <a:latin typeface="Arial"/>
+              </a:rPr>
+              <a:t>46% of adults worldwide gambled last year ²</a:t>
+            </a:r>
+          </a:p>
+          <a:p>
+            <a:pPr algn="l" marL="292608" indent="-256032">
+              <a:spcAft>
+                <a:spcPts val="600"/>
+              </a:spcAft>
+              <a:buChar char="•"/>
+            </a:pPr>
+            <a:r>
+              <a:rPr sz="1800" b="0" i="0">
+                <a:solidFill>
+                  <a:srgbClr val="0F172A"/>
+                </a:solidFill>
+                <a:latin typeface="Arial"/>
+              </a:rPr>
+              <a:t>Few understand prices, fees and spreads</a:t>
+            </a:r>
+          </a:p>
+        </p:txBody>
+      </p:sp>
+      <p:sp>
+        <p:nvSpPr>
+          <p:cNvPr id="11" name="Rounded Rectangle 10"/>
+          <p:cNvSpPr/>
+          <p:nvPr/>
+        </p:nvSpPr>
+        <p:spPr>
+          <a:xfrm>
+            <a:off x="4292498" y="1234439"/>
+            <a:ext cx="3606698" cy="3246120"/>
+          </a:xfrm>
+          <a:prstGeom prst="roundRect">
+            <a:avLst>
+              <a:gd name="adj" fmla="val 6000"/>
+            </a:avLst>
+          </a:prstGeom>
+          <a:solidFill>
+            <a:srgbClr val="FFFFFF"/>
+          </a:solidFill>
+          <a:ln w="15875">
+            <a:solidFill>
+              <a:srgbClr val="EA580C"/>
+            </a:solidFill>
+          </a:ln>
+          <a:effectLst/>
+        </p:spPr>
+        <p:style>
+          <a:lnRef idx="1">
+            <a:schemeClr val="accent1"/>
+          </a:lnRef>
+          <a:fillRef idx="3">
+            <a:schemeClr val="accent1"/>
+          </a:fillRef>
+          <a:effectRef idx="2">
+            <a:schemeClr val="accent1"/>
+          </a:effectRef>
+          <a:fontRef idx="minor">
+            <a:schemeClr val="lt1"/>
+          </a:fontRef>
+        </p:style>
+        <p:txBody>
+          <a:bodyPr rtlCol="0" anchor="ctr"/>
+          <a:lstStyle/>
+          <a:p>
+            <a:pPr algn="ctr"/>
+          </a:p>
+        </p:txBody>
+      </p:sp>
+      <p:sp>
+        <p:nvSpPr>
+          <p:cNvPr id="12" name="Rectangle 11"/>
+          <p:cNvSpPr/>
+          <p:nvPr/>
+        </p:nvSpPr>
+        <p:spPr>
+          <a:xfrm>
+            <a:off x="4292498" y="1234439"/>
+            <a:ext cx="109728" cy="3246120"/>
+          </a:xfrm>
+          <a:prstGeom prst="rect">
+            <a:avLst/>
+          </a:prstGeom>
+          <a:solidFill>
+            <a:srgbClr val="EA580C"/>
+          </a:solidFill>
+          <a:ln>
+            <a:noFill/>
+          </a:ln>
+          <a:effectLst/>
+        </p:spPr>
+        <p:style>
+          <a:lnRef idx="1">
+            <a:schemeClr val="accent1"/>
+          </a:lnRef>
+          <a:fillRef idx="3">
+            <a:schemeClr val="accent1"/>
+          </a:fillRef>
+          <a:effectRef idx="2">
+            <a:schemeClr val="accent1"/>
+          </a:effectRef>
+          <a:fontRef idx="minor">
+            <a:schemeClr val="lt1"/>
+          </a:fontRef>
+        </p:style>
+        <p:txBody>
+          <a:bodyPr rtlCol="0" anchor="ctr"/>
+          <a:lstStyle/>
+          <a:p>
+            <a:pPr algn="ctr"/>
+          </a:p>
+        </p:txBody>
+      </p:sp>
+      <p:sp>
+        <p:nvSpPr>
+          <p:cNvPr id="13" name="TextBox 12"/>
+          <p:cNvSpPr txBox="1"/>
+          <p:nvPr/>
+        </p:nvSpPr>
+        <p:spPr>
+          <a:xfrm>
+            <a:off x="4475378" y="1307592"/>
+            <a:ext cx="3332378" cy="457200"/>
+          </a:xfrm>
+          <a:prstGeom prst="rect">
+            <a:avLst/>
+          </a:prstGeom>
+          <a:noFill/>
+        </p:spPr>
+        <p:txBody>
+          <a:bodyPr wrap="square" anchor="t" lIns="73152" rIns="73152" tIns="36576" bIns="36576">
+            <a:spAutoFit/>
+          </a:bodyPr>
+          <a:lstStyle/>
           <a:p>
             <a:pPr algn="l">
               <a:spcAft>
-                <a:spcPts val="1600"/>
+                <a:spcPts val="0"/>
               </a:spcAft>
             </a:pPr>
             <a:r>
-              <a:rPr sz="2200" b="0" i="0">
-                <a:solidFill>
-                  <a:srgbClr val="FFFFFF"/>
-                </a:solidFill>
-                <a:latin typeface="Arial"/>
-              </a:rPr>
-              <a:t>Tested with confidence intervals: no edge. Never trading is the winner.</a:t>
-            </a:r>
-          </a:p>
+              <a:rPr sz="2000" b="1" i="0">
+                <a:solidFill>
+                  <a:srgbClr val="EA580C"/>
+                </a:solidFill>
+                <a:latin typeface="Arial"/>
+              </a:rPr>
+              <a:t>2  Markets are tilted</a:t>
+            </a:r>
+          </a:p>
+        </p:txBody>
+      </p:sp>
+      <p:sp>
+        <p:nvSpPr>
+          <p:cNvPr id="14" name="TextBox 13"/>
+          <p:cNvSpPr txBox="1"/>
+          <p:nvPr/>
+        </p:nvSpPr>
+        <p:spPr>
+          <a:xfrm>
+            <a:off x="4475378" y="1764791"/>
+            <a:ext cx="3332378" cy="2642615"/>
+          </a:xfrm>
+          <a:prstGeom prst="rect">
+            <a:avLst/>
+          </a:prstGeom>
+          <a:noFill/>
+        </p:spPr>
+        <p:txBody>
+          <a:bodyPr wrap="square" anchor="t" lIns="73152" rIns="73152" tIns="36576" bIns="36576">
+            <a:spAutoFit/>
+          </a:bodyPr>
+          <a:lstStyle/>
+          <a:p>
+            <a:pPr algn="l" marL="292608" indent="-256032">
+              <a:spcAft>
+                <a:spcPts val="600"/>
+              </a:spcAft>
+              <a:buChar char="•"/>
+            </a:pPr>
+            <a:r>
+              <a:rPr sz="1800" b="0" i="0">
+                <a:solidFill>
+                  <a:srgbClr val="0F172A"/>
+                </a:solidFill>
+                <a:latin typeface="Arial"/>
+              </a:rPr>
+              <a:t>~5.0% cost on every trade</a:t>
+            </a:r>
+          </a:p>
+          <a:p>
+            <a:pPr algn="l" marL="292608" indent="-256032">
+              <a:spcAft>
+                <a:spcPts val="600"/>
+              </a:spcAft>
+              <a:buChar char="•"/>
+            </a:pPr>
+            <a:r>
+              <a:rPr sz="1800" b="0" i="0">
+                <a:solidFill>
+                  <a:srgbClr val="0F172A"/>
+                </a:solidFill>
+                <a:latin typeface="Arial"/>
+              </a:rPr>
+              <a:t>91% of the price move comes before the public news</a:t>
+            </a:r>
+          </a:p>
+          <a:p>
+            <a:pPr algn="l" marL="292608" indent="-256032">
+              <a:spcAft>
+                <a:spcPts val="600"/>
+              </a:spcAft>
+              <a:buChar char="•"/>
+            </a:pPr>
+            <a:r>
+              <a:rPr sz="1800" b="0" i="0">
+                <a:solidFill>
+                  <a:srgbClr val="0F172A"/>
+                </a:solidFill>
+                <a:latin typeface="Arial"/>
+              </a:rPr>
+              <a:t>The market beats our model; never trading wins</a:t>
+            </a:r>
+          </a:p>
+        </p:txBody>
+      </p:sp>
+      <p:sp>
+        <p:nvSpPr>
+          <p:cNvPr id="15" name="Rounded Rectangle 14"/>
+          <p:cNvSpPr/>
+          <p:nvPr/>
+        </p:nvSpPr>
+        <p:spPr>
+          <a:xfrm>
+            <a:off x="8127796" y="1234439"/>
+            <a:ext cx="3606698" cy="3246120"/>
+          </a:xfrm>
+          <a:prstGeom prst="roundRect">
+            <a:avLst>
+              <a:gd name="adj" fmla="val 6000"/>
+            </a:avLst>
+          </a:prstGeom>
+          <a:solidFill>
+            <a:srgbClr val="FFFFFF"/>
+          </a:solidFill>
+          <a:ln w="15875">
+            <a:solidFill>
+              <a:srgbClr val="DC2626"/>
+            </a:solidFill>
+          </a:ln>
+          <a:effectLst/>
+        </p:spPr>
+        <p:style>
+          <a:lnRef idx="1">
+            <a:schemeClr val="accent1"/>
+          </a:lnRef>
+          <a:fillRef idx="3">
+            <a:schemeClr val="accent1"/>
+          </a:fillRef>
+          <a:effectRef idx="2">
+            <a:schemeClr val="accent1"/>
+          </a:effectRef>
+          <a:fontRef idx="minor">
+            <a:schemeClr val="lt1"/>
+          </a:fontRef>
+        </p:style>
+        <p:txBody>
+          <a:bodyPr rtlCol="0" anchor="ctr"/>
+          <a:lstStyle/>
+          <a:p>
+            <a:pPr algn="ctr"/>
+          </a:p>
+        </p:txBody>
+      </p:sp>
+      <p:sp>
+        <p:nvSpPr>
+          <p:cNvPr id="16" name="Rectangle 15"/>
+          <p:cNvSpPr/>
+          <p:nvPr/>
+        </p:nvSpPr>
+        <p:spPr>
+          <a:xfrm>
+            <a:off x="8127796" y="1234439"/>
+            <a:ext cx="109728" cy="3246120"/>
+          </a:xfrm>
+          <a:prstGeom prst="rect">
+            <a:avLst/>
+          </a:prstGeom>
+          <a:solidFill>
+            <a:srgbClr val="DC2626"/>
+          </a:solidFill>
+          <a:ln>
+            <a:noFill/>
+          </a:ln>
+          <a:effectLst/>
+        </p:spPr>
+        <p:style>
+          <a:lnRef idx="1">
+            <a:schemeClr val="accent1"/>
+          </a:lnRef>
+          <a:fillRef idx="3">
+            <a:schemeClr val="accent1"/>
+          </a:fillRef>
+          <a:effectRef idx="2">
+            <a:schemeClr val="accent1"/>
+          </a:effectRef>
+          <a:fontRef idx="minor">
+            <a:schemeClr val="lt1"/>
+          </a:fontRef>
+        </p:style>
+        <p:txBody>
+          <a:bodyPr rtlCol="0" anchor="ctr"/>
+          <a:lstStyle/>
+          <a:p>
+            <a:pPr algn="ctr"/>
+          </a:p>
+        </p:txBody>
+      </p:sp>
+      <p:sp>
+        <p:nvSpPr>
+          <p:cNvPr id="17" name="TextBox 16"/>
+          <p:cNvSpPr txBox="1"/>
+          <p:nvPr/>
+        </p:nvSpPr>
+        <p:spPr>
+          <a:xfrm>
+            <a:off x="8310676" y="1307592"/>
+            <a:ext cx="3332378" cy="457200"/>
+          </a:xfrm>
+          <a:prstGeom prst="rect">
+            <a:avLst/>
+          </a:prstGeom>
+          <a:noFill/>
+        </p:spPr>
+        <p:txBody>
+          <a:bodyPr wrap="square" anchor="t" lIns="73152" rIns="73152" tIns="36576" bIns="36576">
+            <a:spAutoFit/>
+          </a:bodyPr>
+          <a:lstStyle/>
           <a:p>
             <a:pPr algn="l">
               <a:spcAft>
-                <a:spcPts val="1600"/>
+                <a:spcPts val="0"/>
               </a:spcAft>
             </a:pPr>
             <a:r>
-              <a:rPr sz="2200" b="0" i="0">
-                <a:solidFill>
-                  <a:srgbClr val="FFFFFF"/>
-                </a:solidFill>
-                <a:latin typeface="Arial"/>
-              </a:rPr>
-              <a:t>The reasons are structural: costs, speed and expertise.</a:t>
-            </a:r>
-          </a:p>
+              <a:rPr sz="2000" b="1" i="0">
+                <a:solidFill>
+                  <a:srgbClr val="DC2626"/>
+                </a:solidFill>
+                <a:latin typeface="Arial"/>
+              </a:rPr>
+              <a:t>3  Betting causes harm</a:t>
+            </a:r>
+          </a:p>
+        </p:txBody>
+      </p:sp>
+      <p:sp>
+        <p:nvSpPr>
+          <p:cNvPr id="18" name="TextBox 17"/>
+          <p:cNvSpPr txBox="1"/>
+          <p:nvPr/>
+        </p:nvSpPr>
+        <p:spPr>
+          <a:xfrm>
+            <a:off x="8310676" y="1764791"/>
+            <a:ext cx="3332378" cy="2642615"/>
+          </a:xfrm>
+          <a:prstGeom prst="rect">
+            <a:avLst/>
+          </a:prstGeom>
+          <a:noFill/>
+        </p:spPr>
+        <p:txBody>
+          <a:bodyPr wrap="square" anchor="t" lIns="73152" rIns="73152" tIns="36576" bIns="36576">
+            <a:spAutoFit/>
+          </a:bodyPr>
+          <a:lstStyle/>
+          <a:p>
+            <a:pPr algn="l" marL="292608" indent="-256032">
+              <a:spcAft>
+                <a:spcPts val="600"/>
+              </a:spcAft>
+              <a:buChar char="•"/>
+            </a:pPr>
+            <a:r>
+              <a:rPr sz="1800" b="0" i="0">
+                <a:solidFill>
+                  <a:srgbClr val="0F172A"/>
+                </a:solidFill>
+                <a:latin typeface="Arial"/>
+              </a:rPr>
+              <a:t>~80M adults with gambling disorder or problem gambling ²</a:t>
+            </a:r>
+          </a:p>
+          <a:p>
+            <a:pPr algn="l" marL="292608" indent="-256032">
+              <a:spcAft>
+                <a:spcPts val="600"/>
+              </a:spcAft>
+              <a:buChar char="•"/>
+            </a:pPr>
+            <a:r>
+              <a:rPr sz="1800" b="0" i="0">
+                <a:solidFill>
+                  <a:srgbClr val="0F172A"/>
+                </a:solidFill>
+                <a:latin typeface="Arial"/>
+              </a:rPr>
+              <a:t>Online betting: credit scores −2.75 pts, bankruptcies +~10% ¹</a:t>
+            </a:r>
+          </a:p>
+          <a:p>
+            <a:pPr algn="l" marL="292608" indent="-256032">
+              <a:spcAft>
+                <a:spcPts val="600"/>
+              </a:spcAft>
+              <a:buChar char="•"/>
+            </a:pPr>
+            <a:r>
+              <a:rPr sz="1800" b="0" i="0">
+                <a:solidFill>
+                  <a:srgbClr val="0F172A"/>
+                </a:solidFill>
+                <a:latin typeface="Arial"/>
+              </a:rPr>
+              <a:t>$1 of online betting cuts investment ~$0.99 ³</a:t>
+            </a:r>
+          </a:p>
+        </p:txBody>
+      </p:sp>
+      <p:sp>
+        <p:nvSpPr>
+          <p:cNvPr id="19" name="TextBox 18"/>
+          <p:cNvSpPr txBox="1"/>
+          <p:nvPr/>
+        </p:nvSpPr>
+        <p:spPr>
+          <a:xfrm>
+            <a:off x="4292498" y="4526280"/>
+            <a:ext cx="3606698" cy="411480"/>
+          </a:xfrm>
+          <a:prstGeom prst="rect">
+            <a:avLst/>
+          </a:prstGeom>
+          <a:noFill/>
+        </p:spPr>
+        <p:txBody>
+          <a:bodyPr wrap="square" anchor="t" lIns="73152" rIns="73152" tIns="36576" bIns="36576">
+            <a:spAutoFit/>
+          </a:bodyPr>
+          <a:lstStyle/>
+          <a:p>
+            <a:pPr algn="ctr">
+              <a:spcAft>
+                <a:spcPts val="800"/>
+              </a:spcAft>
+            </a:pPr>
+            <a:r>
+              <a:rPr sz="1400" b="0" i="1">
+                <a:solidFill>
+                  <a:srgbClr val="EA580C"/>
+                </a:solidFill>
+                <a:latin typeface="Arial"/>
+              </a:rPr>
+              <a:t>Our measurements</a:t>
+            </a:r>
+          </a:p>
+        </p:txBody>
+      </p:sp>
+      <p:sp>
+        <p:nvSpPr>
+          <p:cNvPr id="20" name="TextBox 19"/>
+          <p:cNvSpPr txBox="1"/>
+          <p:nvPr/>
+        </p:nvSpPr>
+        <p:spPr>
+          <a:xfrm>
+            <a:off x="8127796" y="4526280"/>
+            <a:ext cx="3606698" cy="411480"/>
+          </a:xfrm>
+          <a:prstGeom prst="rect">
+            <a:avLst/>
+          </a:prstGeom>
+          <a:noFill/>
+        </p:spPr>
+        <p:txBody>
+          <a:bodyPr wrap="square" anchor="t" lIns="73152" rIns="73152" tIns="36576" bIns="36576">
+            <a:spAutoFit/>
+          </a:bodyPr>
+          <a:lstStyle/>
+          <a:p>
+            <a:pPr algn="ctr">
+              <a:spcAft>
+                <a:spcPts val="800"/>
+              </a:spcAft>
+            </a:pPr>
+            <a:r>
+              <a:rPr sz="1400" b="0" i="1">
+                <a:solidFill>
+                  <a:srgbClr val="DC2626"/>
+                </a:solidFill>
+                <a:latin typeface="Arial"/>
+              </a:rPr>
+              <a:t>External research</a:t>
+            </a:r>
+          </a:p>
+        </p:txBody>
+      </p:sp>
+      <p:sp>
+        <p:nvSpPr>
+          <p:cNvPr id="21" name="Rounded Rectangle 20"/>
+          <p:cNvSpPr/>
+          <p:nvPr/>
+        </p:nvSpPr>
+        <p:spPr>
+          <a:xfrm>
+            <a:off x="457200" y="5074920"/>
+            <a:ext cx="11277295" cy="640080"/>
+          </a:xfrm>
+          <a:prstGeom prst="roundRect">
+            <a:avLst>
+              <a:gd name="adj" fmla="val 12000"/>
+            </a:avLst>
+          </a:prstGeom>
+          <a:solidFill>
+            <a:srgbClr val="FEF3C7"/>
+          </a:solidFill>
+          <a:ln>
+            <a:noFill/>
+          </a:ln>
+          <a:effectLst/>
+        </p:spPr>
+        <p:style>
+          <a:lnRef idx="1">
+            <a:schemeClr val="accent1"/>
+          </a:lnRef>
+          <a:fillRef idx="3">
+            <a:schemeClr val="accent1"/>
+          </a:fillRef>
+          <a:effectRef idx="2">
+            <a:schemeClr val="accent1"/>
+          </a:effectRef>
+          <a:fontRef idx="minor">
+            <a:schemeClr val="lt1"/>
+          </a:fontRef>
+        </p:style>
+        <p:txBody>
+          <a:bodyPr rtlCol="0" anchor="ctr"/>
+          <a:lstStyle/>
+          <a:p>
+            <a:pPr algn="ctr"/>
+          </a:p>
+        </p:txBody>
+      </p:sp>
+      <p:sp>
+        <p:nvSpPr>
+          <p:cNvPr id="22" name="TextBox 21"/>
+          <p:cNvSpPr txBox="1"/>
+          <p:nvPr/>
+        </p:nvSpPr>
+        <p:spPr>
+          <a:xfrm>
+            <a:off x="548640" y="5074920"/>
+            <a:ext cx="11094415" cy="640080"/>
+          </a:xfrm>
+          <a:prstGeom prst="rect">
+            <a:avLst/>
+          </a:prstGeom>
+          <a:noFill/>
+        </p:spPr>
+        <p:txBody>
+          <a:bodyPr wrap="square" anchor="ctr" lIns="73152" rIns="73152" tIns="36576" bIns="36576">
+            <a:spAutoFit/>
+          </a:bodyPr>
+          <a:lstStyle/>
           <a:p>
             <a:pPr algn="l">
               <a:spcAft>
-                <a:spcPts val="1600"/>
+                <a:spcPts val="0"/>
               </a:spcAft>
             </a:pPr>
             <a:r>
               <a:rPr sz="2200" b="0" i="0">
                 <a:solidFill>
-                  <a:srgbClr val="FFFFFF"/>
-                </a:solidFill>
-                <a:latin typeface="Arial"/>
-              </a:rPr>
-              <a:t>So our product's job is to protect and educate consumers.</a:t>
+                  <a:srgbClr val="0F172A"/>
+                </a:solidFill>
+                <a:latin typeface="Arial"/>
+              </a:rPr>
+              <a:t>Consumers need education and protection, not betting tips</a:t>
+            </a:r>
+          </a:p>
+        </p:txBody>
+      </p:sp>
+      <p:sp>
+        <p:nvSpPr>
+          <p:cNvPr id="23" name="TextBox 22"/>
+          <p:cNvSpPr txBox="1"/>
+          <p:nvPr/>
+        </p:nvSpPr>
+        <p:spPr>
+          <a:xfrm>
+            <a:off x="457200" y="5897880"/>
+            <a:ext cx="11277295" cy="457200"/>
+          </a:xfrm>
+          <a:prstGeom prst="rect">
+            <a:avLst/>
+          </a:prstGeom>
+          <a:noFill/>
+        </p:spPr>
+        <p:txBody>
+          <a:bodyPr wrap="square" anchor="t" lIns="73152" rIns="73152" tIns="36576" bIns="36576">
+            <a:spAutoFit/>
+          </a:bodyPr>
+          <a:lstStyle/>
+          <a:p>
+            <a:pPr algn="l">
+              <a:spcAft>
+                <a:spcPts val="800"/>
+              </a:spcAft>
+            </a:pPr>
+            <a:r>
+              <a:rPr sz="1300" b="0" i="0">
+                <a:solidFill>
+                  <a:srgbClr val="64748B"/>
+                </a:solidFill>
+                <a:latin typeface="Arial"/>
+              </a:rPr>
+              <a:t>¹ Hollenbeck, Larsen &amp; Proserpio 2024 (SSRN)   ² Lancet Public Health Commission on gambling 2024   ³ Baker et al. 2024 (NBER WP 33108)</a:t>
             </a:r>
           </a:p>
         </p:txBody>
@@ -9599,7 +9404,7 @@
                 </a:solidFill>
                 <a:latin typeface="Arial"/>
               </a:rPr>
-              <a:t>What we built: a market-graded agent</a:t>
+              <a:t>Research question</a:t>
             </a:r>
           </a:p>
         </p:txBody>
@@ -9638,7 +9443,7 @@
                 </a:solidFill>
                 <a:latin typeface="Arial"/>
               </a:rPr>
-              <a:t>DASC7606C Group 12 · Can a consumer beat a sports prediction market?</a:t>
+              <a:t>DASC7606C Group 12 · Betting markets are tilted against consumers</a:t>
             </a:r>
           </a:p>
         </p:txBody>
@@ -9682,30 +9487,52 @@
           </a:p>
         </p:txBody>
       </p:sp>
-      <p:pic>
-        <p:nvPicPr>
-          <p:cNvPr id="7" name="Picture 6" descr="product_workflow.png"/>
-          <p:cNvPicPr>
-            <a:picLocks noChangeAspect="1"/>
-          </p:cNvPicPr>
-          <p:nvPr/>
-        </p:nvPicPr>
-        <p:blipFill>
-          <a:blip r:embed="rId3"/>
-          <a:stretch>
-            <a:fillRect/>
-          </a:stretch>
-        </p:blipFill>
-        <p:spPr>
-          <a:xfrm>
-            <a:off x="1513288" y="1097280"/>
-            <a:ext cx="9165119" cy="4480560"/>
-          </a:xfrm>
-          <a:prstGeom prst="rect">
-            <a:avLst/>
-          </a:prstGeom>
-        </p:spPr>
-      </p:pic>
+      <p:sp>
+        <p:nvSpPr>
+          <p:cNvPr id="7" name="Rounded Rectangle 6"/>
+          <p:cNvSpPr/>
+          <p:nvPr/>
+        </p:nvSpPr>
+        <p:spPr>
+          <a:xfrm>
+            <a:off x="457200" y="1234439"/>
+            <a:ext cx="11277295" cy="1051560"/>
+          </a:xfrm>
+          <a:prstGeom prst="roundRect">
+            <a:avLst>
+              <a:gd name="adj" fmla="val 12000"/>
+            </a:avLst>
+          </a:prstGeom>
+          <a:solidFill>
+            <a:srgbClr val="DBEAFE"/>
+          </a:solidFill>
+          <a:ln>
+            <a:noFill/>
+          </a:ln>
+          <a:effectLst/>
+        </p:spPr>
+        <p:style>
+          <a:lnRef idx="1">
+            <a:schemeClr val="accent1"/>
+          </a:lnRef>
+          <a:fillRef idx="3">
+            <a:schemeClr val="accent1"/>
+          </a:fillRef>
+          <a:effectRef idx="2">
+            <a:schemeClr val="accent1"/>
+          </a:effectRef>
+          <a:fontRef idx="minor">
+            <a:schemeClr val="lt1"/>
+          </a:fontRef>
+        </p:style>
+        <p:txBody>
+          <a:bodyPr rtlCol="0" anchor="ctr"/>
+          <a:lstStyle/>
+          <a:p>
+            <a:pPr algn="ctr"/>
+          </a:p>
+        </p:txBody>
+      </p:sp>
       <p:sp>
         <p:nvSpPr>
           <p:cNvPr id="8" name="TextBox 7"/>
@@ -9714,8 +9541,47 @@
         </p:nvSpPr>
         <p:spPr>
           <a:xfrm>
-            <a:off x="457200" y="5623560"/>
-            <a:ext cx="11277295" cy="731520"/>
+            <a:off x="548640" y="1234439"/>
+            <a:ext cx="11094415" cy="1051560"/>
+          </a:xfrm>
+          <a:prstGeom prst="rect">
+            <a:avLst/>
+          </a:prstGeom>
+          <a:noFill/>
+        </p:spPr>
+        <p:txBody>
+          <a:bodyPr wrap="square" anchor="ctr" lIns="73152" rIns="73152" tIns="36576" bIns="36576">
+            <a:spAutoFit/>
+          </a:bodyPr>
+          <a:lstStyle/>
+          <a:p>
+            <a:pPr algn="l">
+              <a:spcAft>
+                <a:spcPts val="0"/>
+              </a:spcAft>
+            </a:pPr>
+            <a:r>
+              <a:rPr sz="2800" b="0" i="0">
+                <a:solidFill>
+                  <a:srgbClr val="1E293B"/>
+                </a:solidFill>
+                <a:latin typeface="Arial"/>
+              </a:rPr>
+              <a:t>Can a consumer, even one armed with an AI agent and public news, beat the market?</a:t>
+            </a:r>
+          </a:p>
+        </p:txBody>
+      </p:sp>
+      <p:sp>
+        <p:nvSpPr>
+          <p:cNvPr id="9" name="TextBox 8"/>
+          <p:cNvSpPr txBox="1"/>
+          <p:nvPr/>
+        </p:nvSpPr>
+        <p:spPr>
+          <a:xfrm>
+            <a:off x="457200" y="2514600"/>
+            <a:ext cx="6309360" cy="3840480"/>
           </a:xfrm>
           <a:prstGeom prst="rect">
             <a:avLst/>
@@ -9728,19 +9594,204 @@
           </a:bodyPr>
           <a:lstStyle/>
           <a:p>
-            <a:pPr algn="ctr">
+            <a:pPr algn="l">
               <a:spcAft>
                 <a:spcPts val="800"/>
               </a:spcAft>
             </a:pPr>
             <a:r>
-              <a:rPr sz="1800" b="0" i="0">
+              <a:rPr sz="1900" b="1" i="0">
+                <a:solidFill>
+                  <a:srgbClr val="1E293B"/>
+                </a:solidFill>
+                <a:latin typeface="Arial"/>
+              </a:rPr>
+              <a:t>We built the strongest consumer we could:</a:t>
+            </a:r>
+          </a:p>
+          <a:p>
+            <a:pPr algn="l" marL="292608" indent="-256032">
+              <a:spcAft>
+                <a:spcPts val="800"/>
+              </a:spcAft>
+              <a:buChar char="•"/>
+            </a:pPr>
+            <a:r>
+              <a:rPr sz="1900" b="0" i="0">
                 <a:solidFill>
                   <a:srgbClr val="0F172A"/>
                 </a:solidFill>
                 <a:latin typeface="Arial"/>
               </a:rPr>
-              <a:t>Every simulated order pays the recorded ask plus the Kalshi fee, so we measure what a consumer would face</a:t>
+              <a:t>Public news: ESPN inactive lists and box scores, 3 seasons</a:t>
+            </a:r>
+          </a:p>
+          <a:p>
+            <a:pPr algn="l" marL="292608" indent="-256032">
+              <a:spcAft>
+                <a:spcPts val="800"/>
+              </a:spcAft>
+              <a:buChar char="•"/>
+            </a:pPr>
+            <a:r>
+              <a:rPr sz="1900" b="0" i="0">
+                <a:solidFill>
+                  <a:srgbClr val="0F172A"/>
+                </a:solidFill>
+                <a:latin typeface="Arial"/>
+              </a:rPr>
+              <a:t>Trained models, incl. a neural net trained on the market's own moves</a:t>
+            </a:r>
+          </a:p>
+          <a:p>
+            <a:pPr algn="l" marL="292608" indent="-256032">
+              <a:spcAft>
+                <a:spcPts val="800"/>
+              </a:spcAft>
+              <a:buChar char="•"/>
+            </a:pPr>
+            <a:r>
+              <a:rPr sz="1900" b="0" i="0">
+                <a:solidFill>
+                  <a:srgbClr val="0F172A"/>
+                </a:solidFill>
+                <a:latin typeface="Arial"/>
+              </a:rPr>
+              <a:t>LLM-capable LangGraph agent; code risk limits; gated rule learning</a:t>
+            </a:r>
+          </a:p>
+          <a:p>
+            <a:pPr algn="l" marL="292608" indent="-256032">
+              <a:spcAft>
+                <a:spcPts val="800"/>
+              </a:spcAft>
+              <a:buChar char="•"/>
+            </a:pPr>
+            <a:r>
+              <a:rPr sz="1900" b="0" i="0">
+                <a:solidFill>
+                  <a:srgbClr val="0F172A"/>
+                </a:solidFill>
+                <a:latin typeface="Arial"/>
+              </a:rPr>
+              <a:t>Graded on 1,316 Kalshi games (~3.9M price rows), 2025-26</a:t>
+            </a:r>
+          </a:p>
+        </p:txBody>
+      </p:sp>
+      <p:sp>
+        <p:nvSpPr>
+          <p:cNvPr id="10" name="Rounded Rectangle 9"/>
+          <p:cNvSpPr/>
+          <p:nvPr/>
+        </p:nvSpPr>
+        <p:spPr>
+          <a:xfrm>
+            <a:off x="7086600" y="2560320"/>
+            <a:ext cx="4647895" cy="2743200"/>
+          </a:xfrm>
+          <a:prstGeom prst="roundRect">
+            <a:avLst>
+              <a:gd name="adj" fmla="val 5000"/>
+            </a:avLst>
+          </a:prstGeom>
+          <a:solidFill>
+            <a:srgbClr val="1E293B"/>
+          </a:solidFill>
+          <a:ln>
+            <a:noFill/>
+          </a:ln>
+          <a:effectLst/>
+        </p:spPr>
+        <p:style>
+          <a:lnRef idx="1">
+            <a:schemeClr val="accent1"/>
+          </a:lnRef>
+          <a:fillRef idx="3">
+            <a:schemeClr val="accent1"/>
+          </a:fillRef>
+          <a:effectRef idx="2">
+            <a:schemeClr val="accent1"/>
+          </a:effectRef>
+          <a:fontRef idx="minor">
+            <a:schemeClr val="lt1"/>
+          </a:fontRef>
+        </p:style>
+        <p:txBody>
+          <a:bodyPr rtlCol="0" anchor="ctr"/>
+          <a:lstStyle/>
+          <a:p>
+            <a:pPr algn="ctr"/>
+          </a:p>
+        </p:txBody>
+      </p:sp>
+      <p:sp>
+        <p:nvSpPr>
+          <p:cNvPr id="11" name="TextBox 10"/>
+          <p:cNvSpPr txBox="1"/>
+          <p:nvPr/>
+        </p:nvSpPr>
+        <p:spPr>
+          <a:xfrm>
+            <a:off x="7360920" y="2697480"/>
+            <a:ext cx="4099255" cy="2514600"/>
+          </a:xfrm>
+          <a:prstGeom prst="rect">
+            <a:avLst/>
+          </a:prstGeom>
+          <a:noFill/>
+        </p:spPr>
+        <p:txBody>
+          <a:bodyPr wrap="square" anchor="t" lIns="73152" rIns="73152" tIns="36576" bIns="36576">
+            <a:spAutoFit/>
+          </a:bodyPr>
+          <a:lstStyle/>
+          <a:p>
+            <a:pPr algn="l">
+              <a:spcAft>
+                <a:spcPts val="1400"/>
+              </a:spcAft>
+            </a:pPr>
+            <a:r>
+              <a:rPr sz="2200" b="1" i="0">
+                <a:solidFill>
+                  <a:srgbClr val="FDBA74"/>
+                </a:solidFill>
+                <a:latin typeface="Arial"/>
+              </a:rPr>
+              <a:t>Answer: no</a:t>
+            </a:r>
+          </a:p>
+          <a:p>
+            <a:pPr algn="l">
+              <a:spcAft>
+                <a:spcPts val="1400"/>
+              </a:spcAft>
+            </a:pPr>
+            <a:r>
+              <a:rPr sz="2200" b="0" i="0">
+                <a:solidFill>
+                  <a:srgbClr val="FFFFFF"/>
+                </a:solidFill>
+                <a:latin typeface="Arial"/>
+              </a:rPr>
+              <a:t>Tested with confidence intervals, never trading wins.</a:t>
+            </a:r>
+          </a:p>
+          <a:p>
+            <a:pPr algn="l">
+              <a:spcAft>
+                <a:spcPts val="1400"/>
+              </a:spcAft>
+            </a:pPr>
+            <a:r>
+              <a:rPr sz="2200" b="0" i="0">
+                <a:solidFill>
+                  <a:srgbClr val="FFFFFF"/>
+                </a:solidFill>
+                <a:latin typeface="Arial"/>
+              </a:rPr>
+              <a:t>So the product educates and protects instead.</a:t>
             </a:r>
           </a:p>
         </p:txBody>
@@ -9885,7 +9936,7 @@
                 </a:solidFill>
                 <a:latin typeface="Arial"/>
               </a:rPr>
-              <a:t>Evidence 1: costs set a hurdle before you start</a:t>
+              <a:t>What we built: a market-graded agent</a:t>
             </a:r>
           </a:p>
         </p:txBody>
@@ -9924,7 +9975,7 @@
                 </a:solidFill>
                 <a:latin typeface="Arial"/>
               </a:rPr>
-              <a:t>DASC7606C Group 12 · Can a consumer beat a sports prediction market?</a:t>
+              <a:t>DASC7606C Group 12 · Betting markets are tilted against consumers</a:t>
             </a:r>
           </a:p>
         </p:txBody>
@@ -9970,7 +10021,7 @@
       </p:sp>
       <p:pic>
         <p:nvPicPr>
-          <p:cNvPr id="7" name="Picture 6" descr="cost_burden.png"/>
+          <p:cNvPr id="7" name="Picture 6" descr="product_workflow.png"/>
           <p:cNvPicPr>
             <a:picLocks noChangeAspect="1"/>
           </p:cNvPicPr>
@@ -9984,8 +10035,8 @@
         </p:blipFill>
         <p:spPr>
           <a:xfrm>
-            <a:off x="1352397" y="1097280"/>
-            <a:ext cx="9486900" cy="3794760"/>
+            <a:off x="1513288" y="1097280"/>
+            <a:ext cx="9165119" cy="4480560"/>
           </a:xfrm>
           <a:prstGeom prst="rect">
             <a:avLst/>
@@ -10000,8 +10051,8 @@
         </p:nvSpPr>
         <p:spPr>
           <a:xfrm>
-            <a:off x="457200" y="4983480"/>
-            <a:ext cx="5547207" cy="1371600"/>
+            <a:off x="457200" y="5623560"/>
+            <a:ext cx="11277295" cy="731520"/>
           </a:xfrm>
           <a:prstGeom prst="rect">
             <a:avLst/>
@@ -10014,166 +10065,19 @@
           </a:bodyPr>
           <a:lstStyle/>
           <a:p>
-            <a:pPr algn="l" marL="292608" indent="-256032">
+            <a:pPr algn="ctr">
               <a:spcAft>
-                <a:spcPts val="400"/>
+                <a:spcPts val="800"/>
               </a:spcAft>
-              <a:buChar char="•"/>
             </a:pPr>
             <a:r>
-              <a:rPr sz="1800" b="1" i="0">
+              <a:rPr sz="1800" b="0" i="0">
                 <a:solidFill>
                   <a:srgbClr val="0F172A"/>
                 </a:solidFill>
                 <a:latin typeface="Arial"/>
               </a:rPr>
-              <a:t>1.92¢ per contract</a:t>
-            </a:r>
-            <a:r>
-              <a:rPr sz="1800" b="0" i="0">
-                <a:solidFill>
-                  <a:srgbClr val="0F172A"/>
-                </a:solidFill>
-                <a:latin typeface="Arial"/>
-              </a:rPr>
-              <a:t> = 5.0% of price; </a:t>
-            </a:r>
-            <a:r>
-              <a:rPr sz="1800" b="1" i="0">
-                <a:solidFill>
-                  <a:srgbClr val="0F172A"/>
-                </a:solidFill>
-                <a:latin typeface="Arial"/>
-              </a:rPr>
-              <a:t>9–14%</a:t>
-            </a:r>
-            <a:r>
-              <a:rPr sz="1800" b="0" i="0">
-                <a:solidFill>
-                  <a:srgbClr val="0F172A"/>
-                </a:solidFill>
-                <a:latin typeface="Arial"/>
-              </a:rPr>
-              <a:t> under 20¢</a:t>
-            </a:r>
-          </a:p>
-          <a:p>
-            <a:pPr algn="l" marL="292608" indent="-256032">
-              <a:spcAft>
-                <a:spcPts val="400"/>
-              </a:spcAft>
-              <a:buChar char="•"/>
-            </a:pPr>
-            <a:r>
-              <a:rPr sz="1800" b="0" i="0">
-                <a:solidFill>
-                  <a:srgbClr val="0F172A"/>
-                </a:solidFill>
-                <a:latin typeface="Arial"/>
-              </a:rPr>
-              <a:t>Best agent, Feb–Apr: +$36 at mid → </a:t>
-            </a:r>
-            <a:r>
-              <a:rPr sz="1800" b="1" i="0">
-                <a:solidFill>
-                  <a:srgbClr val="0F172A"/>
-                </a:solidFill>
-                <a:latin typeface="Arial"/>
-              </a:rPr>
-              <a:t>−$32</a:t>
-            </a:r>
-            <a:r>
-              <a:rPr sz="1800" b="0" i="0">
-                <a:solidFill>
-                  <a:srgbClr val="0F172A"/>
-                </a:solidFill>
-                <a:latin typeface="Arial"/>
-              </a:rPr>
-              <a:t> after costs</a:t>
-            </a:r>
-          </a:p>
-        </p:txBody>
-      </p:sp>
-      <p:sp>
-        <p:nvSpPr>
-          <p:cNvPr id="9" name="TextBox 8"/>
-          <p:cNvSpPr txBox="1"/>
-          <p:nvPr/>
-        </p:nvSpPr>
-        <p:spPr>
-          <a:xfrm>
-            <a:off x="6187287" y="4983480"/>
-            <a:ext cx="5547207" cy="1371600"/>
-          </a:xfrm>
-          <a:prstGeom prst="rect">
-            <a:avLst/>
-          </a:prstGeom>
-          <a:noFill/>
-        </p:spPr>
-        <p:txBody>
-          <a:bodyPr wrap="square" anchor="t" lIns="73152" rIns="73152" tIns="36576" bIns="36576">
-            <a:spAutoFit/>
-          </a:bodyPr>
-          <a:lstStyle/>
-          <a:p>
-            <a:pPr algn="l" marL="292608" indent="-256032">
-              <a:spcAft>
-                <a:spcPts val="400"/>
-              </a:spcAft>
-              <a:buChar char="•"/>
-            </a:pPr>
-            <a:r>
-              <a:rPr sz="1800" b="0" i="0">
-                <a:solidFill>
-                  <a:srgbClr val="0F172A"/>
-                </a:solidFill>
-                <a:latin typeface="Arial"/>
-              </a:rPr>
-              <a:t>771 decision points → 153 with gap &gt; 4 pts → </a:t>
-            </a:r>
-            <a:r>
-              <a:rPr sz="1800" b="1" i="0">
-                <a:solidFill>
-                  <a:srgbClr val="0F172A"/>
-                </a:solidFill>
-                <a:latin typeface="Arial"/>
-              </a:rPr>
-              <a:t>74 trades</a:t>
-            </a:r>
-          </a:p>
-          <a:p>
-            <a:pPr algn="l" marL="292608" indent="-256032">
-              <a:spcAft>
-                <a:spcPts val="400"/>
-              </a:spcAft>
-              <a:buChar char="•"/>
-            </a:pPr>
-            <a:r>
-              <a:rPr sz="1800" b="0" i="0">
-                <a:solidFill>
-                  <a:srgbClr val="0F172A"/>
-                </a:solidFill>
-                <a:latin typeface="Arial"/>
-              </a:rPr>
-              <a:t>Only </a:t>
-            </a:r>
-            <a:r>
-              <a:rPr sz="1800" b="1" i="0">
-                <a:solidFill>
-                  <a:srgbClr val="0F172A"/>
-                </a:solidFill>
-                <a:latin typeface="Arial"/>
-              </a:rPr>
-              <a:t>27 (36%)</a:t>
-            </a:r>
-            <a:r>
-              <a:rPr sz="1800" b="0" i="0">
-                <a:solidFill>
-                  <a:srgbClr val="0F172A"/>
-                </a:solidFill>
-                <a:latin typeface="Arial"/>
-              </a:rPr>
-              <a:t> beat or matched the close</a:t>
+              <a:t>Every simulated order pays the recorded ask plus the Kalshi fee, so we measure what a consumer would face</a:t>
             </a:r>
           </a:p>
         </p:txBody>
@@ -10318,7 +10222,7 @@
                 </a:solidFill>
                 <a:latin typeface="Arial"/>
               </a:rPr>
-              <a:t>Evidence 2: the price moves before the news reaches you</a:t>
+              <a:t>Evidence 1: costs set a hurdle before you start</a:t>
             </a:r>
           </a:p>
         </p:txBody>
@@ -10357,7 +10261,7 @@
                 </a:solidFill>
                 <a:latin typeface="Arial"/>
               </a:rPr>
-              <a:t>DASC7606C Group 12 · Can a consumer beat a sports prediction market?</a:t>
+              <a:t>DASC7606C Group 12 · Betting markets are tilted against consumers</a:t>
             </a:r>
           </a:p>
         </p:txBody>
@@ -10403,7 +10307,7 @@
       </p:sp>
       <p:pic>
         <p:nvPicPr>
-          <p:cNvPr id="7" name="Picture 6" descr="price_discovery.png"/>
+          <p:cNvPr id="7" name="Picture 6" descr="cost_burden.png"/>
           <p:cNvPicPr>
             <a:picLocks noChangeAspect="1"/>
           </p:cNvPicPr>
@@ -10417,8 +10321,8 @@
         </p:blipFill>
         <p:spPr>
           <a:xfrm>
-            <a:off x="895197" y="1097280"/>
-            <a:ext cx="10401299" cy="4160520"/>
+            <a:off x="1352397" y="1097280"/>
+            <a:ext cx="9486900" cy="3794760"/>
           </a:xfrm>
           <a:prstGeom prst="rect">
             <a:avLst/>
@@ -10433,8 +10337,8 @@
         </p:nvSpPr>
         <p:spPr>
           <a:xfrm>
-            <a:off x="457200" y="5349240"/>
-            <a:ext cx="11277295" cy="1005840"/>
+            <a:off x="457200" y="4983480"/>
+            <a:ext cx="5547207" cy="1371600"/>
           </a:xfrm>
           <a:prstGeom prst="rect">
             <a:avLst/>
@@ -10460,7 +10364,7 @@
                 </a:solidFill>
                 <a:latin typeface="Arial"/>
               </a:rPr>
-              <a:t>91%</a:t>
+              <a:t>1.92¢ per contract</a:t>
             </a:r>
             <a:r>
               <a:rPr sz="1800" b="0" i="0">
@@ -10469,7 +10373,25 @@
                 </a:solidFill>
                 <a:latin typeface="Arial"/>
               </a:rPr>
-              <a:t> of the news-direction move was already in the price when the list was public (+1.80 vs +0.18 pts, 193 test games)</a:t>
+              <a:t> = 5.0% of price; </a:t>
+            </a:r>
+            <a:r>
+              <a:rPr sz="1800" b="1" i="0">
+                <a:solidFill>
+                  <a:srgbClr val="0F172A"/>
+                </a:solidFill>
+                <a:latin typeface="Arial"/>
+              </a:rPr>
+              <a:t>9–14%</a:t>
+            </a:r>
+            <a:r>
+              <a:rPr sz="1800" b="0" i="0">
+                <a:solidFill>
+                  <a:srgbClr val="0F172A"/>
+                </a:solidFill>
+                <a:latin typeface="Arial"/>
+              </a:rPr>
+              <a:t> under 20¢</a:t>
             </a:r>
           </a:p>
           <a:p>
@@ -10486,7 +10408,109 @@
                 </a:solidFill>
                 <a:latin typeface="Arial"/>
               </a:rPr>
-              <a:t>List stamped tip − 30 min: our proxy for when a retail user sees it</a:t>
+              <a:t>Best agent, Feb–Apr: +$36 at mid → </a:t>
+            </a:r>
+            <a:r>
+              <a:rPr sz="1800" b="1" i="0">
+                <a:solidFill>
+                  <a:srgbClr val="0F172A"/>
+                </a:solidFill>
+                <a:latin typeface="Arial"/>
+              </a:rPr>
+              <a:t>−$32</a:t>
+            </a:r>
+            <a:r>
+              <a:rPr sz="1800" b="0" i="0">
+                <a:solidFill>
+                  <a:srgbClr val="0F172A"/>
+                </a:solidFill>
+                <a:latin typeface="Arial"/>
+              </a:rPr>
+              <a:t> after costs</a:t>
+            </a:r>
+          </a:p>
+        </p:txBody>
+      </p:sp>
+      <p:sp>
+        <p:nvSpPr>
+          <p:cNvPr id="9" name="TextBox 8"/>
+          <p:cNvSpPr txBox="1"/>
+          <p:nvPr/>
+        </p:nvSpPr>
+        <p:spPr>
+          <a:xfrm>
+            <a:off x="6187287" y="4983480"/>
+            <a:ext cx="5547207" cy="1371600"/>
+          </a:xfrm>
+          <a:prstGeom prst="rect">
+            <a:avLst/>
+          </a:prstGeom>
+          <a:noFill/>
+        </p:spPr>
+        <p:txBody>
+          <a:bodyPr wrap="square" anchor="t" lIns="73152" rIns="73152" tIns="36576" bIns="36576">
+            <a:spAutoFit/>
+          </a:bodyPr>
+          <a:lstStyle/>
+          <a:p>
+            <a:pPr algn="l" marL="292608" indent="-256032">
+              <a:spcAft>
+                <a:spcPts val="400"/>
+              </a:spcAft>
+              <a:buChar char="•"/>
+            </a:pPr>
+            <a:r>
+              <a:rPr sz="1800" b="0" i="0">
+                <a:solidFill>
+                  <a:srgbClr val="0F172A"/>
+                </a:solidFill>
+                <a:latin typeface="Arial"/>
+              </a:rPr>
+              <a:t>771 decision points → 153 with gap &gt; 4 pts → </a:t>
+            </a:r>
+            <a:r>
+              <a:rPr sz="1800" b="1" i="0">
+                <a:solidFill>
+                  <a:srgbClr val="0F172A"/>
+                </a:solidFill>
+                <a:latin typeface="Arial"/>
+              </a:rPr>
+              <a:t>74 trades</a:t>
+            </a:r>
+          </a:p>
+          <a:p>
+            <a:pPr algn="l" marL="292608" indent="-256032">
+              <a:spcAft>
+                <a:spcPts val="400"/>
+              </a:spcAft>
+              <a:buChar char="•"/>
+            </a:pPr>
+            <a:r>
+              <a:rPr sz="1800" b="0" i="0">
+                <a:solidFill>
+                  <a:srgbClr val="0F172A"/>
+                </a:solidFill>
+                <a:latin typeface="Arial"/>
+              </a:rPr>
+              <a:t>Only </a:t>
+            </a:r>
+            <a:r>
+              <a:rPr sz="1800" b="1" i="0">
+                <a:solidFill>
+                  <a:srgbClr val="0F172A"/>
+                </a:solidFill>
+                <a:latin typeface="Arial"/>
+              </a:rPr>
+              <a:t>27 (36%)</a:t>
+            </a:r>
+            <a:r>
+              <a:rPr sz="1800" b="0" i="0">
+                <a:solidFill>
+                  <a:srgbClr val="0F172A"/>
+                </a:solidFill>
+                <a:latin typeface="Arial"/>
+              </a:rPr>
+              <a:t> beat or matched the close</a:t>
             </a:r>
           </a:p>
         </p:txBody>
@@ -10631,7 +10655,7 @@
                 </a:solidFill>
                 <a:latin typeface="Arial"/>
               </a:rPr>
-              <a:t>Evidence 3: the market beats our model</a:t>
+              <a:t>Evidence 2: the price moves before the news reaches you</a:t>
             </a:r>
           </a:p>
         </p:txBody>
@@ -10670,7 +10694,7 @@
                 </a:solidFill>
                 <a:latin typeface="Arial"/>
               </a:rPr>
-              <a:t>DASC7606C Group 12 · Can a consumer beat a sports prediction market?</a:t>
+              <a:t>DASC7606C Group 12 · Betting markets are tilted against consumers</a:t>
             </a:r>
           </a:p>
         </p:txBody>
@@ -10716,7 +10740,7 @@
       </p:sp>
       <p:pic>
         <p:nvPicPr>
-          <p:cNvPr id="7" name="Picture 6" descr="m4_vs_market.png"/>
+          <p:cNvPr id="7" name="Picture 6" descr="price_discovery.png"/>
           <p:cNvPicPr>
             <a:picLocks noChangeAspect="1"/>
           </p:cNvPicPr>
@@ -10730,8 +10754,8 @@
         </p:blipFill>
         <p:spPr>
           <a:xfrm>
-            <a:off x="457200" y="1209821"/>
-            <a:ext cx="6949440" cy="5078436"/>
+            <a:off x="895197" y="1097280"/>
+            <a:ext cx="10401299" cy="4160520"/>
           </a:xfrm>
           <a:prstGeom prst="rect">
             <a:avLst/>
@@ -10746,8 +10770,8 @@
         </p:nvSpPr>
         <p:spPr>
           <a:xfrm>
-            <a:off x="7589520" y="1280160"/>
-            <a:ext cx="4144975" cy="5120640"/>
+            <a:off x="457200" y="5349240"/>
+            <a:ext cx="11277295" cy="1005840"/>
           </a:xfrm>
           <a:prstGeom prst="rect">
             <a:avLst/>
@@ -10762,104 +10786,44 @@
           <a:p>
             <a:pPr algn="l" marL="292608" indent="-256032">
               <a:spcAft>
-                <a:spcPts val="1000"/>
+                <a:spcPts val="400"/>
               </a:spcAft>
               <a:buChar char="•"/>
             </a:pPr>
             <a:r>
-              <a:rPr sz="1900" b="0" i="0">
+              <a:rPr sz="1800" b="1" i="0">
                 <a:solidFill>
                   <a:srgbClr val="0F172A"/>
                 </a:solidFill>
                 <a:latin typeface="Arial"/>
               </a:rPr>
-              <a:t>Brier, 501 test games, 1 h before tip: </a:t>
-            </a:r>
-            <a:r>
-              <a:rPr sz="1900" b="1" i="0">
+              <a:t>91%</a:t>
+            </a:r>
+            <a:r>
+              <a:rPr sz="1800" b="0" i="0">
                 <a:solidFill>
                   <a:srgbClr val="0F172A"/>
                 </a:solidFill>
                 <a:latin typeface="Arial"/>
               </a:rPr>
-              <a:t>market 0.164</a:t>
-            </a:r>
-            <a:r>
-              <a:rPr sz="1900" b="0" i="0">
-                <a:solidFill>
-                  <a:srgbClr val="0F172A"/>
-                </a:solidFill>
-                <a:latin typeface="Arial"/>
-              </a:rPr>
-              <a:t>, our model 0.186</a:t>
+              <a:t> of the news-direction move was already in the price when the list was public (+1.80 vs +0.18 pts, 193 test games)</a:t>
             </a:r>
           </a:p>
           <a:p>
             <a:pPr algn="l" marL="292608" indent="-256032">
               <a:spcAft>
-                <a:spcPts val="1000"/>
+                <a:spcPts val="400"/>
               </a:spcAft>
               <a:buChar char="•"/>
             </a:pPr>
             <a:r>
-              <a:rPr sz="1900" b="0" i="0">
+              <a:rPr sz="1800" b="0" i="0">
                 <a:solidFill>
                   <a:srgbClr val="0F172A"/>
                 </a:solidFill>
                 <a:latin typeface="Arial"/>
               </a:rPr>
-              <a:t>Disagree by more than 5 pts, and the market is right:</a:t>
-            </a:r>
-          </a:p>
-          <a:p>
-            <a:pPr algn="l" marL="612647" indent="-256032">
-              <a:spcAft>
-                <a:spcPts val="1000"/>
-              </a:spcAft>
-              <a:buChar char="–"/>
-            </a:pPr>
-            <a:r>
-              <a:rPr sz="1700" b="0" i="0">
-                <a:solidFill>
-                  <a:srgbClr val="0F172A"/>
-                </a:solidFill>
-                <a:latin typeface="Arial"/>
-              </a:rPr>
-              <a:t>model higher on home: model 48%, market 35%, actual 34%</a:t>
-            </a:r>
-          </a:p>
-          <a:p>
-            <a:pPr algn="l" marL="612647" indent="-256032">
-              <a:spcAft>
-                <a:spcPts val="1000"/>
-              </a:spcAft>
-              <a:buChar char="–"/>
-            </a:pPr>
-            <a:r>
-              <a:rPr sz="1700" b="0" i="0">
-                <a:solidFill>
-                  <a:srgbClr val="0F172A"/>
-                </a:solidFill>
-                <a:latin typeface="Arial"/>
-              </a:rPr>
-              <a:t>model lower on home: model 61%, market 73%, actual 77%</a:t>
-            </a:r>
-          </a:p>
-          <a:p>
-            <a:pPr algn="l" marL="292608" indent="-256032">
-              <a:spcAft>
-                <a:spcPts val="1000"/>
-              </a:spcAft>
-              <a:buChar char="•"/>
-            </a:pPr>
-            <a:r>
-              <a:rPr sz="1600" b="0" i="0">
-                <a:solidFill>
-                  <a:srgbClr val="64748B"/>
-                </a:solidFill>
-                <a:latin typeface="Arial"/>
-              </a:rPr>
-              <a:t>With the inactive list: model 0.183 vs market at tip 0.163</a:t>
+              <a:t>List stamped tip − 30 min: our proxy for when a retail user sees it</a:t>
             </a:r>
           </a:p>
         </p:txBody>
@@ -11004,7 +10968,7 @@
                 </a:solidFill>
                 <a:latin typeface="Arial"/>
               </a:rPr>
-              <a:t>Evidence 4: even a market-trained neural net finds nothing</a:t>
+              <a:t>Evidence 3: the market beats our model</a:t>
             </a:r>
           </a:p>
         </p:txBody>
@@ -11043,7 +11007,7 @@
                 </a:solidFill>
                 <a:latin typeface="Arial"/>
               </a:rPr>
-              <a:t>DASC7606C Group 12 · Can a consumer beat a sports prediction market?</a:t>
+              <a:t>DASC7606C Group 12 · Betting markets are tilted against consumers</a:t>
             </a:r>
           </a:p>
         </p:txBody>
@@ -11089,7 +11053,7 @@
       </p:sp>
       <p:pic>
         <p:nvPicPr>
-          <p:cNvPr id="7" name="Picture 6" descr="m6_vs_baselines.png"/>
+          <p:cNvPr id="7" name="Picture 6" descr="m4_vs_market.png"/>
           <p:cNvPicPr>
             <a:picLocks noChangeAspect="1"/>
           </p:cNvPicPr>
@@ -11103,8 +11067,8 @@
         </p:blipFill>
         <p:spPr>
           <a:xfrm>
-            <a:off x="579630" y="1097280"/>
-            <a:ext cx="11032434" cy="3383280"/>
+            <a:off x="457200" y="1209821"/>
+            <a:ext cx="6949440" cy="5078436"/>
           </a:xfrm>
           <a:prstGeom prst="rect">
             <a:avLst/>
@@ -11119,8 +11083,8 @@
         </p:nvSpPr>
         <p:spPr>
           <a:xfrm>
-            <a:off x="457200" y="4526280"/>
-            <a:ext cx="11277295" cy="1298448"/>
+            <a:off x="7589520" y="1280160"/>
+            <a:ext cx="4144975" cy="5120640"/>
           </a:xfrm>
           <a:prstGeom prst="rect">
             <a:avLst/>
@@ -11135,156 +11099,104 @@
           <a:p>
             <a:pPr algn="l" marL="292608" indent="-256032">
               <a:spcAft>
-                <a:spcPts val="400"/>
+                <a:spcPts val="1000"/>
               </a:spcAft>
               <a:buChar char="•"/>
             </a:pPr>
             <a:r>
-              <a:rPr sz="1800" b="0" i="0">
+              <a:rPr sz="1900" b="0" i="0">
                 <a:solidFill>
                   <a:srgbClr val="0F172A"/>
                 </a:solidFill>
                 <a:latin typeface="Arial"/>
               </a:rPr>
-              <a:t>Average error on 771 test decision times: </a:t>
-            </a:r>
-            <a:r>
-              <a:rPr sz="1800" b="1" i="0">
+              <a:t>Brier, 501 test games, 1 h before tip: </a:t>
+            </a:r>
+            <a:r>
+              <a:rPr sz="1900" b="1" i="0">
                 <a:solidFill>
                   <a:srgbClr val="0F172A"/>
                 </a:solidFill>
                 <a:latin typeface="Arial"/>
               </a:rPr>
-              <a:t>M6 0.867¢</a:t>
-            </a:r>
-            <a:r>
-              <a:rPr sz="1800" b="0" i="0">
+              <a:t>market 0.164</a:t>
+            </a:r>
+            <a:r>
+              <a:rPr sz="1900" b="0" i="0">
                 <a:solidFill>
                   <a:srgbClr val="0F172A"/>
                 </a:solidFill>
                 <a:latin typeface="Arial"/>
               </a:rPr>
-              <a:t> vs “price won't move” </a:t>
-            </a:r>
-            <a:r>
-              <a:rPr sz="1800" b="1" i="0">
-                <a:solidFill>
-                  <a:srgbClr val="0F172A"/>
-                </a:solidFill>
-                <a:latin typeface="Arial"/>
-              </a:rPr>
-              <a:t>0.833¢</a:t>
-            </a:r>
-            <a:r>
-              <a:rPr sz="1800" b="0" i="0">
-                <a:solidFill>
-                  <a:srgbClr val="0F172A"/>
-                </a:solidFill>
-                <a:latin typeface="Arial"/>
-              </a:rPr>
-              <a:t>; R² ≈ 0 on test and holdout</a:t>
+              <a:t>, our model 0.186</a:t>
             </a:r>
           </a:p>
           <a:p>
             <a:pPr algn="l" marL="292608" indent="-256032">
               <a:spcAft>
-                <a:spcPts val="400"/>
+                <a:spcPts val="1000"/>
               </a:spcAft>
               <a:buChar char="•"/>
             </a:pPr>
             <a:r>
-              <a:rPr sz="1800" b="0" i="0">
+              <a:rPr sz="1900" b="0" i="0">
                 <a:solidFill>
                   <a:srgbClr val="0F172A"/>
                 </a:solidFill>
                 <a:latin typeface="Arial"/>
               </a:rPr>
-              <a:t>After the list, the price moves ~2.5% of the model's implied shift (coefficient 0.025); M6 agent: 0 trades. Forced: 501 trades, −$652</a:t>
-            </a:r>
-          </a:p>
-        </p:txBody>
-      </p:sp>
-      <p:sp>
-        <p:nvSpPr>
-          <p:cNvPr id="9" name="Rounded Rectangle 8"/>
-          <p:cNvSpPr/>
-          <p:nvPr/>
-        </p:nvSpPr>
-        <p:spPr>
-          <a:xfrm>
-            <a:off x="457200" y="5870448"/>
-            <a:ext cx="11277295" cy="457200"/>
-          </a:xfrm>
-          <a:prstGeom prst="roundRect">
-            <a:avLst>
-              <a:gd name="adj" fmla="val 12000"/>
-            </a:avLst>
-          </a:prstGeom>
-          <a:solidFill>
-            <a:srgbClr val="FEF3C7"/>
-          </a:solidFill>
-          <a:ln>
-            <a:noFill/>
-          </a:ln>
-          <a:effectLst/>
-        </p:spPr>
-        <p:style>
-          <a:lnRef idx="1">
-            <a:schemeClr val="accent1"/>
-          </a:lnRef>
-          <a:fillRef idx="3">
-            <a:schemeClr val="accent1"/>
-          </a:fillRef>
-          <a:effectRef idx="2">
-            <a:schemeClr val="accent1"/>
-          </a:effectRef>
-          <a:fontRef idx="minor">
-            <a:schemeClr val="lt1"/>
-          </a:fontRef>
-        </p:style>
-        <p:txBody>
-          <a:bodyPr rtlCol="0" anchor="ctr"/>
-          <a:lstStyle/>
-          <a:p>
-            <a:pPr algn="ctr"/>
-          </a:p>
-        </p:txBody>
-      </p:sp>
-      <p:sp>
-        <p:nvSpPr>
-          <p:cNvPr id="10" name="TextBox 9"/>
-          <p:cNvSpPr txBox="1"/>
-          <p:nvPr/>
-        </p:nvSpPr>
-        <p:spPr>
-          <a:xfrm>
-            <a:off x="548640" y="5870448"/>
-            <a:ext cx="11094415" cy="457200"/>
-          </a:xfrm>
-          <a:prstGeom prst="rect">
-            <a:avLst/>
-          </a:prstGeom>
-          <a:noFill/>
-        </p:spPr>
-        <p:txBody>
-          <a:bodyPr wrap="square" anchor="ctr" lIns="73152" rIns="73152" tIns="36576" bIns="36576">
-            <a:spAutoFit/>
-          </a:bodyPr>
-          <a:lstStyle/>
-          <a:p>
-            <a:pPr algn="l">
+              <a:t>Disagree by more than 5 pts, and the market is right:</a:t>
+            </a:r>
+          </a:p>
+          <a:p>
+            <a:pPr algn="l" marL="612647" indent="-256032">
               <a:spcAft>
-                <a:spcPts val="0"/>
+                <a:spcPts val="1000"/>
               </a:spcAft>
+              <a:buChar char="–"/>
             </a:pPr>
             <a:r>
-              <a:rPr sz="1800" b="0" i="0">
+              <a:rPr sz="1700" b="0" i="0">
                 <a:solidFill>
                   <a:srgbClr val="0F172A"/>
                 </a:solidFill>
                 <a:latin typeface="Arial"/>
               </a:rPr>
-              <a:t>The price already contains the public information; the consumer is left paying costs</a:t>
+              <a:t>model higher on home: model 48%, market 35%, actual 34%</a:t>
+            </a:r>
+          </a:p>
+          <a:p>
+            <a:pPr algn="l" marL="612647" indent="-256032">
+              <a:spcAft>
+                <a:spcPts val="1000"/>
+              </a:spcAft>
+              <a:buChar char="–"/>
+            </a:pPr>
+            <a:r>
+              <a:rPr sz="1700" b="0" i="0">
+                <a:solidFill>
+                  <a:srgbClr val="0F172A"/>
+                </a:solidFill>
+                <a:latin typeface="Arial"/>
+              </a:rPr>
+              <a:t>model lower on home: model 61%, market 73%, actual 77%</a:t>
+            </a:r>
+          </a:p>
+          <a:p>
+            <a:pPr algn="l" marL="292608" indent="-256032">
+              <a:spcAft>
+                <a:spcPts val="1000"/>
+              </a:spcAft>
+              <a:buChar char="•"/>
+            </a:pPr>
+            <a:r>
+              <a:rPr sz="1600" b="0" i="0">
+                <a:solidFill>
+                  <a:srgbClr val="64748B"/>
+                </a:solidFill>
+                <a:latin typeface="Arial"/>
+              </a:rPr>
+              <a:t>With the inactive list: model 0.183 vs market at tip 0.163</a:t>
             </a:r>
           </a:p>
         </p:txBody>
@@ -11429,7 +11341,7 @@
                 </a:solidFill>
                 <a:latin typeface="Arial"/>
               </a:rPr>
-              <a:t>Evidence 5: tested with CIs, never trading wins</a:t>
+              <a:t>Evidence 4: even a market-trained neural net finds nothing</a:t>
             </a:r>
           </a:p>
         </p:txBody>
@@ -11468,7 +11380,7 @@
                 </a:solidFill>
                 <a:latin typeface="Arial"/>
               </a:rPr>
-              <a:t>DASC7606C Group 12 · Can a consumer beat a sports prediction market?</a:t>
+              <a:t>DASC7606C Group 12 · Betting markets are tilted against consumers</a:t>
             </a:r>
           </a:p>
         </p:txBody>
@@ -11508,6 +11420,431 @@
                 <a:latin typeface="Arial"/>
               </a:rPr>
               <a:t>8</a:t>
+            </a:r>
+          </a:p>
+        </p:txBody>
+      </p:sp>
+      <p:pic>
+        <p:nvPicPr>
+          <p:cNvPr id="7" name="Picture 6" descr="m6_vs_baselines.png"/>
+          <p:cNvPicPr>
+            <a:picLocks noChangeAspect="1"/>
+          </p:cNvPicPr>
+          <p:nvPr/>
+        </p:nvPicPr>
+        <p:blipFill>
+          <a:blip r:embed="rId3"/>
+          <a:stretch>
+            <a:fillRect/>
+          </a:stretch>
+        </p:blipFill>
+        <p:spPr>
+          <a:xfrm>
+            <a:off x="579630" y="1097280"/>
+            <a:ext cx="11032434" cy="3383280"/>
+          </a:xfrm>
+          <a:prstGeom prst="rect">
+            <a:avLst/>
+          </a:prstGeom>
+        </p:spPr>
+      </p:pic>
+      <p:sp>
+        <p:nvSpPr>
+          <p:cNvPr id="8" name="TextBox 7"/>
+          <p:cNvSpPr txBox="1"/>
+          <p:nvPr/>
+        </p:nvSpPr>
+        <p:spPr>
+          <a:xfrm>
+            <a:off x="457200" y="4526280"/>
+            <a:ext cx="11277295" cy="1298448"/>
+          </a:xfrm>
+          <a:prstGeom prst="rect">
+            <a:avLst/>
+          </a:prstGeom>
+          <a:noFill/>
+        </p:spPr>
+        <p:txBody>
+          <a:bodyPr wrap="square" anchor="t" lIns="73152" rIns="73152" tIns="36576" bIns="36576">
+            <a:spAutoFit/>
+          </a:bodyPr>
+          <a:lstStyle/>
+          <a:p>
+            <a:pPr algn="l" marL="292608" indent="-256032">
+              <a:spcAft>
+                <a:spcPts val="400"/>
+              </a:spcAft>
+              <a:buChar char="•"/>
+            </a:pPr>
+            <a:r>
+              <a:rPr sz="1800" b="0" i="0">
+                <a:solidFill>
+                  <a:srgbClr val="0F172A"/>
+                </a:solidFill>
+                <a:latin typeface="Arial"/>
+              </a:rPr>
+              <a:t>Average error on 771 test decision times: </a:t>
+            </a:r>
+            <a:r>
+              <a:rPr sz="1800" b="1" i="0">
+                <a:solidFill>
+                  <a:srgbClr val="0F172A"/>
+                </a:solidFill>
+                <a:latin typeface="Arial"/>
+              </a:rPr>
+              <a:t>M6 0.867¢</a:t>
+            </a:r>
+            <a:r>
+              <a:rPr sz="1800" b="0" i="0">
+                <a:solidFill>
+                  <a:srgbClr val="0F172A"/>
+                </a:solidFill>
+                <a:latin typeface="Arial"/>
+              </a:rPr>
+              <a:t> vs “price won't move” </a:t>
+            </a:r>
+            <a:r>
+              <a:rPr sz="1800" b="1" i="0">
+                <a:solidFill>
+                  <a:srgbClr val="0F172A"/>
+                </a:solidFill>
+                <a:latin typeface="Arial"/>
+              </a:rPr>
+              <a:t>0.833¢</a:t>
+            </a:r>
+            <a:r>
+              <a:rPr sz="1800" b="0" i="0">
+                <a:solidFill>
+                  <a:srgbClr val="0F172A"/>
+                </a:solidFill>
+                <a:latin typeface="Arial"/>
+              </a:rPr>
+              <a:t>; R² ≈ 0 on test and holdout</a:t>
+            </a:r>
+          </a:p>
+          <a:p>
+            <a:pPr algn="l" marL="292608" indent="-256032">
+              <a:spcAft>
+                <a:spcPts val="400"/>
+              </a:spcAft>
+              <a:buChar char="•"/>
+            </a:pPr>
+            <a:r>
+              <a:rPr sz="1800" b="0" i="0">
+                <a:solidFill>
+                  <a:srgbClr val="0F172A"/>
+                </a:solidFill>
+                <a:latin typeface="Arial"/>
+              </a:rPr>
+              <a:t>After the list, the price moves ~2.5% of the model's implied shift (coefficient 0.025); M6 agent: 0 trades. Forced: 501 trades, −$652</a:t>
+            </a:r>
+          </a:p>
+        </p:txBody>
+      </p:sp>
+      <p:sp>
+        <p:nvSpPr>
+          <p:cNvPr id="9" name="Rounded Rectangle 8"/>
+          <p:cNvSpPr/>
+          <p:nvPr/>
+        </p:nvSpPr>
+        <p:spPr>
+          <a:xfrm>
+            <a:off x="457200" y="5870448"/>
+            <a:ext cx="11277295" cy="457200"/>
+          </a:xfrm>
+          <a:prstGeom prst="roundRect">
+            <a:avLst>
+              <a:gd name="adj" fmla="val 12000"/>
+            </a:avLst>
+          </a:prstGeom>
+          <a:solidFill>
+            <a:srgbClr val="FEF3C7"/>
+          </a:solidFill>
+          <a:ln>
+            <a:noFill/>
+          </a:ln>
+          <a:effectLst/>
+        </p:spPr>
+        <p:style>
+          <a:lnRef idx="1">
+            <a:schemeClr val="accent1"/>
+          </a:lnRef>
+          <a:fillRef idx="3">
+            <a:schemeClr val="accent1"/>
+          </a:fillRef>
+          <a:effectRef idx="2">
+            <a:schemeClr val="accent1"/>
+          </a:effectRef>
+          <a:fontRef idx="minor">
+            <a:schemeClr val="lt1"/>
+          </a:fontRef>
+        </p:style>
+        <p:txBody>
+          <a:bodyPr rtlCol="0" anchor="ctr"/>
+          <a:lstStyle/>
+          <a:p>
+            <a:pPr algn="ctr"/>
+          </a:p>
+        </p:txBody>
+      </p:sp>
+      <p:sp>
+        <p:nvSpPr>
+          <p:cNvPr id="10" name="TextBox 9"/>
+          <p:cNvSpPr txBox="1"/>
+          <p:nvPr/>
+        </p:nvSpPr>
+        <p:spPr>
+          <a:xfrm>
+            <a:off x="548640" y="5870448"/>
+            <a:ext cx="11094415" cy="457200"/>
+          </a:xfrm>
+          <a:prstGeom prst="rect">
+            <a:avLst/>
+          </a:prstGeom>
+          <a:noFill/>
+        </p:spPr>
+        <p:txBody>
+          <a:bodyPr wrap="square" anchor="ctr" lIns="73152" rIns="73152" tIns="36576" bIns="36576">
+            <a:spAutoFit/>
+          </a:bodyPr>
+          <a:lstStyle/>
+          <a:p>
+            <a:pPr algn="l">
+              <a:spcAft>
+                <a:spcPts val="0"/>
+              </a:spcAft>
+            </a:pPr>
+            <a:r>
+              <a:rPr sz="1800" b="0" i="0">
+                <a:solidFill>
+                  <a:srgbClr val="0F172A"/>
+                </a:solidFill>
+                <a:latin typeface="Arial"/>
+              </a:rPr>
+              <a:t>The price already contains the public information; the consumer is left paying costs</a:t>
+            </a:r>
+          </a:p>
+        </p:txBody>
+      </p:sp>
+    </p:spTree>
+  </p:cSld>
+  <p:clrMapOvr>
+    <a:masterClrMapping/>
+  </p:clrMapOvr>
+</p:sld>
+</file>
+
+<file path=ppt/slides/slide9.xml><?xml version="1.0" encoding="utf-8"?>
+<p:sld xmlns:a="http://schemas.openxmlformats.org/drawingml/2006/main" xmlns:p="http://schemas.openxmlformats.org/presentationml/2006/main" xmlns:r="http://schemas.openxmlformats.org/officeDocument/2006/relationships">
+  <p:cSld>
+    <p:spTree>
+      <p:nvGrpSpPr>
+        <p:cNvPr id="1" name=""/>
+        <p:cNvGrpSpPr/>
+        <p:nvPr/>
+      </p:nvGrpSpPr>
+      <p:grpSpPr/>
+      <p:sp>
+        <p:nvSpPr>
+          <p:cNvPr id="2" name="Rectangle 1"/>
+          <p:cNvSpPr/>
+          <p:nvPr/>
+        </p:nvSpPr>
+        <p:spPr>
+          <a:xfrm>
+            <a:off x="0" y="0"/>
+            <a:ext cx="12191695" cy="868680"/>
+          </a:xfrm>
+          <a:prstGeom prst="rect">
+            <a:avLst/>
+          </a:prstGeom>
+          <a:solidFill>
+            <a:srgbClr val="1E293B"/>
+          </a:solidFill>
+          <a:ln>
+            <a:noFill/>
+          </a:ln>
+          <a:effectLst/>
+        </p:spPr>
+        <p:style>
+          <a:lnRef idx="1">
+            <a:schemeClr val="accent1"/>
+          </a:lnRef>
+          <a:fillRef idx="3">
+            <a:schemeClr val="accent1"/>
+          </a:fillRef>
+          <a:effectRef idx="2">
+            <a:schemeClr val="accent1"/>
+          </a:effectRef>
+          <a:fontRef idx="minor">
+            <a:schemeClr val="lt1"/>
+          </a:fontRef>
+        </p:style>
+        <p:txBody>
+          <a:bodyPr rtlCol="0" anchor="ctr"/>
+          <a:lstStyle/>
+          <a:p>
+            <a:pPr algn="ctr"/>
+          </a:p>
+        </p:txBody>
+      </p:sp>
+      <p:sp>
+        <p:nvSpPr>
+          <p:cNvPr id="3" name="Rectangle 2"/>
+          <p:cNvSpPr/>
+          <p:nvPr/>
+        </p:nvSpPr>
+        <p:spPr>
+          <a:xfrm>
+            <a:off x="0" y="868680"/>
+            <a:ext cx="12191695" cy="54864"/>
+          </a:xfrm>
+          <a:prstGeom prst="rect">
+            <a:avLst/>
+          </a:prstGeom>
+          <a:solidFill>
+            <a:srgbClr val="EA580C"/>
+          </a:solidFill>
+          <a:ln>
+            <a:noFill/>
+          </a:ln>
+          <a:effectLst/>
+        </p:spPr>
+        <p:style>
+          <a:lnRef idx="1">
+            <a:schemeClr val="accent1"/>
+          </a:lnRef>
+          <a:fillRef idx="3">
+            <a:schemeClr val="accent1"/>
+          </a:fillRef>
+          <a:effectRef idx="2">
+            <a:schemeClr val="accent1"/>
+          </a:effectRef>
+          <a:fontRef idx="minor">
+            <a:schemeClr val="lt1"/>
+          </a:fontRef>
+        </p:style>
+        <p:txBody>
+          <a:bodyPr rtlCol="0" anchor="ctr"/>
+          <a:lstStyle/>
+          <a:p>
+            <a:pPr algn="ctr"/>
+          </a:p>
+        </p:txBody>
+      </p:sp>
+      <p:sp>
+        <p:nvSpPr>
+          <p:cNvPr id="4" name="TextBox 3"/>
+          <p:cNvSpPr txBox="1"/>
+          <p:nvPr/>
+        </p:nvSpPr>
+        <p:spPr>
+          <a:xfrm>
+            <a:off x="457200" y="109728"/>
+            <a:ext cx="11277295" cy="685800"/>
+          </a:xfrm>
+          <a:prstGeom prst="rect">
+            <a:avLst/>
+          </a:prstGeom>
+          <a:noFill/>
+        </p:spPr>
+        <p:txBody>
+          <a:bodyPr wrap="square" anchor="ctr" lIns="73152" rIns="73152" tIns="36576" bIns="36576">
+            <a:spAutoFit/>
+          </a:bodyPr>
+          <a:lstStyle/>
+          <a:p>
+            <a:pPr algn="l">
+              <a:spcAft>
+                <a:spcPts val="0"/>
+              </a:spcAft>
+            </a:pPr>
+            <a:r>
+              <a:rPr sz="3000" b="1" i="0">
+                <a:solidFill>
+                  <a:srgbClr val="FFFFFF"/>
+                </a:solidFill>
+                <a:latin typeface="Arial"/>
+              </a:rPr>
+              <a:t>Evidence 5: tested with CIs, never trading wins</a:t>
+            </a:r>
+          </a:p>
+        </p:txBody>
+      </p:sp>
+      <p:sp>
+        <p:nvSpPr>
+          <p:cNvPr id="5" name="TextBox 4"/>
+          <p:cNvSpPr txBox="1"/>
+          <p:nvPr/>
+        </p:nvSpPr>
+        <p:spPr>
+          <a:xfrm>
+            <a:off x="457200" y="6446520"/>
+            <a:ext cx="9144000" cy="320040"/>
+          </a:xfrm>
+          <a:prstGeom prst="rect">
+            <a:avLst/>
+          </a:prstGeom>
+          <a:noFill/>
+        </p:spPr>
+        <p:txBody>
+          <a:bodyPr wrap="square" anchor="t" lIns="73152" rIns="73152" tIns="36576" bIns="36576">
+            <a:spAutoFit/>
+          </a:bodyPr>
+          <a:lstStyle/>
+          <a:p>
+            <a:pPr algn="l">
+              <a:spcAft>
+                <a:spcPts val="0"/>
+              </a:spcAft>
+            </a:pPr>
+            <a:r>
+              <a:rPr sz="1100" b="0" i="0">
+                <a:solidFill>
+                  <a:srgbClr val="64748B"/>
+                </a:solidFill>
+                <a:latin typeface="Arial"/>
+              </a:rPr>
+              <a:t>DASC7606C Group 12 · Betting markets are tilted against consumers</a:t>
+            </a:r>
+          </a:p>
+        </p:txBody>
+      </p:sp>
+      <p:sp>
+        <p:nvSpPr>
+          <p:cNvPr id="6" name="TextBox 5"/>
+          <p:cNvSpPr txBox="1"/>
+          <p:nvPr/>
+        </p:nvSpPr>
+        <p:spPr>
+          <a:xfrm>
+            <a:off x="10820095" y="6446520"/>
+            <a:ext cx="914400" cy="320040"/>
+          </a:xfrm>
+          <a:prstGeom prst="rect">
+            <a:avLst/>
+          </a:prstGeom>
+          <a:noFill/>
+        </p:spPr>
+        <p:txBody>
+          <a:bodyPr wrap="square" anchor="t" lIns="73152" rIns="73152" tIns="36576" bIns="36576">
+            <a:spAutoFit/>
+          </a:bodyPr>
+          <a:lstStyle/>
+          <a:p>
+            <a:pPr algn="r">
+              <a:spcAft>
+                <a:spcPts val="0"/>
+              </a:spcAft>
+            </a:pPr>
+            <a:r>
+              <a:rPr sz="1100" b="0" i="0">
+                <a:solidFill>
+                  <a:srgbClr val="64748B"/>
+                </a:solidFill>
+                <a:latin typeface="Arial"/>
+              </a:rPr>
+              <a:t>9</a:t>
             </a:r>
           </a:p>
         </p:txBody>
@@ -12036,337 +12373,6 @@
                 <a:latin typeface="Arial"/>
               </a:rPr>
               <a:t>Play-off holdout (87 games): full agent 0 trades; no learning 6 trades, −$74; raw model +$450 with negative CLV (luck)</a:t>
-            </a:r>
-          </a:p>
-        </p:txBody>
-      </p:sp>
-    </p:spTree>
-  </p:cSld>
-  <p:clrMapOvr>
-    <a:masterClrMapping/>
-  </p:clrMapOvr>
-</p:sld>
-</file>
-
-<file path=ppt/slides/slide9.xml><?xml version="1.0" encoding="utf-8"?>
-<p:sld xmlns:a="http://schemas.openxmlformats.org/drawingml/2006/main" xmlns:p="http://schemas.openxmlformats.org/presentationml/2006/main" xmlns:r="http://schemas.openxmlformats.org/officeDocument/2006/relationships">
-  <p:cSld>
-    <p:spTree>
-      <p:nvGrpSpPr>
-        <p:cNvPr id="1" name=""/>
-        <p:cNvGrpSpPr/>
-        <p:nvPr/>
-      </p:nvGrpSpPr>
-      <p:grpSpPr/>
-      <p:sp>
-        <p:nvSpPr>
-          <p:cNvPr id="2" name="Rectangle 1"/>
-          <p:cNvSpPr/>
-          <p:nvPr/>
-        </p:nvSpPr>
-        <p:spPr>
-          <a:xfrm>
-            <a:off x="0" y="0"/>
-            <a:ext cx="12191695" cy="868680"/>
-          </a:xfrm>
-          <a:prstGeom prst="rect">
-            <a:avLst/>
-          </a:prstGeom>
-          <a:solidFill>
-            <a:srgbClr val="1E293B"/>
-          </a:solidFill>
-          <a:ln>
-            <a:noFill/>
-          </a:ln>
-          <a:effectLst/>
-        </p:spPr>
-        <p:style>
-          <a:lnRef idx="1">
-            <a:schemeClr val="accent1"/>
-          </a:lnRef>
-          <a:fillRef idx="3">
-            <a:schemeClr val="accent1"/>
-          </a:fillRef>
-          <a:effectRef idx="2">
-            <a:schemeClr val="accent1"/>
-          </a:effectRef>
-          <a:fontRef idx="minor">
-            <a:schemeClr val="lt1"/>
-          </a:fontRef>
-        </p:style>
-        <p:txBody>
-          <a:bodyPr rtlCol="0" anchor="ctr"/>
-          <a:lstStyle/>
-          <a:p>
-            <a:pPr algn="ctr"/>
-          </a:p>
-        </p:txBody>
-      </p:sp>
-      <p:sp>
-        <p:nvSpPr>
-          <p:cNvPr id="3" name="Rectangle 2"/>
-          <p:cNvSpPr/>
-          <p:nvPr/>
-        </p:nvSpPr>
-        <p:spPr>
-          <a:xfrm>
-            <a:off x="0" y="868680"/>
-            <a:ext cx="12191695" cy="54864"/>
-          </a:xfrm>
-          <a:prstGeom prst="rect">
-            <a:avLst/>
-          </a:prstGeom>
-          <a:solidFill>
-            <a:srgbClr val="EA580C"/>
-          </a:solidFill>
-          <a:ln>
-            <a:noFill/>
-          </a:ln>
-          <a:effectLst/>
-        </p:spPr>
-        <p:style>
-          <a:lnRef idx="1">
-            <a:schemeClr val="accent1"/>
-          </a:lnRef>
-          <a:fillRef idx="3">
-            <a:schemeClr val="accent1"/>
-          </a:fillRef>
-          <a:effectRef idx="2">
-            <a:schemeClr val="accent1"/>
-          </a:effectRef>
-          <a:fontRef idx="minor">
-            <a:schemeClr val="lt1"/>
-          </a:fontRef>
-        </p:style>
-        <p:txBody>
-          <a:bodyPr rtlCol="0" anchor="ctr"/>
-          <a:lstStyle/>
-          <a:p>
-            <a:pPr algn="ctr"/>
-          </a:p>
-        </p:txBody>
-      </p:sp>
-      <p:sp>
-        <p:nvSpPr>
-          <p:cNvPr id="4" name="TextBox 3"/>
-          <p:cNvSpPr txBox="1"/>
-          <p:nvPr/>
-        </p:nvSpPr>
-        <p:spPr>
-          <a:xfrm>
-            <a:off x="457200" y="109728"/>
-            <a:ext cx="11277295" cy="685800"/>
-          </a:xfrm>
-          <a:prstGeom prst="rect">
-            <a:avLst/>
-          </a:prstGeom>
-          <a:noFill/>
-        </p:spPr>
-        <p:txBody>
-          <a:bodyPr wrap="square" anchor="ctr" lIns="73152" rIns="73152" tIns="36576" bIns="36576">
-            <a:spAutoFit/>
-          </a:bodyPr>
-          <a:lstStyle/>
-          <a:p>
-            <a:pPr algn="l">
-              <a:spcAft>
-                <a:spcPts val="0"/>
-              </a:spcAft>
-            </a:pPr>
-            <a:r>
-              <a:rPr sz="3000" b="1" i="0">
-                <a:solidFill>
-                  <a:srgbClr val="FFFFFF"/>
-                </a:solidFill>
-                <a:latin typeface="Arial"/>
-              </a:rPr>
-              <a:t>Long shots: where the data is weaker</a:t>
-            </a:r>
-          </a:p>
-        </p:txBody>
-      </p:sp>
-      <p:sp>
-        <p:nvSpPr>
-          <p:cNvPr id="5" name="TextBox 4"/>
-          <p:cNvSpPr txBox="1"/>
-          <p:nvPr/>
-        </p:nvSpPr>
-        <p:spPr>
-          <a:xfrm>
-            <a:off x="457200" y="6446520"/>
-            <a:ext cx="9144000" cy="320040"/>
-          </a:xfrm>
-          <a:prstGeom prst="rect">
-            <a:avLst/>
-          </a:prstGeom>
-          <a:noFill/>
-        </p:spPr>
-        <p:txBody>
-          <a:bodyPr wrap="square" anchor="t" lIns="73152" rIns="73152" tIns="36576" bIns="36576">
-            <a:spAutoFit/>
-          </a:bodyPr>
-          <a:lstStyle/>
-          <a:p>
-            <a:pPr algn="l">
-              <a:spcAft>
-                <a:spcPts val="0"/>
-              </a:spcAft>
-            </a:pPr>
-            <a:r>
-              <a:rPr sz="1100" b="0" i="0">
-                <a:solidFill>
-                  <a:srgbClr val="64748B"/>
-                </a:solidFill>
-                <a:latin typeface="Arial"/>
-              </a:rPr>
-              <a:t>DASC7606C Group 12 · Can a consumer beat a sports prediction market?</a:t>
-            </a:r>
-          </a:p>
-        </p:txBody>
-      </p:sp>
-      <p:sp>
-        <p:nvSpPr>
-          <p:cNvPr id="6" name="TextBox 5"/>
-          <p:cNvSpPr txBox="1"/>
-          <p:nvPr/>
-        </p:nvSpPr>
-        <p:spPr>
-          <a:xfrm>
-            <a:off x="10820095" y="6446520"/>
-            <a:ext cx="914400" cy="320040"/>
-          </a:xfrm>
-          <a:prstGeom prst="rect">
-            <a:avLst/>
-          </a:prstGeom>
-          <a:noFill/>
-        </p:spPr>
-        <p:txBody>
-          <a:bodyPr wrap="square" anchor="t" lIns="73152" rIns="73152" tIns="36576" bIns="36576">
-            <a:spAutoFit/>
-          </a:bodyPr>
-          <a:lstStyle/>
-          <a:p>
-            <a:pPr algn="r">
-              <a:spcAft>
-                <a:spcPts val="0"/>
-              </a:spcAft>
-            </a:pPr>
-            <a:r>
-              <a:rPr sz="1100" b="0" i="0">
-                <a:solidFill>
-                  <a:srgbClr val="64748B"/>
-                </a:solidFill>
-                <a:latin typeface="Arial"/>
-              </a:rPr>
-              <a:t>9</a:t>
-            </a:r>
-          </a:p>
-        </p:txBody>
-      </p:sp>
-      <p:pic>
-        <p:nvPicPr>
-          <p:cNvPr id="7" name="Picture 6" descr="longshot_calibration.png"/>
-          <p:cNvPicPr>
-            <a:picLocks noChangeAspect="1"/>
-          </p:cNvPicPr>
-          <p:nvPr/>
-        </p:nvPicPr>
-        <p:blipFill>
-          <a:blip r:embed="rId3"/>
-          <a:stretch>
-            <a:fillRect/>
-          </a:stretch>
-        </p:blipFill>
-        <p:spPr>
-          <a:xfrm>
-            <a:off x="895197" y="1097280"/>
-            <a:ext cx="10401299" cy="4160520"/>
-          </a:xfrm>
-          <a:prstGeom prst="rect">
-            <a:avLst/>
-          </a:prstGeom>
-        </p:spPr>
-      </p:pic>
-      <p:sp>
-        <p:nvSpPr>
-          <p:cNvPr id="8" name="TextBox 7"/>
-          <p:cNvSpPr txBox="1"/>
-          <p:nvPr/>
-        </p:nvSpPr>
-        <p:spPr>
-          <a:xfrm>
-            <a:off x="457200" y="5349240"/>
-            <a:ext cx="11277295" cy="1005840"/>
-          </a:xfrm>
-          <a:prstGeom prst="rect">
-            <a:avLst/>
-          </a:prstGeom>
-          <a:noFill/>
-        </p:spPr>
-        <p:txBody>
-          <a:bodyPr wrap="square" anchor="t" lIns="73152" rIns="73152" tIns="36576" bIns="36576">
-            <a:spAutoFit/>
-          </a:bodyPr>
-          <a:lstStyle/>
-          <a:p>
-            <a:pPr algn="l" marL="292608" indent="-256032">
-              <a:spcAft>
-                <a:spcPts val="400"/>
-              </a:spcAft>
-              <a:buChar char="•"/>
-            </a:pPr>
-            <a:r>
-              <a:rPr sz="1800" b="1" i="0">
-                <a:solidFill>
-                  <a:srgbClr val="0F172A"/>
-                </a:solidFill>
-                <a:latin typeface="Arial"/>
-              </a:rPr>
-              <a:t>Not clearly supported:</a:t>
-            </a:r>
-            <a:r>
-              <a:rPr sz="1800" b="0" i="0">
-                <a:solidFill>
-                  <a:srgbClr val="0F172A"/>
-                </a:solidFill>
-                <a:latin typeface="Arial"/>
-              </a:rPr>
-              <a:t> prices are calibrated; only 0–10¢ hints (1 win in 66 vs 7.4% implied, z = −1.8)</a:t>
-            </a:r>
-          </a:p>
-          <a:p>
-            <a:pPr algn="l" marL="292608" indent="-256032">
-              <a:spcAft>
-                <a:spcPts val="400"/>
-              </a:spcAft>
-              <a:buChar char="•"/>
-            </a:pPr>
-            <a:r>
-              <a:rPr sz="1800" b="0" i="0">
-                <a:solidFill>
-                  <a:srgbClr val="0F172A"/>
-                </a:solidFill>
-                <a:latin typeface="Arial"/>
-              </a:rPr>
-              <a:t>Buying at ask + fee: long shots ≤ 25¢ </a:t>
-            </a:r>
-            <a:r>
-              <a:rPr sz="1800" b="1" i="0">
-                <a:solidFill>
-                  <a:srgbClr val="0F172A"/>
-                </a:solidFill>
-                <a:latin typeface="Arial"/>
-              </a:rPr>
-              <a:t>−13.4%</a:t>
-            </a:r>
-            <a:r>
-              <a:rPr sz="1800" b="0" i="0">
-                <a:solidFill>
-                  <a:srgbClr val="0F172A"/>
-                </a:solidFill>
-                <a:latin typeface="Arial"/>
-              </a:rPr>
-              <a:t>, heavy favourites ≥ 75¢ −2.2%</a:t>
             </a:r>
           </a:p>
         </p:txBody>

--- a/presentation/nba_agent_deck.pptx
+++ b/presentation/nba_agent_deck.pptx
@@ -20,6 +20,8 @@
     <p:sldId id="268" r:id="rId20"/>
     <p:sldId id="269" r:id="rId21"/>
     <p:sldId id="270" r:id="rId22"/>
+    <p:sldId id="271" r:id="rId23"/>
+    <p:sldId id="272" r:id="rId24"/>
   </p:sldIdLst>
   <p:sldSz cx="12191695" cy="6858000" type="screen4x3"/>
   <p:notesSz cx="6858000" cy="9144000"/>
@@ -586,7 +588,7 @@
           <a:lstStyle/>
           <a:p>
             <a:r>
-              <a:t>So, back to the problem: the product educates and protects instead of encouraging bets. The agent passes by default: it declined about 90% of decision points, and on the play-off holdout it did not trade at all. Retail briefs show the bid and ask next to our estimate, and when there is no order they say why. The Coach shows the full break-even after spread and fee, and the League lets people practise with play money. Risk limits and banned words are code the LLM cannot override; all 9 / 9 planted violations were blocked. Even the learned rules ended up protective.</a:t>
+              <a:t>Here is the money over time, after fees, one line per strategy; the dashed black line at zero is never trading. Left is the February-to-April test period, right the walk-forward season. Read it like this. The red raw model, which trades whenever its estimate differs from the price, falls steadily: −$2,087 on 366 trades in the test period, −$2,475 over the season. That steady slope is costs: every trade pays the spread and the fee, and there is no edge to pay them back. Orange, the agent without learning, trades less and falls less, −$247. Blue, the full agent, learned rules that mostly say do not trade, so its line flattens near zero, −$32, after dipping to −$131. The M6 agent made no trades, so it sits on zero. Learning does not find profit; it flattens the line by trading less. The dotted lines are closing-line value: below zero for everyone, so the agent paid worse than the closing price. No strategy ends above never trading; the next slide tests whether the gaps are more than luck.</a:t>
             </a:r>
           </a:p>
         </p:txBody>
@@ -656,7 +658,7 @@
           <a:lstStyle/>
           <a:p>
             <a:r>
-              <a:t>The Coach turns this evidence into lessons. At a chosen moment it explains the game using only what was public and shows the break-even after spread and fee. Lesson cards appear when relevant: price is a probability, costs move your break-even, news may be priced in, long shots look cheap. Users make a paper call and see the close and what the agent did. Paper money only.</a:t>
+              <a:t>Finally, the honest test. We re-ran the whole season walk-forward, retraining the win model every month, with day-clustered bootstrap confidence intervals. Mean closing-line value is below zero for every setup, and every interval lies entirely below zero. The full agent's −$25 is indistinguishable from never trading, p 0.53; the raw model loses −$2,475. The market anchor is a real improvement, +$2,450 with p 0.002, but learning only means trading less. On the play-off holdout the full agent made no trades at all.</a:t>
             </a:r>
           </a:p>
         </p:txBody>
@@ -726,7 +728,7 @@
           <a:lstStyle/>
           <a:p>
             <a:r>
-              <a:t>The Coach teaches; the League lets people practise, with the fun but without the harm. Everyone gets the same 10 real past decisions and $1,000 of play money, sees only what was public, and backs a team or passes. Orders fill at the ask plus fee, then the close and result are revealed. We rank on closing-line value, not profit, with a skill-or-luck badge from our bootstrap; house bots play the same slate. Here a user beat the close and still lost, while the raw-model bot is up $15 with negative CLV: costs, not skill.</a:t>
+              <a:t>So, back to the problem: the product educates and protects instead of encouraging bets. The agent passes by default: it declined about 90% of decision points, and on the play-off holdout it did not trade at all. Retail briefs show the bid and ask next to our estimate, and when there is no order they say why. The Coach shows the full break-even after spread and fee, and the League lets people practise with play money. Risk limits and banned words are code the LLM cannot override; all 9 / 9 planted violations were blocked. Even the learned rules ended up protective.</a:t>
             </a:r>
           </a:p>
         </p:txBody>
@@ -796,7 +798,7 @@
           <a:lstStyle/>
           <a:p>
             <a:r>
-              <a:t>To be precise: unfair here means structural disadvantages, namely costs, speed and expertise. It does not mean manipulation or fraud, and we make no accusation against Kalshi. One disclosure: we designed the market anchor and the reviewer after seeing the first February-to-April results, so that window is not a clean holdout. That is why the walk-forward season and the untouched play-off holdout are our headline tests. Other caveats: one season, game-winner markets only, a proxy news timestamp, and long-shot bias was not clearly supported in our data. The well-being numbers on the problem slide are published research, not our measurement.</a:t>
+              <a:t>The Coach turns this evidence into lessons. At a chosen moment it explains the game using only what was public and shows the break-even after spread and fee. Lesson cards appear when relevant: price is a probability, costs move your break-even, news may be priced in, long shots look cheap. Users make a paper call and see the close and what the agent did. Paper money only.</a:t>
             </a:r>
           </a:p>
         </p:txBody>
@@ -866,7 +868,7 @@
           <a:lstStyle/>
           <a:p>
             <a:r>
-              <a:t>Now the demo, focused on protection. On the replayed night, watch the agent see the news, compare its estimate with the bid and ask, and usually decline with a reason. In the Coach, I'll make a paper call and compare it with the close. In the League tab I'll join a league, make one call on the shared slate, watch the closing line and result being revealed, and show the leaderboard ranked by closing-line value next to the house bots. Then a quick look at the learned rules and planted violations being blocked. If anything fails, we have a backup recording.</a:t>
+              <a:t>The Coach teaches; the League lets people practise, with the fun but without the harm. Everyone gets the same 10 real past decisions and $1,000 of play money, sees only what was public, and backs a team or passes. Orders fill at the ask plus fee, then the close and result are revealed. We rank on closing-line value, not profit, with a skill-or-luck badge from our bootstrap; house bots play the same slate. Here a user beat the close and still lost, while the raw-model bot is up $15 with negative CLV: costs, not skill.</a:t>
             </a:r>
           </a:p>
         </p:txBody>
@@ -936,6 +938,146 @@
           <a:lstStyle/>
           <a:p>
             <a:r>
+              <a:t>To be precise: unfair here means structural disadvantages, namely costs, speed and expertise. It does not mean manipulation or fraud, and we make no accusation against Kalshi. One disclosure: we designed the market anchor and the reviewer after seeing the first February-to-April results, so that window is not a clean holdout. That is why the walk-forward season and the untouched play-off holdout are our headline tests. The data limits are on slide 5; beyond those, long-shot bias was not clearly supported in our data. The well-being numbers on the problem slide are published research, not our measurement.</a:t>
+            </a:r>
+          </a:p>
+        </p:txBody>
+      </p:sp>
+      <p:sp>
+        <p:nvSpPr>
+          <p:cNvPr id="4" name="Slide Number Placeholder 3"/>
+          <p:cNvSpPr>
+            <a:spLocks noGrp="1"/>
+          </p:cNvSpPr>
+          <p:nvPr>
+            <p:ph type="sldNum" idx="5" sz="quarter"/>
+          </p:nvPr>
+        </p:nvSpPr>
+        <p:spPr/>
+      </p:sp>
+    </p:spTree>
+  </p:cSld>
+  <p:clrMapOvr>
+    <a:masterClrMapping/>
+  </p:clrMapOvr>
+</p:notes>
+</file>
+
+<file path=ppt/notesSlides/notesSlide16.xml><?xml version="1.0" encoding="utf-8"?>
+<p:notes xmlns:a="http://schemas.openxmlformats.org/drawingml/2006/main" xmlns:p="http://schemas.openxmlformats.org/presentationml/2006/main" xmlns:r="http://schemas.openxmlformats.org/officeDocument/2006/relationships">
+  <p:cSld>
+    <p:spTree>
+      <p:nvGrpSpPr>
+        <p:cNvPr id="1" name=""/>
+        <p:cNvGrpSpPr/>
+        <p:nvPr/>
+      </p:nvGrpSpPr>
+      <p:grpSpPr>
+        <a:xfrm>
+          <a:off x="0" y="0"/>
+          <a:ext cx="0" cy="0"/>
+          <a:chOff x="0" y="0"/>
+          <a:chExt cx="0" cy="0"/>
+        </a:xfrm>
+      </p:grpSpPr>
+      <p:sp>
+        <p:nvSpPr>
+          <p:cNvPr id="2" name="Slide Image Placeholder 1"/>
+          <p:cNvSpPr>
+            <a:spLocks noGrp="1"/>
+          </p:cNvSpPr>
+          <p:nvPr>
+            <p:ph type="sldImg" idx="2"/>
+          </p:nvPr>
+        </p:nvSpPr>
+        <p:spPr/>
+      </p:sp>
+      <p:sp>
+        <p:nvSpPr>
+          <p:cNvPr id="3" name="Notes Placeholder 2"/>
+          <p:cNvSpPr>
+            <a:spLocks noGrp="1"/>
+          </p:cNvSpPr>
+          <p:nvPr>
+            <p:ph type="body" idx="3" sz="quarter"/>
+          </p:nvPr>
+        </p:nvSpPr>
+        <p:spPr/>
+        <p:txBody>
+          <a:bodyPr/>
+          <a:lstStyle/>
+          <a:p>
+            <a:r>
+              <a:t>Now the demo, focused on protection. On the replayed night, watch the agent see the news, compare its estimate with the bid and ask, and usually decline with a reason. In the Coach, I'll make a paper call and compare it with the close. In the League tab I'll join a league, make one call on the shared slate, watch the closing line and result being revealed, and show the leaderboard ranked by closing-line value next to the house bots. Then a quick look at the learned rules and planted violations being blocked. If anything fails, we have a backup recording.</a:t>
+            </a:r>
+          </a:p>
+        </p:txBody>
+      </p:sp>
+      <p:sp>
+        <p:nvSpPr>
+          <p:cNvPr id="4" name="Slide Number Placeholder 3"/>
+          <p:cNvSpPr>
+            <a:spLocks noGrp="1"/>
+          </p:cNvSpPr>
+          <p:nvPr>
+            <p:ph type="sldNum" idx="5" sz="quarter"/>
+          </p:nvPr>
+        </p:nvSpPr>
+        <p:spPr/>
+      </p:sp>
+    </p:spTree>
+  </p:cSld>
+  <p:clrMapOvr>
+    <a:masterClrMapping/>
+  </p:clrMapOvr>
+</p:notes>
+</file>
+
+<file path=ppt/notesSlides/notesSlide17.xml><?xml version="1.0" encoding="utf-8"?>
+<p:notes xmlns:a="http://schemas.openxmlformats.org/drawingml/2006/main" xmlns:p="http://schemas.openxmlformats.org/presentationml/2006/main" xmlns:r="http://schemas.openxmlformats.org/officeDocument/2006/relationships">
+  <p:cSld>
+    <p:spTree>
+      <p:nvGrpSpPr>
+        <p:cNvPr id="1" name=""/>
+        <p:cNvGrpSpPr/>
+        <p:nvPr/>
+      </p:nvGrpSpPr>
+      <p:grpSpPr>
+        <a:xfrm>
+          <a:off x="0" y="0"/>
+          <a:ext cx="0" cy="0"/>
+          <a:chOff x="0" y="0"/>
+          <a:chExt cx="0" cy="0"/>
+        </a:xfrm>
+      </p:grpSpPr>
+      <p:sp>
+        <p:nvSpPr>
+          <p:cNvPr id="2" name="Slide Image Placeholder 1"/>
+          <p:cNvSpPr>
+            <a:spLocks noGrp="1"/>
+          </p:cNvSpPr>
+          <p:nvPr>
+            <p:ph type="sldImg" idx="2"/>
+          </p:nvPr>
+        </p:nvSpPr>
+        <p:spPr/>
+      </p:sp>
+      <p:sp>
+        <p:nvSpPr>
+          <p:cNvPr id="3" name="Notes Placeholder 2"/>
+          <p:cNvSpPr>
+            <a:spLocks noGrp="1"/>
+          </p:cNvSpPr>
+          <p:nvPr>
+            <p:ph type="body" idx="3" sz="quarter"/>
+          </p:nvPr>
+        </p:nvSpPr>
+        <p:spPr/>
+        <p:txBody>
+          <a:bodyPr/>
+          <a:lstStyle/>
+          <a:p>
+            <a:r>
               <a:t>Our recommendations follow from the evidence. Before any order, show the all-in cost and the break-even probability, not just the price. Warn by default when news is likely already priced in. Put education, like our Coach, and play-money practice, like our League, in front of the first trade, and, as the Lancet Commission argues, treat betting harm as a public-health issue. For our own work: enforce a daily-loss stop, use timestamped injury reports, and extend to player-prop markets. Thank you, we are happy to take questions.</a:t>
             </a:r>
           </a:p>
@@ -1146,7 +1288,7 @@
           <a:lstStyle/>
           <a:p>
             <a:r>
-              <a:t>First, costs. One hour before tip a $20 order pays half the bid-ask spread plus the Kalshi fee. On average that is 1.92 cents per contract, 5.0% of the price, and 9–14% on cheap contracts. You must beat the price by that much just to break even. On the right, our best agent would have made +$36 at the mid but lost −$32 after costs. Even being very selective, 74 trades out of 771 decision points, only 27 (36%) beat or matched the closing price.</a:t>
+              <a:t>Before the evidence, the data. Everything is public. From Kalshi's public API we downloaded every NBA game-winner market, series KXNBAGAME, for 2025-26: 2,632 markets on 1,316 games, and 3,938,368 one-minute rows of bid, ask and volume from 20 Oct 2025 to 14 Jun 2026, plus each market's settlement. From ESPN's public site API we took three seasons, 2023-24 to 2025-26: 3,962 games with tip times and season type, 85,422 player box-score rows for 818 players, and 3,371 inactive-list entries, which are our news. Box scores and inactive lists train the player and win models M1 to M4; prices drive the replay, costs, closing-line value, the market anchor and M6. We froze everything once as Parquet files; the raw data is not redistributed in the repo, and two commands rebuild it.</a:t>
             </a:r>
           </a:p>
         </p:txBody>
@@ -1216,7 +1358,7 @@
           <a:lstStyle/>
           <a:p>
             <a:r>
-              <a:t>Second, speed. On the 193 test games where the inactive list changed our win model by at least a point, the price had already moved 1.80 points in the news direction before the list was public, and only 0.18 after. About 91% of the move happened before a retail user reading the list could act.</a:t>
+              <a:t>How the data is split in time. The win and player models train on two earlier seasons plus 2025-26 up to 31 January. The agent develops its rules from November to January, and the test period is 1 February to 12 April, 501 games. The walk-forward run covers November to April and retrains the win model every month. M6 trains before 15 January and validates on 15 to 31 January. The play-in and play-off games after 12 April, 87 of them, are a holdout we scored once. The replay enforces no look-ahead: at each decision the agent sees only news, results and quotes published by then. Each inactive list counts as news 30 minutes before tip. Orders fill at the recorded ask plus the Kalshi fee, only with a quote at most 5 minutes old, and at most 10% of the last hour's volume. Limits: one season of prices, game-winner markets only, and the inactive list is our only news; it ends 7 May 2026, and we have no earlier injury reports, social media or other sportsbooks. Public information only.</a:t>
             </a:r>
           </a:p>
         </p:txBody>
@@ -1286,7 +1428,7 @@
           <a:lstStyle/>
           <a:p>
             <a:r>
-              <a:t>Third, expertise. On 501 test games our win model's Brier score one hour before tip is 0.186, against 0.164 for the market at the same moment; lower is better. When they disagree by more than five points, the market is right in both directions.</a:t>
+              <a:t>First, costs. One hour before tip a $20 order pays half the bid-ask spread plus the Kalshi fee. On average that is 1.92 cents per contract, 5.0% of the price, and 9–14% on cheap contracts. You must beat the price by that much just to break even. On the right, our best agent would have made +$36 at the mid but lost −$32 after costs. Even being very selective, 74 trades out of 771 decision points, only 27 (36%) beat or matched the closing price.</a:t>
             </a:r>
           </a:p>
         </p:txBody>
@@ -1356,7 +1498,7 @@
           <a:lstStyle/>
           <a:p>
             <a:r>
-              <a:t>Fourth, we trained M6, a neural network whose only job is to predict how the price moves between our decision time and tip-off, using the market's own past reactions. It cannot beat the simplest guess, that the price will not move: 0.867 cents average error against 0.833, and R squared about zero on both test and holdout. After the inactive list the price moves only about 2.5% of what our win model implies. The M6 agent therefore makes no trades; forced to trade, it loses −$652. The price already contains the public information; what is left for the consumer is the cost.</a:t>
+              <a:t>Second, speed. On the 193 test games where the inactive list changed our win model by at least a point, the price had already moved 1.80 points in the news direction before the list was public, and only 0.18 after. About 91% of the move happened before a retail user reading the list could act.</a:t>
             </a:r>
           </a:p>
         </p:txBody>
@@ -1426,7 +1568,7 @@
           <a:lstStyle/>
           <a:p>
             <a:r>
-              <a:t>Here is the money over time, after fees, one line per strategy; the dashed black line at zero is never trading. Left is the February-to-April test period, right the walk-forward season. Read it like this. The red raw model, which trades whenever its estimate differs from the price, falls steadily: −$2,087 on 366 trades in the test period, −$2,475 over the season. That steady slope is costs: every trade pays the spread and the fee, and there is no edge to pay them back. Orange, the agent without learning, trades less and falls less, −$247. Blue, the full agent, learned rules that mostly say do not trade, so its line flattens near zero, −$32, after dipping to −$131. The M6 agent made no trades, so it sits on zero. Learning does not find profit; it flattens the line by trading less. The dotted lines are closing-line value: below zero for everyone, so the agent paid worse than the closing price. No strategy ends above never trading; the next slide tests whether the gaps are more than luck.</a:t>
+              <a:t>Third, expertise. On 501 test games our win model's Brier score one hour before tip is 0.186, against 0.164 for the market at the same moment; lower is better. When they disagree by more than five points, the market is right in both directions.</a:t>
             </a:r>
           </a:p>
         </p:txBody>
@@ -1496,7 +1638,7 @@
           <a:lstStyle/>
           <a:p>
             <a:r>
-              <a:t>Finally, the honest test. We re-ran the whole season walk-forward, retraining the win model every month, with day-clustered bootstrap confidence intervals. Mean closing-line value is below zero for every setup, and every interval lies entirely below zero. The full agent's −$25 is indistinguishable from never trading, p 0.53; the raw model loses −$2,475. The market anchor is a real improvement, +$2,450 with p 0.002, but learning only means trading less. On the play-off holdout the full agent made no trades at all.</a:t>
+              <a:t>Fourth, we trained M6, a neural network whose only job is to predict how the price moves between our decision time and tip-off, using the market's own past reactions. It cannot beat the simplest guess, that the price will not move: 0.867 cents average error against 0.833, and R squared about zero on both test and holdout. After the inactive list the price moves only about 2.5% of what our win model implies. The M6 agent therefore makes no trades; forced to trade, it loses −$652. The price already contains the public information; what is left for the consumer is the cost.</a:t>
             </a:r>
           </a:p>
         </p:txBody>
@@ -4879,7 +5021,7 @@
                 </a:solidFill>
                 <a:latin typeface="Arial"/>
               </a:rPr>
-              <a:t>Our product: educate and protect the consumer</a:t>
+              <a:t>Evidence 5: money over time, every line drifts down</a:t>
             </a:r>
           </a:p>
         </p:txBody>
@@ -4964,7 +5106,7 @@
       </p:sp>
       <p:pic>
         <p:nvPicPr>
-          <p:cNvPr id="7" name="Picture 6" descr="agent_workflow.png"/>
+          <p:cNvPr id="7" name="Picture 6" descr="cumulative_pnl.png"/>
           <p:cNvPicPr>
             <a:picLocks noChangeAspect="1"/>
           </p:cNvPicPr>
@@ -4978,8 +5120,8 @@
         </p:blipFill>
         <p:spPr>
           <a:xfrm>
-            <a:off x="457200" y="1853719"/>
-            <a:ext cx="6766560" cy="3744920"/>
+            <a:off x="1213604" y="1097280"/>
+            <a:ext cx="9764485" cy="4206240"/>
           </a:xfrm>
           <a:prstGeom prst="rect">
             <a:avLst/>
@@ -4994,8 +5136,8 @@
         </p:nvSpPr>
         <p:spPr>
           <a:xfrm>
-            <a:off x="7406640" y="1234439"/>
-            <a:ext cx="4327855" cy="5120640"/>
+            <a:off x="457200" y="5394960"/>
+            <a:ext cx="11277295" cy="960120"/>
           </a:xfrm>
           <a:prstGeom prst="rect">
             <a:avLst/>
@@ -5010,157 +5152,35 @@
           <a:p>
             <a:pPr algn="l" marL="292608" indent="-256032">
               <a:spcAft>
-                <a:spcPts val="800"/>
+                <a:spcPts val="400"/>
               </a:spcAft>
               <a:buChar char="•"/>
             </a:pPr>
             <a:r>
-              <a:rPr sz="1800" b="1" i="0">
+              <a:rPr sz="1800" b="0" i="0">
                 <a:solidFill>
                   <a:srgbClr val="0F172A"/>
                 </a:solidFill>
                 <a:latin typeface="Arial"/>
               </a:rPr>
-              <a:t>Pass by default:</a:t>
-            </a:r>
-            <a:r>
-              <a:rPr sz="1800" b="0" i="0">
-                <a:solidFill>
-                  <a:srgbClr val="0F172A"/>
-                </a:solidFill>
-                <a:latin typeface="Arial"/>
-              </a:rPr>
-              <a:t> 90% of decision points → no trade</a:t>
+              <a:t>Raw model falls steadily (−$2,087 test, −$2,475 season): the slope is costs</a:t>
             </a:r>
           </a:p>
           <a:p>
             <a:pPr algn="l" marL="292608" indent="-256032">
               <a:spcAft>
-                <a:spcPts val="800"/>
+                <a:spcPts val="400"/>
               </a:spcAft>
               <a:buChar char="•"/>
             </a:pPr>
             <a:r>
-              <a:rPr sz="1800" b="1" i="0">
+              <a:rPr sz="1800" b="0" i="0">
                 <a:solidFill>
                   <a:srgbClr val="0F172A"/>
                 </a:solidFill>
                 <a:latin typeface="Arial"/>
               </a:rPr>
-              <a:t>No-order reason:</a:t>
-            </a:r>
-            <a:r>
-              <a:rPr sz="1800" b="0" i="0">
-                <a:solidFill>
-                  <a:srgbClr val="0F172A"/>
-                </a:solidFill>
-                <a:latin typeface="Arial"/>
-              </a:rPr>
-              <a:t> “gap after fees too small or the price already moved”</a:t>
-            </a:r>
-          </a:p>
-          <a:p>
-            <a:pPr algn="l" marL="292608" indent="-256032">
-              <a:spcAft>
-                <a:spcPts val="800"/>
-              </a:spcAft>
-              <a:buChar char="•"/>
-            </a:pPr>
-            <a:r>
-              <a:rPr sz="1800" b="1" i="0">
-                <a:solidFill>
-                  <a:srgbClr val="0F172A"/>
-                </a:solidFill>
-                <a:latin typeface="Arial"/>
-              </a:rPr>
-              <a:t>Costs shown:</a:t>
-            </a:r>
-            <a:r>
-              <a:rPr sz="1800" b="0" i="0">
-                <a:solidFill>
-                  <a:srgbClr val="0F172A"/>
-                </a:solidFill>
-                <a:latin typeface="Arial"/>
-              </a:rPr>
-              <a:t> bid-ask in briefs; Coach shows break-even after spread + fee</a:t>
-            </a:r>
-          </a:p>
-          <a:p>
-            <a:pPr algn="l" marL="292608" indent="-256032">
-              <a:spcAft>
-                <a:spcPts val="800"/>
-              </a:spcAft>
-              <a:buChar char="•"/>
-            </a:pPr>
-            <a:r>
-              <a:rPr sz="1800" b="1" i="0">
-                <a:solidFill>
-                  <a:srgbClr val="0F172A"/>
-                </a:solidFill>
-                <a:latin typeface="Arial"/>
-              </a:rPr>
-              <a:t>Code limits:</a:t>
-            </a:r>
-            <a:r>
-              <a:rPr sz="1800" b="0" i="0">
-                <a:solidFill>
-                  <a:srgbClr val="0F172A"/>
-                </a:solidFill>
-                <a:latin typeface="Arial"/>
-              </a:rPr>
-              <a:t> $50 / order, $100 / game, $300 / day; bans “lock”, “guaranteed”, “risk-free”</a:t>
-            </a:r>
-          </a:p>
-          <a:p>
-            <a:pPr algn="l" marL="292608" indent="-256032">
-              <a:spcAft>
-                <a:spcPts val="800"/>
-              </a:spcAft>
-              <a:buChar char="•"/>
-            </a:pPr>
-            <a:r>
-              <a:rPr sz="1800" b="1" i="0">
-                <a:solidFill>
-                  <a:srgbClr val="0F172A"/>
-                </a:solidFill>
-                <a:latin typeface="Arial"/>
-              </a:rPr>
-              <a:t>9 / 9</a:t>
-            </a:r>
-            <a:r>
-              <a:rPr sz="1800" b="0" i="0">
-                <a:solidFill>
-                  <a:srgbClr val="0F172A"/>
-                </a:solidFill>
-                <a:latin typeface="Arial"/>
-              </a:rPr>
-              <a:t> planted violations blocked</a:t>
-            </a:r>
-          </a:p>
-          <a:p>
-            <a:pPr algn="l" marL="292608" indent="-256032">
-              <a:spcAft>
-                <a:spcPts val="800"/>
-              </a:spcAft>
-              <a:buChar char="•"/>
-            </a:pPr>
-            <a:r>
-              <a:rPr sz="1800" b="1" i="0">
-                <a:solidFill>
-                  <a:srgbClr val="0F172A"/>
-                </a:solidFill>
-                <a:latin typeface="Arial"/>
-              </a:rPr>
-              <a:t>Learned rules:</a:t>
-            </a:r>
-            <a:r>
-              <a:rPr sz="1800" b="0" i="0">
-                <a:solidFill>
-                  <a:srgbClr val="0F172A"/>
-                </a:solidFill>
-                <a:latin typeface="Arial"/>
-              </a:rPr>
-              <a:t> skip ≤ 35¢; skip after a 2¢ move against</a:t>
+              <a:t>Learning flattens the line by trading less: full agent −$32 test, −$25 season; M6: 0 trades</a:t>
             </a:r>
           </a:p>
         </p:txBody>
@@ -5305,7 +5325,7 @@
                 </a:solidFill>
                 <a:latin typeface="Arial"/>
               </a:rPr>
-              <a:t>Coach: teach why most bets don't clear costs</a:t>
+              <a:t>Evidence 6: tested with CIs, never trading wins</a:t>
             </a:r>
           </a:p>
         </p:txBody>
@@ -5388,98 +5408,412 @@
           </a:p>
         </p:txBody>
       </p:sp>
-      <p:sp>
-        <p:nvSpPr>
-          <p:cNvPr id="7" name="Rounded Rectangle 6"/>
-          <p:cNvSpPr/>
-          <p:nvPr/>
-        </p:nvSpPr>
-        <p:spPr>
-          <a:xfrm>
-            <a:off x="457200" y="1234439"/>
-            <a:ext cx="5501487" cy="2057400"/>
-          </a:xfrm>
-          <a:prstGeom prst="roundRect">
-            <a:avLst>
-              <a:gd name="adj" fmla="val 6000"/>
-            </a:avLst>
-          </a:prstGeom>
-          <a:solidFill>
-            <a:srgbClr val="FFFFFF"/>
-          </a:solidFill>
-          <a:ln w="15875">
-            <a:solidFill>
-              <a:srgbClr val="2563EB"/>
-            </a:solidFill>
-          </a:ln>
-          <a:effectLst/>
-        </p:spPr>
-        <p:style>
-          <a:lnRef idx="1">
-            <a:schemeClr val="accent1"/>
-          </a:lnRef>
-          <a:fillRef idx="3">
-            <a:schemeClr val="accent1"/>
-          </a:fillRef>
-          <a:effectRef idx="2">
-            <a:schemeClr val="accent1"/>
-          </a:effectRef>
-          <a:fontRef idx="minor">
-            <a:schemeClr val="lt1"/>
-          </a:fontRef>
-        </p:style>
-        <p:txBody>
-          <a:bodyPr rtlCol="0" anchor="ctr"/>
-          <a:lstStyle/>
-          <a:p>
-            <a:pPr algn="ctr"/>
-          </a:p>
-        </p:txBody>
-      </p:sp>
-      <p:sp>
-        <p:nvSpPr>
-          <p:cNvPr id="8" name="Rectangle 7"/>
-          <p:cNvSpPr/>
-          <p:nvPr/>
-        </p:nvSpPr>
-        <p:spPr>
-          <a:xfrm>
-            <a:off x="457200" y="1234439"/>
-            <a:ext cx="109728" cy="2057400"/>
-          </a:xfrm>
-          <a:prstGeom prst="rect">
-            <a:avLst/>
-          </a:prstGeom>
-          <a:solidFill>
-            <a:srgbClr val="2563EB"/>
-          </a:solidFill>
-          <a:ln>
-            <a:noFill/>
-          </a:ln>
-          <a:effectLst/>
-        </p:spPr>
-        <p:style>
-          <a:lnRef idx="1">
-            <a:schemeClr val="accent1"/>
-          </a:lnRef>
-          <a:fillRef idx="3">
-            <a:schemeClr val="accent1"/>
-          </a:fillRef>
-          <a:effectRef idx="2">
-            <a:schemeClr val="accent1"/>
-          </a:effectRef>
-          <a:fontRef idx="minor">
-            <a:schemeClr val="lt1"/>
-          </a:fontRef>
-        </p:style>
-        <p:txBody>
-          <a:bodyPr rtlCol="0" anchor="ctr"/>
-          <a:lstStyle/>
-          <a:p>
-            <a:pPr algn="ctr"/>
-          </a:p>
-        </p:txBody>
-      </p:sp>
+      <p:pic>
+        <p:nvPicPr>
+          <p:cNvPr id="7" name="Picture 6" descr="walkforward.png"/>
+          <p:cNvPicPr>
+            <a:picLocks noChangeAspect="1"/>
+          </p:cNvPicPr>
+          <p:nvPr/>
+        </p:nvPicPr>
+        <p:blipFill>
+          <a:blip r:embed="rId3"/>
+          <a:stretch>
+            <a:fillRect/>
+          </a:stretch>
+        </p:blipFill>
+        <p:spPr>
+          <a:xfrm>
+            <a:off x="457200" y="1188719"/>
+            <a:ext cx="5943600" cy="3429000"/>
+          </a:xfrm>
+          <a:prstGeom prst="rect">
+            <a:avLst/>
+          </a:prstGeom>
+        </p:spPr>
+      </p:pic>
+      <p:graphicFrame>
+        <p:nvGraphicFramePr>
+          <p:cNvPr id="8" name="Table 7"/>
+          <p:cNvGraphicFramePr>
+            <a:graphicFrameLocks noGrp="1"/>
+          </p:cNvGraphicFramePr>
+          <p:nvPr/>
+        </p:nvGraphicFramePr>
+        <p:xfrm>
+          <a:off x="6537960" y="1188720"/>
+          <a:ext cx="5193791" cy="2871216"/>
+        </p:xfrm>
+        <a:graphic>
+          <a:graphicData uri="http://schemas.openxmlformats.org/drawingml/2006/table">
+            <a:tbl>
+              <a:tblPr firstRow="1" bandRow="1">
+                <a:tableStyleId>{5C22544A-7EE6-4342-B048-85BDC9FD1C3A}</a:tableStyleId>
+              </a:tblPr>
+              <a:tblGrid>
+                <a:gridCol w="1874519"/>
+                <a:gridCol w="868680"/>
+                <a:gridCol w="2450592"/>
+              </a:tblGrid>
+              <a:tr h="457200">
+                <a:tc>
+                  <a:txBody>
+                    <a:bodyPr wrap="square"/>
+                    <a:lstStyle/>
+                    <a:p>
+                      <a:pPr algn="l"/>
+                      <a:r>
+                        <a:rPr sz="1600" b="1" i="0">
+                          <a:solidFill>
+                            <a:srgbClr val="FFFFFF"/>
+                          </a:solidFill>
+                          <a:latin typeface="Arial"/>
+                        </a:rPr>
+                        <a:t>Nov – 12 Apr</a:t>
+                      </a:r>
+                    </a:p>
+                  </a:txBody>
+                  <a:tcPr marL="73152" marR="73152" marT="36576" marB="36576" anchor="ctr">
+                    <a:solidFill>
+                      <a:srgbClr val="1E293B"/>
+                    </a:solidFill>
+                  </a:tcPr>
+                </a:tc>
+                <a:tc>
+                  <a:txBody>
+                    <a:bodyPr wrap="square"/>
+                    <a:lstStyle/>
+                    <a:p>
+                      <a:pPr algn="ctr"/>
+                      <a:r>
+                        <a:rPr sz="1600" b="1" i="0">
+                          <a:solidFill>
+                            <a:srgbClr val="FFFFFF"/>
+                          </a:solidFill>
+                          <a:latin typeface="Arial"/>
+                        </a:rPr>
+                        <a:t>Trades</a:t>
+                      </a:r>
+                    </a:p>
+                  </a:txBody>
+                  <a:tcPr marL="73152" marR="73152" marT="36576" marB="36576" anchor="ctr">
+                    <a:solidFill>
+                      <a:srgbClr val="1E293B"/>
+                    </a:solidFill>
+                  </a:tcPr>
+                </a:tc>
+                <a:tc>
+                  <a:txBody>
+                    <a:bodyPr wrap="square"/>
+                    <a:lstStyle/>
+                    <a:p>
+                      <a:pPr algn="ctr"/>
+                      <a:r>
+                        <a:rPr sz="1600" b="1" i="0">
+                          <a:solidFill>
+                            <a:srgbClr val="FFFFFF"/>
+                          </a:solidFill>
+                          <a:latin typeface="Arial"/>
+                        </a:rPr>
+                        <a:t>P&amp;L [95% CI]</a:t>
+                      </a:r>
+                    </a:p>
+                  </a:txBody>
+                  <a:tcPr marL="73152" marR="73152" marT="36576" marB="36576" anchor="ctr">
+                    <a:solidFill>
+                      <a:srgbClr val="1E293B"/>
+                    </a:solidFill>
+                  </a:tcPr>
+                </a:tc>
+              </a:tr>
+              <a:tr h="603504">
+                <a:tc>
+                  <a:txBody>
+                    <a:bodyPr wrap="square"/>
+                    <a:lstStyle/>
+                    <a:p>
+                      <a:pPr algn="l"/>
+                      <a:r>
+                        <a:rPr sz="1600" b="1" i="0">
+                          <a:solidFill>
+                            <a:srgbClr val="0F172A"/>
+                          </a:solidFill>
+                          <a:latin typeface="Arial"/>
+                        </a:rPr>
+                        <a:t>Never trade</a:t>
+                      </a:r>
+                    </a:p>
+                  </a:txBody>
+                  <a:tcPr marL="73152" marR="73152" marT="36576" marB="36576" anchor="ctr">
+                    <a:solidFill>
+                      <a:srgbClr val="DCFCE7"/>
+                    </a:solidFill>
+                  </a:tcPr>
+                </a:tc>
+                <a:tc>
+                  <a:txBody>
+                    <a:bodyPr wrap="square"/>
+                    <a:lstStyle/>
+                    <a:p>
+                      <a:pPr algn="ctr"/>
+                      <a:r>
+                        <a:rPr sz="1600" b="0" i="0">
+                          <a:solidFill>
+                            <a:srgbClr val="0F172A"/>
+                          </a:solidFill>
+                          <a:latin typeface="Arial"/>
+                        </a:rPr>
+                        <a:t>0</a:t>
+                      </a:r>
+                    </a:p>
+                  </a:txBody>
+                  <a:tcPr marL="73152" marR="73152" marT="36576" marB="36576" anchor="ctr">
+                    <a:solidFill>
+                      <a:srgbClr val="DCFCE7"/>
+                    </a:solidFill>
+                  </a:tcPr>
+                </a:tc>
+                <a:tc>
+                  <a:txBody>
+                    <a:bodyPr wrap="square"/>
+                    <a:lstStyle/>
+                    <a:p>
+                      <a:pPr algn="ctr"/>
+                      <a:r>
+                        <a:rPr sz="1600" b="1" i="0">
+                          <a:solidFill>
+                            <a:srgbClr val="0F172A"/>
+                          </a:solidFill>
+                          <a:latin typeface="Arial"/>
+                        </a:rPr>
+                        <a:t>$0</a:t>
+                      </a:r>
+                    </a:p>
+                  </a:txBody>
+                  <a:tcPr marL="73152" marR="73152" marT="36576" marB="36576" anchor="ctr">
+                    <a:solidFill>
+                      <a:srgbClr val="DCFCE7"/>
+                    </a:solidFill>
+                  </a:tcPr>
+                </a:tc>
+              </a:tr>
+              <a:tr h="603504">
+                <a:tc>
+                  <a:txBody>
+                    <a:bodyPr wrap="square"/>
+                    <a:lstStyle/>
+                    <a:p>
+                      <a:pPr algn="l"/>
+                      <a:r>
+                        <a:rPr sz="1600" b="0" i="0">
+                          <a:solidFill>
+                            <a:srgbClr val="0F172A"/>
+                          </a:solidFill>
+                          <a:latin typeface="Arial"/>
+                        </a:rPr>
+                        <a:t>Full agent</a:t>
+                      </a:r>
+                    </a:p>
+                  </a:txBody>
+                  <a:tcPr marL="73152" marR="73152" marT="36576" marB="36576" anchor="ctr">
+                    <a:solidFill>
+                      <a:srgbClr val="FFFFFF"/>
+                    </a:solidFill>
+                  </a:tcPr>
+                </a:tc>
+                <a:tc>
+                  <a:txBody>
+                    <a:bodyPr wrap="square"/>
+                    <a:lstStyle/>
+                    <a:p>
+                      <a:pPr algn="ctr"/>
+                      <a:r>
+                        <a:rPr sz="1600" b="0" i="0">
+                          <a:solidFill>
+                            <a:srgbClr val="0F172A"/>
+                          </a:solidFill>
+                          <a:latin typeface="Arial"/>
+                        </a:rPr>
+                        <a:t>157</a:t>
+                      </a:r>
+                    </a:p>
+                  </a:txBody>
+                  <a:tcPr marL="73152" marR="73152" marT="36576" marB="36576" anchor="ctr">
+                    <a:solidFill>
+                      <a:srgbClr val="FFFFFF"/>
+                    </a:solidFill>
+                  </a:tcPr>
+                </a:tc>
+                <a:tc>
+                  <a:txBody>
+                    <a:bodyPr wrap="square"/>
+                    <a:lstStyle/>
+                    <a:p>
+                      <a:pPr algn="ctr"/>
+                      <a:r>
+                        <a:rPr sz="1600" b="0" i="0">
+                          <a:solidFill>
+                            <a:srgbClr val="0F172A"/>
+                          </a:solidFill>
+                          <a:latin typeface="Arial"/>
+                        </a:rPr>
+                        <a:t>−$25 [−$569 to +$564]</a:t>
+                      </a:r>
+                    </a:p>
+                  </a:txBody>
+                  <a:tcPr marL="73152" marR="73152" marT="36576" marB="36576" anchor="ctr">
+                    <a:solidFill>
+                      <a:srgbClr val="FFFFFF"/>
+                    </a:solidFill>
+                  </a:tcPr>
+                </a:tc>
+              </a:tr>
+              <a:tr h="603504">
+                <a:tc>
+                  <a:txBody>
+                    <a:bodyPr wrap="square"/>
+                    <a:lstStyle/>
+                    <a:p>
+                      <a:pPr algn="l"/>
+                      <a:r>
+                        <a:rPr sz="1600" b="0" i="0">
+                          <a:solidFill>
+                            <a:srgbClr val="0F172A"/>
+                          </a:solidFill>
+                          <a:latin typeface="Arial"/>
+                        </a:rPr>
+                        <a:t>No learning</a:t>
+                      </a:r>
+                    </a:p>
+                  </a:txBody>
+                  <a:tcPr marL="73152" marR="73152" marT="36576" marB="36576" anchor="ctr">
+                    <a:solidFill>
+                      <a:srgbClr val="F1F5F9"/>
+                    </a:solidFill>
+                  </a:tcPr>
+                </a:tc>
+                <a:tc>
+                  <a:txBody>
+                    <a:bodyPr wrap="square"/>
+                    <a:lstStyle/>
+                    <a:p>
+                      <a:pPr algn="ctr"/>
+                      <a:r>
+                        <a:rPr sz="1600" b="0" i="0">
+                          <a:solidFill>
+                            <a:srgbClr val="0F172A"/>
+                          </a:solidFill>
+                          <a:latin typeface="Arial"/>
+                        </a:rPr>
+                        <a:t>276</a:t>
+                      </a:r>
+                    </a:p>
+                  </a:txBody>
+                  <a:tcPr marL="73152" marR="73152" marT="36576" marB="36576" anchor="ctr">
+                    <a:solidFill>
+                      <a:srgbClr val="F1F5F9"/>
+                    </a:solidFill>
+                  </a:tcPr>
+                </a:tc>
+                <a:tc>
+                  <a:txBody>
+                    <a:bodyPr wrap="square"/>
+                    <a:lstStyle/>
+                    <a:p>
+                      <a:pPr algn="ctr"/>
+                      <a:r>
+                        <a:rPr sz="1600" b="0" i="0">
+                          <a:solidFill>
+                            <a:srgbClr val="0F172A"/>
+                          </a:solidFill>
+                          <a:latin typeface="Arial"/>
+                        </a:rPr>
+                        <a:t>−$407 [−$1,324 to +$553]</a:t>
+                      </a:r>
+                    </a:p>
+                  </a:txBody>
+                  <a:tcPr marL="73152" marR="73152" marT="36576" marB="36576" anchor="ctr">
+                    <a:solidFill>
+                      <a:srgbClr val="F1F5F9"/>
+                    </a:solidFill>
+                  </a:tcPr>
+                </a:tc>
+              </a:tr>
+              <a:tr h="603504">
+                <a:tc>
+                  <a:txBody>
+                    <a:bodyPr wrap="square"/>
+                    <a:lstStyle/>
+                    <a:p>
+                      <a:pPr algn="l"/>
+                      <a:r>
+                        <a:rPr sz="1600" b="0" i="0">
+                          <a:solidFill>
+                            <a:srgbClr val="0F172A"/>
+                          </a:solidFill>
+                          <a:latin typeface="Arial"/>
+                        </a:rPr>
+                        <a:t>Raw model</a:t>
+                      </a:r>
+                    </a:p>
+                  </a:txBody>
+                  <a:tcPr marL="73152" marR="73152" marT="36576" marB="36576" anchor="ctr">
+                    <a:solidFill>
+                      <a:srgbClr val="FFFFFF"/>
+                    </a:solidFill>
+                  </a:tcPr>
+                </a:tc>
+                <a:tc>
+                  <a:txBody>
+                    <a:bodyPr wrap="square"/>
+                    <a:lstStyle/>
+                    <a:p>
+                      <a:pPr algn="ctr"/>
+                      <a:r>
+                        <a:rPr sz="1600" b="0" i="0">
+                          <a:solidFill>
+                            <a:srgbClr val="0F172A"/>
+                          </a:solidFill>
+                          <a:latin typeface="Arial"/>
+                        </a:rPr>
+                        <a:t>711</a:t>
+                      </a:r>
+                    </a:p>
+                  </a:txBody>
+                  <a:tcPr marL="73152" marR="73152" marT="36576" marB="36576" anchor="ctr">
+                    <a:solidFill>
+                      <a:srgbClr val="FFFFFF"/>
+                    </a:solidFill>
+                  </a:tcPr>
+                </a:tc>
+                <a:tc>
+                  <a:txBody>
+                    <a:bodyPr wrap="square"/>
+                    <a:lstStyle/>
+                    <a:p>
+                      <a:pPr algn="ctr"/>
+                      <a:r>
+                        <a:rPr sz="1600" b="0" i="0">
+                          <a:solidFill>
+                            <a:srgbClr val="0F172A"/>
+                          </a:solidFill>
+                          <a:latin typeface="Arial"/>
+                        </a:rPr>
+                        <a:t>−$2,475 [−$3,995 to −$845]</a:t>
+                      </a:r>
+                    </a:p>
+                  </a:txBody>
+                  <a:tcPr marL="73152" marR="73152" marT="36576" marB="36576" anchor="ctr">
+                    <a:solidFill>
+                      <a:srgbClr val="FFFFFF"/>
+                    </a:solidFill>
+                  </a:tcPr>
+                </a:tc>
+              </a:tr>
+            </a:tbl>
+          </a:graphicData>
+        </a:graphic>
+      </p:graphicFrame>
       <p:sp>
         <p:nvSpPr>
           <p:cNvPr id="9" name="TextBox 8"/>
@@ -5488,8 +5822,8 @@
         </p:nvSpPr>
         <p:spPr>
           <a:xfrm>
-            <a:off x="640080" y="1307592"/>
-            <a:ext cx="5227167" cy="457200"/>
+            <a:off x="6537960" y="4114800"/>
+            <a:ext cx="5196535" cy="640080"/>
           </a:xfrm>
           <a:prstGeom prst="rect">
             <a:avLst/>
@@ -5504,17 +5838,17 @@
           <a:p>
             <a:pPr algn="l">
               <a:spcAft>
-                <a:spcPts val="0"/>
+                <a:spcPts val="800"/>
               </a:spcAft>
             </a:pPr>
             <a:r>
-              <a:rPr sz="2000" b="1" i="0">
-                <a:solidFill>
-                  <a:srgbClr val="2563EB"/>
-                </a:solidFill>
-                <a:latin typeface="Arial"/>
-              </a:rPr>
-              <a:t>1  What's going on</a:t>
+              <a:rPr sz="1400" b="0" i="0">
+                <a:solidFill>
+                  <a:srgbClr val="64748B"/>
+                </a:solidFill>
+                <a:latin typeface="Arial"/>
+              </a:rPr>
+              <a:t>Day-clustered bootstrap; M4 retrained monthly. Chart totals include play-offs, the table does not</a:t>
             </a:r>
           </a:p>
         </p:txBody>
@@ -5527,8 +5861,8 @@
         </p:nvSpPr>
         <p:spPr>
           <a:xfrm>
-            <a:off x="640080" y="1764791"/>
-            <a:ext cx="5227167" cy="1453895"/>
+            <a:off x="457200" y="4663440"/>
+            <a:ext cx="11277295" cy="1691640"/>
           </a:xfrm>
           <a:prstGeom prst="rect">
             <a:avLst/>
@@ -5543,7 +5877,7 @@
           <a:p>
             <a:pPr algn="l" marL="292608" indent="-256032">
               <a:spcAft>
-                <a:spcPts val="600"/>
+                <a:spcPts val="400"/>
               </a:spcAft>
               <a:buChar char="•"/>
             </a:pPr>
@@ -5554,13 +5888,22 @@
                 </a:solidFill>
                 <a:latin typeface="Arial"/>
               </a:rPr>
-              <a:t>News so far; model before / after the news</a:t>
+              <a:t>Mean CLV &lt; 0 for every setup; </a:t>
+            </a:r>
+            <a:r>
+              <a:rPr sz="1800" b="1" i="0">
+                <a:solidFill>
+                  <a:srgbClr val="0F172A"/>
+                </a:solidFill>
+                <a:latin typeface="Arial"/>
+              </a:rPr>
+              <a:t>every 95% CI entirely below zero</a:t>
             </a:r>
           </a:p>
           <a:p>
             <a:pPr algn="l" marL="292608" indent="-256032">
               <a:spcAft>
-                <a:spcPts val="600"/>
+                <a:spcPts val="400"/>
               </a:spcAft>
               <a:buChar char="•"/>
             </a:pPr>
@@ -5571,167 +5914,13 @@
                 </a:solidFill>
                 <a:latin typeface="Arial"/>
               </a:rPr>
-              <a:t>Market now vs 24 h ago; break-even after spread + fee</a:t>
-            </a:r>
-          </a:p>
-        </p:txBody>
-      </p:sp>
-      <p:sp>
-        <p:nvSpPr>
-          <p:cNvPr id="11" name="Rounded Rectangle 10"/>
-          <p:cNvSpPr/>
-          <p:nvPr/>
-        </p:nvSpPr>
-        <p:spPr>
-          <a:xfrm>
-            <a:off x="6233007" y="1234439"/>
-            <a:ext cx="5501487" cy="2057400"/>
-          </a:xfrm>
-          <a:prstGeom prst="roundRect">
-            <a:avLst>
-              <a:gd name="adj" fmla="val 6000"/>
-            </a:avLst>
-          </a:prstGeom>
-          <a:solidFill>
-            <a:srgbClr val="FFFFFF"/>
-          </a:solidFill>
-          <a:ln w="15875">
-            <a:solidFill>
-              <a:srgbClr val="EA580C"/>
-            </a:solidFill>
-          </a:ln>
-          <a:effectLst/>
-        </p:spPr>
-        <p:style>
-          <a:lnRef idx="1">
-            <a:schemeClr val="accent1"/>
-          </a:lnRef>
-          <a:fillRef idx="3">
-            <a:schemeClr val="accent1"/>
-          </a:fillRef>
-          <a:effectRef idx="2">
-            <a:schemeClr val="accent1"/>
-          </a:effectRef>
-          <a:fontRef idx="minor">
-            <a:schemeClr val="lt1"/>
-          </a:fontRef>
-        </p:style>
-        <p:txBody>
-          <a:bodyPr rtlCol="0" anchor="ctr"/>
-          <a:lstStyle/>
-          <a:p>
-            <a:pPr algn="ctr"/>
-          </a:p>
-        </p:txBody>
-      </p:sp>
-      <p:sp>
-        <p:nvSpPr>
-          <p:cNvPr id="12" name="Rectangle 11"/>
-          <p:cNvSpPr/>
-          <p:nvPr/>
-        </p:nvSpPr>
-        <p:spPr>
-          <a:xfrm>
-            <a:off x="6233007" y="1234439"/>
-            <a:ext cx="109728" cy="2057400"/>
-          </a:xfrm>
-          <a:prstGeom prst="rect">
-            <a:avLst/>
-          </a:prstGeom>
-          <a:solidFill>
-            <a:srgbClr val="EA580C"/>
-          </a:solidFill>
-          <a:ln>
-            <a:noFill/>
-          </a:ln>
-          <a:effectLst/>
-        </p:spPr>
-        <p:style>
-          <a:lnRef idx="1">
-            <a:schemeClr val="accent1"/>
-          </a:lnRef>
-          <a:fillRef idx="3">
-            <a:schemeClr val="accent1"/>
-          </a:fillRef>
-          <a:effectRef idx="2">
-            <a:schemeClr val="accent1"/>
-          </a:effectRef>
-          <a:fontRef idx="minor">
-            <a:schemeClr val="lt1"/>
-          </a:fontRef>
-        </p:style>
-        <p:txBody>
-          <a:bodyPr rtlCol="0" anchor="ctr"/>
-          <a:lstStyle/>
-          <a:p>
-            <a:pPr algn="ctr"/>
-          </a:p>
-        </p:txBody>
-      </p:sp>
-      <p:sp>
-        <p:nvSpPr>
-          <p:cNvPr id="13" name="TextBox 12"/>
-          <p:cNvSpPr txBox="1"/>
-          <p:nvPr/>
-        </p:nvSpPr>
-        <p:spPr>
-          <a:xfrm>
-            <a:off x="6415887" y="1307592"/>
-            <a:ext cx="5227167" cy="457200"/>
-          </a:xfrm>
-          <a:prstGeom prst="rect">
-            <a:avLst/>
-          </a:prstGeom>
-          <a:noFill/>
-        </p:spPr>
-        <p:txBody>
-          <a:bodyPr wrap="square" anchor="t" lIns="73152" rIns="73152" tIns="36576" bIns="36576">
-            <a:spAutoFit/>
-          </a:bodyPr>
-          <a:lstStyle/>
-          <a:p>
-            <a:pPr algn="l">
-              <a:spcAft>
-                <a:spcPts val="0"/>
-              </a:spcAft>
-            </a:pPr>
-            <a:r>
-              <a:rPr sz="2000" b="1" i="0">
-                <a:solidFill>
-                  <a:srgbClr val="EA580C"/>
-                </a:solidFill>
-                <a:latin typeface="Arial"/>
-              </a:rPr>
-              <a:t>2  Lessons, when relevant</a:t>
-            </a:r>
-          </a:p>
-        </p:txBody>
-      </p:sp>
-      <p:sp>
-        <p:nvSpPr>
-          <p:cNvPr id="14" name="TextBox 13"/>
-          <p:cNvSpPr txBox="1"/>
-          <p:nvPr/>
-        </p:nvSpPr>
-        <p:spPr>
-          <a:xfrm>
-            <a:off x="6415887" y="1764791"/>
-            <a:ext cx="5227167" cy="1453895"/>
-          </a:xfrm>
-          <a:prstGeom prst="rect">
-            <a:avLst/>
-          </a:prstGeom>
-          <a:noFill/>
-        </p:spPr>
-        <p:txBody>
-          <a:bodyPr wrap="square" anchor="t" lIns="73152" rIns="73152" tIns="36576" bIns="36576">
-            <a:spAutoFit/>
-          </a:bodyPr>
-          <a:lstStyle/>
+              <a:t>Market anchor is real: +$2,450 vs raw model (p = 0.002); learning = trading less (p = 0.13)</a:t>
+            </a:r>
+          </a:p>
           <a:p>
             <a:pPr algn="l" marL="292608" indent="-256032">
               <a:spcAft>
-                <a:spcPts val="600"/>
+                <a:spcPts val="400"/>
               </a:spcAft>
               <a:buChar char="•"/>
             </a:pPr>
@@ -5742,485 +5931,7 @@
                 </a:solidFill>
                 <a:latin typeface="Arial"/>
               </a:rPr>
-              <a:t>Price = probability · costs move break-even</a:t>
-            </a:r>
-          </a:p>
-          <a:p>
-            <a:pPr algn="l" marL="292608" indent="-256032">
-              <a:spcAft>
-                <a:spcPts val="600"/>
-              </a:spcAft>
-              <a:buChar char="•"/>
-            </a:pPr>
-            <a:r>
-              <a:rPr sz="1800" b="0" i="0">
-                <a:solidFill>
-                  <a:srgbClr val="0F172A"/>
-                </a:solidFill>
-                <a:latin typeface="Arial"/>
-              </a:rPr>
-              <a:t>Priced in / chasing · long shots · closing line · passing</a:t>
-            </a:r>
-          </a:p>
-        </p:txBody>
-      </p:sp>
-      <p:sp>
-        <p:nvSpPr>
-          <p:cNvPr id="15" name="Rounded Rectangle 14"/>
-          <p:cNvSpPr/>
-          <p:nvPr/>
-        </p:nvSpPr>
-        <p:spPr>
-          <a:xfrm>
-            <a:off x="457200" y="3474720"/>
-            <a:ext cx="5501487" cy="2057400"/>
-          </a:xfrm>
-          <a:prstGeom prst="roundRect">
-            <a:avLst>
-              <a:gd name="adj" fmla="val 6000"/>
-            </a:avLst>
-          </a:prstGeom>
-          <a:solidFill>
-            <a:srgbClr val="FFFFFF"/>
-          </a:solidFill>
-          <a:ln w="15875">
-            <a:solidFill>
-              <a:srgbClr val="16A34A"/>
-            </a:solidFill>
-          </a:ln>
-          <a:effectLst/>
-        </p:spPr>
-        <p:style>
-          <a:lnRef idx="1">
-            <a:schemeClr val="accent1"/>
-          </a:lnRef>
-          <a:fillRef idx="3">
-            <a:schemeClr val="accent1"/>
-          </a:fillRef>
-          <a:effectRef idx="2">
-            <a:schemeClr val="accent1"/>
-          </a:effectRef>
-          <a:fontRef idx="minor">
-            <a:schemeClr val="lt1"/>
-          </a:fontRef>
-        </p:style>
-        <p:txBody>
-          <a:bodyPr rtlCol="0" anchor="ctr"/>
-          <a:lstStyle/>
-          <a:p>
-            <a:pPr algn="ctr"/>
-          </a:p>
-        </p:txBody>
-      </p:sp>
-      <p:sp>
-        <p:nvSpPr>
-          <p:cNvPr id="16" name="Rectangle 15"/>
-          <p:cNvSpPr/>
-          <p:nvPr/>
-        </p:nvSpPr>
-        <p:spPr>
-          <a:xfrm>
-            <a:off x="457200" y="3474720"/>
-            <a:ext cx="109728" cy="2057400"/>
-          </a:xfrm>
-          <a:prstGeom prst="rect">
-            <a:avLst/>
-          </a:prstGeom>
-          <a:solidFill>
-            <a:srgbClr val="16A34A"/>
-          </a:solidFill>
-          <a:ln>
-            <a:noFill/>
-          </a:ln>
-          <a:effectLst/>
-        </p:spPr>
-        <p:style>
-          <a:lnRef idx="1">
-            <a:schemeClr val="accent1"/>
-          </a:lnRef>
-          <a:fillRef idx="3">
-            <a:schemeClr val="accent1"/>
-          </a:fillRef>
-          <a:effectRef idx="2">
-            <a:schemeClr val="accent1"/>
-          </a:effectRef>
-          <a:fontRef idx="minor">
-            <a:schemeClr val="lt1"/>
-          </a:fontRef>
-        </p:style>
-        <p:txBody>
-          <a:bodyPr rtlCol="0" anchor="ctr"/>
-          <a:lstStyle/>
-          <a:p>
-            <a:pPr algn="ctr"/>
-          </a:p>
-        </p:txBody>
-      </p:sp>
-      <p:sp>
-        <p:nvSpPr>
-          <p:cNvPr id="17" name="TextBox 16"/>
-          <p:cNvSpPr txBox="1"/>
-          <p:nvPr/>
-        </p:nvSpPr>
-        <p:spPr>
-          <a:xfrm>
-            <a:off x="640080" y="3547872"/>
-            <a:ext cx="5227167" cy="457200"/>
-          </a:xfrm>
-          <a:prstGeom prst="rect">
-            <a:avLst/>
-          </a:prstGeom>
-          <a:noFill/>
-        </p:spPr>
-        <p:txBody>
-          <a:bodyPr wrap="square" anchor="t" lIns="73152" rIns="73152" tIns="36576" bIns="36576">
-            <a:spAutoFit/>
-          </a:bodyPr>
-          <a:lstStyle/>
-          <a:p>
-            <a:pPr algn="l">
-              <a:spcAft>
-                <a:spcPts val="0"/>
-              </a:spcAft>
-            </a:pPr>
-            <a:r>
-              <a:rPr sz="2000" b="1" i="0">
-                <a:solidFill>
-                  <a:srgbClr val="16A34A"/>
-                </a:solidFill>
-                <a:latin typeface="Arial"/>
-              </a:rPr>
-              <a:t>3  Your paper call</a:t>
-            </a:r>
-          </a:p>
-        </p:txBody>
-      </p:sp>
-      <p:sp>
-        <p:nvSpPr>
-          <p:cNvPr id="18" name="TextBox 17"/>
-          <p:cNvSpPr txBox="1"/>
-          <p:nvPr/>
-        </p:nvSpPr>
-        <p:spPr>
-          <a:xfrm>
-            <a:off x="640080" y="4005072"/>
-            <a:ext cx="5227167" cy="1453895"/>
-          </a:xfrm>
-          <a:prstGeom prst="rect">
-            <a:avLst/>
-          </a:prstGeom>
-          <a:noFill/>
-        </p:spPr>
-        <p:txBody>
-          <a:bodyPr wrap="square" anchor="t" lIns="73152" rIns="73152" tIns="36576" bIns="36576">
-            <a:spAutoFit/>
-          </a:bodyPr>
-          <a:lstStyle/>
-          <a:p>
-            <a:pPr algn="l" marL="292608" indent="-256032">
-              <a:spcAft>
-                <a:spcPts val="600"/>
-              </a:spcAft>
-              <a:buChar char="•"/>
-            </a:pPr>
-            <a:r>
-              <a:rPr sz="1800" b="0" i="0">
-                <a:solidFill>
-                  <a:srgbClr val="0F172A"/>
-                </a:solidFill>
-                <a:latin typeface="Arial"/>
-              </a:rPr>
-              <a:t>Back a team or pass</a:t>
-            </a:r>
-          </a:p>
-          <a:p>
-            <a:pPr algn="l" marL="292608" indent="-256032">
-              <a:spcAft>
-                <a:spcPts val="600"/>
-              </a:spcAft>
-              <a:buChar char="•"/>
-            </a:pPr>
-            <a:r>
-              <a:rPr sz="1800" b="0" i="0">
-                <a:solidFill>
-                  <a:srgbClr val="0F172A"/>
-                </a:solidFill>
-                <a:latin typeface="Arial"/>
-              </a:rPr>
-              <a:t>Then: close, CLV, result, and what the agent did</a:t>
-            </a:r>
-          </a:p>
-        </p:txBody>
-      </p:sp>
-      <p:sp>
-        <p:nvSpPr>
-          <p:cNvPr id="19" name="Rounded Rectangle 18"/>
-          <p:cNvSpPr/>
-          <p:nvPr/>
-        </p:nvSpPr>
-        <p:spPr>
-          <a:xfrm>
-            <a:off x="6233007" y="3474720"/>
-            <a:ext cx="5501487" cy="2057400"/>
-          </a:xfrm>
-          <a:prstGeom prst="roundRect">
-            <a:avLst>
-              <a:gd name="adj" fmla="val 6000"/>
-            </a:avLst>
-          </a:prstGeom>
-          <a:solidFill>
-            <a:srgbClr val="FFFFFF"/>
-          </a:solidFill>
-          <a:ln w="15875">
-            <a:solidFill>
-              <a:srgbClr val="1E293B"/>
-            </a:solidFill>
-          </a:ln>
-          <a:effectLst/>
-        </p:spPr>
-        <p:style>
-          <a:lnRef idx="1">
-            <a:schemeClr val="accent1"/>
-          </a:lnRef>
-          <a:fillRef idx="3">
-            <a:schemeClr val="accent1"/>
-          </a:fillRef>
-          <a:effectRef idx="2">
-            <a:schemeClr val="accent1"/>
-          </a:effectRef>
-          <a:fontRef idx="minor">
-            <a:schemeClr val="lt1"/>
-          </a:fontRef>
-        </p:style>
-        <p:txBody>
-          <a:bodyPr rtlCol="0" anchor="ctr"/>
-          <a:lstStyle/>
-          <a:p>
-            <a:pPr algn="ctr"/>
-          </a:p>
-        </p:txBody>
-      </p:sp>
-      <p:sp>
-        <p:nvSpPr>
-          <p:cNvPr id="20" name="Rectangle 19"/>
-          <p:cNvSpPr/>
-          <p:nvPr/>
-        </p:nvSpPr>
-        <p:spPr>
-          <a:xfrm>
-            <a:off x="6233007" y="3474720"/>
-            <a:ext cx="109728" cy="2057400"/>
-          </a:xfrm>
-          <a:prstGeom prst="rect">
-            <a:avLst/>
-          </a:prstGeom>
-          <a:solidFill>
-            <a:srgbClr val="1E293B"/>
-          </a:solidFill>
-          <a:ln>
-            <a:noFill/>
-          </a:ln>
-          <a:effectLst/>
-        </p:spPr>
-        <p:style>
-          <a:lnRef idx="1">
-            <a:schemeClr val="accent1"/>
-          </a:lnRef>
-          <a:fillRef idx="3">
-            <a:schemeClr val="accent1"/>
-          </a:fillRef>
-          <a:effectRef idx="2">
-            <a:schemeClr val="accent1"/>
-          </a:effectRef>
-          <a:fontRef idx="minor">
-            <a:schemeClr val="lt1"/>
-          </a:fontRef>
-        </p:style>
-        <p:txBody>
-          <a:bodyPr rtlCol="0" anchor="ctr"/>
-          <a:lstStyle/>
-          <a:p>
-            <a:pPr algn="ctr"/>
-          </a:p>
-        </p:txBody>
-      </p:sp>
-      <p:sp>
-        <p:nvSpPr>
-          <p:cNvPr id="21" name="TextBox 20"/>
-          <p:cNvSpPr txBox="1"/>
-          <p:nvPr/>
-        </p:nvSpPr>
-        <p:spPr>
-          <a:xfrm>
-            <a:off x="6415887" y="3547872"/>
-            <a:ext cx="5227167" cy="457200"/>
-          </a:xfrm>
-          <a:prstGeom prst="rect">
-            <a:avLst/>
-          </a:prstGeom>
-          <a:noFill/>
-        </p:spPr>
-        <p:txBody>
-          <a:bodyPr wrap="square" anchor="t" lIns="73152" rIns="73152" tIns="36576" bIns="36576">
-            <a:spAutoFit/>
-          </a:bodyPr>
-          <a:lstStyle/>
-          <a:p>
-            <a:pPr algn="l">
-              <a:spcAft>
-                <a:spcPts val="0"/>
-              </a:spcAft>
-            </a:pPr>
-            <a:r>
-              <a:rPr sz="2000" b="1" i="0">
-                <a:solidFill>
-                  <a:srgbClr val="1E293B"/>
-                </a:solidFill>
-                <a:latin typeface="Arial"/>
-              </a:rPr>
-              <a:t>4  Habit feedback</a:t>
-            </a:r>
-          </a:p>
-        </p:txBody>
-      </p:sp>
-      <p:sp>
-        <p:nvSpPr>
-          <p:cNvPr id="22" name="TextBox 21"/>
-          <p:cNvSpPr txBox="1"/>
-          <p:nvPr/>
-        </p:nvSpPr>
-        <p:spPr>
-          <a:xfrm>
-            <a:off x="6415887" y="4005072"/>
-            <a:ext cx="5227167" cy="1453895"/>
-          </a:xfrm>
-          <a:prstGeom prst="rect">
-            <a:avLst/>
-          </a:prstGeom>
-          <a:noFill/>
-        </p:spPr>
-        <p:txBody>
-          <a:bodyPr wrap="square" anchor="t" lIns="73152" rIns="73152" tIns="36576" bIns="36576">
-            <a:spAutoFit/>
-          </a:bodyPr>
-          <a:lstStyle/>
-          <a:p>
-            <a:pPr algn="l" marL="292608" indent="-256032">
-              <a:spcAft>
-                <a:spcPts val="600"/>
-              </a:spcAft>
-              <a:buChar char="•"/>
-            </a:pPr>
-            <a:r>
-              <a:rPr sz="1800" b="0" i="0">
-                <a:solidFill>
-                  <a:srgbClr val="0F172A"/>
-                </a:solidFill>
-                <a:latin typeface="Arial"/>
-              </a:rPr>
-              <a:t>Paying above the close, long shots, chasing</a:t>
-            </a:r>
-          </a:p>
-          <a:p>
-            <a:pPr algn="l" marL="292608" indent="-256032">
-              <a:spcAft>
-                <a:spcPts val="600"/>
-              </a:spcAft>
-              <a:buChar char="•"/>
-            </a:pPr>
-            <a:r>
-              <a:rPr sz="1800" b="0" i="0">
-                <a:solidFill>
-                  <a:srgbClr val="0F172A"/>
-                </a:solidFill>
-                <a:latin typeface="Arial"/>
-              </a:rPr>
-              <a:t>Small samples are mostly luck</a:t>
-            </a:r>
-          </a:p>
-        </p:txBody>
-      </p:sp>
-      <p:sp>
-        <p:nvSpPr>
-          <p:cNvPr id="23" name="Rounded Rectangle 22"/>
-          <p:cNvSpPr/>
-          <p:nvPr/>
-        </p:nvSpPr>
-        <p:spPr>
-          <a:xfrm>
-            <a:off x="457200" y="5760720"/>
-            <a:ext cx="11277295" cy="502920"/>
-          </a:xfrm>
-          <a:prstGeom prst="roundRect">
-            <a:avLst>
-              <a:gd name="adj" fmla="val 12000"/>
-            </a:avLst>
-          </a:prstGeom>
-          <a:solidFill>
-            <a:srgbClr val="FEF3C7"/>
-          </a:solidFill>
-          <a:ln>
-            <a:noFill/>
-          </a:ln>
-          <a:effectLst/>
-        </p:spPr>
-        <p:style>
-          <a:lnRef idx="1">
-            <a:schemeClr val="accent1"/>
-          </a:lnRef>
-          <a:fillRef idx="3">
-            <a:schemeClr val="accent1"/>
-          </a:fillRef>
-          <a:effectRef idx="2">
-            <a:schemeClr val="accent1"/>
-          </a:effectRef>
-          <a:fontRef idx="minor">
-            <a:schemeClr val="lt1"/>
-          </a:fontRef>
-        </p:style>
-        <p:txBody>
-          <a:bodyPr rtlCol="0" anchor="ctr"/>
-          <a:lstStyle/>
-          <a:p>
-            <a:pPr algn="ctr"/>
-          </a:p>
-        </p:txBody>
-      </p:sp>
-      <p:sp>
-        <p:nvSpPr>
-          <p:cNvPr id="24" name="TextBox 23"/>
-          <p:cNvSpPr txBox="1"/>
-          <p:nvPr/>
-        </p:nvSpPr>
-        <p:spPr>
-          <a:xfrm>
-            <a:off x="548640" y="5760720"/>
-            <a:ext cx="11094415" cy="502920"/>
-          </a:xfrm>
-          <a:prstGeom prst="rect">
-            <a:avLst/>
-          </a:prstGeom>
-          <a:noFill/>
-        </p:spPr>
-        <p:txBody>
-          <a:bodyPr wrap="square" anchor="ctr" lIns="73152" rIns="73152" tIns="36576" bIns="36576">
-            <a:spAutoFit/>
-          </a:bodyPr>
-          <a:lstStyle/>
-          <a:p>
-            <a:pPr algn="l">
-              <a:spcAft>
-                <a:spcPts val="0"/>
-              </a:spcAft>
-            </a:pPr>
-            <a:r>
-              <a:rPr sz="1800" b="0" i="0">
-                <a:solidFill>
-                  <a:srgbClr val="0F172A"/>
-                </a:solidFill>
-                <a:latin typeface="Arial"/>
-              </a:rPr>
-              <a:t>Educational, paper money only · only information public at that moment · no promise words</a:t>
+              <a:t>Play-off holdout (87 games): full agent 0 trades; no learning 6 trades, −$74; raw model +$450 with negative CLV (luck)</a:t>
             </a:r>
           </a:p>
         </p:txBody>
@@ -6365,7 +6076,7 @@
                 </a:solidFill>
                 <a:latin typeface="Arial"/>
               </a:rPr>
-              <a:t>League: practise against the real market with play money</a:t>
+              <a:t>Our product: educate and protect the consumer</a:t>
             </a:r>
           </a:p>
         </p:txBody>
@@ -6444,6 +6155,1492 @@
                 <a:latin typeface="Arial"/>
               </a:rPr>
               <a:t>12</a:t>
+            </a:r>
+          </a:p>
+        </p:txBody>
+      </p:sp>
+      <p:pic>
+        <p:nvPicPr>
+          <p:cNvPr id="7" name="Picture 6" descr="agent_workflow.png"/>
+          <p:cNvPicPr>
+            <a:picLocks noChangeAspect="1"/>
+          </p:cNvPicPr>
+          <p:nvPr/>
+        </p:nvPicPr>
+        <p:blipFill>
+          <a:blip r:embed="rId3"/>
+          <a:stretch>
+            <a:fillRect/>
+          </a:stretch>
+        </p:blipFill>
+        <p:spPr>
+          <a:xfrm>
+            <a:off x="457200" y="1853719"/>
+            <a:ext cx="6766560" cy="3744920"/>
+          </a:xfrm>
+          <a:prstGeom prst="rect">
+            <a:avLst/>
+          </a:prstGeom>
+        </p:spPr>
+      </p:pic>
+      <p:sp>
+        <p:nvSpPr>
+          <p:cNvPr id="8" name="TextBox 7"/>
+          <p:cNvSpPr txBox="1"/>
+          <p:nvPr/>
+        </p:nvSpPr>
+        <p:spPr>
+          <a:xfrm>
+            <a:off x="7406640" y="1234439"/>
+            <a:ext cx="4327855" cy="5120640"/>
+          </a:xfrm>
+          <a:prstGeom prst="rect">
+            <a:avLst/>
+          </a:prstGeom>
+          <a:noFill/>
+        </p:spPr>
+        <p:txBody>
+          <a:bodyPr wrap="square" anchor="t" lIns="73152" rIns="73152" tIns="36576" bIns="36576">
+            <a:spAutoFit/>
+          </a:bodyPr>
+          <a:lstStyle/>
+          <a:p>
+            <a:pPr algn="l" marL="292608" indent="-256032">
+              <a:spcAft>
+                <a:spcPts val="800"/>
+              </a:spcAft>
+              <a:buChar char="•"/>
+            </a:pPr>
+            <a:r>
+              <a:rPr sz="1800" b="1" i="0">
+                <a:solidFill>
+                  <a:srgbClr val="0F172A"/>
+                </a:solidFill>
+                <a:latin typeface="Arial"/>
+              </a:rPr>
+              <a:t>Pass by default:</a:t>
+            </a:r>
+            <a:r>
+              <a:rPr sz="1800" b="0" i="0">
+                <a:solidFill>
+                  <a:srgbClr val="0F172A"/>
+                </a:solidFill>
+                <a:latin typeface="Arial"/>
+              </a:rPr>
+              <a:t> 90% of decision points → no trade</a:t>
+            </a:r>
+          </a:p>
+          <a:p>
+            <a:pPr algn="l" marL="292608" indent="-256032">
+              <a:spcAft>
+                <a:spcPts val="800"/>
+              </a:spcAft>
+              <a:buChar char="•"/>
+            </a:pPr>
+            <a:r>
+              <a:rPr sz="1800" b="1" i="0">
+                <a:solidFill>
+                  <a:srgbClr val="0F172A"/>
+                </a:solidFill>
+                <a:latin typeface="Arial"/>
+              </a:rPr>
+              <a:t>No-order reason:</a:t>
+            </a:r>
+            <a:r>
+              <a:rPr sz="1800" b="0" i="0">
+                <a:solidFill>
+                  <a:srgbClr val="0F172A"/>
+                </a:solidFill>
+                <a:latin typeface="Arial"/>
+              </a:rPr>
+              <a:t> “gap after fees too small or the price already moved”</a:t>
+            </a:r>
+          </a:p>
+          <a:p>
+            <a:pPr algn="l" marL="292608" indent="-256032">
+              <a:spcAft>
+                <a:spcPts val="800"/>
+              </a:spcAft>
+              <a:buChar char="•"/>
+            </a:pPr>
+            <a:r>
+              <a:rPr sz="1800" b="1" i="0">
+                <a:solidFill>
+                  <a:srgbClr val="0F172A"/>
+                </a:solidFill>
+                <a:latin typeface="Arial"/>
+              </a:rPr>
+              <a:t>Costs shown:</a:t>
+            </a:r>
+            <a:r>
+              <a:rPr sz="1800" b="0" i="0">
+                <a:solidFill>
+                  <a:srgbClr val="0F172A"/>
+                </a:solidFill>
+                <a:latin typeface="Arial"/>
+              </a:rPr>
+              <a:t> bid-ask in briefs; Coach shows break-even after spread + fee</a:t>
+            </a:r>
+          </a:p>
+          <a:p>
+            <a:pPr algn="l" marL="292608" indent="-256032">
+              <a:spcAft>
+                <a:spcPts val="800"/>
+              </a:spcAft>
+              <a:buChar char="•"/>
+            </a:pPr>
+            <a:r>
+              <a:rPr sz="1800" b="1" i="0">
+                <a:solidFill>
+                  <a:srgbClr val="0F172A"/>
+                </a:solidFill>
+                <a:latin typeface="Arial"/>
+              </a:rPr>
+              <a:t>Code limits:</a:t>
+            </a:r>
+            <a:r>
+              <a:rPr sz="1800" b="0" i="0">
+                <a:solidFill>
+                  <a:srgbClr val="0F172A"/>
+                </a:solidFill>
+                <a:latin typeface="Arial"/>
+              </a:rPr>
+              <a:t> $50 / order, $100 / game, $300 / day; bans “lock”, “guaranteed”, “risk-free”</a:t>
+            </a:r>
+          </a:p>
+          <a:p>
+            <a:pPr algn="l" marL="292608" indent="-256032">
+              <a:spcAft>
+                <a:spcPts val="800"/>
+              </a:spcAft>
+              <a:buChar char="•"/>
+            </a:pPr>
+            <a:r>
+              <a:rPr sz="1800" b="1" i="0">
+                <a:solidFill>
+                  <a:srgbClr val="0F172A"/>
+                </a:solidFill>
+                <a:latin typeface="Arial"/>
+              </a:rPr>
+              <a:t>9 / 9</a:t>
+            </a:r>
+            <a:r>
+              <a:rPr sz="1800" b="0" i="0">
+                <a:solidFill>
+                  <a:srgbClr val="0F172A"/>
+                </a:solidFill>
+                <a:latin typeface="Arial"/>
+              </a:rPr>
+              <a:t> planted violations blocked</a:t>
+            </a:r>
+          </a:p>
+          <a:p>
+            <a:pPr algn="l" marL="292608" indent="-256032">
+              <a:spcAft>
+                <a:spcPts val="800"/>
+              </a:spcAft>
+              <a:buChar char="•"/>
+            </a:pPr>
+            <a:r>
+              <a:rPr sz="1800" b="1" i="0">
+                <a:solidFill>
+                  <a:srgbClr val="0F172A"/>
+                </a:solidFill>
+                <a:latin typeface="Arial"/>
+              </a:rPr>
+              <a:t>Learned rules:</a:t>
+            </a:r>
+            <a:r>
+              <a:rPr sz="1800" b="0" i="0">
+                <a:solidFill>
+                  <a:srgbClr val="0F172A"/>
+                </a:solidFill>
+                <a:latin typeface="Arial"/>
+              </a:rPr>
+              <a:t> skip ≤ 35¢; skip after a 2¢ move against</a:t>
+            </a:r>
+          </a:p>
+        </p:txBody>
+      </p:sp>
+    </p:spTree>
+  </p:cSld>
+  <p:clrMapOvr>
+    <a:masterClrMapping/>
+  </p:clrMapOvr>
+</p:sld>
+</file>
+
+<file path=ppt/slides/slide13.xml><?xml version="1.0" encoding="utf-8"?>
+<p:sld xmlns:a="http://schemas.openxmlformats.org/drawingml/2006/main" xmlns:p="http://schemas.openxmlformats.org/presentationml/2006/main" xmlns:r="http://schemas.openxmlformats.org/officeDocument/2006/relationships">
+  <p:cSld>
+    <p:spTree>
+      <p:nvGrpSpPr>
+        <p:cNvPr id="1" name=""/>
+        <p:cNvGrpSpPr/>
+        <p:nvPr/>
+      </p:nvGrpSpPr>
+      <p:grpSpPr/>
+      <p:sp>
+        <p:nvSpPr>
+          <p:cNvPr id="2" name="Rectangle 1"/>
+          <p:cNvSpPr/>
+          <p:nvPr/>
+        </p:nvSpPr>
+        <p:spPr>
+          <a:xfrm>
+            <a:off x="0" y="0"/>
+            <a:ext cx="12191695" cy="868680"/>
+          </a:xfrm>
+          <a:prstGeom prst="rect">
+            <a:avLst/>
+          </a:prstGeom>
+          <a:solidFill>
+            <a:srgbClr val="1E293B"/>
+          </a:solidFill>
+          <a:ln>
+            <a:noFill/>
+          </a:ln>
+          <a:effectLst/>
+        </p:spPr>
+        <p:style>
+          <a:lnRef idx="1">
+            <a:schemeClr val="accent1"/>
+          </a:lnRef>
+          <a:fillRef idx="3">
+            <a:schemeClr val="accent1"/>
+          </a:fillRef>
+          <a:effectRef idx="2">
+            <a:schemeClr val="accent1"/>
+          </a:effectRef>
+          <a:fontRef idx="minor">
+            <a:schemeClr val="lt1"/>
+          </a:fontRef>
+        </p:style>
+        <p:txBody>
+          <a:bodyPr rtlCol="0" anchor="ctr"/>
+          <a:lstStyle/>
+          <a:p>
+            <a:pPr algn="ctr"/>
+          </a:p>
+        </p:txBody>
+      </p:sp>
+      <p:sp>
+        <p:nvSpPr>
+          <p:cNvPr id="3" name="Rectangle 2"/>
+          <p:cNvSpPr/>
+          <p:nvPr/>
+        </p:nvSpPr>
+        <p:spPr>
+          <a:xfrm>
+            <a:off x="0" y="868680"/>
+            <a:ext cx="12191695" cy="54864"/>
+          </a:xfrm>
+          <a:prstGeom prst="rect">
+            <a:avLst/>
+          </a:prstGeom>
+          <a:solidFill>
+            <a:srgbClr val="EA580C"/>
+          </a:solidFill>
+          <a:ln>
+            <a:noFill/>
+          </a:ln>
+          <a:effectLst/>
+        </p:spPr>
+        <p:style>
+          <a:lnRef idx="1">
+            <a:schemeClr val="accent1"/>
+          </a:lnRef>
+          <a:fillRef idx="3">
+            <a:schemeClr val="accent1"/>
+          </a:fillRef>
+          <a:effectRef idx="2">
+            <a:schemeClr val="accent1"/>
+          </a:effectRef>
+          <a:fontRef idx="minor">
+            <a:schemeClr val="lt1"/>
+          </a:fontRef>
+        </p:style>
+        <p:txBody>
+          <a:bodyPr rtlCol="0" anchor="ctr"/>
+          <a:lstStyle/>
+          <a:p>
+            <a:pPr algn="ctr"/>
+          </a:p>
+        </p:txBody>
+      </p:sp>
+      <p:sp>
+        <p:nvSpPr>
+          <p:cNvPr id="4" name="TextBox 3"/>
+          <p:cNvSpPr txBox="1"/>
+          <p:nvPr/>
+        </p:nvSpPr>
+        <p:spPr>
+          <a:xfrm>
+            <a:off x="457200" y="109728"/>
+            <a:ext cx="11277295" cy="685800"/>
+          </a:xfrm>
+          <a:prstGeom prst="rect">
+            <a:avLst/>
+          </a:prstGeom>
+          <a:noFill/>
+        </p:spPr>
+        <p:txBody>
+          <a:bodyPr wrap="square" anchor="ctr" lIns="73152" rIns="73152" tIns="36576" bIns="36576">
+            <a:spAutoFit/>
+          </a:bodyPr>
+          <a:lstStyle/>
+          <a:p>
+            <a:pPr algn="l">
+              <a:spcAft>
+                <a:spcPts val="0"/>
+              </a:spcAft>
+            </a:pPr>
+            <a:r>
+              <a:rPr sz="3000" b="1" i="0">
+                <a:solidFill>
+                  <a:srgbClr val="FFFFFF"/>
+                </a:solidFill>
+                <a:latin typeface="Arial"/>
+              </a:rPr>
+              <a:t>Coach: teach why most bets don't clear costs</a:t>
+            </a:r>
+          </a:p>
+        </p:txBody>
+      </p:sp>
+      <p:sp>
+        <p:nvSpPr>
+          <p:cNvPr id="5" name="TextBox 4"/>
+          <p:cNvSpPr txBox="1"/>
+          <p:nvPr/>
+        </p:nvSpPr>
+        <p:spPr>
+          <a:xfrm>
+            <a:off x="457200" y="6446520"/>
+            <a:ext cx="9144000" cy="320040"/>
+          </a:xfrm>
+          <a:prstGeom prst="rect">
+            <a:avLst/>
+          </a:prstGeom>
+          <a:noFill/>
+        </p:spPr>
+        <p:txBody>
+          <a:bodyPr wrap="square" anchor="t" lIns="73152" rIns="73152" tIns="36576" bIns="36576">
+            <a:spAutoFit/>
+          </a:bodyPr>
+          <a:lstStyle/>
+          <a:p>
+            <a:pPr algn="l">
+              <a:spcAft>
+                <a:spcPts val="0"/>
+              </a:spcAft>
+            </a:pPr>
+            <a:r>
+              <a:rPr sz="1100" b="0" i="0">
+                <a:solidFill>
+                  <a:srgbClr val="64748B"/>
+                </a:solidFill>
+                <a:latin typeface="Arial"/>
+              </a:rPr>
+              <a:t>DASC7606C Group 12 · Betting markets are tilted against consumers</a:t>
+            </a:r>
+          </a:p>
+        </p:txBody>
+      </p:sp>
+      <p:sp>
+        <p:nvSpPr>
+          <p:cNvPr id="6" name="TextBox 5"/>
+          <p:cNvSpPr txBox="1"/>
+          <p:nvPr/>
+        </p:nvSpPr>
+        <p:spPr>
+          <a:xfrm>
+            <a:off x="10820095" y="6446520"/>
+            <a:ext cx="914400" cy="320040"/>
+          </a:xfrm>
+          <a:prstGeom prst="rect">
+            <a:avLst/>
+          </a:prstGeom>
+          <a:noFill/>
+        </p:spPr>
+        <p:txBody>
+          <a:bodyPr wrap="square" anchor="t" lIns="73152" rIns="73152" tIns="36576" bIns="36576">
+            <a:spAutoFit/>
+          </a:bodyPr>
+          <a:lstStyle/>
+          <a:p>
+            <a:pPr algn="r">
+              <a:spcAft>
+                <a:spcPts val="0"/>
+              </a:spcAft>
+            </a:pPr>
+            <a:r>
+              <a:rPr sz="1100" b="0" i="0">
+                <a:solidFill>
+                  <a:srgbClr val="64748B"/>
+                </a:solidFill>
+                <a:latin typeface="Arial"/>
+              </a:rPr>
+              <a:t>13</a:t>
+            </a:r>
+          </a:p>
+        </p:txBody>
+      </p:sp>
+      <p:sp>
+        <p:nvSpPr>
+          <p:cNvPr id="7" name="Rounded Rectangle 6"/>
+          <p:cNvSpPr/>
+          <p:nvPr/>
+        </p:nvSpPr>
+        <p:spPr>
+          <a:xfrm>
+            <a:off x="457200" y="1234439"/>
+            <a:ext cx="5501487" cy="2057400"/>
+          </a:xfrm>
+          <a:prstGeom prst="roundRect">
+            <a:avLst>
+              <a:gd name="adj" fmla="val 6000"/>
+            </a:avLst>
+          </a:prstGeom>
+          <a:solidFill>
+            <a:srgbClr val="FFFFFF"/>
+          </a:solidFill>
+          <a:ln w="15875">
+            <a:solidFill>
+              <a:srgbClr val="2563EB"/>
+            </a:solidFill>
+          </a:ln>
+          <a:effectLst/>
+        </p:spPr>
+        <p:style>
+          <a:lnRef idx="1">
+            <a:schemeClr val="accent1"/>
+          </a:lnRef>
+          <a:fillRef idx="3">
+            <a:schemeClr val="accent1"/>
+          </a:fillRef>
+          <a:effectRef idx="2">
+            <a:schemeClr val="accent1"/>
+          </a:effectRef>
+          <a:fontRef idx="minor">
+            <a:schemeClr val="lt1"/>
+          </a:fontRef>
+        </p:style>
+        <p:txBody>
+          <a:bodyPr rtlCol="0" anchor="ctr"/>
+          <a:lstStyle/>
+          <a:p>
+            <a:pPr algn="ctr"/>
+          </a:p>
+        </p:txBody>
+      </p:sp>
+      <p:sp>
+        <p:nvSpPr>
+          <p:cNvPr id="8" name="Rectangle 7"/>
+          <p:cNvSpPr/>
+          <p:nvPr/>
+        </p:nvSpPr>
+        <p:spPr>
+          <a:xfrm>
+            <a:off x="457200" y="1234439"/>
+            <a:ext cx="109728" cy="2057400"/>
+          </a:xfrm>
+          <a:prstGeom prst="rect">
+            <a:avLst/>
+          </a:prstGeom>
+          <a:solidFill>
+            <a:srgbClr val="2563EB"/>
+          </a:solidFill>
+          <a:ln>
+            <a:noFill/>
+          </a:ln>
+          <a:effectLst/>
+        </p:spPr>
+        <p:style>
+          <a:lnRef idx="1">
+            <a:schemeClr val="accent1"/>
+          </a:lnRef>
+          <a:fillRef idx="3">
+            <a:schemeClr val="accent1"/>
+          </a:fillRef>
+          <a:effectRef idx="2">
+            <a:schemeClr val="accent1"/>
+          </a:effectRef>
+          <a:fontRef idx="minor">
+            <a:schemeClr val="lt1"/>
+          </a:fontRef>
+        </p:style>
+        <p:txBody>
+          <a:bodyPr rtlCol="0" anchor="ctr"/>
+          <a:lstStyle/>
+          <a:p>
+            <a:pPr algn="ctr"/>
+          </a:p>
+        </p:txBody>
+      </p:sp>
+      <p:sp>
+        <p:nvSpPr>
+          <p:cNvPr id="9" name="TextBox 8"/>
+          <p:cNvSpPr txBox="1"/>
+          <p:nvPr/>
+        </p:nvSpPr>
+        <p:spPr>
+          <a:xfrm>
+            <a:off x="640080" y="1307592"/>
+            <a:ext cx="5227167" cy="457200"/>
+          </a:xfrm>
+          <a:prstGeom prst="rect">
+            <a:avLst/>
+          </a:prstGeom>
+          <a:noFill/>
+        </p:spPr>
+        <p:txBody>
+          <a:bodyPr wrap="square" anchor="t" lIns="73152" rIns="73152" tIns="36576" bIns="36576">
+            <a:spAutoFit/>
+          </a:bodyPr>
+          <a:lstStyle/>
+          <a:p>
+            <a:pPr algn="l">
+              <a:spcAft>
+                <a:spcPts val="0"/>
+              </a:spcAft>
+            </a:pPr>
+            <a:r>
+              <a:rPr sz="2000" b="1" i="0">
+                <a:solidFill>
+                  <a:srgbClr val="2563EB"/>
+                </a:solidFill>
+                <a:latin typeface="Arial"/>
+              </a:rPr>
+              <a:t>1  What's going on</a:t>
+            </a:r>
+          </a:p>
+        </p:txBody>
+      </p:sp>
+      <p:sp>
+        <p:nvSpPr>
+          <p:cNvPr id="10" name="TextBox 9"/>
+          <p:cNvSpPr txBox="1"/>
+          <p:nvPr/>
+        </p:nvSpPr>
+        <p:spPr>
+          <a:xfrm>
+            <a:off x="640080" y="1764791"/>
+            <a:ext cx="5227167" cy="1453895"/>
+          </a:xfrm>
+          <a:prstGeom prst="rect">
+            <a:avLst/>
+          </a:prstGeom>
+          <a:noFill/>
+        </p:spPr>
+        <p:txBody>
+          <a:bodyPr wrap="square" anchor="t" lIns="73152" rIns="73152" tIns="36576" bIns="36576">
+            <a:spAutoFit/>
+          </a:bodyPr>
+          <a:lstStyle/>
+          <a:p>
+            <a:pPr algn="l" marL="292608" indent="-256032">
+              <a:spcAft>
+                <a:spcPts val="600"/>
+              </a:spcAft>
+              <a:buChar char="•"/>
+            </a:pPr>
+            <a:r>
+              <a:rPr sz="1800" b="0" i="0">
+                <a:solidFill>
+                  <a:srgbClr val="0F172A"/>
+                </a:solidFill>
+                <a:latin typeface="Arial"/>
+              </a:rPr>
+              <a:t>News so far; model before / after the news</a:t>
+            </a:r>
+          </a:p>
+          <a:p>
+            <a:pPr algn="l" marL="292608" indent="-256032">
+              <a:spcAft>
+                <a:spcPts val="600"/>
+              </a:spcAft>
+              <a:buChar char="•"/>
+            </a:pPr>
+            <a:r>
+              <a:rPr sz="1800" b="0" i="0">
+                <a:solidFill>
+                  <a:srgbClr val="0F172A"/>
+                </a:solidFill>
+                <a:latin typeface="Arial"/>
+              </a:rPr>
+              <a:t>Market now vs 24 h ago; break-even after spread + fee</a:t>
+            </a:r>
+          </a:p>
+        </p:txBody>
+      </p:sp>
+      <p:sp>
+        <p:nvSpPr>
+          <p:cNvPr id="11" name="Rounded Rectangle 10"/>
+          <p:cNvSpPr/>
+          <p:nvPr/>
+        </p:nvSpPr>
+        <p:spPr>
+          <a:xfrm>
+            <a:off x="6233007" y="1234439"/>
+            <a:ext cx="5501487" cy="2057400"/>
+          </a:xfrm>
+          <a:prstGeom prst="roundRect">
+            <a:avLst>
+              <a:gd name="adj" fmla="val 6000"/>
+            </a:avLst>
+          </a:prstGeom>
+          <a:solidFill>
+            <a:srgbClr val="FFFFFF"/>
+          </a:solidFill>
+          <a:ln w="15875">
+            <a:solidFill>
+              <a:srgbClr val="EA580C"/>
+            </a:solidFill>
+          </a:ln>
+          <a:effectLst/>
+        </p:spPr>
+        <p:style>
+          <a:lnRef idx="1">
+            <a:schemeClr val="accent1"/>
+          </a:lnRef>
+          <a:fillRef idx="3">
+            <a:schemeClr val="accent1"/>
+          </a:fillRef>
+          <a:effectRef idx="2">
+            <a:schemeClr val="accent1"/>
+          </a:effectRef>
+          <a:fontRef idx="minor">
+            <a:schemeClr val="lt1"/>
+          </a:fontRef>
+        </p:style>
+        <p:txBody>
+          <a:bodyPr rtlCol="0" anchor="ctr"/>
+          <a:lstStyle/>
+          <a:p>
+            <a:pPr algn="ctr"/>
+          </a:p>
+        </p:txBody>
+      </p:sp>
+      <p:sp>
+        <p:nvSpPr>
+          <p:cNvPr id="12" name="Rectangle 11"/>
+          <p:cNvSpPr/>
+          <p:nvPr/>
+        </p:nvSpPr>
+        <p:spPr>
+          <a:xfrm>
+            <a:off x="6233007" y="1234439"/>
+            <a:ext cx="109728" cy="2057400"/>
+          </a:xfrm>
+          <a:prstGeom prst="rect">
+            <a:avLst/>
+          </a:prstGeom>
+          <a:solidFill>
+            <a:srgbClr val="EA580C"/>
+          </a:solidFill>
+          <a:ln>
+            <a:noFill/>
+          </a:ln>
+          <a:effectLst/>
+        </p:spPr>
+        <p:style>
+          <a:lnRef idx="1">
+            <a:schemeClr val="accent1"/>
+          </a:lnRef>
+          <a:fillRef idx="3">
+            <a:schemeClr val="accent1"/>
+          </a:fillRef>
+          <a:effectRef idx="2">
+            <a:schemeClr val="accent1"/>
+          </a:effectRef>
+          <a:fontRef idx="minor">
+            <a:schemeClr val="lt1"/>
+          </a:fontRef>
+        </p:style>
+        <p:txBody>
+          <a:bodyPr rtlCol="0" anchor="ctr"/>
+          <a:lstStyle/>
+          <a:p>
+            <a:pPr algn="ctr"/>
+          </a:p>
+        </p:txBody>
+      </p:sp>
+      <p:sp>
+        <p:nvSpPr>
+          <p:cNvPr id="13" name="TextBox 12"/>
+          <p:cNvSpPr txBox="1"/>
+          <p:nvPr/>
+        </p:nvSpPr>
+        <p:spPr>
+          <a:xfrm>
+            <a:off x="6415887" y="1307592"/>
+            <a:ext cx="5227167" cy="457200"/>
+          </a:xfrm>
+          <a:prstGeom prst="rect">
+            <a:avLst/>
+          </a:prstGeom>
+          <a:noFill/>
+        </p:spPr>
+        <p:txBody>
+          <a:bodyPr wrap="square" anchor="t" lIns="73152" rIns="73152" tIns="36576" bIns="36576">
+            <a:spAutoFit/>
+          </a:bodyPr>
+          <a:lstStyle/>
+          <a:p>
+            <a:pPr algn="l">
+              <a:spcAft>
+                <a:spcPts val="0"/>
+              </a:spcAft>
+            </a:pPr>
+            <a:r>
+              <a:rPr sz="2000" b="1" i="0">
+                <a:solidFill>
+                  <a:srgbClr val="EA580C"/>
+                </a:solidFill>
+                <a:latin typeface="Arial"/>
+              </a:rPr>
+              <a:t>2  Lessons, when relevant</a:t>
+            </a:r>
+          </a:p>
+        </p:txBody>
+      </p:sp>
+      <p:sp>
+        <p:nvSpPr>
+          <p:cNvPr id="14" name="TextBox 13"/>
+          <p:cNvSpPr txBox="1"/>
+          <p:nvPr/>
+        </p:nvSpPr>
+        <p:spPr>
+          <a:xfrm>
+            <a:off x="6415887" y="1764791"/>
+            <a:ext cx="5227167" cy="1453895"/>
+          </a:xfrm>
+          <a:prstGeom prst="rect">
+            <a:avLst/>
+          </a:prstGeom>
+          <a:noFill/>
+        </p:spPr>
+        <p:txBody>
+          <a:bodyPr wrap="square" anchor="t" lIns="73152" rIns="73152" tIns="36576" bIns="36576">
+            <a:spAutoFit/>
+          </a:bodyPr>
+          <a:lstStyle/>
+          <a:p>
+            <a:pPr algn="l" marL="292608" indent="-256032">
+              <a:spcAft>
+                <a:spcPts val="600"/>
+              </a:spcAft>
+              <a:buChar char="•"/>
+            </a:pPr>
+            <a:r>
+              <a:rPr sz="1800" b="0" i="0">
+                <a:solidFill>
+                  <a:srgbClr val="0F172A"/>
+                </a:solidFill>
+                <a:latin typeface="Arial"/>
+              </a:rPr>
+              <a:t>Price = probability · costs move break-even</a:t>
+            </a:r>
+          </a:p>
+          <a:p>
+            <a:pPr algn="l" marL="292608" indent="-256032">
+              <a:spcAft>
+                <a:spcPts val="600"/>
+              </a:spcAft>
+              <a:buChar char="•"/>
+            </a:pPr>
+            <a:r>
+              <a:rPr sz="1800" b="0" i="0">
+                <a:solidFill>
+                  <a:srgbClr val="0F172A"/>
+                </a:solidFill>
+                <a:latin typeface="Arial"/>
+              </a:rPr>
+              <a:t>Priced in / chasing · long shots · closing line · passing</a:t>
+            </a:r>
+          </a:p>
+        </p:txBody>
+      </p:sp>
+      <p:sp>
+        <p:nvSpPr>
+          <p:cNvPr id="15" name="Rounded Rectangle 14"/>
+          <p:cNvSpPr/>
+          <p:nvPr/>
+        </p:nvSpPr>
+        <p:spPr>
+          <a:xfrm>
+            <a:off x="457200" y="3474720"/>
+            <a:ext cx="5501487" cy="2057400"/>
+          </a:xfrm>
+          <a:prstGeom prst="roundRect">
+            <a:avLst>
+              <a:gd name="adj" fmla="val 6000"/>
+            </a:avLst>
+          </a:prstGeom>
+          <a:solidFill>
+            <a:srgbClr val="FFFFFF"/>
+          </a:solidFill>
+          <a:ln w="15875">
+            <a:solidFill>
+              <a:srgbClr val="16A34A"/>
+            </a:solidFill>
+          </a:ln>
+          <a:effectLst/>
+        </p:spPr>
+        <p:style>
+          <a:lnRef idx="1">
+            <a:schemeClr val="accent1"/>
+          </a:lnRef>
+          <a:fillRef idx="3">
+            <a:schemeClr val="accent1"/>
+          </a:fillRef>
+          <a:effectRef idx="2">
+            <a:schemeClr val="accent1"/>
+          </a:effectRef>
+          <a:fontRef idx="minor">
+            <a:schemeClr val="lt1"/>
+          </a:fontRef>
+        </p:style>
+        <p:txBody>
+          <a:bodyPr rtlCol="0" anchor="ctr"/>
+          <a:lstStyle/>
+          <a:p>
+            <a:pPr algn="ctr"/>
+          </a:p>
+        </p:txBody>
+      </p:sp>
+      <p:sp>
+        <p:nvSpPr>
+          <p:cNvPr id="16" name="Rectangle 15"/>
+          <p:cNvSpPr/>
+          <p:nvPr/>
+        </p:nvSpPr>
+        <p:spPr>
+          <a:xfrm>
+            <a:off x="457200" y="3474720"/>
+            <a:ext cx="109728" cy="2057400"/>
+          </a:xfrm>
+          <a:prstGeom prst="rect">
+            <a:avLst/>
+          </a:prstGeom>
+          <a:solidFill>
+            <a:srgbClr val="16A34A"/>
+          </a:solidFill>
+          <a:ln>
+            <a:noFill/>
+          </a:ln>
+          <a:effectLst/>
+        </p:spPr>
+        <p:style>
+          <a:lnRef idx="1">
+            <a:schemeClr val="accent1"/>
+          </a:lnRef>
+          <a:fillRef idx="3">
+            <a:schemeClr val="accent1"/>
+          </a:fillRef>
+          <a:effectRef idx="2">
+            <a:schemeClr val="accent1"/>
+          </a:effectRef>
+          <a:fontRef idx="minor">
+            <a:schemeClr val="lt1"/>
+          </a:fontRef>
+        </p:style>
+        <p:txBody>
+          <a:bodyPr rtlCol="0" anchor="ctr"/>
+          <a:lstStyle/>
+          <a:p>
+            <a:pPr algn="ctr"/>
+          </a:p>
+        </p:txBody>
+      </p:sp>
+      <p:sp>
+        <p:nvSpPr>
+          <p:cNvPr id="17" name="TextBox 16"/>
+          <p:cNvSpPr txBox="1"/>
+          <p:nvPr/>
+        </p:nvSpPr>
+        <p:spPr>
+          <a:xfrm>
+            <a:off x="640080" y="3547872"/>
+            <a:ext cx="5227167" cy="457200"/>
+          </a:xfrm>
+          <a:prstGeom prst="rect">
+            <a:avLst/>
+          </a:prstGeom>
+          <a:noFill/>
+        </p:spPr>
+        <p:txBody>
+          <a:bodyPr wrap="square" anchor="t" lIns="73152" rIns="73152" tIns="36576" bIns="36576">
+            <a:spAutoFit/>
+          </a:bodyPr>
+          <a:lstStyle/>
+          <a:p>
+            <a:pPr algn="l">
+              <a:spcAft>
+                <a:spcPts val="0"/>
+              </a:spcAft>
+            </a:pPr>
+            <a:r>
+              <a:rPr sz="2000" b="1" i="0">
+                <a:solidFill>
+                  <a:srgbClr val="16A34A"/>
+                </a:solidFill>
+                <a:latin typeface="Arial"/>
+              </a:rPr>
+              <a:t>3  Your paper call</a:t>
+            </a:r>
+          </a:p>
+        </p:txBody>
+      </p:sp>
+      <p:sp>
+        <p:nvSpPr>
+          <p:cNvPr id="18" name="TextBox 17"/>
+          <p:cNvSpPr txBox="1"/>
+          <p:nvPr/>
+        </p:nvSpPr>
+        <p:spPr>
+          <a:xfrm>
+            <a:off x="640080" y="4005072"/>
+            <a:ext cx="5227167" cy="1453895"/>
+          </a:xfrm>
+          <a:prstGeom prst="rect">
+            <a:avLst/>
+          </a:prstGeom>
+          <a:noFill/>
+        </p:spPr>
+        <p:txBody>
+          <a:bodyPr wrap="square" anchor="t" lIns="73152" rIns="73152" tIns="36576" bIns="36576">
+            <a:spAutoFit/>
+          </a:bodyPr>
+          <a:lstStyle/>
+          <a:p>
+            <a:pPr algn="l" marL="292608" indent="-256032">
+              <a:spcAft>
+                <a:spcPts val="600"/>
+              </a:spcAft>
+              <a:buChar char="•"/>
+            </a:pPr>
+            <a:r>
+              <a:rPr sz="1800" b="0" i="0">
+                <a:solidFill>
+                  <a:srgbClr val="0F172A"/>
+                </a:solidFill>
+                <a:latin typeface="Arial"/>
+              </a:rPr>
+              <a:t>Back a team or pass</a:t>
+            </a:r>
+          </a:p>
+          <a:p>
+            <a:pPr algn="l" marL="292608" indent="-256032">
+              <a:spcAft>
+                <a:spcPts val="600"/>
+              </a:spcAft>
+              <a:buChar char="•"/>
+            </a:pPr>
+            <a:r>
+              <a:rPr sz="1800" b="0" i="0">
+                <a:solidFill>
+                  <a:srgbClr val="0F172A"/>
+                </a:solidFill>
+                <a:latin typeface="Arial"/>
+              </a:rPr>
+              <a:t>Then: close, CLV, result, and what the agent did</a:t>
+            </a:r>
+          </a:p>
+        </p:txBody>
+      </p:sp>
+      <p:sp>
+        <p:nvSpPr>
+          <p:cNvPr id="19" name="Rounded Rectangle 18"/>
+          <p:cNvSpPr/>
+          <p:nvPr/>
+        </p:nvSpPr>
+        <p:spPr>
+          <a:xfrm>
+            <a:off x="6233007" y="3474720"/>
+            <a:ext cx="5501487" cy="2057400"/>
+          </a:xfrm>
+          <a:prstGeom prst="roundRect">
+            <a:avLst>
+              <a:gd name="adj" fmla="val 6000"/>
+            </a:avLst>
+          </a:prstGeom>
+          <a:solidFill>
+            <a:srgbClr val="FFFFFF"/>
+          </a:solidFill>
+          <a:ln w="15875">
+            <a:solidFill>
+              <a:srgbClr val="1E293B"/>
+            </a:solidFill>
+          </a:ln>
+          <a:effectLst/>
+        </p:spPr>
+        <p:style>
+          <a:lnRef idx="1">
+            <a:schemeClr val="accent1"/>
+          </a:lnRef>
+          <a:fillRef idx="3">
+            <a:schemeClr val="accent1"/>
+          </a:fillRef>
+          <a:effectRef idx="2">
+            <a:schemeClr val="accent1"/>
+          </a:effectRef>
+          <a:fontRef idx="minor">
+            <a:schemeClr val="lt1"/>
+          </a:fontRef>
+        </p:style>
+        <p:txBody>
+          <a:bodyPr rtlCol="0" anchor="ctr"/>
+          <a:lstStyle/>
+          <a:p>
+            <a:pPr algn="ctr"/>
+          </a:p>
+        </p:txBody>
+      </p:sp>
+      <p:sp>
+        <p:nvSpPr>
+          <p:cNvPr id="20" name="Rectangle 19"/>
+          <p:cNvSpPr/>
+          <p:nvPr/>
+        </p:nvSpPr>
+        <p:spPr>
+          <a:xfrm>
+            <a:off x="6233007" y="3474720"/>
+            <a:ext cx="109728" cy="2057400"/>
+          </a:xfrm>
+          <a:prstGeom prst="rect">
+            <a:avLst/>
+          </a:prstGeom>
+          <a:solidFill>
+            <a:srgbClr val="1E293B"/>
+          </a:solidFill>
+          <a:ln>
+            <a:noFill/>
+          </a:ln>
+          <a:effectLst/>
+        </p:spPr>
+        <p:style>
+          <a:lnRef idx="1">
+            <a:schemeClr val="accent1"/>
+          </a:lnRef>
+          <a:fillRef idx="3">
+            <a:schemeClr val="accent1"/>
+          </a:fillRef>
+          <a:effectRef idx="2">
+            <a:schemeClr val="accent1"/>
+          </a:effectRef>
+          <a:fontRef idx="minor">
+            <a:schemeClr val="lt1"/>
+          </a:fontRef>
+        </p:style>
+        <p:txBody>
+          <a:bodyPr rtlCol="0" anchor="ctr"/>
+          <a:lstStyle/>
+          <a:p>
+            <a:pPr algn="ctr"/>
+          </a:p>
+        </p:txBody>
+      </p:sp>
+      <p:sp>
+        <p:nvSpPr>
+          <p:cNvPr id="21" name="TextBox 20"/>
+          <p:cNvSpPr txBox="1"/>
+          <p:nvPr/>
+        </p:nvSpPr>
+        <p:spPr>
+          <a:xfrm>
+            <a:off x="6415887" y="3547872"/>
+            <a:ext cx="5227167" cy="457200"/>
+          </a:xfrm>
+          <a:prstGeom prst="rect">
+            <a:avLst/>
+          </a:prstGeom>
+          <a:noFill/>
+        </p:spPr>
+        <p:txBody>
+          <a:bodyPr wrap="square" anchor="t" lIns="73152" rIns="73152" tIns="36576" bIns="36576">
+            <a:spAutoFit/>
+          </a:bodyPr>
+          <a:lstStyle/>
+          <a:p>
+            <a:pPr algn="l">
+              <a:spcAft>
+                <a:spcPts val="0"/>
+              </a:spcAft>
+            </a:pPr>
+            <a:r>
+              <a:rPr sz="2000" b="1" i="0">
+                <a:solidFill>
+                  <a:srgbClr val="1E293B"/>
+                </a:solidFill>
+                <a:latin typeface="Arial"/>
+              </a:rPr>
+              <a:t>4  Habit feedback</a:t>
+            </a:r>
+          </a:p>
+        </p:txBody>
+      </p:sp>
+      <p:sp>
+        <p:nvSpPr>
+          <p:cNvPr id="22" name="TextBox 21"/>
+          <p:cNvSpPr txBox="1"/>
+          <p:nvPr/>
+        </p:nvSpPr>
+        <p:spPr>
+          <a:xfrm>
+            <a:off x="6415887" y="4005072"/>
+            <a:ext cx="5227167" cy="1453895"/>
+          </a:xfrm>
+          <a:prstGeom prst="rect">
+            <a:avLst/>
+          </a:prstGeom>
+          <a:noFill/>
+        </p:spPr>
+        <p:txBody>
+          <a:bodyPr wrap="square" anchor="t" lIns="73152" rIns="73152" tIns="36576" bIns="36576">
+            <a:spAutoFit/>
+          </a:bodyPr>
+          <a:lstStyle/>
+          <a:p>
+            <a:pPr algn="l" marL="292608" indent="-256032">
+              <a:spcAft>
+                <a:spcPts val="600"/>
+              </a:spcAft>
+              <a:buChar char="•"/>
+            </a:pPr>
+            <a:r>
+              <a:rPr sz="1800" b="0" i="0">
+                <a:solidFill>
+                  <a:srgbClr val="0F172A"/>
+                </a:solidFill>
+                <a:latin typeface="Arial"/>
+              </a:rPr>
+              <a:t>Paying above the close, long shots, chasing</a:t>
+            </a:r>
+          </a:p>
+          <a:p>
+            <a:pPr algn="l" marL="292608" indent="-256032">
+              <a:spcAft>
+                <a:spcPts val="600"/>
+              </a:spcAft>
+              <a:buChar char="•"/>
+            </a:pPr>
+            <a:r>
+              <a:rPr sz="1800" b="0" i="0">
+                <a:solidFill>
+                  <a:srgbClr val="0F172A"/>
+                </a:solidFill>
+                <a:latin typeface="Arial"/>
+              </a:rPr>
+              <a:t>Small samples are mostly luck</a:t>
+            </a:r>
+          </a:p>
+        </p:txBody>
+      </p:sp>
+      <p:sp>
+        <p:nvSpPr>
+          <p:cNvPr id="23" name="Rounded Rectangle 22"/>
+          <p:cNvSpPr/>
+          <p:nvPr/>
+        </p:nvSpPr>
+        <p:spPr>
+          <a:xfrm>
+            <a:off x="457200" y="5760720"/>
+            <a:ext cx="11277295" cy="502920"/>
+          </a:xfrm>
+          <a:prstGeom prst="roundRect">
+            <a:avLst>
+              <a:gd name="adj" fmla="val 12000"/>
+            </a:avLst>
+          </a:prstGeom>
+          <a:solidFill>
+            <a:srgbClr val="FEF3C7"/>
+          </a:solidFill>
+          <a:ln>
+            <a:noFill/>
+          </a:ln>
+          <a:effectLst/>
+        </p:spPr>
+        <p:style>
+          <a:lnRef idx="1">
+            <a:schemeClr val="accent1"/>
+          </a:lnRef>
+          <a:fillRef idx="3">
+            <a:schemeClr val="accent1"/>
+          </a:fillRef>
+          <a:effectRef idx="2">
+            <a:schemeClr val="accent1"/>
+          </a:effectRef>
+          <a:fontRef idx="minor">
+            <a:schemeClr val="lt1"/>
+          </a:fontRef>
+        </p:style>
+        <p:txBody>
+          <a:bodyPr rtlCol="0" anchor="ctr"/>
+          <a:lstStyle/>
+          <a:p>
+            <a:pPr algn="ctr"/>
+          </a:p>
+        </p:txBody>
+      </p:sp>
+      <p:sp>
+        <p:nvSpPr>
+          <p:cNvPr id="24" name="TextBox 23"/>
+          <p:cNvSpPr txBox="1"/>
+          <p:nvPr/>
+        </p:nvSpPr>
+        <p:spPr>
+          <a:xfrm>
+            <a:off x="548640" y="5760720"/>
+            <a:ext cx="11094415" cy="502920"/>
+          </a:xfrm>
+          <a:prstGeom prst="rect">
+            <a:avLst/>
+          </a:prstGeom>
+          <a:noFill/>
+        </p:spPr>
+        <p:txBody>
+          <a:bodyPr wrap="square" anchor="ctr" lIns="73152" rIns="73152" tIns="36576" bIns="36576">
+            <a:spAutoFit/>
+          </a:bodyPr>
+          <a:lstStyle/>
+          <a:p>
+            <a:pPr algn="l">
+              <a:spcAft>
+                <a:spcPts val="0"/>
+              </a:spcAft>
+            </a:pPr>
+            <a:r>
+              <a:rPr sz="1800" b="0" i="0">
+                <a:solidFill>
+                  <a:srgbClr val="0F172A"/>
+                </a:solidFill>
+                <a:latin typeface="Arial"/>
+              </a:rPr>
+              <a:t>Educational, paper money only · only information public at that moment · no promise words</a:t>
+            </a:r>
+          </a:p>
+        </p:txBody>
+      </p:sp>
+    </p:spTree>
+  </p:cSld>
+  <p:clrMapOvr>
+    <a:masterClrMapping/>
+  </p:clrMapOvr>
+</p:sld>
+</file>
+
+<file path=ppt/slides/slide14.xml><?xml version="1.0" encoding="utf-8"?>
+<p:sld xmlns:a="http://schemas.openxmlformats.org/drawingml/2006/main" xmlns:p="http://schemas.openxmlformats.org/presentationml/2006/main" xmlns:r="http://schemas.openxmlformats.org/officeDocument/2006/relationships">
+  <p:cSld>
+    <p:spTree>
+      <p:nvGrpSpPr>
+        <p:cNvPr id="1" name=""/>
+        <p:cNvGrpSpPr/>
+        <p:nvPr/>
+      </p:nvGrpSpPr>
+      <p:grpSpPr/>
+      <p:sp>
+        <p:nvSpPr>
+          <p:cNvPr id="2" name="Rectangle 1"/>
+          <p:cNvSpPr/>
+          <p:nvPr/>
+        </p:nvSpPr>
+        <p:spPr>
+          <a:xfrm>
+            <a:off x="0" y="0"/>
+            <a:ext cx="12191695" cy="868680"/>
+          </a:xfrm>
+          <a:prstGeom prst="rect">
+            <a:avLst/>
+          </a:prstGeom>
+          <a:solidFill>
+            <a:srgbClr val="1E293B"/>
+          </a:solidFill>
+          <a:ln>
+            <a:noFill/>
+          </a:ln>
+          <a:effectLst/>
+        </p:spPr>
+        <p:style>
+          <a:lnRef idx="1">
+            <a:schemeClr val="accent1"/>
+          </a:lnRef>
+          <a:fillRef idx="3">
+            <a:schemeClr val="accent1"/>
+          </a:fillRef>
+          <a:effectRef idx="2">
+            <a:schemeClr val="accent1"/>
+          </a:effectRef>
+          <a:fontRef idx="minor">
+            <a:schemeClr val="lt1"/>
+          </a:fontRef>
+        </p:style>
+        <p:txBody>
+          <a:bodyPr rtlCol="0" anchor="ctr"/>
+          <a:lstStyle/>
+          <a:p>
+            <a:pPr algn="ctr"/>
+          </a:p>
+        </p:txBody>
+      </p:sp>
+      <p:sp>
+        <p:nvSpPr>
+          <p:cNvPr id="3" name="Rectangle 2"/>
+          <p:cNvSpPr/>
+          <p:nvPr/>
+        </p:nvSpPr>
+        <p:spPr>
+          <a:xfrm>
+            <a:off x="0" y="868680"/>
+            <a:ext cx="12191695" cy="54864"/>
+          </a:xfrm>
+          <a:prstGeom prst="rect">
+            <a:avLst/>
+          </a:prstGeom>
+          <a:solidFill>
+            <a:srgbClr val="EA580C"/>
+          </a:solidFill>
+          <a:ln>
+            <a:noFill/>
+          </a:ln>
+          <a:effectLst/>
+        </p:spPr>
+        <p:style>
+          <a:lnRef idx="1">
+            <a:schemeClr val="accent1"/>
+          </a:lnRef>
+          <a:fillRef idx="3">
+            <a:schemeClr val="accent1"/>
+          </a:fillRef>
+          <a:effectRef idx="2">
+            <a:schemeClr val="accent1"/>
+          </a:effectRef>
+          <a:fontRef idx="minor">
+            <a:schemeClr val="lt1"/>
+          </a:fontRef>
+        </p:style>
+        <p:txBody>
+          <a:bodyPr rtlCol="0" anchor="ctr"/>
+          <a:lstStyle/>
+          <a:p>
+            <a:pPr algn="ctr"/>
+          </a:p>
+        </p:txBody>
+      </p:sp>
+      <p:sp>
+        <p:nvSpPr>
+          <p:cNvPr id="4" name="TextBox 3"/>
+          <p:cNvSpPr txBox="1"/>
+          <p:nvPr/>
+        </p:nvSpPr>
+        <p:spPr>
+          <a:xfrm>
+            <a:off x="457200" y="109728"/>
+            <a:ext cx="11277295" cy="685800"/>
+          </a:xfrm>
+          <a:prstGeom prst="rect">
+            <a:avLst/>
+          </a:prstGeom>
+          <a:noFill/>
+        </p:spPr>
+        <p:txBody>
+          <a:bodyPr wrap="square" anchor="ctr" lIns="73152" rIns="73152" tIns="36576" bIns="36576">
+            <a:spAutoFit/>
+          </a:bodyPr>
+          <a:lstStyle/>
+          <a:p>
+            <a:pPr algn="l">
+              <a:spcAft>
+                <a:spcPts val="0"/>
+              </a:spcAft>
+            </a:pPr>
+            <a:r>
+              <a:rPr sz="3000" b="1" i="0">
+                <a:solidFill>
+                  <a:srgbClr val="FFFFFF"/>
+                </a:solidFill>
+                <a:latin typeface="Arial"/>
+              </a:rPr>
+              <a:t>League: practise against the real market with play money</a:t>
+            </a:r>
+          </a:p>
+        </p:txBody>
+      </p:sp>
+      <p:sp>
+        <p:nvSpPr>
+          <p:cNvPr id="5" name="TextBox 4"/>
+          <p:cNvSpPr txBox="1"/>
+          <p:nvPr/>
+        </p:nvSpPr>
+        <p:spPr>
+          <a:xfrm>
+            <a:off x="457200" y="6446520"/>
+            <a:ext cx="9144000" cy="320040"/>
+          </a:xfrm>
+          <a:prstGeom prst="rect">
+            <a:avLst/>
+          </a:prstGeom>
+          <a:noFill/>
+        </p:spPr>
+        <p:txBody>
+          <a:bodyPr wrap="square" anchor="t" lIns="73152" rIns="73152" tIns="36576" bIns="36576">
+            <a:spAutoFit/>
+          </a:bodyPr>
+          <a:lstStyle/>
+          <a:p>
+            <a:pPr algn="l">
+              <a:spcAft>
+                <a:spcPts val="0"/>
+              </a:spcAft>
+            </a:pPr>
+            <a:r>
+              <a:rPr sz="1100" b="0" i="0">
+                <a:solidFill>
+                  <a:srgbClr val="64748B"/>
+                </a:solidFill>
+                <a:latin typeface="Arial"/>
+              </a:rPr>
+              <a:t>DASC7606C Group 12 · Betting markets are tilted against consumers</a:t>
+            </a:r>
+          </a:p>
+        </p:txBody>
+      </p:sp>
+      <p:sp>
+        <p:nvSpPr>
+          <p:cNvPr id="6" name="TextBox 5"/>
+          <p:cNvSpPr txBox="1"/>
+          <p:nvPr/>
+        </p:nvSpPr>
+        <p:spPr>
+          <a:xfrm>
+            <a:off x="10820095" y="6446520"/>
+            <a:ext cx="914400" cy="320040"/>
+          </a:xfrm>
+          <a:prstGeom prst="rect">
+            <a:avLst/>
+          </a:prstGeom>
+          <a:noFill/>
+        </p:spPr>
+        <p:txBody>
+          <a:bodyPr wrap="square" anchor="t" lIns="73152" rIns="73152" tIns="36576" bIns="36576">
+            <a:spAutoFit/>
+          </a:bodyPr>
+          <a:lstStyle/>
+          <a:p>
+            <a:pPr algn="r">
+              <a:spcAft>
+                <a:spcPts val="0"/>
+              </a:spcAft>
+            </a:pPr>
+            <a:r>
+              <a:rPr sz="1100" b="0" i="0">
+                <a:solidFill>
+                  <a:srgbClr val="64748B"/>
+                </a:solidFill>
+                <a:latin typeface="Arial"/>
+              </a:rPr>
+              <a:t>14</a:t>
             </a:r>
           </a:p>
         </p:txBody>
@@ -6491,12 +7688,12 @@
                 <a:tableStyleId>{5C22544A-7EE6-4342-B048-85BDC9FD1C3A}</a:tableStyleId>
               </a:tblPr>
               <a:tblGrid>
-                <a:gridCol w="2148840"/>
+                <a:gridCol w="1965960"/>
                 <a:gridCol w="868680"/>
-                <a:gridCol w="1097280"/>
-                <a:gridCol w="1097280"/>
+                <a:gridCol w="1234440"/>
+                <a:gridCol w="1234440"/>
                 <a:gridCol w="1051560"/>
-                <a:gridCol w="1691640"/>
+                <a:gridCol w="1600200"/>
               </a:tblGrid>
               <a:tr h="411480">
                 <a:tc>
@@ -7552,7 +8749,7 @@
 </p:sld>
 </file>
 
-<file path=ppt/slides/slide13.xml><?xml version="1.0" encoding="utf-8"?>
+<file path=ppt/slides/slide15.xml><?xml version="1.0" encoding="utf-8"?>
 <p:sld xmlns:a="http://schemas.openxmlformats.org/drawingml/2006/main" xmlns:p="http://schemas.openxmlformats.org/presentationml/2006/main" xmlns:r="http://schemas.openxmlformats.org/officeDocument/2006/relationships">
   <p:cSld>
     <p:spTree>
@@ -7762,7 +8959,7 @@
                 </a:solidFill>
                 <a:latin typeface="Arial"/>
               </a:rPr>
-              <a:t>13</a:t>
+              <a:t>15</a:t>
             </a:r>
           </a:p>
         </p:txBody>
@@ -8199,24 +9396,7 @@
                 </a:solidFill>
                 <a:latin typeface="Arial"/>
               </a:rPr>
-              <a:t>One season (1,316 games), game-winner markets only</a:t>
-            </a:r>
-          </a:p>
-          <a:p>
-            <a:pPr algn="l" marL="292608" indent="-256032">
-              <a:spcAft>
-                <a:spcPts val="600"/>
-              </a:spcAft>
-              <a:buChar char="•"/>
-            </a:pPr>
-            <a:r>
-              <a:rPr sz="1800" b="0" i="0">
-                <a:solidFill>
-                  <a:srgbClr val="0F172A"/>
-                </a:solidFill>
-                <a:latin typeface="Arial"/>
-              </a:rPr>
-              <a:t>News stamped tip − 30 min (proxy; real reports come earlier)</a:t>
+              <a:t>Data limits on slide 5: one season, inactive lists as the only news</a:t>
             </a:r>
           </a:p>
           <a:p>
@@ -8263,7 +9443,7 @@
 </p:sld>
 </file>
 
-<file path=ppt/slides/slide14.xml><?xml version="1.0" encoding="utf-8"?>
+<file path=ppt/slides/slide16.xml><?xml version="1.0" encoding="utf-8"?>
 <p:sld xmlns:a="http://schemas.openxmlformats.org/drawingml/2006/main" xmlns:p="http://schemas.openxmlformats.org/presentationml/2006/main" xmlns:r="http://schemas.openxmlformats.org/officeDocument/2006/relationships">
   <p:cSld>
     <p:spTree>
@@ -8473,7 +9653,7 @@
                 </a:solidFill>
                 <a:latin typeface="Arial"/>
               </a:rPr>
-              <a:t>14</a:t>
+              <a:t>16</a:t>
             </a:r>
           </a:p>
         </p:txBody>
@@ -8981,7 +10161,7 @@
 </p:sld>
 </file>
 
-<file path=ppt/slides/slide15.xml><?xml version="1.0" encoding="utf-8"?>
+<file path=ppt/slides/slide17.xml><?xml version="1.0" encoding="utf-8"?>
 <p:sld xmlns:a="http://schemas.openxmlformats.org/drawingml/2006/main" xmlns:p="http://schemas.openxmlformats.org/presentationml/2006/main" xmlns:r="http://schemas.openxmlformats.org/officeDocument/2006/relationships">
   <p:cSld>
     <p:spTree>
@@ -9191,7 +10371,7 @@
                 </a:solidFill>
                 <a:latin typeface="Arial"/>
               </a:rPr>
-              <a:t>15</a:t>
+              <a:t>17</a:t>
             </a:r>
           </a:p>
         </p:txBody>
@@ -11375,7 +12555,7 @@
                 </a:solidFill>
                 <a:latin typeface="Arial"/>
               </a:rPr>
-              <a:t>Evidence 1: costs set a hurdle before you start</a:t>
+              <a:t>Data: five public sources, frozen once</a:t>
             </a:r>
           </a:p>
         </p:txBody>
@@ -11458,30 +12638,737 @@
           </a:p>
         </p:txBody>
       </p:sp>
-      <p:pic>
-        <p:nvPicPr>
-          <p:cNvPr id="7" name="Picture 6" descr="cost_burden.png"/>
-          <p:cNvPicPr>
-            <a:picLocks noChangeAspect="1"/>
-          </p:cNvPicPr>
-          <p:nvPr/>
-        </p:nvPicPr>
-        <p:blipFill>
-          <a:blip r:embed="rId3"/>
-          <a:stretch>
-            <a:fillRect/>
-          </a:stretch>
-        </p:blipFill>
-        <p:spPr>
-          <a:xfrm>
-            <a:off x="1352397" y="1097280"/>
-            <a:ext cx="9486900" cy="3794760"/>
-          </a:xfrm>
-          <a:prstGeom prst="rect">
-            <a:avLst/>
-          </a:prstGeom>
-        </p:spPr>
-      </p:pic>
+      <p:graphicFrame>
+        <p:nvGraphicFramePr>
+          <p:cNvPr id="7" name="Table 6"/>
+          <p:cNvGraphicFramePr>
+            <a:graphicFrameLocks noGrp="1"/>
+          </p:cNvGraphicFramePr>
+          <p:nvPr/>
+        </p:nvGraphicFramePr>
+        <p:xfrm>
+          <a:off x="457200" y="1188720"/>
+          <a:ext cx="11277295" cy="3749040"/>
+        </p:xfrm>
+        <a:graphic>
+          <a:graphicData uri="http://schemas.openxmlformats.org/drawingml/2006/table">
+            <a:tbl>
+              <a:tblPr firstRow="1" bandRow="1">
+                <a:tableStyleId>{5C22544A-7EE6-4342-B048-85BDC9FD1C3A}</a:tableStyleId>
+              </a:tblPr>
+              <a:tblGrid>
+                <a:gridCol w="2514600"/>
+                <a:gridCol w="2743200"/>
+                <a:gridCol w="1417320"/>
+                <a:gridCol w="2514600"/>
+                <a:gridCol w="2087575"/>
+              </a:tblGrid>
+              <a:tr h="457200">
+                <a:tc>
+                  <a:txBody>
+                    <a:bodyPr wrap="square"/>
+                    <a:lstStyle/>
+                    <a:p>
+                      <a:pPr algn="l"/>
+                      <a:r>
+                        <a:rPr sz="1500" b="1" i="0">
+                          <a:solidFill>
+                            <a:srgbClr val="FFFFFF"/>
+                          </a:solidFill>
+                          <a:latin typeface="Arial"/>
+                        </a:rPr>
+                        <a:t>Source</a:t>
+                      </a:r>
+                    </a:p>
+                  </a:txBody>
+                  <a:tcPr marL="73152" marR="73152" marT="36576" marB="36576" anchor="ctr">
+                    <a:solidFill>
+                      <a:srgbClr val="1E293B"/>
+                    </a:solidFill>
+                  </a:tcPr>
+                </a:tc>
+                <a:tc>
+                  <a:txBody>
+                    <a:bodyPr wrap="square"/>
+                    <a:lstStyle/>
+                    <a:p>
+                      <a:pPr algn="l"/>
+                      <a:r>
+                        <a:rPr sz="1500" b="1" i="0">
+                          <a:solidFill>
+                            <a:srgbClr val="FFFFFF"/>
+                          </a:solidFill>
+                          <a:latin typeface="Arial"/>
+                        </a:rPr>
+                        <a:t>What it contains</a:t>
+                      </a:r>
+                    </a:p>
+                  </a:txBody>
+                  <a:tcPr marL="73152" marR="73152" marT="36576" marB="36576" anchor="ctr">
+                    <a:solidFill>
+                      <a:srgbClr val="1E293B"/>
+                    </a:solidFill>
+                  </a:tcPr>
+                </a:tc>
+                <a:tc>
+                  <a:txBody>
+                    <a:bodyPr wrap="square"/>
+                    <a:lstStyle/>
+                    <a:p>
+                      <a:pPr algn="ctr"/>
+                      <a:r>
+                        <a:rPr sz="1500" b="1" i="0">
+                          <a:solidFill>
+                            <a:srgbClr val="FFFFFF"/>
+                          </a:solidFill>
+                          <a:latin typeface="Arial"/>
+                        </a:rPr>
+                        <a:t>Rows</a:t>
+                      </a:r>
+                    </a:p>
+                  </a:txBody>
+                  <a:tcPr marL="73152" marR="73152" marT="36576" marB="36576" anchor="ctr">
+                    <a:solidFill>
+                      <a:srgbClr val="1E293B"/>
+                    </a:solidFill>
+                  </a:tcPr>
+                </a:tc>
+                <a:tc>
+                  <a:txBody>
+                    <a:bodyPr wrap="square"/>
+                    <a:lstStyle/>
+                    <a:p>
+                      <a:pPr algn="l"/>
+                      <a:r>
+                        <a:rPr sz="1500" b="1" i="0">
+                          <a:solidFill>
+                            <a:srgbClr val="FFFFFF"/>
+                          </a:solidFill>
+                          <a:latin typeface="Arial"/>
+                        </a:rPr>
+                        <a:t>Coverage</a:t>
+                      </a:r>
+                    </a:p>
+                  </a:txBody>
+                  <a:tcPr marL="73152" marR="73152" marT="36576" marB="36576" anchor="ctr">
+                    <a:solidFill>
+                      <a:srgbClr val="1E293B"/>
+                    </a:solidFill>
+                  </a:tcPr>
+                </a:tc>
+                <a:tc>
+                  <a:txBody>
+                    <a:bodyPr wrap="square"/>
+                    <a:lstStyle/>
+                    <a:p>
+                      <a:pPr algn="l"/>
+                      <a:r>
+                        <a:rPr sz="1500" b="1" i="0">
+                          <a:solidFill>
+                            <a:srgbClr val="FFFFFF"/>
+                          </a:solidFill>
+                          <a:latin typeface="Arial"/>
+                        </a:rPr>
+                        <a:t>Used for</a:t>
+                      </a:r>
+                    </a:p>
+                  </a:txBody>
+                  <a:tcPr marL="73152" marR="73152" marT="36576" marB="36576" anchor="ctr">
+                    <a:solidFill>
+                      <a:srgbClr val="1E293B"/>
+                    </a:solidFill>
+                  </a:tcPr>
+                </a:tc>
+              </a:tr>
+              <a:tr h="658368">
+                <a:tc>
+                  <a:txBody>
+                    <a:bodyPr wrap="square"/>
+                    <a:lstStyle/>
+                    <a:p>
+                      <a:pPr algn="l"/>
+                      <a:r>
+                        <a:rPr sz="1500" b="0" i="0">
+                          <a:solidFill>
+                            <a:srgbClr val="0F172A"/>
+                          </a:solidFill>
+                          <a:latin typeface="Arial"/>
+                        </a:rPr>
+                        <a:t>Kalshi prices (KXNBAGAME)</a:t>
+                      </a:r>
+                    </a:p>
+                  </a:txBody>
+                  <a:tcPr marL="73152" marR="73152" marT="36576" marB="36576" anchor="ctr">
+                    <a:solidFill>
+                      <a:srgbClr val="F1F5F9"/>
+                    </a:solidFill>
+                  </a:tcPr>
+                </a:tc>
+                <a:tc>
+                  <a:txBody>
+                    <a:bodyPr wrap="square"/>
+                    <a:lstStyle/>
+                    <a:p>
+                      <a:pPr algn="l"/>
+                      <a:r>
+                        <a:rPr sz="1500" b="0" i="0">
+                          <a:solidFill>
+                            <a:srgbClr val="0F172A"/>
+                          </a:solidFill>
+                          <a:latin typeface="Arial"/>
+                        </a:rPr>
+                        <a:t>1-minute bid, ask, volume</a:t>
+                      </a:r>
+                    </a:p>
+                  </a:txBody>
+                  <a:tcPr marL="73152" marR="73152" marT="36576" marB="36576" anchor="ctr">
+                    <a:solidFill>
+                      <a:srgbClr val="F1F5F9"/>
+                    </a:solidFill>
+                  </a:tcPr>
+                </a:tc>
+                <a:tc>
+                  <a:txBody>
+                    <a:bodyPr wrap="square"/>
+                    <a:lstStyle/>
+                    <a:p>
+                      <a:pPr algn="ctr"/>
+                      <a:r>
+                        <a:rPr sz="1500" b="0" i="0">
+                          <a:solidFill>
+                            <a:srgbClr val="0F172A"/>
+                          </a:solidFill>
+                          <a:latin typeface="Arial"/>
+                        </a:rPr>
+                        <a:t>3,938,368</a:t>
+                      </a:r>
+                    </a:p>
+                  </a:txBody>
+                  <a:tcPr marL="73152" marR="73152" marT="36576" marB="36576" anchor="ctr">
+                    <a:solidFill>
+                      <a:srgbClr val="F1F5F9"/>
+                    </a:solidFill>
+                  </a:tcPr>
+                </a:tc>
+                <a:tc>
+                  <a:txBody>
+                    <a:bodyPr wrap="square"/>
+                    <a:lstStyle/>
+                    <a:p>
+                      <a:pPr algn="l"/>
+                      <a:r>
+                        <a:rPr sz="1500" b="0" i="0">
+                          <a:solidFill>
+                            <a:srgbClr val="0F172A"/>
+                          </a:solidFill>
+                          <a:latin typeface="Arial"/>
+                        </a:rPr>
+                        <a:t>20 Oct 2025 – 14 Jun 2026</a:t>
+                      </a:r>
+                    </a:p>
+                  </a:txBody>
+                  <a:tcPr marL="73152" marR="73152" marT="36576" marB="36576" anchor="ctr">
+                    <a:solidFill>
+                      <a:srgbClr val="F1F5F9"/>
+                    </a:solidFill>
+                  </a:tcPr>
+                </a:tc>
+                <a:tc>
+                  <a:txBody>
+                    <a:bodyPr wrap="square"/>
+                    <a:lstStyle/>
+                    <a:p>
+                      <a:pPr algn="l"/>
+                      <a:r>
+                        <a:rPr sz="1500" b="0" i="0">
+                          <a:solidFill>
+                            <a:srgbClr val="0F172A"/>
+                          </a:solidFill>
+                          <a:latin typeface="Arial"/>
+                        </a:rPr>
+                        <a:t>Fills, costs, CLV, anchor, M6</a:t>
+                      </a:r>
+                    </a:p>
+                  </a:txBody>
+                  <a:tcPr marL="73152" marR="73152" marT="36576" marB="36576" anchor="ctr">
+                    <a:solidFill>
+                      <a:srgbClr val="F1F5F9"/>
+                    </a:solidFill>
+                  </a:tcPr>
+                </a:tc>
+              </a:tr>
+              <a:tr h="658368">
+                <a:tc>
+                  <a:txBody>
+                    <a:bodyPr wrap="square"/>
+                    <a:lstStyle/>
+                    <a:p>
+                      <a:pPr algn="l"/>
+                      <a:r>
+                        <a:rPr sz="1500" b="0" i="0">
+                          <a:solidFill>
+                            <a:srgbClr val="0F172A"/>
+                          </a:solidFill>
+                          <a:latin typeface="Arial"/>
+                        </a:rPr>
+                        <a:t>Kalshi markets, settlements</a:t>
+                      </a:r>
+                    </a:p>
+                  </a:txBody>
+                  <a:tcPr marL="73152" marR="73152" marT="36576" marB="36576" anchor="ctr">
+                    <a:solidFill>
+                      <a:srgbClr val="FFFFFF"/>
+                    </a:solidFill>
+                  </a:tcPr>
+                </a:tc>
+                <a:tc>
+                  <a:txBody>
+                    <a:bodyPr wrap="square"/>
+                    <a:lstStyle/>
+                    <a:p>
+                      <a:pPr algn="l"/>
+                      <a:r>
+                        <a:rPr sz="1500" b="0" i="0">
+                          <a:solidFill>
+                            <a:srgbClr val="0F172A"/>
+                          </a:solidFill>
+                          <a:latin typeface="Arial"/>
+                        </a:rPr>
+                        <a:t>Market → game; yes / no result</a:t>
+                      </a:r>
+                    </a:p>
+                  </a:txBody>
+                  <a:tcPr marL="73152" marR="73152" marT="36576" marB="36576" anchor="ctr">
+                    <a:solidFill>
+                      <a:srgbClr val="FFFFFF"/>
+                    </a:solidFill>
+                  </a:tcPr>
+                </a:tc>
+                <a:tc>
+                  <a:txBody>
+                    <a:bodyPr wrap="square"/>
+                    <a:lstStyle/>
+                    <a:p>
+                      <a:pPr algn="ctr"/>
+                      <a:r>
+                        <a:rPr sz="1500" b="0" i="0">
+                          <a:solidFill>
+                            <a:srgbClr val="0F172A"/>
+                          </a:solidFill>
+                          <a:latin typeface="Arial"/>
+                        </a:rPr>
+                        <a:t>2,632 / 2,634</a:t>
+                      </a:r>
+                    </a:p>
+                  </a:txBody>
+                  <a:tcPr marL="73152" marR="73152" marT="36576" marB="36576" anchor="ctr">
+                    <a:solidFill>
+                      <a:srgbClr val="FFFFFF"/>
+                    </a:solidFill>
+                  </a:tcPr>
+                </a:tc>
+                <a:tc>
+                  <a:txBody>
+                    <a:bodyPr wrap="square"/>
+                    <a:lstStyle/>
+                    <a:p>
+                      <a:pPr algn="l"/>
+                      <a:r>
+                        <a:rPr sz="1500" b="0" i="0">
+                          <a:solidFill>
+                            <a:srgbClr val="0F172A"/>
+                          </a:solidFill>
+                          <a:latin typeface="Arial"/>
+                        </a:rPr>
+                        <a:t>1,316 games, 2025-26</a:t>
+                      </a:r>
+                    </a:p>
+                  </a:txBody>
+                  <a:tcPr marL="73152" marR="73152" marT="36576" marB="36576" anchor="ctr">
+                    <a:solidFill>
+                      <a:srgbClr val="FFFFFF"/>
+                    </a:solidFill>
+                  </a:tcPr>
+                </a:tc>
+                <a:tc>
+                  <a:txBody>
+                    <a:bodyPr wrap="square"/>
+                    <a:lstStyle/>
+                    <a:p>
+                      <a:pPr algn="l"/>
+                      <a:r>
+                        <a:rPr sz="1500" b="0" i="0">
+                          <a:solidFill>
+                            <a:srgbClr val="0F172A"/>
+                          </a:solidFill>
+                          <a:latin typeface="Arial"/>
+                        </a:rPr>
+                        <a:t>Settling P&amp;L</a:t>
+                      </a:r>
+                    </a:p>
+                  </a:txBody>
+                  <a:tcPr marL="73152" marR="73152" marT="36576" marB="36576" anchor="ctr">
+                    <a:solidFill>
+                      <a:srgbClr val="FFFFFF"/>
+                    </a:solidFill>
+                  </a:tcPr>
+                </a:tc>
+              </a:tr>
+              <a:tr h="658368">
+                <a:tc>
+                  <a:txBody>
+                    <a:bodyPr wrap="square"/>
+                    <a:lstStyle/>
+                    <a:p>
+                      <a:pPr algn="l"/>
+                      <a:r>
+                        <a:rPr sz="1500" b="0" i="0">
+                          <a:solidFill>
+                            <a:srgbClr val="0F172A"/>
+                          </a:solidFill>
+                          <a:latin typeface="Arial"/>
+                        </a:rPr>
+                        <a:t>ESPN games</a:t>
+                      </a:r>
+                    </a:p>
+                  </a:txBody>
+                  <a:tcPr marL="73152" marR="73152" marT="36576" marB="36576" anchor="ctr">
+                    <a:solidFill>
+                      <a:srgbClr val="F1F5F9"/>
+                    </a:solidFill>
+                  </a:tcPr>
+                </a:tc>
+                <a:tc>
+                  <a:txBody>
+                    <a:bodyPr wrap="square"/>
+                    <a:lstStyle/>
+                    <a:p>
+                      <a:pPr algn="l"/>
+                      <a:r>
+                        <a:rPr sz="1500" b="0" i="0">
+                          <a:solidFill>
+                            <a:srgbClr val="0F172A"/>
+                          </a:solidFill>
+                          <a:latin typeface="Arial"/>
+                        </a:rPr>
+                        <a:t>Schedule, tip time, season type, score</a:t>
+                      </a:r>
+                    </a:p>
+                  </a:txBody>
+                  <a:tcPr marL="73152" marR="73152" marT="36576" marB="36576" anchor="ctr">
+                    <a:solidFill>
+                      <a:srgbClr val="F1F5F9"/>
+                    </a:solidFill>
+                  </a:tcPr>
+                </a:tc>
+                <a:tc>
+                  <a:txBody>
+                    <a:bodyPr wrap="square"/>
+                    <a:lstStyle/>
+                    <a:p>
+                      <a:pPr algn="ctr"/>
+                      <a:r>
+                        <a:rPr sz="1500" b="0" i="0">
+                          <a:solidFill>
+                            <a:srgbClr val="0F172A"/>
+                          </a:solidFill>
+                          <a:latin typeface="Arial"/>
+                        </a:rPr>
+                        <a:t>3,962</a:t>
+                      </a:r>
+                    </a:p>
+                  </a:txBody>
+                  <a:tcPr marL="73152" marR="73152" marT="36576" marB="36576" anchor="ctr">
+                    <a:solidFill>
+                      <a:srgbClr val="F1F5F9"/>
+                    </a:solidFill>
+                  </a:tcPr>
+                </a:tc>
+                <a:tc>
+                  <a:txBody>
+                    <a:bodyPr wrap="square"/>
+                    <a:lstStyle/>
+                    <a:p>
+                      <a:pPr algn="l"/>
+                      <a:r>
+                        <a:rPr sz="1500" b="0" i="0">
+                          <a:solidFill>
+                            <a:srgbClr val="0F172A"/>
+                          </a:solidFill>
+                          <a:latin typeface="Arial"/>
+                        </a:rPr>
+                        <a:t>3 seasons, 2023-24 to 2025-26</a:t>
+                      </a:r>
+                    </a:p>
+                  </a:txBody>
+                  <a:tcPr marL="73152" marR="73152" marT="36576" marB="36576" anchor="ctr">
+                    <a:solidFill>
+                      <a:srgbClr val="F1F5F9"/>
+                    </a:solidFill>
+                  </a:tcPr>
+                </a:tc>
+                <a:tc>
+                  <a:txBody>
+                    <a:bodyPr wrap="square"/>
+                    <a:lstStyle/>
+                    <a:p>
+                      <a:pPr algn="l"/>
+                      <a:r>
+                        <a:rPr sz="1500" b="0" i="0">
+                          <a:solidFill>
+                            <a:srgbClr val="0F172A"/>
+                          </a:solidFill>
+                          <a:latin typeface="Arial"/>
+                        </a:rPr>
+                        <a:t>Splits, M4 labels</a:t>
+                      </a:r>
+                    </a:p>
+                  </a:txBody>
+                  <a:tcPr marL="73152" marR="73152" marT="36576" marB="36576" anchor="ctr">
+                    <a:solidFill>
+                      <a:srgbClr val="F1F5F9"/>
+                    </a:solidFill>
+                  </a:tcPr>
+                </a:tc>
+              </a:tr>
+              <a:tr h="658368">
+                <a:tc>
+                  <a:txBody>
+                    <a:bodyPr wrap="square"/>
+                    <a:lstStyle/>
+                    <a:p>
+                      <a:pPr algn="l"/>
+                      <a:r>
+                        <a:rPr sz="1500" b="0" i="0">
+                          <a:solidFill>
+                            <a:srgbClr val="0F172A"/>
+                          </a:solidFill>
+                          <a:latin typeface="Arial"/>
+                        </a:rPr>
+                        <a:t>ESPN box scores</a:t>
+                      </a:r>
+                    </a:p>
+                  </a:txBody>
+                  <a:tcPr marL="73152" marR="73152" marT="36576" marB="36576" anchor="ctr">
+                    <a:solidFill>
+                      <a:srgbClr val="FFFFFF"/>
+                    </a:solidFill>
+                  </a:tcPr>
+                </a:tc>
+                <a:tc>
+                  <a:txBody>
+                    <a:bodyPr wrap="square"/>
+                    <a:lstStyle/>
+                    <a:p>
+                      <a:pPr algn="l"/>
+                      <a:r>
+                        <a:rPr sz="1500" b="0" i="0">
+                          <a:solidFill>
+                            <a:srgbClr val="0F172A"/>
+                          </a:solidFill>
+                          <a:latin typeface="Arial"/>
+                        </a:rPr>
+                        <a:t>Minutes, points, shots per player</a:t>
+                      </a:r>
+                    </a:p>
+                  </a:txBody>
+                  <a:tcPr marL="73152" marR="73152" marT="36576" marB="36576" anchor="ctr">
+                    <a:solidFill>
+                      <a:srgbClr val="FFFFFF"/>
+                    </a:solidFill>
+                  </a:tcPr>
+                </a:tc>
+                <a:tc>
+                  <a:txBody>
+                    <a:bodyPr wrap="square"/>
+                    <a:lstStyle/>
+                    <a:p>
+                      <a:pPr algn="ctr"/>
+                      <a:r>
+                        <a:rPr sz="1500" b="0" i="0">
+                          <a:solidFill>
+                            <a:srgbClr val="0F172A"/>
+                          </a:solidFill>
+                          <a:latin typeface="Arial"/>
+                        </a:rPr>
+                        <a:t>85,422</a:t>
+                      </a:r>
+                    </a:p>
+                  </a:txBody>
+                  <a:tcPr marL="73152" marR="73152" marT="36576" marB="36576" anchor="ctr">
+                    <a:solidFill>
+                      <a:srgbClr val="FFFFFF"/>
+                    </a:solidFill>
+                  </a:tcPr>
+                </a:tc>
+                <a:tc>
+                  <a:txBody>
+                    <a:bodyPr wrap="square"/>
+                    <a:lstStyle/>
+                    <a:p>
+                      <a:pPr algn="l"/>
+                      <a:r>
+                        <a:rPr sz="1500" b="0" i="0">
+                          <a:solidFill>
+                            <a:srgbClr val="0F172A"/>
+                          </a:solidFill>
+                          <a:latin typeface="Arial"/>
+                        </a:rPr>
+                        <a:t>3 seasons, 818 players</a:t>
+                      </a:r>
+                    </a:p>
+                  </a:txBody>
+                  <a:tcPr marL="73152" marR="73152" marT="36576" marB="36576" anchor="ctr">
+                    <a:solidFill>
+                      <a:srgbClr val="FFFFFF"/>
+                    </a:solidFill>
+                  </a:tcPr>
+                </a:tc>
+                <a:tc>
+                  <a:txBody>
+                    <a:bodyPr wrap="square"/>
+                    <a:lstStyle/>
+                    <a:p>
+                      <a:pPr algn="l"/>
+                      <a:r>
+                        <a:rPr sz="1500" b="0" i="0">
+                          <a:solidFill>
+                            <a:srgbClr val="0F172A"/>
+                          </a:solidFill>
+                          <a:latin typeface="Arial"/>
+                        </a:rPr>
+                        <a:t>M1–M4 features</a:t>
+                      </a:r>
+                    </a:p>
+                  </a:txBody>
+                  <a:tcPr marL="73152" marR="73152" marT="36576" marB="36576" anchor="ctr">
+                    <a:solidFill>
+                      <a:srgbClr val="FFFFFF"/>
+                    </a:solidFill>
+                  </a:tcPr>
+                </a:tc>
+              </a:tr>
+              <a:tr h="658368">
+                <a:tc>
+                  <a:txBody>
+                    <a:bodyPr wrap="square"/>
+                    <a:lstStyle/>
+                    <a:p>
+                      <a:pPr algn="l"/>
+                      <a:r>
+                        <a:rPr sz="1500" b="0" i="0">
+                          <a:solidFill>
+                            <a:srgbClr val="0F172A"/>
+                          </a:solidFill>
+                          <a:latin typeface="Arial"/>
+                        </a:rPr>
+                        <a:t>ESPN inactive lists</a:t>
+                      </a:r>
+                    </a:p>
+                  </a:txBody>
+                  <a:tcPr marL="73152" marR="73152" marT="36576" marB="36576" anchor="ctr">
+                    <a:solidFill>
+                      <a:srgbClr val="F1F5F9"/>
+                    </a:solidFill>
+                  </a:tcPr>
+                </a:tc>
+                <a:tc>
+                  <a:txBody>
+                    <a:bodyPr wrap="square"/>
+                    <a:lstStyle/>
+                    <a:p>
+                      <a:pPr algn="l"/>
+                      <a:r>
+                        <a:rPr sz="1500" b="0" i="0">
+                          <a:solidFill>
+                            <a:srgbClr val="0F172A"/>
+                          </a:solidFill>
+                          <a:latin typeface="Arial"/>
+                        </a:rPr>
+                        <a:t>Who is out and why (our news)</a:t>
+                      </a:r>
+                    </a:p>
+                  </a:txBody>
+                  <a:tcPr marL="73152" marR="73152" marT="36576" marB="36576" anchor="ctr">
+                    <a:solidFill>
+                      <a:srgbClr val="F1F5F9"/>
+                    </a:solidFill>
+                  </a:tcPr>
+                </a:tc>
+                <a:tc>
+                  <a:txBody>
+                    <a:bodyPr wrap="square"/>
+                    <a:lstStyle/>
+                    <a:p>
+                      <a:pPr algn="ctr"/>
+                      <a:r>
+                        <a:rPr sz="1500" b="0" i="0">
+                          <a:solidFill>
+                            <a:srgbClr val="0F172A"/>
+                          </a:solidFill>
+                          <a:latin typeface="Arial"/>
+                        </a:rPr>
+                        <a:t>3,371</a:t>
+                      </a:r>
+                    </a:p>
+                  </a:txBody>
+                  <a:tcPr marL="73152" marR="73152" marT="36576" marB="36576" anchor="ctr">
+                    <a:solidFill>
+                      <a:srgbClr val="F1F5F9"/>
+                    </a:solidFill>
+                  </a:tcPr>
+                </a:tc>
+                <a:tc>
+                  <a:txBody>
+                    <a:bodyPr wrap="square"/>
+                    <a:lstStyle/>
+                    <a:p>
+                      <a:pPr algn="l"/>
+                      <a:r>
+                        <a:rPr sz="1500" b="0" i="0">
+                          <a:solidFill>
+                            <a:srgbClr val="0F172A"/>
+                          </a:solidFill>
+                          <a:latin typeface="Arial"/>
+                        </a:rPr>
+                        <a:t>1,772 games, to 7 May 2026</a:t>
+                      </a:r>
+                    </a:p>
+                  </a:txBody>
+                  <a:tcPr marL="73152" marR="73152" marT="36576" marB="36576" anchor="ctr">
+                    <a:solidFill>
+                      <a:srgbClr val="F1F5F9"/>
+                    </a:solidFill>
+                  </a:tcPr>
+                </a:tc>
+                <a:tc>
+                  <a:txBody>
+                    <a:bodyPr wrap="square"/>
+                    <a:lstStyle/>
+                    <a:p>
+                      <a:pPr algn="l"/>
+                      <a:r>
+                        <a:rPr sz="1500" b="0" i="0">
+                          <a:solidFill>
+                            <a:srgbClr val="0F172A"/>
+                          </a:solidFill>
+                          <a:latin typeface="Arial"/>
+                        </a:rPr>
+                        <a:t>News trigger; M3 / M4 after news</a:t>
+                      </a:r>
+                    </a:p>
+                  </a:txBody>
+                  <a:tcPr marL="73152" marR="73152" marT="36576" marB="36576" anchor="ctr">
+                    <a:solidFill>
+                      <a:srgbClr val="F1F5F9"/>
+                    </a:solidFill>
+                  </a:tcPr>
+                </a:tc>
+              </a:tr>
+            </a:tbl>
+          </a:graphicData>
+        </a:graphic>
+      </p:graphicFrame>
       <p:sp>
         <p:nvSpPr>
           <p:cNvPr id="8" name="TextBox 7"/>
@@ -11490,8 +13377,8 @@
         </p:nvSpPr>
         <p:spPr>
           <a:xfrm>
-            <a:off x="457200" y="4983480"/>
-            <a:ext cx="5547207" cy="1371600"/>
+            <a:off x="457200" y="5029200"/>
+            <a:ext cx="11277295" cy="1280160"/>
           </a:xfrm>
           <a:prstGeom prst="rect">
             <a:avLst/>
@@ -11506,7 +13393,7 @@
           <a:p>
             <a:pPr algn="l" marL="292608" indent="-256032">
               <a:spcAft>
-                <a:spcPts val="400"/>
+                <a:spcPts val="600"/>
               </a:spcAft>
               <a:buChar char="•"/>
             </a:pPr>
@@ -11517,7 +13404,7 @@
                 </a:solidFill>
                 <a:latin typeface="Arial"/>
               </a:rPr>
-              <a:t>1.92¢ per contract</a:t>
+              <a:t>All public:</a:t>
             </a:r>
             <a:r>
               <a:rPr sz="1800" b="0" i="0">
@@ -11526,31 +13413,13 @@
                 </a:solidFill>
                 <a:latin typeface="Arial"/>
               </a:rPr>
-              <a:t> = 5.0% of price; </a:t>
-            </a:r>
-            <a:r>
-              <a:rPr sz="1800" b="1" i="0">
-                <a:solidFill>
-                  <a:srgbClr val="0F172A"/>
-                </a:solidFill>
-                <a:latin typeface="Arial"/>
-              </a:rPr>
-              <a:t>9–14%</a:t>
-            </a:r>
-            <a:r>
-              <a:rPr sz="1800" b="0" i="0">
-                <a:solidFill>
-                  <a:srgbClr val="0F172A"/>
-                </a:solidFill>
-                <a:latin typeface="Arial"/>
-              </a:rPr>
-              <a:t> under 20¢</a:t>
+              <a:t> Kalshi's public trade API (historical candlesticks) and ESPN's public site API</a:t>
             </a:r>
           </a:p>
           <a:p>
             <a:pPr algn="l" marL="292608" indent="-256032">
               <a:spcAft>
-                <a:spcPts val="400"/>
+                <a:spcPts val="600"/>
               </a:spcAft>
               <a:buChar char="•"/>
             </a:pPr>
@@ -11561,109 +13430,7 @@
                 </a:solidFill>
                 <a:latin typeface="Arial"/>
               </a:rPr>
-              <a:t>Best agent, Feb–Apr: +$36 at mid → </a:t>
-            </a:r>
-            <a:r>
-              <a:rPr sz="1800" b="1" i="0">
-                <a:solidFill>
-                  <a:srgbClr val="0F172A"/>
-                </a:solidFill>
-                <a:latin typeface="Arial"/>
-              </a:rPr>
-              <a:t>−$32</a:t>
-            </a:r>
-            <a:r>
-              <a:rPr sz="1800" b="0" i="0">
-                <a:solidFill>
-                  <a:srgbClr val="0F172A"/>
-                </a:solidFill>
-                <a:latin typeface="Arial"/>
-              </a:rPr>
-              <a:t> after costs</a:t>
-            </a:r>
-          </a:p>
-        </p:txBody>
-      </p:sp>
-      <p:sp>
-        <p:nvSpPr>
-          <p:cNvPr id="9" name="TextBox 8"/>
-          <p:cNvSpPr txBox="1"/>
-          <p:nvPr/>
-        </p:nvSpPr>
-        <p:spPr>
-          <a:xfrm>
-            <a:off x="6187287" y="4983480"/>
-            <a:ext cx="5547207" cy="1371600"/>
-          </a:xfrm>
-          <a:prstGeom prst="rect">
-            <a:avLst/>
-          </a:prstGeom>
-          <a:noFill/>
-        </p:spPr>
-        <p:txBody>
-          <a:bodyPr wrap="square" anchor="t" lIns="73152" rIns="73152" tIns="36576" bIns="36576">
-            <a:spAutoFit/>
-          </a:bodyPr>
-          <a:lstStyle/>
-          <a:p>
-            <a:pPr algn="l" marL="292608" indent="-256032">
-              <a:spcAft>
-                <a:spcPts val="400"/>
-              </a:spcAft>
-              <a:buChar char="•"/>
-            </a:pPr>
-            <a:r>
-              <a:rPr sz="1800" b="0" i="0">
-                <a:solidFill>
-                  <a:srgbClr val="0F172A"/>
-                </a:solidFill>
-                <a:latin typeface="Arial"/>
-              </a:rPr>
-              <a:t>771 decision points → 153 with gap &gt; 4 pts → </a:t>
-            </a:r>
-            <a:r>
-              <a:rPr sz="1800" b="1" i="0">
-                <a:solidFill>
-                  <a:srgbClr val="0F172A"/>
-                </a:solidFill>
-                <a:latin typeface="Arial"/>
-              </a:rPr>
-              <a:t>74 trades</a:t>
-            </a:r>
-          </a:p>
-          <a:p>
-            <a:pPr algn="l" marL="292608" indent="-256032">
-              <a:spcAft>
-                <a:spcPts val="400"/>
-              </a:spcAft>
-              <a:buChar char="•"/>
-            </a:pPr>
-            <a:r>
-              <a:rPr sz="1800" b="0" i="0">
-                <a:solidFill>
-                  <a:srgbClr val="0F172A"/>
-                </a:solidFill>
-                <a:latin typeface="Arial"/>
-              </a:rPr>
-              <a:t>Only </a:t>
-            </a:r>
-            <a:r>
-              <a:rPr sz="1800" b="1" i="0">
-                <a:solidFill>
-                  <a:srgbClr val="0F172A"/>
-                </a:solidFill>
-                <a:latin typeface="Arial"/>
-              </a:rPr>
-              <a:t>27 (36%)</a:t>
-            </a:r>
-            <a:r>
-              <a:rPr sz="1800" b="0" i="0">
-                <a:solidFill>
-                  <a:srgbClr val="0F172A"/>
-                </a:solidFill>
-                <a:latin typeface="Arial"/>
-              </a:rPr>
-              <a:t> beat or matched the close</a:t>
+              <a:t>Frozen once as Parquet; raw data not redistributed in the repo (two commands rebuild it)</a:t>
             </a:r>
           </a:p>
         </p:txBody>
@@ -11808,7 +13575,7 @@
                 </a:solidFill>
                 <a:latin typeface="Arial"/>
               </a:rPr>
-              <a:t>Evidence 2: the price moves before the news reaches you</a:t>
+              <a:t>Data: time splits and the no-look-ahead rule</a:t>
             </a:r>
           </a:p>
         </p:txBody>
@@ -11893,7 +13660,7 @@
       </p:sp>
       <p:pic>
         <p:nvPicPr>
-          <p:cNvPr id="7" name="Picture 6" descr="price_discovery.png"/>
+          <p:cNvPr id="7" name="Picture 6" descr="data_timeline.png"/>
           <p:cNvPicPr>
             <a:picLocks noChangeAspect="1"/>
           </p:cNvPicPr>
@@ -11907,8 +13674,8 @@
         </p:blipFill>
         <p:spPr>
           <a:xfrm>
-            <a:off x="895197" y="1097280"/>
-            <a:ext cx="10401299" cy="4160520"/>
+            <a:off x="1250521" y="1097280"/>
+            <a:ext cx="9690652" cy="3429000"/>
           </a:xfrm>
           <a:prstGeom prst="rect">
             <a:avLst/>
@@ -11923,8 +13690,8 @@
         </p:nvSpPr>
         <p:spPr>
           <a:xfrm>
-            <a:off x="457200" y="5349240"/>
-            <a:ext cx="11277295" cy="1005840"/>
+            <a:off x="457200" y="4617720"/>
+            <a:ext cx="5501487" cy="1737360"/>
           </a:xfrm>
           <a:prstGeom prst="rect">
             <a:avLst/>
@@ -11937,46 +13704,160 @@
           </a:bodyPr>
           <a:lstStyle/>
           <a:p>
+            <a:pPr algn="l">
+              <a:spcAft>
+                <a:spcPts val="300"/>
+              </a:spcAft>
+            </a:pPr>
+            <a:r>
+              <a:rPr sz="1600" b="1" i="0">
+                <a:solidFill>
+                  <a:srgbClr val="1E293B"/>
+                </a:solidFill>
+                <a:latin typeface="Arial"/>
+              </a:rPr>
+              <a:t>No look-ahead</a:t>
+            </a:r>
+          </a:p>
+          <a:p>
             <a:pPr algn="l" marL="292608" indent="-256032">
               <a:spcAft>
-                <a:spcPts val="400"/>
+                <a:spcPts val="300"/>
               </a:spcAft>
               <a:buChar char="•"/>
             </a:pPr>
             <a:r>
-              <a:rPr sz="1800" b="1" i="0">
+              <a:rPr sz="1600" b="0" i="0">
                 <a:solidFill>
                   <a:srgbClr val="0F172A"/>
                 </a:solidFill>
                 <a:latin typeface="Arial"/>
               </a:rPr>
-              <a:t>91%</a:t>
-            </a:r>
-            <a:r>
-              <a:rPr sz="1800" b="0" i="0">
-                <a:solidFill>
-                  <a:srgbClr val="0F172A"/>
-                </a:solidFill>
-                <a:latin typeface="Arial"/>
-              </a:rPr>
-              <a:t> of the news-direction move was already in the price when the list was public (+1.80 vs +0.18 pts, 193 test games)</a:t>
+              <a:t>Agent sees only what was published by then</a:t>
             </a:r>
           </a:p>
           <a:p>
             <a:pPr algn="l" marL="292608" indent="-256032">
               <a:spcAft>
-                <a:spcPts val="400"/>
+                <a:spcPts val="300"/>
               </a:spcAft>
               <a:buChar char="•"/>
             </a:pPr>
             <a:r>
-              <a:rPr sz="1800" b="0" i="0">
+              <a:rPr sz="1600" b="0" i="0">
                 <a:solidFill>
                   <a:srgbClr val="0F172A"/>
                 </a:solidFill>
                 <a:latin typeface="Arial"/>
               </a:rPr>
-              <a:t>List stamped tip − 30 min: our proxy for when a retail user sees it</a:t>
+              <a:t>Inactive list = news at tip − 30 min</a:t>
+            </a:r>
+          </a:p>
+          <a:p>
+            <a:pPr algn="l" marL="292608" indent="-256032">
+              <a:spcAft>
+                <a:spcPts val="300"/>
+              </a:spcAft>
+              <a:buChar char="•"/>
+            </a:pPr>
+            <a:r>
+              <a:rPr sz="1600" b="0" i="0">
+                <a:solidFill>
+                  <a:srgbClr val="0F172A"/>
+                </a:solidFill>
+                <a:latin typeface="Arial"/>
+              </a:rPr>
+              <a:t>Fill at ask + fee; quote ≤ 5 min old; ≤ 10% of volume</a:t>
+            </a:r>
+          </a:p>
+        </p:txBody>
+      </p:sp>
+      <p:sp>
+        <p:nvSpPr>
+          <p:cNvPr id="9" name="TextBox 8"/>
+          <p:cNvSpPr txBox="1"/>
+          <p:nvPr/>
+        </p:nvSpPr>
+        <p:spPr>
+          <a:xfrm>
+            <a:off x="6233007" y="4617720"/>
+            <a:ext cx="5501487" cy="1737360"/>
+          </a:xfrm>
+          <a:prstGeom prst="rect">
+            <a:avLst/>
+          </a:prstGeom>
+          <a:noFill/>
+        </p:spPr>
+        <p:txBody>
+          <a:bodyPr wrap="square" anchor="t" lIns="73152" rIns="73152" tIns="36576" bIns="36576">
+            <a:spAutoFit/>
+          </a:bodyPr>
+          <a:lstStyle/>
+          <a:p>
+            <a:pPr algn="l">
+              <a:spcAft>
+                <a:spcPts val="300"/>
+              </a:spcAft>
+            </a:pPr>
+            <a:r>
+              <a:rPr sz="1600" b="1" i="0">
+                <a:solidFill>
+                  <a:srgbClr val="DC2626"/>
+                </a:solidFill>
+                <a:latin typeface="Arial"/>
+              </a:rPr>
+              <a:t>Limits</a:t>
+            </a:r>
+          </a:p>
+          <a:p>
+            <a:pPr algn="l" marL="292608" indent="-256032">
+              <a:spcAft>
+                <a:spcPts val="300"/>
+              </a:spcAft>
+              <a:buChar char="•"/>
+            </a:pPr>
+            <a:r>
+              <a:rPr sz="1600" b="0" i="0">
+                <a:solidFill>
+                  <a:srgbClr val="0F172A"/>
+                </a:solidFill>
+                <a:latin typeface="Arial"/>
+              </a:rPr>
+              <a:t>One season of prices; game-winner markets only</a:t>
+            </a:r>
+          </a:p>
+          <a:p>
+            <a:pPr algn="l" marL="292608" indent="-256032">
+              <a:spcAft>
+                <a:spcPts val="300"/>
+              </a:spcAft>
+              <a:buChar char="•"/>
+            </a:pPr>
+            <a:r>
+              <a:rPr sz="1600" b="0" i="0">
+                <a:solidFill>
+                  <a:srgbClr val="0F172A"/>
+                </a:solidFill>
+                <a:latin typeface="Arial"/>
+              </a:rPr>
+              <a:t>News = inactive lists only, to 7 May</a:t>
+            </a:r>
+          </a:p>
+          <a:p>
+            <a:pPr algn="l" marL="292608" indent="-256032">
+              <a:spcAft>
+                <a:spcPts val="300"/>
+              </a:spcAft>
+              <a:buChar char="•"/>
+            </a:pPr>
+            <a:r>
+              <a:rPr sz="1600" b="0" i="0">
+                <a:solidFill>
+                  <a:srgbClr val="0F172A"/>
+                </a:solidFill>
+                <a:latin typeface="Arial"/>
+              </a:rPr>
+              <a:t>No earlier injury reports, social media or other books</a:t>
             </a:r>
           </a:p>
         </p:txBody>
@@ -12121,7 +14002,7 @@
                 </a:solidFill>
                 <a:latin typeface="Arial"/>
               </a:rPr>
-              <a:t>Evidence 3: the market beats our model</a:t>
+              <a:t>Evidence 1: costs set a hurdle before you start</a:t>
             </a:r>
           </a:p>
         </p:txBody>
@@ -12206,7 +14087,7 @@
       </p:sp>
       <p:pic>
         <p:nvPicPr>
-          <p:cNvPr id="7" name="Picture 6" descr="m4_vs_market.png"/>
+          <p:cNvPr id="7" name="Picture 6" descr="cost_burden.png"/>
           <p:cNvPicPr>
             <a:picLocks noChangeAspect="1"/>
           </p:cNvPicPr>
@@ -12220,8 +14101,8 @@
         </p:blipFill>
         <p:spPr>
           <a:xfrm>
-            <a:off x="457200" y="1209821"/>
-            <a:ext cx="6949440" cy="5078436"/>
+            <a:off x="1352397" y="1097280"/>
+            <a:ext cx="9486900" cy="3794760"/>
           </a:xfrm>
           <a:prstGeom prst="rect">
             <a:avLst/>
@@ -12236,8 +14117,8 @@
         </p:nvSpPr>
         <p:spPr>
           <a:xfrm>
-            <a:off x="7589520" y="1280160"/>
-            <a:ext cx="4144975" cy="5120640"/>
+            <a:off x="457200" y="4983480"/>
+            <a:ext cx="5547207" cy="1371600"/>
           </a:xfrm>
           <a:prstGeom prst="rect">
             <a:avLst/>
@@ -12252,104 +14133,164 @@
           <a:p>
             <a:pPr algn="l" marL="292608" indent="-256032">
               <a:spcAft>
-                <a:spcPts val="1000"/>
+                <a:spcPts val="400"/>
               </a:spcAft>
               <a:buChar char="•"/>
             </a:pPr>
             <a:r>
-              <a:rPr sz="1900" b="0" i="0">
+              <a:rPr sz="1800" b="1" i="0">
                 <a:solidFill>
                   <a:srgbClr val="0F172A"/>
                 </a:solidFill>
                 <a:latin typeface="Arial"/>
               </a:rPr>
-              <a:t>Brier, 501 test games, 1 h before tip: </a:t>
-            </a:r>
-            <a:r>
-              <a:rPr sz="1900" b="1" i="0">
+              <a:t>1.92¢ per contract</a:t>
+            </a:r>
+            <a:r>
+              <a:rPr sz="1800" b="0" i="0">
                 <a:solidFill>
                   <a:srgbClr val="0F172A"/>
                 </a:solidFill>
                 <a:latin typeface="Arial"/>
               </a:rPr>
-              <a:t>market 0.164</a:t>
-            </a:r>
-            <a:r>
-              <a:rPr sz="1900" b="0" i="0">
+              <a:t> = 5.0% of price; </a:t>
+            </a:r>
+            <a:r>
+              <a:rPr sz="1800" b="1" i="0">
                 <a:solidFill>
                   <a:srgbClr val="0F172A"/>
                 </a:solidFill>
                 <a:latin typeface="Arial"/>
               </a:rPr>
-              <a:t>, our model 0.186</a:t>
+              <a:t>9–14%</a:t>
+            </a:r>
+            <a:r>
+              <a:rPr sz="1800" b="0" i="0">
+                <a:solidFill>
+                  <a:srgbClr val="0F172A"/>
+                </a:solidFill>
+                <a:latin typeface="Arial"/>
+              </a:rPr>
+              <a:t> under 20¢</a:t>
             </a:r>
           </a:p>
           <a:p>
             <a:pPr algn="l" marL="292608" indent="-256032">
               <a:spcAft>
-                <a:spcPts val="1000"/>
+                <a:spcPts val="400"/>
               </a:spcAft>
               <a:buChar char="•"/>
             </a:pPr>
             <a:r>
-              <a:rPr sz="1900" b="0" i="0">
+              <a:rPr sz="1800" b="0" i="0">
                 <a:solidFill>
                   <a:srgbClr val="0F172A"/>
                 </a:solidFill>
                 <a:latin typeface="Arial"/>
               </a:rPr>
-              <a:t>Disagree by more than 5 pts, and the market is right:</a:t>
-            </a:r>
-          </a:p>
-          <a:p>
-            <a:pPr algn="l" marL="612647" indent="-256032">
-              <a:spcAft>
-                <a:spcPts val="1000"/>
-              </a:spcAft>
-              <a:buChar char="–"/>
-            </a:pPr>
-            <a:r>
-              <a:rPr sz="1700" b="0" i="0">
+              <a:t>Best agent, Feb–Apr: +$36 at mid → </a:t>
+            </a:r>
+            <a:r>
+              <a:rPr sz="1800" b="1" i="0">
                 <a:solidFill>
                   <a:srgbClr val="0F172A"/>
                 </a:solidFill>
                 <a:latin typeface="Arial"/>
               </a:rPr>
-              <a:t>model higher on home: model 48%, market 35%, actual 34%</a:t>
-            </a:r>
-          </a:p>
-          <a:p>
-            <a:pPr algn="l" marL="612647" indent="-256032">
-              <a:spcAft>
-                <a:spcPts val="1000"/>
-              </a:spcAft>
-              <a:buChar char="–"/>
-            </a:pPr>
-            <a:r>
-              <a:rPr sz="1700" b="0" i="0">
+              <a:t>−$32</a:t>
+            </a:r>
+            <a:r>
+              <a:rPr sz="1800" b="0" i="0">
                 <a:solidFill>
                   <a:srgbClr val="0F172A"/>
                 </a:solidFill>
                 <a:latin typeface="Arial"/>
               </a:rPr>
-              <a:t>model lower on home: model 61%, market 73%, actual 77%</a:t>
-            </a:r>
-          </a:p>
+              <a:t> after costs</a:t>
+            </a:r>
+          </a:p>
+        </p:txBody>
+      </p:sp>
+      <p:sp>
+        <p:nvSpPr>
+          <p:cNvPr id="9" name="TextBox 8"/>
+          <p:cNvSpPr txBox="1"/>
+          <p:nvPr/>
+        </p:nvSpPr>
+        <p:spPr>
+          <a:xfrm>
+            <a:off x="6187287" y="4983480"/>
+            <a:ext cx="5547207" cy="1371600"/>
+          </a:xfrm>
+          <a:prstGeom prst="rect">
+            <a:avLst/>
+          </a:prstGeom>
+          <a:noFill/>
+        </p:spPr>
+        <p:txBody>
+          <a:bodyPr wrap="square" anchor="t" lIns="73152" rIns="73152" tIns="36576" bIns="36576">
+            <a:spAutoFit/>
+          </a:bodyPr>
+          <a:lstStyle/>
           <a:p>
             <a:pPr algn="l" marL="292608" indent="-256032">
               <a:spcAft>
-                <a:spcPts val="1000"/>
+                <a:spcPts val="400"/>
               </a:spcAft>
               <a:buChar char="•"/>
             </a:pPr>
             <a:r>
-              <a:rPr sz="1600" b="0" i="0">
-                <a:solidFill>
-                  <a:srgbClr val="64748B"/>
-                </a:solidFill>
-                <a:latin typeface="Arial"/>
-              </a:rPr>
-              <a:t>With the inactive list: model 0.183 vs market at tip 0.163</a:t>
+              <a:rPr sz="1800" b="0" i="0">
+                <a:solidFill>
+                  <a:srgbClr val="0F172A"/>
+                </a:solidFill>
+                <a:latin typeface="Arial"/>
+              </a:rPr>
+              <a:t>771 decision points → 153 with gap &gt; 4 pts → </a:t>
+            </a:r>
+            <a:r>
+              <a:rPr sz="1800" b="1" i="0">
+                <a:solidFill>
+                  <a:srgbClr val="0F172A"/>
+                </a:solidFill>
+                <a:latin typeface="Arial"/>
+              </a:rPr>
+              <a:t>74 trades</a:t>
+            </a:r>
+          </a:p>
+          <a:p>
+            <a:pPr algn="l" marL="292608" indent="-256032">
+              <a:spcAft>
+                <a:spcPts val="400"/>
+              </a:spcAft>
+              <a:buChar char="•"/>
+            </a:pPr>
+            <a:r>
+              <a:rPr sz="1800" b="0" i="0">
+                <a:solidFill>
+                  <a:srgbClr val="0F172A"/>
+                </a:solidFill>
+                <a:latin typeface="Arial"/>
+              </a:rPr>
+              <a:t>Only </a:t>
+            </a:r>
+            <a:r>
+              <a:rPr sz="1800" b="1" i="0">
+                <a:solidFill>
+                  <a:srgbClr val="0F172A"/>
+                </a:solidFill>
+                <a:latin typeface="Arial"/>
+              </a:rPr>
+              <a:t>27 (36%)</a:t>
+            </a:r>
+            <a:r>
+              <a:rPr sz="1800" b="0" i="0">
+                <a:solidFill>
+                  <a:srgbClr val="0F172A"/>
+                </a:solidFill>
+                <a:latin typeface="Arial"/>
+              </a:rPr>
+              <a:t> beat or matched the close</a:t>
             </a:r>
           </a:p>
         </p:txBody>
@@ -12494,7 +14435,7 @@
                 </a:solidFill>
                 <a:latin typeface="Arial"/>
               </a:rPr>
-              <a:t>Evidence 4: even a market-trained neural net finds nothing</a:t>
+              <a:t>Evidence 2: the price moves before the news reaches you</a:t>
             </a:r>
           </a:p>
         </p:txBody>
@@ -12579,7 +14520,7 @@
       </p:sp>
       <p:pic>
         <p:nvPicPr>
-          <p:cNvPr id="7" name="Picture 6" descr="m6_vs_baselines.png"/>
+          <p:cNvPr id="7" name="Picture 6" descr="price_discovery.png"/>
           <p:cNvPicPr>
             <a:picLocks noChangeAspect="1"/>
           </p:cNvPicPr>
@@ -12593,8 +14534,8 @@
         </p:blipFill>
         <p:spPr>
           <a:xfrm>
-            <a:off x="579630" y="1097280"/>
-            <a:ext cx="11032434" cy="3383280"/>
+            <a:off x="895197" y="1097280"/>
+            <a:ext cx="10401299" cy="4160520"/>
           </a:xfrm>
           <a:prstGeom prst="rect">
             <a:avLst/>
@@ -12609,8 +14550,8 @@
         </p:nvSpPr>
         <p:spPr>
           <a:xfrm>
-            <a:off x="457200" y="4526280"/>
-            <a:ext cx="11277295" cy="1298448"/>
+            <a:off x="457200" y="5349240"/>
+            <a:ext cx="11277295" cy="1005840"/>
           </a:xfrm>
           <a:prstGeom prst="rect">
             <a:avLst/>
@@ -12630,49 +14571,22 @@
               <a:buChar char="•"/>
             </a:pPr>
             <a:r>
+              <a:rPr sz="1800" b="1" i="0">
+                <a:solidFill>
+                  <a:srgbClr val="0F172A"/>
+                </a:solidFill>
+                <a:latin typeface="Arial"/>
+              </a:rPr>
+              <a:t>91%</a:t>
+            </a:r>
+            <a:r>
               <a:rPr sz="1800" b="0" i="0">
                 <a:solidFill>
                   <a:srgbClr val="0F172A"/>
                 </a:solidFill>
                 <a:latin typeface="Arial"/>
               </a:rPr>
-              <a:t>Average error on 771 test decision times: </a:t>
-            </a:r>
-            <a:r>
-              <a:rPr sz="1800" b="1" i="0">
-                <a:solidFill>
-                  <a:srgbClr val="0F172A"/>
-                </a:solidFill>
-                <a:latin typeface="Arial"/>
-              </a:rPr>
-              <a:t>M6 0.867¢</a:t>
-            </a:r>
-            <a:r>
-              <a:rPr sz="1800" b="0" i="0">
-                <a:solidFill>
-                  <a:srgbClr val="0F172A"/>
-                </a:solidFill>
-                <a:latin typeface="Arial"/>
-              </a:rPr>
-              <a:t> vs “price won't move” </a:t>
-            </a:r>
-            <a:r>
-              <a:rPr sz="1800" b="1" i="0">
-                <a:solidFill>
-                  <a:srgbClr val="0F172A"/>
-                </a:solidFill>
-                <a:latin typeface="Arial"/>
-              </a:rPr>
-              <a:t>0.833¢</a:t>
-            </a:r>
-            <a:r>
-              <a:rPr sz="1800" b="0" i="0">
-                <a:solidFill>
-                  <a:srgbClr val="0F172A"/>
-                </a:solidFill>
-                <a:latin typeface="Arial"/>
-              </a:rPr>
-              <a:t>; R² ≈ 0 on test and holdout</a:t>
+              <a:t> of the news-direction move was already in the price when the list was public (+1.80 vs +0.18 pts, 193 test games)</a:t>
             </a:r>
           </a:p>
           <a:p>
@@ -12689,92 +14603,7 @@
                 </a:solidFill>
                 <a:latin typeface="Arial"/>
               </a:rPr>
-              <a:t>After the list, the price moves ~2.5% of the model's implied shift (coefficient 0.025); M6 agent: 0 trades. Forced: 501 trades, −$652</a:t>
-            </a:r>
-          </a:p>
-        </p:txBody>
-      </p:sp>
-      <p:sp>
-        <p:nvSpPr>
-          <p:cNvPr id="9" name="Rounded Rectangle 8"/>
-          <p:cNvSpPr/>
-          <p:nvPr/>
-        </p:nvSpPr>
-        <p:spPr>
-          <a:xfrm>
-            <a:off x="457200" y="5870448"/>
-            <a:ext cx="11277295" cy="457200"/>
-          </a:xfrm>
-          <a:prstGeom prst="roundRect">
-            <a:avLst>
-              <a:gd name="adj" fmla="val 12000"/>
-            </a:avLst>
-          </a:prstGeom>
-          <a:solidFill>
-            <a:srgbClr val="FEF3C7"/>
-          </a:solidFill>
-          <a:ln>
-            <a:noFill/>
-          </a:ln>
-          <a:effectLst/>
-        </p:spPr>
-        <p:style>
-          <a:lnRef idx="1">
-            <a:schemeClr val="accent1"/>
-          </a:lnRef>
-          <a:fillRef idx="3">
-            <a:schemeClr val="accent1"/>
-          </a:fillRef>
-          <a:effectRef idx="2">
-            <a:schemeClr val="accent1"/>
-          </a:effectRef>
-          <a:fontRef idx="minor">
-            <a:schemeClr val="lt1"/>
-          </a:fontRef>
-        </p:style>
-        <p:txBody>
-          <a:bodyPr rtlCol="0" anchor="ctr"/>
-          <a:lstStyle/>
-          <a:p>
-            <a:pPr algn="ctr"/>
-          </a:p>
-        </p:txBody>
-      </p:sp>
-      <p:sp>
-        <p:nvSpPr>
-          <p:cNvPr id="10" name="TextBox 9"/>
-          <p:cNvSpPr txBox="1"/>
-          <p:nvPr/>
-        </p:nvSpPr>
-        <p:spPr>
-          <a:xfrm>
-            <a:off x="548640" y="5870448"/>
-            <a:ext cx="11094415" cy="457200"/>
-          </a:xfrm>
-          <a:prstGeom prst="rect">
-            <a:avLst/>
-          </a:prstGeom>
-          <a:noFill/>
-        </p:spPr>
-        <p:txBody>
-          <a:bodyPr wrap="square" anchor="ctr" lIns="73152" rIns="73152" tIns="36576" bIns="36576">
-            <a:spAutoFit/>
-          </a:bodyPr>
-          <a:lstStyle/>
-          <a:p>
-            <a:pPr algn="l">
-              <a:spcAft>
-                <a:spcPts val="0"/>
-              </a:spcAft>
-            </a:pPr>
-            <a:r>
-              <a:rPr sz="1800" b="0" i="0">
-                <a:solidFill>
-                  <a:srgbClr val="0F172A"/>
-                </a:solidFill>
-                <a:latin typeface="Arial"/>
-              </a:rPr>
-              <a:t>The price already contains the public information; the consumer is left paying costs</a:t>
+              <a:t>List stamped tip − 30 min: our proxy for when a retail user sees it</a:t>
             </a:r>
           </a:p>
         </p:txBody>
@@ -12919,7 +14748,7 @@
                 </a:solidFill>
                 <a:latin typeface="Arial"/>
               </a:rPr>
-              <a:t>Evidence 5: money over time, every line drifts down</a:t>
+              <a:t>Evidence 3: the market beats our model</a:t>
             </a:r>
           </a:p>
         </p:txBody>
@@ -13004,7 +14833,7 @@
       </p:sp>
       <p:pic>
         <p:nvPicPr>
-          <p:cNvPr id="7" name="Picture 6" descr="cumulative_pnl.png"/>
+          <p:cNvPr id="7" name="Picture 6" descr="m4_vs_market.png"/>
           <p:cNvPicPr>
             <a:picLocks noChangeAspect="1"/>
           </p:cNvPicPr>
@@ -13018,8 +14847,8 @@
         </p:blipFill>
         <p:spPr>
           <a:xfrm>
-            <a:off x="1213604" y="1097280"/>
-            <a:ext cx="9764485" cy="4206240"/>
+            <a:off x="457200" y="1209821"/>
+            <a:ext cx="6949440" cy="5078436"/>
           </a:xfrm>
           <a:prstGeom prst="rect">
             <a:avLst/>
@@ -13034,8 +14863,8 @@
         </p:nvSpPr>
         <p:spPr>
           <a:xfrm>
-            <a:off x="457200" y="5394960"/>
-            <a:ext cx="11277295" cy="960120"/>
+            <a:off x="7589520" y="1280160"/>
+            <a:ext cx="4144975" cy="5120640"/>
           </a:xfrm>
           <a:prstGeom prst="rect">
             <a:avLst/>
@@ -13050,35 +14879,104 @@
           <a:p>
             <a:pPr algn="l" marL="292608" indent="-256032">
               <a:spcAft>
-                <a:spcPts val="400"/>
+                <a:spcPts val="1000"/>
               </a:spcAft>
               <a:buChar char="•"/>
             </a:pPr>
             <a:r>
-              <a:rPr sz="1800" b="0" i="0">
+              <a:rPr sz="1900" b="0" i="0">
                 <a:solidFill>
                   <a:srgbClr val="0F172A"/>
                 </a:solidFill>
                 <a:latin typeface="Arial"/>
               </a:rPr>
-              <a:t>Raw model falls steadily (−$2,087 test, −$2,475 season): the slope is costs</a:t>
+              <a:t>Brier, 501 test games, 1 h before tip: </a:t>
+            </a:r>
+            <a:r>
+              <a:rPr sz="1900" b="1" i="0">
+                <a:solidFill>
+                  <a:srgbClr val="0F172A"/>
+                </a:solidFill>
+                <a:latin typeface="Arial"/>
+              </a:rPr>
+              <a:t>market 0.164</a:t>
+            </a:r>
+            <a:r>
+              <a:rPr sz="1900" b="0" i="0">
+                <a:solidFill>
+                  <a:srgbClr val="0F172A"/>
+                </a:solidFill>
+                <a:latin typeface="Arial"/>
+              </a:rPr>
+              <a:t>, our model 0.186</a:t>
             </a:r>
           </a:p>
           <a:p>
             <a:pPr algn="l" marL="292608" indent="-256032">
               <a:spcAft>
-                <a:spcPts val="400"/>
+                <a:spcPts val="1000"/>
               </a:spcAft>
               <a:buChar char="•"/>
             </a:pPr>
             <a:r>
-              <a:rPr sz="1800" b="0" i="0">
+              <a:rPr sz="1900" b="0" i="0">
                 <a:solidFill>
                   <a:srgbClr val="0F172A"/>
                 </a:solidFill>
                 <a:latin typeface="Arial"/>
               </a:rPr>
-              <a:t>Learning flattens the line by trading less: full agent −$32 test, −$25 season; M6: 0 trades</a:t>
+              <a:t>Disagree by more than 5 pts, and the market is right:</a:t>
+            </a:r>
+          </a:p>
+          <a:p>
+            <a:pPr algn="l" marL="612647" indent="-256032">
+              <a:spcAft>
+                <a:spcPts val="1000"/>
+              </a:spcAft>
+              <a:buChar char="–"/>
+            </a:pPr>
+            <a:r>
+              <a:rPr sz="1700" b="0" i="0">
+                <a:solidFill>
+                  <a:srgbClr val="0F172A"/>
+                </a:solidFill>
+                <a:latin typeface="Arial"/>
+              </a:rPr>
+              <a:t>model higher on home: model 48%, market 35%, actual 34%</a:t>
+            </a:r>
+          </a:p>
+          <a:p>
+            <a:pPr algn="l" marL="612647" indent="-256032">
+              <a:spcAft>
+                <a:spcPts val="1000"/>
+              </a:spcAft>
+              <a:buChar char="–"/>
+            </a:pPr>
+            <a:r>
+              <a:rPr sz="1700" b="0" i="0">
+                <a:solidFill>
+                  <a:srgbClr val="0F172A"/>
+                </a:solidFill>
+                <a:latin typeface="Arial"/>
+              </a:rPr>
+              <a:t>model lower on home: model 61%, market 73%, actual 77%</a:t>
+            </a:r>
+          </a:p>
+          <a:p>
+            <a:pPr algn="l" marL="292608" indent="-256032">
+              <a:spcAft>
+                <a:spcPts val="1000"/>
+              </a:spcAft>
+              <a:buChar char="•"/>
+            </a:pPr>
+            <a:r>
+              <a:rPr sz="1600" b="0" i="0">
+                <a:solidFill>
+                  <a:srgbClr val="64748B"/>
+                </a:solidFill>
+                <a:latin typeface="Arial"/>
+              </a:rPr>
+              <a:t>With the inactive list: model 0.183 vs market at tip 0.163</a:t>
             </a:r>
           </a:p>
         </p:txBody>
@@ -13223,7 +15121,7 @@
                 </a:solidFill>
                 <a:latin typeface="Arial"/>
               </a:rPr>
-              <a:t>Evidence 6: tested with CIs, never trading wins</a:t>
+              <a:t>Evidence 4: even a market-trained neural net finds nothing</a:t>
             </a:r>
           </a:p>
         </p:txBody>
@@ -13308,7 +15206,7 @@
       </p:sp>
       <p:pic>
         <p:nvPicPr>
-          <p:cNvPr id="7" name="Picture 6" descr="walkforward.png"/>
+          <p:cNvPr id="7" name="Picture 6" descr="m6_vs_baselines.png"/>
           <p:cNvPicPr>
             <a:picLocks noChangeAspect="1"/>
           </p:cNvPicPr>
@@ -13322,445 +15220,24 @@
         </p:blipFill>
         <p:spPr>
           <a:xfrm>
-            <a:off x="457200" y="1188719"/>
-            <a:ext cx="5943600" cy="3429000"/>
+            <a:off x="579630" y="1097280"/>
+            <a:ext cx="11032434" cy="3383280"/>
           </a:xfrm>
           <a:prstGeom prst="rect">
             <a:avLst/>
           </a:prstGeom>
         </p:spPr>
       </p:pic>
-      <p:graphicFrame>
-        <p:nvGraphicFramePr>
-          <p:cNvPr id="8" name="Table 7"/>
-          <p:cNvGraphicFramePr>
-            <a:graphicFrameLocks noGrp="1"/>
-          </p:cNvGraphicFramePr>
-          <p:nvPr/>
-        </p:nvGraphicFramePr>
-        <p:xfrm>
-          <a:off x="6537960" y="1188720"/>
-          <a:ext cx="5193791" cy="2871216"/>
-        </p:xfrm>
-        <a:graphic>
-          <a:graphicData uri="http://schemas.openxmlformats.org/drawingml/2006/table">
-            <a:tbl>
-              <a:tblPr firstRow="1" bandRow="1">
-                <a:tableStyleId>{5C22544A-7EE6-4342-B048-85BDC9FD1C3A}</a:tableStyleId>
-              </a:tblPr>
-              <a:tblGrid>
-                <a:gridCol w="1874519"/>
-                <a:gridCol w="868680"/>
-                <a:gridCol w="2450592"/>
-              </a:tblGrid>
-              <a:tr h="457200">
-                <a:tc>
-                  <a:txBody>
-                    <a:bodyPr wrap="square"/>
-                    <a:lstStyle/>
-                    <a:p>
-                      <a:pPr algn="l"/>
-                      <a:r>
-                        <a:rPr sz="1600" b="1" i="0">
-                          <a:solidFill>
-                            <a:srgbClr val="FFFFFF"/>
-                          </a:solidFill>
-                          <a:latin typeface="Arial"/>
-                        </a:rPr>
-                        <a:t>Nov – 12 Apr</a:t>
-                      </a:r>
-                    </a:p>
-                  </a:txBody>
-                  <a:tcPr marL="73152" marR="73152" marT="36576" marB="36576" anchor="ctr">
-                    <a:solidFill>
-                      <a:srgbClr val="1E293B"/>
-                    </a:solidFill>
-                  </a:tcPr>
-                </a:tc>
-                <a:tc>
-                  <a:txBody>
-                    <a:bodyPr wrap="square"/>
-                    <a:lstStyle/>
-                    <a:p>
-                      <a:pPr algn="ctr"/>
-                      <a:r>
-                        <a:rPr sz="1600" b="1" i="0">
-                          <a:solidFill>
-                            <a:srgbClr val="FFFFFF"/>
-                          </a:solidFill>
-                          <a:latin typeface="Arial"/>
-                        </a:rPr>
-                        <a:t>Trades</a:t>
-                      </a:r>
-                    </a:p>
-                  </a:txBody>
-                  <a:tcPr marL="73152" marR="73152" marT="36576" marB="36576" anchor="ctr">
-                    <a:solidFill>
-                      <a:srgbClr val="1E293B"/>
-                    </a:solidFill>
-                  </a:tcPr>
-                </a:tc>
-                <a:tc>
-                  <a:txBody>
-                    <a:bodyPr wrap="square"/>
-                    <a:lstStyle/>
-                    <a:p>
-                      <a:pPr algn="ctr"/>
-                      <a:r>
-                        <a:rPr sz="1600" b="1" i="0">
-                          <a:solidFill>
-                            <a:srgbClr val="FFFFFF"/>
-                          </a:solidFill>
-                          <a:latin typeface="Arial"/>
-                        </a:rPr>
-                        <a:t>P&amp;L [95% CI]</a:t>
-                      </a:r>
-                    </a:p>
-                  </a:txBody>
-                  <a:tcPr marL="73152" marR="73152" marT="36576" marB="36576" anchor="ctr">
-                    <a:solidFill>
-                      <a:srgbClr val="1E293B"/>
-                    </a:solidFill>
-                  </a:tcPr>
-                </a:tc>
-              </a:tr>
-              <a:tr h="603504">
-                <a:tc>
-                  <a:txBody>
-                    <a:bodyPr wrap="square"/>
-                    <a:lstStyle/>
-                    <a:p>
-                      <a:pPr algn="l"/>
-                      <a:r>
-                        <a:rPr sz="1600" b="1" i="0">
-                          <a:solidFill>
-                            <a:srgbClr val="0F172A"/>
-                          </a:solidFill>
-                          <a:latin typeface="Arial"/>
-                        </a:rPr>
-                        <a:t>Never trade</a:t>
-                      </a:r>
-                    </a:p>
-                  </a:txBody>
-                  <a:tcPr marL="73152" marR="73152" marT="36576" marB="36576" anchor="ctr">
-                    <a:solidFill>
-                      <a:srgbClr val="DCFCE7"/>
-                    </a:solidFill>
-                  </a:tcPr>
-                </a:tc>
-                <a:tc>
-                  <a:txBody>
-                    <a:bodyPr wrap="square"/>
-                    <a:lstStyle/>
-                    <a:p>
-                      <a:pPr algn="ctr"/>
-                      <a:r>
-                        <a:rPr sz="1600" b="0" i="0">
-                          <a:solidFill>
-                            <a:srgbClr val="0F172A"/>
-                          </a:solidFill>
-                          <a:latin typeface="Arial"/>
-                        </a:rPr>
-                        <a:t>0</a:t>
-                      </a:r>
-                    </a:p>
-                  </a:txBody>
-                  <a:tcPr marL="73152" marR="73152" marT="36576" marB="36576" anchor="ctr">
-                    <a:solidFill>
-                      <a:srgbClr val="DCFCE7"/>
-                    </a:solidFill>
-                  </a:tcPr>
-                </a:tc>
-                <a:tc>
-                  <a:txBody>
-                    <a:bodyPr wrap="square"/>
-                    <a:lstStyle/>
-                    <a:p>
-                      <a:pPr algn="ctr"/>
-                      <a:r>
-                        <a:rPr sz="1600" b="1" i="0">
-                          <a:solidFill>
-                            <a:srgbClr val="0F172A"/>
-                          </a:solidFill>
-                          <a:latin typeface="Arial"/>
-                        </a:rPr>
-                        <a:t>$0</a:t>
-                      </a:r>
-                    </a:p>
-                  </a:txBody>
-                  <a:tcPr marL="73152" marR="73152" marT="36576" marB="36576" anchor="ctr">
-                    <a:solidFill>
-                      <a:srgbClr val="DCFCE7"/>
-                    </a:solidFill>
-                  </a:tcPr>
-                </a:tc>
-              </a:tr>
-              <a:tr h="603504">
-                <a:tc>
-                  <a:txBody>
-                    <a:bodyPr wrap="square"/>
-                    <a:lstStyle/>
-                    <a:p>
-                      <a:pPr algn="l"/>
-                      <a:r>
-                        <a:rPr sz="1600" b="0" i="0">
-                          <a:solidFill>
-                            <a:srgbClr val="0F172A"/>
-                          </a:solidFill>
-                          <a:latin typeface="Arial"/>
-                        </a:rPr>
-                        <a:t>Full agent</a:t>
-                      </a:r>
-                    </a:p>
-                  </a:txBody>
-                  <a:tcPr marL="73152" marR="73152" marT="36576" marB="36576" anchor="ctr">
-                    <a:solidFill>
-                      <a:srgbClr val="FFFFFF"/>
-                    </a:solidFill>
-                  </a:tcPr>
-                </a:tc>
-                <a:tc>
-                  <a:txBody>
-                    <a:bodyPr wrap="square"/>
-                    <a:lstStyle/>
-                    <a:p>
-                      <a:pPr algn="ctr"/>
-                      <a:r>
-                        <a:rPr sz="1600" b="0" i="0">
-                          <a:solidFill>
-                            <a:srgbClr val="0F172A"/>
-                          </a:solidFill>
-                          <a:latin typeface="Arial"/>
-                        </a:rPr>
-                        <a:t>157</a:t>
-                      </a:r>
-                    </a:p>
-                  </a:txBody>
-                  <a:tcPr marL="73152" marR="73152" marT="36576" marB="36576" anchor="ctr">
-                    <a:solidFill>
-                      <a:srgbClr val="FFFFFF"/>
-                    </a:solidFill>
-                  </a:tcPr>
-                </a:tc>
-                <a:tc>
-                  <a:txBody>
-                    <a:bodyPr wrap="square"/>
-                    <a:lstStyle/>
-                    <a:p>
-                      <a:pPr algn="ctr"/>
-                      <a:r>
-                        <a:rPr sz="1600" b="0" i="0">
-                          <a:solidFill>
-                            <a:srgbClr val="0F172A"/>
-                          </a:solidFill>
-                          <a:latin typeface="Arial"/>
-                        </a:rPr>
-                        <a:t>−$25 [−$569 to +$564]</a:t>
-                      </a:r>
-                    </a:p>
-                  </a:txBody>
-                  <a:tcPr marL="73152" marR="73152" marT="36576" marB="36576" anchor="ctr">
-                    <a:solidFill>
-                      <a:srgbClr val="FFFFFF"/>
-                    </a:solidFill>
-                  </a:tcPr>
-                </a:tc>
-              </a:tr>
-              <a:tr h="603504">
-                <a:tc>
-                  <a:txBody>
-                    <a:bodyPr wrap="square"/>
-                    <a:lstStyle/>
-                    <a:p>
-                      <a:pPr algn="l"/>
-                      <a:r>
-                        <a:rPr sz="1600" b="0" i="0">
-                          <a:solidFill>
-                            <a:srgbClr val="0F172A"/>
-                          </a:solidFill>
-                          <a:latin typeface="Arial"/>
-                        </a:rPr>
-                        <a:t>No learning</a:t>
-                      </a:r>
-                    </a:p>
-                  </a:txBody>
-                  <a:tcPr marL="73152" marR="73152" marT="36576" marB="36576" anchor="ctr">
-                    <a:solidFill>
-                      <a:srgbClr val="F1F5F9"/>
-                    </a:solidFill>
-                  </a:tcPr>
-                </a:tc>
-                <a:tc>
-                  <a:txBody>
-                    <a:bodyPr wrap="square"/>
-                    <a:lstStyle/>
-                    <a:p>
-                      <a:pPr algn="ctr"/>
-                      <a:r>
-                        <a:rPr sz="1600" b="0" i="0">
-                          <a:solidFill>
-                            <a:srgbClr val="0F172A"/>
-                          </a:solidFill>
-                          <a:latin typeface="Arial"/>
-                        </a:rPr>
-                        <a:t>276</a:t>
-                      </a:r>
-                    </a:p>
-                  </a:txBody>
-                  <a:tcPr marL="73152" marR="73152" marT="36576" marB="36576" anchor="ctr">
-                    <a:solidFill>
-                      <a:srgbClr val="F1F5F9"/>
-                    </a:solidFill>
-                  </a:tcPr>
-                </a:tc>
-                <a:tc>
-                  <a:txBody>
-                    <a:bodyPr wrap="square"/>
-                    <a:lstStyle/>
-                    <a:p>
-                      <a:pPr algn="ctr"/>
-                      <a:r>
-                        <a:rPr sz="1600" b="0" i="0">
-                          <a:solidFill>
-                            <a:srgbClr val="0F172A"/>
-                          </a:solidFill>
-                          <a:latin typeface="Arial"/>
-                        </a:rPr>
-                        <a:t>−$407 [−$1,324 to +$553]</a:t>
-                      </a:r>
-                    </a:p>
-                  </a:txBody>
-                  <a:tcPr marL="73152" marR="73152" marT="36576" marB="36576" anchor="ctr">
-                    <a:solidFill>
-                      <a:srgbClr val="F1F5F9"/>
-                    </a:solidFill>
-                  </a:tcPr>
-                </a:tc>
-              </a:tr>
-              <a:tr h="603504">
-                <a:tc>
-                  <a:txBody>
-                    <a:bodyPr wrap="square"/>
-                    <a:lstStyle/>
-                    <a:p>
-                      <a:pPr algn="l"/>
-                      <a:r>
-                        <a:rPr sz="1600" b="0" i="0">
-                          <a:solidFill>
-                            <a:srgbClr val="0F172A"/>
-                          </a:solidFill>
-                          <a:latin typeface="Arial"/>
-                        </a:rPr>
-                        <a:t>Raw model</a:t>
-                      </a:r>
-                    </a:p>
-                  </a:txBody>
-                  <a:tcPr marL="73152" marR="73152" marT="36576" marB="36576" anchor="ctr">
-                    <a:solidFill>
-                      <a:srgbClr val="FFFFFF"/>
-                    </a:solidFill>
-                  </a:tcPr>
-                </a:tc>
-                <a:tc>
-                  <a:txBody>
-                    <a:bodyPr wrap="square"/>
-                    <a:lstStyle/>
-                    <a:p>
-                      <a:pPr algn="ctr"/>
-                      <a:r>
-                        <a:rPr sz="1600" b="0" i="0">
-                          <a:solidFill>
-                            <a:srgbClr val="0F172A"/>
-                          </a:solidFill>
-                          <a:latin typeface="Arial"/>
-                        </a:rPr>
-                        <a:t>711</a:t>
-                      </a:r>
-                    </a:p>
-                  </a:txBody>
-                  <a:tcPr marL="73152" marR="73152" marT="36576" marB="36576" anchor="ctr">
-                    <a:solidFill>
-                      <a:srgbClr val="FFFFFF"/>
-                    </a:solidFill>
-                  </a:tcPr>
-                </a:tc>
-                <a:tc>
-                  <a:txBody>
-                    <a:bodyPr wrap="square"/>
-                    <a:lstStyle/>
-                    <a:p>
-                      <a:pPr algn="ctr"/>
-                      <a:r>
-                        <a:rPr sz="1600" b="0" i="0">
-                          <a:solidFill>
-                            <a:srgbClr val="0F172A"/>
-                          </a:solidFill>
-                          <a:latin typeface="Arial"/>
-                        </a:rPr>
-                        <a:t>−$2,475 [−$3,995 to −$845]</a:t>
-                      </a:r>
-                    </a:p>
-                  </a:txBody>
-                  <a:tcPr marL="73152" marR="73152" marT="36576" marB="36576" anchor="ctr">
-                    <a:solidFill>
-                      <a:srgbClr val="FFFFFF"/>
-                    </a:solidFill>
-                  </a:tcPr>
-                </a:tc>
-              </a:tr>
-            </a:tbl>
-          </a:graphicData>
-        </a:graphic>
-      </p:graphicFrame>
-      <p:sp>
-        <p:nvSpPr>
-          <p:cNvPr id="9" name="TextBox 8"/>
+      <p:sp>
+        <p:nvSpPr>
+          <p:cNvPr id="8" name="TextBox 7"/>
           <p:cNvSpPr txBox="1"/>
           <p:nvPr/>
         </p:nvSpPr>
         <p:spPr>
           <a:xfrm>
-            <a:off x="6537960" y="4114800"/>
-            <a:ext cx="5196535" cy="640080"/>
-          </a:xfrm>
-          <a:prstGeom prst="rect">
-            <a:avLst/>
-          </a:prstGeom>
-          <a:noFill/>
-        </p:spPr>
-        <p:txBody>
-          <a:bodyPr wrap="square" anchor="t" lIns="73152" rIns="73152" tIns="36576" bIns="36576">
-            <a:spAutoFit/>
-          </a:bodyPr>
-          <a:lstStyle/>
-          <a:p>
-            <a:pPr algn="l">
-              <a:spcAft>
-                <a:spcPts val="800"/>
-              </a:spcAft>
-            </a:pPr>
-            <a:r>
-              <a:rPr sz="1400" b="0" i="0">
-                <a:solidFill>
-                  <a:srgbClr val="64748B"/>
-                </a:solidFill>
-                <a:latin typeface="Arial"/>
-              </a:rPr>
-              <a:t>Day-clustered bootstrap; M4 retrained monthly. Chart totals include play-offs, the table does not</a:t>
-            </a:r>
-          </a:p>
-        </p:txBody>
-      </p:sp>
-      <p:sp>
-        <p:nvSpPr>
-          <p:cNvPr id="10" name="TextBox 9"/>
-          <p:cNvSpPr txBox="1"/>
-          <p:nvPr/>
-        </p:nvSpPr>
-        <p:spPr>
-          <a:xfrm>
-            <a:off x="457200" y="4663440"/>
-            <a:ext cx="11277295" cy="1691640"/>
+            <a:off x="457200" y="4526280"/>
+            <a:ext cx="11277295" cy="1298448"/>
           </a:xfrm>
           <a:prstGeom prst="rect">
             <a:avLst/>
@@ -13786,7 +15263,7 @@
                 </a:solidFill>
                 <a:latin typeface="Arial"/>
               </a:rPr>
-              <a:t>Mean CLV &lt; 0 for every setup; </a:t>
+              <a:t>Average error on 771 test decision times: </a:t>
             </a:r>
             <a:r>
               <a:rPr sz="1800" b="1" i="0">
@@ -13795,7 +15272,34 @@
                 </a:solidFill>
                 <a:latin typeface="Arial"/>
               </a:rPr>
-              <a:t>every 95% CI entirely below zero</a:t>
+              <a:t>M6 0.867¢</a:t>
+            </a:r>
+            <a:r>
+              <a:rPr sz="1800" b="0" i="0">
+                <a:solidFill>
+                  <a:srgbClr val="0F172A"/>
+                </a:solidFill>
+                <a:latin typeface="Arial"/>
+              </a:rPr>
+              <a:t> vs “price won't move” </a:t>
+            </a:r>
+            <a:r>
+              <a:rPr sz="1800" b="1" i="0">
+                <a:solidFill>
+                  <a:srgbClr val="0F172A"/>
+                </a:solidFill>
+                <a:latin typeface="Arial"/>
+              </a:rPr>
+              <a:t>0.833¢</a:t>
+            </a:r>
+            <a:r>
+              <a:rPr sz="1800" b="0" i="0">
+                <a:solidFill>
+                  <a:srgbClr val="0F172A"/>
+                </a:solidFill>
+                <a:latin typeface="Arial"/>
+              </a:rPr>
+              <a:t>; R² ≈ 0 on test and holdout</a:t>
             </a:r>
           </a:p>
           <a:p>
@@ -13812,15 +15316,83 @@
                 </a:solidFill>
                 <a:latin typeface="Arial"/>
               </a:rPr>
-              <a:t>Market anchor is real: +$2,450 vs raw model (p = 0.002); learning = trading less (p = 0.13)</a:t>
-            </a:r>
-          </a:p>
-          <a:p>
-            <a:pPr algn="l" marL="292608" indent="-256032">
+              <a:t>After the list, the price moves ~2.5% of the model's implied shift (coefficient 0.025); M6 agent: 0 trades. Forced: 501 trades, −$652</a:t>
+            </a:r>
+          </a:p>
+        </p:txBody>
+      </p:sp>
+      <p:sp>
+        <p:nvSpPr>
+          <p:cNvPr id="9" name="Rounded Rectangle 8"/>
+          <p:cNvSpPr/>
+          <p:nvPr/>
+        </p:nvSpPr>
+        <p:spPr>
+          <a:xfrm>
+            <a:off x="457200" y="5870448"/>
+            <a:ext cx="11277295" cy="457200"/>
+          </a:xfrm>
+          <a:prstGeom prst="roundRect">
+            <a:avLst>
+              <a:gd name="adj" fmla="val 12000"/>
+            </a:avLst>
+          </a:prstGeom>
+          <a:solidFill>
+            <a:srgbClr val="FEF3C7"/>
+          </a:solidFill>
+          <a:ln>
+            <a:noFill/>
+          </a:ln>
+          <a:effectLst/>
+        </p:spPr>
+        <p:style>
+          <a:lnRef idx="1">
+            <a:schemeClr val="accent1"/>
+          </a:lnRef>
+          <a:fillRef idx="3">
+            <a:schemeClr val="accent1"/>
+          </a:fillRef>
+          <a:effectRef idx="2">
+            <a:schemeClr val="accent1"/>
+          </a:effectRef>
+          <a:fontRef idx="minor">
+            <a:schemeClr val="lt1"/>
+          </a:fontRef>
+        </p:style>
+        <p:txBody>
+          <a:bodyPr rtlCol="0" anchor="ctr"/>
+          <a:lstStyle/>
+          <a:p>
+            <a:pPr algn="ctr"/>
+          </a:p>
+        </p:txBody>
+      </p:sp>
+      <p:sp>
+        <p:nvSpPr>
+          <p:cNvPr id="10" name="TextBox 9"/>
+          <p:cNvSpPr txBox="1"/>
+          <p:nvPr/>
+        </p:nvSpPr>
+        <p:spPr>
+          <a:xfrm>
+            <a:off x="548640" y="5870448"/>
+            <a:ext cx="11094415" cy="457200"/>
+          </a:xfrm>
+          <a:prstGeom prst="rect">
+            <a:avLst/>
+          </a:prstGeom>
+          <a:noFill/>
+        </p:spPr>
+        <p:txBody>
+          <a:bodyPr wrap="square" anchor="ctr" lIns="73152" rIns="73152" tIns="36576" bIns="36576">
+            <a:spAutoFit/>
+          </a:bodyPr>
+          <a:lstStyle/>
+          <a:p>
+            <a:pPr algn="l">
               <a:spcAft>
-                <a:spcPts val="400"/>
+                <a:spcPts val="0"/>
               </a:spcAft>
-              <a:buChar char="•"/>
             </a:pPr>
             <a:r>
               <a:rPr sz="1800" b="0" i="0">
@@ -13829,7 +15401,7 @@
                 </a:solidFill>
                 <a:latin typeface="Arial"/>
               </a:rPr>
-              <a:t>Play-off holdout (87 games): full agent 0 trades; no learning 6 trades, −$74; raw model +$450 with negative CLV (luck)</a:t>
+              <a:t>The price already contains the public information; the consumer is left paying costs</a:t>
             </a:r>
           </a:p>
         </p:txBody>

--- a/presentation/nba_agent_deck.pptx
+++ b/presentation/nba_agent_deck.pptx
@@ -20,8 +20,6 @@
     <p:sldId id="268" r:id="rId20"/>
     <p:sldId id="269" r:id="rId21"/>
     <p:sldId id="270" r:id="rId22"/>
-    <p:sldId id="271" r:id="rId23"/>
-    <p:sldId id="272" r:id="rId24"/>
   </p:sldIdLst>
   <p:sldSz cx="12191695" cy="6858000" type="screen4x3"/>
   <p:notesSz cx="6858000" cy="9144000"/>
@@ -518,7 +516,7 @@
           <a:lstStyle/>
           <a:p>
             <a:r>
-              <a:t>Good morning, we are Group 12. Our project starts from a consumer problem: sports betting and prediction markets are now everywhere, people want to understand them, the markets are structurally tilted against them, and betting harms well-being. We built an AI agent to test how tilted the game is, and turned what we learned into a product that educates and protects.</a:t>
+              <a:t>Good morning, we are Group 12. Our title is Market-Graded Learning, and it is also our thesis. We built an AI agent that trades NBA prediction markets, and we let the market's closing price grade every part of it: the models, the learned rules and the LLM. The finding is that only the parts that defer to the market survive. If a disciplined agent cannot beat the close, a consumer cannot either, so our product educates and protects instead of giving tips.</a:t>
             </a:r>
           </a:p>
         </p:txBody>
@@ -588,7 +586,7 @@
           <a:lstStyle/>
           <a:p>
             <a:r>
-              <a:t>Here is the money over time, after fees, one line per strategy; the dashed black line at zero is never trading. Left is the February-to-April test period, right the walk-forward season. Read it like this. The red raw model, which trades whenever its estimate differs from the price, falls steadily: −$2,087 on 366 trades in the test period, −$2,475 over the season. That steady slope is costs: every trade pays the spread and the fee, and there is no edge to pay them back. Orange, the agent without learning, trades less and falls less, −$247. Blue, the full agent, learned rules that mostly say do not trade, so its line flattens near zero, −$32, after dipping to −$131. The M6 agent made no trades, so it sits on zero. Learning does not find profit; it flattens the line by trading less. The dotted lines are closing-line value: below zero for everyone, so the agent paid worse than the closing price. No strategy ends above never trading; the next slide tests whether the gaps are more than luck.</a:t>
+              <a:t>Money over time, after fees; the dashed line at zero is never trading. The red raw model falls steadily, −$2,087 in the test period and −$2,475 over the season: that slope is costs. The agent without learning falls less; the full agent learned rules that mostly say do not trade, so it flattens near zero. Then the honest test: walk-forward over the whole season with the win model retrained monthly and day-clustered bootstrap intervals. Mean closing-line value is below zero for every setup. The full agent's −$25 is indistinguishable from never trading, p 0.53. The market anchor is real, +$2,450, p 0.002; learning only means trading less. On the play-off holdout the full agent made no trades.</a:t>
             </a:r>
           </a:p>
         </p:txBody>
@@ -658,7 +656,7 @@
           <a:lstStyle/>
           <a:p>
             <a:r>
-              <a:t>Finally, the honest test. We re-ran the whole season walk-forward, retraining the win model every month, with day-clustered bootstrap confidence intervals. Mean closing-line value is below zero for every setup, and every interval lies entirely below zero. The full agent's −$25 is indistinguishable from never trading, p 0.53; the raw model loses −$2,475. The market anchor is a real improvement, +$2,450 with p 0.002, but learning only means trading less. On the play-off holdout the full agent made no trades at all.</a:t>
+              <a:t>We then made the agent more agentic, and graded each upgrade the same way, pre-registered before scoring. An LLM tool agent chooses its own as-of tools, with code checking every number and a sceptic asking whether the edge is already priced in. We audited the rule gate against placebo rules, enforced a daily kill switch, tried fractional Kelly sizing, tested the Coach on simulated users, joined pregame, trader and coach under one orchestrator, and tried a learned trade-or-pass policy, a rule language for LLM-written rules, and episodic memory. Results so far: none yet. 9 of 9 are still pending at build time.</a:t>
             </a:r>
           </a:p>
         </p:txBody>
@@ -728,7 +726,7 @@
           <a:lstStyle/>
           <a:p>
             <a:r>
-              <a:t>So, back to the problem: the product educates and protects instead of encouraging bets. The agent passes by default: it declined about 90% of decision points, and on the play-off holdout it did not trade at all. Retail briefs show the bid and ask next to our estimate, and when there is no order they say why. The Coach shows the full break-even after spread and fee, and the League lets people practise with play money. Risk limits and banned words are code the LLM cannot override; all 9 / 9 planted violations were blocked. Even the learned rules ended up protective.</a:t>
+              <a:t>So the product educates and protects instead of encouraging bets. Protect: the agent passes by default, about 90% of decision points, and says why; risk limits and banned words are code the LLM cannot override, and all 9 / 9 planted violations were blocked. Teach: the Coach explains a game with only what was public and shows the break-even after spread and fee. Practise: the League gives everyone the same 10 real past decisions and $1,000 of play money, and ranks on closing-line value, not profit. In our example league the raw-model bot is up +$15 with negative CLV, and the badge says costs, not skill.</a:t>
             </a:r>
           </a:p>
         </p:txBody>
@@ -798,7 +796,7 @@
           <a:lstStyle/>
           <a:p>
             <a:r>
-              <a:t>The Coach turns this evidence into lessons. At a chosen moment it explains the game using only what was public and shows the break-even after spread and fee. Lesson cards appear when relevant: price is a probability, costs move your break-even, news may be priced in, long shots look cheap. Users make a paper call and see the close and what the agent did. Paper money only.</a:t>
+              <a:t>The work is split across the team. The pregame news loop polls several news sources before a game and turns them into fair odds, pull request 7. The player-feature experiment tested isolated player features and probability calibration, pull request 8. In-play news and odds updates are pull request 9. Live, read-only Polymarket prices are pull requests 11 and 12. The replay, the agent, the models M4 and M6, the evaluation, the Coach and the League are on our main branch. Each part had to face the same market grade.</a:t>
             </a:r>
           </a:p>
         </p:txBody>
@@ -868,7 +866,7 @@
           <a:lstStyle/>
           <a:p>
             <a:r>
-              <a:t>The Coach teaches; the League lets people practise, with the fun but without the harm. Everyone gets the same 10 real past decisions and $1,000 of play money, sees only what was public, and backs a team or passes. Orders fill at the ask plus fee, then the close and result are revealed. We rank on closing-line value, not profit, with a skill-or-luck badge from our bootstrap; house bots play the same slate. Here a user beat the close and still lost, while the raw-model bot is up $15 with negative CLV: costs, not skill.</a:t>
+              <a:t>Now the demo, focused on protection. On the replayed night, watch the agent see the news, compare its estimate with the bid and ask, and usually decline with a reason. In the Coach, I'll make a paper call and compare it with the close. In the League tab I'll make one call on the shared slate, watch the closing line and result being revealed, and show the leaderboard ranked by closing-line value next to the house bots. Then a quick look at the learned rules and planted violations being blocked. If anything fails, we have a backup recording.</a:t>
             </a:r>
           </a:p>
         </p:txBody>
@@ -938,147 +936,7 @@
           <a:lstStyle/>
           <a:p>
             <a:r>
-              <a:t>To be precise: unfair here means structural disadvantages, namely costs, speed and expertise. It does not mean manipulation or fraud, and we make no accusation against Kalshi. One disclosure: we designed the market anchor and the reviewer after seeing the first February-to-April results, so that window is not a clean holdout. That is why the walk-forward season and the untouched play-off holdout are our headline tests. The data limits are on slide 5; beyond those, long-shot bias was not clearly supported in our data. The well-being numbers on the problem slide are published research, not our measurement.</a:t>
-            </a:r>
-          </a:p>
-        </p:txBody>
-      </p:sp>
-      <p:sp>
-        <p:nvSpPr>
-          <p:cNvPr id="4" name="Slide Number Placeholder 3"/>
-          <p:cNvSpPr>
-            <a:spLocks noGrp="1"/>
-          </p:cNvSpPr>
-          <p:nvPr>
-            <p:ph type="sldNum" idx="5" sz="quarter"/>
-          </p:nvPr>
-        </p:nvSpPr>
-        <p:spPr/>
-      </p:sp>
-    </p:spTree>
-  </p:cSld>
-  <p:clrMapOvr>
-    <a:masterClrMapping/>
-  </p:clrMapOvr>
-</p:notes>
-</file>
-
-<file path=ppt/notesSlides/notesSlide16.xml><?xml version="1.0" encoding="utf-8"?>
-<p:notes xmlns:a="http://schemas.openxmlformats.org/drawingml/2006/main" xmlns:p="http://schemas.openxmlformats.org/presentationml/2006/main" xmlns:r="http://schemas.openxmlformats.org/officeDocument/2006/relationships">
-  <p:cSld>
-    <p:spTree>
-      <p:nvGrpSpPr>
-        <p:cNvPr id="1" name=""/>
-        <p:cNvGrpSpPr/>
-        <p:nvPr/>
-      </p:nvGrpSpPr>
-      <p:grpSpPr>
-        <a:xfrm>
-          <a:off x="0" y="0"/>
-          <a:ext cx="0" cy="0"/>
-          <a:chOff x="0" y="0"/>
-          <a:chExt cx="0" cy="0"/>
-        </a:xfrm>
-      </p:grpSpPr>
-      <p:sp>
-        <p:nvSpPr>
-          <p:cNvPr id="2" name="Slide Image Placeholder 1"/>
-          <p:cNvSpPr>
-            <a:spLocks noGrp="1"/>
-          </p:cNvSpPr>
-          <p:nvPr>
-            <p:ph type="sldImg" idx="2"/>
-          </p:nvPr>
-        </p:nvSpPr>
-        <p:spPr/>
-      </p:sp>
-      <p:sp>
-        <p:nvSpPr>
-          <p:cNvPr id="3" name="Notes Placeholder 2"/>
-          <p:cNvSpPr>
-            <a:spLocks noGrp="1"/>
-          </p:cNvSpPr>
-          <p:nvPr>
-            <p:ph type="body" idx="3" sz="quarter"/>
-          </p:nvPr>
-        </p:nvSpPr>
-        <p:spPr/>
-        <p:txBody>
-          <a:bodyPr/>
-          <a:lstStyle/>
-          <a:p>
-            <a:r>
-              <a:t>Now the demo, focused on protection. On the replayed night, watch the agent see the news, compare its estimate with the bid and ask, and usually decline with a reason. In the Coach, I'll make a paper call and compare it with the close. In the League tab I'll join a league, make one call on the shared slate, watch the closing line and result being revealed, and show the leaderboard ranked by closing-line value next to the house bots. Then a quick look at the learned rules and planted violations being blocked. If anything fails, we have a backup recording.</a:t>
-            </a:r>
-          </a:p>
-        </p:txBody>
-      </p:sp>
-      <p:sp>
-        <p:nvSpPr>
-          <p:cNvPr id="4" name="Slide Number Placeholder 3"/>
-          <p:cNvSpPr>
-            <a:spLocks noGrp="1"/>
-          </p:cNvSpPr>
-          <p:nvPr>
-            <p:ph type="sldNum" idx="5" sz="quarter"/>
-          </p:nvPr>
-        </p:nvSpPr>
-        <p:spPr/>
-      </p:sp>
-    </p:spTree>
-  </p:cSld>
-  <p:clrMapOvr>
-    <a:masterClrMapping/>
-  </p:clrMapOvr>
-</p:notes>
-</file>
-
-<file path=ppt/notesSlides/notesSlide17.xml><?xml version="1.0" encoding="utf-8"?>
-<p:notes xmlns:a="http://schemas.openxmlformats.org/drawingml/2006/main" xmlns:p="http://schemas.openxmlformats.org/presentationml/2006/main" xmlns:r="http://schemas.openxmlformats.org/officeDocument/2006/relationships">
-  <p:cSld>
-    <p:spTree>
-      <p:nvGrpSpPr>
-        <p:cNvPr id="1" name=""/>
-        <p:cNvGrpSpPr/>
-        <p:nvPr/>
-      </p:nvGrpSpPr>
-      <p:grpSpPr>
-        <a:xfrm>
-          <a:off x="0" y="0"/>
-          <a:ext cx="0" cy="0"/>
-          <a:chOff x="0" y="0"/>
-          <a:chExt cx="0" cy="0"/>
-        </a:xfrm>
-      </p:grpSpPr>
-      <p:sp>
-        <p:nvSpPr>
-          <p:cNvPr id="2" name="Slide Image Placeholder 1"/>
-          <p:cNvSpPr>
-            <a:spLocks noGrp="1"/>
-          </p:cNvSpPr>
-          <p:nvPr>
-            <p:ph type="sldImg" idx="2"/>
-          </p:nvPr>
-        </p:nvSpPr>
-        <p:spPr/>
-      </p:sp>
-      <p:sp>
-        <p:nvSpPr>
-          <p:cNvPr id="3" name="Notes Placeholder 2"/>
-          <p:cNvSpPr>
-            <a:spLocks noGrp="1"/>
-          </p:cNvSpPr>
-          <p:nvPr>
-            <p:ph type="body" idx="3" sz="quarter"/>
-          </p:nvPr>
-        </p:nvSpPr>
-        <p:spPr/>
-        <p:txBody>
-          <a:bodyPr/>
-          <a:lstStyle/>
-          <a:p>
-            <a:r>
-              <a:t>Our recommendations follow from the evidence. Before any order, show the all-in cost and the break-even probability, not just the price. Warn by default when news is likely already priced in. Put education, like our Coach, and play-money practice, like our League, in front of the first trade, and, as the Lancet Commission argues, treat betting harm as a public-health issue. For our own work: enforce a daily-loss stop, use timestamped injury reports, and extend to player-prop markets. Thank you, we are happy to take questions.</a:t>
+              <a:t>Our recommendations follow from the evidence. Before any order, show the all-in cost and the break-even probability. Warn by default when news is likely already priced in. Put education and play-money practice in front of the first trade, and treat betting harm as a public-health issue, as the Lancet Commission argues. Honest scope: unfair here means structural disadvantages, costs, speed and expertise, not manipulation or fraud, and we make no accusation against Kalshi. We designed the market anchor and the reviewer after seeing the first February-to-April results, so the walk-forward season and the play-off holdout are our headline tests. Thank you, we are happy to take questions.</a:t>
             </a:r>
           </a:p>
         </p:txBody>
@@ -1148,7 +1006,7 @@
           <a:lstStyle/>
           <a:p>
             <a:r>
-              <a:t>Three parts. First, consumers want to learn: since a 2018 US Supreme Court ruling, 38 US states have legalised sports betting, and the Lancet Public Health Commission estimates 46% of adults worldwide gambled in the past year, yet few users understand how prices, fees and spreads work. Second, the markets are structurally unfair, which is what we measured: about 5.0% cost per trade, 91% of the price move before the public news, the market beats our model, and never trading wins. Third, external research shows betting harms well-being: the Commission estimates 80M adults have gambling disorder or problem gambling; Hollenbeck, Larsen and Proserpio find legal online betting lowers credit scores by 2.75 points and raises bankruptcies by about 10%; Baker and co-authors find each dollar of online betting cuts investment by about $0.99. References: Wardle H. et al., The Lancet Public Health Commission on gambling, Lancet Public Health 2024; 9: e950–94. Hollenbeck B., Larsen P., Proserpio D., The Financial Consequences of Legalized Sports Gambling, SSRN 4903302, 2024, revised 2025. Baker S.R., Balthrop J., Johnson M.J., Kotter J.D., Pisciotta K., Gambling Away Stability: Sports Betting's Impact on Vulnerable Households, NBER Working Paper 33108, 2024.</a:t>
+              <a:t>Three parts. First, consumers want to learn: since 2018, 38 US states have legalised sports betting, and the Lancet Public Health Commission estimates 46% of adults worldwide gambled last year. Second, the markets are structurally tilted, which is what we measured: about 5.0% cost per trade, 91% of the price move before the public news, and the market beats our model. Third, published research shows harm: about 80M adults with gambling disorder; online betting lowers credit scores by 2.75 points and raises bankruptcies by about 10%; each dollar of online betting cuts investment by about $0.99. References: Wardle et al., Lancet Public Health 2024; Hollenbeck, Larsen and Proserpio, SSRN 4903302; Baker et al., NBER WP 33108.</a:t>
             </a:r>
           </a:p>
         </p:txBody>
@@ -1218,7 +1076,7 @@
           <a:lstStyle/>
           <a:p>
             <a:r>
-              <a:t>So our research question: can a consumer, even one armed with an AI agent and public news, beat the market? We built the strongest consumer we could: public news, trained models including a neural net trained on the market's own moves, an LLM-capable agent with code risk limits and gated rule learning. On the right, a replay walks the season day by day, shows the agent only what was public, and fills every order at the recorded ask plus the Kalshi fee, so we measure what a consumer would face. The answer, tested with confidence intervals, is no: never trading wins. So the product educates and protects.</a:t>
+              <a:t>Our research question: can a consumer, even one armed with an AI agent and public news, beat the market? We built the strongest consumer we could: public news, trained models including a neural net trained on the market's own moves, a LangGraph agent with code risk limits and gated rule learning, and an LLM tool agent. A replay walks the season day by day, shows the agent only what was public, and fills every order at the recorded ask plus the Kalshi fee. The answer, tested with confidence intervals, is no: never trading wins.</a:t>
             </a:r>
           </a:p>
         </p:txBody>
@@ -1288,7 +1146,7 @@
           <a:lstStyle/>
           <a:p>
             <a:r>
-              <a:t>Before the evidence, the data. Everything is public. From Kalshi's public API we downloaded every NBA game-winner market, series KXNBAGAME, for 2025-26: 2,632 markets on 1,316 games, and 3,938,368 one-minute rows of bid, ask and volume from 20 Oct 2025 to 14 Jun 2026, plus each market's settlement. From ESPN's public site API we took three seasons, 2023-24 to 2025-26: 3,962 games with tip times and season type, 85,422 player box-score rows for 818 players, and 3,371 inactive-list entries, which are our news. Box scores and inactive lists train the player and win models M1 to M4; prices drive the replay, costs, closing-line value, the market anchor and M6. We froze everything once as Parquet files; the raw data is not redistributed in the repo, and two commands rebuild it.</a:t>
+              <a:t>This is what the title means. Every component is a hypothesis that must pass an evidence gate on recorded prices, and the grader is the market's closing price. The raw win model fails: −$2,475 over the season, and recalibrating it does not help. The neural impact model fails: all 9 configurations are worse than predicting no move. What passes defers to the market: the market anchor, +$2,450 with p 0.002, and gated learning, which passes only by trading less. The newer agentic parts face the same gate; slide 11. So the finding is the product: if a disciplined agent cannot beat the close, a consumer cannot either. We say “we pass” as often as “we trade”.</a:t>
             </a:r>
           </a:p>
         </p:txBody>
@@ -1358,7 +1216,7 @@
           <a:lstStyle/>
           <a:p>
             <a:r>
-              <a:t>How the data is split in time. The win and player models train on two earlier seasons plus 2025-26 up to 31 January. The agent develops its rules from November to January, and the test period is 1 February to 12 April, 501 games. The walk-forward run covers November to April and retrains the win model every month. M6 trains before 15 January and validates on 15 to 31 January. The play-in and play-off games after 12 April, 87 of them, are a holdout we scored once. The replay enforces no look-ahead: at each decision the agent sees only news, results and quotes published by then. Each inactive list counts as news 30 minutes before tip. Orders fill at the recorded ask plus the Kalshi fee, only with a quote at most 5 minutes old, and at most 10% of the last hour's volume. Limits: one season of prices, game-winner markets only, and the inactive list is our only news; it ends 7 May 2026, and we have no earlier injury reports, social media or other sportsbooks. Public information only.</a:t>
+              <a:t>The data is all public. From Kalshi: every NBA game-winner market for 2025-26, 2,632 markets on 1,316 games, 3,938,368 one-minute rows of bid, ask and volume, and settlements. From ESPN: three seasons of games, 85,422 box-score rows and 3,371 inactive-list entries, which are our news. Models train on games before 1 February; the agent develops on November to January; the test period is 1 February to 12 April, 501 games; the walk-forward retrains monthly; and the 87 play-off games are a holdout scored once. The replay shows the agent only what was public, counts each inactive list as news 30 minutes before tip, and fills at the recorded ask plus the Kalshi fee.</a:t>
             </a:r>
           </a:p>
         </p:txBody>
@@ -1428,7 +1286,7 @@
           <a:lstStyle/>
           <a:p>
             <a:r>
-              <a:t>First, costs. One hour before tip a $20 order pays half the bid-ask spread plus the Kalshi fee. On average that is 1.92 cents per contract, 5.0% of the price, and 9–14% on cheap contracts. You must beat the price by that much just to break even. On the right, our best agent would have made +$36 at the mid but lost −$32 after costs. Even being very selective, 74 trades out of 771 decision points, only 27 (36%) beat or matched the closing price.</a:t>
+              <a:t>First, costs. One hour before tip a $20 order pays half the bid-ask spread plus the Kalshi fee: 1.92 cents per contract on average, 5.0% of the price, and 9–14% on cheap contracts. Our best agent would have made +$36 at the mid but lost −$32 after costs. Even very selective, 74 trades out of 771 decision points, only 27 (36%) beat or matched the closing price.</a:t>
             </a:r>
           </a:p>
         </p:txBody>
@@ -1498,7 +1356,7 @@
           <a:lstStyle/>
           <a:p>
             <a:r>
-              <a:t>Second, speed. On the 193 test games where the inactive list changed our win model by at least a point, the price had already moved 1.80 points in the news direction before the list was public, and only 0.18 after. About 91% of the move happened before a retail user reading the list could act.</a:t>
+              <a:t>Second, speed. On the 193 test games where the inactive list moved our win model by at least a point, 91% of the price move in the news direction happened before the inactive list, which is when a retail user reading it could act. We then matched the official NBA injury reports: about two-thirds of the move, 67% with a confidence interval of 47–85%, came before the first official report listing the player out, which itself comes a median of about 6 hours before the inactive list. Assuming no publication lag the share is 49%. Official reports only; beat reporters and social media can be earlier still.</a:t>
             </a:r>
           </a:p>
         </p:txBody>
@@ -1638,7 +1496,7 @@
           <a:lstStyle/>
           <a:p>
             <a:r>
-              <a:t>Fourth, we trained M6, a neural network whose only job is to predict how the price moves between our decision time and tip-off, using the market's own past reactions. It cannot beat the simplest guess, that the price will not move: 0.867 cents average error against 0.833, and R squared about zero on both test and holdout. After the inactive list the price moves only about 2.5% of what our win model implies. The M6 agent therefore makes no trades; forced to trade, it loses −$652. The price already contains the public information; what is left for the consumer is the cost.</a:t>
+              <a:t>Our deep-learning component is M6. Its label is the market itself: the move of the home price from the decision time to tip-off, so every decision time is a training row. A 16-unit GRU reads the last six hours of the price in 15-minute steps; it is joined with 18 static features such as the anchor, the clock, M4's news shift and who is out, and an MLP outputs the 10th, 50th and 90th percentiles, trained with pinball loss. It cannot beat “the price won't move”: 0.867 against 0.833 cents. To check that this is not a tuning accident, we ran a pre-declared grid of 9 configurations, GRU sizes, history lengths, an MLP and a CNN, with 3 seeds each: every one is worse than zero move, all 18 of 18 confidence intervals above zero, and none ever predicts the 5.5¢ move needed to pay for a trade. Recalibrating the win model does not help either: Brier 0.183 raw, 0.185 Platt, 0.184 isotonic, against 0.164 for the market, because its miscalibration flips between early and late season.</a:t>
             </a:r>
           </a:p>
         </p:txBody>
@@ -4740,8 +4598,8 @@
         </p:nvSpPr>
         <p:spPr>
           <a:xfrm>
-            <a:off x="822960" y="1005840"/>
-            <a:ext cx="10545775" cy="1828800"/>
+            <a:off x="822960" y="868680"/>
+            <a:ext cx="10545775" cy="1097280"/>
           </a:xfrm>
           <a:prstGeom prst="rect">
             <a:avLst/>
@@ -4760,13 +4618,13 @@
               </a:spcAft>
             </a:pPr>
             <a:r>
-              <a:rPr sz="4400" b="1" i="0">
+              <a:rPr sz="4800" b="1" i="0">
                 <a:solidFill>
                   <a:srgbClr val="FFFFFF"/>
                 </a:solidFill>
                 <a:latin typeface="Arial"/>
               </a:rPr>
-              <a:t>Betting markets are tilted against consumers</a:t>
+              <a:t>Market-Graded Learning</a:t>
             </a:r>
           </a:p>
         </p:txBody>
@@ -4779,8 +4637,8 @@
         </p:nvSpPr>
         <p:spPr>
           <a:xfrm>
-            <a:off x="822960" y="2834640"/>
-            <a:ext cx="10545775" cy="1188720"/>
+            <a:off x="822960" y="1965960"/>
+            <a:ext cx="10545775" cy="2011680"/>
           </a:xfrm>
           <a:prstGeom prst="rect">
             <a:avLst/>
@@ -4805,7 +4663,7 @@
                 </a:solidFill>
                 <a:latin typeface="Arial"/>
               </a:rPr>
-              <a:t>An AI agent that tests it on a full NBA season, and a product that teaches it</a:t>
+              <a:t>The market's closing price grades every part of our NBA trading agent. Only the parts that defer to the market survive, so a consumer betting against it is at a structural disadvantage.</a:t>
             </a:r>
           </a:p>
         </p:txBody>
@@ -5021,7 +4879,7 @@
                 </a:solidFill>
                 <a:latin typeface="Arial"/>
               </a:rPr>
-              <a:t>Evidence 5: money over time, every line drifts down</a:t>
+              <a:t>Evidence 4: every line drifts down; never trading wins</a:t>
             </a:r>
           </a:p>
         </p:txBody>
@@ -5060,7 +4918,7 @@
                 </a:solidFill>
                 <a:latin typeface="Arial"/>
               </a:rPr>
-              <a:t>DASC7606C Group 12 · Betting markets are tilted against consumers</a:t>
+              <a:t>DASC7606C Group 12 · Market-Graded Learning: the closing price grades every component</a:t>
             </a:r>
           </a:p>
         </p:txBody>
@@ -5120,24 +4978,406 @@
         </p:blipFill>
         <p:spPr>
           <a:xfrm>
-            <a:off x="1213604" y="1097280"/>
-            <a:ext cx="9764485" cy="4206240"/>
+            <a:off x="2381097" y="1097280"/>
+            <a:ext cx="7429500" cy="3200400"/>
           </a:xfrm>
           <a:prstGeom prst="rect">
             <a:avLst/>
           </a:prstGeom>
         </p:spPr>
       </p:pic>
-      <p:sp>
-        <p:nvSpPr>
-          <p:cNvPr id="8" name="TextBox 7"/>
+      <p:graphicFrame>
+        <p:nvGraphicFramePr>
+          <p:cNvPr id="8" name="Table 7"/>
+          <p:cNvGraphicFramePr>
+            <a:graphicFrameLocks noGrp="1"/>
+          </p:cNvGraphicFramePr>
+          <p:nvPr/>
+        </p:nvGraphicFramePr>
+        <p:xfrm>
+          <a:off x="457200" y="4389120"/>
+          <a:ext cx="6400800" cy="1755648"/>
+        </p:xfrm>
+        <a:graphic>
+          <a:graphicData uri="http://schemas.openxmlformats.org/drawingml/2006/table">
+            <a:tbl>
+              <a:tblPr firstRow="1" bandRow="1">
+                <a:tableStyleId>{5C22544A-7EE6-4342-B048-85BDC9FD1C3A}</a:tableStyleId>
+              </a:tblPr>
+              <a:tblGrid>
+                <a:gridCol w="2926080"/>
+                <a:gridCol w="868680"/>
+                <a:gridCol w="2606040"/>
+              </a:tblGrid>
+              <a:tr h="365760">
+                <a:tc>
+                  <a:txBody>
+                    <a:bodyPr wrap="square"/>
+                    <a:lstStyle/>
+                    <a:p>
+                      <a:pPr algn="l"/>
+                      <a:r>
+                        <a:rPr sz="1400" b="1" i="0">
+                          <a:solidFill>
+                            <a:srgbClr val="FFFFFF"/>
+                          </a:solidFill>
+                          <a:latin typeface="Arial"/>
+                        </a:rPr>
+                        <a:t>Walk-forward, Nov – 12 Apr</a:t>
+                      </a:r>
+                    </a:p>
+                  </a:txBody>
+                  <a:tcPr marL="73152" marR="73152" marT="36576" marB="36576" anchor="ctr">
+                    <a:solidFill>
+                      <a:srgbClr val="1E293B"/>
+                    </a:solidFill>
+                  </a:tcPr>
+                </a:tc>
+                <a:tc>
+                  <a:txBody>
+                    <a:bodyPr wrap="square"/>
+                    <a:lstStyle/>
+                    <a:p>
+                      <a:pPr algn="ctr"/>
+                      <a:r>
+                        <a:rPr sz="1400" b="1" i="0">
+                          <a:solidFill>
+                            <a:srgbClr val="FFFFFF"/>
+                          </a:solidFill>
+                          <a:latin typeface="Arial"/>
+                        </a:rPr>
+                        <a:t>Trades</a:t>
+                      </a:r>
+                    </a:p>
+                  </a:txBody>
+                  <a:tcPr marL="73152" marR="73152" marT="36576" marB="36576" anchor="ctr">
+                    <a:solidFill>
+                      <a:srgbClr val="1E293B"/>
+                    </a:solidFill>
+                  </a:tcPr>
+                </a:tc>
+                <a:tc>
+                  <a:txBody>
+                    <a:bodyPr wrap="square"/>
+                    <a:lstStyle/>
+                    <a:p>
+                      <a:pPr algn="ctr"/>
+                      <a:r>
+                        <a:rPr sz="1400" b="1" i="0">
+                          <a:solidFill>
+                            <a:srgbClr val="FFFFFF"/>
+                          </a:solidFill>
+                          <a:latin typeface="Arial"/>
+                        </a:rPr>
+                        <a:t>P&amp;L after fees [95% CI]</a:t>
+                      </a:r>
+                    </a:p>
+                  </a:txBody>
+                  <a:tcPr marL="73152" marR="73152" marT="36576" marB="36576" anchor="ctr">
+                    <a:solidFill>
+                      <a:srgbClr val="1E293B"/>
+                    </a:solidFill>
+                  </a:tcPr>
+                </a:tc>
+              </a:tr>
+              <a:tr h="347472">
+                <a:tc>
+                  <a:txBody>
+                    <a:bodyPr wrap="square"/>
+                    <a:lstStyle/>
+                    <a:p>
+                      <a:pPr algn="l"/>
+                      <a:r>
+                        <a:rPr sz="1400" b="1" i="0">
+                          <a:solidFill>
+                            <a:srgbClr val="0F172A"/>
+                          </a:solidFill>
+                          <a:latin typeface="Arial"/>
+                        </a:rPr>
+                        <a:t>Never trade</a:t>
+                      </a:r>
+                    </a:p>
+                  </a:txBody>
+                  <a:tcPr marL="73152" marR="73152" marT="36576" marB="36576" anchor="ctr">
+                    <a:solidFill>
+                      <a:srgbClr val="DCFCE7"/>
+                    </a:solidFill>
+                  </a:tcPr>
+                </a:tc>
+                <a:tc>
+                  <a:txBody>
+                    <a:bodyPr wrap="square"/>
+                    <a:lstStyle/>
+                    <a:p>
+                      <a:pPr algn="ctr"/>
+                      <a:r>
+                        <a:rPr sz="1400" b="0" i="0">
+                          <a:solidFill>
+                            <a:srgbClr val="0F172A"/>
+                          </a:solidFill>
+                          <a:latin typeface="Arial"/>
+                        </a:rPr>
+                        <a:t>0</a:t>
+                      </a:r>
+                    </a:p>
+                  </a:txBody>
+                  <a:tcPr marL="73152" marR="73152" marT="36576" marB="36576" anchor="ctr">
+                    <a:solidFill>
+                      <a:srgbClr val="DCFCE7"/>
+                    </a:solidFill>
+                  </a:tcPr>
+                </a:tc>
+                <a:tc>
+                  <a:txBody>
+                    <a:bodyPr wrap="square"/>
+                    <a:lstStyle/>
+                    <a:p>
+                      <a:pPr algn="ctr"/>
+                      <a:r>
+                        <a:rPr sz="1400" b="1" i="0">
+                          <a:solidFill>
+                            <a:srgbClr val="0F172A"/>
+                          </a:solidFill>
+                          <a:latin typeface="Arial"/>
+                        </a:rPr>
+                        <a:t>$0</a:t>
+                      </a:r>
+                    </a:p>
+                  </a:txBody>
+                  <a:tcPr marL="73152" marR="73152" marT="36576" marB="36576" anchor="ctr">
+                    <a:solidFill>
+                      <a:srgbClr val="DCFCE7"/>
+                    </a:solidFill>
+                  </a:tcPr>
+                </a:tc>
+              </a:tr>
+              <a:tr h="347472">
+                <a:tc>
+                  <a:txBody>
+                    <a:bodyPr wrap="square"/>
+                    <a:lstStyle/>
+                    <a:p>
+                      <a:pPr algn="l"/>
+                      <a:r>
+                        <a:rPr sz="1400" b="0" i="0">
+                          <a:solidFill>
+                            <a:srgbClr val="0F172A"/>
+                          </a:solidFill>
+                          <a:latin typeface="Arial"/>
+                        </a:rPr>
+                        <a:t>Full agent: anchor + learning</a:t>
+                      </a:r>
+                    </a:p>
+                  </a:txBody>
+                  <a:tcPr marL="73152" marR="73152" marT="36576" marB="36576" anchor="ctr">
+                    <a:solidFill>
+                      <a:srgbClr val="FFFFFF"/>
+                    </a:solidFill>
+                  </a:tcPr>
+                </a:tc>
+                <a:tc>
+                  <a:txBody>
+                    <a:bodyPr wrap="square"/>
+                    <a:lstStyle/>
+                    <a:p>
+                      <a:pPr algn="ctr"/>
+                      <a:r>
+                        <a:rPr sz="1400" b="0" i="0">
+                          <a:solidFill>
+                            <a:srgbClr val="0F172A"/>
+                          </a:solidFill>
+                          <a:latin typeface="Arial"/>
+                        </a:rPr>
+                        <a:t>157</a:t>
+                      </a:r>
+                    </a:p>
+                  </a:txBody>
+                  <a:tcPr marL="73152" marR="73152" marT="36576" marB="36576" anchor="ctr">
+                    <a:solidFill>
+                      <a:srgbClr val="FFFFFF"/>
+                    </a:solidFill>
+                  </a:tcPr>
+                </a:tc>
+                <a:tc>
+                  <a:txBody>
+                    <a:bodyPr wrap="square"/>
+                    <a:lstStyle/>
+                    <a:p>
+                      <a:pPr algn="ctr"/>
+                      <a:r>
+                        <a:rPr sz="1400" b="0" i="0">
+                          <a:solidFill>
+                            <a:srgbClr val="0F172A"/>
+                          </a:solidFill>
+                          <a:latin typeface="Arial"/>
+                        </a:rPr>
+                        <a:t>−$25 [−$569 to +$564]</a:t>
+                      </a:r>
+                    </a:p>
+                  </a:txBody>
+                  <a:tcPr marL="73152" marR="73152" marT="36576" marB="36576" anchor="ctr">
+                    <a:solidFill>
+                      <a:srgbClr val="FFFFFF"/>
+                    </a:solidFill>
+                  </a:tcPr>
+                </a:tc>
+              </a:tr>
+              <a:tr h="347472">
+                <a:tc>
+                  <a:txBody>
+                    <a:bodyPr wrap="square"/>
+                    <a:lstStyle/>
+                    <a:p>
+                      <a:pPr algn="l"/>
+                      <a:r>
+                        <a:rPr sz="1400" b="0" i="0">
+                          <a:solidFill>
+                            <a:srgbClr val="0F172A"/>
+                          </a:solidFill>
+                          <a:latin typeface="Arial"/>
+                        </a:rPr>
+                        <a:t>Anchor, no learning</a:t>
+                      </a:r>
+                    </a:p>
+                  </a:txBody>
+                  <a:tcPr marL="73152" marR="73152" marT="36576" marB="36576" anchor="ctr">
+                    <a:solidFill>
+                      <a:srgbClr val="F1F5F9"/>
+                    </a:solidFill>
+                  </a:tcPr>
+                </a:tc>
+                <a:tc>
+                  <a:txBody>
+                    <a:bodyPr wrap="square"/>
+                    <a:lstStyle/>
+                    <a:p>
+                      <a:pPr algn="ctr"/>
+                      <a:r>
+                        <a:rPr sz="1400" b="0" i="0">
+                          <a:solidFill>
+                            <a:srgbClr val="0F172A"/>
+                          </a:solidFill>
+                          <a:latin typeface="Arial"/>
+                        </a:rPr>
+                        <a:t>276</a:t>
+                      </a:r>
+                    </a:p>
+                  </a:txBody>
+                  <a:tcPr marL="73152" marR="73152" marT="36576" marB="36576" anchor="ctr">
+                    <a:solidFill>
+                      <a:srgbClr val="F1F5F9"/>
+                    </a:solidFill>
+                  </a:tcPr>
+                </a:tc>
+                <a:tc>
+                  <a:txBody>
+                    <a:bodyPr wrap="square"/>
+                    <a:lstStyle/>
+                    <a:p>
+                      <a:pPr algn="ctr"/>
+                      <a:r>
+                        <a:rPr sz="1400" b="0" i="0">
+                          <a:solidFill>
+                            <a:srgbClr val="0F172A"/>
+                          </a:solidFill>
+                          <a:latin typeface="Arial"/>
+                        </a:rPr>
+                        <a:t>−$407 [−$1,324 to +$553]</a:t>
+                      </a:r>
+                    </a:p>
+                  </a:txBody>
+                  <a:tcPr marL="73152" marR="73152" marT="36576" marB="36576" anchor="ctr">
+                    <a:solidFill>
+                      <a:srgbClr val="F1F5F9"/>
+                    </a:solidFill>
+                  </a:tcPr>
+                </a:tc>
+              </a:tr>
+              <a:tr h="347472">
+                <a:tc>
+                  <a:txBody>
+                    <a:bodyPr wrap="square"/>
+                    <a:lstStyle/>
+                    <a:p>
+                      <a:pPr algn="l"/>
+                      <a:r>
+                        <a:rPr sz="1400" b="0" i="0">
+                          <a:solidFill>
+                            <a:srgbClr val="0F172A"/>
+                          </a:solidFill>
+                          <a:latin typeface="Arial"/>
+                        </a:rPr>
+                        <a:t>Raw model</a:t>
+                      </a:r>
+                    </a:p>
+                  </a:txBody>
+                  <a:tcPr marL="73152" marR="73152" marT="36576" marB="36576" anchor="ctr">
+                    <a:solidFill>
+                      <a:srgbClr val="FFFFFF"/>
+                    </a:solidFill>
+                  </a:tcPr>
+                </a:tc>
+                <a:tc>
+                  <a:txBody>
+                    <a:bodyPr wrap="square"/>
+                    <a:lstStyle/>
+                    <a:p>
+                      <a:pPr algn="ctr"/>
+                      <a:r>
+                        <a:rPr sz="1400" b="0" i="0">
+                          <a:solidFill>
+                            <a:srgbClr val="0F172A"/>
+                          </a:solidFill>
+                          <a:latin typeface="Arial"/>
+                        </a:rPr>
+                        <a:t>711</a:t>
+                      </a:r>
+                    </a:p>
+                  </a:txBody>
+                  <a:tcPr marL="73152" marR="73152" marT="36576" marB="36576" anchor="ctr">
+                    <a:solidFill>
+                      <a:srgbClr val="FFFFFF"/>
+                    </a:solidFill>
+                  </a:tcPr>
+                </a:tc>
+                <a:tc>
+                  <a:txBody>
+                    <a:bodyPr wrap="square"/>
+                    <a:lstStyle/>
+                    <a:p>
+                      <a:pPr algn="ctr"/>
+                      <a:r>
+                        <a:rPr sz="1400" b="0" i="0">
+                          <a:solidFill>
+                            <a:srgbClr val="0F172A"/>
+                          </a:solidFill>
+                          <a:latin typeface="Arial"/>
+                        </a:rPr>
+                        <a:t>−$2,475 [−$3,995 to −$845]</a:t>
+                      </a:r>
+                    </a:p>
+                  </a:txBody>
+                  <a:tcPr marL="73152" marR="73152" marT="36576" marB="36576" anchor="ctr">
+                    <a:solidFill>
+                      <a:srgbClr val="FFFFFF"/>
+                    </a:solidFill>
+                  </a:tcPr>
+                </a:tc>
+              </a:tr>
+            </a:tbl>
+          </a:graphicData>
+        </a:graphic>
+      </p:graphicFrame>
+      <p:sp>
+        <p:nvSpPr>
+          <p:cNvPr id="9" name="TextBox 8"/>
           <p:cNvSpPr txBox="1"/>
           <p:nvPr/>
         </p:nvSpPr>
         <p:spPr>
           <a:xfrm>
-            <a:off x="457200" y="5394960"/>
-            <a:ext cx="11277295" cy="960120"/>
+            <a:off x="7040880" y="4343400"/>
+            <a:ext cx="4693615" cy="2011680"/>
           </a:xfrm>
           <a:prstGeom prst="rect">
             <a:avLst/>
@@ -5157,13 +5397,22 @@
               <a:buChar char="•"/>
             </a:pPr>
             <a:r>
-              <a:rPr sz="1800" b="0" i="0">
+              <a:rPr sz="1600" b="0" i="0">
                 <a:solidFill>
                   <a:srgbClr val="0F172A"/>
                 </a:solidFill>
                 <a:latin typeface="Arial"/>
               </a:rPr>
-              <a:t>Raw model falls steadily (−$2,087 test, −$2,475 season): the slope is costs</a:t>
+              <a:t>Mean CLV &lt; 0 for every setup; </a:t>
+            </a:r>
+            <a:r>
+              <a:rPr sz="1600" b="1" i="0">
+                <a:solidFill>
+                  <a:srgbClr val="0F172A"/>
+                </a:solidFill>
+                <a:latin typeface="Arial"/>
+              </a:rPr>
+              <a:t>every CI below zero</a:t>
             </a:r>
           </a:p>
           <a:p>
@@ -5174,13 +5423,30 @@
               <a:buChar char="•"/>
             </a:pPr>
             <a:r>
-              <a:rPr sz="1800" b="0" i="0">
+              <a:rPr sz="1600" b="0" i="0">
                 <a:solidFill>
                   <a:srgbClr val="0F172A"/>
                 </a:solidFill>
                 <a:latin typeface="Arial"/>
               </a:rPr>
-              <a:t>Learning flattens the line by trading less: full agent −$32 test, −$25 season; M6: 0 trades</a:t>
+              <a:t>Anchor is real: +$2,450 (p = 0.002); learning = trading less (p = 0.13)</a:t>
+            </a:r>
+          </a:p>
+          <a:p>
+            <a:pPr algn="l" marL="292608" indent="-256032">
+              <a:spcAft>
+                <a:spcPts val="400"/>
+              </a:spcAft>
+              <a:buChar char="•"/>
+            </a:pPr>
+            <a:r>
+              <a:rPr sz="1600" b="0" i="0">
+                <a:solidFill>
+                  <a:srgbClr val="0F172A"/>
+                </a:solidFill>
+                <a:latin typeface="Arial"/>
+              </a:rPr>
+              <a:t>Play-off holdout: full agent 0 trades</a:t>
             </a:r>
           </a:p>
         </p:txBody>
@@ -5325,7 +5591,7 @@
                 </a:solidFill>
                 <a:latin typeface="Arial"/>
               </a:rPr>
-              <a:t>Evidence 6: tested with CIs, never trading wins</a:t>
+              <a:t>Agentic upgrades: the same market grade</a:t>
             </a:r>
           </a:p>
         </p:txBody>
@@ -5364,7 +5630,7 @@
                 </a:solidFill>
                 <a:latin typeface="Arial"/>
               </a:rPr>
-              <a:t>DASC7606C Group 12 · Betting markets are tilted against consumers</a:t>
+              <a:t>DASC7606C Group 12 · Market-Graded Learning: the closing price grades every component</a:t>
             </a:r>
           </a:p>
         </p:txBody>
@@ -5408,9 +5674,1710 @@
           </a:p>
         </p:txBody>
       </p:sp>
+      <p:graphicFrame>
+        <p:nvGraphicFramePr>
+          <p:cNvPr id="7" name="Table 6"/>
+          <p:cNvGraphicFramePr>
+            <a:graphicFrameLocks noGrp="1"/>
+          </p:cNvGraphicFramePr>
+          <p:nvPr/>
+        </p:nvGraphicFramePr>
+        <p:xfrm>
+          <a:off x="457200" y="1143000"/>
+          <a:ext cx="11277295" cy="4892040"/>
+        </p:xfrm>
+        <a:graphic>
+          <a:graphicData uri="http://schemas.openxmlformats.org/drawingml/2006/table">
+            <a:tbl>
+              <a:tblPr firstRow="1" bandRow="1">
+                <a:tableStyleId>{5C22544A-7EE6-4342-B048-85BDC9FD1C3A}</a:tableStyleId>
+              </a:tblPr>
+              <a:tblGrid>
+                <a:gridCol w="2651760"/>
+                <a:gridCol w="5120640"/>
+                <a:gridCol w="3504895"/>
+              </a:tblGrid>
+              <a:tr h="365760">
+                <a:tc>
+                  <a:txBody>
+                    <a:bodyPr wrap="square"/>
+                    <a:lstStyle/>
+                    <a:p>
+                      <a:pPr algn="l"/>
+                      <a:r>
+                        <a:rPr sz="1300" b="1" i="0">
+                          <a:solidFill>
+                            <a:srgbClr val="FFFFFF"/>
+                          </a:solidFill>
+                          <a:latin typeface="Arial"/>
+                        </a:rPr>
+                        <a:t>Upgrade</a:t>
+                      </a:r>
+                    </a:p>
+                  </a:txBody>
+                  <a:tcPr marL="73152" marR="73152" marT="36576" marB="36576" anchor="ctr">
+                    <a:solidFill>
+                      <a:srgbClr val="1E293B"/>
+                    </a:solidFill>
+                  </a:tcPr>
+                </a:tc>
+                <a:tc>
+                  <a:txBody>
+                    <a:bodyPr wrap="square"/>
+                    <a:lstStyle/>
+                    <a:p>
+                      <a:pPr algn="l"/>
+                      <a:r>
+                        <a:rPr sz="1300" b="1" i="0">
+                          <a:solidFill>
+                            <a:srgbClr val="FFFFFF"/>
+                          </a:solidFill>
+                          <a:latin typeface="Arial"/>
+                        </a:rPr>
+                        <a:t>What it is</a:t>
+                      </a:r>
+                    </a:p>
+                  </a:txBody>
+                  <a:tcPr marL="73152" marR="73152" marT="36576" marB="36576" anchor="ctr">
+                    <a:solidFill>
+                      <a:srgbClr val="1E293B"/>
+                    </a:solidFill>
+                  </a:tcPr>
+                </a:tc>
+                <a:tc>
+                  <a:txBody>
+                    <a:bodyPr wrap="square"/>
+                    <a:lstStyle/>
+                    <a:p>
+                      <a:pPr algn="l"/>
+                      <a:r>
+                        <a:rPr sz="1300" b="1" i="0">
+                          <a:solidFill>
+                            <a:srgbClr val="FFFFFF"/>
+                          </a:solidFill>
+                          <a:latin typeface="Arial"/>
+                        </a:rPr>
+                        <a:t>Result</a:t>
+                      </a:r>
+                    </a:p>
+                  </a:txBody>
+                  <a:tcPr marL="73152" marR="73152" marT="36576" marB="36576" anchor="ctr">
+                    <a:solidFill>
+                      <a:srgbClr val="1E293B"/>
+                    </a:solidFill>
+                  </a:tcPr>
+                </a:tc>
+              </a:tr>
+              <a:tr h="502920">
+                <a:tc>
+                  <a:txBody>
+                    <a:bodyPr wrap="square"/>
+                    <a:lstStyle/>
+                    <a:p>
+                      <a:pPr algn="l"/>
+                      <a:r>
+                        <a:rPr sz="1300" b="1" i="0">
+                          <a:solidFill>
+                            <a:srgbClr val="0F172A"/>
+                          </a:solidFill>
+                          <a:latin typeface="Arial"/>
+                        </a:rPr>
+                        <a:t>LLM tool agent + sceptic</a:t>
+                      </a:r>
+                    </a:p>
+                  </a:txBody>
+                  <a:tcPr marL="73152" marR="73152" marT="36576" marB="36576" anchor="ctr">
+                    <a:solidFill>
+                      <a:srgbClr val="F1F5F9"/>
+                    </a:solidFill>
+                  </a:tcPr>
+                </a:tc>
+                <a:tc>
+                  <a:txBody>
+                    <a:bodyPr wrap="square"/>
+                    <a:lstStyle/>
+                    <a:p>
+                      <a:pPr algn="l"/>
+                      <a:r>
+                        <a:rPr sz="1300" b="0" i="0">
+                          <a:solidFill>
+                            <a:srgbClr val="0F172A"/>
+                          </a:solidFill>
+                          <a:latin typeface="Arial"/>
+                        </a:rPr>
+                        <a:t>LLM picks as-of tools; code checks every number; a sceptic asks “already priced in?”</a:t>
+                      </a:r>
+                    </a:p>
+                  </a:txBody>
+                  <a:tcPr marL="73152" marR="73152" marT="36576" marB="36576" anchor="ctr">
+                    <a:solidFill>
+                      <a:srgbClr val="F1F5F9"/>
+                    </a:solidFill>
+                  </a:tcPr>
+                </a:tc>
+                <a:tc>
+                  <a:txBody>
+                    <a:bodyPr wrap="square"/>
+                    <a:lstStyle/>
+                    <a:p>
+                      <a:pPr algn="l"/>
+                      <a:r>
+                        <a:rPr sz="1300" b="0" i="1">
+                          <a:solidFill>
+                            <a:srgbClr val="64748B"/>
+                          </a:solidFill>
+                          <a:latin typeface="Arial"/>
+                        </a:rPr>
+                        <a:t>pending</a:t>
+                      </a:r>
+                    </a:p>
+                  </a:txBody>
+                  <a:tcPr marL="73152" marR="73152" marT="36576" marB="36576" anchor="ctr">
+                    <a:solidFill>
+                      <a:srgbClr val="F1F5F9"/>
+                    </a:solidFill>
+                  </a:tcPr>
+                </a:tc>
+              </a:tr>
+              <a:tr h="502920">
+                <a:tc>
+                  <a:txBody>
+                    <a:bodyPr wrap="square"/>
+                    <a:lstStyle/>
+                    <a:p>
+                      <a:pPr algn="l"/>
+                      <a:r>
+                        <a:rPr sz="1300" b="1" i="0">
+                          <a:solidFill>
+                            <a:srgbClr val="0F172A"/>
+                          </a:solidFill>
+                          <a:latin typeface="Arial"/>
+                        </a:rPr>
+                        <a:t>Gate audit + placebo</a:t>
+                      </a:r>
+                    </a:p>
+                  </a:txBody>
+                  <a:tcPr marL="73152" marR="73152" marT="36576" marB="36576" anchor="ctr">
+                    <a:solidFill>
+                      <a:srgbClr val="FFFFFF"/>
+                    </a:solidFill>
+                  </a:tcPr>
+                </a:tc>
+                <a:tc>
+                  <a:txBody>
+                    <a:bodyPr wrap="square"/>
+                    <a:lstStyle/>
+                    <a:p>
+                      <a:pPr algn="l"/>
+                      <a:r>
+                        <a:rPr sz="1300" b="0" i="0">
+                          <a:solidFill>
+                            <a:srgbClr val="0F172A"/>
+                          </a:solidFill>
+                          <a:latin typeface="Arial"/>
+                        </a:rPr>
+                        <a:t>Rule gate on held-out days; reviewer vs random rules</a:t>
+                      </a:r>
+                    </a:p>
+                  </a:txBody>
+                  <a:tcPr marL="73152" marR="73152" marT="36576" marB="36576" anchor="ctr">
+                    <a:solidFill>
+                      <a:srgbClr val="FFFFFF"/>
+                    </a:solidFill>
+                  </a:tcPr>
+                </a:tc>
+                <a:tc>
+                  <a:txBody>
+                    <a:bodyPr wrap="square"/>
+                    <a:lstStyle/>
+                    <a:p>
+                      <a:pPr algn="l"/>
+                      <a:r>
+                        <a:rPr sz="1300" b="0" i="1">
+                          <a:solidFill>
+                            <a:srgbClr val="64748B"/>
+                          </a:solidFill>
+                          <a:latin typeface="Arial"/>
+                        </a:rPr>
+                        <a:t>pending</a:t>
+                      </a:r>
+                    </a:p>
+                  </a:txBody>
+                  <a:tcPr marL="73152" marR="73152" marT="36576" marB="36576" anchor="ctr">
+                    <a:solidFill>
+                      <a:srgbClr val="FFFFFF"/>
+                    </a:solidFill>
+                  </a:tcPr>
+                </a:tc>
+              </a:tr>
+              <a:tr h="502920">
+                <a:tc>
+                  <a:txBody>
+                    <a:bodyPr wrap="square"/>
+                    <a:lstStyle/>
+                    <a:p>
+                      <a:pPr algn="l"/>
+                      <a:r>
+                        <a:rPr sz="1300" b="1" i="0">
+                          <a:solidFill>
+                            <a:srgbClr val="0F172A"/>
+                          </a:solidFill>
+                          <a:latin typeface="Arial"/>
+                        </a:rPr>
+                        <a:t>Kill switch</a:t>
+                      </a:r>
+                    </a:p>
+                  </a:txBody>
+                  <a:tcPr marL="73152" marR="73152" marT="36576" marB="36576" anchor="ctr">
+                    <a:solidFill>
+                      <a:srgbClr val="F1F5F9"/>
+                    </a:solidFill>
+                  </a:tcPr>
+                </a:tc>
+                <a:tc>
+                  <a:txBody>
+                    <a:bodyPr wrap="square"/>
+                    <a:lstStyle/>
+                    <a:p>
+                      <a:pPr algn="l"/>
+                      <a:r>
+                        <a:rPr sz="1300" b="0" i="0">
+                          <a:solidFill>
+                            <a:srgbClr val="0F172A"/>
+                          </a:solidFill>
+                          <a:latin typeface="Arial"/>
+                        </a:rPr>
+                        <a:t>$100 daily realised-loss stop, enforced in the replay</a:t>
+                      </a:r>
+                    </a:p>
+                  </a:txBody>
+                  <a:tcPr marL="73152" marR="73152" marT="36576" marB="36576" anchor="ctr">
+                    <a:solidFill>
+                      <a:srgbClr val="F1F5F9"/>
+                    </a:solidFill>
+                  </a:tcPr>
+                </a:tc>
+                <a:tc>
+                  <a:txBody>
+                    <a:bodyPr wrap="square"/>
+                    <a:lstStyle/>
+                    <a:p>
+                      <a:pPr algn="l"/>
+                      <a:r>
+                        <a:rPr sz="1300" b="0" i="1">
+                          <a:solidFill>
+                            <a:srgbClr val="64748B"/>
+                          </a:solidFill>
+                          <a:latin typeface="Arial"/>
+                        </a:rPr>
+                        <a:t>pending</a:t>
+                      </a:r>
+                    </a:p>
+                  </a:txBody>
+                  <a:tcPr marL="73152" marR="73152" marT="36576" marB="36576" anchor="ctr">
+                    <a:solidFill>
+                      <a:srgbClr val="F1F5F9"/>
+                    </a:solidFill>
+                  </a:tcPr>
+                </a:tc>
+              </a:tr>
+              <a:tr h="502920">
+                <a:tc>
+                  <a:txBody>
+                    <a:bodyPr wrap="square"/>
+                    <a:lstStyle/>
+                    <a:p>
+                      <a:pPr algn="l"/>
+                      <a:r>
+                        <a:rPr sz="1300" b="1" i="0">
+                          <a:solidFill>
+                            <a:srgbClr val="0F172A"/>
+                          </a:solidFill>
+                          <a:latin typeface="Arial"/>
+                        </a:rPr>
+                        <a:t>Fractional Kelly</a:t>
+                      </a:r>
+                    </a:p>
+                  </a:txBody>
+                  <a:tcPr marL="73152" marR="73152" marT="36576" marB="36576" anchor="ctr">
+                    <a:solidFill>
+                      <a:srgbClr val="FFFFFF"/>
+                    </a:solidFill>
+                  </a:tcPr>
+                </a:tc>
+                <a:tc>
+                  <a:txBody>
+                    <a:bodyPr wrap="square"/>
+                    <a:lstStyle/>
+                    <a:p>
+                      <a:pPr algn="l"/>
+                      <a:r>
+                        <a:rPr sz="1300" b="0" i="0">
+                          <a:solidFill>
+                            <a:srgbClr val="0F172A"/>
+                          </a:solidFill>
+                          <a:latin typeface="Arial"/>
+                        </a:rPr>
+                        <a:t>¼-Kelly sizing, fee in the formula, vs flat $20</a:t>
+                      </a:r>
+                    </a:p>
+                  </a:txBody>
+                  <a:tcPr marL="73152" marR="73152" marT="36576" marB="36576" anchor="ctr">
+                    <a:solidFill>
+                      <a:srgbClr val="FFFFFF"/>
+                    </a:solidFill>
+                  </a:tcPr>
+                </a:tc>
+                <a:tc>
+                  <a:txBody>
+                    <a:bodyPr wrap="square"/>
+                    <a:lstStyle/>
+                    <a:p>
+                      <a:pPr algn="l"/>
+                      <a:r>
+                        <a:rPr sz="1300" b="0" i="1">
+                          <a:solidFill>
+                            <a:srgbClr val="64748B"/>
+                          </a:solidFill>
+                          <a:latin typeface="Arial"/>
+                        </a:rPr>
+                        <a:t>pending</a:t>
+                      </a:r>
+                    </a:p>
+                  </a:txBody>
+                  <a:tcPr marL="73152" marR="73152" marT="36576" marB="36576" anchor="ctr">
+                    <a:solidFill>
+                      <a:srgbClr val="FFFFFF"/>
+                    </a:solidFill>
+                  </a:tcPr>
+                </a:tc>
+              </a:tr>
+              <a:tr h="502920">
+                <a:tc>
+                  <a:txBody>
+                    <a:bodyPr wrap="square"/>
+                    <a:lstStyle/>
+                    <a:p>
+                      <a:pPr algn="l"/>
+                      <a:r>
+                        <a:rPr sz="1300" b="1" i="0">
+                          <a:solidFill>
+                            <a:srgbClr val="0F172A"/>
+                          </a:solidFill>
+                          <a:latin typeface="Arial"/>
+                        </a:rPr>
+                        <a:t>Coach, simulated users</a:t>
+                      </a:r>
+                    </a:p>
+                  </a:txBody>
+                  <a:tcPr marL="73152" marR="73152" marT="36576" marB="36576" anchor="ctr">
+                    <a:solidFill>
+                      <a:srgbClr val="F1F5F9"/>
+                    </a:solidFill>
+                  </a:tcPr>
+                </a:tc>
+                <a:tc>
+                  <a:txBody>
+                    <a:bodyPr wrap="square"/>
+                    <a:lstStyle/>
+                    <a:p>
+                      <a:pPr algn="l"/>
+                      <a:r>
+                        <a:rPr sz="1300" b="0" i="0">
+                          <a:solidFill>
+                            <a:srgbClr val="0F172A"/>
+                          </a:solidFill>
+                          <a:latin typeface="Arial"/>
+                        </a:rPr>
+                        <a:t>Biased personas play League slates with and without Coach nudges</a:t>
+                      </a:r>
+                    </a:p>
+                  </a:txBody>
+                  <a:tcPr marL="73152" marR="73152" marT="36576" marB="36576" anchor="ctr">
+                    <a:solidFill>
+                      <a:srgbClr val="F1F5F9"/>
+                    </a:solidFill>
+                  </a:tcPr>
+                </a:tc>
+                <a:tc>
+                  <a:txBody>
+                    <a:bodyPr wrap="square"/>
+                    <a:lstStyle/>
+                    <a:p>
+                      <a:pPr algn="l"/>
+                      <a:r>
+                        <a:rPr sz="1300" b="0" i="1">
+                          <a:solidFill>
+                            <a:srgbClr val="64748B"/>
+                          </a:solidFill>
+                          <a:latin typeface="Arial"/>
+                        </a:rPr>
+                        <a:t>pending</a:t>
+                      </a:r>
+                    </a:p>
+                  </a:txBody>
+                  <a:tcPr marL="73152" marR="73152" marT="36576" marB="36576" anchor="ctr">
+                    <a:solidFill>
+                      <a:srgbClr val="F1F5F9"/>
+                    </a:solidFill>
+                  </a:tcPr>
+                </a:tc>
+              </a:tr>
+              <a:tr h="502920">
+                <a:tc>
+                  <a:txBody>
+                    <a:bodyPr wrap="square"/>
+                    <a:lstStyle/>
+                    <a:p>
+                      <a:pPr algn="l"/>
+                      <a:r>
+                        <a:rPr sz="1300" b="1" i="0">
+                          <a:solidFill>
+                            <a:srgbClr val="0F172A"/>
+                          </a:solidFill>
+                          <a:latin typeface="Arial"/>
+                        </a:rPr>
+                        <a:t>Orchestrator</a:t>
+                      </a:r>
+                    </a:p>
+                  </a:txBody>
+                  <a:tcPr marL="73152" marR="73152" marT="36576" marB="36576" anchor="ctr">
+                    <a:solidFill>
+                      <a:srgbClr val="FFFFFF"/>
+                    </a:solidFill>
+                  </a:tcPr>
+                </a:tc>
+                <a:tc>
+                  <a:txBody>
+                    <a:bodyPr wrap="square"/>
+                    <a:lstStyle/>
+                    <a:p>
+                      <a:pPr algn="l"/>
+                      <a:r>
+                        <a:rPr sz="1300" b="0" i="0">
+                          <a:solidFill>
+                            <a:srgbClr val="0F172A"/>
+                          </a:solidFill>
+                          <a:latin typeface="Arial"/>
+                        </a:rPr>
+                        <a:t>Supervisor graph: pregame → trader → coach → briefs for one night</a:t>
+                      </a:r>
+                    </a:p>
+                  </a:txBody>
+                  <a:tcPr marL="73152" marR="73152" marT="36576" marB="36576" anchor="ctr">
+                    <a:solidFill>
+                      <a:srgbClr val="FFFFFF"/>
+                    </a:solidFill>
+                  </a:tcPr>
+                </a:tc>
+                <a:tc>
+                  <a:txBody>
+                    <a:bodyPr wrap="square"/>
+                    <a:lstStyle/>
+                    <a:p>
+                      <a:pPr algn="l"/>
+                      <a:r>
+                        <a:rPr sz="1300" b="0" i="1">
+                          <a:solidFill>
+                            <a:srgbClr val="64748B"/>
+                          </a:solidFill>
+                          <a:latin typeface="Arial"/>
+                        </a:rPr>
+                        <a:t>pending</a:t>
+                      </a:r>
+                    </a:p>
+                  </a:txBody>
+                  <a:tcPr marL="73152" marR="73152" marT="36576" marB="36576" anchor="ctr">
+                    <a:solidFill>
+                      <a:srgbClr val="FFFFFF"/>
+                    </a:solidFill>
+                  </a:tcPr>
+                </a:tc>
+              </a:tr>
+              <a:tr h="502920">
+                <a:tc>
+                  <a:txBody>
+                    <a:bodyPr wrap="square"/>
+                    <a:lstStyle/>
+                    <a:p>
+                      <a:pPr algn="l"/>
+                      <a:r>
+                        <a:rPr sz="1300" b="1" i="0">
+                          <a:solidFill>
+                            <a:srgbClr val="0F172A"/>
+                          </a:solidFill>
+                          <a:latin typeface="Arial"/>
+                        </a:rPr>
+                        <a:t>Learned policy</a:t>
+                      </a:r>
+                    </a:p>
+                  </a:txBody>
+                  <a:tcPr marL="73152" marR="73152" marT="36576" marB="36576" anchor="ctr">
+                    <a:solidFill>
+                      <a:srgbClr val="F1F5F9"/>
+                    </a:solidFill>
+                  </a:tcPr>
+                </a:tc>
+                <a:tc>
+                  <a:txBody>
+                    <a:bodyPr wrap="square"/>
+                    <a:lstStyle/>
+                    <a:p>
+                      <a:pPr algn="l"/>
+                      <a:r>
+                        <a:rPr sz="1300" b="0" i="0">
+                          <a:solidFill>
+                            <a:srgbClr val="0F172A"/>
+                          </a:solidFill>
+                          <a:latin typeface="Arial"/>
+                        </a:rPr>
+                        <a:t>Trade / pass classifier on as-of features, chosen on Nov–Jan only</a:t>
+                      </a:r>
+                    </a:p>
+                  </a:txBody>
+                  <a:tcPr marL="73152" marR="73152" marT="36576" marB="36576" anchor="ctr">
+                    <a:solidFill>
+                      <a:srgbClr val="F1F5F9"/>
+                    </a:solidFill>
+                  </a:tcPr>
+                </a:tc>
+                <a:tc>
+                  <a:txBody>
+                    <a:bodyPr wrap="square"/>
+                    <a:lstStyle/>
+                    <a:p>
+                      <a:pPr algn="l"/>
+                      <a:r>
+                        <a:rPr sz="1300" b="0" i="1">
+                          <a:solidFill>
+                            <a:srgbClr val="64748B"/>
+                          </a:solidFill>
+                          <a:latin typeface="Arial"/>
+                        </a:rPr>
+                        <a:t>pending</a:t>
+                      </a:r>
+                    </a:p>
+                  </a:txBody>
+                  <a:tcPr marL="73152" marR="73152" marT="36576" marB="36576" anchor="ctr">
+                    <a:solidFill>
+                      <a:srgbClr val="F1F5F9"/>
+                    </a:solidFill>
+                  </a:tcPr>
+                </a:tc>
+              </a:tr>
+              <a:tr h="502920">
+                <a:tc>
+                  <a:txBody>
+                    <a:bodyPr wrap="square"/>
+                    <a:lstStyle/>
+                    <a:p>
+                      <a:pPr algn="l"/>
+                      <a:r>
+                        <a:rPr sz="1300" b="1" i="0">
+                          <a:solidFill>
+                            <a:srgbClr val="0F172A"/>
+                          </a:solidFill>
+                          <a:latin typeface="Arial"/>
+                        </a:rPr>
+                        <a:t>Rule DSL</a:t>
+                      </a:r>
+                    </a:p>
+                  </a:txBody>
+                  <a:tcPr marL="73152" marR="73152" marT="36576" marB="36576" anchor="ctr">
+                    <a:solidFill>
+                      <a:srgbClr val="FFFFFF"/>
+                    </a:solidFill>
+                  </a:tcPr>
+                </a:tc>
+                <a:tc>
+                  <a:txBody>
+                    <a:bodyPr wrap="square"/>
+                    <a:lstStyle/>
+                    <a:p>
+                      <a:pPr algn="l"/>
+                      <a:r>
+                        <a:rPr sz="1300" b="0" i="0">
+                          <a:solidFill>
+                            <a:srgbClr val="0F172A"/>
+                          </a:solidFill>
+                          <a:latin typeface="Arial"/>
+                        </a:rPr>
+                        <a:t>LLM writes free-form rules, compiled to a safe DSL, still gated</a:t>
+                      </a:r>
+                    </a:p>
+                  </a:txBody>
+                  <a:tcPr marL="73152" marR="73152" marT="36576" marB="36576" anchor="ctr">
+                    <a:solidFill>
+                      <a:srgbClr val="FFFFFF"/>
+                    </a:solidFill>
+                  </a:tcPr>
+                </a:tc>
+                <a:tc>
+                  <a:txBody>
+                    <a:bodyPr wrap="square"/>
+                    <a:lstStyle/>
+                    <a:p>
+                      <a:pPr algn="l"/>
+                      <a:r>
+                        <a:rPr sz="1300" b="0" i="1">
+                          <a:solidFill>
+                            <a:srgbClr val="64748B"/>
+                          </a:solidFill>
+                          <a:latin typeface="Arial"/>
+                        </a:rPr>
+                        <a:t>pending</a:t>
+                      </a:r>
+                    </a:p>
+                  </a:txBody>
+                  <a:tcPr marL="73152" marR="73152" marT="36576" marB="36576" anchor="ctr">
+                    <a:solidFill>
+                      <a:srgbClr val="FFFFFF"/>
+                    </a:solidFill>
+                  </a:tcPr>
+                </a:tc>
+              </a:tr>
+              <a:tr h="502920">
+                <a:tc>
+                  <a:txBody>
+                    <a:bodyPr wrap="square"/>
+                    <a:lstStyle/>
+                    <a:p>
+                      <a:pPr algn="l"/>
+                      <a:r>
+                        <a:rPr sz="1300" b="1" i="0">
+                          <a:solidFill>
+                            <a:srgbClr val="0F172A"/>
+                          </a:solidFill>
+                          <a:latin typeface="Arial"/>
+                        </a:rPr>
+                        <a:t>Episodic memory</a:t>
+                      </a:r>
+                    </a:p>
+                  </a:txBody>
+                  <a:tcPr marL="73152" marR="73152" marT="36576" marB="36576" anchor="ctr">
+                    <a:solidFill>
+                      <a:srgbClr val="F1F5F9"/>
+                    </a:solidFill>
+                  </a:tcPr>
+                </a:tc>
+                <a:tc>
+                  <a:txBody>
+                    <a:bodyPr wrap="square"/>
+                    <a:lstStyle/>
+                    <a:p>
+                      <a:pPr algn="l"/>
+                      <a:r>
+                        <a:rPr sz="1300" b="0" i="0">
+                          <a:solidFill>
+                            <a:srgbClr val="0F172A"/>
+                          </a:solidFill>
+                          <a:latin typeface="Arial"/>
+                        </a:rPr>
+                        <a:t>Retrieve similar past situations and their outcomes</a:t>
+                      </a:r>
+                    </a:p>
+                  </a:txBody>
+                  <a:tcPr marL="73152" marR="73152" marT="36576" marB="36576" anchor="ctr">
+                    <a:solidFill>
+                      <a:srgbClr val="F1F5F9"/>
+                    </a:solidFill>
+                  </a:tcPr>
+                </a:tc>
+                <a:tc>
+                  <a:txBody>
+                    <a:bodyPr wrap="square"/>
+                    <a:lstStyle/>
+                    <a:p>
+                      <a:pPr algn="l"/>
+                      <a:r>
+                        <a:rPr sz="1300" b="0" i="1">
+                          <a:solidFill>
+                            <a:srgbClr val="64748B"/>
+                          </a:solidFill>
+                          <a:latin typeface="Arial"/>
+                        </a:rPr>
+                        <a:t>pending</a:t>
+                      </a:r>
+                    </a:p>
+                  </a:txBody>
+                  <a:tcPr marL="73152" marR="73152" marT="36576" marB="36576" anchor="ctr">
+                    <a:solidFill>
+                      <a:srgbClr val="F1F5F9"/>
+                    </a:solidFill>
+                  </a:tcPr>
+                </a:tc>
+              </a:tr>
+            </a:tbl>
+          </a:graphicData>
+        </a:graphic>
+      </p:graphicFrame>
+      <p:sp>
+        <p:nvSpPr>
+          <p:cNvPr id="8" name="TextBox 7"/>
+          <p:cNvSpPr txBox="1"/>
+          <p:nvPr/>
+        </p:nvSpPr>
+        <p:spPr>
+          <a:xfrm>
+            <a:off x="457200" y="6080760"/>
+            <a:ext cx="11277295" cy="274320"/>
+          </a:xfrm>
+          <a:prstGeom prst="rect">
+            <a:avLst/>
+          </a:prstGeom>
+          <a:noFill/>
+        </p:spPr>
+        <p:txBody>
+          <a:bodyPr wrap="square" anchor="t" lIns="73152" rIns="73152" tIns="36576" bIns="36576">
+            <a:spAutoFit/>
+          </a:bodyPr>
+          <a:lstStyle/>
+          <a:p>
+            <a:pPr algn="l">
+              <a:spcAft>
+                <a:spcPts val="0"/>
+              </a:spcAft>
+            </a:pPr>
+            <a:r>
+              <a:rPr sz="1200" b="0" i="0">
+                <a:solidFill>
+                  <a:srgbClr val="64748B"/>
+                </a:solidFill>
+                <a:latin typeface="Arial"/>
+              </a:rPr>
+              <a:t>Pre-registered before scoring (docs/preregistration_*.md); same replay, costs and bootstrap as above</a:t>
+            </a:r>
+          </a:p>
+        </p:txBody>
+      </p:sp>
+    </p:spTree>
+  </p:cSld>
+  <p:clrMapOvr>
+    <a:masterClrMapping/>
+  </p:clrMapOvr>
+</p:sld>
+</file>
+
+<file path=ppt/slides/slide12.xml><?xml version="1.0" encoding="utf-8"?>
+<p:sld xmlns:a="http://schemas.openxmlformats.org/drawingml/2006/main" xmlns:p="http://schemas.openxmlformats.org/presentationml/2006/main" xmlns:r="http://schemas.openxmlformats.org/officeDocument/2006/relationships">
+  <p:cSld>
+    <p:spTree>
+      <p:nvGrpSpPr>
+        <p:cNvPr id="1" name=""/>
+        <p:cNvGrpSpPr/>
+        <p:nvPr/>
+      </p:nvGrpSpPr>
+      <p:grpSpPr/>
+      <p:sp>
+        <p:nvSpPr>
+          <p:cNvPr id="2" name="Rectangle 1"/>
+          <p:cNvSpPr/>
+          <p:nvPr/>
+        </p:nvSpPr>
+        <p:spPr>
+          <a:xfrm>
+            <a:off x="0" y="0"/>
+            <a:ext cx="12191695" cy="868680"/>
+          </a:xfrm>
+          <a:prstGeom prst="rect">
+            <a:avLst/>
+          </a:prstGeom>
+          <a:solidFill>
+            <a:srgbClr val="1E293B"/>
+          </a:solidFill>
+          <a:ln>
+            <a:noFill/>
+          </a:ln>
+          <a:effectLst/>
+        </p:spPr>
+        <p:style>
+          <a:lnRef idx="1">
+            <a:schemeClr val="accent1"/>
+          </a:lnRef>
+          <a:fillRef idx="3">
+            <a:schemeClr val="accent1"/>
+          </a:fillRef>
+          <a:effectRef idx="2">
+            <a:schemeClr val="accent1"/>
+          </a:effectRef>
+          <a:fontRef idx="minor">
+            <a:schemeClr val="lt1"/>
+          </a:fontRef>
+        </p:style>
+        <p:txBody>
+          <a:bodyPr rtlCol="0" anchor="ctr"/>
+          <a:lstStyle/>
+          <a:p>
+            <a:pPr algn="ctr"/>
+          </a:p>
+        </p:txBody>
+      </p:sp>
+      <p:sp>
+        <p:nvSpPr>
+          <p:cNvPr id="3" name="Rectangle 2"/>
+          <p:cNvSpPr/>
+          <p:nvPr/>
+        </p:nvSpPr>
+        <p:spPr>
+          <a:xfrm>
+            <a:off x="0" y="868680"/>
+            <a:ext cx="12191695" cy="54864"/>
+          </a:xfrm>
+          <a:prstGeom prst="rect">
+            <a:avLst/>
+          </a:prstGeom>
+          <a:solidFill>
+            <a:srgbClr val="EA580C"/>
+          </a:solidFill>
+          <a:ln>
+            <a:noFill/>
+          </a:ln>
+          <a:effectLst/>
+        </p:spPr>
+        <p:style>
+          <a:lnRef idx="1">
+            <a:schemeClr val="accent1"/>
+          </a:lnRef>
+          <a:fillRef idx="3">
+            <a:schemeClr val="accent1"/>
+          </a:fillRef>
+          <a:effectRef idx="2">
+            <a:schemeClr val="accent1"/>
+          </a:effectRef>
+          <a:fontRef idx="minor">
+            <a:schemeClr val="lt1"/>
+          </a:fontRef>
+        </p:style>
+        <p:txBody>
+          <a:bodyPr rtlCol="0" anchor="ctr"/>
+          <a:lstStyle/>
+          <a:p>
+            <a:pPr algn="ctr"/>
+          </a:p>
+        </p:txBody>
+      </p:sp>
+      <p:sp>
+        <p:nvSpPr>
+          <p:cNvPr id="4" name="TextBox 3"/>
+          <p:cNvSpPr txBox="1"/>
+          <p:nvPr/>
+        </p:nvSpPr>
+        <p:spPr>
+          <a:xfrm>
+            <a:off x="457200" y="109728"/>
+            <a:ext cx="11277295" cy="685800"/>
+          </a:xfrm>
+          <a:prstGeom prst="rect">
+            <a:avLst/>
+          </a:prstGeom>
+          <a:noFill/>
+        </p:spPr>
+        <p:txBody>
+          <a:bodyPr wrap="square" anchor="ctr" lIns="73152" rIns="73152" tIns="36576" bIns="36576">
+            <a:spAutoFit/>
+          </a:bodyPr>
+          <a:lstStyle/>
+          <a:p>
+            <a:pPr algn="l">
+              <a:spcAft>
+                <a:spcPts val="0"/>
+              </a:spcAft>
+            </a:pPr>
+            <a:r>
+              <a:rPr sz="3000" b="1" i="0">
+                <a:solidFill>
+                  <a:srgbClr val="FFFFFF"/>
+                </a:solidFill>
+                <a:latin typeface="Arial"/>
+              </a:rPr>
+              <a:t>Our product: protect, teach, practise</a:t>
+            </a:r>
+          </a:p>
+        </p:txBody>
+      </p:sp>
+      <p:sp>
+        <p:nvSpPr>
+          <p:cNvPr id="5" name="TextBox 4"/>
+          <p:cNvSpPr txBox="1"/>
+          <p:nvPr/>
+        </p:nvSpPr>
+        <p:spPr>
+          <a:xfrm>
+            <a:off x="457200" y="6446520"/>
+            <a:ext cx="9144000" cy="320040"/>
+          </a:xfrm>
+          <a:prstGeom prst="rect">
+            <a:avLst/>
+          </a:prstGeom>
+          <a:noFill/>
+        </p:spPr>
+        <p:txBody>
+          <a:bodyPr wrap="square" anchor="t" lIns="73152" rIns="73152" tIns="36576" bIns="36576">
+            <a:spAutoFit/>
+          </a:bodyPr>
+          <a:lstStyle/>
+          <a:p>
+            <a:pPr algn="l">
+              <a:spcAft>
+                <a:spcPts val="0"/>
+              </a:spcAft>
+            </a:pPr>
+            <a:r>
+              <a:rPr sz="1100" b="0" i="0">
+                <a:solidFill>
+                  <a:srgbClr val="64748B"/>
+                </a:solidFill>
+                <a:latin typeface="Arial"/>
+              </a:rPr>
+              <a:t>DASC7606C Group 12 · Market-Graded Learning: the closing price grades every component</a:t>
+            </a:r>
+          </a:p>
+        </p:txBody>
+      </p:sp>
+      <p:sp>
+        <p:nvSpPr>
+          <p:cNvPr id="6" name="TextBox 5"/>
+          <p:cNvSpPr txBox="1"/>
+          <p:nvPr/>
+        </p:nvSpPr>
+        <p:spPr>
+          <a:xfrm>
+            <a:off x="10820095" y="6446520"/>
+            <a:ext cx="914400" cy="320040"/>
+          </a:xfrm>
+          <a:prstGeom prst="rect">
+            <a:avLst/>
+          </a:prstGeom>
+          <a:noFill/>
+        </p:spPr>
+        <p:txBody>
+          <a:bodyPr wrap="square" anchor="t" lIns="73152" rIns="73152" tIns="36576" bIns="36576">
+            <a:spAutoFit/>
+          </a:bodyPr>
+          <a:lstStyle/>
+          <a:p>
+            <a:pPr algn="r">
+              <a:spcAft>
+                <a:spcPts val="0"/>
+              </a:spcAft>
+            </a:pPr>
+            <a:r>
+              <a:rPr sz="1100" b="0" i="0">
+                <a:solidFill>
+                  <a:srgbClr val="64748B"/>
+                </a:solidFill>
+                <a:latin typeface="Arial"/>
+              </a:rPr>
+              <a:t>12</a:t>
+            </a:r>
+          </a:p>
+        </p:txBody>
+      </p:sp>
+      <p:sp>
+        <p:nvSpPr>
+          <p:cNvPr id="7" name="Rounded Rectangle 6"/>
+          <p:cNvSpPr/>
+          <p:nvPr/>
+        </p:nvSpPr>
+        <p:spPr>
+          <a:xfrm>
+            <a:off x="457200" y="1234439"/>
+            <a:ext cx="3606698" cy="3291840"/>
+          </a:xfrm>
+          <a:prstGeom prst="roundRect">
+            <a:avLst>
+              <a:gd name="adj" fmla="val 6000"/>
+            </a:avLst>
+          </a:prstGeom>
+          <a:solidFill>
+            <a:srgbClr val="FFFFFF"/>
+          </a:solidFill>
+          <a:ln w="15875">
+            <a:solidFill>
+              <a:srgbClr val="1E293B"/>
+            </a:solidFill>
+          </a:ln>
+          <a:effectLst/>
+        </p:spPr>
+        <p:style>
+          <a:lnRef idx="1">
+            <a:schemeClr val="accent1"/>
+          </a:lnRef>
+          <a:fillRef idx="3">
+            <a:schemeClr val="accent1"/>
+          </a:fillRef>
+          <a:effectRef idx="2">
+            <a:schemeClr val="accent1"/>
+          </a:effectRef>
+          <a:fontRef idx="minor">
+            <a:schemeClr val="lt1"/>
+          </a:fontRef>
+        </p:style>
+        <p:txBody>
+          <a:bodyPr rtlCol="0" anchor="ctr"/>
+          <a:lstStyle/>
+          <a:p>
+            <a:pPr algn="ctr"/>
+          </a:p>
+        </p:txBody>
+      </p:sp>
+      <p:sp>
+        <p:nvSpPr>
+          <p:cNvPr id="8" name="Rectangle 7"/>
+          <p:cNvSpPr/>
+          <p:nvPr/>
+        </p:nvSpPr>
+        <p:spPr>
+          <a:xfrm>
+            <a:off x="457200" y="1234439"/>
+            <a:ext cx="109728" cy="3291840"/>
+          </a:xfrm>
+          <a:prstGeom prst="rect">
+            <a:avLst/>
+          </a:prstGeom>
+          <a:solidFill>
+            <a:srgbClr val="1E293B"/>
+          </a:solidFill>
+          <a:ln>
+            <a:noFill/>
+          </a:ln>
+          <a:effectLst/>
+        </p:spPr>
+        <p:style>
+          <a:lnRef idx="1">
+            <a:schemeClr val="accent1"/>
+          </a:lnRef>
+          <a:fillRef idx="3">
+            <a:schemeClr val="accent1"/>
+          </a:fillRef>
+          <a:effectRef idx="2">
+            <a:schemeClr val="accent1"/>
+          </a:effectRef>
+          <a:fontRef idx="minor">
+            <a:schemeClr val="lt1"/>
+          </a:fontRef>
+        </p:style>
+        <p:txBody>
+          <a:bodyPr rtlCol="0" anchor="ctr"/>
+          <a:lstStyle/>
+          <a:p>
+            <a:pPr algn="ctr"/>
+          </a:p>
+        </p:txBody>
+      </p:sp>
+      <p:sp>
+        <p:nvSpPr>
+          <p:cNvPr id="9" name="TextBox 8"/>
+          <p:cNvSpPr txBox="1"/>
+          <p:nvPr/>
+        </p:nvSpPr>
+        <p:spPr>
+          <a:xfrm>
+            <a:off x="640080" y="1307592"/>
+            <a:ext cx="3332378" cy="457200"/>
+          </a:xfrm>
+          <a:prstGeom prst="rect">
+            <a:avLst/>
+          </a:prstGeom>
+          <a:noFill/>
+        </p:spPr>
+        <p:txBody>
+          <a:bodyPr wrap="square" anchor="t" lIns="73152" rIns="73152" tIns="36576" bIns="36576">
+            <a:spAutoFit/>
+          </a:bodyPr>
+          <a:lstStyle/>
+          <a:p>
+            <a:pPr algn="l">
+              <a:spcAft>
+                <a:spcPts val="0"/>
+              </a:spcAft>
+            </a:pPr>
+            <a:r>
+              <a:rPr sz="1800" b="1" i="0">
+                <a:solidFill>
+                  <a:srgbClr val="1E293B"/>
+                </a:solidFill>
+                <a:latin typeface="Arial"/>
+              </a:rPr>
+              <a:t>Protect: the agent</a:t>
+            </a:r>
+          </a:p>
+        </p:txBody>
+      </p:sp>
+      <p:sp>
+        <p:nvSpPr>
+          <p:cNvPr id="10" name="TextBox 9"/>
+          <p:cNvSpPr txBox="1"/>
+          <p:nvPr/>
+        </p:nvSpPr>
+        <p:spPr>
+          <a:xfrm>
+            <a:off x="640080" y="1764791"/>
+            <a:ext cx="3332378" cy="2688336"/>
+          </a:xfrm>
+          <a:prstGeom prst="rect">
+            <a:avLst/>
+          </a:prstGeom>
+          <a:noFill/>
+        </p:spPr>
+        <p:txBody>
+          <a:bodyPr wrap="square" anchor="t" lIns="73152" rIns="73152" tIns="36576" bIns="36576">
+            <a:spAutoFit/>
+          </a:bodyPr>
+          <a:lstStyle/>
+          <a:p>
+            <a:pPr algn="l" marL="292608" indent="-256032">
+              <a:spcAft>
+                <a:spcPts val="600"/>
+              </a:spcAft>
+              <a:buChar char="•"/>
+            </a:pPr>
+            <a:r>
+              <a:rPr sz="1600" b="1" i="0">
+                <a:solidFill>
+                  <a:srgbClr val="0F172A"/>
+                </a:solidFill>
+                <a:latin typeface="Arial"/>
+              </a:rPr>
+              <a:t>Passes by default:</a:t>
+            </a:r>
+            <a:r>
+              <a:rPr sz="1600" b="0" i="0">
+                <a:solidFill>
+                  <a:srgbClr val="0F172A"/>
+                </a:solidFill>
+                <a:latin typeface="Arial"/>
+              </a:rPr>
+              <a:t> 90% of decision points</a:t>
+            </a:r>
+          </a:p>
+          <a:p>
+            <a:pPr algn="l" marL="292608" indent="-256032">
+              <a:spcAft>
+                <a:spcPts val="600"/>
+              </a:spcAft>
+              <a:buChar char="•"/>
+            </a:pPr>
+            <a:r>
+              <a:rPr sz="1600" b="0" i="0">
+                <a:solidFill>
+                  <a:srgbClr val="0F172A"/>
+                </a:solidFill>
+                <a:latin typeface="Arial"/>
+              </a:rPr>
+              <a:t>Says why there is no order</a:t>
+            </a:r>
+          </a:p>
+          <a:p>
+            <a:pPr algn="l" marL="292608" indent="-256032">
+              <a:spcAft>
+                <a:spcPts val="600"/>
+              </a:spcAft>
+              <a:buChar char="•"/>
+            </a:pPr>
+            <a:r>
+              <a:rPr sz="1600" b="0" i="0">
+                <a:solidFill>
+                  <a:srgbClr val="0F172A"/>
+                </a:solidFill>
+                <a:latin typeface="Arial"/>
+              </a:rPr>
+              <a:t>Code limits: $50 / order, $100 / game, $300 / day</a:t>
+            </a:r>
+          </a:p>
+          <a:p>
+            <a:pPr algn="l" marL="292608" indent="-256032">
+              <a:spcAft>
+                <a:spcPts val="600"/>
+              </a:spcAft>
+              <a:buChar char="•"/>
+            </a:pPr>
+            <a:r>
+              <a:rPr sz="1600" b="0" i="0">
+                <a:solidFill>
+                  <a:srgbClr val="0F172A"/>
+                </a:solidFill>
+                <a:latin typeface="Arial"/>
+              </a:rPr>
+              <a:t>Bans “lock”, “guaranteed”; </a:t>
+            </a:r>
+            <a:r>
+              <a:rPr sz="1600" b="1" i="0">
+                <a:solidFill>
+                  <a:srgbClr val="0F172A"/>
+                </a:solidFill>
+                <a:latin typeface="Arial"/>
+              </a:rPr>
+              <a:t>9 / 9</a:t>
+            </a:r>
+            <a:r>
+              <a:rPr sz="1600" b="0" i="0">
+                <a:solidFill>
+                  <a:srgbClr val="0F172A"/>
+                </a:solidFill>
+                <a:latin typeface="Arial"/>
+              </a:rPr>
+              <a:t> planted violations blocked</a:t>
+            </a:r>
+          </a:p>
+        </p:txBody>
+      </p:sp>
+      <p:sp>
+        <p:nvSpPr>
+          <p:cNvPr id="11" name="Rounded Rectangle 10"/>
+          <p:cNvSpPr/>
+          <p:nvPr/>
+        </p:nvSpPr>
+        <p:spPr>
+          <a:xfrm>
+            <a:off x="4292498" y="1234439"/>
+            <a:ext cx="3606698" cy="3291840"/>
+          </a:xfrm>
+          <a:prstGeom prst="roundRect">
+            <a:avLst>
+              <a:gd name="adj" fmla="val 6000"/>
+            </a:avLst>
+          </a:prstGeom>
+          <a:solidFill>
+            <a:srgbClr val="FFFFFF"/>
+          </a:solidFill>
+          <a:ln w="15875">
+            <a:solidFill>
+              <a:srgbClr val="EA580C"/>
+            </a:solidFill>
+          </a:ln>
+          <a:effectLst/>
+        </p:spPr>
+        <p:style>
+          <a:lnRef idx="1">
+            <a:schemeClr val="accent1"/>
+          </a:lnRef>
+          <a:fillRef idx="3">
+            <a:schemeClr val="accent1"/>
+          </a:fillRef>
+          <a:effectRef idx="2">
+            <a:schemeClr val="accent1"/>
+          </a:effectRef>
+          <a:fontRef idx="minor">
+            <a:schemeClr val="lt1"/>
+          </a:fontRef>
+        </p:style>
+        <p:txBody>
+          <a:bodyPr rtlCol="0" anchor="ctr"/>
+          <a:lstStyle/>
+          <a:p>
+            <a:pPr algn="ctr"/>
+          </a:p>
+        </p:txBody>
+      </p:sp>
+      <p:sp>
+        <p:nvSpPr>
+          <p:cNvPr id="12" name="Rectangle 11"/>
+          <p:cNvSpPr/>
+          <p:nvPr/>
+        </p:nvSpPr>
+        <p:spPr>
+          <a:xfrm>
+            <a:off x="4292498" y="1234439"/>
+            <a:ext cx="109728" cy="3291840"/>
+          </a:xfrm>
+          <a:prstGeom prst="rect">
+            <a:avLst/>
+          </a:prstGeom>
+          <a:solidFill>
+            <a:srgbClr val="EA580C"/>
+          </a:solidFill>
+          <a:ln>
+            <a:noFill/>
+          </a:ln>
+          <a:effectLst/>
+        </p:spPr>
+        <p:style>
+          <a:lnRef idx="1">
+            <a:schemeClr val="accent1"/>
+          </a:lnRef>
+          <a:fillRef idx="3">
+            <a:schemeClr val="accent1"/>
+          </a:fillRef>
+          <a:effectRef idx="2">
+            <a:schemeClr val="accent1"/>
+          </a:effectRef>
+          <a:fontRef idx="minor">
+            <a:schemeClr val="lt1"/>
+          </a:fontRef>
+        </p:style>
+        <p:txBody>
+          <a:bodyPr rtlCol="0" anchor="ctr"/>
+          <a:lstStyle/>
+          <a:p>
+            <a:pPr algn="ctr"/>
+          </a:p>
+        </p:txBody>
+      </p:sp>
+      <p:sp>
+        <p:nvSpPr>
+          <p:cNvPr id="13" name="TextBox 12"/>
+          <p:cNvSpPr txBox="1"/>
+          <p:nvPr/>
+        </p:nvSpPr>
+        <p:spPr>
+          <a:xfrm>
+            <a:off x="4475378" y="1307592"/>
+            <a:ext cx="3332378" cy="457200"/>
+          </a:xfrm>
+          <a:prstGeom prst="rect">
+            <a:avLst/>
+          </a:prstGeom>
+          <a:noFill/>
+        </p:spPr>
+        <p:txBody>
+          <a:bodyPr wrap="square" anchor="t" lIns="73152" rIns="73152" tIns="36576" bIns="36576">
+            <a:spAutoFit/>
+          </a:bodyPr>
+          <a:lstStyle/>
+          <a:p>
+            <a:pPr algn="l">
+              <a:spcAft>
+                <a:spcPts val="0"/>
+              </a:spcAft>
+            </a:pPr>
+            <a:r>
+              <a:rPr sz="1800" b="1" i="0">
+                <a:solidFill>
+                  <a:srgbClr val="EA580C"/>
+                </a:solidFill>
+                <a:latin typeface="Arial"/>
+              </a:rPr>
+              <a:t>Teach: the Coach</a:t>
+            </a:r>
+          </a:p>
+        </p:txBody>
+      </p:sp>
+      <p:sp>
+        <p:nvSpPr>
+          <p:cNvPr id="14" name="TextBox 13"/>
+          <p:cNvSpPr txBox="1"/>
+          <p:nvPr/>
+        </p:nvSpPr>
+        <p:spPr>
+          <a:xfrm>
+            <a:off x="4475378" y="1764791"/>
+            <a:ext cx="3332378" cy="2688336"/>
+          </a:xfrm>
+          <a:prstGeom prst="rect">
+            <a:avLst/>
+          </a:prstGeom>
+          <a:noFill/>
+        </p:spPr>
+        <p:txBody>
+          <a:bodyPr wrap="square" anchor="t" lIns="73152" rIns="73152" tIns="36576" bIns="36576">
+            <a:spAutoFit/>
+          </a:bodyPr>
+          <a:lstStyle/>
+          <a:p>
+            <a:pPr algn="l" marL="292608" indent="-256032">
+              <a:spcAft>
+                <a:spcPts val="600"/>
+              </a:spcAft>
+              <a:buChar char="•"/>
+            </a:pPr>
+            <a:r>
+              <a:rPr sz="1600" b="0" i="0">
+                <a:solidFill>
+                  <a:srgbClr val="0F172A"/>
+                </a:solidFill>
+                <a:latin typeface="Arial"/>
+              </a:rPr>
+              <a:t>Only what was public at that moment</a:t>
+            </a:r>
+          </a:p>
+          <a:p>
+            <a:pPr algn="l" marL="292608" indent="-256032">
+              <a:spcAft>
+                <a:spcPts val="600"/>
+              </a:spcAft>
+              <a:buChar char="•"/>
+            </a:pPr>
+            <a:r>
+              <a:rPr sz="1600" b="0" i="0">
+                <a:solidFill>
+                  <a:srgbClr val="0F172A"/>
+                </a:solidFill>
+                <a:latin typeface="Arial"/>
+              </a:rPr>
+              <a:t>Break-even after spread + fee</a:t>
+            </a:r>
+          </a:p>
+          <a:p>
+            <a:pPr algn="l" marL="292608" indent="-256032">
+              <a:spcAft>
+                <a:spcPts val="600"/>
+              </a:spcAft>
+              <a:buChar char="•"/>
+            </a:pPr>
+            <a:r>
+              <a:rPr sz="1600" b="0" i="0">
+                <a:solidFill>
+                  <a:srgbClr val="0F172A"/>
+                </a:solidFill>
+                <a:latin typeface="Arial"/>
+              </a:rPr>
+              <a:t>Lessons: priced in, long shots, closing line</a:t>
+            </a:r>
+          </a:p>
+          <a:p>
+            <a:pPr algn="l" marL="292608" indent="-256032">
+              <a:spcAft>
+                <a:spcPts val="600"/>
+              </a:spcAft>
+              <a:buChar char="•"/>
+            </a:pPr>
+            <a:r>
+              <a:rPr sz="1600" b="0" i="0">
+                <a:solidFill>
+                  <a:srgbClr val="0F172A"/>
+                </a:solidFill>
+                <a:latin typeface="Arial"/>
+              </a:rPr>
+              <a:t>Paper call, then the close and the agent's choice</a:t>
+            </a:r>
+          </a:p>
+        </p:txBody>
+      </p:sp>
+      <p:sp>
+        <p:nvSpPr>
+          <p:cNvPr id="15" name="Rounded Rectangle 14"/>
+          <p:cNvSpPr/>
+          <p:nvPr/>
+        </p:nvSpPr>
+        <p:spPr>
+          <a:xfrm>
+            <a:off x="8127796" y="1234439"/>
+            <a:ext cx="3606698" cy="3291840"/>
+          </a:xfrm>
+          <a:prstGeom prst="roundRect">
+            <a:avLst>
+              <a:gd name="adj" fmla="val 6000"/>
+            </a:avLst>
+          </a:prstGeom>
+          <a:solidFill>
+            <a:srgbClr val="FFFFFF"/>
+          </a:solidFill>
+          <a:ln w="15875">
+            <a:solidFill>
+              <a:srgbClr val="16A34A"/>
+            </a:solidFill>
+          </a:ln>
+          <a:effectLst/>
+        </p:spPr>
+        <p:style>
+          <a:lnRef idx="1">
+            <a:schemeClr val="accent1"/>
+          </a:lnRef>
+          <a:fillRef idx="3">
+            <a:schemeClr val="accent1"/>
+          </a:fillRef>
+          <a:effectRef idx="2">
+            <a:schemeClr val="accent1"/>
+          </a:effectRef>
+          <a:fontRef idx="minor">
+            <a:schemeClr val="lt1"/>
+          </a:fontRef>
+        </p:style>
+        <p:txBody>
+          <a:bodyPr rtlCol="0" anchor="ctr"/>
+          <a:lstStyle/>
+          <a:p>
+            <a:pPr algn="ctr"/>
+          </a:p>
+        </p:txBody>
+      </p:sp>
+      <p:sp>
+        <p:nvSpPr>
+          <p:cNvPr id="16" name="Rectangle 15"/>
+          <p:cNvSpPr/>
+          <p:nvPr/>
+        </p:nvSpPr>
+        <p:spPr>
+          <a:xfrm>
+            <a:off x="8127796" y="1234439"/>
+            <a:ext cx="109728" cy="3291840"/>
+          </a:xfrm>
+          <a:prstGeom prst="rect">
+            <a:avLst/>
+          </a:prstGeom>
+          <a:solidFill>
+            <a:srgbClr val="16A34A"/>
+          </a:solidFill>
+          <a:ln>
+            <a:noFill/>
+          </a:ln>
+          <a:effectLst/>
+        </p:spPr>
+        <p:style>
+          <a:lnRef idx="1">
+            <a:schemeClr val="accent1"/>
+          </a:lnRef>
+          <a:fillRef idx="3">
+            <a:schemeClr val="accent1"/>
+          </a:fillRef>
+          <a:effectRef idx="2">
+            <a:schemeClr val="accent1"/>
+          </a:effectRef>
+          <a:fontRef idx="minor">
+            <a:schemeClr val="lt1"/>
+          </a:fontRef>
+        </p:style>
+        <p:txBody>
+          <a:bodyPr rtlCol="0" anchor="ctr"/>
+          <a:lstStyle/>
+          <a:p>
+            <a:pPr algn="ctr"/>
+          </a:p>
+        </p:txBody>
+      </p:sp>
+      <p:sp>
+        <p:nvSpPr>
+          <p:cNvPr id="17" name="TextBox 16"/>
+          <p:cNvSpPr txBox="1"/>
+          <p:nvPr/>
+        </p:nvSpPr>
+        <p:spPr>
+          <a:xfrm>
+            <a:off x="8310676" y="1307592"/>
+            <a:ext cx="3332378" cy="457200"/>
+          </a:xfrm>
+          <a:prstGeom prst="rect">
+            <a:avLst/>
+          </a:prstGeom>
+          <a:noFill/>
+        </p:spPr>
+        <p:txBody>
+          <a:bodyPr wrap="square" anchor="t" lIns="73152" rIns="73152" tIns="36576" bIns="36576">
+            <a:spAutoFit/>
+          </a:bodyPr>
+          <a:lstStyle/>
+          <a:p>
+            <a:pPr algn="l">
+              <a:spcAft>
+                <a:spcPts val="0"/>
+              </a:spcAft>
+            </a:pPr>
+            <a:r>
+              <a:rPr sz="1800" b="1" i="0">
+                <a:solidFill>
+                  <a:srgbClr val="16A34A"/>
+                </a:solidFill>
+                <a:latin typeface="Arial"/>
+              </a:rPr>
+              <a:t>Practise: the League</a:t>
+            </a:r>
+          </a:p>
+        </p:txBody>
+      </p:sp>
+      <p:sp>
+        <p:nvSpPr>
+          <p:cNvPr id="18" name="TextBox 17"/>
+          <p:cNvSpPr txBox="1"/>
+          <p:nvPr/>
+        </p:nvSpPr>
+        <p:spPr>
+          <a:xfrm>
+            <a:off x="8310676" y="1764791"/>
+            <a:ext cx="3332378" cy="2688336"/>
+          </a:xfrm>
+          <a:prstGeom prst="rect">
+            <a:avLst/>
+          </a:prstGeom>
+          <a:noFill/>
+        </p:spPr>
+        <p:txBody>
+          <a:bodyPr wrap="square" anchor="t" lIns="73152" rIns="73152" tIns="36576" bIns="36576">
+            <a:spAutoFit/>
+          </a:bodyPr>
+          <a:lstStyle/>
+          <a:p>
+            <a:pPr algn="l" marL="292608" indent="-256032">
+              <a:spcAft>
+                <a:spcPts val="600"/>
+              </a:spcAft>
+              <a:buChar char="•"/>
+            </a:pPr>
+            <a:r>
+              <a:rPr sz="1600" b="0" i="0">
+                <a:solidFill>
+                  <a:srgbClr val="0F172A"/>
+                </a:solidFill>
+                <a:latin typeface="Arial"/>
+              </a:rPr>
+              <a:t>Same 10 real decisions, $1,000 play money</a:t>
+            </a:r>
+          </a:p>
+          <a:p>
+            <a:pPr algn="l" marL="292608" indent="-256032">
+              <a:spcAft>
+                <a:spcPts val="600"/>
+              </a:spcAft>
+              <a:buChar char="•"/>
+            </a:pPr>
+            <a:r>
+              <a:rPr sz="1600" b="0" i="0">
+                <a:solidFill>
+                  <a:srgbClr val="0F172A"/>
+                </a:solidFill>
+                <a:latin typeface="Arial"/>
+              </a:rPr>
+              <a:t>Fills at ask + fee, like the agent</a:t>
+            </a:r>
+          </a:p>
+          <a:p>
+            <a:pPr algn="l" marL="292608" indent="-256032">
+              <a:spcAft>
+                <a:spcPts val="600"/>
+              </a:spcAft>
+              <a:buChar char="•"/>
+            </a:pPr>
+            <a:r>
+              <a:rPr sz="1600" b="1" i="0">
+                <a:solidFill>
+                  <a:srgbClr val="0F172A"/>
+                </a:solidFill>
+                <a:latin typeface="Arial"/>
+              </a:rPr>
+              <a:t>Ranked by CLV</a:t>
+            </a:r>
+            <a:r>
+              <a:rPr sz="1600" b="0" i="0">
+                <a:solidFill>
+                  <a:srgbClr val="0F172A"/>
+                </a:solidFill>
+                <a:latin typeface="Arial"/>
+              </a:rPr>
+              <a:t>, not profit (≥ 5 trades)</a:t>
+            </a:r>
+          </a:p>
+          <a:p>
+            <a:pPr algn="l" marL="292608" indent="-256032">
+              <a:spcAft>
+                <a:spcPts val="600"/>
+              </a:spcAft>
+              <a:buChar char="•"/>
+            </a:pPr>
+            <a:r>
+              <a:rPr sz="1600" b="0" i="0">
+                <a:solidFill>
+                  <a:srgbClr val="0F172A"/>
+                </a:solidFill>
+                <a:latin typeface="Arial"/>
+              </a:rPr>
+              <a:t>Raw-model bot +$15 with CLV −0.63¢: “costs”</a:t>
+            </a:r>
+          </a:p>
+        </p:txBody>
+      </p:sp>
       <p:pic>
         <p:nvPicPr>
-          <p:cNvPr id="7" name="Picture 6" descr="walkforward.png"/>
+          <p:cNvPr id="19" name="Picture 18" descr="league_reveal.png"/>
           <p:cNvPicPr>
             <a:picLocks noChangeAspect="1"/>
           </p:cNvPicPr>
@@ -5424,25 +7391,333 @@
         </p:blipFill>
         <p:spPr>
           <a:xfrm>
-            <a:off x="457200" y="1188719"/>
-            <a:ext cx="5943600" cy="3429000"/>
+            <a:off x="3249693" y="4663440"/>
+            <a:ext cx="5692308" cy="868680"/>
           </a:xfrm>
           <a:prstGeom prst="rect">
             <a:avLst/>
           </a:prstGeom>
         </p:spPr>
       </p:pic>
+      <p:sp>
+        <p:nvSpPr>
+          <p:cNvPr id="20" name="Rounded Rectangle 19"/>
+          <p:cNvSpPr/>
+          <p:nvPr/>
+        </p:nvSpPr>
+        <p:spPr>
+          <a:xfrm>
+            <a:off x="457200" y="5669280"/>
+            <a:ext cx="11277295" cy="594360"/>
+          </a:xfrm>
+          <a:prstGeom prst="roundRect">
+            <a:avLst>
+              <a:gd name="adj" fmla="val 12000"/>
+            </a:avLst>
+          </a:prstGeom>
+          <a:solidFill>
+            <a:srgbClr val="FEF3C7"/>
+          </a:solidFill>
+          <a:ln>
+            <a:noFill/>
+          </a:ln>
+          <a:effectLst/>
+        </p:spPr>
+        <p:style>
+          <a:lnRef idx="1">
+            <a:schemeClr val="accent1"/>
+          </a:lnRef>
+          <a:fillRef idx="3">
+            <a:schemeClr val="accent1"/>
+          </a:fillRef>
+          <a:effectRef idx="2">
+            <a:schemeClr val="accent1"/>
+          </a:effectRef>
+          <a:fontRef idx="minor">
+            <a:schemeClr val="lt1"/>
+          </a:fontRef>
+        </p:style>
+        <p:txBody>
+          <a:bodyPr rtlCol="0" anchor="ctr"/>
+          <a:lstStyle/>
+          <a:p>
+            <a:pPr algn="ctr"/>
+          </a:p>
+        </p:txBody>
+      </p:sp>
+      <p:sp>
+        <p:nvSpPr>
+          <p:cNvPr id="21" name="TextBox 20"/>
+          <p:cNvSpPr txBox="1"/>
+          <p:nvPr/>
+        </p:nvSpPr>
+        <p:spPr>
+          <a:xfrm>
+            <a:off x="548640" y="5669280"/>
+            <a:ext cx="11094415" cy="594360"/>
+          </a:xfrm>
+          <a:prstGeom prst="rect">
+            <a:avLst/>
+          </a:prstGeom>
+          <a:noFill/>
+        </p:spPr>
+        <p:txBody>
+          <a:bodyPr wrap="square" anchor="ctr" lIns="73152" rIns="73152" tIns="36576" bIns="36576">
+            <a:spAutoFit/>
+          </a:bodyPr>
+          <a:lstStyle/>
+          <a:p>
+            <a:pPr algn="l">
+              <a:spcAft>
+                <a:spcPts val="0"/>
+              </a:spcAft>
+            </a:pPr>
+            <a:r>
+              <a:rPr sz="1800" b="0" i="0">
+                <a:solidFill>
+                  <a:srgbClr val="0F172A"/>
+                </a:solidFill>
+                <a:latin typeface="Arial"/>
+              </a:rPr>
+              <a:t>Educational, paper money only · only information public at that moment · no promise words</a:t>
+            </a:r>
+          </a:p>
+        </p:txBody>
+      </p:sp>
+    </p:spTree>
+  </p:cSld>
+  <p:clrMapOvr>
+    <a:masterClrMapping/>
+  </p:clrMapOvr>
+</p:sld>
+</file>
+
+<file path=ppt/slides/slide13.xml><?xml version="1.0" encoding="utf-8"?>
+<p:sld xmlns:a="http://schemas.openxmlformats.org/drawingml/2006/main" xmlns:p="http://schemas.openxmlformats.org/presentationml/2006/main" xmlns:r="http://schemas.openxmlformats.org/officeDocument/2006/relationships">
+  <p:cSld>
+    <p:spTree>
+      <p:nvGrpSpPr>
+        <p:cNvPr id="1" name=""/>
+        <p:cNvGrpSpPr/>
+        <p:nvPr/>
+      </p:nvGrpSpPr>
+      <p:grpSpPr/>
+      <p:sp>
+        <p:nvSpPr>
+          <p:cNvPr id="2" name="Rectangle 1"/>
+          <p:cNvSpPr/>
+          <p:nvPr/>
+        </p:nvSpPr>
+        <p:spPr>
+          <a:xfrm>
+            <a:off x="0" y="0"/>
+            <a:ext cx="12191695" cy="868680"/>
+          </a:xfrm>
+          <a:prstGeom prst="rect">
+            <a:avLst/>
+          </a:prstGeom>
+          <a:solidFill>
+            <a:srgbClr val="1E293B"/>
+          </a:solidFill>
+          <a:ln>
+            <a:noFill/>
+          </a:ln>
+          <a:effectLst/>
+        </p:spPr>
+        <p:style>
+          <a:lnRef idx="1">
+            <a:schemeClr val="accent1"/>
+          </a:lnRef>
+          <a:fillRef idx="3">
+            <a:schemeClr val="accent1"/>
+          </a:fillRef>
+          <a:effectRef idx="2">
+            <a:schemeClr val="accent1"/>
+          </a:effectRef>
+          <a:fontRef idx="minor">
+            <a:schemeClr val="lt1"/>
+          </a:fontRef>
+        </p:style>
+        <p:txBody>
+          <a:bodyPr rtlCol="0" anchor="ctr"/>
+          <a:lstStyle/>
+          <a:p>
+            <a:pPr algn="ctr"/>
+          </a:p>
+        </p:txBody>
+      </p:sp>
+      <p:sp>
+        <p:nvSpPr>
+          <p:cNvPr id="3" name="Rectangle 2"/>
+          <p:cNvSpPr/>
+          <p:nvPr/>
+        </p:nvSpPr>
+        <p:spPr>
+          <a:xfrm>
+            <a:off x="0" y="868680"/>
+            <a:ext cx="12191695" cy="54864"/>
+          </a:xfrm>
+          <a:prstGeom prst="rect">
+            <a:avLst/>
+          </a:prstGeom>
+          <a:solidFill>
+            <a:srgbClr val="EA580C"/>
+          </a:solidFill>
+          <a:ln>
+            <a:noFill/>
+          </a:ln>
+          <a:effectLst/>
+        </p:spPr>
+        <p:style>
+          <a:lnRef idx="1">
+            <a:schemeClr val="accent1"/>
+          </a:lnRef>
+          <a:fillRef idx="3">
+            <a:schemeClr val="accent1"/>
+          </a:fillRef>
+          <a:effectRef idx="2">
+            <a:schemeClr val="accent1"/>
+          </a:effectRef>
+          <a:fontRef idx="minor">
+            <a:schemeClr val="lt1"/>
+          </a:fontRef>
+        </p:style>
+        <p:txBody>
+          <a:bodyPr rtlCol="0" anchor="ctr"/>
+          <a:lstStyle/>
+          <a:p>
+            <a:pPr algn="ctr"/>
+          </a:p>
+        </p:txBody>
+      </p:sp>
+      <p:sp>
+        <p:nvSpPr>
+          <p:cNvPr id="4" name="TextBox 3"/>
+          <p:cNvSpPr txBox="1"/>
+          <p:nvPr/>
+        </p:nvSpPr>
+        <p:spPr>
+          <a:xfrm>
+            <a:off x="457200" y="109728"/>
+            <a:ext cx="11277295" cy="685800"/>
+          </a:xfrm>
+          <a:prstGeom prst="rect">
+            <a:avLst/>
+          </a:prstGeom>
+          <a:noFill/>
+        </p:spPr>
+        <p:txBody>
+          <a:bodyPr wrap="square" anchor="ctr" lIns="73152" rIns="73152" tIns="36576" bIns="36576">
+            <a:spAutoFit/>
+          </a:bodyPr>
+          <a:lstStyle/>
+          <a:p>
+            <a:pPr algn="l">
+              <a:spcAft>
+                <a:spcPts val="0"/>
+              </a:spcAft>
+            </a:pPr>
+            <a:r>
+              <a:rPr sz="3000" b="1" i="0">
+                <a:solidFill>
+                  <a:srgbClr val="FFFFFF"/>
+                </a:solidFill>
+                <a:latin typeface="Arial"/>
+              </a:rPr>
+              <a:t>Team contributions</a:t>
+            </a:r>
+          </a:p>
+        </p:txBody>
+      </p:sp>
+      <p:sp>
+        <p:nvSpPr>
+          <p:cNvPr id="5" name="TextBox 4"/>
+          <p:cNvSpPr txBox="1"/>
+          <p:nvPr/>
+        </p:nvSpPr>
+        <p:spPr>
+          <a:xfrm>
+            <a:off x="457200" y="6446520"/>
+            <a:ext cx="9144000" cy="320040"/>
+          </a:xfrm>
+          <a:prstGeom prst="rect">
+            <a:avLst/>
+          </a:prstGeom>
+          <a:noFill/>
+        </p:spPr>
+        <p:txBody>
+          <a:bodyPr wrap="square" anchor="t" lIns="73152" rIns="73152" tIns="36576" bIns="36576">
+            <a:spAutoFit/>
+          </a:bodyPr>
+          <a:lstStyle/>
+          <a:p>
+            <a:pPr algn="l">
+              <a:spcAft>
+                <a:spcPts val="0"/>
+              </a:spcAft>
+            </a:pPr>
+            <a:r>
+              <a:rPr sz="1100" b="0" i="0">
+                <a:solidFill>
+                  <a:srgbClr val="64748B"/>
+                </a:solidFill>
+                <a:latin typeface="Arial"/>
+              </a:rPr>
+              <a:t>DASC7606C Group 12 · Market-Graded Learning: the closing price grades every component</a:t>
+            </a:r>
+          </a:p>
+        </p:txBody>
+      </p:sp>
+      <p:sp>
+        <p:nvSpPr>
+          <p:cNvPr id="6" name="TextBox 5"/>
+          <p:cNvSpPr txBox="1"/>
+          <p:nvPr/>
+        </p:nvSpPr>
+        <p:spPr>
+          <a:xfrm>
+            <a:off x="10820095" y="6446520"/>
+            <a:ext cx="914400" cy="320040"/>
+          </a:xfrm>
+          <a:prstGeom prst="rect">
+            <a:avLst/>
+          </a:prstGeom>
+          <a:noFill/>
+        </p:spPr>
+        <p:txBody>
+          <a:bodyPr wrap="square" anchor="t" lIns="73152" rIns="73152" tIns="36576" bIns="36576">
+            <a:spAutoFit/>
+          </a:bodyPr>
+          <a:lstStyle/>
+          <a:p>
+            <a:pPr algn="r">
+              <a:spcAft>
+                <a:spcPts val="0"/>
+              </a:spcAft>
+            </a:pPr>
+            <a:r>
+              <a:rPr sz="1100" b="0" i="0">
+                <a:solidFill>
+                  <a:srgbClr val="64748B"/>
+                </a:solidFill>
+                <a:latin typeface="Arial"/>
+              </a:rPr>
+              <a:t>13</a:t>
+            </a:r>
+          </a:p>
+        </p:txBody>
+      </p:sp>
       <p:graphicFrame>
         <p:nvGraphicFramePr>
-          <p:cNvPr id="8" name="Table 7"/>
+          <p:cNvPr id="7" name="Table 6"/>
           <p:cNvGraphicFramePr>
             <a:graphicFrameLocks noGrp="1"/>
           </p:cNvGraphicFramePr>
           <p:nvPr/>
         </p:nvGraphicFramePr>
         <p:xfrm>
-          <a:off x="6537960" y="1188720"/>
-          <a:ext cx="5193791" cy="2871216"/>
+          <a:off x="457200" y="1234439"/>
+          <a:ext cx="11277295" cy="3730752"/>
         </p:xfrm>
         <a:graphic>
           <a:graphicData uri="http://schemas.openxmlformats.org/drawingml/2006/table">
@@ -5451,11 +7726,12 @@
                 <a:tableStyleId>{5C22544A-7EE6-4342-B048-85BDC9FD1C3A}</a:tableStyleId>
               </a:tblPr>
               <a:tblGrid>
-                <a:gridCol w="1874519"/>
-                <a:gridCol w="868680"/>
-                <a:gridCol w="2450592"/>
+                <a:gridCol w="3017520"/>
+                <a:gridCol w="1097280"/>
+                <a:gridCol w="2560320"/>
+                <a:gridCol w="4602175"/>
               </a:tblGrid>
-              <a:tr h="457200">
+              <a:tr h="438912">
                 <a:tc>
                   <a:txBody>
                     <a:bodyPr wrap="square"/>
@@ -5469,7 +7745,7 @@
                           </a:solidFill>
                           <a:latin typeface="Arial"/>
                         </a:rPr>
-                        <a:t>Nov – 12 Apr</a:t>
+                        <a:t>Work</a:t>
                       </a:r>
                     </a:p>
                   </a:txBody>
@@ -5492,7 +7768,7 @@
                           </a:solidFill>
                           <a:latin typeface="Arial"/>
                         </a:rPr>
-                        <a:t>Trades</a:t>
+                        <a:t>PR</a:t>
                       </a:r>
                     </a:p>
                   </a:txBody>
@@ -5507,7 +7783,7 @@
                     <a:bodyPr wrap="square"/>
                     <a:lstStyle/>
                     <a:p>
-                      <a:pPr algn="ctr"/>
+                      <a:pPr algn="l"/>
                       <a:r>
                         <a:rPr sz="1600" b="1" i="0">
                           <a:solidFill>
@@ -5515,7 +7791,30 @@
                           </a:solidFill>
                           <a:latin typeface="Arial"/>
                         </a:rPr>
-                        <a:t>P&amp;L [95% CI]</a:t>
+                        <a:t>Who</a:t>
+                      </a:r>
+                    </a:p>
+                  </a:txBody>
+                  <a:tcPr marL="73152" marR="73152" marT="36576" marB="36576" anchor="ctr">
+                    <a:solidFill>
+                      <a:srgbClr val="1E293B"/>
+                    </a:solidFill>
+                  </a:tcPr>
+                </a:tc>
+                <a:tc>
+                  <a:txBody>
+                    <a:bodyPr wrap="square"/>
+                    <a:lstStyle/>
+                    <a:p>
+                      <a:pPr algn="l"/>
+                      <a:r>
+                        <a:rPr sz="1600" b="1" i="0">
+                          <a:solidFill>
+                            <a:srgbClr val="FFFFFF"/>
+                          </a:solidFill>
+                          <a:latin typeface="Arial"/>
+                        </a:rPr>
+                        <a:t>What it adds</a:t>
                       </a:r>
                     </a:p>
                   </a:txBody>
@@ -5526,7 +7825,7 @@
                   </a:tcPr>
                 </a:tc>
               </a:tr>
-              <a:tr h="603504">
+              <a:tr h="658368">
                 <a:tc>
                   <a:txBody>
                     <a:bodyPr wrap="square"/>
@@ -5534,19 +7833,19 @@
                     <a:p>
                       <a:pPr algn="l"/>
                       <a:r>
-                        <a:rPr sz="1600" b="1" i="0">
+                        <a:rPr sz="1600" b="0" i="0">
                           <a:solidFill>
                             <a:srgbClr val="0F172A"/>
                           </a:solidFill>
                           <a:latin typeface="Arial"/>
                         </a:rPr>
-                        <a:t>Never trade</a:t>
+                        <a:t>Pregame news and fair-odds loop</a:t>
                       </a:r>
                     </a:p>
                   </a:txBody>
                   <a:tcPr marL="73152" marR="73152" marT="36576" marB="36576" anchor="ctr">
                     <a:solidFill>
-                      <a:srgbClr val="DCFCE7"/>
+                      <a:srgbClr val="F1F5F9"/>
                     </a:solidFill>
                   </a:tcPr>
                 </a:tc>
@@ -5563,41 +7862,16 @@
                           </a:solidFill>
                           <a:latin typeface="Arial"/>
                         </a:rPr>
-                        <a:t>0</a:t>
+                        <a:t>#7</a:t>
                       </a:r>
                     </a:p>
                   </a:txBody>
                   <a:tcPr marL="73152" marR="73152" marT="36576" marB="36576" anchor="ctr">
                     <a:solidFill>
-                      <a:srgbClr val="DCFCE7"/>
+                      <a:srgbClr val="F1F5F9"/>
                     </a:solidFill>
                   </a:tcPr>
                 </a:tc>
-                <a:tc>
-                  <a:txBody>
-                    <a:bodyPr wrap="square"/>
-                    <a:lstStyle/>
-                    <a:p>
-                      <a:pPr algn="ctr"/>
-                      <a:r>
-                        <a:rPr sz="1600" b="1" i="0">
-                          <a:solidFill>
-                            <a:srgbClr val="0F172A"/>
-                          </a:solidFill>
-                          <a:latin typeface="Arial"/>
-                        </a:rPr>
-                        <a:t>$0</a:t>
-                      </a:r>
-                    </a:p>
-                  </a:txBody>
-                  <a:tcPr marL="73152" marR="73152" marT="36576" marB="36576" anchor="ctr">
-                    <a:solidFill>
-                      <a:srgbClr val="DCFCE7"/>
-                    </a:solidFill>
-                  </a:tcPr>
-                </a:tc>
-              </a:tr>
-              <a:tr h="603504">
                 <a:tc>
                   <a:txBody>
                     <a:bodyPr wrap="square"/>
@@ -5611,7 +7885,55 @@
                           </a:solidFill>
                           <a:latin typeface="Arial"/>
                         </a:rPr>
-                        <a:t>Full agent</a:t>
+                        <a:t>codingMiiichael</a:t>
+                      </a:r>
+                    </a:p>
+                  </a:txBody>
+                  <a:tcPr marL="73152" marR="73152" marT="36576" marB="36576" anchor="ctr">
+                    <a:solidFill>
+                      <a:srgbClr val="F1F5F9"/>
+                    </a:solidFill>
+                  </a:tcPr>
+                </a:tc>
+                <a:tc>
+                  <a:txBody>
+                    <a:bodyPr wrap="square"/>
+                    <a:lstStyle/>
+                    <a:p>
+                      <a:pPr algn="l"/>
+                      <a:r>
+                        <a:rPr sz="1600" b="0" i="0">
+                          <a:solidFill>
+                            <a:srgbClr val="0F172A"/>
+                          </a:solidFill>
+                          <a:latin typeface="Arial"/>
+                        </a:rPr>
+                        <a:t>Multi-source news polling → fair odds</a:t>
+                      </a:r>
+                    </a:p>
+                  </a:txBody>
+                  <a:tcPr marL="73152" marR="73152" marT="36576" marB="36576" anchor="ctr">
+                    <a:solidFill>
+                      <a:srgbClr val="F1F5F9"/>
+                    </a:solidFill>
+                  </a:tcPr>
+                </a:tc>
+              </a:tr>
+              <a:tr h="658368">
+                <a:tc>
+                  <a:txBody>
+                    <a:bodyPr wrap="square"/>
+                    <a:lstStyle/>
+                    <a:p>
+                      <a:pPr algn="l"/>
+                      <a:r>
+                        <a:rPr sz="1600" b="0" i="0">
+                          <a:solidFill>
+                            <a:srgbClr val="0F172A"/>
+                          </a:solidFill>
+                          <a:latin typeface="Arial"/>
+                        </a:rPr>
+                        <a:t>Player-feature experiment</a:t>
                       </a:r>
                     </a:p>
                   </a:txBody>
@@ -5634,7 +7956,172 @@
                           </a:solidFill>
                           <a:latin typeface="Arial"/>
                         </a:rPr>
-                        <a:t>157</a:t>
+                        <a:t>#8</a:t>
+                      </a:r>
+                    </a:p>
+                  </a:txBody>
+                  <a:tcPr marL="73152" marR="73152" marT="36576" marB="36576" anchor="ctr">
+                    <a:solidFill>
+                      <a:srgbClr val="FFFFFF"/>
+                    </a:solidFill>
+                  </a:tcPr>
+                </a:tc>
+                <a:tc>
+                  <a:txBody>
+                    <a:bodyPr wrap="square"/>
+                    <a:lstStyle/>
+                    <a:p>
+                      <a:pPr algn="l"/>
+                      <a:r>
+                        <a:rPr sz="1600" b="0" i="0">
+                          <a:solidFill>
+                            <a:srgbClr val="0F172A"/>
+                          </a:solidFill>
+                          <a:latin typeface="Arial"/>
+                        </a:rPr>
+                        <a:t>Catharine Li</a:t>
+                      </a:r>
+                    </a:p>
+                  </a:txBody>
+                  <a:tcPr marL="73152" marR="73152" marT="36576" marB="36576" anchor="ctr">
+                    <a:solidFill>
+                      <a:srgbClr val="FFFFFF"/>
+                    </a:solidFill>
+                  </a:tcPr>
+                </a:tc>
+                <a:tc>
+                  <a:txBody>
+                    <a:bodyPr wrap="square"/>
+                    <a:lstStyle/>
+                    <a:p>
+                      <a:pPr algn="l"/>
+                      <a:r>
+                        <a:rPr sz="1600" b="0" i="0">
+                          <a:solidFill>
+                            <a:srgbClr val="0F172A"/>
+                          </a:solidFill>
+                          <a:latin typeface="Arial"/>
+                        </a:rPr>
+                        <a:t>Isolated player features + probability calibration</a:t>
+                      </a:r>
+                    </a:p>
+                  </a:txBody>
+                  <a:tcPr marL="73152" marR="73152" marT="36576" marB="36576" anchor="ctr">
+                    <a:solidFill>
+                      <a:srgbClr val="FFFFFF"/>
+                    </a:solidFill>
+                  </a:tcPr>
+                </a:tc>
+              </a:tr>
+              <a:tr h="658368">
+                <a:tc>
+                  <a:txBody>
+                    <a:bodyPr wrap="square"/>
+                    <a:lstStyle/>
+                    <a:p>
+                      <a:pPr algn="l"/>
+                      <a:r>
+                        <a:rPr sz="1600" b="0" i="0">
+                          <a:solidFill>
+                            <a:srgbClr val="0F172A"/>
+                          </a:solidFill>
+                          <a:latin typeface="Arial"/>
+                        </a:rPr>
+                        <a:t>In-play news and odds</a:t>
+                      </a:r>
+                    </a:p>
+                  </a:txBody>
+                  <a:tcPr marL="73152" marR="73152" marT="36576" marB="36576" anchor="ctr">
+                    <a:solidFill>
+                      <a:srgbClr val="F1F5F9"/>
+                    </a:solidFill>
+                  </a:tcPr>
+                </a:tc>
+                <a:tc>
+                  <a:txBody>
+                    <a:bodyPr wrap="square"/>
+                    <a:lstStyle/>
+                    <a:p>
+                      <a:pPr algn="ctr"/>
+                      <a:r>
+                        <a:rPr sz="1600" b="0" i="0">
+                          <a:solidFill>
+                            <a:srgbClr val="0F172A"/>
+                          </a:solidFill>
+                          <a:latin typeface="Arial"/>
+                        </a:rPr>
+                        <a:t>#9</a:t>
+                      </a:r>
+                    </a:p>
+                  </a:txBody>
+                  <a:tcPr marL="73152" marR="73152" marT="36576" marB="36576" anchor="ctr">
+                    <a:solidFill>
+                      <a:srgbClr val="F1F5F9"/>
+                    </a:solidFill>
+                  </a:tcPr>
+                </a:tc>
+                <a:tc>
+                  <a:txBody>
+                    <a:bodyPr wrap="square"/>
+                    <a:lstStyle/>
+                    <a:p>
+                      <a:pPr algn="l"/>
+                      <a:r>
+                        <a:rPr sz="1600" b="0" i="0">
+                          <a:solidFill>
+                            <a:srgbClr val="0F172A"/>
+                          </a:solidFill>
+                          <a:latin typeface="Arial"/>
+                        </a:rPr>
+                        <a:t>codingMiiichael</a:t>
+                      </a:r>
+                    </a:p>
+                  </a:txBody>
+                  <a:tcPr marL="73152" marR="73152" marT="36576" marB="36576" anchor="ctr">
+                    <a:solidFill>
+                      <a:srgbClr val="F1F5F9"/>
+                    </a:solidFill>
+                  </a:tcPr>
+                </a:tc>
+                <a:tc>
+                  <a:txBody>
+                    <a:bodyPr wrap="square"/>
+                    <a:lstStyle/>
+                    <a:p>
+                      <a:pPr algn="l"/>
+                      <a:r>
+                        <a:rPr sz="1600" b="0" i="0">
+                          <a:solidFill>
+                            <a:srgbClr val="0F172A"/>
+                          </a:solidFill>
+                          <a:latin typeface="Arial"/>
+                        </a:rPr>
+                        <a:t>Independent in-play updates (synthetic scenarios)</a:t>
+                      </a:r>
+                    </a:p>
+                  </a:txBody>
+                  <a:tcPr marL="73152" marR="73152" marT="36576" marB="36576" anchor="ctr">
+                    <a:solidFill>
+                      <a:srgbClr val="F1F5F9"/>
+                    </a:solidFill>
+                  </a:tcPr>
+                </a:tc>
+              </a:tr>
+              <a:tr h="658368">
+                <a:tc>
+                  <a:txBody>
+                    <a:bodyPr wrap="square"/>
+                    <a:lstStyle/>
+                    <a:p>
+                      <a:pPr algn="l"/>
+                      <a:r>
+                        <a:rPr sz="1600" b="0" i="0">
+                          <a:solidFill>
+                            <a:srgbClr val="0F172A"/>
+                          </a:solidFill>
+                          <a:latin typeface="Arial"/>
+                        </a:rPr>
+                        <a:t>Live Polymarket markets</a:t>
                       </a:r>
                     </a:p>
                   </a:txBody>
@@ -5657,7 +8144,7 @@
                           </a:solidFill>
                           <a:latin typeface="Arial"/>
                         </a:rPr>
-                        <a:t>−$25 [−$569 to +$564]</a:t>
+                        <a:t>#11, #12</a:t>
                       </a:r>
                     </a:p>
                   </a:txBody>
@@ -5667,8 +8154,6 @@
                     </a:solidFill>
                   </a:tcPr>
                 </a:tc>
-              </a:tr>
-              <a:tr h="603504">
                 <a:tc>
                   <a:txBody>
                     <a:bodyPr wrap="square"/>
@@ -5682,7 +8167,55 @@
                           </a:solidFill>
                           <a:latin typeface="Arial"/>
                         </a:rPr>
-                        <a:t>No learning</a:t>
+                        <a:t>shidafuyang-alt, hijojo</a:t>
+                      </a:r>
+                    </a:p>
+                  </a:txBody>
+                  <a:tcPr marL="73152" marR="73152" marT="36576" marB="36576" anchor="ctr">
+                    <a:solidFill>
+                      <a:srgbClr val="FFFFFF"/>
+                    </a:solidFill>
+                  </a:tcPr>
+                </a:tc>
+                <a:tc>
+                  <a:txBody>
+                    <a:bodyPr wrap="square"/>
+                    <a:lstStyle/>
+                    <a:p>
+                      <a:pPr algn="l"/>
+                      <a:r>
+                        <a:rPr sz="1600" b="0" i="0">
+                          <a:solidFill>
+                            <a:srgbClr val="0F172A"/>
+                          </a:solidFill>
+                          <a:latin typeface="Arial"/>
+                        </a:rPr>
+                        <a:t>Read-only live prices and page</a:t>
+                      </a:r>
+                    </a:p>
+                  </a:txBody>
+                  <a:tcPr marL="73152" marR="73152" marT="36576" marB="36576" anchor="ctr">
+                    <a:solidFill>
+                      <a:srgbClr val="FFFFFF"/>
+                    </a:solidFill>
+                  </a:tcPr>
+                </a:tc>
+              </a:tr>
+              <a:tr h="658368">
+                <a:tc>
+                  <a:txBody>
+                    <a:bodyPr wrap="square"/>
+                    <a:lstStyle/>
+                    <a:p>
+                      <a:pPr algn="l"/>
+                      <a:r>
+                        <a:rPr sz="1600" b="0" i="0">
+                          <a:solidFill>
+                            <a:srgbClr val="0F172A"/>
+                          </a:solidFill>
+                          <a:latin typeface="Arial"/>
+                        </a:rPr>
+                        <a:t>Replay, agent and evaluation</a:t>
                       </a:r>
                     </a:p>
                   </a:txBody>
@@ -5705,7 +8238,7 @@
                           </a:solidFill>
                           <a:latin typeface="Arial"/>
                         </a:rPr>
-                        <a:t>276</a:t>
+                        <a:t>branch</a:t>
                       </a:r>
                     </a:p>
                   </a:txBody>
@@ -5720,7 +8253,7 @@
                     <a:bodyPr wrap="square"/>
                     <a:lstStyle/>
                     <a:p>
-                      <a:pPr algn="ctr"/>
+                      <a:pPr algn="l"/>
                       <a:r>
                         <a:rPr sz="1600" b="0" i="0">
                           <a:solidFill>
@@ -5728,7 +8261,7 @@
                           </a:solidFill>
                           <a:latin typeface="Arial"/>
                         </a:rPr>
-                        <a:t>−$407 [−$1,324 to +$553]</a:t>
+                        <a:t>Michael Ngan</a:t>
                       </a:r>
                     </a:p>
                   </a:txBody>
@@ -5738,8 +8271,6 @@
                     </a:solidFill>
                   </a:tcPr>
                 </a:tc>
-              </a:tr>
-              <a:tr h="603504">
                 <a:tc>
                   <a:txBody>
                     <a:bodyPr wrap="square"/>
@@ -5753,59 +8284,13 @@
                           </a:solidFill>
                           <a:latin typeface="Arial"/>
                         </a:rPr>
-                        <a:t>Raw model</a:t>
+                        <a:t>As-of replay, M4 / M6, LangGraph agent, gate, walk-forward, Coach, League</a:t>
                       </a:r>
                     </a:p>
                   </a:txBody>
                   <a:tcPr marL="73152" marR="73152" marT="36576" marB="36576" anchor="ctr">
                     <a:solidFill>
-                      <a:srgbClr val="FFFFFF"/>
-                    </a:solidFill>
-                  </a:tcPr>
-                </a:tc>
-                <a:tc>
-                  <a:txBody>
-                    <a:bodyPr wrap="square"/>
-                    <a:lstStyle/>
-                    <a:p>
-                      <a:pPr algn="ctr"/>
-                      <a:r>
-                        <a:rPr sz="1600" b="0" i="0">
-                          <a:solidFill>
-                            <a:srgbClr val="0F172A"/>
-                          </a:solidFill>
-                          <a:latin typeface="Arial"/>
-                        </a:rPr>
-                        <a:t>711</a:t>
-                      </a:r>
-                    </a:p>
-                  </a:txBody>
-                  <a:tcPr marL="73152" marR="73152" marT="36576" marB="36576" anchor="ctr">
-                    <a:solidFill>
-                      <a:srgbClr val="FFFFFF"/>
-                    </a:solidFill>
-                  </a:tcPr>
-                </a:tc>
-                <a:tc>
-                  <a:txBody>
-                    <a:bodyPr wrap="square"/>
-                    <a:lstStyle/>
-                    <a:p>
-                      <a:pPr algn="ctr"/>
-                      <a:r>
-                        <a:rPr sz="1600" b="0" i="0">
-                          <a:solidFill>
-                            <a:srgbClr val="0F172A"/>
-                          </a:solidFill>
-                          <a:latin typeface="Arial"/>
-                        </a:rPr>
-                        <a:t>−$2,475 [−$3,995 to −$845]</a:t>
-                      </a:r>
-                    </a:p>
-                  </a:txBody>
-                  <a:tcPr marL="73152" marR="73152" marT="36576" marB="36576" anchor="ctr">
-                    <a:solidFill>
-                      <a:srgbClr val="FFFFFF"/>
+                      <a:srgbClr val="F1F5F9"/>
                     </a:solidFill>
                   </a:tcPr>
                 </a:tc>
@@ -5816,1537 +8301,14 @@
       </p:graphicFrame>
       <p:sp>
         <p:nvSpPr>
-          <p:cNvPr id="9" name="TextBox 8"/>
-          <p:cNvSpPr txBox="1"/>
-          <p:nvPr/>
-        </p:nvSpPr>
-        <p:spPr>
-          <a:xfrm>
-            <a:off x="6537960" y="4114800"/>
-            <a:ext cx="5196535" cy="640080"/>
-          </a:xfrm>
-          <a:prstGeom prst="rect">
-            <a:avLst/>
-          </a:prstGeom>
-          <a:noFill/>
-        </p:spPr>
-        <p:txBody>
-          <a:bodyPr wrap="square" anchor="t" lIns="73152" rIns="73152" tIns="36576" bIns="36576">
-            <a:spAutoFit/>
-          </a:bodyPr>
-          <a:lstStyle/>
-          <a:p>
-            <a:pPr algn="l">
-              <a:spcAft>
-                <a:spcPts val="800"/>
-              </a:spcAft>
-            </a:pPr>
-            <a:r>
-              <a:rPr sz="1400" b="0" i="0">
-                <a:solidFill>
-                  <a:srgbClr val="64748B"/>
-                </a:solidFill>
-                <a:latin typeface="Arial"/>
-              </a:rPr>
-              <a:t>Day-clustered bootstrap; M4 retrained monthly. Chart totals include play-offs, the table does not</a:t>
-            </a:r>
-          </a:p>
-        </p:txBody>
-      </p:sp>
-      <p:sp>
-        <p:nvSpPr>
-          <p:cNvPr id="10" name="TextBox 9"/>
-          <p:cNvSpPr txBox="1"/>
-          <p:nvPr/>
-        </p:nvSpPr>
-        <p:spPr>
-          <a:xfrm>
-            <a:off x="457200" y="4663440"/>
-            <a:ext cx="11277295" cy="1691640"/>
-          </a:xfrm>
-          <a:prstGeom prst="rect">
-            <a:avLst/>
-          </a:prstGeom>
-          <a:noFill/>
-        </p:spPr>
-        <p:txBody>
-          <a:bodyPr wrap="square" anchor="t" lIns="73152" rIns="73152" tIns="36576" bIns="36576">
-            <a:spAutoFit/>
-          </a:bodyPr>
-          <a:lstStyle/>
-          <a:p>
-            <a:pPr algn="l" marL="292608" indent="-256032">
-              <a:spcAft>
-                <a:spcPts val="400"/>
-              </a:spcAft>
-              <a:buChar char="•"/>
-            </a:pPr>
-            <a:r>
-              <a:rPr sz="1800" b="0" i="0">
-                <a:solidFill>
-                  <a:srgbClr val="0F172A"/>
-                </a:solidFill>
-                <a:latin typeface="Arial"/>
-              </a:rPr>
-              <a:t>Mean CLV &lt; 0 for every setup; </a:t>
-            </a:r>
-            <a:r>
-              <a:rPr sz="1800" b="1" i="0">
-                <a:solidFill>
-                  <a:srgbClr val="0F172A"/>
-                </a:solidFill>
-                <a:latin typeface="Arial"/>
-              </a:rPr>
-              <a:t>every 95% CI entirely below zero</a:t>
-            </a:r>
-          </a:p>
-          <a:p>
-            <a:pPr algn="l" marL="292608" indent="-256032">
-              <a:spcAft>
-                <a:spcPts val="400"/>
-              </a:spcAft>
-              <a:buChar char="•"/>
-            </a:pPr>
-            <a:r>
-              <a:rPr sz="1800" b="0" i="0">
-                <a:solidFill>
-                  <a:srgbClr val="0F172A"/>
-                </a:solidFill>
-                <a:latin typeface="Arial"/>
-              </a:rPr>
-              <a:t>Market anchor is real: +$2,450 vs raw model (p = 0.002); learning = trading less (p = 0.13)</a:t>
-            </a:r>
-          </a:p>
-          <a:p>
-            <a:pPr algn="l" marL="292608" indent="-256032">
-              <a:spcAft>
-                <a:spcPts val="400"/>
-              </a:spcAft>
-              <a:buChar char="•"/>
-            </a:pPr>
-            <a:r>
-              <a:rPr sz="1800" b="0" i="0">
-                <a:solidFill>
-                  <a:srgbClr val="0F172A"/>
-                </a:solidFill>
-                <a:latin typeface="Arial"/>
-              </a:rPr>
-              <a:t>Play-off holdout (87 games): full agent 0 trades; no learning 6 trades, −$74; raw model +$450 with negative CLV (luck)</a:t>
-            </a:r>
-          </a:p>
-        </p:txBody>
-      </p:sp>
-    </p:spTree>
-  </p:cSld>
-  <p:clrMapOvr>
-    <a:masterClrMapping/>
-  </p:clrMapOvr>
-</p:sld>
-</file>
-
-<file path=ppt/slides/slide12.xml><?xml version="1.0" encoding="utf-8"?>
-<p:sld xmlns:a="http://schemas.openxmlformats.org/drawingml/2006/main" xmlns:p="http://schemas.openxmlformats.org/presentationml/2006/main" xmlns:r="http://schemas.openxmlformats.org/officeDocument/2006/relationships">
-  <p:cSld>
-    <p:spTree>
-      <p:nvGrpSpPr>
-        <p:cNvPr id="1" name=""/>
-        <p:cNvGrpSpPr/>
-        <p:nvPr/>
-      </p:nvGrpSpPr>
-      <p:grpSpPr/>
-      <p:sp>
-        <p:nvSpPr>
-          <p:cNvPr id="2" name="Rectangle 1"/>
+          <p:cNvPr id="8" name="Rounded Rectangle 7"/>
           <p:cNvSpPr/>
           <p:nvPr/>
         </p:nvSpPr>
         <p:spPr>
           <a:xfrm>
-            <a:off x="0" y="0"/>
-            <a:ext cx="12191695" cy="868680"/>
-          </a:xfrm>
-          <a:prstGeom prst="rect">
-            <a:avLst/>
-          </a:prstGeom>
-          <a:solidFill>
-            <a:srgbClr val="1E293B"/>
-          </a:solidFill>
-          <a:ln>
-            <a:noFill/>
-          </a:ln>
-          <a:effectLst/>
-        </p:spPr>
-        <p:style>
-          <a:lnRef idx="1">
-            <a:schemeClr val="accent1"/>
-          </a:lnRef>
-          <a:fillRef idx="3">
-            <a:schemeClr val="accent1"/>
-          </a:fillRef>
-          <a:effectRef idx="2">
-            <a:schemeClr val="accent1"/>
-          </a:effectRef>
-          <a:fontRef idx="minor">
-            <a:schemeClr val="lt1"/>
-          </a:fontRef>
-        </p:style>
-        <p:txBody>
-          <a:bodyPr rtlCol="0" anchor="ctr"/>
-          <a:lstStyle/>
-          <a:p>
-            <a:pPr algn="ctr"/>
-          </a:p>
-        </p:txBody>
-      </p:sp>
-      <p:sp>
-        <p:nvSpPr>
-          <p:cNvPr id="3" name="Rectangle 2"/>
-          <p:cNvSpPr/>
-          <p:nvPr/>
-        </p:nvSpPr>
-        <p:spPr>
-          <a:xfrm>
-            <a:off x="0" y="868680"/>
-            <a:ext cx="12191695" cy="54864"/>
-          </a:xfrm>
-          <a:prstGeom prst="rect">
-            <a:avLst/>
-          </a:prstGeom>
-          <a:solidFill>
-            <a:srgbClr val="EA580C"/>
-          </a:solidFill>
-          <a:ln>
-            <a:noFill/>
-          </a:ln>
-          <a:effectLst/>
-        </p:spPr>
-        <p:style>
-          <a:lnRef idx="1">
-            <a:schemeClr val="accent1"/>
-          </a:lnRef>
-          <a:fillRef idx="3">
-            <a:schemeClr val="accent1"/>
-          </a:fillRef>
-          <a:effectRef idx="2">
-            <a:schemeClr val="accent1"/>
-          </a:effectRef>
-          <a:fontRef idx="minor">
-            <a:schemeClr val="lt1"/>
-          </a:fontRef>
-        </p:style>
-        <p:txBody>
-          <a:bodyPr rtlCol="0" anchor="ctr"/>
-          <a:lstStyle/>
-          <a:p>
-            <a:pPr algn="ctr"/>
-          </a:p>
-        </p:txBody>
-      </p:sp>
-      <p:sp>
-        <p:nvSpPr>
-          <p:cNvPr id="4" name="TextBox 3"/>
-          <p:cNvSpPr txBox="1"/>
-          <p:nvPr/>
-        </p:nvSpPr>
-        <p:spPr>
-          <a:xfrm>
-            <a:off x="457200" y="109728"/>
+            <a:off x="457200" y="5440680"/>
             <a:ext cx="11277295" cy="685800"/>
-          </a:xfrm>
-          <a:prstGeom prst="rect">
-            <a:avLst/>
-          </a:prstGeom>
-          <a:noFill/>
-        </p:spPr>
-        <p:txBody>
-          <a:bodyPr wrap="square" anchor="ctr" lIns="73152" rIns="73152" tIns="36576" bIns="36576">
-            <a:spAutoFit/>
-          </a:bodyPr>
-          <a:lstStyle/>
-          <a:p>
-            <a:pPr algn="l">
-              <a:spcAft>
-                <a:spcPts val="0"/>
-              </a:spcAft>
-            </a:pPr>
-            <a:r>
-              <a:rPr sz="3000" b="1" i="0">
-                <a:solidFill>
-                  <a:srgbClr val="FFFFFF"/>
-                </a:solidFill>
-                <a:latin typeface="Arial"/>
-              </a:rPr>
-              <a:t>Our product: educate and protect the consumer</a:t>
-            </a:r>
-          </a:p>
-        </p:txBody>
-      </p:sp>
-      <p:sp>
-        <p:nvSpPr>
-          <p:cNvPr id="5" name="TextBox 4"/>
-          <p:cNvSpPr txBox="1"/>
-          <p:nvPr/>
-        </p:nvSpPr>
-        <p:spPr>
-          <a:xfrm>
-            <a:off x="457200" y="6446520"/>
-            <a:ext cx="9144000" cy="320040"/>
-          </a:xfrm>
-          <a:prstGeom prst="rect">
-            <a:avLst/>
-          </a:prstGeom>
-          <a:noFill/>
-        </p:spPr>
-        <p:txBody>
-          <a:bodyPr wrap="square" anchor="t" lIns="73152" rIns="73152" tIns="36576" bIns="36576">
-            <a:spAutoFit/>
-          </a:bodyPr>
-          <a:lstStyle/>
-          <a:p>
-            <a:pPr algn="l">
-              <a:spcAft>
-                <a:spcPts val="0"/>
-              </a:spcAft>
-            </a:pPr>
-            <a:r>
-              <a:rPr sz="1100" b="0" i="0">
-                <a:solidFill>
-                  <a:srgbClr val="64748B"/>
-                </a:solidFill>
-                <a:latin typeface="Arial"/>
-              </a:rPr>
-              <a:t>DASC7606C Group 12 · Betting markets are tilted against consumers</a:t>
-            </a:r>
-          </a:p>
-        </p:txBody>
-      </p:sp>
-      <p:sp>
-        <p:nvSpPr>
-          <p:cNvPr id="6" name="TextBox 5"/>
-          <p:cNvSpPr txBox="1"/>
-          <p:nvPr/>
-        </p:nvSpPr>
-        <p:spPr>
-          <a:xfrm>
-            <a:off x="10820095" y="6446520"/>
-            <a:ext cx="914400" cy="320040"/>
-          </a:xfrm>
-          <a:prstGeom prst="rect">
-            <a:avLst/>
-          </a:prstGeom>
-          <a:noFill/>
-        </p:spPr>
-        <p:txBody>
-          <a:bodyPr wrap="square" anchor="t" lIns="73152" rIns="73152" tIns="36576" bIns="36576">
-            <a:spAutoFit/>
-          </a:bodyPr>
-          <a:lstStyle/>
-          <a:p>
-            <a:pPr algn="r">
-              <a:spcAft>
-                <a:spcPts val="0"/>
-              </a:spcAft>
-            </a:pPr>
-            <a:r>
-              <a:rPr sz="1100" b="0" i="0">
-                <a:solidFill>
-                  <a:srgbClr val="64748B"/>
-                </a:solidFill>
-                <a:latin typeface="Arial"/>
-              </a:rPr>
-              <a:t>12</a:t>
-            </a:r>
-          </a:p>
-        </p:txBody>
-      </p:sp>
-      <p:pic>
-        <p:nvPicPr>
-          <p:cNvPr id="7" name="Picture 6" descr="agent_workflow.png"/>
-          <p:cNvPicPr>
-            <a:picLocks noChangeAspect="1"/>
-          </p:cNvPicPr>
-          <p:nvPr/>
-        </p:nvPicPr>
-        <p:blipFill>
-          <a:blip r:embed="rId3"/>
-          <a:stretch>
-            <a:fillRect/>
-          </a:stretch>
-        </p:blipFill>
-        <p:spPr>
-          <a:xfrm>
-            <a:off x="457200" y="1853719"/>
-            <a:ext cx="6766560" cy="3744920"/>
-          </a:xfrm>
-          <a:prstGeom prst="rect">
-            <a:avLst/>
-          </a:prstGeom>
-        </p:spPr>
-      </p:pic>
-      <p:sp>
-        <p:nvSpPr>
-          <p:cNvPr id="8" name="TextBox 7"/>
-          <p:cNvSpPr txBox="1"/>
-          <p:nvPr/>
-        </p:nvSpPr>
-        <p:spPr>
-          <a:xfrm>
-            <a:off x="7406640" y="1234439"/>
-            <a:ext cx="4327855" cy="5120640"/>
-          </a:xfrm>
-          <a:prstGeom prst="rect">
-            <a:avLst/>
-          </a:prstGeom>
-          <a:noFill/>
-        </p:spPr>
-        <p:txBody>
-          <a:bodyPr wrap="square" anchor="t" lIns="73152" rIns="73152" tIns="36576" bIns="36576">
-            <a:spAutoFit/>
-          </a:bodyPr>
-          <a:lstStyle/>
-          <a:p>
-            <a:pPr algn="l" marL="292608" indent="-256032">
-              <a:spcAft>
-                <a:spcPts val="800"/>
-              </a:spcAft>
-              <a:buChar char="•"/>
-            </a:pPr>
-            <a:r>
-              <a:rPr sz="1800" b="1" i="0">
-                <a:solidFill>
-                  <a:srgbClr val="0F172A"/>
-                </a:solidFill>
-                <a:latin typeface="Arial"/>
-              </a:rPr>
-              <a:t>Pass by default:</a:t>
-            </a:r>
-            <a:r>
-              <a:rPr sz="1800" b="0" i="0">
-                <a:solidFill>
-                  <a:srgbClr val="0F172A"/>
-                </a:solidFill>
-                <a:latin typeface="Arial"/>
-              </a:rPr>
-              <a:t> 90% of decision points → no trade</a:t>
-            </a:r>
-          </a:p>
-          <a:p>
-            <a:pPr algn="l" marL="292608" indent="-256032">
-              <a:spcAft>
-                <a:spcPts val="800"/>
-              </a:spcAft>
-              <a:buChar char="•"/>
-            </a:pPr>
-            <a:r>
-              <a:rPr sz="1800" b="1" i="0">
-                <a:solidFill>
-                  <a:srgbClr val="0F172A"/>
-                </a:solidFill>
-                <a:latin typeface="Arial"/>
-              </a:rPr>
-              <a:t>No-order reason:</a:t>
-            </a:r>
-            <a:r>
-              <a:rPr sz="1800" b="0" i="0">
-                <a:solidFill>
-                  <a:srgbClr val="0F172A"/>
-                </a:solidFill>
-                <a:latin typeface="Arial"/>
-              </a:rPr>
-              <a:t> “gap after fees too small or the price already moved”</a:t>
-            </a:r>
-          </a:p>
-          <a:p>
-            <a:pPr algn="l" marL="292608" indent="-256032">
-              <a:spcAft>
-                <a:spcPts val="800"/>
-              </a:spcAft>
-              <a:buChar char="•"/>
-            </a:pPr>
-            <a:r>
-              <a:rPr sz="1800" b="1" i="0">
-                <a:solidFill>
-                  <a:srgbClr val="0F172A"/>
-                </a:solidFill>
-                <a:latin typeface="Arial"/>
-              </a:rPr>
-              <a:t>Costs shown:</a:t>
-            </a:r>
-            <a:r>
-              <a:rPr sz="1800" b="0" i="0">
-                <a:solidFill>
-                  <a:srgbClr val="0F172A"/>
-                </a:solidFill>
-                <a:latin typeface="Arial"/>
-              </a:rPr>
-              <a:t> bid-ask in briefs; Coach shows break-even after spread + fee</a:t>
-            </a:r>
-          </a:p>
-          <a:p>
-            <a:pPr algn="l" marL="292608" indent="-256032">
-              <a:spcAft>
-                <a:spcPts val="800"/>
-              </a:spcAft>
-              <a:buChar char="•"/>
-            </a:pPr>
-            <a:r>
-              <a:rPr sz="1800" b="1" i="0">
-                <a:solidFill>
-                  <a:srgbClr val="0F172A"/>
-                </a:solidFill>
-                <a:latin typeface="Arial"/>
-              </a:rPr>
-              <a:t>Code limits:</a:t>
-            </a:r>
-            <a:r>
-              <a:rPr sz="1800" b="0" i="0">
-                <a:solidFill>
-                  <a:srgbClr val="0F172A"/>
-                </a:solidFill>
-                <a:latin typeface="Arial"/>
-              </a:rPr>
-              <a:t> $50 / order, $100 / game, $300 / day; bans “lock”, “guaranteed”, “risk-free”</a:t>
-            </a:r>
-          </a:p>
-          <a:p>
-            <a:pPr algn="l" marL="292608" indent="-256032">
-              <a:spcAft>
-                <a:spcPts val="800"/>
-              </a:spcAft>
-              <a:buChar char="•"/>
-            </a:pPr>
-            <a:r>
-              <a:rPr sz="1800" b="1" i="0">
-                <a:solidFill>
-                  <a:srgbClr val="0F172A"/>
-                </a:solidFill>
-                <a:latin typeface="Arial"/>
-              </a:rPr>
-              <a:t>9 / 9</a:t>
-            </a:r>
-            <a:r>
-              <a:rPr sz="1800" b="0" i="0">
-                <a:solidFill>
-                  <a:srgbClr val="0F172A"/>
-                </a:solidFill>
-                <a:latin typeface="Arial"/>
-              </a:rPr>
-              <a:t> planted violations blocked</a:t>
-            </a:r>
-          </a:p>
-          <a:p>
-            <a:pPr algn="l" marL="292608" indent="-256032">
-              <a:spcAft>
-                <a:spcPts val="800"/>
-              </a:spcAft>
-              <a:buChar char="•"/>
-            </a:pPr>
-            <a:r>
-              <a:rPr sz="1800" b="1" i="0">
-                <a:solidFill>
-                  <a:srgbClr val="0F172A"/>
-                </a:solidFill>
-                <a:latin typeface="Arial"/>
-              </a:rPr>
-              <a:t>Learned rules:</a:t>
-            </a:r>
-            <a:r>
-              <a:rPr sz="1800" b="0" i="0">
-                <a:solidFill>
-                  <a:srgbClr val="0F172A"/>
-                </a:solidFill>
-                <a:latin typeface="Arial"/>
-              </a:rPr>
-              <a:t> skip ≤ 35¢; skip after a 2¢ move against</a:t>
-            </a:r>
-          </a:p>
-        </p:txBody>
-      </p:sp>
-    </p:spTree>
-  </p:cSld>
-  <p:clrMapOvr>
-    <a:masterClrMapping/>
-  </p:clrMapOvr>
-</p:sld>
-</file>
-
-<file path=ppt/slides/slide13.xml><?xml version="1.0" encoding="utf-8"?>
-<p:sld xmlns:a="http://schemas.openxmlformats.org/drawingml/2006/main" xmlns:p="http://schemas.openxmlformats.org/presentationml/2006/main" xmlns:r="http://schemas.openxmlformats.org/officeDocument/2006/relationships">
-  <p:cSld>
-    <p:spTree>
-      <p:nvGrpSpPr>
-        <p:cNvPr id="1" name=""/>
-        <p:cNvGrpSpPr/>
-        <p:nvPr/>
-      </p:nvGrpSpPr>
-      <p:grpSpPr/>
-      <p:sp>
-        <p:nvSpPr>
-          <p:cNvPr id="2" name="Rectangle 1"/>
-          <p:cNvSpPr/>
-          <p:nvPr/>
-        </p:nvSpPr>
-        <p:spPr>
-          <a:xfrm>
-            <a:off x="0" y="0"/>
-            <a:ext cx="12191695" cy="868680"/>
-          </a:xfrm>
-          <a:prstGeom prst="rect">
-            <a:avLst/>
-          </a:prstGeom>
-          <a:solidFill>
-            <a:srgbClr val="1E293B"/>
-          </a:solidFill>
-          <a:ln>
-            <a:noFill/>
-          </a:ln>
-          <a:effectLst/>
-        </p:spPr>
-        <p:style>
-          <a:lnRef idx="1">
-            <a:schemeClr val="accent1"/>
-          </a:lnRef>
-          <a:fillRef idx="3">
-            <a:schemeClr val="accent1"/>
-          </a:fillRef>
-          <a:effectRef idx="2">
-            <a:schemeClr val="accent1"/>
-          </a:effectRef>
-          <a:fontRef idx="minor">
-            <a:schemeClr val="lt1"/>
-          </a:fontRef>
-        </p:style>
-        <p:txBody>
-          <a:bodyPr rtlCol="0" anchor="ctr"/>
-          <a:lstStyle/>
-          <a:p>
-            <a:pPr algn="ctr"/>
-          </a:p>
-        </p:txBody>
-      </p:sp>
-      <p:sp>
-        <p:nvSpPr>
-          <p:cNvPr id="3" name="Rectangle 2"/>
-          <p:cNvSpPr/>
-          <p:nvPr/>
-        </p:nvSpPr>
-        <p:spPr>
-          <a:xfrm>
-            <a:off x="0" y="868680"/>
-            <a:ext cx="12191695" cy="54864"/>
-          </a:xfrm>
-          <a:prstGeom prst="rect">
-            <a:avLst/>
-          </a:prstGeom>
-          <a:solidFill>
-            <a:srgbClr val="EA580C"/>
-          </a:solidFill>
-          <a:ln>
-            <a:noFill/>
-          </a:ln>
-          <a:effectLst/>
-        </p:spPr>
-        <p:style>
-          <a:lnRef idx="1">
-            <a:schemeClr val="accent1"/>
-          </a:lnRef>
-          <a:fillRef idx="3">
-            <a:schemeClr val="accent1"/>
-          </a:fillRef>
-          <a:effectRef idx="2">
-            <a:schemeClr val="accent1"/>
-          </a:effectRef>
-          <a:fontRef idx="minor">
-            <a:schemeClr val="lt1"/>
-          </a:fontRef>
-        </p:style>
-        <p:txBody>
-          <a:bodyPr rtlCol="0" anchor="ctr"/>
-          <a:lstStyle/>
-          <a:p>
-            <a:pPr algn="ctr"/>
-          </a:p>
-        </p:txBody>
-      </p:sp>
-      <p:sp>
-        <p:nvSpPr>
-          <p:cNvPr id="4" name="TextBox 3"/>
-          <p:cNvSpPr txBox="1"/>
-          <p:nvPr/>
-        </p:nvSpPr>
-        <p:spPr>
-          <a:xfrm>
-            <a:off x="457200" y="109728"/>
-            <a:ext cx="11277295" cy="685800"/>
-          </a:xfrm>
-          <a:prstGeom prst="rect">
-            <a:avLst/>
-          </a:prstGeom>
-          <a:noFill/>
-        </p:spPr>
-        <p:txBody>
-          <a:bodyPr wrap="square" anchor="ctr" lIns="73152" rIns="73152" tIns="36576" bIns="36576">
-            <a:spAutoFit/>
-          </a:bodyPr>
-          <a:lstStyle/>
-          <a:p>
-            <a:pPr algn="l">
-              <a:spcAft>
-                <a:spcPts val="0"/>
-              </a:spcAft>
-            </a:pPr>
-            <a:r>
-              <a:rPr sz="3000" b="1" i="0">
-                <a:solidFill>
-                  <a:srgbClr val="FFFFFF"/>
-                </a:solidFill>
-                <a:latin typeface="Arial"/>
-              </a:rPr>
-              <a:t>Coach: teach why most bets don't clear costs</a:t>
-            </a:r>
-          </a:p>
-        </p:txBody>
-      </p:sp>
-      <p:sp>
-        <p:nvSpPr>
-          <p:cNvPr id="5" name="TextBox 4"/>
-          <p:cNvSpPr txBox="1"/>
-          <p:nvPr/>
-        </p:nvSpPr>
-        <p:spPr>
-          <a:xfrm>
-            <a:off x="457200" y="6446520"/>
-            <a:ext cx="9144000" cy="320040"/>
-          </a:xfrm>
-          <a:prstGeom prst="rect">
-            <a:avLst/>
-          </a:prstGeom>
-          <a:noFill/>
-        </p:spPr>
-        <p:txBody>
-          <a:bodyPr wrap="square" anchor="t" lIns="73152" rIns="73152" tIns="36576" bIns="36576">
-            <a:spAutoFit/>
-          </a:bodyPr>
-          <a:lstStyle/>
-          <a:p>
-            <a:pPr algn="l">
-              <a:spcAft>
-                <a:spcPts val="0"/>
-              </a:spcAft>
-            </a:pPr>
-            <a:r>
-              <a:rPr sz="1100" b="0" i="0">
-                <a:solidFill>
-                  <a:srgbClr val="64748B"/>
-                </a:solidFill>
-                <a:latin typeface="Arial"/>
-              </a:rPr>
-              <a:t>DASC7606C Group 12 · Betting markets are tilted against consumers</a:t>
-            </a:r>
-          </a:p>
-        </p:txBody>
-      </p:sp>
-      <p:sp>
-        <p:nvSpPr>
-          <p:cNvPr id="6" name="TextBox 5"/>
-          <p:cNvSpPr txBox="1"/>
-          <p:nvPr/>
-        </p:nvSpPr>
-        <p:spPr>
-          <a:xfrm>
-            <a:off x="10820095" y="6446520"/>
-            <a:ext cx="914400" cy="320040"/>
-          </a:xfrm>
-          <a:prstGeom prst="rect">
-            <a:avLst/>
-          </a:prstGeom>
-          <a:noFill/>
-        </p:spPr>
-        <p:txBody>
-          <a:bodyPr wrap="square" anchor="t" lIns="73152" rIns="73152" tIns="36576" bIns="36576">
-            <a:spAutoFit/>
-          </a:bodyPr>
-          <a:lstStyle/>
-          <a:p>
-            <a:pPr algn="r">
-              <a:spcAft>
-                <a:spcPts val="0"/>
-              </a:spcAft>
-            </a:pPr>
-            <a:r>
-              <a:rPr sz="1100" b="0" i="0">
-                <a:solidFill>
-                  <a:srgbClr val="64748B"/>
-                </a:solidFill>
-                <a:latin typeface="Arial"/>
-              </a:rPr>
-              <a:t>13</a:t>
-            </a:r>
-          </a:p>
-        </p:txBody>
-      </p:sp>
-      <p:sp>
-        <p:nvSpPr>
-          <p:cNvPr id="7" name="Rounded Rectangle 6"/>
-          <p:cNvSpPr/>
-          <p:nvPr/>
-        </p:nvSpPr>
-        <p:spPr>
-          <a:xfrm>
-            <a:off x="457200" y="1234439"/>
-            <a:ext cx="5501487" cy="2057400"/>
-          </a:xfrm>
-          <a:prstGeom prst="roundRect">
-            <a:avLst>
-              <a:gd name="adj" fmla="val 6000"/>
-            </a:avLst>
-          </a:prstGeom>
-          <a:solidFill>
-            <a:srgbClr val="FFFFFF"/>
-          </a:solidFill>
-          <a:ln w="15875">
-            <a:solidFill>
-              <a:srgbClr val="2563EB"/>
-            </a:solidFill>
-          </a:ln>
-          <a:effectLst/>
-        </p:spPr>
-        <p:style>
-          <a:lnRef idx="1">
-            <a:schemeClr val="accent1"/>
-          </a:lnRef>
-          <a:fillRef idx="3">
-            <a:schemeClr val="accent1"/>
-          </a:fillRef>
-          <a:effectRef idx="2">
-            <a:schemeClr val="accent1"/>
-          </a:effectRef>
-          <a:fontRef idx="minor">
-            <a:schemeClr val="lt1"/>
-          </a:fontRef>
-        </p:style>
-        <p:txBody>
-          <a:bodyPr rtlCol="0" anchor="ctr"/>
-          <a:lstStyle/>
-          <a:p>
-            <a:pPr algn="ctr"/>
-          </a:p>
-        </p:txBody>
-      </p:sp>
-      <p:sp>
-        <p:nvSpPr>
-          <p:cNvPr id="8" name="Rectangle 7"/>
-          <p:cNvSpPr/>
-          <p:nvPr/>
-        </p:nvSpPr>
-        <p:spPr>
-          <a:xfrm>
-            <a:off x="457200" y="1234439"/>
-            <a:ext cx="109728" cy="2057400"/>
-          </a:xfrm>
-          <a:prstGeom prst="rect">
-            <a:avLst/>
-          </a:prstGeom>
-          <a:solidFill>
-            <a:srgbClr val="2563EB"/>
-          </a:solidFill>
-          <a:ln>
-            <a:noFill/>
-          </a:ln>
-          <a:effectLst/>
-        </p:spPr>
-        <p:style>
-          <a:lnRef idx="1">
-            <a:schemeClr val="accent1"/>
-          </a:lnRef>
-          <a:fillRef idx="3">
-            <a:schemeClr val="accent1"/>
-          </a:fillRef>
-          <a:effectRef idx="2">
-            <a:schemeClr val="accent1"/>
-          </a:effectRef>
-          <a:fontRef idx="minor">
-            <a:schemeClr val="lt1"/>
-          </a:fontRef>
-        </p:style>
-        <p:txBody>
-          <a:bodyPr rtlCol="0" anchor="ctr"/>
-          <a:lstStyle/>
-          <a:p>
-            <a:pPr algn="ctr"/>
-          </a:p>
-        </p:txBody>
-      </p:sp>
-      <p:sp>
-        <p:nvSpPr>
-          <p:cNvPr id="9" name="TextBox 8"/>
-          <p:cNvSpPr txBox="1"/>
-          <p:nvPr/>
-        </p:nvSpPr>
-        <p:spPr>
-          <a:xfrm>
-            <a:off x="640080" y="1307592"/>
-            <a:ext cx="5227167" cy="457200"/>
-          </a:xfrm>
-          <a:prstGeom prst="rect">
-            <a:avLst/>
-          </a:prstGeom>
-          <a:noFill/>
-        </p:spPr>
-        <p:txBody>
-          <a:bodyPr wrap="square" anchor="t" lIns="73152" rIns="73152" tIns="36576" bIns="36576">
-            <a:spAutoFit/>
-          </a:bodyPr>
-          <a:lstStyle/>
-          <a:p>
-            <a:pPr algn="l">
-              <a:spcAft>
-                <a:spcPts val="0"/>
-              </a:spcAft>
-            </a:pPr>
-            <a:r>
-              <a:rPr sz="2000" b="1" i="0">
-                <a:solidFill>
-                  <a:srgbClr val="2563EB"/>
-                </a:solidFill>
-                <a:latin typeface="Arial"/>
-              </a:rPr>
-              <a:t>1  What's going on</a:t>
-            </a:r>
-          </a:p>
-        </p:txBody>
-      </p:sp>
-      <p:sp>
-        <p:nvSpPr>
-          <p:cNvPr id="10" name="TextBox 9"/>
-          <p:cNvSpPr txBox="1"/>
-          <p:nvPr/>
-        </p:nvSpPr>
-        <p:spPr>
-          <a:xfrm>
-            <a:off x="640080" y="1764791"/>
-            <a:ext cx="5227167" cy="1453895"/>
-          </a:xfrm>
-          <a:prstGeom prst="rect">
-            <a:avLst/>
-          </a:prstGeom>
-          <a:noFill/>
-        </p:spPr>
-        <p:txBody>
-          <a:bodyPr wrap="square" anchor="t" lIns="73152" rIns="73152" tIns="36576" bIns="36576">
-            <a:spAutoFit/>
-          </a:bodyPr>
-          <a:lstStyle/>
-          <a:p>
-            <a:pPr algn="l" marL="292608" indent="-256032">
-              <a:spcAft>
-                <a:spcPts val="600"/>
-              </a:spcAft>
-              <a:buChar char="•"/>
-            </a:pPr>
-            <a:r>
-              <a:rPr sz="1800" b="0" i="0">
-                <a:solidFill>
-                  <a:srgbClr val="0F172A"/>
-                </a:solidFill>
-                <a:latin typeface="Arial"/>
-              </a:rPr>
-              <a:t>News so far; model before / after the news</a:t>
-            </a:r>
-          </a:p>
-          <a:p>
-            <a:pPr algn="l" marL="292608" indent="-256032">
-              <a:spcAft>
-                <a:spcPts val="600"/>
-              </a:spcAft>
-              <a:buChar char="•"/>
-            </a:pPr>
-            <a:r>
-              <a:rPr sz="1800" b="0" i="0">
-                <a:solidFill>
-                  <a:srgbClr val="0F172A"/>
-                </a:solidFill>
-                <a:latin typeface="Arial"/>
-              </a:rPr>
-              <a:t>Market now vs 24 h ago; break-even after spread + fee</a:t>
-            </a:r>
-          </a:p>
-        </p:txBody>
-      </p:sp>
-      <p:sp>
-        <p:nvSpPr>
-          <p:cNvPr id="11" name="Rounded Rectangle 10"/>
-          <p:cNvSpPr/>
-          <p:nvPr/>
-        </p:nvSpPr>
-        <p:spPr>
-          <a:xfrm>
-            <a:off x="6233007" y="1234439"/>
-            <a:ext cx="5501487" cy="2057400"/>
-          </a:xfrm>
-          <a:prstGeom prst="roundRect">
-            <a:avLst>
-              <a:gd name="adj" fmla="val 6000"/>
-            </a:avLst>
-          </a:prstGeom>
-          <a:solidFill>
-            <a:srgbClr val="FFFFFF"/>
-          </a:solidFill>
-          <a:ln w="15875">
-            <a:solidFill>
-              <a:srgbClr val="EA580C"/>
-            </a:solidFill>
-          </a:ln>
-          <a:effectLst/>
-        </p:spPr>
-        <p:style>
-          <a:lnRef idx="1">
-            <a:schemeClr val="accent1"/>
-          </a:lnRef>
-          <a:fillRef idx="3">
-            <a:schemeClr val="accent1"/>
-          </a:fillRef>
-          <a:effectRef idx="2">
-            <a:schemeClr val="accent1"/>
-          </a:effectRef>
-          <a:fontRef idx="minor">
-            <a:schemeClr val="lt1"/>
-          </a:fontRef>
-        </p:style>
-        <p:txBody>
-          <a:bodyPr rtlCol="0" anchor="ctr"/>
-          <a:lstStyle/>
-          <a:p>
-            <a:pPr algn="ctr"/>
-          </a:p>
-        </p:txBody>
-      </p:sp>
-      <p:sp>
-        <p:nvSpPr>
-          <p:cNvPr id="12" name="Rectangle 11"/>
-          <p:cNvSpPr/>
-          <p:nvPr/>
-        </p:nvSpPr>
-        <p:spPr>
-          <a:xfrm>
-            <a:off x="6233007" y="1234439"/>
-            <a:ext cx="109728" cy="2057400"/>
-          </a:xfrm>
-          <a:prstGeom prst="rect">
-            <a:avLst/>
-          </a:prstGeom>
-          <a:solidFill>
-            <a:srgbClr val="EA580C"/>
-          </a:solidFill>
-          <a:ln>
-            <a:noFill/>
-          </a:ln>
-          <a:effectLst/>
-        </p:spPr>
-        <p:style>
-          <a:lnRef idx="1">
-            <a:schemeClr val="accent1"/>
-          </a:lnRef>
-          <a:fillRef idx="3">
-            <a:schemeClr val="accent1"/>
-          </a:fillRef>
-          <a:effectRef idx="2">
-            <a:schemeClr val="accent1"/>
-          </a:effectRef>
-          <a:fontRef idx="minor">
-            <a:schemeClr val="lt1"/>
-          </a:fontRef>
-        </p:style>
-        <p:txBody>
-          <a:bodyPr rtlCol="0" anchor="ctr"/>
-          <a:lstStyle/>
-          <a:p>
-            <a:pPr algn="ctr"/>
-          </a:p>
-        </p:txBody>
-      </p:sp>
-      <p:sp>
-        <p:nvSpPr>
-          <p:cNvPr id="13" name="TextBox 12"/>
-          <p:cNvSpPr txBox="1"/>
-          <p:nvPr/>
-        </p:nvSpPr>
-        <p:spPr>
-          <a:xfrm>
-            <a:off x="6415887" y="1307592"/>
-            <a:ext cx="5227167" cy="457200"/>
-          </a:xfrm>
-          <a:prstGeom prst="rect">
-            <a:avLst/>
-          </a:prstGeom>
-          <a:noFill/>
-        </p:spPr>
-        <p:txBody>
-          <a:bodyPr wrap="square" anchor="t" lIns="73152" rIns="73152" tIns="36576" bIns="36576">
-            <a:spAutoFit/>
-          </a:bodyPr>
-          <a:lstStyle/>
-          <a:p>
-            <a:pPr algn="l">
-              <a:spcAft>
-                <a:spcPts val="0"/>
-              </a:spcAft>
-            </a:pPr>
-            <a:r>
-              <a:rPr sz="2000" b="1" i="0">
-                <a:solidFill>
-                  <a:srgbClr val="EA580C"/>
-                </a:solidFill>
-                <a:latin typeface="Arial"/>
-              </a:rPr>
-              <a:t>2  Lessons, when relevant</a:t>
-            </a:r>
-          </a:p>
-        </p:txBody>
-      </p:sp>
-      <p:sp>
-        <p:nvSpPr>
-          <p:cNvPr id="14" name="TextBox 13"/>
-          <p:cNvSpPr txBox="1"/>
-          <p:nvPr/>
-        </p:nvSpPr>
-        <p:spPr>
-          <a:xfrm>
-            <a:off x="6415887" y="1764791"/>
-            <a:ext cx="5227167" cy="1453895"/>
-          </a:xfrm>
-          <a:prstGeom prst="rect">
-            <a:avLst/>
-          </a:prstGeom>
-          <a:noFill/>
-        </p:spPr>
-        <p:txBody>
-          <a:bodyPr wrap="square" anchor="t" lIns="73152" rIns="73152" tIns="36576" bIns="36576">
-            <a:spAutoFit/>
-          </a:bodyPr>
-          <a:lstStyle/>
-          <a:p>
-            <a:pPr algn="l" marL="292608" indent="-256032">
-              <a:spcAft>
-                <a:spcPts val="600"/>
-              </a:spcAft>
-              <a:buChar char="•"/>
-            </a:pPr>
-            <a:r>
-              <a:rPr sz="1800" b="0" i="0">
-                <a:solidFill>
-                  <a:srgbClr val="0F172A"/>
-                </a:solidFill>
-                <a:latin typeface="Arial"/>
-              </a:rPr>
-              <a:t>Price = probability · costs move break-even</a:t>
-            </a:r>
-          </a:p>
-          <a:p>
-            <a:pPr algn="l" marL="292608" indent="-256032">
-              <a:spcAft>
-                <a:spcPts val="600"/>
-              </a:spcAft>
-              <a:buChar char="•"/>
-            </a:pPr>
-            <a:r>
-              <a:rPr sz="1800" b="0" i="0">
-                <a:solidFill>
-                  <a:srgbClr val="0F172A"/>
-                </a:solidFill>
-                <a:latin typeface="Arial"/>
-              </a:rPr>
-              <a:t>Priced in / chasing · long shots · closing line · passing</a:t>
-            </a:r>
-          </a:p>
-        </p:txBody>
-      </p:sp>
-      <p:sp>
-        <p:nvSpPr>
-          <p:cNvPr id="15" name="Rounded Rectangle 14"/>
-          <p:cNvSpPr/>
-          <p:nvPr/>
-        </p:nvSpPr>
-        <p:spPr>
-          <a:xfrm>
-            <a:off x="457200" y="3474720"/>
-            <a:ext cx="5501487" cy="2057400"/>
-          </a:xfrm>
-          <a:prstGeom prst="roundRect">
-            <a:avLst>
-              <a:gd name="adj" fmla="val 6000"/>
-            </a:avLst>
-          </a:prstGeom>
-          <a:solidFill>
-            <a:srgbClr val="FFFFFF"/>
-          </a:solidFill>
-          <a:ln w="15875">
-            <a:solidFill>
-              <a:srgbClr val="16A34A"/>
-            </a:solidFill>
-          </a:ln>
-          <a:effectLst/>
-        </p:spPr>
-        <p:style>
-          <a:lnRef idx="1">
-            <a:schemeClr val="accent1"/>
-          </a:lnRef>
-          <a:fillRef idx="3">
-            <a:schemeClr val="accent1"/>
-          </a:fillRef>
-          <a:effectRef idx="2">
-            <a:schemeClr val="accent1"/>
-          </a:effectRef>
-          <a:fontRef idx="minor">
-            <a:schemeClr val="lt1"/>
-          </a:fontRef>
-        </p:style>
-        <p:txBody>
-          <a:bodyPr rtlCol="0" anchor="ctr"/>
-          <a:lstStyle/>
-          <a:p>
-            <a:pPr algn="ctr"/>
-          </a:p>
-        </p:txBody>
-      </p:sp>
-      <p:sp>
-        <p:nvSpPr>
-          <p:cNvPr id="16" name="Rectangle 15"/>
-          <p:cNvSpPr/>
-          <p:nvPr/>
-        </p:nvSpPr>
-        <p:spPr>
-          <a:xfrm>
-            <a:off x="457200" y="3474720"/>
-            <a:ext cx="109728" cy="2057400"/>
-          </a:xfrm>
-          <a:prstGeom prst="rect">
-            <a:avLst/>
-          </a:prstGeom>
-          <a:solidFill>
-            <a:srgbClr val="16A34A"/>
-          </a:solidFill>
-          <a:ln>
-            <a:noFill/>
-          </a:ln>
-          <a:effectLst/>
-        </p:spPr>
-        <p:style>
-          <a:lnRef idx="1">
-            <a:schemeClr val="accent1"/>
-          </a:lnRef>
-          <a:fillRef idx="3">
-            <a:schemeClr val="accent1"/>
-          </a:fillRef>
-          <a:effectRef idx="2">
-            <a:schemeClr val="accent1"/>
-          </a:effectRef>
-          <a:fontRef idx="minor">
-            <a:schemeClr val="lt1"/>
-          </a:fontRef>
-        </p:style>
-        <p:txBody>
-          <a:bodyPr rtlCol="0" anchor="ctr"/>
-          <a:lstStyle/>
-          <a:p>
-            <a:pPr algn="ctr"/>
-          </a:p>
-        </p:txBody>
-      </p:sp>
-      <p:sp>
-        <p:nvSpPr>
-          <p:cNvPr id="17" name="TextBox 16"/>
-          <p:cNvSpPr txBox="1"/>
-          <p:nvPr/>
-        </p:nvSpPr>
-        <p:spPr>
-          <a:xfrm>
-            <a:off x="640080" y="3547872"/>
-            <a:ext cx="5227167" cy="457200"/>
-          </a:xfrm>
-          <a:prstGeom prst="rect">
-            <a:avLst/>
-          </a:prstGeom>
-          <a:noFill/>
-        </p:spPr>
-        <p:txBody>
-          <a:bodyPr wrap="square" anchor="t" lIns="73152" rIns="73152" tIns="36576" bIns="36576">
-            <a:spAutoFit/>
-          </a:bodyPr>
-          <a:lstStyle/>
-          <a:p>
-            <a:pPr algn="l">
-              <a:spcAft>
-                <a:spcPts val="0"/>
-              </a:spcAft>
-            </a:pPr>
-            <a:r>
-              <a:rPr sz="2000" b="1" i="0">
-                <a:solidFill>
-                  <a:srgbClr val="16A34A"/>
-                </a:solidFill>
-                <a:latin typeface="Arial"/>
-              </a:rPr>
-              <a:t>3  Your paper call</a:t>
-            </a:r>
-          </a:p>
-        </p:txBody>
-      </p:sp>
-      <p:sp>
-        <p:nvSpPr>
-          <p:cNvPr id="18" name="TextBox 17"/>
-          <p:cNvSpPr txBox="1"/>
-          <p:nvPr/>
-        </p:nvSpPr>
-        <p:spPr>
-          <a:xfrm>
-            <a:off x="640080" y="4005072"/>
-            <a:ext cx="5227167" cy="1453895"/>
-          </a:xfrm>
-          <a:prstGeom prst="rect">
-            <a:avLst/>
-          </a:prstGeom>
-          <a:noFill/>
-        </p:spPr>
-        <p:txBody>
-          <a:bodyPr wrap="square" anchor="t" lIns="73152" rIns="73152" tIns="36576" bIns="36576">
-            <a:spAutoFit/>
-          </a:bodyPr>
-          <a:lstStyle/>
-          <a:p>
-            <a:pPr algn="l" marL="292608" indent="-256032">
-              <a:spcAft>
-                <a:spcPts val="600"/>
-              </a:spcAft>
-              <a:buChar char="•"/>
-            </a:pPr>
-            <a:r>
-              <a:rPr sz="1800" b="0" i="0">
-                <a:solidFill>
-                  <a:srgbClr val="0F172A"/>
-                </a:solidFill>
-                <a:latin typeface="Arial"/>
-              </a:rPr>
-              <a:t>Back a team or pass</a:t>
-            </a:r>
-          </a:p>
-          <a:p>
-            <a:pPr algn="l" marL="292608" indent="-256032">
-              <a:spcAft>
-                <a:spcPts val="600"/>
-              </a:spcAft>
-              <a:buChar char="•"/>
-            </a:pPr>
-            <a:r>
-              <a:rPr sz="1800" b="0" i="0">
-                <a:solidFill>
-                  <a:srgbClr val="0F172A"/>
-                </a:solidFill>
-                <a:latin typeface="Arial"/>
-              </a:rPr>
-              <a:t>Then: close, CLV, result, and what the agent did</a:t>
-            </a:r>
-          </a:p>
-        </p:txBody>
-      </p:sp>
-      <p:sp>
-        <p:nvSpPr>
-          <p:cNvPr id="19" name="Rounded Rectangle 18"/>
-          <p:cNvSpPr/>
-          <p:nvPr/>
-        </p:nvSpPr>
-        <p:spPr>
-          <a:xfrm>
-            <a:off x="6233007" y="3474720"/>
-            <a:ext cx="5501487" cy="2057400"/>
-          </a:xfrm>
-          <a:prstGeom prst="roundRect">
-            <a:avLst>
-              <a:gd name="adj" fmla="val 6000"/>
-            </a:avLst>
-          </a:prstGeom>
-          <a:solidFill>
-            <a:srgbClr val="FFFFFF"/>
-          </a:solidFill>
-          <a:ln w="15875">
-            <a:solidFill>
-              <a:srgbClr val="1E293B"/>
-            </a:solidFill>
-          </a:ln>
-          <a:effectLst/>
-        </p:spPr>
-        <p:style>
-          <a:lnRef idx="1">
-            <a:schemeClr val="accent1"/>
-          </a:lnRef>
-          <a:fillRef idx="3">
-            <a:schemeClr val="accent1"/>
-          </a:fillRef>
-          <a:effectRef idx="2">
-            <a:schemeClr val="accent1"/>
-          </a:effectRef>
-          <a:fontRef idx="minor">
-            <a:schemeClr val="lt1"/>
-          </a:fontRef>
-        </p:style>
-        <p:txBody>
-          <a:bodyPr rtlCol="0" anchor="ctr"/>
-          <a:lstStyle/>
-          <a:p>
-            <a:pPr algn="ctr"/>
-          </a:p>
-        </p:txBody>
-      </p:sp>
-      <p:sp>
-        <p:nvSpPr>
-          <p:cNvPr id="20" name="Rectangle 19"/>
-          <p:cNvSpPr/>
-          <p:nvPr/>
-        </p:nvSpPr>
-        <p:spPr>
-          <a:xfrm>
-            <a:off x="6233007" y="3474720"/>
-            <a:ext cx="109728" cy="2057400"/>
-          </a:xfrm>
-          <a:prstGeom prst="rect">
-            <a:avLst/>
-          </a:prstGeom>
-          <a:solidFill>
-            <a:srgbClr val="1E293B"/>
-          </a:solidFill>
-          <a:ln>
-            <a:noFill/>
-          </a:ln>
-          <a:effectLst/>
-        </p:spPr>
-        <p:style>
-          <a:lnRef idx="1">
-            <a:schemeClr val="accent1"/>
-          </a:lnRef>
-          <a:fillRef idx="3">
-            <a:schemeClr val="accent1"/>
-          </a:fillRef>
-          <a:effectRef idx="2">
-            <a:schemeClr val="accent1"/>
-          </a:effectRef>
-          <a:fontRef idx="minor">
-            <a:schemeClr val="lt1"/>
-          </a:fontRef>
-        </p:style>
-        <p:txBody>
-          <a:bodyPr rtlCol="0" anchor="ctr"/>
-          <a:lstStyle/>
-          <a:p>
-            <a:pPr algn="ctr"/>
-          </a:p>
-        </p:txBody>
-      </p:sp>
-      <p:sp>
-        <p:nvSpPr>
-          <p:cNvPr id="21" name="TextBox 20"/>
-          <p:cNvSpPr txBox="1"/>
-          <p:nvPr/>
-        </p:nvSpPr>
-        <p:spPr>
-          <a:xfrm>
-            <a:off x="6415887" y="3547872"/>
-            <a:ext cx="5227167" cy="457200"/>
-          </a:xfrm>
-          <a:prstGeom prst="rect">
-            <a:avLst/>
-          </a:prstGeom>
-          <a:noFill/>
-        </p:spPr>
-        <p:txBody>
-          <a:bodyPr wrap="square" anchor="t" lIns="73152" rIns="73152" tIns="36576" bIns="36576">
-            <a:spAutoFit/>
-          </a:bodyPr>
-          <a:lstStyle/>
-          <a:p>
-            <a:pPr algn="l">
-              <a:spcAft>
-                <a:spcPts val="0"/>
-              </a:spcAft>
-            </a:pPr>
-            <a:r>
-              <a:rPr sz="2000" b="1" i="0">
-                <a:solidFill>
-                  <a:srgbClr val="1E293B"/>
-                </a:solidFill>
-                <a:latin typeface="Arial"/>
-              </a:rPr>
-              <a:t>4  Habit feedback</a:t>
-            </a:r>
-          </a:p>
-        </p:txBody>
-      </p:sp>
-      <p:sp>
-        <p:nvSpPr>
-          <p:cNvPr id="22" name="TextBox 21"/>
-          <p:cNvSpPr txBox="1"/>
-          <p:nvPr/>
-        </p:nvSpPr>
-        <p:spPr>
-          <a:xfrm>
-            <a:off x="6415887" y="4005072"/>
-            <a:ext cx="5227167" cy="1453895"/>
-          </a:xfrm>
-          <a:prstGeom prst="rect">
-            <a:avLst/>
-          </a:prstGeom>
-          <a:noFill/>
-        </p:spPr>
-        <p:txBody>
-          <a:bodyPr wrap="square" anchor="t" lIns="73152" rIns="73152" tIns="36576" bIns="36576">
-            <a:spAutoFit/>
-          </a:bodyPr>
-          <a:lstStyle/>
-          <a:p>
-            <a:pPr algn="l" marL="292608" indent="-256032">
-              <a:spcAft>
-                <a:spcPts val="600"/>
-              </a:spcAft>
-              <a:buChar char="•"/>
-            </a:pPr>
-            <a:r>
-              <a:rPr sz="1800" b="0" i="0">
-                <a:solidFill>
-                  <a:srgbClr val="0F172A"/>
-                </a:solidFill>
-                <a:latin typeface="Arial"/>
-              </a:rPr>
-              <a:t>Paying above the close, long shots, chasing</a:t>
-            </a:r>
-          </a:p>
-          <a:p>
-            <a:pPr algn="l" marL="292608" indent="-256032">
-              <a:spcAft>
-                <a:spcPts val="600"/>
-              </a:spcAft>
-              <a:buChar char="•"/>
-            </a:pPr>
-            <a:r>
-              <a:rPr sz="1800" b="0" i="0">
-                <a:solidFill>
-                  <a:srgbClr val="0F172A"/>
-                </a:solidFill>
-                <a:latin typeface="Arial"/>
-              </a:rPr>
-              <a:t>Small samples are mostly luck</a:t>
-            </a:r>
-          </a:p>
-        </p:txBody>
-      </p:sp>
-      <p:sp>
-        <p:nvSpPr>
-          <p:cNvPr id="23" name="Rounded Rectangle 22"/>
-          <p:cNvSpPr/>
-          <p:nvPr/>
-        </p:nvSpPr>
-        <p:spPr>
-          <a:xfrm>
-            <a:off x="457200" y="5760720"/>
-            <a:ext cx="11277295" cy="502920"/>
           </a:xfrm>
           <a:prstGeom prst="roundRect">
             <a:avLst>
@@ -7385,14 +8347,14 @@
       </p:sp>
       <p:sp>
         <p:nvSpPr>
-          <p:cNvPr id="24" name="TextBox 23"/>
+          <p:cNvPr id="9" name="TextBox 8"/>
           <p:cNvSpPr txBox="1"/>
           <p:nvPr/>
         </p:nvSpPr>
         <p:spPr>
           <a:xfrm>
-            <a:off x="548640" y="5760720"/>
-            <a:ext cx="11094415" cy="502920"/>
+            <a:off x="548640" y="5440680"/>
+            <a:ext cx="11094415" cy="685800"/>
           </a:xfrm>
           <a:prstGeom prst="rect">
             <a:avLst/>
@@ -7411,13 +8373,13 @@
               </a:spcAft>
             </a:pPr>
             <a:r>
-              <a:rPr sz="1800" b="0" i="0">
+              <a:rPr sz="1900" b="0" i="0">
                 <a:solidFill>
                   <a:srgbClr val="0F172A"/>
                 </a:solidFill>
                 <a:latin typeface="Arial"/>
               </a:rPr>
-              <a:t>Educational, paper money only · only information public at that moment · no promise words</a:t>
+              <a:t>Every part is graded the same way: by the market's closing price</a:t>
             </a:r>
           </a:p>
         </p:txBody>
@@ -7562,7 +8524,7 @@
                 </a:solidFill>
                 <a:latin typeface="Arial"/>
               </a:rPr>
-              <a:t>League: practise against the real market with play money</a:t>
+              <a:t>Live demo: streamlit run app.py</a:t>
             </a:r>
           </a:p>
         </p:txBody>
@@ -7601,7 +8563,7 @@
                 </a:solidFill>
                 <a:latin typeface="Arial"/>
               </a:rPr>
-              <a:t>DASC7606C Group 12 · Betting markets are tilted against consumers</a:t>
+              <a:t>DASC7606C Group 12 · Market-Graded Learning: the closing price grades every component</a:t>
             </a:r>
           </a:p>
         </p:txBody>
@@ -7641,2019 +8603,6 @@
                 <a:latin typeface="Arial"/>
               </a:rPr>
               <a:t>14</a:t>
-            </a:r>
-          </a:p>
-        </p:txBody>
-      </p:sp>
-      <p:pic>
-        <p:nvPicPr>
-          <p:cNvPr id="7" name="Picture 6" descr="league_reveal.png"/>
-          <p:cNvPicPr>
-            <a:picLocks noChangeAspect="1"/>
-          </p:cNvPicPr>
-          <p:nvPr/>
-        </p:nvPicPr>
-        <p:blipFill>
-          <a:blip r:embed="rId3"/>
-          <a:stretch>
-            <a:fillRect/>
-          </a:stretch>
-        </p:blipFill>
-        <p:spPr>
-          <a:xfrm>
-            <a:off x="457200" y="1151188"/>
-            <a:ext cx="11277295" cy="1720982"/>
-          </a:xfrm>
-          <a:prstGeom prst="rect">
-            <a:avLst/>
-          </a:prstGeom>
-        </p:spPr>
-      </p:pic>
-      <p:graphicFrame>
-        <p:nvGraphicFramePr>
-          <p:cNvPr id="8" name="Table 7"/>
-          <p:cNvGraphicFramePr>
-            <a:graphicFrameLocks noGrp="1"/>
-          </p:cNvGraphicFramePr>
-          <p:nvPr/>
-        </p:nvGraphicFramePr>
-        <p:xfrm>
-          <a:off x="457200" y="3063239"/>
-          <a:ext cx="7955280" cy="2331720"/>
-        </p:xfrm>
-        <a:graphic>
-          <a:graphicData uri="http://schemas.openxmlformats.org/drawingml/2006/table">
-            <a:tbl>
-              <a:tblPr firstRow="1" bandRow="1">
-                <a:tableStyleId>{5C22544A-7EE6-4342-B048-85BDC9FD1C3A}</a:tableStyleId>
-              </a:tblPr>
-              <a:tblGrid>
-                <a:gridCol w="1965960"/>
-                <a:gridCol w="868680"/>
-                <a:gridCol w="1234440"/>
-                <a:gridCol w="1234440"/>
-                <a:gridCol w="1051560"/>
-                <a:gridCol w="1600200"/>
-              </a:tblGrid>
-              <a:tr h="411480">
-                <a:tc>
-                  <a:txBody>
-                    <a:bodyPr wrap="square"/>
-                    <a:lstStyle/>
-                    <a:p>
-                      <a:pPr algn="l"/>
-                      <a:r>
-                        <a:rPr sz="1500" b="1" i="0">
-                          <a:solidFill>
-                            <a:srgbClr val="FFFFFF"/>
-                          </a:solidFill>
-                          <a:latin typeface="Arial"/>
-                        </a:rPr>
-                        <a:t>Example league</a:t>
-                      </a:r>
-                    </a:p>
-                  </a:txBody>
-                  <a:tcPr marL="73152" marR="73152" marT="36576" marB="36576" anchor="ctr">
-                    <a:solidFill>
-                      <a:srgbClr val="1E293B"/>
-                    </a:solidFill>
-                  </a:tcPr>
-                </a:tc>
-                <a:tc>
-                  <a:txBody>
-                    <a:bodyPr wrap="square"/>
-                    <a:lstStyle/>
-                    <a:p>
-                      <a:pPr algn="ctr"/>
-                      <a:r>
-                        <a:rPr sz="1500" b="1" i="0">
-                          <a:solidFill>
-                            <a:srgbClr val="FFFFFF"/>
-                          </a:solidFill>
-                          <a:latin typeface="Arial"/>
-                        </a:rPr>
-                        <a:t>Trades</a:t>
-                      </a:r>
-                    </a:p>
-                  </a:txBody>
-                  <a:tcPr marL="73152" marR="73152" marT="36576" marB="36576" anchor="ctr">
-                    <a:solidFill>
-                      <a:srgbClr val="1E293B"/>
-                    </a:solidFill>
-                  </a:tcPr>
-                </a:tc>
-                <a:tc>
-                  <a:txBody>
-                    <a:bodyPr wrap="square"/>
-                    <a:lstStyle/>
-                    <a:p>
-                      <a:pPr algn="ctr"/>
-                      <a:r>
-                        <a:rPr sz="1500" b="1" i="0">
-                          <a:solidFill>
-                            <a:srgbClr val="FFFFFF"/>
-                          </a:solidFill>
-                          <a:latin typeface="Arial"/>
-                        </a:rPr>
-                        <a:t>Mean CLV</a:t>
-                      </a:r>
-                    </a:p>
-                  </a:txBody>
-                  <a:tcPr marL="73152" marR="73152" marT="36576" marB="36576" anchor="ctr">
-                    <a:solidFill>
-                      <a:srgbClr val="1E293B"/>
-                    </a:solidFill>
-                  </a:tcPr>
-                </a:tc>
-                <a:tc>
-                  <a:txBody>
-                    <a:bodyPr wrap="square"/>
-                    <a:lstStyle/>
-                    <a:p>
-                      <a:pPr algn="ctr"/>
-                      <a:r>
-                        <a:rPr sz="1500" b="1" i="0">
-                          <a:solidFill>
-                            <a:srgbClr val="FFFFFF"/>
-                          </a:solidFill>
-                          <a:latin typeface="Arial"/>
-                        </a:rPr>
-                        <a:t>Beat close</a:t>
-                      </a:r>
-                    </a:p>
-                  </a:txBody>
-                  <a:tcPr marL="73152" marR="73152" marT="36576" marB="36576" anchor="ctr">
-                    <a:solidFill>
-                      <a:srgbClr val="1E293B"/>
-                    </a:solidFill>
-                  </a:tcPr>
-                </a:tc>
-                <a:tc>
-                  <a:txBody>
-                    <a:bodyPr wrap="square"/>
-                    <a:lstStyle/>
-                    <a:p>
-                      <a:pPr algn="ctr"/>
-                      <a:r>
-                        <a:rPr sz="1500" b="1" i="0">
-                          <a:solidFill>
-                            <a:srgbClr val="FFFFFF"/>
-                          </a:solidFill>
-                          <a:latin typeface="Arial"/>
-                        </a:rPr>
-                        <a:t>P&amp;L</a:t>
-                      </a:r>
-                    </a:p>
-                  </a:txBody>
-                  <a:tcPr marL="73152" marR="73152" marT="36576" marB="36576" anchor="ctr">
-                    <a:solidFill>
-                      <a:srgbClr val="1E293B"/>
-                    </a:solidFill>
-                  </a:tcPr>
-                </a:tc>
-                <a:tc>
-                  <a:txBody>
-                    <a:bodyPr wrap="square"/>
-                    <a:lstStyle/>
-                    <a:p>
-                      <a:pPr algn="l"/>
-                      <a:r>
-                        <a:rPr sz="1500" b="1" i="0">
-                          <a:solidFill>
-                            <a:srgbClr val="FFFFFF"/>
-                          </a:solidFill>
-                          <a:latin typeface="Arial"/>
-                        </a:rPr>
-                        <a:t>Skill or luck?</a:t>
-                      </a:r>
-                    </a:p>
-                  </a:txBody>
-                  <a:tcPr marL="73152" marR="73152" marT="36576" marB="36576" anchor="ctr">
-                    <a:solidFill>
-                      <a:srgbClr val="1E293B"/>
-                    </a:solidFill>
-                  </a:tcPr>
-                </a:tc>
-              </a:tr>
-              <a:tr h="384048">
-                <a:tc>
-                  <a:txBody>
-                    <a:bodyPr wrap="square"/>
-                    <a:lstStyle/>
-                    <a:p>
-                      <a:pPr algn="l"/>
-                      <a:r>
-                        <a:rPr sz="1500" b="0" i="0">
-                          <a:solidFill>
-                            <a:srgbClr val="0F172A"/>
-                          </a:solidFill>
-                          <a:latin typeface="Arial"/>
-                        </a:rPr>
-                        <a:t>michael (player)</a:t>
-                      </a:r>
-                    </a:p>
-                  </a:txBody>
-                  <a:tcPr marL="73152" marR="73152" marT="36576" marB="36576" anchor="ctr">
-                    <a:solidFill>
-                      <a:srgbClr val="F1F5F9"/>
-                    </a:solidFill>
-                  </a:tcPr>
-                </a:tc>
-                <a:tc>
-                  <a:txBody>
-                    <a:bodyPr wrap="square"/>
-                    <a:lstStyle/>
-                    <a:p>
-                      <a:pPr algn="ctr"/>
-                      <a:r>
-                        <a:rPr sz="1500" b="0" i="0">
-                          <a:solidFill>
-                            <a:srgbClr val="0F172A"/>
-                          </a:solidFill>
-                          <a:latin typeface="Arial"/>
-                        </a:rPr>
-                        <a:t>5</a:t>
-                      </a:r>
-                    </a:p>
-                  </a:txBody>
-                  <a:tcPr marL="73152" marR="73152" marT="36576" marB="36576" anchor="ctr">
-                    <a:solidFill>
-                      <a:srgbClr val="F1F5F9"/>
-                    </a:solidFill>
-                  </a:tcPr>
-                </a:tc>
-                <a:tc>
-                  <a:txBody>
-                    <a:bodyPr wrap="square"/>
-                    <a:lstStyle/>
-                    <a:p>
-                      <a:pPr algn="ctr"/>
-                      <a:r>
-                        <a:rPr sz="1500" b="0" i="0">
-                          <a:solidFill>
-                            <a:srgbClr val="0F172A"/>
-                          </a:solidFill>
-                          <a:latin typeface="Arial"/>
-                        </a:rPr>
-                        <a:t>+0.30¢</a:t>
-                      </a:r>
-                    </a:p>
-                  </a:txBody>
-                  <a:tcPr marL="73152" marR="73152" marT="36576" marB="36576" anchor="ctr">
-                    <a:solidFill>
-                      <a:srgbClr val="F1F5F9"/>
-                    </a:solidFill>
-                  </a:tcPr>
-                </a:tc>
-                <a:tc>
-                  <a:txBody>
-                    <a:bodyPr wrap="square"/>
-                    <a:lstStyle/>
-                    <a:p>
-                      <a:pPr algn="ctr"/>
-                      <a:r>
-                        <a:rPr sz="1500" b="0" i="0">
-                          <a:solidFill>
-                            <a:srgbClr val="0F172A"/>
-                          </a:solidFill>
-                          <a:latin typeface="Arial"/>
-                        </a:rPr>
-                        <a:t>60%</a:t>
-                      </a:r>
-                    </a:p>
-                  </a:txBody>
-                  <a:tcPr marL="73152" marR="73152" marT="36576" marB="36576" anchor="ctr">
-                    <a:solidFill>
-                      <a:srgbClr val="F1F5F9"/>
-                    </a:solidFill>
-                  </a:tcPr>
-                </a:tc>
-                <a:tc>
-                  <a:txBody>
-                    <a:bodyPr wrap="square"/>
-                    <a:lstStyle/>
-                    <a:p>
-                      <a:pPr algn="ctr"/>
-                      <a:r>
-                        <a:rPr sz="1500" b="0" i="0">
-                          <a:solidFill>
-                            <a:srgbClr val="0F172A"/>
-                          </a:solidFill>
-                          <a:latin typeface="Arial"/>
-                        </a:rPr>
-                        <a:t>−$32.47</a:t>
-                      </a:r>
-                    </a:p>
-                  </a:txBody>
-                  <a:tcPr marL="73152" marR="73152" marT="36576" marB="36576" anchor="ctr">
-                    <a:solidFill>
-                      <a:srgbClr val="F1F5F9"/>
-                    </a:solidFill>
-                  </a:tcPr>
-                </a:tc>
-                <a:tc>
-                  <a:txBody>
-                    <a:bodyPr wrap="square"/>
-                    <a:lstStyle/>
-                    <a:p>
-                      <a:pPr algn="l"/>
-                      <a:r>
-                        <a:rPr sz="1500" b="0" i="0">
-                          <a:solidFill>
-                            <a:srgbClr val="0F172A"/>
-                          </a:solidFill>
-                          <a:latin typeface="Arial"/>
-                        </a:rPr>
-                        <a:t>too early to tell</a:t>
-                      </a:r>
-                    </a:p>
-                  </a:txBody>
-                  <a:tcPr marL="73152" marR="73152" marT="36576" marB="36576" anchor="ctr">
-                    <a:solidFill>
-                      <a:srgbClr val="F1F5F9"/>
-                    </a:solidFill>
-                  </a:tcPr>
-                </a:tc>
-              </a:tr>
-              <a:tr h="384048">
-                <a:tc>
-                  <a:txBody>
-                    <a:bodyPr wrap="square"/>
-                    <a:lstStyle/>
-                    <a:p>
-                      <a:pPr algn="l"/>
-                      <a:r>
-                        <a:rPr sz="1500" b="0" i="0">
-                          <a:solidFill>
-                            <a:srgbClr val="0F172A"/>
-                          </a:solidFill>
-                          <a:latin typeface="Arial"/>
-                        </a:rPr>
-                        <a:t>rival (player)</a:t>
-                      </a:r>
-                    </a:p>
-                  </a:txBody>
-                  <a:tcPr marL="73152" marR="73152" marT="36576" marB="36576" anchor="ctr">
-                    <a:solidFill>
-                      <a:srgbClr val="FFFFFF"/>
-                    </a:solidFill>
-                  </a:tcPr>
-                </a:tc>
-                <a:tc>
-                  <a:txBody>
-                    <a:bodyPr wrap="square"/>
-                    <a:lstStyle/>
-                    <a:p>
-                      <a:pPr algn="ctr"/>
-                      <a:r>
-                        <a:rPr sz="1500" b="0" i="0">
-                          <a:solidFill>
-                            <a:srgbClr val="0F172A"/>
-                          </a:solidFill>
-                          <a:latin typeface="Arial"/>
-                        </a:rPr>
-                        <a:t>10</a:t>
-                      </a:r>
-                    </a:p>
-                  </a:txBody>
-                  <a:tcPr marL="73152" marR="73152" marT="36576" marB="36576" anchor="ctr">
-                    <a:solidFill>
-                      <a:srgbClr val="FFFFFF"/>
-                    </a:solidFill>
-                  </a:tcPr>
-                </a:tc>
-                <a:tc>
-                  <a:txBody>
-                    <a:bodyPr wrap="square"/>
-                    <a:lstStyle/>
-                    <a:p>
-                      <a:pPr algn="ctr"/>
-                      <a:r>
-                        <a:rPr sz="1500" b="0" i="0">
-                          <a:solidFill>
-                            <a:srgbClr val="0F172A"/>
-                          </a:solidFill>
-                          <a:latin typeface="Arial"/>
-                        </a:rPr>
-                        <a:t>−0.20¢</a:t>
-                      </a:r>
-                    </a:p>
-                  </a:txBody>
-                  <a:tcPr marL="73152" marR="73152" marT="36576" marB="36576" anchor="ctr">
-                    <a:solidFill>
-                      <a:srgbClr val="FFFFFF"/>
-                    </a:solidFill>
-                  </a:tcPr>
-                </a:tc>
-                <a:tc>
-                  <a:txBody>
-                    <a:bodyPr wrap="square"/>
-                    <a:lstStyle/>
-                    <a:p>
-                      <a:pPr algn="ctr"/>
-                      <a:r>
-                        <a:rPr sz="1500" b="0" i="0">
-                          <a:solidFill>
-                            <a:srgbClr val="0F172A"/>
-                          </a:solidFill>
-                          <a:latin typeface="Arial"/>
-                        </a:rPr>
-                        <a:t>30%</a:t>
-                      </a:r>
-                    </a:p>
-                  </a:txBody>
-                  <a:tcPr marL="73152" marR="73152" marT="36576" marB="36576" anchor="ctr">
-                    <a:solidFill>
-                      <a:srgbClr val="FFFFFF"/>
-                    </a:solidFill>
-                  </a:tcPr>
-                </a:tc>
-                <a:tc>
-                  <a:txBody>
-                    <a:bodyPr wrap="square"/>
-                    <a:lstStyle/>
-                    <a:p>
-                      <a:pPr algn="ctr"/>
-                      <a:r>
-                        <a:rPr sz="1500" b="0" i="0">
-                          <a:solidFill>
-                            <a:srgbClr val="0F172A"/>
-                          </a:solidFill>
-                          <a:latin typeface="Arial"/>
-                        </a:rPr>
-                        <a:t>−$27.32</a:t>
-                      </a:r>
-                    </a:p>
-                  </a:txBody>
-                  <a:tcPr marL="73152" marR="73152" marT="36576" marB="36576" anchor="ctr">
-                    <a:solidFill>
-                      <a:srgbClr val="FFFFFF"/>
-                    </a:solidFill>
-                  </a:tcPr>
-                </a:tc>
-                <a:tc>
-                  <a:txBody>
-                    <a:bodyPr wrap="square"/>
-                    <a:lstStyle/>
-                    <a:p>
-                      <a:pPr algn="l"/>
-                      <a:r>
-                        <a:rPr sz="1500" b="0" i="0">
-                          <a:solidFill>
-                            <a:srgbClr val="0F172A"/>
-                          </a:solidFill>
-                          <a:latin typeface="Arial"/>
-                        </a:rPr>
-                        <a:t>too early to tell</a:t>
-                      </a:r>
-                    </a:p>
-                  </a:txBody>
-                  <a:tcPr marL="73152" marR="73152" marT="36576" marB="36576" anchor="ctr">
-                    <a:solidFill>
-                      <a:srgbClr val="FFFFFF"/>
-                    </a:solidFill>
-                  </a:tcPr>
-                </a:tc>
-              </a:tr>
-              <a:tr h="384048">
-                <a:tc>
-                  <a:txBody>
-                    <a:bodyPr wrap="square"/>
-                    <a:lstStyle/>
-                    <a:p>
-                      <a:pPr algn="l"/>
-                      <a:r>
-                        <a:rPr sz="1500" b="0" i="0">
-                          <a:solidFill>
-                            <a:srgbClr val="0F172A"/>
-                          </a:solidFill>
-                          <a:latin typeface="Arial"/>
-                        </a:rPr>
-                        <a:t>Raw model (bot)</a:t>
-                      </a:r>
-                    </a:p>
-                  </a:txBody>
-                  <a:tcPr marL="73152" marR="73152" marT="36576" marB="36576" anchor="ctr">
-                    <a:solidFill>
-                      <a:srgbClr val="F1F5F9"/>
-                    </a:solidFill>
-                  </a:tcPr>
-                </a:tc>
-                <a:tc>
-                  <a:txBody>
-                    <a:bodyPr wrap="square"/>
-                    <a:lstStyle/>
-                    <a:p>
-                      <a:pPr algn="ctr"/>
-                      <a:r>
-                        <a:rPr sz="1500" b="0" i="0">
-                          <a:solidFill>
-                            <a:srgbClr val="0F172A"/>
-                          </a:solidFill>
-                          <a:latin typeface="Arial"/>
-                        </a:rPr>
-                        <a:t>8</a:t>
-                      </a:r>
-                    </a:p>
-                  </a:txBody>
-                  <a:tcPr marL="73152" marR="73152" marT="36576" marB="36576" anchor="ctr">
-                    <a:solidFill>
-                      <a:srgbClr val="F1F5F9"/>
-                    </a:solidFill>
-                  </a:tcPr>
-                </a:tc>
-                <a:tc>
-                  <a:txBody>
-                    <a:bodyPr wrap="square"/>
-                    <a:lstStyle/>
-                    <a:p>
-                      <a:pPr algn="ctr"/>
-                      <a:r>
-                        <a:rPr sz="1500" b="0" i="0">
-                          <a:solidFill>
-                            <a:srgbClr val="0F172A"/>
-                          </a:solidFill>
-                          <a:latin typeface="Arial"/>
-                        </a:rPr>
-                        <a:t>−0.63¢</a:t>
-                      </a:r>
-                    </a:p>
-                  </a:txBody>
-                  <a:tcPr marL="73152" marR="73152" marT="36576" marB="36576" anchor="ctr">
-                    <a:solidFill>
-                      <a:srgbClr val="F1F5F9"/>
-                    </a:solidFill>
-                  </a:tcPr>
-                </a:tc>
-                <a:tc>
-                  <a:txBody>
-                    <a:bodyPr wrap="square"/>
-                    <a:lstStyle/>
-                    <a:p>
-                      <a:pPr algn="ctr"/>
-                      <a:r>
-                        <a:rPr sz="1500" b="0" i="0">
-                          <a:solidFill>
-                            <a:srgbClr val="0F172A"/>
-                          </a:solidFill>
-                          <a:latin typeface="Arial"/>
-                        </a:rPr>
-                        <a:t>12%</a:t>
-                      </a:r>
-                    </a:p>
-                  </a:txBody>
-                  <a:tcPr marL="73152" marR="73152" marT="36576" marB="36576" anchor="ctr">
-                    <a:solidFill>
-                      <a:srgbClr val="F1F5F9"/>
-                    </a:solidFill>
-                  </a:tcPr>
-                </a:tc>
-                <a:tc>
-                  <a:txBody>
-                    <a:bodyPr wrap="square"/>
-                    <a:lstStyle/>
-                    <a:p>
-                      <a:pPr algn="ctr"/>
-                      <a:r>
-                        <a:rPr sz="1500" b="0" i="0">
-                          <a:solidFill>
-                            <a:srgbClr val="0F172A"/>
-                          </a:solidFill>
-                          <a:latin typeface="Arial"/>
-                        </a:rPr>
-                        <a:t>+$15.27</a:t>
-                      </a:r>
-                    </a:p>
-                  </a:txBody>
-                  <a:tcPr marL="73152" marR="73152" marT="36576" marB="36576" anchor="ctr">
-                    <a:solidFill>
-                      <a:srgbClr val="F1F5F9"/>
-                    </a:solidFill>
-                  </a:tcPr>
-                </a:tc>
-                <a:tc>
-                  <a:txBody>
-                    <a:bodyPr wrap="square"/>
-                    <a:lstStyle/>
-                    <a:p>
-                      <a:pPr algn="l"/>
-                      <a:r>
-                        <a:rPr sz="1500" b="0" i="0">
-                          <a:solidFill>
-                            <a:srgbClr val="0F172A"/>
-                          </a:solidFill>
-                          <a:latin typeface="Arial"/>
-                        </a:rPr>
-                        <a:t>costs</a:t>
-                      </a:r>
-                    </a:p>
-                  </a:txBody>
-                  <a:tcPr marL="73152" marR="73152" marT="36576" marB="36576" anchor="ctr">
-                    <a:solidFill>
-                      <a:srgbClr val="F1F5F9"/>
-                    </a:solidFill>
-                  </a:tcPr>
-                </a:tc>
-              </a:tr>
-              <a:tr h="384048">
-                <a:tc>
-                  <a:txBody>
-                    <a:bodyPr wrap="square"/>
-                    <a:lstStyle/>
-                    <a:p>
-                      <a:pPr algn="l"/>
-                      <a:r>
-                        <a:rPr sz="1500" b="0" i="0">
-                          <a:solidFill>
-                            <a:srgbClr val="0F172A"/>
-                          </a:solidFill>
-                          <a:latin typeface="Arial"/>
-                        </a:rPr>
-                        <a:t>Agent (bot)</a:t>
-                      </a:r>
-                    </a:p>
-                  </a:txBody>
-                  <a:tcPr marL="73152" marR="73152" marT="36576" marB="36576" anchor="ctr">
-                    <a:solidFill>
-                      <a:srgbClr val="FFFFFF"/>
-                    </a:solidFill>
-                  </a:tcPr>
-                </a:tc>
-                <a:tc>
-                  <a:txBody>
-                    <a:bodyPr wrap="square"/>
-                    <a:lstStyle/>
-                    <a:p>
-                      <a:pPr algn="ctr"/>
-                      <a:r>
-                        <a:rPr sz="1500" b="0" i="0">
-                          <a:solidFill>
-                            <a:srgbClr val="0F172A"/>
-                          </a:solidFill>
-                          <a:latin typeface="Arial"/>
-                        </a:rPr>
-                        <a:t>0</a:t>
-                      </a:r>
-                    </a:p>
-                  </a:txBody>
-                  <a:tcPr marL="73152" marR="73152" marT="36576" marB="36576" anchor="ctr">
-                    <a:solidFill>
-                      <a:srgbClr val="FFFFFF"/>
-                    </a:solidFill>
-                  </a:tcPr>
-                </a:tc>
-                <a:tc>
-                  <a:txBody>
-                    <a:bodyPr wrap="square"/>
-                    <a:lstStyle/>
-                    <a:p>
-                      <a:pPr algn="ctr"/>
-                      <a:r>
-                        <a:rPr sz="1500" b="0" i="0">
-                          <a:solidFill>
-                            <a:srgbClr val="0F172A"/>
-                          </a:solidFill>
-                          <a:latin typeface="Arial"/>
-                        </a:rPr>
-                        <a:t>–</a:t>
-                      </a:r>
-                    </a:p>
-                  </a:txBody>
-                  <a:tcPr marL="73152" marR="73152" marT="36576" marB="36576" anchor="ctr">
-                    <a:solidFill>
-                      <a:srgbClr val="FFFFFF"/>
-                    </a:solidFill>
-                  </a:tcPr>
-                </a:tc>
-                <a:tc>
-                  <a:txBody>
-                    <a:bodyPr wrap="square"/>
-                    <a:lstStyle/>
-                    <a:p>
-                      <a:pPr algn="ctr"/>
-                      <a:r>
-                        <a:rPr sz="1500" b="0" i="0">
-                          <a:solidFill>
-                            <a:srgbClr val="0F172A"/>
-                          </a:solidFill>
-                          <a:latin typeface="Arial"/>
-                        </a:rPr>
-                        <a:t>–</a:t>
-                      </a:r>
-                    </a:p>
-                  </a:txBody>
-                  <a:tcPr marL="73152" marR="73152" marT="36576" marB="36576" anchor="ctr">
-                    <a:solidFill>
-                      <a:srgbClr val="FFFFFF"/>
-                    </a:solidFill>
-                  </a:tcPr>
-                </a:tc>
-                <a:tc>
-                  <a:txBody>
-                    <a:bodyPr wrap="square"/>
-                    <a:lstStyle/>
-                    <a:p>
-                      <a:pPr algn="ctr"/>
-                      <a:r>
-                        <a:rPr sz="1500" b="0" i="0">
-                          <a:solidFill>
-                            <a:srgbClr val="0F172A"/>
-                          </a:solidFill>
-                          <a:latin typeface="Arial"/>
-                        </a:rPr>
-                        <a:t>$0</a:t>
-                      </a:r>
-                    </a:p>
-                  </a:txBody>
-                  <a:tcPr marL="73152" marR="73152" marT="36576" marB="36576" anchor="ctr">
-                    <a:solidFill>
-                      <a:srgbClr val="FFFFFF"/>
-                    </a:solidFill>
-                  </a:tcPr>
-                </a:tc>
-                <a:tc>
-                  <a:txBody>
-                    <a:bodyPr wrap="square"/>
-                    <a:lstStyle/>
-                    <a:p>
-                      <a:pPr algn="l"/>
-                      <a:r>
-                        <a:rPr sz="1500" b="0" i="0">
-                          <a:solidFill>
-                            <a:srgbClr val="0F172A"/>
-                          </a:solidFill>
-                          <a:latin typeface="Arial"/>
-                        </a:rPr>
-                        <a:t>no trades</a:t>
-                      </a:r>
-                    </a:p>
-                  </a:txBody>
-                  <a:tcPr marL="73152" marR="73152" marT="36576" marB="36576" anchor="ctr">
-                    <a:solidFill>
-                      <a:srgbClr val="FFFFFF"/>
-                    </a:solidFill>
-                  </a:tcPr>
-                </a:tc>
-              </a:tr>
-              <a:tr h="384048">
-                <a:tc>
-                  <a:txBody>
-                    <a:bodyPr wrap="square"/>
-                    <a:lstStyle/>
-                    <a:p>
-                      <a:pPr algn="l"/>
-                      <a:r>
-                        <a:rPr sz="1500" b="0" i="0">
-                          <a:solidFill>
-                            <a:srgbClr val="0F172A"/>
-                          </a:solidFill>
-                          <a:latin typeface="Arial"/>
-                        </a:rPr>
-                        <a:t>Never trade (bot)</a:t>
-                      </a:r>
-                    </a:p>
-                  </a:txBody>
-                  <a:tcPr marL="73152" marR="73152" marT="36576" marB="36576" anchor="ctr">
-                    <a:solidFill>
-                      <a:srgbClr val="F1F5F9"/>
-                    </a:solidFill>
-                  </a:tcPr>
-                </a:tc>
-                <a:tc>
-                  <a:txBody>
-                    <a:bodyPr wrap="square"/>
-                    <a:lstStyle/>
-                    <a:p>
-                      <a:pPr algn="ctr"/>
-                      <a:r>
-                        <a:rPr sz="1500" b="0" i="0">
-                          <a:solidFill>
-                            <a:srgbClr val="0F172A"/>
-                          </a:solidFill>
-                          <a:latin typeface="Arial"/>
-                        </a:rPr>
-                        <a:t>0</a:t>
-                      </a:r>
-                    </a:p>
-                  </a:txBody>
-                  <a:tcPr marL="73152" marR="73152" marT="36576" marB="36576" anchor="ctr">
-                    <a:solidFill>
-                      <a:srgbClr val="F1F5F9"/>
-                    </a:solidFill>
-                  </a:tcPr>
-                </a:tc>
-                <a:tc>
-                  <a:txBody>
-                    <a:bodyPr wrap="square"/>
-                    <a:lstStyle/>
-                    <a:p>
-                      <a:pPr algn="ctr"/>
-                      <a:r>
-                        <a:rPr sz="1500" b="0" i="0">
-                          <a:solidFill>
-                            <a:srgbClr val="0F172A"/>
-                          </a:solidFill>
-                          <a:latin typeface="Arial"/>
-                        </a:rPr>
-                        <a:t>–</a:t>
-                      </a:r>
-                    </a:p>
-                  </a:txBody>
-                  <a:tcPr marL="73152" marR="73152" marT="36576" marB="36576" anchor="ctr">
-                    <a:solidFill>
-                      <a:srgbClr val="F1F5F9"/>
-                    </a:solidFill>
-                  </a:tcPr>
-                </a:tc>
-                <a:tc>
-                  <a:txBody>
-                    <a:bodyPr wrap="square"/>
-                    <a:lstStyle/>
-                    <a:p>
-                      <a:pPr algn="ctr"/>
-                      <a:r>
-                        <a:rPr sz="1500" b="0" i="0">
-                          <a:solidFill>
-                            <a:srgbClr val="0F172A"/>
-                          </a:solidFill>
-                          <a:latin typeface="Arial"/>
-                        </a:rPr>
-                        <a:t>–</a:t>
-                      </a:r>
-                    </a:p>
-                  </a:txBody>
-                  <a:tcPr marL="73152" marR="73152" marT="36576" marB="36576" anchor="ctr">
-                    <a:solidFill>
-                      <a:srgbClr val="F1F5F9"/>
-                    </a:solidFill>
-                  </a:tcPr>
-                </a:tc>
-                <a:tc>
-                  <a:txBody>
-                    <a:bodyPr wrap="square"/>
-                    <a:lstStyle/>
-                    <a:p>
-                      <a:pPr algn="ctr"/>
-                      <a:r>
-                        <a:rPr sz="1500" b="0" i="0">
-                          <a:solidFill>
-                            <a:srgbClr val="0F172A"/>
-                          </a:solidFill>
-                          <a:latin typeface="Arial"/>
-                        </a:rPr>
-                        <a:t>$0</a:t>
-                      </a:r>
-                    </a:p>
-                  </a:txBody>
-                  <a:tcPr marL="73152" marR="73152" marT="36576" marB="36576" anchor="ctr">
-                    <a:solidFill>
-                      <a:srgbClr val="F1F5F9"/>
-                    </a:solidFill>
-                  </a:tcPr>
-                </a:tc>
-                <a:tc>
-                  <a:txBody>
-                    <a:bodyPr wrap="square"/>
-                    <a:lstStyle/>
-                    <a:p>
-                      <a:pPr algn="l"/>
-                      <a:r>
-                        <a:rPr sz="1500" b="0" i="0">
-                          <a:solidFill>
-                            <a:srgbClr val="0F172A"/>
-                          </a:solidFill>
-                          <a:latin typeface="Arial"/>
-                        </a:rPr>
-                        <a:t>no trades</a:t>
-                      </a:r>
-                    </a:p>
-                  </a:txBody>
-                  <a:tcPr marL="73152" marR="73152" marT="36576" marB="36576" anchor="ctr">
-                    <a:solidFill>
-                      <a:srgbClr val="F1F5F9"/>
-                    </a:solidFill>
-                  </a:tcPr>
-                </a:tc>
-              </a:tr>
-            </a:tbl>
-          </a:graphicData>
-        </a:graphic>
-      </p:graphicFrame>
-      <p:sp>
-        <p:nvSpPr>
-          <p:cNvPr id="9" name="TextBox 8"/>
-          <p:cNvSpPr txBox="1"/>
-          <p:nvPr/>
-        </p:nvSpPr>
-        <p:spPr>
-          <a:xfrm>
-            <a:off x="8641080" y="3017520"/>
-            <a:ext cx="3093415" cy="2423160"/>
-          </a:xfrm>
-          <a:prstGeom prst="rect">
-            <a:avLst/>
-          </a:prstGeom>
-          <a:noFill/>
-        </p:spPr>
-        <p:txBody>
-          <a:bodyPr wrap="square" anchor="t" lIns="73152" rIns="73152" tIns="36576" bIns="36576">
-            <a:spAutoFit/>
-          </a:bodyPr>
-          <a:lstStyle/>
-          <a:p>
-            <a:pPr algn="l" marL="292608" indent="-256032">
-              <a:spcAft>
-                <a:spcPts val="400"/>
-              </a:spcAft>
-              <a:buChar char="•"/>
-            </a:pPr>
-            <a:r>
-              <a:rPr sz="1500" b="0" i="0">
-                <a:solidFill>
-                  <a:srgbClr val="0F172A"/>
-                </a:solidFill>
-                <a:latin typeface="Arial"/>
-              </a:rPr>
-              <a:t>Same seeded slate for everyone</a:t>
-            </a:r>
-          </a:p>
-          <a:p>
-            <a:pPr algn="l" marL="292608" indent="-256032">
-              <a:spcAft>
-                <a:spcPts val="400"/>
-              </a:spcAft>
-              <a:buChar char="•"/>
-            </a:pPr>
-            <a:r>
-              <a:rPr sz="1500" b="0" i="0">
-                <a:solidFill>
-                  <a:srgbClr val="0F172A"/>
-                </a:solidFill>
-                <a:latin typeface="Arial"/>
-              </a:rPr>
-              <a:t>Only as-of prices, news, Coach brief</a:t>
-            </a:r>
-          </a:p>
-          <a:p>
-            <a:pPr algn="l" marL="292608" indent="-256032">
-              <a:spcAft>
-                <a:spcPts val="400"/>
-              </a:spcAft>
-              <a:buChar char="•"/>
-            </a:pPr>
-            <a:r>
-              <a:rPr sz="1500" b="0" i="0">
-                <a:solidFill>
-                  <a:srgbClr val="0F172A"/>
-                </a:solidFill>
-                <a:latin typeface="Arial"/>
-              </a:rPr>
-              <a:t>Fills at ask + fee, like the agent</a:t>
-            </a:r>
-          </a:p>
-          <a:p>
-            <a:pPr algn="l" marL="292608" indent="-256032">
-              <a:spcAft>
-                <a:spcPts val="400"/>
-              </a:spcAft>
-              <a:buChar char="•"/>
-            </a:pPr>
-            <a:r>
-              <a:rPr sz="1500" b="1" i="0">
-                <a:solidFill>
-                  <a:srgbClr val="0F172A"/>
-                </a:solidFill>
-                <a:latin typeface="Arial"/>
-              </a:rPr>
-              <a:t>Ranked by mean CLV</a:t>
-            </a:r>
-            <a:r>
-              <a:rPr sz="1500" b="0" i="0">
-                <a:solidFill>
-                  <a:srgbClr val="0F172A"/>
-                </a:solidFill>
-                <a:latin typeface="Arial"/>
-              </a:rPr>
-              <a:t> (≥ 5 trades), not P&amp;L</a:t>
-            </a:r>
-          </a:p>
-          <a:p>
-            <a:pPr algn="l" marL="292608" indent="-256032">
-              <a:spcAft>
-                <a:spcPts val="400"/>
-              </a:spcAft>
-              <a:buChar char="•"/>
-            </a:pPr>
-            <a:r>
-              <a:rPr sz="1500" b="0" i="0">
-                <a:solidFill>
-                  <a:srgbClr val="0F172A"/>
-                </a:solidFill>
-                <a:latin typeface="Arial"/>
-              </a:rPr>
-              <a:t>Badge: bootstrap CI of CLV</a:t>
-            </a:r>
-          </a:p>
-        </p:txBody>
-      </p:sp>
-      <p:sp>
-        <p:nvSpPr>
-          <p:cNvPr id="10" name="Rounded Rectangle 9"/>
-          <p:cNvSpPr/>
-          <p:nvPr/>
-        </p:nvSpPr>
-        <p:spPr>
-          <a:xfrm>
-            <a:off x="457200" y="5532120"/>
-            <a:ext cx="11277295" cy="731520"/>
-          </a:xfrm>
-          <a:prstGeom prst="roundRect">
-            <a:avLst>
-              <a:gd name="adj" fmla="val 12000"/>
-            </a:avLst>
-          </a:prstGeom>
-          <a:solidFill>
-            <a:srgbClr val="FEF3C7"/>
-          </a:solidFill>
-          <a:ln>
-            <a:noFill/>
-          </a:ln>
-          <a:effectLst/>
-        </p:spPr>
-        <p:style>
-          <a:lnRef idx="1">
-            <a:schemeClr val="accent1"/>
-          </a:lnRef>
-          <a:fillRef idx="3">
-            <a:schemeClr val="accent1"/>
-          </a:fillRef>
-          <a:effectRef idx="2">
-            <a:schemeClr val="accent1"/>
-          </a:effectRef>
-          <a:fontRef idx="minor">
-            <a:schemeClr val="lt1"/>
-          </a:fontRef>
-        </p:style>
-        <p:txBody>
-          <a:bodyPr rtlCol="0" anchor="ctr"/>
-          <a:lstStyle/>
-          <a:p>
-            <a:pPr algn="ctr"/>
-          </a:p>
-        </p:txBody>
-      </p:sp>
-      <p:sp>
-        <p:nvSpPr>
-          <p:cNvPr id="11" name="TextBox 10"/>
-          <p:cNvSpPr txBox="1"/>
-          <p:nvPr/>
-        </p:nvSpPr>
-        <p:spPr>
-          <a:xfrm>
-            <a:off x="548640" y="5532120"/>
-            <a:ext cx="11094415" cy="731520"/>
-          </a:xfrm>
-          <a:prstGeom prst="rect">
-            <a:avLst/>
-          </a:prstGeom>
-          <a:noFill/>
-        </p:spPr>
-        <p:txBody>
-          <a:bodyPr wrap="square" anchor="ctr" lIns="73152" rIns="73152" tIns="36576" bIns="36576">
-            <a:spAutoFit/>
-          </a:bodyPr>
-          <a:lstStyle/>
-          <a:p>
-            <a:pPr algn="l">
-              <a:spcAft>
-                <a:spcPts val="0"/>
-              </a:spcAft>
-            </a:pPr>
-            <a:r>
-              <a:rPr sz="1800" b="0" i="0">
-                <a:solidFill>
-                  <a:srgbClr val="0F172A"/>
-                </a:solidFill>
-                <a:latin typeface="Arial"/>
-              </a:rPr>
-              <a:t>Raw-model bot: +$15 but negative CLV → “costs”. Winning money is not skill · play money only</a:t>
-            </a:r>
-          </a:p>
-        </p:txBody>
-      </p:sp>
-    </p:spTree>
-  </p:cSld>
-  <p:clrMapOvr>
-    <a:masterClrMapping/>
-  </p:clrMapOvr>
-</p:sld>
-</file>
-
-<file path=ppt/slides/slide15.xml><?xml version="1.0" encoding="utf-8"?>
-<p:sld xmlns:a="http://schemas.openxmlformats.org/drawingml/2006/main" xmlns:p="http://schemas.openxmlformats.org/presentationml/2006/main" xmlns:r="http://schemas.openxmlformats.org/officeDocument/2006/relationships">
-  <p:cSld>
-    <p:spTree>
-      <p:nvGrpSpPr>
-        <p:cNvPr id="1" name=""/>
-        <p:cNvGrpSpPr/>
-        <p:nvPr/>
-      </p:nvGrpSpPr>
-      <p:grpSpPr/>
-      <p:sp>
-        <p:nvSpPr>
-          <p:cNvPr id="2" name="Rectangle 1"/>
-          <p:cNvSpPr/>
-          <p:nvPr/>
-        </p:nvSpPr>
-        <p:spPr>
-          <a:xfrm>
-            <a:off x="0" y="0"/>
-            <a:ext cx="12191695" cy="868680"/>
-          </a:xfrm>
-          <a:prstGeom prst="rect">
-            <a:avLst/>
-          </a:prstGeom>
-          <a:solidFill>
-            <a:srgbClr val="1E293B"/>
-          </a:solidFill>
-          <a:ln>
-            <a:noFill/>
-          </a:ln>
-          <a:effectLst/>
-        </p:spPr>
-        <p:style>
-          <a:lnRef idx="1">
-            <a:schemeClr val="accent1"/>
-          </a:lnRef>
-          <a:fillRef idx="3">
-            <a:schemeClr val="accent1"/>
-          </a:fillRef>
-          <a:effectRef idx="2">
-            <a:schemeClr val="accent1"/>
-          </a:effectRef>
-          <a:fontRef idx="minor">
-            <a:schemeClr val="lt1"/>
-          </a:fontRef>
-        </p:style>
-        <p:txBody>
-          <a:bodyPr rtlCol="0" anchor="ctr"/>
-          <a:lstStyle/>
-          <a:p>
-            <a:pPr algn="ctr"/>
-          </a:p>
-        </p:txBody>
-      </p:sp>
-      <p:sp>
-        <p:nvSpPr>
-          <p:cNvPr id="3" name="Rectangle 2"/>
-          <p:cNvSpPr/>
-          <p:nvPr/>
-        </p:nvSpPr>
-        <p:spPr>
-          <a:xfrm>
-            <a:off x="0" y="868680"/>
-            <a:ext cx="12191695" cy="54864"/>
-          </a:xfrm>
-          <a:prstGeom prst="rect">
-            <a:avLst/>
-          </a:prstGeom>
-          <a:solidFill>
-            <a:srgbClr val="EA580C"/>
-          </a:solidFill>
-          <a:ln>
-            <a:noFill/>
-          </a:ln>
-          <a:effectLst/>
-        </p:spPr>
-        <p:style>
-          <a:lnRef idx="1">
-            <a:schemeClr val="accent1"/>
-          </a:lnRef>
-          <a:fillRef idx="3">
-            <a:schemeClr val="accent1"/>
-          </a:fillRef>
-          <a:effectRef idx="2">
-            <a:schemeClr val="accent1"/>
-          </a:effectRef>
-          <a:fontRef idx="minor">
-            <a:schemeClr val="lt1"/>
-          </a:fontRef>
-        </p:style>
-        <p:txBody>
-          <a:bodyPr rtlCol="0" anchor="ctr"/>
-          <a:lstStyle/>
-          <a:p>
-            <a:pPr algn="ctr"/>
-          </a:p>
-        </p:txBody>
-      </p:sp>
-      <p:sp>
-        <p:nvSpPr>
-          <p:cNvPr id="4" name="TextBox 3"/>
-          <p:cNvSpPr txBox="1"/>
-          <p:nvPr/>
-        </p:nvSpPr>
-        <p:spPr>
-          <a:xfrm>
-            <a:off x="457200" y="109728"/>
-            <a:ext cx="11277295" cy="685800"/>
-          </a:xfrm>
-          <a:prstGeom prst="rect">
-            <a:avLst/>
-          </a:prstGeom>
-          <a:noFill/>
-        </p:spPr>
-        <p:txBody>
-          <a:bodyPr wrap="square" anchor="ctr" lIns="73152" rIns="73152" tIns="36576" bIns="36576">
-            <a:spAutoFit/>
-          </a:bodyPr>
-          <a:lstStyle/>
-          <a:p>
-            <a:pPr algn="l">
-              <a:spcAft>
-                <a:spcPts val="0"/>
-              </a:spcAft>
-            </a:pPr>
-            <a:r>
-              <a:rPr sz="3000" b="1" i="0">
-                <a:solidFill>
-                  <a:srgbClr val="FFFFFF"/>
-                </a:solidFill>
-                <a:latin typeface="Arial"/>
-              </a:rPr>
-              <a:t>Honest scope: what “unfair” means here</a:t>
-            </a:r>
-          </a:p>
-        </p:txBody>
-      </p:sp>
-      <p:sp>
-        <p:nvSpPr>
-          <p:cNvPr id="5" name="TextBox 4"/>
-          <p:cNvSpPr txBox="1"/>
-          <p:nvPr/>
-        </p:nvSpPr>
-        <p:spPr>
-          <a:xfrm>
-            <a:off x="457200" y="6446520"/>
-            <a:ext cx="9144000" cy="320040"/>
-          </a:xfrm>
-          <a:prstGeom prst="rect">
-            <a:avLst/>
-          </a:prstGeom>
-          <a:noFill/>
-        </p:spPr>
-        <p:txBody>
-          <a:bodyPr wrap="square" anchor="t" lIns="73152" rIns="73152" tIns="36576" bIns="36576">
-            <a:spAutoFit/>
-          </a:bodyPr>
-          <a:lstStyle/>
-          <a:p>
-            <a:pPr algn="l">
-              <a:spcAft>
-                <a:spcPts val="0"/>
-              </a:spcAft>
-            </a:pPr>
-            <a:r>
-              <a:rPr sz="1100" b="0" i="0">
-                <a:solidFill>
-                  <a:srgbClr val="64748B"/>
-                </a:solidFill>
-                <a:latin typeface="Arial"/>
-              </a:rPr>
-              <a:t>DASC7606C Group 12 · Betting markets are tilted against consumers</a:t>
-            </a:r>
-          </a:p>
-        </p:txBody>
-      </p:sp>
-      <p:sp>
-        <p:nvSpPr>
-          <p:cNvPr id="6" name="TextBox 5"/>
-          <p:cNvSpPr txBox="1"/>
-          <p:nvPr/>
-        </p:nvSpPr>
-        <p:spPr>
-          <a:xfrm>
-            <a:off x="10820095" y="6446520"/>
-            <a:ext cx="914400" cy="320040"/>
-          </a:xfrm>
-          <a:prstGeom prst="rect">
-            <a:avLst/>
-          </a:prstGeom>
-          <a:noFill/>
-        </p:spPr>
-        <p:txBody>
-          <a:bodyPr wrap="square" anchor="t" lIns="73152" rIns="73152" tIns="36576" bIns="36576">
-            <a:spAutoFit/>
-          </a:bodyPr>
-          <a:lstStyle/>
-          <a:p>
-            <a:pPr algn="r">
-              <a:spcAft>
-                <a:spcPts val="0"/>
-              </a:spcAft>
-            </a:pPr>
-            <a:r>
-              <a:rPr sz="1100" b="0" i="0">
-                <a:solidFill>
-                  <a:srgbClr val="64748B"/>
-                </a:solidFill>
-                <a:latin typeface="Arial"/>
-              </a:rPr>
-              <a:t>15</a:t>
-            </a:r>
-          </a:p>
-        </p:txBody>
-      </p:sp>
-      <p:sp>
-        <p:nvSpPr>
-          <p:cNvPr id="7" name="Rounded Rectangle 6"/>
-          <p:cNvSpPr/>
-          <p:nvPr/>
-        </p:nvSpPr>
-        <p:spPr>
-          <a:xfrm>
-            <a:off x="457200" y="1234439"/>
-            <a:ext cx="5120640" cy="5074920"/>
-          </a:xfrm>
-          <a:prstGeom prst="roundRect">
-            <a:avLst>
-              <a:gd name="adj" fmla="val 6000"/>
-            </a:avLst>
-          </a:prstGeom>
-          <a:solidFill>
-            <a:srgbClr val="FFFFFF"/>
-          </a:solidFill>
-          <a:ln w="15875">
-            <a:solidFill>
-              <a:srgbClr val="1E293B"/>
-            </a:solidFill>
-          </a:ln>
-          <a:effectLst/>
-        </p:spPr>
-        <p:style>
-          <a:lnRef idx="1">
-            <a:schemeClr val="accent1"/>
-          </a:lnRef>
-          <a:fillRef idx="3">
-            <a:schemeClr val="accent1"/>
-          </a:fillRef>
-          <a:effectRef idx="2">
-            <a:schemeClr val="accent1"/>
-          </a:effectRef>
-          <a:fontRef idx="minor">
-            <a:schemeClr val="lt1"/>
-          </a:fontRef>
-        </p:style>
-        <p:txBody>
-          <a:bodyPr rtlCol="0" anchor="ctr"/>
-          <a:lstStyle/>
-          <a:p>
-            <a:pPr algn="ctr"/>
-          </a:p>
-        </p:txBody>
-      </p:sp>
-      <p:sp>
-        <p:nvSpPr>
-          <p:cNvPr id="8" name="Rectangle 7"/>
-          <p:cNvSpPr/>
-          <p:nvPr/>
-        </p:nvSpPr>
-        <p:spPr>
-          <a:xfrm>
-            <a:off x="457200" y="1234439"/>
-            <a:ext cx="109728" cy="5074920"/>
-          </a:xfrm>
-          <a:prstGeom prst="rect">
-            <a:avLst/>
-          </a:prstGeom>
-          <a:solidFill>
-            <a:srgbClr val="1E293B"/>
-          </a:solidFill>
-          <a:ln>
-            <a:noFill/>
-          </a:ln>
-          <a:effectLst/>
-        </p:spPr>
-        <p:style>
-          <a:lnRef idx="1">
-            <a:schemeClr val="accent1"/>
-          </a:lnRef>
-          <a:fillRef idx="3">
-            <a:schemeClr val="accent1"/>
-          </a:fillRef>
-          <a:effectRef idx="2">
-            <a:schemeClr val="accent1"/>
-          </a:effectRef>
-          <a:fontRef idx="minor">
-            <a:schemeClr val="lt1"/>
-          </a:fontRef>
-        </p:style>
-        <p:txBody>
-          <a:bodyPr rtlCol="0" anchor="ctr"/>
-          <a:lstStyle/>
-          <a:p>
-            <a:pPr algn="ctr"/>
-          </a:p>
-        </p:txBody>
-      </p:sp>
-      <p:sp>
-        <p:nvSpPr>
-          <p:cNvPr id="9" name="TextBox 8"/>
-          <p:cNvSpPr txBox="1"/>
-          <p:nvPr/>
-        </p:nvSpPr>
-        <p:spPr>
-          <a:xfrm>
-            <a:off x="640080" y="1307592"/>
-            <a:ext cx="4846320" cy="457200"/>
-          </a:xfrm>
-          <a:prstGeom prst="rect">
-            <a:avLst/>
-          </a:prstGeom>
-          <a:noFill/>
-        </p:spPr>
-        <p:txBody>
-          <a:bodyPr wrap="square" anchor="t" lIns="73152" rIns="73152" tIns="36576" bIns="36576">
-            <a:spAutoFit/>
-          </a:bodyPr>
-          <a:lstStyle/>
-          <a:p>
-            <a:pPr algn="l">
-              <a:spcAft>
-                <a:spcPts val="0"/>
-              </a:spcAft>
-            </a:pPr>
-            <a:r>
-              <a:rPr sz="2000" b="1" i="0">
-                <a:solidFill>
-                  <a:srgbClr val="1E293B"/>
-                </a:solidFill>
-                <a:latin typeface="Arial"/>
-              </a:rPr>
-              <a:t>What we claim</a:t>
-            </a:r>
-          </a:p>
-        </p:txBody>
-      </p:sp>
-      <p:sp>
-        <p:nvSpPr>
-          <p:cNvPr id="10" name="TextBox 9"/>
-          <p:cNvSpPr txBox="1"/>
-          <p:nvPr/>
-        </p:nvSpPr>
-        <p:spPr>
-          <a:xfrm>
-            <a:off x="640080" y="1764791"/>
-            <a:ext cx="4846320" cy="4471416"/>
-          </a:xfrm>
-          <a:prstGeom prst="rect">
-            <a:avLst/>
-          </a:prstGeom>
-          <a:noFill/>
-        </p:spPr>
-        <p:txBody>
-          <a:bodyPr wrap="square" anchor="t" lIns="73152" rIns="73152" tIns="36576" bIns="36576">
-            <a:spAutoFit/>
-          </a:bodyPr>
-          <a:lstStyle/>
-          <a:p>
-            <a:pPr algn="l" marL="292608" indent="-256032">
-              <a:spcAft>
-                <a:spcPts val="600"/>
-              </a:spcAft>
-              <a:buChar char="•"/>
-            </a:pPr>
-            <a:r>
-              <a:rPr sz="1800" b="0" i="0">
-                <a:solidFill>
-                  <a:srgbClr val="0F172A"/>
-                </a:solidFill>
-                <a:latin typeface="Arial"/>
-              </a:rPr>
-              <a:t>Structural disadvantages: costs, speed, expertise</a:t>
-            </a:r>
-          </a:p>
-          <a:p>
-            <a:pPr algn="l" marL="292608" indent="-256032">
-              <a:spcAft>
-                <a:spcPts val="600"/>
-              </a:spcAft>
-              <a:buChar char="•"/>
-            </a:pPr>
-            <a:r>
-              <a:rPr sz="1800" b="1" i="0">
-                <a:solidFill>
-                  <a:srgbClr val="0F172A"/>
-                </a:solidFill>
-                <a:latin typeface="Arial"/>
-              </a:rPr>
-              <a:t>Not</a:t>
-            </a:r>
-            <a:r>
-              <a:rPr sz="1800" b="0" i="0">
-                <a:solidFill>
-                  <a:srgbClr val="0F172A"/>
-                </a:solidFill>
-                <a:latin typeface="Arial"/>
-              </a:rPr>
-              <a:t> manipulation or fraud</a:t>
-            </a:r>
-          </a:p>
-          <a:p>
-            <a:pPr algn="l" marL="292608" indent="-256032">
-              <a:spcAft>
-                <a:spcPts val="600"/>
-              </a:spcAft>
-              <a:buChar char="•"/>
-            </a:pPr>
-            <a:r>
-              <a:rPr sz="1800" b="1" i="0">
-                <a:solidFill>
-                  <a:srgbClr val="0F172A"/>
-                </a:solidFill>
-                <a:latin typeface="Arial"/>
-              </a:rPr>
-              <a:t>No</a:t>
-            </a:r>
-            <a:r>
-              <a:rPr sz="1800" b="0" i="0">
-                <a:solidFill>
-                  <a:srgbClr val="0F172A"/>
-                </a:solidFill>
-                <a:latin typeface="Arial"/>
-              </a:rPr>
-              <a:t> accusation against Kalshi or any venue</a:t>
-            </a:r>
-          </a:p>
-          <a:p>
-            <a:pPr algn="l" marL="292608" indent="-256032">
-              <a:spcAft>
-                <a:spcPts val="600"/>
-              </a:spcAft>
-              <a:buChar char="•"/>
-            </a:pPr>
-            <a:r>
-              <a:rPr sz="1800" b="0" i="0">
-                <a:solidFill>
-                  <a:srgbClr val="0F172A"/>
-                </a:solidFill>
-                <a:latin typeface="Arial"/>
-              </a:rPr>
-              <a:t>Paper money; public data only</a:t>
-            </a:r>
-          </a:p>
-        </p:txBody>
-      </p:sp>
-      <p:sp>
-        <p:nvSpPr>
-          <p:cNvPr id="11" name="Rounded Rectangle 10"/>
-          <p:cNvSpPr/>
-          <p:nvPr/>
-        </p:nvSpPr>
-        <p:spPr>
-          <a:xfrm>
-            <a:off x="5852160" y="1234439"/>
-            <a:ext cx="5882335" cy="5074920"/>
-          </a:xfrm>
-          <a:prstGeom prst="roundRect">
-            <a:avLst>
-              <a:gd name="adj" fmla="val 6000"/>
-            </a:avLst>
-          </a:prstGeom>
-          <a:solidFill>
-            <a:srgbClr val="FFFFFF"/>
-          </a:solidFill>
-          <a:ln w="15875">
-            <a:solidFill>
-              <a:srgbClr val="DC2626"/>
-            </a:solidFill>
-          </a:ln>
-          <a:effectLst/>
-        </p:spPr>
-        <p:style>
-          <a:lnRef idx="1">
-            <a:schemeClr val="accent1"/>
-          </a:lnRef>
-          <a:fillRef idx="3">
-            <a:schemeClr val="accent1"/>
-          </a:fillRef>
-          <a:effectRef idx="2">
-            <a:schemeClr val="accent1"/>
-          </a:effectRef>
-          <a:fontRef idx="minor">
-            <a:schemeClr val="lt1"/>
-          </a:fontRef>
-        </p:style>
-        <p:txBody>
-          <a:bodyPr rtlCol="0" anchor="ctr"/>
-          <a:lstStyle/>
-          <a:p>
-            <a:pPr algn="ctr"/>
-          </a:p>
-        </p:txBody>
-      </p:sp>
-      <p:sp>
-        <p:nvSpPr>
-          <p:cNvPr id="12" name="Rectangle 11"/>
-          <p:cNvSpPr/>
-          <p:nvPr/>
-        </p:nvSpPr>
-        <p:spPr>
-          <a:xfrm>
-            <a:off x="5852160" y="1234439"/>
-            <a:ext cx="109728" cy="5074920"/>
-          </a:xfrm>
-          <a:prstGeom prst="rect">
-            <a:avLst/>
-          </a:prstGeom>
-          <a:solidFill>
-            <a:srgbClr val="DC2626"/>
-          </a:solidFill>
-          <a:ln>
-            <a:noFill/>
-          </a:ln>
-          <a:effectLst/>
-        </p:spPr>
-        <p:style>
-          <a:lnRef idx="1">
-            <a:schemeClr val="accent1"/>
-          </a:lnRef>
-          <a:fillRef idx="3">
-            <a:schemeClr val="accent1"/>
-          </a:fillRef>
-          <a:effectRef idx="2">
-            <a:schemeClr val="accent1"/>
-          </a:effectRef>
-          <a:fontRef idx="minor">
-            <a:schemeClr val="lt1"/>
-          </a:fontRef>
-        </p:style>
-        <p:txBody>
-          <a:bodyPr rtlCol="0" anchor="ctr"/>
-          <a:lstStyle/>
-          <a:p>
-            <a:pPr algn="ctr"/>
-          </a:p>
-        </p:txBody>
-      </p:sp>
-      <p:sp>
-        <p:nvSpPr>
-          <p:cNvPr id="13" name="TextBox 12"/>
-          <p:cNvSpPr txBox="1"/>
-          <p:nvPr/>
-        </p:nvSpPr>
-        <p:spPr>
-          <a:xfrm>
-            <a:off x="6035040" y="1307592"/>
-            <a:ext cx="5608015" cy="457200"/>
-          </a:xfrm>
-          <a:prstGeom prst="rect">
-            <a:avLst/>
-          </a:prstGeom>
-          <a:noFill/>
-        </p:spPr>
-        <p:txBody>
-          <a:bodyPr wrap="square" anchor="t" lIns="73152" rIns="73152" tIns="36576" bIns="36576">
-            <a:spAutoFit/>
-          </a:bodyPr>
-          <a:lstStyle/>
-          <a:p>
-            <a:pPr algn="l">
-              <a:spcAft>
-                <a:spcPts val="0"/>
-              </a:spcAft>
-            </a:pPr>
-            <a:r>
-              <a:rPr sz="2000" b="1" i="0">
-                <a:solidFill>
-                  <a:srgbClr val="DC2626"/>
-                </a:solidFill>
-                <a:latin typeface="Arial"/>
-              </a:rPr>
-              <a:t>Caveats and disclosure</a:t>
-            </a:r>
-          </a:p>
-        </p:txBody>
-      </p:sp>
-      <p:sp>
-        <p:nvSpPr>
-          <p:cNvPr id="14" name="TextBox 13"/>
-          <p:cNvSpPr txBox="1"/>
-          <p:nvPr/>
-        </p:nvSpPr>
-        <p:spPr>
-          <a:xfrm>
-            <a:off x="6035040" y="1764791"/>
-            <a:ext cx="5608015" cy="4471416"/>
-          </a:xfrm>
-          <a:prstGeom prst="rect">
-            <a:avLst/>
-          </a:prstGeom>
-          <a:noFill/>
-        </p:spPr>
-        <p:txBody>
-          <a:bodyPr wrap="square" anchor="t" lIns="73152" rIns="73152" tIns="36576" bIns="36576">
-            <a:spAutoFit/>
-          </a:bodyPr>
-          <a:lstStyle/>
-          <a:p>
-            <a:pPr algn="l" marL="292608" indent="-256032">
-              <a:spcAft>
-                <a:spcPts val="600"/>
-              </a:spcAft>
-              <a:buChar char="•"/>
-            </a:pPr>
-            <a:r>
-              <a:rPr sz="1800" b="1" i="0">
-                <a:solidFill>
-                  <a:srgbClr val="0F172A"/>
-                </a:solidFill>
-                <a:latin typeface="Arial"/>
-              </a:rPr>
-              <a:t>Disclosure:</a:t>
-            </a:r>
-            <a:r>
-              <a:rPr sz="1800" b="0" i="0">
-                <a:solidFill>
-                  <a:srgbClr val="0F172A"/>
-                </a:solidFill>
-                <a:latin typeface="Arial"/>
-              </a:rPr>
-              <a:t> anchor and reviewer designed after seeing Feb–Apr results, so that window is not a clean holdout; walk-forward and play-off holdout are the honest checks</a:t>
-            </a:r>
-          </a:p>
-          <a:p>
-            <a:pPr algn="l" marL="292608" indent="-256032">
-              <a:spcAft>
-                <a:spcPts val="600"/>
-              </a:spcAft>
-              <a:buChar char="•"/>
-            </a:pPr>
-            <a:r>
-              <a:rPr sz="1800" b="0" i="0">
-                <a:solidFill>
-                  <a:srgbClr val="0F172A"/>
-                </a:solidFill>
-                <a:latin typeface="Arial"/>
-              </a:rPr>
-              <a:t>Data limits on slide 5: one season, inactive lists as the only news</a:t>
-            </a:r>
-          </a:p>
-          <a:p>
-            <a:pPr algn="l" marL="292608" indent="-256032">
-              <a:spcAft>
-                <a:spcPts val="600"/>
-              </a:spcAft>
-              <a:buChar char="•"/>
-            </a:pPr>
-            <a:r>
-              <a:rPr sz="1800" b="0" i="0">
-                <a:solidFill>
-                  <a:srgbClr val="0F172A"/>
-                </a:solidFill>
-                <a:latin typeface="Arial"/>
-              </a:rPr>
-              <a:t>Costs for a $20 order at tip − 60 min; long-shot bias not clearly supported</a:t>
-            </a:r>
-          </a:p>
-          <a:p>
-            <a:pPr algn="l" marL="292608" indent="-256032">
-              <a:spcAft>
-                <a:spcPts val="600"/>
-              </a:spcAft>
-              <a:buChar char="•"/>
-            </a:pPr>
-            <a:r>
-              <a:rPr sz="1800" b="0" i="0">
-                <a:solidFill>
-                  <a:srgbClr val="0F172A"/>
-                </a:solidFill>
-                <a:latin typeface="Arial"/>
-              </a:rPr>
-              <a:t>Well-being figures are published research, not ours</a:t>
-            </a:r>
-          </a:p>
-        </p:txBody>
-      </p:sp>
-    </p:spTree>
-  </p:cSld>
-  <p:clrMapOvr>
-    <a:masterClrMapping/>
-  </p:clrMapOvr>
-</p:sld>
-</file>
-
-<file path=ppt/slides/slide16.xml><?xml version="1.0" encoding="utf-8"?>
-<p:sld xmlns:a="http://schemas.openxmlformats.org/drawingml/2006/main" xmlns:p="http://schemas.openxmlformats.org/presentationml/2006/main" xmlns:r="http://schemas.openxmlformats.org/officeDocument/2006/relationships">
-  <p:cSld>
-    <p:spTree>
-      <p:nvGrpSpPr>
-        <p:cNvPr id="1" name=""/>
-        <p:cNvGrpSpPr/>
-        <p:nvPr/>
-      </p:nvGrpSpPr>
-      <p:grpSpPr/>
-      <p:sp>
-        <p:nvSpPr>
-          <p:cNvPr id="2" name="Rectangle 1"/>
-          <p:cNvSpPr/>
-          <p:nvPr/>
-        </p:nvSpPr>
-        <p:spPr>
-          <a:xfrm>
-            <a:off x="0" y="0"/>
-            <a:ext cx="12191695" cy="868680"/>
-          </a:xfrm>
-          <a:prstGeom prst="rect">
-            <a:avLst/>
-          </a:prstGeom>
-          <a:solidFill>
-            <a:srgbClr val="1E293B"/>
-          </a:solidFill>
-          <a:ln>
-            <a:noFill/>
-          </a:ln>
-          <a:effectLst/>
-        </p:spPr>
-        <p:style>
-          <a:lnRef idx="1">
-            <a:schemeClr val="accent1"/>
-          </a:lnRef>
-          <a:fillRef idx="3">
-            <a:schemeClr val="accent1"/>
-          </a:fillRef>
-          <a:effectRef idx="2">
-            <a:schemeClr val="accent1"/>
-          </a:effectRef>
-          <a:fontRef idx="minor">
-            <a:schemeClr val="lt1"/>
-          </a:fontRef>
-        </p:style>
-        <p:txBody>
-          <a:bodyPr rtlCol="0" anchor="ctr"/>
-          <a:lstStyle/>
-          <a:p>
-            <a:pPr algn="ctr"/>
-          </a:p>
-        </p:txBody>
-      </p:sp>
-      <p:sp>
-        <p:nvSpPr>
-          <p:cNvPr id="3" name="Rectangle 2"/>
-          <p:cNvSpPr/>
-          <p:nvPr/>
-        </p:nvSpPr>
-        <p:spPr>
-          <a:xfrm>
-            <a:off x="0" y="868680"/>
-            <a:ext cx="12191695" cy="54864"/>
-          </a:xfrm>
-          <a:prstGeom prst="rect">
-            <a:avLst/>
-          </a:prstGeom>
-          <a:solidFill>
-            <a:srgbClr val="EA580C"/>
-          </a:solidFill>
-          <a:ln>
-            <a:noFill/>
-          </a:ln>
-          <a:effectLst/>
-        </p:spPr>
-        <p:style>
-          <a:lnRef idx="1">
-            <a:schemeClr val="accent1"/>
-          </a:lnRef>
-          <a:fillRef idx="3">
-            <a:schemeClr val="accent1"/>
-          </a:fillRef>
-          <a:effectRef idx="2">
-            <a:schemeClr val="accent1"/>
-          </a:effectRef>
-          <a:fontRef idx="minor">
-            <a:schemeClr val="lt1"/>
-          </a:fontRef>
-        </p:style>
-        <p:txBody>
-          <a:bodyPr rtlCol="0" anchor="ctr"/>
-          <a:lstStyle/>
-          <a:p>
-            <a:pPr algn="ctr"/>
-          </a:p>
-        </p:txBody>
-      </p:sp>
-      <p:sp>
-        <p:nvSpPr>
-          <p:cNvPr id="4" name="TextBox 3"/>
-          <p:cNvSpPr txBox="1"/>
-          <p:nvPr/>
-        </p:nvSpPr>
-        <p:spPr>
-          <a:xfrm>
-            <a:off x="457200" y="109728"/>
-            <a:ext cx="11277295" cy="685800"/>
-          </a:xfrm>
-          <a:prstGeom prst="rect">
-            <a:avLst/>
-          </a:prstGeom>
-          <a:noFill/>
-        </p:spPr>
-        <p:txBody>
-          <a:bodyPr wrap="square" anchor="ctr" lIns="73152" rIns="73152" tIns="36576" bIns="36576">
-            <a:spAutoFit/>
-          </a:bodyPr>
-          <a:lstStyle/>
-          <a:p>
-            <a:pPr algn="l">
-              <a:spcAft>
-                <a:spcPts val="0"/>
-              </a:spcAft>
-            </a:pPr>
-            <a:r>
-              <a:rPr sz="3000" b="1" i="0">
-                <a:solidFill>
-                  <a:srgbClr val="FFFFFF"/>
-                </a:solidFill>
-                <a:latin typeface="Arial"/>
-              </a:rPr>
-              <a:t>Live demo: streamlit run app.py</a:t>
-            </a:r>
-          </a:p>
-        </p:txBody>
-      </p:sp>
-      <p:sp>
-        <p:nvSpPr>
-          <p:cNvPr id="5" name="TextBox 4"/>
-          <p:cNvSpPr txBox="1"/>
-          <p:nvPr/>
-        </p:nvSpPr>
-        <p:spPr>
-          <a:xfrm>
-            <a:off x="457200" y="6446520"/>
-            <a:ext cx="9144000" cy="320040"/>
-          </a:xfrm>
-          <a:prstGeom prst="rect">
-            <a:avLst/>
-          </a:prstGeom>
-          <a:noFill/>
-        </p:spPr>
-        <p:txBody>
-          <a:bodyPr wrap="square" anchor="t" lIns="73152" rIns="73152" tIns="36576" bIns="36576">
-            <a:spAutoFit/>
-          </a:bodyPr>
-          <a:lstStyle/>
-          <a:p>
-            <a:pPr algn="l">
-              <a:spcAft>
-                <a:spcPts val="0"/>
-              </a:spcAft>
-            </a:pPr>
-            <a:r>
-              <a:rPr sz="1100" b="0" i="0">
-                <a:solidFill>
-                  <a:srgbClr val="64748B"/>
-                </a:solidFill>
-                <a:latin typeface="Arial"/>
-              </a:rPr>
-              <a:t>DASC7606C Group 12 · Betting markets are tilted against consumers</a:t>
-            </a:r>
-          </a:p>
-        </p:txBody>
-      </p:sp>
-      <p:sp>
-        <p:nvSpPr>
-          <p:cNvPr id="6" name="TextBox 5"/>
-          <p:cNvSpPr txBox="1"/>
-          <p:nvPr/>
-        </p:nvSpPr>
-        <p:spPr>
-          <a:xfrm>
-            <a:off x="10820095" y="6446520"/>
-            <a:ext cx="914400" cy="320040"/>
-          </a:xfrm>
-          <a:prstGeom prst="rect">
-            <a:avLst/>
-          </a:prstGeom>
-          <a:noFill/>
-        </p:spPr>
-        <p:txBody>
-          <a:bodyPr wrap="square" anchor="t" lIns="73152" rIns="73152" tIns="36576" bIns="36576">
-            <a:spAutoFit/>
-          </a:bodyPr>
-          <a:lstStyle/>
-          <a:p>
-            <a:pPr algn="r">
-              <a:spcAft>
-                <a:spcPts val="0"/>
-              </a:spcAft>
-            </a:pPr>
-            <a:r>
-              <a:rPr sz="1100" b="0" i="0">
-                <a:solidFill>
-                  <a:srgbClr val="64748B"/>
-                </a:solidFill>
-                <a:latin typeface="Arial"/>
-              </a:rPr>
-              <a:t>16</a:t>
             </a:r>
           </a:p>
         </p:txBody>
@@ -9668,7 +8617,7 @@
         </p:nvGraphicFramePr>
         <p:xfrm>
           <a:off x="457200" y="1234439"/>
-          <a:ext cx="11277295" cy="4389120"/>
+          <a:ext cx="11277295" cy="3840480"/>
         </p:xfrm>
         <a:graphic>
           <a:graphicData uri="http://schemas.openxmlformats.org/drawingml/2006/table">
@@ -9680,7 +8629,7 @@
                 <a:gridCol w="2377440"/>
                 <a:gridCol w="8899855"/>
               </a:tblGrid>
-              <a:tr h="548640">
+              <a:tr h="640080">
                 <a:tc>
                   <a:txBody>
                     <a:bodyPr wrap="square"/>
@@ -9688,7 +8637,7 @@
                     <a:p>
                       <a:pPr algn="l"/>
                       <a:r>
-                        <a:rPr sz="1700" b="1" i="0">
+                        <a:rPr sz="1800" b="1" i="0">
                           <a:solidFill>
                             <a:srgbClr val="FFFFFF"/>
                           </a:solidFill>
@@ -9711,7 +8660,7 @@
                     <a:p>
                       <a:pPr algn="l"/>
                       <a:r>
-                        <a:rPr sz="1700" b="1" i="0">
+                        <a:rPr sz="1800" b="1" i="0">
                           <a:solidFill>
                             <a:srgbClr val="FFFFFF"/>
                           </a:solidFill>
@@ -9728,7 +8677,7 @@
                   </a:tcPr>
                 </a:tc>
               </a:tr>
-              <a:tr h="548640">
+              <a:tr h="640080">
                 <a:tc>
                   <a:txBody>
                     <a:bodyPr wrap="square"/>
@@ -9736,7 +8685,7 @@
                     <a:p>
                       <a:pPr algn="l"/>
                       <a:r>
-                        <a:rPr sz="1700" b="0" i="0">
+                        <a:rPr sz="1800" b="0" i="0">
                           <a:solidFill>
                             <a:srgbClr val="0F172A"/>
                           </a:solidFill>
@@ -9759,7 +8708,7 @@
                     <a:p>
                       <a:pPr algn="l"/>
                       <a:r>
-                        <a:rPr sz="1700" b="0" i="0">
+                        <a:rPr sz="1800" b="0" i="0">
                           <a:solidFill>
                             <a:srgbClr val="0F172A"/>
                           </a:solidFill>
@@ -9776,7 +8725,7 @@
                   </a:tcPr>
                 </a:tc>
               </a:tr>
-              <a:tr h="548640">
+              <a:tr h="640080">
                 <a:tc>
                   <a:txBody>
                     <a:bodyPr wrap="square"/>
@@ -9784,7 +8733,7 @@
                     <a:p>
                       <a:pPr algn="l"/>
                       <a:r>
-                        <a:rPr sz="1700" b="0" i="0">
+                        <a:rPr sz="1800" b="0" i="0">
                           <a:solidFill>
                             <a:srgbClr val="0F172A"/>
                           </a:solidFill>
@@ -9807,7 +8756,7 @@
                     <a:p>
                       <a:pPr algn="l"/>
                       <a:r>
-                        <a:rPr sz="1700" b="0" i="0">
+                        <a:rPr sz="1800" b="0" i="0">
                           <a:solidFill>
                             <a:srgbClr val="0F172A"/>
                           </a:solidFill>
@@ -9824,7 +8773,7 @@
                   </a:tcPr>
                 </a:tc>
               </a:tr>
-              <a:tr h="548640">
+              <a:tr h="640080">
                 <a:tc>
                   <a:txBody>
                     <a:bodyPr wrap="square"/>
@@ -9832,7 +8781,7 @@
                     <a:p>
                       <a:pPr algn="l"/>
                       <a:r>
-                        <a:rPr sz="1700" b="0" i="0">
+                        <a:rPr sz="1800" b="0" i="0">
                           <a:solidFill>
                             <a:srgbClr val="0F172A"/>
                           </a:solidFill>
@@ -9855,7 +8804,7 @@
                     <a:p>
                       <a:pPr algn="l"/>
                       <a:r>
-                        <a:rPr sz="1700" b="0" i="0">
+                        <a:rPr sz="1800" b="0" i="0">
                           <a:solidFill>
                             <a:srgbClr val="0F172A"/>
                           </a:solidFill>
@@ -9872,7 +8821,7 @@
                   </a:tcPr>
                 </a:tc>
               </a:tr>
-              <a:tr h="548640">
+              <a:tr h="640080">
                 <a:tc>
                   <a:txBody>
                     <a:bodyPr wrap="square"/>
@@ -9880,13 +8829,13 @@
                     <a:p>
                       <a:pPr algn="l"/>
                       <a:r>
-                        <a:rPr sz="1700" b="0" i="0">
+                        <a:rPr sz="1800" b="0" i="0">
                           <a:solidFill>
                             <a:srgbClr val="0F172A"/>
                           </a:solidFill>
                           <a:latin typeface="Arial"/>
                         </a:rPr>
-                        <a:t>Channel briefs</a:t>
+                        <a:t>Learning</a:t>
                       </a:r>
                     </a:p>
                   </a:txBody>
@@ -9903,13 +8852,13 @@
                     <a:p>
                       <a:pPr algn="l"/>
                       <a:r>
-                        <a:rPr sz="1700" b="0" i="0">
+                        <a:rPr sz="1800" b="0" i="0">
                           <a:solidFill>
                             <a:srgbClr val="0F172A"/>
                           </a:solidFill>
                           <a:latin typeface="Arial"/>
                         </a:rPr>
-                        <a:t>Retail: model vs market and no-order reason; no market language for media / team</a:t>
+                        <a:t>Gate keeps protective rules (skip long shots, skip chasing)</a:t>
                       </a:r>
                     </a:p>
                   </a:txBody>
@@ -9920,7 +8869,7 @@
                   </a:tcPr>
                 </a:tc>
               </a:tr>
-              <a:tr h="548640">
+              <a:tr h="640080">
                 <a:tc>
                   <a:txBody>
                     <a:bodyPr wrap="square"/>
@@ -9928,13 +8877,13 @@
                     <a:p>
                       <a:pPr algn="l"/>
                       <a:r>
-                        <a:rPr sz="1700" b="0" i="0">
+                        <a:rPr sz="1800" b="0" i="0">
                           <a:solidFill>
                             <a:srgbClr val="0F172A"/>
                           </a:solidFill>
                           <a:latin typeface="Arial"/>
                         </a:rPr>
-                        <a:t>Learning</a:t>
+                        <a:t>Safety</a:t>
                       </a:r>
                     </a:p>
                   </a:txBody>
@@ -9951,109 +8900,13 @@
                     <a:p>
                       <a:pPr algn="l"/>
                       <a:r>
-                        <a:rPr sz="1700" b="0" i="0">
-                          <a:solidFill>
-                            <a:srgbClr val="0F172A"/>
-                          </a:solidFill>
-                          <a:latin typeface="Arial"/>
-                        </a:rPr>
-                        <a:t>Gate keeps protective rules (skip long shots, skip chasing)</a:t>
-                      </a:r>
-                    </a:p>
-                  </a:txBody>
-                  <a:tcPr marL="73152" marR="73152" marT="36576" marB="36576" anchor="ctr">
-                    <a:solidFill>
-                      <a:srgbClr val="F1F5F9"/>
-                    </a:solidFill>
-                  </a:tcPr>
-                </a:tc>
-              </a:tr>
-              <a:tr h="548640">
-                <a:tc>
-                  <a:txBody>
-                    <a:bodyPr wrap="square"/>
-                    <a:lstStyle/>
-                    <a:p>
-                      <a:pPr algn="l"/>
-                      <a:r>
-                        <a:rPr sz="1700" b="0" i="0">
-                          <a:solidFill>
-                            <a:srgbClr val="0F172A"/>
-                          </a:solidFill>
-                          <a:latin typeface="Arial"/>
-                        </a:rPr>
-                        <a:t>Safety</a:t>
-                      </a:r>
-                    </a:p>
-                  </a:txBody>
-                  <a:tcPr marL="73152" marR="73152" marT="36576" marB="36576" anchor="ctr">
-                    <a:solidFill>
-                      <a:srgbClr val="FFFFFF"/>
-                    </a:solidFill>
-                  </a:tcPr>
-                </a:tc>
-                <a:tc>
-                  <a:txBody>
-                    <a:bodyPr wrap="square"/>
-                    <a:lstStyle/>
-                    <a:p>
-                      <a:pPr algn="l"/>
-                      <a:r>
-                        <a:rPr sz="1700" b="0" i="0">
+                        <a:rPr sz="1800" b="0" i="0">
                           <a:solidFill>
                             <a:srgbClr val="0F172A"/>
                           </a:solidFill>
                           <a:latin typeface="Arial"/>
                         </a:rPr>
                         <a:t>Planted violations blocked (9 / 9)</a:t>
-                      </a:r>
-                    </a:p>
-                  </a:txBody>
-                  <a:tcPr marL="73152" marR="73152" marT="36576" marB="36576" anchor="ctr">
-                    <a:solidFill>
-                      <a:srgbClr val="FFFFFF"/>
-                    </a:solidFill>
-                  </a:tcPr>
-                </a:tc>
-              </a:tr>
-              <a:tr h="548640">
-                <a:tc>
-                  <a:txBody>
-                    <a:bodyPr wrap="square"/>
-                    <a:lstStyle/>
-                    <a:p>
-                      <a:pPr algn="l"/>
-                      <a:r>
-                        <a:rPr sz="1700" b="0" i="0">
-                          <a:solidFill>
-                            <a:srgbClr val="0F172A"/>
-                          </a:solidFill>
-                          <a:latin typeface="Arial"/>
-                        </a:rPr>
-                        <a:t>Models</a:t>
-                      </a:r>
-                    </a:p>
-                  </a:txBody>
-                  <a:tcPr marL="73152" marR="73152" marT="36576" marB="36576" anchor="ctr">
-                    <a:solidFill>
-                      <a:srgbClr val="F1F5F9"/>
-                    </a:solidFill>
-                  </a:tcPr>
-                </a:tc>
-                <a:tc>
-                  <a:txBody>
-                    <a:bodyPr wrap="square"/>
-                    <a:lstStyle/>
-                    <a:p>
-                      <a:pPr algn="l"/>
-                      <a:r>
-                        <a:rPr sz="1700" b="0" i="0">
-                          <a:solidFill>
-                            <a:srgbClr val="0F172A"/>
-                          </a:solidFill>
-                          <a:latin typeface="Arial"/>
-                        </a:rPr>
-                        <a:t>Held-out results and the market beating our model</a:t>
                       </a:r>
                     </a:p>
                   </a:txBody>
@@ -10076,8 +8929,8 @@
         </p:nvSpPr>
         <p:spPr>
           <a:xfrm>
-            <a:off x="457200" y="5760720"/>
-            <a:ext cx="11277295" cy="502920"/>
+            <a:off x="457200" y="5669280"/>
+            <a:ext cx="11277295" cy="548640"/>
           </a:xfrm>
           <a:prstGeom prst="roundRect">
             <a:avLst>
@@ -10122,8 +8975,8 @@
         </p:nvSpPr>
         <p:spPr>
           <a:xfrm>
-            <a:off x="548640" y="5760720"/>
-            <a:ext cx="11094415" cy="502920"/>
+            <a:off x="548640" y="5669280"/>
+            <a:ext cx="11094415" cy="548640"/>
           </a:xfrm>
           <a:prstGeom prst="rect">
             <a:avLst/>
@@ -10161,7 +9014,7 @@
 </p:sld>
 </file>
 
-<file path=ppt/slides/slide17.xml><?xml version="1.0" encoding="utf-8"?>
+<file path=ppt/slides/slide15.xml><?xml version="1.0" encoding="utf-8"?>
 <p:sld xmlns:a="http://schemas.openxmlformats.org/drawingml/2006/main" xmlns:p="http://schemas.openxmlformats.org/presentationml/2006/main" xmlns:r="http://schemas.openxmlformats.org/officeDocument/2006/relationships">
   <p:cSld>
     <p:spTree>
@@ -10293,7 +9146,7 @@
                 </a:solidFill>
                 <a:latin typeface="Arial"/>
               </a:rPr>
-              <a:t>Recommendations, next steps and Q&amp;A</a:t>
+              <a:t>Recommendations, honest scope and Q&amp;A</a:t>
             </a:r>
           </a:p>
         </p:txBody>
@@ -10332,7 +9185,7 @@
                 </a:solidFill>
                 <a:latin typeface="Arial"/>
               </a:rPr>
-              <a:t>DASC7606C Group 12 · Betting markets are tilted against consumers</a:t>
+              <a:t>DASC7606C Group 12 · Market-Graded Learning: the closing price grades every component</a:t>
             </a:r>
           </a:p>
         </p:txBody>
@@ -10371,7 +9224,7 @@
                 </a:solidFill>
                 <a:latin typeface="Arial"/>
               </a:rPr>
-              <a:t>17</a:t>
+              <a:t>15</a:t>
             </a:r>
           </a:p>
         </p:txBody>
@@ -10385,7 +9238,7 @@
         <p:spPr>
           <a:xfrm>
             <a:off x="457200" y="1234439"/>
-            <a:ext cx="5852160" cy="3657600"/>
+            <a:ext cx="5852160" cy="3566160"/>
           </a:xfrm>
           <a:prstGeom prst="roundRect">
             <a:avLst>
@@ -10433,7 +9286,7 @@
         <p:spPr>
           <a:xfrm>
             <a:off x="457200" y="1234439"/>
-            <a:ext cx="109728" cy="3657600"/>
+            <a:ext cx="109728" cy="3566160"/>
           </a:xfrm>
           <a:prstGeom prst="rect">
             <a:avLst/>
@@ -10496,7 +9349,7 @@
               </a:spcAft>
             </a:pPr>
             <a:r>
-              <a:rPr sz="2000" b="1" i="0">
+              <a:rPr sz="1900" b="1" i="0">
                 <a:solidFill>
                   <a:srgbClr val="1E293B"/>
                 </a:solidFill>
@@ -10516,7 +9369,7 @@
         <p:spPr>
           <a:xfrm>
             <a:off x="640080" y="1764791"/>
-            <a:ext cx="5577840" cy="3054096"/>
+            <a:ext cx="5577840" cy="2962656"/>
           </a:xfrm>
           <a:prstGeom prst="rect">
             <a:avLst/>
@@ -10536,7 +9389,7 @@
               <a:buChar char="•"/>
             </a:pPr>
             <a:r>
-              <a:rPr sz="1800" b="0" i="0">
+              <a:rPr sz="1700" b="0" i="0">
                 <a:solidFill>
                   <a:srgbClr val="0F172A"/>
                 </a:solidFill>
@@ -10553,7 +9406,7 @@
               <a:buChar char="•"/>
             </a:pPr>
             <a:r>
-              <a:rPr sz="1800" b="0" i="0">
+              <a:rPr sz="1700" b="0" i="0">
                 <a:solidFill>
                   <a:srgbClr val="0F172A"/>
                 </a:solidFill>
@@ -10570,7 +9423,7 @@
               <a:buChar char="•"/>
             </a:pPr>
             <a:r>
-              <a:rPr sz="1800" b="0" i="0">
+              <a:rPr sz="1700" b="0" i="0">
                 <a:solidFill>
                   <a:srgbClr val="0F172A"/>
                 </a:solidFill>
@@ -10587,7 +9440,7 @@
               <a:buChar char="•"/>
             </a:pPr>
             <a:r>
-              <a:rPr sz="1800" b="0" i="0">
+              <a:rPr sz="1700" b="0" i="0">
                 <a:solidFill>
                   <a:srgbClr val="0F172A"/>
                 </a:solidFill>
@@ -10607,7 +9460,7 @@
         <p:spPr>
           <a:xfrm>
             <a:off x="6583680" y="1234439"/>
-            <a:ext cx="5150815" cy="3657600"/>
+            <a:ext cx="5150815" cy="3566160"/>
           </a:xfrm>
           <a:prstGeom prst="roundRect">
             <a:avLst>
@@ -10619,7 +9472,7 @@
           </a:solidFill>
           <a:ln w="15875">
             <a:solidFill>
-              <a:srgbClr val="EA580C"/>
+              <a:srgbClr val="DC2626"/>
             </a:solidFill>
           </a:ln>
           <a:effectLst/>
@@ -10655,13 +9508,13 @@
         <p:spPr>
           <a:xfrm>
             <a:off x="6583680" y="1234439"/>
-            <a:ext cx="109728" cy="3657600"/>
+            <a:ext cx="109728" cy="3566160"/>
           </a:xfrm>
           <a:prstGeom prst="rect">
             <a:avLst/>
           </a:prstGeom>
           <a:solidFill>
-            <a:srgbClr val="EA580C"/>
+            <a:srgbClr val="DC2626"/>
           </a:solidFill>
           <a:ln>
             <a:noFill/>
@@ -10718,13 +9571,13 @@
               </a:spcAft>
             </a:pPr>
             <a:r>
-              <a:rPr sz="2000" b="1" i="0">
-                <a:solidFill>
-                  <a:srgbClr val="EA580C"/>
-                </a:solidFill>
-                <a:latin typeface="Arial"/>
-              </a:rPr>
-              <a:t>Our next steps</a:t>
+              <a:rPr sz="1800" b="1" i="0">
+                <a:solidFill>
+                  <a:srgbClr val="DC2626"/>
+                </a:solidFill>
+                <a:latin typeface="Arial"/>
+              </a:rPr>
+              <a:t>Honest scope</a:t>
             </a:r>
           </a:p>
         </p:txBody>
@@ -10738,7 +9591,7 @@
         <p:spPr>
           <a:xfrm>
             <a:off x="6766560" y="1764791"/>
-            <a:ext cx="4876495" cy="3054096"/>
+            <a:ext cx="4876495" cy="2962656"/>
           </a:xfrm>
           <a:prstGeom prst="rect">
             <a:avLst/>
@@ -10758,13 +9611,31 @@
               <a:buChar char="•"/>
             </a:pPr>
             <a:r>
-              <a:rPr sz="1800" b="0" i="0">
+              <a:rPr sz="1600" b="0" i="0">
                 <a:solidFill>
                   <a:srgbClr val="0F172A"/>
                 </a:solidFill>
                 <a:latin typeface="Arial"/>
               </a:rPr>
-              <a:t>Show the full break-even in every retail brief</a:t>
+              <a:t>“Unfair” = costs, speed, expertise; </a:t>
+            </a:r>
+            <a:r>
+              <a:rPr sz="1600" b="1" i="0">
+                <a:solidFill>
+                  <a:srgbClr val="0F172A"/>
+                </a:solidFill>
+                <a:latin typeface="Arial"/>
+              </a:rPr>
+              <a:t>not</a:t>
+            </a:r>
+            <a:r>
+              <a:rPr sz="1600" b="0" i="0">
+                <a:solidFill>
+                  <a:srgbClr val="0F172A"/>
+                </a:solidFill>
+                <a:latin typeface="Arial"/>
+              </a:rPr>
+              <a:t> fraud; no accusation against Kalshi</a:t>
             </a:r>
           </a:p>
           <a:p>
@@ -10775,13 +9646,13 @@
               <a:buChar char="•"/>
             </a:pPr>
             <a:r>
-              <a:rPr sz="1800" b="0" i="0">
+              <a:rPr sz="1600" b="0" i="0">
                 <a:solidFill>
                   <a:srgbClr val="0F172A"/>
                 </a:solidFill>
                 <a:latin typeface="Arial"/>
               </a:rPr>
-              <a:t>Enforce a daily-loss stop</a:t>
+              <a:t>Anchor and reviewer designed after seeing Feb–Apr; walk-forward and play-offs are the honest tests</a:t>
             </a:r>
           </a:p>
           <a:p>
@@ -10792,13 +9663,13 @@
               <a:buChar char="•"/>
             </a:pPr>
             <a:r>
-              <a:rPr sz="1800" b="0" i="0">
+              <a:rPr sz="1600" b="0" i="0">
                 <a:solidFill>
                   <a:srgbClr val="0F172A"/>
                 </a:solidFill>
                 <a:latin typeface="Arial"/>
               </a:rPr>
-              <a:t>Timestamped injury reports; player-prop markets</a:t>
+              <a:t>One season, inactive lists as our news; paper money</a:t>
             </a:r>
           </a:p>
         </p:txBody>
@@ -10811,8 +9682,8 @@
         </p:nvSpPr>
         <p:spPr>
           <a:xfrm>
-            <a:off x="457200" y="5074920"/>
-            <a:ext cx="11277295" cy="1097280"/>
+            <a:off x="457200" y="4983480"/>
+            <a:ext cx="11277295" cy="1188720"/>
           </a:xfrm>
           <a:prstGeom prst="rect">
             <a:avLst/>
@@ -11021,7 +9892,7 @@
                 </a:solidFill>
                 <a:latin typeface="Arial"/>
               </a:rPr>
-              <a:t>DASC7606C Group 12 · Betting markets are tilted against consumers</a:t>
+              <a:t>DASC7606C Group 12 · Market-Graded Learning: the closing price grades every component</a:t>
             </a:r>
           </a:p>
         </p:txBody>
@@ -12061,7 +10932,7 @@
                 </a:solidFill>
                 <a:latin typeface="Arial"/>
               </a:rPr>
-              <a:t>DASC7606C Group 12 · Betting markets are tilted against consumers</a:t>
+              <a:t>DASC7606C Group 12 · Market-Graded Learning: the closing price grades every component</a:t>
             </a:r>
           </a:p>
         </p:txBody>
@@ -12275,7 +11146,7 @@
                 </a:solidFill>
                 <a:latin typeface="Arial"/>
               </a:rPr>
-              <a:t>LLM-capable LangGraph agent; code risk limits; gated rule learning</a:t>
+              <a:t>LangGraph agent; code risk limits; gated rule learning; LLM tools</a:t>
             </a:r>
           </a:p>
           <a:p>
@@ -12555,7 +11426,7 @@
                 </a:solidFill>
                 <a:latin typeface="Arial"/>
               </a:rPr>
-              <a:t>Data: five public sources, frozen once</a:t>
+              <a:t>Market-Graded Learning: the closing price is the grader</a:t>
             </a:r>
           </a:p>
         </p:txBody>
@@ -12594,7 +11465,7 @@
                 </a:solidFill>
                 <a:latin typeface="Arial"/>
               </a:rPr>
-              <a:t>DASC7606C Group 12 · Betting markets are tilted against consumers</a:t>
+              <a:t>DASC7606C Group 12 · Market-Graded Learning: the closing price grades every component</a:t>
             </a:r>
           </a:p>
         </p:txBody>
@@ -12648,7 +11519,7 @@
         </p:nvGraphicFramePr>
         <p:xfrm>
           <a:off x="457200" y="1188720"/>
-          <a:ext cx="11277295" cy="3749040"/>
+          <a:ext cx="11277295" cy="3959352"/>
         </p:xfrm>
         <a:graphic>
           <a:graphicData uri="http://schemas.openxmlformats.org/drawingml/2006/table">
@@ -12657,13 +11528,960 @@
                 <a:tableStyleId>{5C22544A-7EE6-4342-B048-85BDC9FD1C3A}</a:tableStyleId>
               </a:tblPr>
               <a:tblGrid>
-                <a:gridCol w="2514600"/>
-                <a:gridCol w="2743200"/>
-                <a:gridCol w="1417320"/>
-                <a:gridCol w="2514600"/>
-                <a:gridCol w="2087575"/>
+                <a:gridCol w="3246120"/>
+                <a:gridCol w="3703320"/>
+                <a:gridCol w="4327855"/>
               </a:tblGrid>
-              <a:tr h="457200">
+              <a:tr h="438912">
+                <a:tc>
+                  <a:txBody>
+                    <a:bodyPr wrap="square"/>
+                    <a:lstStyle/>
+                    <a:p>
+                      <a:pPr algn="l"/>
+                      <a:r>
+                        <a:rPr sz="1600" b="1" i="0">
+                          <a:solidFill>
+                            <a:srgbClr val="FFFFFF"/>
+                          </a:solidFill>
+                          <a:latin typeface="Arial"/>
+                        </a:rPr>
+                        <a:t>Component</a:t>
+                      </a:r>
+                    </a:p>
+                  </a:txBody>
+                  <a:tcPr marL="73152" marR="73152" marT="36576" marB="36576" anchor="ctr">
+                    <a:solidFill>
+                      <a:srgbClr val="1E293B"/>
+                    </a:solidFill>
+                  </a:tcPr>
+                </a:tc>
+                <a:tc>
+                  <a:txBody>
+                    <a:bodyPr wrap="square"/>
+                    <a:lstStyle/>
+                    <a:p>
+                      <a:pPr algn="l"/>
+                      <a:r>
+                        <a:rPr sz="1600" b="1" i="0">
+                          <a:solidFill>
+                            <a:srgbClr val="FFFFFF"/>
+                          </a:solidFill>
+                          <a:latin typeface="Arial"/>
+                        </a:rPr>
+                        <a:t>Market's test</a:t>
+                      </a:r>
+                    </a:p>
+                  </a:txBody>
+                  <a:tcPr marL="73152" marR="73152" marT="36576" marB="36576" anchor="ctr">
+                    <a:solidFill>
+                      <a:srgbClr val="1E293B"/>
+                    </a:solidFill>
+                  </a:tcPr>
+                </a:tc>
+                <a:tc>
+                  <a:txBody>
+                    <a:bodyPr wrap="square"/>
+                    <a:lstStyle/>
+                    <a:p>
+                      <a:pPr algn="l"/>
+                      <a:r>
+                        <a:rPr sz="1600" b="1" i="0">
+                          <a:solidFill>
+                            <a:srgbClr val="FFFFFF"/>
+                          </a:solidFill>
+                          <a:latin typeface="Arial"/>
+                        </a:rPr>
+                        <a:t>Verdict</a:t>
+                      </a:r>
+                    </a:p>
+                  </a:txBody>
+                  <a:tcPr marL="73152" marR="73152" marT="36576" marB="36576" anchor="ctr">
+                    <a:solidFill>
+                      <a:srgbClr val="1E293B"/>
+                    </a:solidFill>
+                  </a:tcPr>
+                </a:tc>
+              </a:tr>
+              <a:tr h="502920">
+                <a:tc>
+                  <a:txBody>
+                    <a:bodyPr wrap="square"/>
+                    <a:lstStyle/>
+                    <a:p>
+                      <a:pPr algn="l"/>
+                      <a:r>
+                        <a:rPr sz="1600" b="0" i="0">
+                          <a:solidFill>
+                            <a:srgbClr val="0F172A"/>
+                          </a:solidFill>
+                          <a:latin typeface="Arial"/>
+                        </a:rPr>
+                        <a:t>Raw win model (M4) trading</a:t>
+                      </a:r>
+                    </a:p>
+                  </a:txBody>
+                  <a:tcPr marL="73152" marR="73152" marT="36576" marB="36576" anchor="ctr">
+                    <a:solidFill>
+                      <a:srgbClr val="F1F5F9"/>
+                    </a:solidFill>
+                  </a:tcPr>
+                </a:tc>
+                <a:tc>
+                  <a:txBody>
+                    <a:bodyPr wrap="square"/>
+                    <a:lstStyle/>
+                    <a:p>
+                      <a:pPr algn="l"/>
+                      <a:r>
+                        <a:rPr sz="1600" b="0" i="0">
+                          <a:solidFill>
+                            <a:srgbClr val="0F172A"/>
+                          </a:solidFill>
+                          <a:latin typeface="Arial"/>
+                        </a:rPr>
+                        <a:t>Beat never trading</a:t>
+                      </a:r>
+                    </a:p>
+                  </a:txBody>
+                  <a:tcPr marL="73152" marR="73152" marT="36576" marB="36576" anchor="ctr">
+                    <a:solidFill>
+                      <a:srgbClr val="F1F5F9"/>
+                    </a:solidFill>
+                  </a:tcPr>
+                </a:tc>
+                <a:tc>
+                  <a:txBody>
+                    <a:bodyPr wrap="square"/>
+                    <a:lstStyle/>
+                    <a:p>
+                      <a:pPr algn="l"/>
+                      <a:r>
+                        <a:rPr sz="1600" b="1" i="0">
+                          <a:solidFill>
+                            <a:srgbClr val="0F172A"/>
+                          </a:solidFill>
+                          <a:latin typeface="Arial"/>
+                        </a:rPr>
+                        <a:t>Failed:</a:t>
+                      </a:r>
+                      <a:r>
+                        <a:rPr sz="1600" b="0" i="0">
+                          <a:solidFill>
+                            <a:srgbClr val="0F172A"/>
+                          </a:solidFill>
+                          <a:latin typeface="Arial"/>
+                        </a:rPr>
+                        <a:t> −$2,475, CI below 0</a:t>
+                      </a:r>
+                    </a:p>
+                  </a:txBody>
+                  <a:tcPr marL="73152" marR="73152" marT="36576" marB="36576" anchor="ctr">
+                    <a:solidFill>
+                      <a:srgbClr val="F1F5F9"/>
+                    </a:solidFill>
+                  </a:tcPr>
+                </a:tc>
+              </a:tr>
+              <a:tr h="502920">
+                <a:tc>
+                  <a:txBody>
+                    <a:bodyPr wrap="square"/>
+                    <a:lstStyle/>
+                    <a:p>
+                      <a:pPr algn="l"/>
+                      <a:r>
+                        <a:rPr sz="1600" b="0" i="0">
+                          <a:solidFill>
+                            <a:srgbClr val="0F172A"/>
+                          </a:solidFill>
+                          <a:latin typeface="Arial"/>
+                        </a:rPr>
+                        <a:t>Recalibrated M4</a:t>
+                      </a:r>
+                    </a:p>
+                  </a:txBody>
+                  <a:tcPr marL="73152" marR="73152" marT="36576" marB="36576" anchor="ctr">
+                    <a:solidFill>
+                      <a:srgbClr val="FFFFFF"/>
+                    </a:solidFill>
+                  </a:tcPr>
+                </a:tc>
+                <a:tc>
+                  <a:txBody>
+                    <a:bodyPr wrap="square"/>
+                    <a:lstStyle/>
+                    <a:p>
+                      <a:pPr algn="l"/>
+                      <a:r>
+                        <a:rPr sz="1600" b="0" i="0">
+                          <a:solidFill>
+                            <a:srgbClr val="0F172A"/>
+                          </a:solidFill>
+                          <a:latin typeface="Arial"/>
+                        </a:rPr>
+                        <a:t>Beat the market's Brier score</a:t>
+                      </a:r>
+                    </a:p>
+                  </a:txBody>
+                  <a:tcPr marL="73152" marR="73152" marT="36576" marB="36576" anchor="ctr">
+                    <a:solidFill>
+                      <a:srgbClr val="FFFFFF"/>
+                    </a:solidFill>
+                  </a:tcPr>
+                </a:tc>
+                <a:tc>
+                  <a:txBody>
+                    <a:bodyPr wrap="square"/>
+                    <a:lstStyle/>
+                    <a:p>
+                      <a:pPr algn="l"/>
+                      <a:r>
+                        <a:rPr sz="1600" b="1" i="0">
+                          <a:solidFill>
+                            <a:srgbClr val="0F172A"/>
+                          </a:solidFill>
+                          <a:latin typeface="Arial"/>
+                        </a:rPr>
+                        <a:t>Failed:</a:t>
+                      </a:r>
+                      <a:r>
+                        <a:rPr sz="1600" b="0" i="0">
+                          <a:solidFill>
+                            <a:srgbClr val="0F172A"/>
+                          </a:solidFill>
+                          <a:latin typeface="Arial"/>
+                        </a:rPr>
+                        <a:t> 0.185 vs market 0.164</a:t>
+                      </a:r>
+                    </a:p>
+                  </a:txBody>
+                  <a:tcPr marL="73152" marR="73152" marT="36576" marB="36576" anchor="ctr">
+                    <a:solidFill>
+                      <a:srgbClr val="FFFFFF"/>
+                    </a:solidFill>
+                  </a:tcPr>
+                </a:tc>
+              </a:tr>
+              <a:tr h="502920">
+                <a:tc>
+                  <a:txBody>
+                    <a:bodyPr wrap="square"/>
+                    <a:lstStyle/>
+                    <a:p>
+                      <a:pPr algn="l"/>
+                      <a:r>
+                        <a:rPr sz="1600" b="0" i="0">
+                          <a:solidFill>
+                            <a:srgbClr val="0F172A"/>
+                          </a:solidFill>
+                          <a:latin typeface="Arial"/>
+                        </a:rPr>
+                        <a:t>M6 neural impact model</a:t>
+                      </a:r>
+                    </a:p>
+                  </a:txBody>
+                  <a:tcPr marL="73152" marR="73152" marT="36576" marB="36576" anchor="ctr">
+                    <a:solidFill>
+                      <a:srgbClr val="F1F5F9"/>
+                    </a:solidFill>
+                  </a:tcPr>
+                </a:tc>
+                <a:tc>
+                  <a:txBody>
+                    <a:bodyPr wrap="square"/>
+                    <a:lstStyle/>
+                    <a:p>
+                      <a:pPr algn="l"/>
+                      <a:r>
+                        <a:rPr sz="1600" b="0" i="0">
+                          <a:solidFill>
+                            <a:srgbClr val="0F172A"/>
+                          </a:solidFill>
+                          <a:latin typeface="Arial"/>
+                        </a:rPr>
+                        <a:t>Beat “the price won't move”</a:t>
+                      </a:r>
+                    </a:p>
+                  </a:txBody>
+                  <a:tcPr marL="73152" marR="73152" marT="36576" marB="36576" anchor="ctr">
+                    <a:solidFill>
+                      <a:srgbClr val="F1F5F9"/>
+                    </a:solidFill>
+                  </a:tcPr>
+                </a:tc>
+                <a:tc>
+                  <a:txBody>
+                    <a:bodyPr wrap="square"/>
+                    <a:lstStyle/>
+                    <a:p>
+                      <a:pPr algn="l"/>
+                      <a:r>
+                        <a:rPr sz="1600" b="1" i="0">
+                          <a:solidFill>
+                            <a:srgbClr val="0F172A"/>
+                          </a:solidFill>
+                          <a:latin typeface="Arial"/>
+                        </a:rPr>
+                        <a:t>Failed:</a:t>
+                      </a:r>
+                      <a:r>
+                        <a:rPr sz="1600" b="0" i="0">
+                          <a:solidFill>
+                            <a:srgbClr val="0F172A"/>
+                          </a:solidFill>
+                          <a:latin typeface="Arial"/>
+                        </a:rPr>
+                        <a:t> 9 of 9 configurations worse</a:t>
+                      </a:r>
+                    </a:p>
+                  </a:txBody>
+                  <a:tcPr marL="73152" marR="73152" marT="36576" marB="36576" anchor="ctr">
+                    <a:solidFill>
+                      <a:srgbClr val="F1F5F9"/>
+                    </a:solidFill>
+                  </a:tcPr>
+                </a:tc>
+              </a:tr>
+              <a:tr h="502920">
+                <a:tc>
+                  <a:txBody>
+                    <a:bodyPr wrap="square"/>
+                    <a:lstStyle/>
+                    <a:p>
+                      <a:pPr algn="l"/>
+                      <a:r>
+                        <a:rPr sz="1600" b="0" i="0">
+                          <a:solidFill>
+                            <a:srgbClr val="0F172A"/>
+                          </a:solidFill>
+                          <a:latin typeface="Arial"/>
+                        </a:rPr>
+                        <a:t>Market anchor</a:t>
+                      </a:r>
+                    </a:p>
+                  </a:txBody>
+                  <a:tcPr marL="73152" marR="73152" marT="36576" marB="36576" anchor="ctr">
+                    <a:solidFill>
+                      <a:srgbClr val="DCFCE7"/>
+                    </a:solidFill>
+                  </a:tcPr>
+                </a:tc>
+                <a:tc>
+                  <a:txBody>
+                    <a:bodyPr wrap="square"/>
+                    <a:lstStyle/>
+                    <a:p>
+                      <a:pPr algn="l"/>
+                      <a:r>
+                        <a:rPr sz="1600" b="0" i="0">
+                          <a:solidFill>
+                            <a:srgbClr val="0F172A"/>
+                          </a:solidFill>
+                          <a:latin typeface="Arial"/>
+                        </a:rPr>
+                        <a:t>Beat the raw model</a:t>
+                      </a:r>
+                    </a:p>
+                  </a:txBody>
+                  <a:tcPr marL="73152" marR="73152" marT="36576" marB="36576" anchor="ctr">
+                    <a:solidFill>
+                      <a:srgbClr val="DCFCE7"/>
+                    </a:solidFill>
+                  </a:tcPr>
+                </a:tc>
+                <a:tc>
+                  <a:txBody>
+                    <a:bodyPr wrap="square"/>
+                    <a:lstStyle/>
+                    <a:p>
+                      <a:pPr algn="l"/>
+                      <a:r>
+                        <a:rPr sz="1600" b="1" i="0">
+                          <a:solidFill>
+                            <a:srgbClr val="0F172A"/>
+                          </a:solidFill>
+                          <a:latin typeface="Arial"/>
+                        </a:rPr>
+                        <a:t>Passed:</a:t>
+                      </a:r>
+                      <a:r>
+                        <a:rPr sz="1600" b="0" i="0">
+                          <a:solidFill>
+                            <a:srgbClr val="0F172A"/>
+                          </a:solidFill>
+                          <a:latin typeface="Arial"/>
+                        </a:rPr>
+                        <a:t> +$2,450, p = 0.002</a:t>
+                      </a:r>
+                    </a:p>
+                  </a:txBody>
+                  <a:tcPr marL="73152" marR="73152" marT="36576" marB="36576" anchor="ctr">
+                    <a:solidFill>
+                      <a:srgbClr val="DCFCE7"/>
+                    </a:solidFill>
+                  </a:tcPr>
+                </a:tc>
+              </a:tr>
+              <a:tr h="502920">
+                <a:tc>
+                  <a:txBody>
+                    <a:bodyPr wrap="square"/>
+                    <a:lstStyle/>
+                    <a:p>
+                      <a:pPr algn="l"/>
+                      <a:r>
+                        <a:rPr sz="1600" b="0" i="0">
+                          <a:solidFill>
+                            <a:srgbClr val="0F172A"/>
+                          </a:solidFill>
+                          <a:latin typeface="Arial"/>
+                        </a:rPr>
+                        <a:t>Gated rule learning</a:t>
+                      </a:r>
+                    </a:p>
+                  </a:txBody>
+                  <a:tcPr marL="73152" marR="73152" marT="36576" marB="36576" anchor="ctr">
+                    <a:solidFill>
+                      <a:srgbClr val="F1F5F9"/>
+                    </a:solidFill>
+                  </a:tcPr>
+                </a:tc>
+                <a:tc>
+                  <a:txBody>
+                    <a:bodyPr wrap="square"/>
+                    <a:lstStyle/>
+                    <a:p>
+                      <a:pPr algn="l"/>
+                      <a:r>
+                        <a:rPr sz="1600" b="0" i="0">
+                          <a:solidFill>
+                            <a:srgbClr val="0F172A"/>
+                          </a:solidFill>
+                          <a:latin typeface="Arial"/>
+                        </a:rPr>
+                        <a:t>Beat no learning on CLV $</a:t>
+                      </a:r>
+                    </a:p>
+                  </a:txBody>
+                  <a:tcPr marL="73152" marR="73152" marT="36576" marB="36576" anchor="ctr">
+                    <a:solidFill>
+                      <a:srgbClr val="F1F5F9"/>
+                    </a:solidFill>
+                  </a:tcPr>
+                </a:tc>
+                <a:tc>
+                  <a:txBody>
+                    <a:bodyPr wrap="square"/>
+                    <a:lstStyle/>
+                    <a:p>
+                      <a:pPr algn="l"/>
+                      <a:r>
+                        <a:rPr sz="1600" b="1" i="0">
+                          <a:solidFill>
+                            <a:srgbClr val="0F172A"/>
+                          </a:solidFill>
+                          <a:latin typeface="Arial"/>
+                        </a:rPr>
+                        <a:t>Passed (trades less):</a:t>
+                      </a:r>
+                      <a:r>
+                        <a:rPr sz="1600" b="0" i="0">
+                          <a:solidFill>
+                            <a:srgbClr val="0F172A"/>
+                          </a:solidFill>
+                          <a:latin typeface="Arial"/>
+                        </a:rPr>
+                        <a:t> +$39 CLV, p = 0.001</a:t>
+                      </a:r>
+                    </a:p>
+                  </a:txBody>
+                  <a:tcPr marL="73152" marR="73152" marT="36576" marB="36576" anchor="ctr">
+                    <a:solidFill>
+                      <a:srgbClr val="F1F5F9"/>
+                    </a:solidFill>
+                  </a:tcPr>
+                </a:tc>
+              </a:tr>
+              <a:tr h="502920">
+                <a:tc>
+                  <a:txBody>
+                    <a:bodyPr wrap="square"/>
+                    <a:lstStyle/>
+                    <a:p>
+                      <a:pPr algn="l"/>
+                      <a:r>
+                        <a:rPr sz="1600" b="0" i="0">
+                          <a:solidFill>
+                            <a:srgbClr val="0F172A"/>
+                          </a:solidFill>
+                          <a:latin typeface="Arial"/>
+                        </a:rPr>
+                        <a:t>LLM agent, Coach, policy …</a:t>
+                      </a:r>
+                    </a:p>
+                  </a:txBody>
+                  <a:tcPr marL="73152" marR="73152" marT="36576" marB="36576" anchor="ctr">
+                    <a:solidFill>
+                      <a:srgbClr val="FFFFFF"/>
+                    </a:solidFill>
+                  </a:tcPr>
+                </a:tc>
+                <a:tc>
+                  <a:txBody>
+                    <a:bodyPr wrap="square"/>
+                    <a:lstStyle/>
+                    <a:p>
+                      <a:pPr algn="l"/>
+                      <a:r>
+                        <a:rPr sz="1600" b="0" i="0">
+                          <a:solidFill>
+                            <a:srgbClr val="0F172A"/>
+                          </a:solidFill>
+                          <a:latin typeface="Arial"/>
+                        </a:rPr>
+                        <a:t>Same gates (slide 11)</a:t>
+                      </a:r>
+                    </a:p>
+                  </a:txBody>
+                  <a:tcPr marL="73152" marR="73152" marT="36576" marB="36576" anchor="ctr">
+                    <a:solidFill>
+                      <a:srgbClr val="FFFFFF"/>
+                    </a:solidFill>
+                  </a:tcPr>
+                </a:tc>
+                <a:tc>
+                  <a:txBody>
+                    <a:bodyPr wrap="square"/>
+                    <a:lstStyle/>
+                    <a:p>
+                      <a:pPr algn="l"/>
+                      <a:r>
+                        <a:rPr sz="1600" b="0" i="0">
+                          <a:solidFill>
+                            <a:srgbClr val="0F172A"/>
+                          </a:solidFill>
+                          <a:latin typeface="Arial"/>
+                        </a:rPr>
+                        <a:t>See agentic upgrades</a:t>
+                      </a:r>
+                    </a:p>
+                  </a:txBody>
+                  <a:tcPr marL="73152" marR="73152" marT="36576" marB="36576" anchor="ctr">
+                    <a:solidFill>
+                      <a:srgbClr val="FFFFFF"/>
+                    </a:solidFill>
+                  </a:tcPr>
+                </a:tc>
+              </a:tr>
+              <a:tr h="502920">
+                <a:tc>
+                  <a:txBody>
+                    <a:bodyPr wrap="square"/>
+                    <a:lstStyle/>
+                    <a:p>
+                      <a:pPr algn="l"/>
+                      <a:r>
+                        <a:rPr sz="1600" b="0" i="0">
+                          <a:solidFill>
+                            <a:srgbClr val="0F172A"/>
+                          </a:solidFill>
+                          <a:latin typeface="Arial"/>
+                        </a:rPr>
+                        <a:t>A consumer</a:t>
+                      </a:r>
+                    </a:p>
+                  </a:txBody>
+                  <a:tcPr marL="73152" marR="73152" marT="36576" marB="36576" anchor="ctr">
+                    <a:solidFill>
+                      <a:srgbClr val="F1F5F9"/>
+                    </a:solidFill>
+                  </a:tcPr>
+                </a:tc>
+                <a:tc>
+                  <a:txBody>
+                    <a:bodyPr wrap="square"/>
+                    <a:lstStyle/>
+                    <a:p>
+                      <a:pPr algn="l"/>
+                      <a:r>
+                        <a:rPr sz="1600" b="0" i="0">
+                          <a:solidFill>
+                            <a:srgbClr val="0F172A"/>
+                          </a:solidFill>
+                          <a:latin typeface="Arial"/>
+                        </a:rPr>
+                        <a:t>Beat ~1.92¢ cost; news 91% priced</a:t>
+                      </a:r>
+                    </a:p>
+                  </a:txBody>
+                  <a:tcPr marL="73152" marR="73152" marT="36576" marB="36576" anchor="ctr">
+                    <a:solidFill>
+                      <a:srgbClr val="F1F5F9"/>
+                    </a:solidFill>
+                  </a:tcPr>
+                </a:tc>
+                <a:tc>
+                  <a:txBody>
+                    <a:bodyPr wrap="square"/>
+                    <a:lstStyle/>
+                    <a:p>
+                      <a:pPr algn="l"/>
+                      <a:r>
+                        <a:rPr sz="1600" b="1" i="0">
+                          <a:solidFill>
+                            <a:srgbClr val="0F172A"/>
+                          </a:solidFill>
+                          <a:latin typeface="Arial"/>
+                        </a:rPr>
+                        <a:t>Structurally hard</a:t>
+                      </a:r>
+                    </a:p>
+                  </a:txBody>
+                  <a:tcPr marL="73152" marR="73152" marT="36576" marB="36576" anchor="ctr">
+                    <a:solidFill>
+                      <a:srgbClr val="F1F5F9"/>
+                    </a:solidFill>
+                  </a:tcPr>
+                </a:tc>
+              </a:tr>
+            </a:tbl>
+          </a:graphicData>
+        </a:graphic>
+      </p:graphicFrame>
+      <p:sp>
+        <p:nvSpPr>
+          <p:cNvPr id="8" name="Rounded Rectangle 7"/>
+          <p:cNvSpPr/>
+          <p:nvPr/>
+        </p:nvSpPr>
+        <p:spPr>
+          <a:xfrm>
+            <a:off x="457200" y="5440680"/>
+            <a:ext cx="11277295" cy="777240"/>
+          </a:xfrm>
+          <a:prstGeom prst="roundRect">
+            <a:avLst>
+              <a:gd name="adj" fmla="val 12000"/>
+            </a:avLst>
+          </a:prstGeom>
+          <a:solidFill>
+            <a:srgbClr val="FEF3C7"/>
+          </a:solidFill>
+          <a:ln>
+            <a:noFill/>
+          </a:ln>
+          <a:effectLst/>
+        </p:spPr>
+        <p:style>
+          <a:lnRef idx="1">
+            <a:schemeClr val="accent1"/>
+          </a:lnRef>
+          <a:fillRef idx="3">
+            <a:schemeClr val="accent1"/>
+          </a:fillRef>
+          <a:effectRef idx="2">
+            <a:schemeClr val="accent1"/>
+          </a:effectRef>
+          <a:fontRef idx="minor">
+            <a:schemeClr val="lt1"/>
+          </a:fontRef>
+        </p:style>
+        <p:txBody>
+          <a:bodyPr rtlCol="0" anchor="ctr"/>
+          <a:lstStyle/>
+          <a:p>
+            <a:pPr algn="ctr"/>
+          </a:p>
+        </p:txBody>
+      </p:sp>
+      <p:sp>
+        <p:nvSpPr>
+          <p:cNvPr id="9" name="TextBox 8"/>
+          <p:cNvSpPr txBox="1"/>
+          <p:nvPr/>
+        </p:nvSpPr>
+        <p:spPr>
+          <a:xfrm>
+            <a:off x="548640" y="5440680"/>
+            <a:ext cx="11094415" cy="777240"/>
+          </a:xfrm>
+          <a:prstGeom prst="rect">
+            <a:avLst/>
+          </a:prstGeom>
+          <a:noFill/>
+        </p:spPr>
+        <p:txBody>
+          <a:bodyPr wrap="square" anchor="ctr" lIns="73152" rIns="73152" tIns="36576" bIns="36576">
+            <a:spAutoFit/>
+          </a:bodyPr>
+          <a:lstStyle/>
+          <a:p>
+            <a:pPr algn="l">
+              <a:spcAft>
+                <a:spcPts val="0"/>
+              </a:spcAft>
+            </a:pPr>
+            <a:r>
+              <a:rPr sz="1900" b="0" i="0">
+                <a:solidFill>
+                  <a:srgbClr val="0F172A"/>
+                </a:solidFill>
+                <a:latin typeface="Arial"/>
+              </a:rPr>
+              <a:t>Only the components that defer to the market survive, so the product teaches, lets people practise and enforces limits</a:t>
+            </a:r>
+          </a:p>
+        </p:txBody>
+      </p:sp>
+    </p:spTree>
+  </p:cSld>
+  <p:clrMapOvr>
+    <a:masterClrMapping/>
+  </p:clrMapOvr>
+</p:sld>
+</file>
+
+<file path=ppt/slides/slide5.xml><?xml version="1.0" encoding="utf-8"?>
+<p:sld xmlns:a="http://schemas.openxmlformats.org/drawingml/2006/main" xmlns:p="http://schemas.openxmlformats.org/presentationml/2006/main" xmlns:r="http://schemas.openxmlformats.org/officeDocument/2006/relationships">
+  <p:cSld>
+    <p:spTree>
+      <p:nvGrpSpPr>
+        <p:cNvPr id="1" name=""/>
+        <p:cNvGrpSpPr/>
+        <p:nvPr/>
+      </p:nvGrpSpPr>
+      <p:grpSpPr/>
+      <p:sp>
+        <p:nvSpPr>
+          <p:cNvPr id="2" name="Rectangle 1"/>
+          <p:cNvSpPr/>
+          <p:nvPr/>
+        </p:nvSpPr>
+        <p:spPr>
+          <a:xfrm>
+            <a:off x="0" y="0"/>
+            <a:ext cx="12191695" cy="868680"/>
+          </a:xfrm>
+          <a:prstGeom prst="rect">
+            <a:avLst/>
+          </a:prstGeom>
+          <a:solidFill>
+            <a:srgbClr val="1E293B"/>
+          </a:solidFill>
+          <a:ln>
+            <a:noFill/>
+          </a:ln>
+          <a:effectLst/>
+        </p:spPr>
+        <p:style>
+          <a:lnRef idx="1">
+            <a:schemeClr val="accent1"/>
+          </a:lnRef>
+          <a:fillRef idx="3">
+            <a:schemeClr val="accent1"/>
+          </a:fillRef>
+          <a:effectRef idx="2">
+            <a:schemeClr val="accent1"/>
+          </a:effectRef>
+          <a:fontRef idx="minor">
+            <a:schemeClr val="lt1"/>
+          </a:fontRef>
+        </p:style>
+        <p:txBody>
+          <a:bodyPr rtlCol="0" anchor="ctr"/>
+          <a:lstStyle/>
+          <a:p>
+            <a:pPr algn="ctr"/>
+          </a:p>
+        </p:txBody>
+      </p:sp>
+      <p:sp>
+        <p:nvSpPr>
+          <p:cNvPr id="3" name="Rectangle 2"/>
+          <p:cNvSpPr/>
+          <p:nvPr/>
+        </p:nvSpPr>
+        <p:spPr>
+          <a:xfrm>
+            <a:off x="0" y="868680"/>
+            <a:ext cx="12191695" cy="54864"/>
+          </a:xfrm>
+          <a:prstGeom prst="rect">
+            <a:avLst/>
+          </a:prstGeom>
+          <a:solidFill>
+            <a:srgbClr val="EA580C"/>
+          </a:solidFill>
+          <a:ln>
+            <a:noFill/>
+          </a:ln>
+          <a:effectLst/>
+        </p:spPr>
+        <p:style>
+          <a:lnRef idx="1">
+            <a:schemeClr val="accent1"/>
+          </a:lnRef>
+          <a:fillRef idx="3">
+            <a:schemeClr val="accent1"/>
+          </a:fillRef>
+          <a:effectRef idx="2">
+            <a:schemeClr val="accent1"/>
+          </a:effectRef>
+          <a:fontRef idx="minor">
+            <a:schemeClr val="lt1"/>
+          </a:fontRef>
+        </p:style>
+        <p:txBody>
+          <a:bodyPr rtlCol="0" anchor="ctr"/>
+          <a:lstStyle/>
+          <a:p>
+            <a:pPr algn="ctr"/>
+          </a:p>
+        </p:txBody>
+      </p:sp>
+      <p:sp>
+        <p:nvSpPr>
+          <p:cNvPr id="4" name="TextBox 3"/>
+          <p:cNvSpPr txBox="1"/>
+          <p:nvPr/>
+        </p:nvSpPr>
+        <p:spPr>
+          <a:xfrm>
+            <a:off x="457200" y="109728"/>
+            <a:ext cx="11277295" cy="685800"/>
+          </a:xfrm>
+          <a:prstGeom prst="rect">
+            <a:avLst/>
+          </a:prstGeom>
+          <a:noFill/>
+        </p:spPr>
+        <p:txBody>
+          <a:bodyPr wrap="square" anchor="ctr" lIns="73152" rIns="73152" tIns="36576" bIns="36576">
+            <a:spAutoFit/>
+          </a:bodyPr>
+          <a:lstStyle/>
+          <a:p>
+            <a:pPr algn="l">
+              <a:spcAft>
+                <a:spcPts val="0"/>
+              </a:spcAft>
+            </a:pPr>
+            <a:r>
+              <a:rPr sz="3000" b="1" i="0">
+                <a:solidFill>
+                  <a:srgbClr val="FFFFFF"/>
+                </a:solidFill>
+                <a:latin typeface="Arial"/>
+              </a:rPr>
+              <a:t>Data: five public sources, split in time, no look-ahead</a:t>
+            </a:r>
+          </a:p>
+        </p:txBody>
+      </p:sp>
+      <p:sp>
+        <p:nvSpPr>
+          <p:cNvPr id="5" name="TextBox 4"/>
+          <p:cNvSpPr txBox="1"/>
+          <p:nvPr/>
+        </p:nvSpPr>
+        <p:spPr>
+          <a:xfrm>
+            <a:off x="457200" y="6446520"/>
+            <a:ext cx="9144000" cy="320040"/>
+          </a:xfrm>
+          <a:prstGeom prst="rect">
+            <a:avLst/>
+          </a:prstGeom>
+          <a:noFill/>
+        </p:spPr>
+        <p:txBody>
+          <a:bodyPr wrap="square" anchor="t" lIns="73152" rIns="73152" tIns="36576" bIns="36576">
+            <a:spAutoFit/>
+          </a:bodyPr>
+          <a:lstStyle/>
+          <a:p>
+            <a:pPr algn="l">
+              <a:spcAft>
+                <a:spcPts val="0"/>
+              </a:spcAft>
+            </a:pPr>
+            <a:r>
+              <a:rPr sz="1100" b="0" i="0">
+                <a:solidFill>
+                  <a:srgbClr val="64748B"/>
+                </a:solidFill>
+                <a:latin typeface="Arial"/>
+              </a:rPr>
+              <a:t>DASC7606C Group 12 · Market-Graded Learning: the closing price grades every component</a:t>
+            </a:r>
+          </a:p>
+        </p:txBody>
+      </p:sp>
+      <p:sp>
+        <p:nvSpPr>
+          <p:cNvPr id="6" name="TextBox 5"/>
+          <p:cNvSpPr txBox="1"/>
+          <p:nvPr/>
+        </p:nvSpPr>
+        <p:spPr>
+          <a:xfrm>
+            <a:off x="10820095" y="6446520"/>
+            <a:ext cx="914400" cy="320040"/>
+          </a:xfrm>
+          <a:prstGeom prst="rect">
+            <a:avLst/>
+          </a:prstGeom>
+          <a:noFill/>
+        </p:spPr>
+        <p:txBody>
+          <a:bodyPr wrap="square" anchor="t" lIns="73152" rIns="73152" tIns="36576" bIns="36576">
+            <a:spAutoFit/>
+          </a:bodyPr>
+          <a:lstStyle/>
+          <a:p>
+            <a:pPr algn="r">
+              <a:spcAft>
+                <a:spcPts val="0"/>
+              </a:spcAft>
+            </a:pPr>
+            <a:r>
+              <a:rPr sz="1100" b="0" i="0">
+                <a:solidFill>
+                  <a:srgbClr val="64748B"/>
+                </a:solidFill>
+                <a:latin typeface="Arial"/>
+              </a:rPr>
+              <a:t>5</a:t>
+            </a:r>
+          </a:p>
+        </p:txBody>
+      </p:sp>
+      <p:graphicFrame>
+        <p:nvGraphicFramePr>
+          <p:cNvPr id="7" name="Table 6"/>
+          <p:cNvGraphicFramePr>
+            <a:graphicFrameLocks noGrp="1"/>
+          </p:cNvGraphicFramePr>
+          <p:nvPr/>
+        </p:nvGraphicFramePr>
+        <p:xfrm>
+          <a:off x="457200" y="1188720"/>
+          <a:ext cx="11277295" cy="2697480"/>
+        </p:xfrm>
+        <a:graphic>
+          <a:graphicData uri="http://schemas.openxmlformats.org/drawingml/2006/table">
+            <a:tbl>
+              <a:tblPr firstRow="1" bandRow="1">
+                <a:tableStyleId>{5C22544A-7EE6-4342-B048-85BDC9FD1C3A}</a:tableStyleId>
+              </a:tblPr>
+              <a:tblGrid>
+                <a:gridCol w="2834640"/>
+                <a:gridCol w="3566160"/>
+                <a:gridCol w="1645920"/>
+                <a:gridCol w="3230575"/>
+              </a:tblGrid>
+              <a:tr h="411480">
                 <a:tc>
                   <a:txBody>
                     <a:bodyPr wrap="square"/>
@@ -12746,29 +12564,6 @@
                           </a:solidFill>
                           <a:latin typeface="Arial"/>
                         </a:rPr>
-                        <a:t>Coverage</a:t>
-                      </a:r>
-                    </a:p>
-                  </a:txBody>
-                  <a:tcPr marL="73152" marR="73152" marT="36576" marB="36576" anchor="ctr">
-                    <a:solidFill>
-                      <a:srgbClr val="1E293B"/>
-                    </a:solidFill>
-                  </a:tcPr>
-                </a:tc>
-                <a:tc>
-                  <a:txBody>
-                    <a:bodyPr wrap="square"/>
-                    <a:lstStyle/>
-                    <a:p>
-                      <a:pPr algn="l"/>
-                      <a:r>
-                        <a:rPr sz="1500" b="1" i="0">
-                          <a:solidFill>
-                            <a:srgbClr val="FFFFFF"/>
-                          </a:solidFill>
-                          <a:latin typeface="Arial"/>
-                        </a:rPr>
                         <a:t>Used for</a:t>
                       </a:r>
                     </a:p>
@@ -12780,7 +12575,7 @@
                   </a:tcPr>
                 </a:tc>
               </a:tr>
-              <a:tr h="658368">
+              <a:tr h="457200">
                 <a:tc>
                   <a:txBody>
                     <a:bodyPr wrap="square"/>
@@ -12863,29 +12658,6 @@
                           </a:solidFill>
                           <a:latin typeface="Arial"/>
                         </a:rPr>
-                        <a:t>20 Oct 2025 – 14 Jun 2026</a:t>
-                      </a:r>
-                    </a:p>
-                  </a:txBody>
-                  <a:tcPr marL="73152" marR="73152" marT="36576" marB="36576" anchor="ctr">
-                    <a:solidFill>
-                      <a:srgbClr val="F1F5F9"/>
-                    </a:solidFill>
-                  </a:tcPr>
-                </a:tc>
-                <a:tc>
-                  <a:txBody>
-                    <a:bodyPr wrap="square"/>
-                    <a:lstStyle/>
-                    <a:p>
-                      <a:pPr algn="l"/>
-                      <a:r>
-                        <a:rPr sz="1500" b="0" i="0">
-                          <a:solidFill>
-                            <a:srgbClr val="0F172A"/>
-                          </a:solidFill>
-                          <a:latin typeface="Arial"/>
-                        </a:rPr>
                         <a:t>Fills, costs, CLV, anchor, M6</a:t>
                       </a:r>
                     </a:p>
@@ -12897,7 +12669,7 @@
                   </a:tcPr>
                 </a:tc>
               </a:tr>
-              <a:tr h="658368">
+              <a:tr h="457200">
                 <a:tc>
                   <a:txBody>
                     <a:bodyPr wrap="square"/>
@@ -12980,29 +12752,6 @@
                           </a:solidFill>
                           <a:latin typeface="Arial"/>
                         </a:rPr>
-                        <a:t>1,316 games, 2025-26</a:t>
-                      </a:r>
-                    </a:p>
-                  </a:txBody>
-                  <a:tcPr marL="73152" marR="73152" marT="36576" marB="36576" anchor="ctr">
-                    <a:solidFill>
-                      <a:srgbClr val="FFFFFF"/>
-                    </a:solidFill>
-                  </a:tcPr>
-                </a:tc>
-                <a:tc>
-                  <a:txBody>
-                    <a:bodyPr wrap="square"/>
-                    <a:lstStyle/>
-                    <a:p>
-                      <a:pPr algn="l"/>
-                      <a:r>
-                        <a:rPr sz="1500" b="0" i="0">
-                          <a:solidFill>
-                            <a:srgbClr val="0F172A"/>
-                          </a:solidFill>
-                          <a:latin typeface="Arial"/>
-                        </a:rPr>
                         <a:t>Settling P&amp;L</a:t>
                       </a:r>
                     </a:p>
@@ -13014,7 +12763,7 @@
                   </a:tcPr>
                 </a:tc>
               </a:tr>
-              <a:tr h="658368">
+              <a:tr h="457200">
                 <a:tc>
                   <a:txBody>
                     <a:bodyPr wrap="square"/>
@@ -13051,7 +12800,7 @@
                           </a:solidFill>
                           <a:latin typeface="Arial"/>
                         </a:rPr>
-                        <a:t>Schedule, tip time, season type, score</a:t>
+                        <a:t>Schedule, tip time, score, 3 seasons</a:t>
                       </a:r>
                     </a:p>
                   </a:txBody>
@@ -13097,29 +12846,6 @@
                           </a:solidFill>
                           <a:latin typeface="Arial"/>
                         </a:rPr>
-                        <a:t>3 seasons, 2023-24 to 2025-26</a:t>
-                      </a:r>
-                    </a:p>
-                  </a:txBody>
-                  <a:tcPr marL="73152" marR="73152" marT="36576" marB="36576" anchor="ctr">
-                    <a:solidFill>
-                      <a:srgbClr val="F1F5F9"/>
-                    </a:solidFill>
-                  </a:tcPr>
-                </a:tc>
-                <a:tc>
-                  <a:txBody>
-                    <a:bodyPr wrap="square"/>
-                    <a:lstStyle/>
-                    <a:p>
-                      <a:pPr algn="l"/>
-                      <a:r>
-                        <a:rPr sz="1500" b="0" i="0">
-                          <a:solidFill>
-                            <a:srgbClr val="0F172A"/>
-                          </a:solidFill>
-                          <a:latin typeface="Arial"/>
-                        </a:rPr>
                         <a:t>Splits, M4 labels</a:t>
                       </a:r>
                     </a:p>
@@ -13131,7 +12857,7 @@
                   </a:tcPr>
                 </a:tc>
               </a:tr>
-              <a:tr h="658368">
+              <a:tr h="457200">
                 <a:tc>
                   <a:txBody>
                     <a:bodyPr wrap="square"/>
@@ -13214,29 +12940,6 @@
                           </a:solidFill>
                           <a:latin typeface="Arial"/>
                         </a:rPr>
-                        <a:t>3 seasons, 818 players</a:t>
-                      </a:r>
-                    </a:p>
-                  </a:txBody>
-                  <a:tcPr marL="73152" marR="73152" marT="36576" marB="36576" anchor="ctr">
-                    <a:solidFill>
-                      <a:srgbClr val="FFFFFF"/>
-                    </a:solidFill>
-                  </a:tcPr>
-                </a:tc>
-                <a:tc>
-                  <a:txBody>
-                    <a:bodyPr wrap="square"/>
-                    <a:lstStyle/>
-                    <a:p>
-                      <a:pPr algn="l"/>
-                      <a:r>
-                        <a:rPr sz="1500" b="0" i="0">
-                          <a:solidFill>
-                            <a:srgbClr val="0F172A"/>
-                          </a:solidFill>
-                          <a:latin typeface="Arial"/>
-                        </a:rPr>
                         <a:t>M1–M4 features</a:t>
                       </a:r>
                     </a:p>
@@ -13248,7 +12951,7 @@
                   </a:tcPr>
                 </a:tc>
               </a:tr>
-              <a:tr h="658368">
+              <a:tr h="457200">
                 <a:tc>
                   <a:txBody>
                     <a:bodyPr wrap="square"/>
@@ -13331,30 +13034,7 @@
                           </a:solidFill>
                           <a:latin typeface="Arial"/>
                         </a:rPr>
-                        <a:t>1,772 games, to 7 May 2026</a:t>
-                      </a:r>
-                    </a:p>
-                  </a:txBody>
-                  <a:tcPr marL="73152" marR="73152" marT="36576" marB="36576" anchor="ctr">
-                    <a:solidFill>
-                      <a:srgbClr val="F1F5F9"/>
-                    </a:solidFill>
-                  </a:tcPr>
-                </a:tc>
-                <a:tc>
-                  <a:txBody>
-                    <a:bodyPr wrap="square"/>
-                    <a:lstStyle/>
-                    <a:p>
-                      <a:pPr algn="l"/>
-                      <a:r>
-                        <a:rPr sz="1500" b="0" i="0">
-                          <a:solidFill>
-                            <a:srgbClr val="0F172A"/>
-                          </a:solidFill>
-                          <a:latin typeface="Arial"/>
-                        </a:rPr>
-                        <a:t>News trigger; M3 / M4 after news</a:t>
+                        <a:t>News trigger; M4 after news</a:t>
                       </a:r>
                     </a:p>
                   </a:txBody>
@@ -13377,321 +13057,8 @@
         </p:nvSpPr>
         <p:spPr>
           <a:xfrm>
-            <a:off x="457200" y="5029200"/>
-            <a:ext cx="11277295" cy="1280160"/>
-          </a:xfrm>
-          <a:prstGeom prst="rect">
-            <a:avLst/>
-          </a:prstGeom>
-          <a:noFill/>
-        </p:spPr>
-        <p:txBody>
-          <a:bodyPr wrap="square" anchor="t" lIns="73152" rIns="73152" tIns="36576" bIns="36576">
-            <a:spAutoFit/>
-          </a:bodyPr>
-          <a:lstStyle/>
-          <a:p>
-            <a:pPr algn="l" marL="292608" indent="-256032">
-              <a:spcAft>
-                <a:spcPts val="600"/>
-              </a:spcAft>
-              <a:buChar char="•"/>
-            </a:pPr>
-            <a:r>
-              <a:rPr sz="1800" b="1" i="0">
-                <a:solidFill>
-                  <a:srgbClr val="0F172A"/>
-                </a:solidFill>
-                <a:latin typeface="Arial"/>
-              </a:rPr>
-              <a:t>All public:</a:t>
-            </a:r>
-            <a:r>
-              <a:rPr sz="1800" b="0" i="0">
-                <a:solidFill>
-                  <a:srgbClr val="0F172A"/>
-                </a:solidFill>
-                <a:latin typeface="Arial"/>
-              </a:rPr>
-              <a:t> Kalshi's public trade API (historical candlesticks) and ESPN's public site API</a:t>
-            </a:r>
-          </a:p>
-          <a:p>
-            <a:pPr algn="l" marL="292608" indent="-256032">
-              <a:spcAft>
-                <a:spcPts val="600"/>
-              </a:spcAft>
-              <a:buChar char="•"/>
-            </a:pPr>
-            <a:r>
-              <a:rPr sz="1800" b="0" i="0">
-                <a:solidFill>
-                  <a:srgbClr val="0F172A"/>
-                </a:solidFill>
-                <a:latin typeface="Arial"/>
-              </a:rPr>
-              <a:t>Frozen once as Parquet; raw data not redistributed in the repo (two commands rebuild it)</a:t>
-            </a:r>
-          </a:p>
-        </p:txBody>
-      </p:sp>
-    </p:spTree>
-  </p:cSld>
-  <p:clrMapOvr>
-    <a:masterClrMapping/>
-  </p:clrMapOvr>
-</p:sld>
-</file>
-
-<file path=ppt/slides/slide5.xml><?xml version="1.0" encoding="utf-8"?>
-<p:sld xmlns:a="http://schemas.openxmlformats.org/drawingml/2006/main" xmlns:p="http://schemas.openxmlformats.org/presentationml/2006/main" xmlns:r="http://schemas.openxmlformats.org/officeDocument/2006/relationships">
-  <p:cSld>
-    <p:spTree>
-      <p:nvGrpSpPr>
-        <p:cNvPr id="1" name=""/>
-        <p:cNvGrpSpPr/>
-        <p:nvPr/>
-      </p:nvGrpSpPr>
-      <p:grpSpPr/>
-      <p:sp>
-        <p:nvSpPr>
-          <p:cNvPr id="2" name="Rectangle 1"/>
-          <p:cNvSpPr/>
-          <p:nvPr/>
-        </p:nvSpPr>
-        <p:spPr>
-          <a:xfrm>
-            <a:off x="0" y="0"/>
-            <a:ext cx="12191695" cy="868680"/>
-          </a:xfrm>
-          <a:prstGeom prst="rect">
-            <a:avLst/>
-          </a:prstGeom>
-          <a:solidFill>
-            <a:srgbClr val="1E293B"/>
-          </a:solidFill>
-          <a:ln>
-            <a:noFill/>
-          </a:ln>
-          <a:effectLst/>
-        </p:spPr>
-        <p:style>
-          <a:lnRef idx="1">
-            <a:schemeClr val="accent1"/>
-          </a:lnRef>
-          <a:fillRef idx="3">
-            <a:schemeClr val="accent1"/>
-          </a:fillRef>
-          <a:effectRef idx="2">
-            <a:schemeClr val="accent1"/>
-          </a:effectRef>
-          <a:fontRef idx="minor">
-            <a:schemeClr val="lt1"/>
-          </a:fontRef>
-        </p:style>
-        <p:txBody>
-          <a:bodyPr rtlCol="0" anchor="ctr"/>
-          <a:lstStyle/>
-          <a:p>
-            <a:pPr algn="ctr"/>
-          </a:p>
-        </p:txBody>
-      </p:sp>
-      <p:sp>
-        <p:nvSpPr>
-          <p:cNvPr id="3" name="Rectangle 2"/>
-          <p:cNvSpPr/>
-          <p:nvPr/>
-        </p:nvSpPr>
-        <p:spPr>
-          <a:xfrm>
-            <a:off x="0" y="868680"/>
-            <a:ext cx="12191695" cy="54864"/>
-          </a:xfrm>
-          <a:prstGeom prst="rect">
-            <a:avLst/>
-          </a:prstGeom>
-          <a:solidFill>
-            <a:srgbClr val="EA580C"/>
-          </a:solidFill>
-          <a:ln>
-            <a:noFill/>
-          </a:ln>
-          <a:effectLst/>
-        </p:spPr>
-        <p:style>
-          <a:lnRef idx="1">
-            <a:schemeClr val="accent1"/>
-          </a:lnRef>
-          <a:fillRef idx="3">
-            <a:schemeClr val="accent1"/>
-          </a:fillRef>
-          <a:effectRef idx="2">
-            <a:schemeClr val="accent1"/>
-          </a:effectRef>
-          <a:fontRef idx="minor">
-            <a:schemeClr val="lt1"/>
-          </a:fontRef>
-        </p:style>
-        <p:txBody>
-          <a:bodyPr rtlCol="0" anchor="ctr"/>
-          <a:lstStyle/>
-          <a:p>
-            <a:pPr algn="ctr"/>
-          </a:p>
-        </p:txBody>
-      </p:sp>
-      <p:sp>
-        <p:nvSpPr>
-          <p:cNvPr id="4" name="TextBox 3"/>
-          <p:cNvSpPr txBox="1"/>
-          <p:nvPr/>
-        </p:nvSpPr>
-        <p:spPr>
-          <a:xfrm>
-            <a:off x="457200" y="109728"/>
-            <a:ext cx="11277295" cy="685800"/>
-          </a:xfrm>
-          <a:prstGeom prst="rect">
-            <a:avLst/>
-          </a:prstGeom>
-          <a:noFill/>
-        </p:spPr>
-        <p:txBody>
-          <a:bodyPr wrap="square" anchor="ctr" lIns="73152" rIns="73152" tIns="36576" bIns="36576">
-            <a:spAutoFit/>
-          </a:bodyPr>
-          <a:lstStyle/>
-          <a:p>
-            <a:pPr algn="l">
-              <a:spcAft>
-                <a:spcPts val="0"/>
-              </a:spcAft>
-            </a:pPr>
-            <a:r>
-              <a:rPr sz="3000" b="1" i="0">
-                <a:solidFill>
-                  <a:srgbClr val="FFFFFF"/>
-                </a:solidFill>
-                <a:latin typeface="Arial"/>
-              </a:rPr>
-              <a:t>Data: time splits and the no-look-ahead rule</a:t>
-            </a:r>
-          </a:p>
-        </p:txBody>
-      </p:sp>
-      <p:sp>
-        <p:nvSpPr>
-          <p:cNvPr id="5" name="TextBox 4"/>
-          <p:cNvSpPr txBox="1"/>
-          <p:nvPr/>
-        </p:nvSpPr>
-        <p:spPr>
-          <a:xfrm>
-            <a:off x="457200" y="6446520"/>
-            <a:ext cx="9144000" cy="320040"/>
-          </a:xfrm>
-          <a:prstGeom prst="rect">
-            <a:avLst/>
-          </a:prstGeom>
-          <a:noFill/>
-        </p:spPr>
-        <p:txBody>
-          <a:bodyPr wrap="square" anchor="t" lIns="73152" rIns="73152" tIns="36576" bIns="36576">
-            <a:spAutoFit/>
-          </a:bodyPr>
-          <a:lstStyle/>
-          <a:p>
-            <a:pPr algn="l">
-              <a:spcAft>
-                <a:spcPts val="0"/>
-              </a:spcAft>
-            </a:pPr>
-            <a:r>
-              <a:rPr sz="1100" b="0" i="0">
-                <a:solidFill>
-                  <a:srgbClr val="64748B"/>
-                </a:solidFill>
-                <a:latin typeface="Arial"/>
-              </a:rPr>
-              <a:t>DASC7606C Group 12 · Betting markets are tilted against consumers</a:t>
-            </a:r>
-          </a:p>
-        </p:txBody>
-      </p:sp>
-      <p:sp>
-        <p:nvSpPr>
-          <p:cNvPr id="6" name="TextBox 5"/>
-          <p:cNvSpPr txBox="1"/>
-          <p:nvPr/>
-        </p:nvSpPr>
-        <p:spPr>
-          <a:xfrm>
-            <a:off x="10820095" y="6446520"/>
-            <a:ext cx="914400" cy="320040"/>
-          </a:xfrm>
-          <a:prstGeom prst="rect">
-            <a:avLst/>
-          </a:prstGeom>
-          <a:noFill/>
-        </p:spPr>
-        <p:txBody>
-          <a:bodyPr wrap="square" anchor="t" lIns="73152" rIns="73152" tIns="36576" bIns="36576">
-            <a:spAutoFit/>
-          </a:bodyPr>
-          <a:lstStyle/>
-          <a:p>
-            <a:pPr algn="r">
-              <a:spcAft>
-                <a:spcPts val="0"/>
-              </a:spcAft>
-            </a:pPr>
-            <a:r>
-              <a:rPr sz="1100" b="0" i="0">
-                <a:solidFill>
-                  <a:srgbClr val="64748B"/>
-                </a:solidFill>
-                <a:latin typeface="Arial"/>
-              </a:rPr>
-              <a:t>5</a:t>
-            </a:r>
-          </a:p>
-        </p:txBody>
-      </p:sp>
-      <p:pic>
-        <p:nvPicPr>
-          <p:cNvPr id="7" name="Picture 6" descr="data_timeline.png"/>
-          <p:cNvPicPr>
-            <a:picLocks noChangeAspect="1"/>
-          </p:cNvPicPr>
-          <p:nvPr/>
-        </p:nvPicPr>
-        <p:blipFill>
-          <a:blip r:embed="rId3"/>
-          <a:stretch>
-            <a:fillRect/>
-          </a:stretch>
-        </p:blipFill>
-        <p:spPr>
-          <a:xfrm>
-            <a:off x="1250521" y="1097280"/>
-            <a:ext cx="9690652" cy="3429000"/>
-          </a:xfrm>
-          <a:prstGeom prst="rect">
-            <a:avLst/>
-          </a:prstGeom>
-        </p:spPr>
-      </p:pic>
-      <p:sp>
-        <p:nvSpPr>
-          <p:cNvPr id="8" name="TextBox 7"/>
-          <p:cNvSpPr txBox="1"/>
-          <p:nvPr/>
-        </p:nvSpPr>
-        <p:spPr>
-          <a:xfrm>
-            <a:off x="457200" y="4617720"/>
-            <a:ext cx="5501487" cy="1737360"/>
+            <a:off x="457200" y="4069080"/>
+            <a:ext cx="5501487" cy="2240280"/>
           </a:xfrm>
           <a:prstGeom prst="rect">
             <a:avLst/>
@@ -13716,7 +13083,7 @@
                 </a:solidFill>
                 <a:latin typeface="Arial"/>
               </a:rPr>
-              <a:t>No look-ahead</a:t>
+              <a:t>Time splits</a:t>
             </a:r>
           </a:p>
           <a:p>
@@ -13733,7 +13100,7 @@
                 </a:solidFill>
                 <a:latin typeface="Arial"/>
               </a:rPr>
-              <a:t>Agent sees only what was published by then</a:t>
+              <a:t>Models train before 1 Feb 2026; agent develops Nov–Jan</a:t>
             </a:r>
           </a:p>
           <a:p>
@@ -13750,7 +13117,7 @@
                 </a:solidFill>
                 <a:latin typeface="Arial"/>
               </a:rPr>
-              <a:t>Inactive list = news at tip − 30 min</a:t>
+              <a:t>Test 1 Feb – 12 Apr (501 games); walk-forward retrains monthly</a:t>
             </a:r>
           </a:p>
           <a:p>
@@ -13767,7 +13134,7 @@
                 </a:solidFill>
                 <a:latin typeface="Arial"/>
               </a:rPr>
-              <a:t>Fill at ask + fee; quote ≤ 5 min old; ≤ 10% of volume</a:t>
+              <a:t>Play-offs (87 games): holdout scored once</a:t>
             </a:r>
           </a:p>
         </p:txBody>
@@ -13780,8 +13147,8 @@
         </p:nvSpPr>
         <p:spPr>
           <a:xfrm>
-            <a:off x="6233007" y="4617720"/>
-            <a:ext cx="5501487" cy="1737360"/>
+            <a:off x="6233007" y="4069080"/>
+            <a:ext cx="5501487" cy="2240280"/>
           </a:xfrm>
           <a:prstGeom prst="rect">
             <a:avLst/>
@@ -13806,7 +13173,7 @@
                 </a:solidFill>
                 <a:latin typeface="Arial"/>
               </a:rPr>
-              <a:t>Limits</a:t>
+              <a:t>No look-ahead, real costs</a:t>
             </a:r>
           </a:p>
           <a:p>
@@ -13823,7 +13190,7 @@
                 </a:solidFill>
                 <a:latin typeface="Arial"/>
               </a:rPr>
-              <a:t>One season of prices; game-winner markets only</a:t>
+              <a:t>Agent sees only what was published by then</a:t>
             </a:r>
           </a:p>
           <a:p>
@@ -13840,7 +13207,7 @@
                 </a:solidFill>
                 <a:latin typeface="Arial"/>
               </a:rPr>
-              <a:t>News = inactive lists only, to 7 May</a:t>
+              <a:t>Inactive list = news at tip − 30 min (ends 7 May)</a:t>
             </a:r>
           </a:p>
           <a:p>
@@ -13857,7 +13224,7 @@
                 </a:solidFill>
                 <a:latin typeface="Arial"/>
               </a:rPr>
-              <a:t>No earlier injury reports, social media or other books</a:t>
+              <a:t>Fill at ask + fee; quote ≤ 5 min old; ≤ 10% of volume</a:t>
             </a:r>
           </a:p>
         </p:txBody>
@@ -14041,7 +13408,7 @@
                 </a:solidFill>
                 <a:latin typeface="Arial"/>
               </a:rPr>
-              <a:t>DASC7606C Group 12 · Betting markets are tilted against consumers</a:t>
+              <a:t>DASC7606C Group 12 · Market-Graded Learning: the closing price grades every component</a:t>
             </a:r>
           </a:p>
         </p:txBody>
@@ -14474,7 +13841,7 @@
                 </a:solidFill>
                 <a:latin typeface="Arial"/>
               </a:rPr>
-              <a:t>DASC7606C Group 12 · Betting markets are tilted against consumers</a:t>
+              <a:t>DASC7606C Group 12 · Market-Graded Learning: the closing price grades every component</a:t>
             </a:r>
           </a:p>
         </p:txBody>
@@ -14534,24 +13901,48 @@
         </p:blipFill>
         <p:spPr>
           <a:xfrm>
-            <a:off x="895197" y="1097280"/>
-            <a:ext cx="10401299" cy="4160520"/>
+            <a:off x="457200" y="1856232"/>
+            <a:ext cx="5120640" cy="2048255"/>
           </a:xfrm>
           <a:prstGeom prst="rect">
             <a:avLst/>
           </a:prstGeom>
         </p:spPr>
       </p:pic>
-      <p:sp>
-        <p:nvSpPr>
-          <p:cNvPr id="8" name="TextBox 7"/>
+      <p:pic>
+        <p:nvPicPr>
+          <p:cNvPr id="8" name="Picture 7" descr="injury_timing.png"/>
+          <p:cNvPicPr>
+            <a:picLocks noChangeAspect="1"/>
+          </p:cNvPicPr>
+          <p:nvPr/>
+        </p:nvPicPr>
+        <p:blipFill>
+          <a:blip r:embed="rId4"/>
+          <a:stretch>
+            <a:fillRect/>
+          </a:stretch>
+        </p:blipFill>
+        <p:spPr>
+          <a:xfrm>
+            <a:off x="5715000" y="1676460"/>
+            <a:ext cx="6019495" cy="2407798"/>
+          </a:xfrm>
+          <a:prstGeom prst="rect">
+            <a:avLst/>
+          </a:prstGeom>
+        </p:spPr>
+      </p:pic>
+      <p:sp>
+        <p:nvSpPr>
+          <p:cNvPr id="9" name="TextBox 8"/>
           <p:cNvSpPr txBox="1"/>
           <p:nvPr/>
         </p:nvSpPr>
         <p:spPr>
           <a:xfrm>
-            <a:off x="457200" y="5349240"/>
-            <a:ext cx="11277295" cy="1005840"/>
+            <a:off x="457200" y="4754880"/>
+            <a:ext cx="11277295" cy="1600200"/>
           </a:xfrm>
           <a:prstGeom prst="rect">
             <a:avLst/>
@@ -14586,7 +13977,7 @@
                 </a:solidFill>
                 <a:latin typeface="Arial"/>
               </a:rPr>
-              <a:t> of the news-direction move was already in the price when the list was public (+1.80 vs +0.18 pts, 193 test games)</a:t>
+              <a:t> of the move happens before the inactive list (+1.80 vs +0.18 pts, 193 test games)</a:t>
             </a:r>
           </a:p>
           <a:p>
@@ -14603,7 +13994,42 @@
                 </a:solidFill>
                 <a:latin typeface="Arial"/>
               </a:rPr>
-              <a:t>List stamped tip − 30 min: our proxy for when a retail user sees it</a:t>
+              <a:t>About </a:t>
+            </a:r>
+            <a:r>
+              <a:rPr sz="1800" b="1" i="0">
+                <a:solidFill>
+                  <a:srgbClr val="0F172A"/>
+                </a:solidFill>
+                <a:latin typeface="Arial"/>
+              </a:rPr>
+              <a:t>two-thirds</a:t>
+            </a:r>
+            <a:r>
+              <a:rPr sz="1800" b="0" i="0">
+                <a:solidFill>
+                  <a:srgbClr val="0F172A"/>
+                </a:solidFill>
+                <a:latin typeface="Arial"/>
+              </a:rPr>
+              <a:t> (67%, CI 47–85%) comes before the first official injury report, ~6 h earlier</a:t>
+            </a:r>
+          </a:p>
+          <a:p>
+            <a:pPr algn="l" marL="292608" indent="-256032">
+              <a:spcAft>
+                <a:spcPts val="400"/>
+              </a:spcAft>
+              <a:buChar char="•"/>
+            </a:pPr>
+            <a:r>
+              <a:rPr sz="1500" b="0" i="0">
+                <a:solidFill>
+                  <a:srgbClr val="64748B"/>
+                </a:solidFill>
+                <a:latin typeface="Arial"/>
+              </a:rPr>
+              <a:t>49% if reports are public at their slot; official reports only, so news can be earlier</a:t>
             </a:r>
           </a:p>
         </p:txBody>
@@ -14787,7 +14213,7 @@
                 </a:solidFill>
                 <a:latin typeface="Arial"/>
               </a:rPr>
-              <a:t>DASC7606C Group 12 · Betting markets are tilted against consumers</a:t>
+              <a:t>DASC7606C Group 12 · Market-Graded Learning: the closing price grades every component</a:t>
             </a:r>
           </a:p>
         </p:txBody>
@@ -15121,7 +14547,7 @@
                 </a:solidFill>
                 <a:latin typeface="Arial"/>
               </a:rPr>
-              <a:t>Evidence 4: even a market-trained neural net finds nothing</a:t>
+              <a:t>Deep learning: a GRU trained on the market's own moves</a:t>
             </a:r>
           </a:p>
         </p:txBody>
@@ -15160,7 +14586,7 @@
                 </a:solidFill>
                 <a:latin typeface="Arial"/>
               </a:rPr>
-              <a:t>DASC7606C Group 12 · Betting markets are tilted against consumers</a:t>
+              <a:t>DASC7606C Group 12 · Market-Graded Learning: the closing price grades every component</a:t>
             </a:r>
           </a:p>
         </p:txBody>
@@ -15204,9 +14630,185 @@
           </a:p>
         </p:txBody>
       </p:sp>
+      <p:sp>
+        <p:nvSpPr>
+          <p:cNvPr id="7" name="TextBox 6"/>
+          <p:cNvSpPr txBox="1"/>
+          <p:nvPr/>
+        </p:nvSpPr>
+        <p:spPr>
+          <a:xfrm>
+            <a:off x="457200" y="1143000"/>
+            <a:ext cx="4572000" cy="4114800"/>
+          </a:xfrm>
+          <a:prstGeom prst="rect">
+            <a:avLst/>
+          </a:prstGeom>
+          <a:noFill/>
+        </p:spPr>
+        <p:txBody>
+          <a:bodyPr wrap="square" anchor="t" lIns="73152" rIns="73152" tIns="36576" bIns="36576">
+            <a:spAutoFit/>
+          </a:bodyPr>
+          <a:lstStyle/>
+          <a:p>
+            <a:pPr algn="l">
+              <a:spcAft>
+                <a:spcPts val="400"/>
+              </a:spcAft>
+            </a:pPr>
+            <a:r>
+              <a:rPr sz="1600" b="1" i="0">
+                <a:solidFill>
+                  <a:srgbClr val="1E293B"/>
+                </a:solidFill>
+                <a:latin typeface="Arial"/>
+              </a:rPr>
+              <a:t>M6 design</a:t>
+            </a:r>
+          </a:p>
+          <a:p>
+            <a:pPr algn="l" marL="292608" indent="-256032">
+              <a:spcAft>
+                <a:spcPts val="400"/>
+              </a:spcAft>
+              <a:buChar char="•"/>
+            </a:pPr>
+            <a:r>
+              <a:rPr sz="1600" b="0" i="0">
+                <a:solidFill>
+                  <a:srgbClr val="0F172A"/>
+                </a:solidFill>
+                <a:latin typeface="Arial"/>
+              </a:rPr>
+              <a:t>Label = price move to tip (the market grades it)</a:t>
+            </a:r>
+          </a:p>
+          <a:p>
+            <a:pPr algn="l" marL="292608" indent="-256032">
+              <a:spcAft>
+                <a:spcPts val="400"/>
+              </a:spcAft>
+              <a:buChar char="•"/>
+            </a:pPr>
+            <a:r>
+              <a:rPr sz="1600" b="0" i="0">
+                <a:solidFill>
+                  <a:srgbClr val="0F172A"/>
+                </a:solidFill>
+                <a:latin typeface="Arial"/>
+              </a:rPr>
+              <a:t>GRU-16 over 6 h of prices, 15-min steps</a:t>
+            </a:r>
+          </a:p>
+          <a:p>
+            <a:pPr algn="l" marL="292608" indent="-256032">
+              <a:spcAft>
+                <a:spcPts val="400"/>
+              </a:spcAft>
+              <a:buChar char="•"/>
+            </a:pPr>
+            <a:r>
+              <a:rPr sz="1600" b="0" i="0">
+                <a:solidFill>
+                  <a:srgbClr val="0F172A"/>
+                </a:solidFill>
+                <a:latin typeface="Arial"/>
+              </a:rPr>
+              <a:t>+ 18 static features → MLP → 10 / 50 / 90th percentiles</a:t>
+            </a:r>
+          </a:p>
+          <a:p>
+            <a:pPr algn="l" marL="292608" indent="-256032">
+              <a:spcAft>
+                <a:spcPts val="400"/>
+              </a:spcAft>
+              <a:buChar char="•"/>
+            </a:pPr>
+            <a:r>
+              <a:rPr sz="1600" b="0" i="0">
+                <a:solidFill>
+                  <a:srgbClr val="0F172A"/>
+                </a:solidFill>
+                <a:latin typeface="Arial"/>
+              </a:rPr>
+              <a:t>Pinball loss, early stopping; leak-tested</a:t>
+            </a:r>
+          </a:p>
+          <a:p>
+            <a:pPr algn="l">
+              <a:spcAft>
+                <a:spcPts val="400"/>
+              </a:spcAft>
+            </a:pPr>
+            <a:r>
+              <a:rPr sz="1600" b="1" i="0">
+                <a:solidFill>
+                  <a:srgbClr val="DC2626"/>
+                </a:solidFill>
+                <a:latin typeface="Arial"/>
+              </a:rPr>
+              <a:t>Result</a:t>
+            </a:r>
+          </a:p>
+          <a:p>
+            <a:pPr algn="l" marL="292608" indent="-256032">
+              <a:spcAft>
+                <a:spcPts val="400"/>
+              </a:spcAft>
+              <a:buChar char="•"/>
+            </a:pPr>
+            <a:r>
+              <a:rPr sz="1600" b="0" i="0">
+                <a:solidFill>
+                  <a:srgbClr val="0F172A"/>
+                </a:solidFill>
+                <a:latin typeface="Arial"/>
+              </a:rPr>
+              <a:t>MAE </a:t>
+            </a:r>
+            <a:r>
+              <a:rPr sz="1600" b="1" i="0">
+                <a:solidFill>
+                  <a:srgbClr val="0F172A"/>
+                </a:solidFill>
+                <a:latin typeface="Arial"/>
+              </a:rPr>
+              <a:t>0.867¢</a:t>
+            </a:r>
+            <a:r>
+              <a:rPr sz="1600" b="0" i="0">
+                <a:solidFill>
+                  <a:srgbClr val="0F172A"/>
+                </a:solidFill>
+                <a:latin typeface="Arial"/>
+              </a:rPr>
+              <a:t> vs zero move </a:t>
+            </a:r>
+            <a:r>
+              <a:rPr sz="1600" b="1" i="0">
+                <a:solidFill>
+                  <a:srgbClr val="0F172A"/>
+                </a:solidFill>
+                <a:latin typeface="Arial"/>
+              </a:rPr>
+              <a:t>0.833¢</a:t>
+            </a:r>
+            <a:r>
+              <a:rPr sz="1600" b="0" i="0">
+                <a:solidFill>
+                  <a:srgbClr val="0F172A"/>
+                </a:solidFill>
+                <a:latin typeface="Arial"/>
+              </a:rPr>
+              <a:t>; agent makes 0 trades</a:t>
+            </a:r>
+          </a:p>
+        </p:txBody>
+      </p:sp>
       <p:pic>
         <p:nvPicPr>
-          <p:cNvPr id="7" name="Picture 6" descr="m6_vs_baselines.png"/>
+          <p:cNvPr id="8" name="Picture 7" descr="m6_robustness.png"/>
           <p:cNvPicPr>
             <a:picLocks noChangeAspect="1"/>
           </p:cNvPicPr>
@@ -15220,153 +14822,38 @@
         </p:blipFill>
         <p:spPr>
           <a:xfrm>
-            <a:off x="579630" y="1097280"/>
-            <a:ext cx="11032434" cy="3383280"/>
+            <a:off x="5120640" y="1206550"/>
+            <a:ext cx="6613855" cy="2204618"/>
           </a:xfrm>
           <a:prstGeom prst="rect">
             <a:avLst/>
           </a:prstGeom>
         </p:spPr>
       </p:pic>
-      <p:sp>
-        <p:nvSpPr>
-          <p:cNvPr id="8" name="TextBox 7"/>
-          <p:cNvSpPr txBox="1"/>
+      <p:pic>
+        <p:nvPicPr>
+          <p:cNvPr id="9" name="Picture 8" descr="m6_vs_baselines.png"/>
+          <p:cNvPicPr>
+            <a:picLocks noChangeAspect="1"/>
+          </p:cNvPicPr>
           <p:nvPr/>
-        </p:nvSpPr>
-        <p:spPr>
-          <a:xfrm>
-            <a:off x="457200" y="4526280"/>
-            <a:ext cx="11277295" cy="1298448"/>
+        </p:nvPicPr>
+        <p:blipFill>
+          <a:blip r:embed="rId4"/>
+          <a:stretch>
+            <a:fillRect/>
+          </a:stretch>
+        </p:blipFill>
+        <p:spPr>
+          <a:xfrm>
+            <a:off x="5445828" y="3520439"/>
+            <a:ext cx="5963478" cy="1828800"/>
           </a:xfrm>
           <a:prstGeom prst="rect">
             <a:avLst/>
           </a:prstGeom>
-          <a:noFill/>
-        </p:spPr>
-        <p:txBody>
-          <a:bodyPr wrap="square" anchor="t" lIns="73152" rIns="73152" tIns="36576" bIns="36576">
-            <a:spAutoFit/>
-          </a:bodyPr>
-          <a:lstStyle/>
-          <a:p>
-            <a:pPr algn="l" marL="292608" indent="-256032">
-              <a:spcAft>
-                <a:spcPts val="400"/>
-              </a:spcAft>
-              <a:buChar char="•"/>
-            </a:pPr>
-            <a:r>
-              <a:rPr sz="1800" b="0" i="0">
-                <a:solidFill>
-                  <a:srgbClr val="0F172A"/>
-                </a:solidFill>
-                <a:latin typeface="Arial"/>
-              </a:rPr>
-              <a:t>Average error on 771 test decision times: </a:t>
-            </a:r>
-            <a:r>
-              <a:rPr sz="1800" b="1" i="0">
-                <a:solidFill>
-                  <a:srgbClr val="0F172A"/>
-                </a:solidFill>
-                <a:latin typeface="Arial"/>
-              </a:rPr>
-              <a:t>M6 0.867¢</a:t>
-            </a:r>
-            <a:r>
-              <a:rPr sz="1800" b="0" i="0">
-                <a:solidFill>
-                  <a:srgbClr val="0F172A"/>
-                </a:solidFill>
-                <a:latin typeface="Arial"/>
-              </a:rPr>
-              <a:t> vs “price won't move” </a:t>
-            </a:r>
-            <a:r>
-              <a:rPr sz="1800" b="1" i="0">
-                <a:solidFill>
-                  <a:srgbClr val="0F172A"/>
-                </a:solidFill>
-                <a:latin typeface="Arial"/>
-              </a:rPr>
-              <a:t>0.833¢</a:t>
-            </a:r>
-            <a:r>
-              <a:rPr sz="1800" b="0" i="0">
-                <a:solidFill>
-                  <a:srgbClr val="0F172A"/>
-                </a:solidFill>
-                <a:latin typeface="Arial"/>
-              </a:rPr>
-              <a:t>; R² ≈ 0 on test and holdout</a:t>
-            </a:r>
-          </a:p>
-          <a:p>
-            <a:pPr algn="l" marL="292608" indent="-256032">
-              <a:spcAft>
-                <a:spcPts val="400"/>
-              </a:spcAft>
-              <a:buChar char="•"/>
-            </a:pPr>
-            <a:r>
-              <a:rPr sz="1800" b="0" i="0">
-                <a:solidFill>
-                  <a:srgbClr val="0F172A"/>
-                </a:solidFill>
-                <a:latin typeface="Arial"/>
-              </a:rPr>
-              <a:t>After the list, the price moves ~2.5% of the model's implied shift (coefficient 0.025); M6 agent: 0 trades. Forced: 501 trades, −$652</a:t>
-            </a:r>
-          </a:p>
-        </p:txBody>
-      </p:sp>
-      <p:sp>
-        <p:nvSpPr>
-          <p:cNvPr id="9" name="Rounded Rectangle 8"/>
-          <p:cNvSpPr/>
-          <p:nvPr/>
-        </p:nvSpPr>
-        <p:spPr>
-          <a:xfrm>
-            <a:off x="457200" y="5870448"/>
-            <a:ext cx="11277295" cy="457200"/>
-          </a:xfrm>
-          <a:prstGeom prst="roundRect">
-            <a:avLst>
-              <a:gd name="adj" fmla="val 12000"/>
-            </a:avLst>
-          </a:prstGeom>
-          <a:solidFill>
-            <a:srgbClr val="FEF3C7"/>
-          </a:solidFill>
-          <a:ln>
-            <a:noFill/>
-          </a:ln>
-          <a:effectLst/>
-        </p:spPr>
-        <p:style>
-          <a:lnRef idx="1">
-            <a:schemeClr val="accent1"/>
-          </a:lnRef>
-          <a:fillRef idx="3">
-            <a:schemeClr val="accent1"/>
-          </a:fillRef>
-          <a:effectRef idx="2">
-            <a:schemeClr val="accent1"/>
-          </a:effectRef>
-          <a:fontRef idx="minor">
-            <a:schemeClr val="lt1"/>
-          </a:fontRef>
-        </p:style>
-        <p:txBody>
-          <a:bodyPr rtlCol="0" anchor="ctr"/>
-          <a:lstStyle/>
-          <a:p>
-            <a:pPr algn="ctr"/>
-          </a:p>
-        </p:txBody>
-      </p:sp>
+        </p:spPr>
+      </p:pic>
       <p:sp>
         <p:nvSpPr>
           <p:cNvPr id="10" name="TextBox 9"/>
@@ -15375,8 +14862,8 @@
         </p:nvSpPr>
         <p:spPr>
           <a:xfrm>
-            <a:off x="548640" y="5870448"/>
-            <a:ext cx="11094415" cy="457200"/>
+            <a:off x="457200" y="5212080"/>
+            <a:ext cx="11277295" cy="566928"/>
           </a:xfrm>
           <a:prstGeom prst="rect">
             <a:avLst/>
@@ -15384,7 +14871,7 @@
           <a:noFill/>
         </p:spPr>
         <p:txBody>
-          <a:bodyPr wrap="square" anchor="ctr" lIns="73152" rIns="73152" tIns="36576" bIns="36576">
+          <a:bodyPr wrap="square" anchor="t" lIns="73152" rIns="73152" tIns="36576" bIns="36576">
             <a:spAutoFit/>
           </a:bodyPr>
           <a:lstStyle/>
@@ -15395,13 +14882,70 @@
               </a:spcAft>
             </a:pPr>
             <a:r>
-              <a:rPr sz="1800" b="0" i="0">
+              <a:rPr sz="1600" b="1" i="0">
                 <a:solidFill>
                   <a:srgbClr val="0F172A"/>
                 </a:solidFill>
                 <a:latin typeface="Arial"/>
               </a:rPr>
-              <a:t>The price already contains the public information; the consumer is left paying costs</a:t>
+              <a:t>Robustness:</a:t>
+            </a:r>
+            <a:r>
+              <a:rPr sz="1600" b="0" i="0">
+                <a:solidFill>
+                  <a:srgbClr val="0F172A"/>
+                </a:solidFill>
+                <a:latin typeface="Arial"/>
+              </a:rPr>
+              <a:t> 9 configurations × 3 seeds, all worse than zero move (best +0.017¢); none predicts the 5.5¢ needed to trade</a:t>
+            </a:r>
+          </a:p>
+        </p:txBody>
+      </p:sp>
+      <p:sp>
+        <p:nvSpPr>
+          <p:cNvPr id="11" name="TextBox 10"/>
+          <p:cNvSpPr txBox="1"/>
+          <p:nvPr/>
+        </p:nvSpPr>
+        <p:spPr>
+          <a:xfrm>
+            <a:off x="457200" y="5788152"/>
+            <a:ext cx="11277295" cy="566928"/>
+          </a:xfrm>
+          <a:prstGeom prst="rect">
+            <a:avLst/>
+          </a:prstGeom>
+          <a:noFill/>
+        </p:spPr>
+        <p:txBody>
+          <a:bodyPr wrap="square" anchor="t" lIns="73152" rIns="73152" tIns="36576" bIns="36576">
+            <a:spAutoFit/>
+          </a:bodyPr>
+          <a:lstStyle/>
+          <a:p>
+            <a:pPr algn="l">
+              <a:spcAft>
+                <a:spcPts val="0"/>
+              </a:spcAft>
+            </a:pPr>
+            <a:r>
+              <a:rPr sz="1600" b="1" i="0">
+                <a:solidFill>
+                  <a:srgbClr val="0F172A"/>
+                </a:solidFill>
+                <a:latin typeface="Arial"/>
+              </a:rPr>
+              <a:t>M4 recalibration:</a:t>
+            </a:r>
+            <a:r>
+              <a:rPr sz="1600" b="0" i="0">
+                <a:solidFill>
+                  <a:srgbClr val="0F172A"/>
+                </a:solidFill>
+                <a:latin typeface="Arial"/>
+              </a:rPr>
+              <a:t> Brier 0.183 raw, 0.185 Platt, 0.184 isotonic vs market 0.164; miscalibration changes with season phase</a:t>
             </a:r>
           </a:p>
         </p:txBody>

--- a/presentation/nba_agent_deck.pptx
+++ b/presentation/nba_agent_deck.pptx
@@ -5684,7 +5684,7 @@
         </p:nvGraphicFramePr>
         <p:xfrm>
           <a:off x="457200" y="1143000"/>
-          <a:ext cx="11277295" cy="4892040"/>
+          <a:ext cx="7818120" cy="4892040"/>
         </p:xfrm>
         <a:graphic>
           <a:graphicData uri="http://schemas.openxmlformats.org/drawingml/2006/table">
@@ -5693,9 +5693,9 @@
                 <a:tableStyleId>{5C22544A-7EE6-4342-B048-85BDC9FD1C3A}</a:tableStyleId>
               </a:tblPr>
               <a:tblGrid>
-                <a:gridCol w="2651760"/>
-                <a:gridCol w="5120640"/>
-                <a:gridCol w="3504895"/>
+                <a:gridCol w="2148840"/>
+                <a:gridCol w="3429000"/>
+                <a:gridCol w="2240280"/>
               </a:tblGrid>
               <a:tr h="365760">
                 <a:tc>
@@ -5705,7 +5705,7 @@
                     <a:p>
                       <a:pPr algn="l"/>
                       <a:r>
-                        <a:rPr sz="1300" b="1" i="0">
+                        <a:rPr sz="1200" b="1" i="0">
                           <a:solidFill>
                             <a:srgbClr val="FFFFFF"/>
                           </a:solidFill>
@@ -5728,7 +5728,7 @@
                     <a:p>
                       <a:pPr algn="l"/>
                       <a:r>
-                        <a:rPr sz="1300" b="1" i="0">
+                        <a:rPr sz="1200" b="1" i="0">
                           <a:solidFill>
                             <a:srgbClr val="FFFFFF"/>
                           </a:solidFill>
@@ -5751,7 +5751,7 @@
                     <a:p>
                       <a:pPr algn="l"/>
                       <a:r>
-                        <a:rPr sz="1300" b="1" i="0">
+                        <a:rPr sz="1200" b="1" i="0">
                           <a:solidFill>
                             <a:srgbClr val="FFFFFF"/>
                           </a:solidFill>
@@ -5776,7 +5776,7 @@
                     <a:p>
                       <a:pPr algn="l"/>
                       <a:r>
-                        <a:rPr sz="1300" b="1" i="0">
+                        <a:rPr sz="1200" b="1" i="0">
                           <a:solidFill>
                             <a:srgbClr val="0F172A"/>
                           </a:solidFill>
@@ -5799,7 +5799,7 @@
                     <a:p>
                       <a:pPr algn="l"/>
                       <a:r>
-                        <a:rPr sz="1300" b="0" i="0">
+                        <a:rPr sz="1200" b="0" i="0">
                           <a:solidFill>
                             <a:srgbClr val="0F172A"/>
                           </a:solidFill>
@@ -5822,7 +5822,7 @@
                     <a:p>
                       <a:pPr algn="l"/>
                       <a:r>
-                        <a:rPr sz="1300" b="0" i="1">
+                        <a:rPr sz="1200" b="0" i="1">
                           <a:solidFill>
                             <a:srgbClr val="64748B"/>
                           </a:solidFill>
@@ -5847,7 +5847,7 @@
                     <a:p>
                       <a:pPr algn="l"/>
                       <a:r>
-                        <a:rPr sz="1300" b="1" i="0">
+                        <a:rPr sz="1200" b="1" i="0">
                           <a:solidFill>
                             <a:srgbClr val="0F172A"/>
                           </a:solidFill>
@@ -5870,7 +5870,7 @@
                     <a:p>
                       <a:pPr algn="l"/>
                       <a:r>
-                        <a:rPr sz="1300" b="0" i="0">
+                        <a:rPr sz="1200" b="0" i="0">
                           <a:solidFill>
                             <a:srgbClr val="0F172A"/>
                           </a:solidFill>
@@ -5893,7 +5893,7 @@
                     <a:p>
                       <a:pPr algn="l"/>
                       <a:r>
-                        <a:rPr sz="1300" b="0" i="1">
+                        <a:rPr sz="1200" b="0" i="1">
                           <a:solidFill>
                             <a:srgbClr val="64748B"/>
                           </a:solidFill>
@@ -5918,7 +5918,7 @@
                     <a:p>
                       <a:pPr algn="l"/>
                       <a:r>
-                        <a:rPr sz="1300" b="1" i="0">
+                        <a:rPr sz="1200" b="1" i="0">
                           <a:solidFill>
                             <a:srgbClr val="0F172A"/>
                           </a:solidFill>
@@ -5941,7 +5941,7 @@
                     <a:p>
                       <a:pPr algn="l"/>
                       <a:r>
-                        <a:rPr sz="1300" b="0" i="0">
+                        <a:rPr sz="1200" b="0" i="0">
                           <a:solidFill>
                             <a:srgbClr val="0F172A"/>
                           </a:solidFill>
@@ -5964,7 +5964,7 @@
                     <a:p>
                       <a:pPr algn="l"/>
                       <a:r>
-                        <a:rPr sz="1300" b="0" i="1">
+                        <a:rPr sz="1200" b="0" i="1">
                           <a:solidFill>
                             <a:srgbClr val="64748B"/>
                           </a:solidFill>
@@ -5989,7 +5989,7 @@
                     <a:p>
                       <a:pPr algn="l"/>
                       <a:r>
-                        <a:rPr sz="1300" b="1" i="0">
+                        <a:rPr sz="1200" b="1" i="0">
                           <a:solidFill>
                             <a:srgbClr val="0F172A"/>
                           </a:solidFill>
@@ -6012,7 +6012,7 @@
                     <a:p>
                       <a:pPr algn="l"/>
                       <a:r>
-                        <a:rPr sz="1300" b="0" i="0">
+                        <a:rPr sz="1200" b="0" i="0">
                           <a:solidFill>
                             <a:srgbClr val="0F172A"/>
                           </a:solidFill>
@@ -6035,7 +6035,7 @@
                     <a:p>
                       <a:pPr algn="l"/>
                       <a:r>
-                        <a:rPr sz="1300" b="0" i="1">
+                        <a:rPr sz="1200" b="0" i="1">
                           <a:solidFill>
                             <a:srgbClr val="64748B"/>
                           </a:solidFill>
@@ -6060,7 +6060,7 @@
                     <a:p>
                       <a:pPr algn="l"/>
                       <a:r>
-                        <a:rPr sz="1300" b="1" i="0">
+                        <a:rPr sz="1200" b="1" i="0">
                           <a:solidFill>
                             <a:srgbClr val="0F172A"/>
                           </a:solidFill>
@@ -6083,7 +6083,7 @@
                     <a:p>
                       <a:pPr algn="l"/>
                       <a:r>
-                        <a:rPr sz="1300" b="0" i="0">
+                        <a:rPr sz="1200" b="0" i="0">
                           <a:solidFill>
                             <a:srgbClr val="0F172A"/>
                           </a:solidFill>
@@ -6106,7 +6106,7 @@
                     <a:p>
                       <a:pPr algn="l"/>
                       <a:r>
-                        <a:rPr sz="1300" b="0" i="1">
+                        <a:rPr sz="1200" b="0" i="1">
                           <a:solidFill>
                             <a:srgbClr val="64748B"/>
                           </a:solidFill>
@@ -6131,7 +6131,7 @@
                     <a:p>
                       <a:pPr algn="l"/>
                       <a:r>
-                        <a:rPr sz="1300" b="1" i="0">
+                        <a:rPr sz="1200" b="1" i="0">
                           <a:solidFill>
                             <a:srgbClr val="0F172A"/>
                           </a:solidFill>
@@ -6154,7 +6154,7 @@
                     <a:p>
                       <a:pPr algn="l"/>
                       <a:r>
-                        <a:rPr sz="1300" b="0" i="0">
+                        <a:rPr sz="1200" b="0" i="0">
                           <a:solidFill>
                             <a:srgbClr val="0F172A"/>
                           </a:solidFill>
@@ -6177,7 +6177,7 @@
                     <a:p>
                       <a:pPr algn="l"/>
                       <a:r>
-                        <a:rPr sz="1300" b="0" i="1">
+                        <a:rPr sz="1200" b="0" i="1">
                           <a:solidFill>
                             <a:srgbClr val="64748B"/>
                           </a:solidFill>
@@ -6202,7 +6202,7 @@
                     <a:p>
                       <a:pPr algn="l"/>
                       <a:r>
-                        <a:rPr sz="1300" b="1" i="0">
+                        <a:rPr sz="1200" b="1" i="0">
                           <a:solidFill>
                             <a:srgbClr val="0F172A"/>
                           </a:solidFill>
@@ -6225,7 +6225,7 @@
                     <a:p>
                       <a:pPr algn="l"/>
                       <a:r>
-                        <a:rPr sz="1300" b="0" i="0">
+                        <a:rPr sz="1200" b="0" i="0">
                           <a:solidFill>
                             <a:srgbClr val="0F172A"/>
                           </a:solidFill>
@@ -6248,7 +6248,7 @@
                     <a:p>
                       <a:pPr algn="l"/>
                       <a:r>
-                        <a:rPr sz="1300" b="0" i="1">
+                        <a:rPr sz="1200" b="0" i="1">
                           <a:solidFill>
                             <a:srgbClr val="64748B"/>
                           </a:solidFill>
@@ -6273,7 +6273,7 @@
                     <a:p>
                       <a:pPr algn="l"/>
                       <a:r>
-                        <a:rPr sz="1300" b="1" i="0">
+                        <a:rPr sz="1200" b="1" i="0">
                           <a:solidFill>
                             <a:srgbClr val="0F172A"/>
                           </a:solidFill>
@@ -6296,7 +6296,7 @@
                     <a:p>
                       <a:pPr algn="l"/>
                       <a:r>
-                        <a:rPr sz="1300" b="0" i="0">
+                        <a:rPr sz="1200" b="0" i="0">
                           <a:solidFill>
                             <a:srgbClr val="0F172A"/>
                           </a:solidFill>
@@ -6319,7 +6319,7 @@
                     <a:p>
                       <a:pPr algn="l"/>
                       <a:r>
-                        <a:rPr sz="1300" b="0" i="1">
+                        <a:rPr sz="1200" b="0" i="1">
                           <a:solidFill>
                             <a:srgbClr val="64748B"/>
                           </a:solidFill>
@@ -6344,7 +6344,7 @@
                     <a:p>
                       <a:pPr algn="l"/>
                       <a:r>
-                        <a:rPr sz="1300" b="1" i="0">
+                        <a:rPr sz="1200" b="1" i="0">
                           <a:solidFill>
                             <a:srgbClr val="0F172A"/>
                           </a:solidFill>
@@ -6367,7 +6367,7 @@
                     <a:p>
                       <a:pPr algn="l"/>
                       <a:r>
-                        <a:rPr sz="1300" b="0" i="0">
+                        <a:rPr sz="1200" b="0" i="0">
                           <a:solidFill>
                             <a:srgbClr val="0F172A"/>
                           </a:solidFill>
@@ -6390,7 +6390,7 @@
                     <a:p>
                       <a:pPr algn="l"/>
                       <a:r>
-                        <a:rPr sz="1300" b="0" i="1">
+                        <a:rPr sz="1200" b="0" i="1">
                           <a:solidFill>
                             <a:srgbClr val="64748B"/>
                           </a:solidFill>
@@ -6411,9 +6411,33 @@
           </a:graphicData>
         </a:graphic>
       </p:graphicFrame>
-      <p:sp>
-        <p:nvSpPr>
-          <p:cNvPr id="8" name="TextBox 7"/>
+      <p:pic>
+        <p:nvPicPr>
+          <p:cNvPr id="8" name="Picture 7" descr="orchestrator.png"/>
+          <p:cNvPicPr>
+            <a:picLocks noChangeAspect="1"/>
+          </p:cNvPicPr>
+          <p:nvPr/>
+        </p:nvPicPr>
+        <p:blipFill>
+          <a:blip r:embed="rId3"/>
+          <a:stretch>
+            <a:fillRect/>
+          </a:stretch>
+        </p:blipFill>
+        <p:spPr>
+          <a:xfrm>
+            <a:off x="8412480" y="2702436"/>
+            <a:ext cx="3322015" cy="1727447"/>
+          </a:xfrm>
+          <a:prstGeom prst="rect">
+            <a:avLst/>
+          </a:prstGeom>
+        </p:spPr>
+      </p:pic>
+      <p:sp>
+        <p:nvSpPr>
+          <p:cNvPr id="9" name="TextBox 8"/>
           <p:cNvSpPr txBox="1"/>
           <p:nvPr/>
         </p:nvSpPr>

--- a/presentation/nba_agent_deck.pptx
+++ b/presentation/nba_agent_deck.pptx
@@ -656,7 +656,7 @@
           <a:lstStyle/>
           <a:p>
             <a:r>
-              <a:t>We then made the agent more agentic, and graded each upgrade the same way, pre-registered before scoring. An LLM tool agent chooses its own as-of tools, with code checking every number and a sceptic asking whether the edge is already priced in. We audited the rule gate against placebo rules, enforced a daily kill switch, tried fractional Kelly sizing, tested the Coach on simulated users, joined pregame, trader and coach under one orchestrator, and tried a learned trade-or-pass policy, a rule language for LLM-written rules, and episodic memory. Results so far: none yet. 9 of 9 are still pending at build time.</a:t>
+              <a:t>We then made the agent more agentic, and graded each upgrade the same way, pre-registered before scoring. An LLM tool agent chooses its own as-of tools, with code checking every number and a sceptic asking whether the edge is already priced in. We audited the rule gate against placebo rules, enforced a daily kill switch, tried fractional Kelly sizing, tested the Coach on simulated users, joined pregame, trader and coach under one orchestrator, and tried a learned trade-or-pass policy, a rule language for LLM-written rules, and episodic memory. Results so far: Coach, simulated users: Users trade less, lose less CLV; per-trade CLV no better. 8 of 9 are still pending at build time.</a:t>
             </a:r>
           </a:p>
         </p:txBody>
@@ -6106,13 +6106,13 @@
                     <a:p>
                       <a:pPr algn="l"/>
                       <a:r>
-                        <a:rPr sz="1200" b="0" i="1">
+                        <a:rPr sz="1200" b="0" i="0">
                           <a:solidFill>
-                            <a:srgbClr val="64748B"/>
+                            <a:srgbClr val="0F172A"/>
                           </a:solidFill>
                           <a:latin typeface="Arial"/>
                         </a:rPr>
-                        <a:t>pending</a:t>
+                        <a:t>Users trade less, lose less CLV; per-trade CLV no better</a:t>
                       </a:r>
                     </a:p>
                   </a:txBody>

--- a/presentation/nba_agent_deck.pptx
+++ b/presentation/nba_agent_deck.pptx
@@ -656,7 +656,7 @@
           <a:lstStyle/>
           <a:p>
             <a:r>
-              <a:t>We then made the agent more agentic, and graded each upgrade the same way, pre-registered before scoring. An LLM tool agent chooses its own as-of tools, with code checking every number and a sceptic asking whether the edge is already priced in. We audited the rule gate against placebo rules, enforced a daily kill switch, tried fractional Kelly sizing, tested the Coach on simulated users, joined pregame, trader and coach under one orchestrator, and tried a learned trade-or-pass policy, a rule language for LLM-written rules, and episodic memory. Results so far: Coach, simulated users: Users trade less, lose less CLV; per-trade CLV no better. 8 of 9 are still pending at build time.</a:t>
+              <a:t>We then made the agent more agentic, and graded each upgrade the same way, pre-registered before scoring. An LLM tool agent chooses its own as-of tools, with code checking every number and a sceptic asking whether the edge is already priced in. We audited the rule gate against placebo rules, enforced a daily kill switch, tried fractional Kelly sizing, tested the Coach on simulated users, joined pregame, trader and coach under one orchestrator, and tried a learned trade-or-pass policy, a rule language for LLM-written rules, and episodic memory. Results so far: Gate audit + placebo: Random rules pass as often (57% vs 57%); Coach, simulated users: Users trade less, lose less CLV; per-trade CLV no better. 7 of 9 are still pending at build time.</a:t>
             </a:r>
           </a:p>
         </p:txBody>
@@ -5893,13 +5893,13 @@
                     <a:p>
                       <a:pPr algn="l"/>
                       <a:r>
-                        <a:rPr sz="1200" b="0" i="1">
+                        <a:rPr sz="1200" b="0" i="0">
                           <a:solidFill>
-                            <a:srgbClr val="64748B"/>
+                            <a:srgbClr val="0F172A"/>
                           </a:solidFill>
                           <a:latin typeface="Arial"/>
                         </a:rPr>
-                        <a:t>pending</a:t>
+                        <a:t>Random rules pass as often (57% vs 57%)</a:t>
                       </a:r>
                     </a:p>
                   </a:txBody>

--- a/presentation/nba_agent_deck.pptx
+++ b/presentation/nba_agent_deck.pptx
@@ -656,7 +656,7 @@
           <a:lstStyle/>
           <a:p>
             <a:r>
-              <a:t>We then made the agent more agentic, and graded each upgrade the same way, pre-registered before scoring. An LLM tool agent chooses its own as-of tools, with code checking every number and a sceptic asking whether the edge is already priced in. We audited the rule gate against placebo rules, enforced a daily kill switch, tried fractional Kelly sizing, tested the Coach on simulated users, joined pregame, trader and coach under one orchestrator, and tried a learned trade-or-pass policy, a rule language for LLM-written rules, and episodic memory. Results so far: Gate audit + placebo: Random rules pass as often (57% vs 57%); Coach, simulated users: Users trade less, lose less CLV; per-trade CLV no better. 7 of 9 are still pending at build time.</a:t>
+              <a:t>We then made the agent more agentic, and graded each upgrade the same way, pre-registered before scoring. An LLM tool agent chooses its own as-of tools, with code checking every number and a sceptic asking whether the edge is already priced in. We audited the rule gate against placebo rules, enforced a daily kill switch, tried fractional Kelly sizing, tested the Coach on simulated users, joined pregame, trader and coach under one orchestrator, and tried a learned trade-or-pass policy, a rule language for LLM-written rules, and episodic memory. Results so far: LLM tool agent + sceptic: Not scored (API quota); all 32 valid calls passed; Gate audit + placebo: Random rules pass as often (57% vs 57%); Kill switch: Never triggered (worst day −$54); Coach, simulated users: Users trade less, lose less CLV; per-trade CLV no better. 5 of 9 are still pending at build time.</a:t>
             </a:r>
           </a:p>
         </p:txBody>
@@ -5822,13 +5822,13 @@
                     <a:p>
                       <a:pPr algn="l"/>
                       <a:r>
-                        <a:rPr sz="1200" b="0" i="1">
+                        <a:rPr sz="1200" b="0" i="0">
                           <a:solidFill>
-                            <a:srgbClr val="64748B"/>
+                            <a:srgbClr val="0F172A"/>
                           </a:solidFill>
                           <a:latin typeface="Arial"/>
                         </a:rPr>
-                        <a:t>pending</a:t>
+                        <a:t>Not scored (API quota); all 32 valid calls passed</a:t>
                       </a:r>
                     </a:p>
                   </a:txBody>
@@ -5964,13 +5964,13 @@
                     <a:p>
                       <a:pPr algn="l"/>
                       <a:r>
-                        <a:rPr sz="1200" b="0" i="1">
+                        <a:rPr sz="1200" b="0" i="0">
                           <a:solidFill>
-                            <a:srgbClr val="64748B"/>
+                            <a:srgbClr val="0F172A"/>
                           </a:solidFill>
                           <a:latin typeface="Arial"/>
                         </a:rPr>
-                        <a:t>pending</a:t>
+                        <a:t>Never triggered (worst day −$54)</a:t>
                       </a:r>
                     </a:p>
                   </a:txBody>

--- a/presentation/nba_agent_deck.pptx
+++ b/presentation/nba_agent_deck.pptx
@@ -656,7 +656,7 @@
           <a:lstStyle/>
           <a:p>
             <a:r>
-              <a:t>We then made the agent more agentic, and graded each upgrade the same way, pre-registered before scoring. An LLM tool agent chooses its own as-of tools, with code checking every number and a sceptic asking whether the edge is already priced in. We audited the rule gate against placebo rules, enforced a daily kill switch, tried fractional Kelly sizing, tested the Coach on simulated users, joined pregame, trader and coach under one orchestrator, and tried a learned trade-or-pass policy, a rule language for LLM-written rules, and episodic memory. Results so far: LLM tool agent + sceptic: Not scored (API quota); all 32 valid calls passed; Gate audit + placebo: Random rules pass as often (57% vs 57%); Kill switch: Never triggered (worst day −$54); Coach, simulated users: Users trade less, lose less CLV; per-trade CLV no better. 5 of 9 are still pending at build time.</a:t>
+              <a:t>We then made the agent more agentic and graded each upgrade the same way, pre-registered before scoring. Gate audit: the split gate, which judges a rule on held-out days by CLV dollars, kept 5 of 11 proposed rules where the legacy gate kept 0 of 24. Trades fell from 129 to 53 and CLV dollars improved by +$18 [+1, +34], but mean CLV per trade did not improve and it still does not beat never trading. The placebo test says why: random rules pass the split gate 57% of the time, the same as the reviewer's picks, so learning works by trading less, not by finding better rules. The kill switch is enforced but never tripped at $20 stakes; property tests show it blocks orders after a trip. Kelly sizing was not run. The Coach on simulated users with full compliance raises CLV dollars for every persona: overtrader +$88 [+65, +111], long-shot lover +$72 [+53, +90], cautious +$24 [+14, +36], price chaser +$17 [−4, +33], whose interval includes zero, and cuts trades by 66–87%. But it flags 99% of trades, so again the gain is trading less. The plain LLM made 5 trades in 304 decisions, CLV −$1, the same as never trading; the deterministic agent made 53 trades, CLV −$19. The tool agent and the sceptic are pending: the Gemini quota ran out and they are being re-run on DeepSeek. The orchestrator is built, shown on the right. The learned policy's selection step chose never trade, and the test was not scored. The rule language and memory are built and tested but not evaluated. The message: Every agentic upgrade, graded by the market, converges on the same answer: trade less. The market is hard to beat after fees, which is exactly why the product is education, not a trading bot.</a:t>
             </a:r>
           </a:p>
         </p:txBody>
@@ -5591,7 +5591,7 @@
                 </a:solidFill>
                 <a:latin typeface="Arial"/>
               </a:rPr>
-              <a:t>Agentic upgrades: the same market grade</a:t>
+              <a:t>Agentic upgrades: the market's answer is “trade less”</a:t>
             </a:r>
           </a:p>
         </p:txBody>
@@ -5684,7 +5684,7 @@
         </p:nvGraphicFramePr>
         <p:xfrm>
           <a:off x="457200" y="1143000"/>
-          <a:ext cx="7818120" cy="4892040"/>
+          <a:ext cx="8138160" cy="4608576"/>
         </p:xfrm>
         <a:graphic>
           <a:graphicData uri="http://schemas.openxmlformats.org/drawingml/2006/table">
@@ -5693,11 +5693,11 @@
                 <a:tableStyleId>{5C22544A-7EE6-4342-B048-85BDC9FD1C3A}</a:tableStyleId>
               </a:tblPr>
               <a:tblGrid>
-                <a:gridCol w="2148840"/>
-                <a:gridCol w="3429000"/>
-                <a:gridCol w="2240280"/>
+                <a:gridCol w="1783080"/>
+                <a:gridCol w="2331720"/>
+                <a:gridCol w="4023360"/>
               </a:tblGrid>
-              <a:tr h="365760">
+              <a:tr h="310896">
                 <a:tc>
                   <a:txBody>
                     <a:bodyPr wrap="square"/>
@@ -5705,7 +5705,7 @@
                     <a:p>
                       <a:pPr algn="l"/>
                       <a:r>
-                        <a:rPr sz="1200" b="1" i="0">
+                        <a:rPr sz="1100" b="1" i="0">
                           <a:solidFill>
                             <a:srgbClr val="FFFFFF"/>
                           </a:solidFill>
@@ -5728,7 +5728,7 @@
                     <a:p>
                       <a:pPr algn="l"/>
                       <a:r>
-                        <a:rPr sz="1200" b="1" i="0">
+                        <a:rPr sz="1100" b="1" i="0">
                           <a:solidFill>
                             <a:srgbClr val="FFFFFF"/>
                           </a:solidFill>
@@ -5751,7 +5751,7 @@
                     <a:p>
                       <a:pPr algn="l"/>
                       <a:r>
-                        <a:rPr sz="1200" b="1" i="0">
+                        <a:rPr sz="1100" b="1" i="0">
                           <a:solidFill>
                             <a:srgbClr val="FFFFFF"/>
                           </a:solidFill>
@@ -5768,7 +5768,7 @@
                   </a:tcPr>
                 </a:tc>
               </a:tr>
-              <a:tr h="502920">
+              <a:tr h="429768">
                 <a:tc>
                   <a:txBody>
                     <a:bodyPr wrap="square"/>
@@ -5776,7 +5776,433 @@
                     <a:p>
                       <a:pPr algn="l"/>
                       <a:r>
-                        <a:rPr sz="1200" b="1" i="0">
+                        <a:rPr sz="1100" b="1" i="0">
+                          <a:solidFill>
+                            <a:srgbClr val="0F172A"/>
+                          </a:solidFill>
+                          <a:latin typeface="Arial"/>
+                        </a:rPr>
+                        <a:t>Gate audit</a:t>
+                      </a:r>
+                    </a:p>
+                  </a:txBody>
+                  <a:tcPr marL="73152" marR="73152" marT="36576" marB="36576" anchor="ctr">
+                    <a:solidFill>
+                      <a:srgbClr val="F1F5F9"/>
+                    </a:solidFill>
+                  </a:tcPr>
+                </a:tc>
+                <a:tc>
+                  <a:txBody>
+                    <a:bodyPr wrap="square"/>
+                    <a:lstStyle/>
+                    <a:p>
+                      <a:pPr algn="l"/>
+                      <a:r>
+                        <a:rPr sz="1100" b="0" i="0">
+                          <a:solidFill>
+                            <a:srgbClr val="0F172A"/>
+                          </a:solidFill>
+                          <a:latin typeface="Arial"/>
+                        </a:rPr>
+                        <a:t>Rule gate judged on held-out days, by CLV $</a:t>
+                      </a:r>
+                    </a:p>
+                  </a:txBody>
+                  <a:tcPr marL="73152" marR="73152" marT="36576" marB="36576" anchor="ctr">
+                    <a:solidFill>
+                      <a:srgbClr val="F1F5F9"/>
+                    </a:solidFill>
+                  </a:tcPr>
+                </a:tc>
+                <a:tc>
+                  <a:txBody>
+                    <a:bodyPr wrap="square"/>
+                    <a:lstStyle/>
+                    <a:p>
+                      <a:pPr algn="l"/>
+                      <a:r>
+                        <a:rPr sz="1100" b="0" i="0">
+                          <a:solidFill>
+                            <a:srgbClr val="0F172A"/>
+                          </a:solidFill>
+                          <a:latin typeface="Arial"/>
+                        </a:rPr>
+                        <a:t>Kept 5 of 11 (legacy 0 of 24); trades 129 → 53; CLV $ +$18 [+1, +34], per trade no better; never trading still wins</a:t>
+                      </a:r>
+                    </a:p>
+                  </a:txBody>
+                  <a:tcPr marL="73152" marR="73152" marT="36576" marB="36576" anchor="ctr">
+                    <a:solidFill>
+                      <a:srgbClr val="F1F5F9"/>
+                    </a:solidFill>
+                  </a:tcPr>
+                </a:tc>
+              </a:tr>
+              <a:tr h="429768">
+                <a:tc>
+                  <a:txBody>
+                    <a:bodyPr wrap="square"/>
+                    <a:lstStyle/>
+                    <a:p>
+                      <a:pPr algn="l"/>
+                      <a:r>
+                        <a:rPr sz="1100" b="1" i="0">
+                          <a:solidFill>
+                            <a:srgbClr val="0F172A"/>
+                          </a:solidFill>
+                          <a:latin typeface="Arial"/>
+                        </a:rPr>
+                        <a:t>Placebo rules</a:t>
+                      </a:r>
+                    </a:p>
+                  </a:txBody>
+                  <a:tcPr marL="73152" marR="73152" marT="36576" marB="36576" anchor="ctr">
+                    <a:solidFill>
+                      <a:srgbClr val="FFFFFF"/>
+                    </a:solidFill>
+                  </a:tcPr>
+                </a:tc>
+                <a:tc>
+                  <a:txBody>
+                    <a:bodyPr wrap="square"/>
+                    <a:lstStyle/>
+                    <a:p>
+                      <a:pPr algn="l"/>
+                      <a:r>
+                        <a:rPr sz="1100" b="0" i="0">
+                          <a:solidFill>
+                            <a:srgbClr val="0F172A"/>
+                          </a:solidFill>
+                          <a:latin typeface="Arial"/>
+                        </a:rPr>
+                        <a:t>Random rules through the same gate</a:t>
+                      </a:r>
+                    </a:p>
+                  </a:txBody>
+                  <a:tcPr marL="73152" marR="73152" marT="36576" marB="36576" anchor="ctr">
+                    <a:solidFill>
+                      <a:srgbClr val="FFFFFF"/>
+                    </a:solidFill>
+                  </a:tcPr>
+                </a:tc>
+                <a:tc>
+                  <a:txBody>
+                    <a:bodyPr wrap="square"/>
+                    <a:lstStyle/>
+                    <a:p>
+                      <a:pPr algn="l"/>
+                      <a:r>
+                        <a:rPr sz="1100" b="0" i="0">
+                          <a:solidFill>
+                            <a:srgbClr val="0F172A"/>
+                          </a:solidFill>
+                          <a:latin typeface="Arial"/>
+                        </a:rPr>
+                        <a:t>Random rules pass 57%, same as the reviewer's: learning works by trading less</a:t>
+                      </a:r>
+                    </a:p>
+                  </a:txBody>
+                  <a:tcPr marL="73152" marR="73152" marT="36576" marB="36576" anchor="ctr">
+                    <a:solidFill>
+                      <a:srgbClr val="FFFFFF"/>
+                    </a:solidFill>
+                  </a:tcPr>
+                </a:tc>
+              </a:tr>
+              <a:tr h="429768">
+                <a:tc>
+                  <a:txBody>
+                    <a:bodyPr wrap="square"/>
+                    <a:lstStyle/>
+                    <a:p>
+                      <a:pPr algn="l"/>
+                      <a:r>
+                        <a:rPr sz="1100" b="1" i="0">
+                          <a:solidFill>
+                            <a:srgbClr val="0F172A"/>
+                          </a:solidFill>
+                          <a:latin typeface="Arial"/>
+                        </a:rPr>
+                        <a:t>Kill switch</a:t>
+                      </a:r>
+                    </a:p>
+                  </a:txBody>
+                  <a:tcPr marL="73152" marR="73152" marT="36576" marB="36576" anchor="ctr">
+                    <a:solidFill>
+                      <a:srgbClr val="F1F5F9"/>
+                    </a:solidFill>
+                  </a:tcPr>
+                </a:tc>
+                <a:tc>
+                  <a:txBody>
+                    <a:bodyPr wrap="square"/>
+                    <a:lstStyle/>
+                    <a:p>
+                      <a:pPr algn="l"/>
+                      <a:r>
+                        <a:rPr sz="1100" b="0" i="0">
+                          <a:solidFill>
+                            <a:srgbClr val="0F172A"/>
+                          </a:solidFill>
+                          <a:latin typeface="Arial"/>
+                        </a:rPr>
+                        <a:t>$100 daily realised-loss stop</a:t>
+                      </a:r>
+                    </a:p>
+                  </a:txBody>
+                  <a:tcPr marL="73152" marR="73152" marT="36576" marB="36576" anchor="ctr">
+                    <a:solidFill>
+                      <a:srgbClr val="F1F5F9"/>
+                    </a:solidFill>
+                  </a:tcPr>
+                </a:tc>
+                <a:tc>
+                  <a:txBody>
+                    <a:bodyPr wrap="square"/>
+                    <a:lstStyle/>
+                    <a:p>
+                      <a:pPr algn="l"/>
+                      <a:r>
+                        <a:rPr sz="1100" b="0" i="0">
+                          <a:solidFill>
+                            <a:srgbClr val="0F172A"/>
+                          </a:solidFill>
+                          <a:latin typeface="Arial"/>
+                        </a:rPr>
+                        <a:t>Enforced, never tripped at $20 stakes (worst day −$54); property-tested</a:t>
+                      </a:r>
+                    </a:p>
+                  </a:txBody>
+                  <a:tcPr marL="73152" marR="73152" marT="36576" marB="36576" anchor="ctr">
+                    <a:solidFill>
+                      <a:srgbClr val="F1F5F9"/>
+                    </a:solidFill>
+                  </a:tcPr>
+                </a:tc>
+              </a:tr>
+              <a:tr h="429768">
+                <a:tc>
+                  <a:txBody>
+                    <a:bodyPr wrap="square"/>
+                    <a:lstStyle/>
+                    <a:p>
+                      <a:pPr algn="l"/>
+                      <a:r>
+                        <a:rPr sz="1100" b="1" i="0">
+                          <a:solidFill>
+                            <a:srgbClr val="0F172A"/>
+                          </a:solidFill>
+                          <a:latin typeface="Arial"/>
+                        </a:rPr>
+                        <a:t>Fractional Kelly</a:t>
+                      </a:r>
+                    </a:p>
+                  </a:txBody>
+                  <a:tcPr marL="73152" marR="73152" marT="36576" marB="36576" anchor="ctr">
+                    <a:solidFill>
+                      <a:srgbClr val="FFFFFF"/>
+                    </a:solidFill>
+                  </a:tcPr>
+                </a:tc>
+                <a:tc>
+                  <a:txBody>
+                    <a:bodyPr wrap="square"/>
+                    <a:lstStyle/>
+                    <a:p>
+                      <a:pPr algn="l"/>
+                      <a:r>
+                        <a:rPr sz="1100" b="0" i="0">
+                          <a:solidFill>
+                            <a:srgbClr val="0F172A"/>
+                          </a:solidFill>
+                          <a:latin typeface="Arial"/>
+                        </a:rPr>
+                        <a:t>¼-Kelly with the fee vs flat $20</a:t>
+                      </a:r>
+                    </a:p>
+                  </a:txBody>
+                  <a:tcPr marL="73152" marR="73152" marT="36576" marB="36576" anchor="ctr">
+                    <a:solidFill>
+                      <a:srgbClr val="FFFFFF"/>
+                    </a:solidFill>
+                  </a:tcPr>
+                </a:tc>
+                <a:tc>
+                  <a:txBody>
+                    <a:bodyPr wrap="square"/>
+                    <a:lstStyle/>
+                    <a:p>
+                      <a:pPr algn="l"/>
+                      <a:r>
+                        <a:rPr sz="1100" b="0" i="1">
+                          <a:solidFill>
+                            <a:srgbClr val="64748B"/>
+                          </a:solidFill>
+                          <a:latin typeface="Arial"/>
+                        </a:rPr>
+                        <a:t>Not run (time)</a:t>
+                      </a:r>
+                    </a:p>
+                  </a:txBody>
+                  <a:tcPr marL="73152" marR="73152" marT="36576" marB="36576" anchor="ctr">
+                    <a:solidFill>
+                      <a:srgbClr val="FFFFFF"/>
+                    </a:solidFill>
+                  </a:tcPr>
+                </a:tc>
+              </a:tr>
+              <a:tr h="429768">
+                <a:tc>
+                  <a:txBody>
+                    <a:bodyPr wrap="square"/>
+                    <a:lstStyle/>
+                    <a:p>
+                      <a:pPr algn="l"/>
+                      <a:r>
+                        <a:rPr sz="1100" b="1" i="0">
+                          <a:solidFill>
+                            <a:srgbClr val="0F172A"/>
+                          </a:solidFill>
+                          <a:latin typeface="Arial"/>
+                        </a:rPr>
+                        <a:t>Coach, simulated users</a:t>
+                      </a:r>
+                    </a:p>
+                  </a:txBody>
+                  <a:tcPr marL="73152" marR="73152" marT="36576" marB="36576" anchor="ctr">
+                    <a:solidFill>
+                      <a:srgbClr val="F1F5F9"/>
+                    </a:solidFill>
+                  </a:tcPr>
+                </a:tc>
+                <a:tc>
+                  <a:txBody>
+                    <a:bodyPr wrap="square"/>
+                    <a:lstStyle/>
+                    <a:p>
+                      <a:pPr algn="l"/>
+                      <a:r>
+                        <a:rPr sz="1100" b="0" i="0">
+                          <a:solidFill>
+                            <a:srgbClr val="0F172A"/>
+                          </a:solidFill>
+                          <a:latin typeface="Arial"/>
+                        </a:rPr>
+                        <a:t>Biased personas follow nudges (compliance 1.0)</a:t>
+                      </a:r>
+                    </a:p>
+                  </a:txBody>
+                  <a:tcPr marL="73152" marR="73152" marT="36576" marB="36576" anchor="ctr">
+                    <a:solidFill>
+                      <a:srgbClr val="F1F5F9"/>
+                    </a:solidFill>
+                  </a:tcPr>
+                </a:tc>
+                <a:tc>
+                  <a:txBody>
+                    <a:bodyPr wrap="square"/>
+                    <a:lstStyle/>
+                    <a:p>
+                      <a:pPr algn="l"/>
+                      <a:r>
+                        <a:rPr sz="1100" b="0" i="0">
+                          <a:solidFill>
+                            <a:srgbClr val="0F172A"/>
+                          </a:solidFill>
+                          <a:latin typeface="Arial"/>
+                        </a:rPr>
+                        <a:t>CLV $ +$17 to +$88 for all 4 personas; trades −66–87%; flags 99%, so the gain is trading less</a:t>
+                      </a:r>
+                    </a:p>
+                  </a:txBody>
+                  <a:tcPr marL="73152" marR="73152" marT="36576" marB="36576" anchor="ctr">
+                    <a:solidFill>
+                      <a:srgbClr val="F1F5F9"/>
+                    </a:solidFill>
+                  </a:tcPr>
+                </a:tc>
+              </a:tr>
+              <a:tr h="429768">
+                <a:tc>
+                  <a:txBody>
+                    <a:bodyPr wrap="square"/>
+                    <a:lstStyle/>
+                    <a:p>
+                      <a:pPr algn="l"/>
+                      <a:r>
+                        <a:rPr sz="1100" b="1" i="0">
+                          <a:solidFill>
+                            <a:srgbClr val="0F172A"/>
+                          </a:solidFill>
+                          <a:latin typeface="Arial"/>
+                        </a:rPr>
+                        <a:t>Plain LLM</a:t>
+                      </a:r>
+                    </a:p>
+                  </a:txBody>
+                  <a:tcPr marL="73152" marR="73152" marT="36576" marB="36576" anchor="ctr">
+                    <a:solidFill>
+                      <a:srgbClr val="FFFFFF"/>
+                    </a:solidFill>
+                  </a:tcPr>
+                </a:tc>
+                <a:tc>
+                  <a:txBody>
+                    <a:bodyPr wrap="square"/>
+                    <a:lstStyle/>
+                    <a:p>
+                      <a:pPr algn="l"/>
+                      <a:r>
+                        <a:rPr sz="1100" b="0" i="0">
+                          <a:solidFill>
+                            <a:srgbClr val="0F172A"/>
+                          </a:solidFill>
+                          <a:latin typeface="Arial"/>
+                        </a:rPr>
+                        <a:t>One LLM call per decision, no tools</a:t>
+                      </a:r>
+                    </a:p>
+                  </a:txBody>
+                  <a:tcPr marL="73152" marR="73152" marT="36576" marB="36576" anchor="ctr">
+                    <a:solidFill>
+                      <a:srgbClr val="FFFFFF"/>
+                    </a:solidFill>
+                  </a:tcPr>
+                </a:tc>
+                <a:tc>
+                  <a:txBody>
+                    <a:bodyPr wrap="square"/>
+                    <a:lstStyle/>
+                    <a:p>
+                      <a:pPr algn="l"/>
+                      <a:r>
+                        <a:rPr sz="1100" b="0" i="0">
+                          <a:solidFill>
+                            <a:srgbClr val="0F172A"/>
+                          </a:solidFill>
+                          <a:latin typeface="Arial"/>
+                        </a:rPr>
+                        <a:t>5 trades in 304 decisions, CLV $ −$1 = never trading (deterministic agent: 53 trades, −$19)</a:t>
+                      </a:r>
+                    </a:p>
+                  </a:txBody>
+                  <a:tcPr marL="73152" marR="73152" marT="36576" marB="36576" anchor="ctr">
+                    <a:solidFill>
+                      <a:srgbClr val="FFFFFF"/>
+                    </a:solidFill>
+                  </a:tcPr>
+                </a:tc>
+              </a:tr>
+              <a:tr h="429768">
+                <a:tc>
+                  <a:txBody>
+                    <a:bodyPr wrap="square"/>
+                    <a:lstStyle/>
+                    <a:p>
+                      <a:pPr algn="l"/>
+                      <a:r>
+                        <a:rPr sz="1100" b="1" i="0">
                           <a:solidFill>
                             <a:srgbClr val="0F172A"/>
                           </a:solidFill>
@@ -5799,13 +6225,13 @@
                     <a:p>
                       <a:pPr algn="l"/>
                       <a:r>
-                        <a:rPr sz="1200" b="0" i="0">
+                        <a:rPr sz="1100" b="0" i="0">
                           <a:solidFill>
                             <a:srgbClr val="0F172A"/>
                           </a:solidFill>
                           <a:latin typeface="Arial"/>
                         </a:rPr>
-                        <a:t>LLM picks as-of tools; code checks every number; a sceptic asks “already priced in?”</a:t>
+                        <a:t>Picks as-of tools; code checks numbers; sceptic can veto</a:t>
                       </a:r>
                     </a:p>
                   </a:txBody>
@@ -5822,220 +6248,7 @@
                     <a:p>
                       <a:pPr algn="l"/>
                       <a:r>
-                        <a:rPr sz="1200" b="0" i="0">
-                          <a:solidFill>
-                            <a:srgbClr val="0F172A"/>
-                          </a:solidFill>
-                          <a:latin typeface="Arial"/>
-                        </a:rPr>
-                        <a:t>Not scored (API quota); all 32 valid calls passed</a:t>
-                      </a:r>
-                    </a:p>
-                  </a:txBody>
-                  <a:tcPr marL="73152" marR="73152" marT="36576" marB="36576" anchor="ctr">
-                    <a:solidFill>
-                      <a:srgbClr val="F1F5F9"/>
-                    </a:solidFill>
-                  </a:tcPr>
-                </a:tc>
-              </a:tr>
-              <a:tr h="502920">
-                <a:tc>
-                  <a:txBody>
-                    <a:bodyPr wrap="square"/>
-                    <a:lstStyle/>
-                    <a:p>
-                      <a:pPr algn="l"/>
-                      <a:r>
-                        <a:rPr sz="1200" b="1" i="0">
-                          <a:solidFill>
-                            <a:srgbClr val="0F172A"/>
-                          </a:solidFill>
-                          <a:latin typeface="Arial"/>
-                        </a:rPr>
-                        <a:t>Gate audit + placebo</a:t>
-                      </a:r>
-                    </a:p>
-                  </a:txBody>
-                  <a:tcPr marL="73152" marR="73152" marT="36576" marB="36576" anchor="ctr">
-                    <a:solidFill>
-                      <a:srgbClr val="FFFFFF"/>
-                    </a:solidFill>
-                  </a:tcPr>
-                </a:tc>
-                <a:tc>
-                  <a:txBody>
-                    <a:bodyPr wrap="square"/>
-                    <a:lstStyle/>
-                    <a:p>
-                      <a:pPr algn="l"/>
-                      <a:r>
-                        <a:rPr sz="1200" b="0" i="0">
-                          <a:solidFill>
-                            <a:srgbClr val="0F172A"/>
-                          </a:solidFill>
-                          <a:latin typeface="Arial"/>
-                        </a:rPr>
-                        <a:t>Rule gate on held-out days; reviewer vs random rules</a:t>
-                      </a:r>
-                    </a:p>
-                  </a:txBody>
-                  <a:tcPr marL="73152" marR="73152" marT="36576" marB="36576" anchor="ctr">
-                    <a:solidFill>
-                      <a:srgbClr val="FFFFFF"/>
-                    </a:solidFill>
-                  </a:tcPr>
-                </a:tc>
-                <a:tc>
-                  <a:txBody>
-                    <a:bodyPr wrap="square"/>
-                    <a:lstStyle/>
-                    <a:p>
-                      <a:pPr algn="l"/>
-                      <a:r>
-                        <a:rPr sz="1200" b="0" i="0">
-                          <a:solidFill>
-                            <a:srgbClr val="0F172A"/>
-                          </a:solidFill>
-                          <a:latin typeface="Arial"/>
-                        </a:rPr>
-                        <a:t>Random rules pass as often (57% vs 57%)</a:t>
-                      </a:r>
-                    </a:p>
-                  </a:txBody>
-                  <a:tcPr marL="73152" marR="73152" marT="36576" marB="36576" anchor="ctr">
-                    <a:solidFill>
-                      <a:srgbClr val="FFFFFF"/>
-                    </a:solidFill>
-                  </a:tcPr>
-                </a:tc>
-              </a:tr>
-              <a:tr h="502920">
-                <a:tc>
-                  <a:txBody>
-                    <a:bodyPr wrap="square"/>
-                    <a:lstStyle/>
-                    <a:p>
-                      <a:pPr algn="l"/>
-                      <a:r>
-                        <a:rPr sz="1200" b="1" i="0">
-                          <a:solidFill>
-                            <a:srgbClr val="0F172A"/>
-                          </a:solidFill>
-                          <a:latin typeface="Arial"/>
-                        </a:rPr>
-                        <a:t>Kill switch</a:t>
-                      </a:r>
-                    </a:p>
-                  </a:txBody>
-                  <a:tcPr marL="73152" marR="73152" marT="36576" marB="36576" anchor="ctr">
-                    <a:solidFill>
-                      <a:srgbClr val="F1F5F9"/>
-                    </a:solidFill>
-                  </a:tcPr>
-                </a:tc>
-                <a:tc>
-                  <a:txBody>
-                    <a:bodyPr wrap="square"/>
-                    <a:lstStyle/>
-                    <a:p>
-                      <a:pPr algn="l"/>
-                      <a:r>
-                        <a:rPr sz="1200" b="0" i="0">
-                          <a:solidFill>
-                            <a:srgbClr val="0F172A"/>
-                          </a:solidFill>
-                          <a:latin typeface="Arial"/>
-                        </a:rPr>
-                        <a:t>$100 daily realised-loss stop, enforced in the replay</a:t>
-                      </a:r>
-                    </a:p>
-                  </a:txBody>
-                  <a:tcPr marL="73152" marR="73152" marT="36576" marB="36576" anchor="ctr">
-                    <a:solidFill>
-                      <a:srgbClr val="F1F5F9"/>
-                    </a:solidFill>
-                  </a:tcPr>
-                </a:tc>
-                <a:tc>
-                  <a:txBody>
-                    <a:bodyPr wrap="square"/>
-                    <a:lstStyle/>
-                    <a:p>
-                      <a:pPr algn="l"/>
-                      <a:r>
-                        <a:rPr sz="1200" b="0" i="0">
-                          <a:solidFill>
-                            <a:srgbClr val="0F172A"/>
-                          </a:solidFill>
-                          <a:latin typeface="Arial"/>
-                        </a:rPr>
-                        <a:t>Never triggered (worst day −$54)</a:t>
-                      </a:r>
-                    </a:p>
-                  </a:txBody>
-                  <a:tcPr marL="73152" marR="73152" marT="36576" marB="36576" anchor="ctr">
-                    <a:solidFill>
-                      <a:srgbClr val="F1F5F9"/>
-                    </a:solidFill>
-                  </a:tcPr>
-                </a:tc>
-              </a:tr>
-              <a:tr h="502920">
-                <a:tc>
-                  <a:txBody>
-                    <a:bodyPr wrap="square"/>
-                    <a:lstStyle/>
-                    <a:p>
-                      <a:pPr algn="l"/>
-                      <a:r>
-                        <a:rPr sz="1200" b="1" i="0">
-                          <a:solidFill>
-                            <a:srgbClr val="0F172A"/>
-                          </a:solidFill>
-                          <a:latin typeface="Arial"/>
-                        </a:rPr>
-                        <a:t>Fractional Kelly</a:t>
-                      </a:r>
-                    </a:p>
-                  </a:txBody>
-                  <a:tcPr marL="73152" marR="73152" marT="36576" marB="36576" anchor="ctr">
-                    <a:solidFill>
-                      <a:srgbClr val="FFFFFF"/>
-                    </a:solidFill>
-                  </a:tcPr>
-                </a:tc>
-                <a:tc>
-                  <a:txBody>
-                    <a:bodyPr wrap="square"/>
-                    <a:lstStyle/>
-                    <a:p>
-                      <a:pPr algn="l"/>
-                      <a:r>
-                        <a:rPr sz="1200" b="0" i="0">
-                          <a:solidFill>
-                            <a:srgbClr val="0F172A"/>
-                          </a:solidFill>
-                          <a:latin typeface="Arial"/>
-                        </a:rPr>
-                        <a:t>¼-Kelly sizing, fee in the formula, vs flat $20</a:t>
-                      </a:r>
-                    </a:p>
-                  </a:txBody>
-                  <a:tcPr marL="73152" marR="73152" marT="36576" marB="36576" anchor="ctr">
-                    <a:solidFill>
-                      <a:srgbClr val="FFFFFF"/>
-                    </a:solidFill>
-                  </a:tcPr>
-                </a:tc>
-                <a:tc>
-                  <a:txBody>
-                    <a:bodyPr wrap="square"/>
-                    <a:lstStyle/>
-                    <a:p>
-                      <a:pPr algn="l"/>
-                      <a:r>
-                        <a:rPr sz="1200" b="0" i="1">
+                        <a:rPr sz="1100" b="0" i="1">
                           <a:solidFill>
                             <a:srgbClr val="64748B"/>
                           </a:solidFill>
@@ -6047,12 +6260,12 @@
                   </a:txBody>
                   <a:tcPr marL="73152" marR="73152" marT="36576" marB="36576" anchor="ctr">
                     <a:solidFill>
-                      <a:srgbClr val="FFFFFF"/>
+                      <a:srgbClr val="F1F5F9"/>
                     </a:solidFill>
                   </a:tcPr>
                 </a:tc>
               </a:tr>
-              <a:tr h="502920">
+              <a:tr h="429768">
                 <a:tc>
                   <a:txBody>
                     <a:bodyPr wrap="square"/>
@@ -6060,78 +6273,7 @@
                     <a:p>
                       <a:pPr algn="l"/>
                       <a:r>
-                        <a:rPr sz="1200" b="1" i="0">
-                          <a:solidFill>
-                            <a:srgbClr val="0F172A"/>
-                          </a:solidFill>
-                          <a:latin typeface="Arial"/>
-                        </a:rPr>
-                        <a:t>Coach, simulated users</a:t>
-                      </a:r>
-                    </a:p>
-                  </a:txBody>
-                  <a:tcPr marL="73152" marR="73152" marT="36576" marB="36576" anchor="ctr">
-                    <a:solidFill>
-                      <a:srgbClr val="F1F5F9"/>
-                    </a:solidFill>
-                  </a:tcPr>
-                </a:tc>
-                <a:tc>
-                  <a:txBody>
-                    <a:bodyPr wrap="square"/>
-                    <a:lstStyle/>
-                    <a:p>
-                      <a:pPr algn="l"/>
-                      <a:r>
-                        <a:rPr sz="1200" b="0" i="0">
-                          <a:solidFill>
-                            <a:srgbClr val="0F172A"/>
-                          </a:solidFill>
-                          <a:latin typeface="Arial"/>
-                        </a:rPr>
-                        <a:t>Biased personas play League slates with and without Coach nudges</a:t>
-                      </a:r>
-                    </a:p>
-                  </a:txBody>
-                  <a:tcPr marL="73152" marR="73152" marT="36576" marB="36576" anchor="ctr">
-                    <a:solidFill>
-                      <a:srgbClr val="F1F5F9"/>
-                    </a:solidFill>
-                  </a:tcPr>
-                </a:tc>
-                <a:tc>
-                  <a:txBody>
-                    <a:bodyPr wrap="square"/>
-                    <a:lstStyle/>
-                    <a:p>
-                      <a:pPr algn="l"/>
-                      <a:r>
-                        <a:rPr sz="1200" b="0" i="0">
-                          <a:solidFill>
-                            <a:srgbClr val="0F172A"/>
-                          </a:solidFill>
-                          <a:latin typeface="Arial"/>
-                        </a:rPr>
-                        <a:t>Users trade less, lose less CLV; per-trade CLV no better</a:t>
-                      </a:r>
-                    </a:p>
-                  </a:txBody>
-                  <a:tcPr marL="73152" marR="73152" marT="36576" marB="36576" anchor="ctr">
-                    <a:solidFill>
-                      <a:srgbClr val="F1F5F9"/>
-                    </a:solidFill>
-                  </a:tcPr>
-                </a:tc>
-              </a:tr>
-              <a:tr h="502920">
-                <a:tc>
-                  <a:txBody>
-                    <a:bodyPr wrap="square"/>
-                    <a:lstStyle/>
-                    <a:p>
-                      <a:pPr algn="l"/>
-                      <a:r>
-                        <a:rPr sz="1200" b="1" i="0">
+                        <a:rPr sz="1100" b="1" i="0">
                           <a:solidFill>
                             <a:srgbClr val="0F172A"/>
                           </a:solidFill>
@@ -6154,13 +6296,13 @@
                     <a:p>
                       <a:pPr algn="l"/>
                       <a:r>
-                        <a:rPr sz="1200" b="0" i="0">
+                        <a:rPr sz="1100" b="0" i="0">
                           <a:solidFill>
                             <a:srgbClr val="0F172A"/>
                           </a:solidFill>
                           <a:latin typeface="Arial"/>
                         </a:rPr>
-                        <a:t>Supervisor graph: pregame → trader → coach → briefs for one night</a:t>
+                        <a:t>Pregame → trader → Coach → briefs, one as-of time</a:t>
                       </a:r>
                     </a:p>
                   </a:txBody>
@@ -6177,13 +6319,13 @@
                     <a:p>
                       <a:pPr algn="l"/>
                       <a:r>
-                        <a:rPr sz="1200" b="0" i="1">
+                        <a:rPr sz="1100" b="0" i="0">
                           <a:solidFill>
-                            <a:srgbClr val="64748B"/>
+                            <a:srgbClr val="0F172A"/>
                           </a:solidFill>
                           <a:latin typeface="Arial"/>
                         </a:rPr>
-                        <a:t>pending</a:t>
+                        <a:t>Built and tested (diagram); no new trading evaluation</a:t>
                       </a:r>
                     </a:p>
                   </a:txBody>
@@ -6194,7 +6336,7 @@
                   </a:tcPr>
                 </a:tc>
               </a:tr>
-              <a:tr h="502920">
+              <a:tr h="429768">
                 <a:tc>
                   <a:txBody>
                     <a:bodyPr wrap="square"/>
@@ -6202,7 +6344,7 @@
                     <a:p>
                       <a:pPr algn="l"/>
                       <a:r>
-                        <a:rPr sz="1200" b="1" i="0">
+                        <a:rPr sz="1100" b="1" i="0">
                           <a:solidFill>
                             <a:srgbClr val="0F172A"/>
                           </a:solidFill>
@@ -6225,13 +6367,13 @@
                     <a:p>
                       <a:pPr algn="l"/>
                       <a:r>
-                        <a:rPr sz="1200" b="0" i="0">
+                        <a:rPr sz="1100" b="0" i="0">
                           <a:solidFill>
                             <a:srgbClr val="0F172A"/>
                           </a:solidFill>
                           <a:latin typeface="Arial"/>
                         </a:rPr>
-                        <a:t>Trade / pass classifier on as-of features, chosen on Nov–Jan only</a:t>
+                        <a:t>Trade / pass model, selected on Nov–Jan</a:t>
                       </a:r>
                     </a:p>
                   </a:txBody>
@@ -6248,13 +6390,13 @@
                     <a:p>
                       <a:pPr algn="l"/>
                       <a:r>
-                        <a:rPr sz="1200" b="0" i="1">
+                        <a:rPr sz="1100" b="0" i="0">
                           <a:solidFill>
-                            <a:srgbClr val="64748B"/>
+                            <a:srgbClr val="0F172A"/>
                           </a:solidFill>
                           <a:latin typeface="Arial"/>
                         </a:rPr>
-                        <a:t>pending</a:t>
+                        <a:t>Selection chose never trade; test not scored</a:t>
                       </a:r>
                     </a:p>
                   </a:txBody>
@@ -6265,7 +6407,7 @@
                   </a:tcPr>
                 </a:tc>
               </a:tr>
-              <a:tr h="502920">
+              <a:tr h="429768">
                 <a:tc>
                   <a:txBody>
                     <a:bodyPr wrap="square"/>
@@ -6273,13 +6415,13 @@
                     <a:p>
                       <a:pPr algn="l"/>
                       <a:r>
-                        <a:rPr sz="1200" b="1" i="0">
+                        <a:rPr sz="1100" b="1" i="0">
                           <a:solidFill>
                             <a:srgbClr val="0F172A"/>
                           </a:solidFill>
                           <a:latin typeface="Arial"/>
                         </a:rPr>
-                        <a:t>Rule DSL</a:t>
+                        <a:t>Rule DSL + memory</a:t>
                       </a:r>
                     </a:p>
                   </a:txBody>
@@ -6296,13 +6438,13 @@
                     <a:p>
                       <a:pPr algn="l"/>
                       <a:r>
-                        <a:rPr sz="1200" b="0" i="0">
+                        <a:rPr sz="1100" b="0" i="0">
                           <a:solidFill>
                             <a:srgbClr val="0F172A"/>
                           </a:solidFill>
                           <a:latin typeface="Arial"/>
                         </a:rPr>
-                        <a:t>LLM writes free-form rules, compiled to a safe DSL, still gated</a:t>
+                        <a:t>LLM rules in a safe DSL; recall of similar past trades</a:t>
                       </a:r>
                     </a:p>
                   </a:txBody>
@@ -6319,90 +6461,19 @@
                     <a:p>
                       <a:pPr algn="l"/>
                       <a:r>
-                        <a:rPr sz="1200" b="0" i="1">
+                        <a:rPr sz="1100" b="0" i="0">
                           <a:solidFill>
-                            <a:srgbClr val="64748B"/>
+                            <a:srgbClr val="0F172A"/>
                           </a:solidFill>
                           <a:latin typeface="Arial"/>
                         </a:rPr>
-                        <a:t>pending</a:t>
+                        <a:t>Built and unit-tested; not evaluated</a:t>
                       </a:r>
                     </a:p>
                   </a:txBody>
                   <a:tcPr marL="73152" marR="73152" marT="36576" marB="36576" anchor="ctr">
                     <a:solidFill>
                       <a:srgbClr val="FFFFFF"/>
-                    </a:solidFill>
-                  </a:tcPr>
-                </a:tc>
-              </a:tr>
-              <a:tr h="502920">
-                <a:tc>
-                  <a:txBody>
-                    <a:bodyPr wrap="square"/>
-                    <a:lstStyle/>
-                    <a:p>
-                      <a:pPr algn="l"/>
-                      <a:r>
-                        <a:rPr sz="1200" b="1" i="0">
-                          <a:solidFill>
-                            <a:srgbClr val="0F172A"/>
-                          </a:solidFill>
-                          <a:latin typeface="Arial"/>
-                        </a:rPr>
-                        <a:t>Episodic memory</a:t>
-                      </a:r>
-                    </a:p>
-                  </a:txBody>
-                  <a:tcPr marL="73152" marR="73152" marT="36576" marB="36576" anchor="ctr">
-                    <a:solidFill>
-                      <a:srgbClr val="F1F5F9"/>
-                    </a:solidFill>
-                  </a:tcPr>
-                </a:tc>
-                <a:tc>
-                  <a:txBody>
-                    <a:bodyPr wrap="square"/>
-                    <a:lstStyle/>
-                    <a:p>
-                      <a:pPr algn="l"/>
-                      <a:r>
-                        <a:rPr sz="1200" b="0" i="0">
-                          <a:solidFill>
-                            <a:srgbClr val="0F172A"/>
-                          </a:solidFill>
-                          <a:latin typeface="Arial"/>
-                        </a:rPr>
-                        <a:t>Retrieve similar past situations and their outcomes</a:t>
-                      </a:r>
-                    </a:p>
-                  </a:txBody>
-                  <a:tcPr marL="73152" marR="73152" marT="36576" marB="36576" anchor="ctr">
-                    <a:solidFill>
-                      <a:srgbClr val="F1F5F9"/>
-                    </a:solidFill>
-                  </a:tcPr>
-                </a:tc>
-                <a:tc>
-                  <a:txBody>
-                    <a:bodyPr wrap="square"/>
-                    <a:lstStyle/>
-                    <a:p>
-                      <a:pPr algn="l"/>
-                      <a:r>
-                        <a:rPr sz="1200" b="0" i="1">
-                          <a:solidFill>
-                            <a:srgbClr val="64748B"/>
-                          </a:solidFill>
-                          <a:latin typeface="Arial"/>
-                        </a:rPr>
-                        <a:t>pending</a:t>
-                      </a:r>
-                    </a:p>
-                  </a:txBody>
-                  <a:tcPr marL="73152" marR="73152" marT="36576" marB="36576" anchor="ctr">
-                    <a:solidFill>
-                      <a:srgbClr val="F1F5F9"/>
                     </a:solidFill>
                   </a:tcPr>
                 </a:tc>
@@ -6427,8 +6498,8 @@
         </p:blipFill>
         <p:spPr>
           <a:xfrm>
-            <a:off x="8412480" y="2702436"/>
-            <a:ext cx="3322015" cy="1727447"/>
+            <a:off x="8732520" y="2282726"/>
+            <a:ext cx="3001975" cy="1561027"/>
           </a:xfrm>
           <a:prstGeom prst="rect">
             <a:avLst/>
@@ -6443,8 +6514,8 @@
         </p:nvSpPr>
         <p:spPr>
           <a:xfrm>
-            <a:off x="457200" y="6080760"/>
-            <a:ext cx="11277295" cy="274320"/>
+            <a:off x="8732520" y="5074920"/>
+            <a:ext cx="3001975" cy="502920"/>
           </a:xfrm>
           <a:prstGeom prst="rect">
             <a:avLst/>
@@ -6463,13 +6534,98 @@
               </a:spcAft>
             </a:pPr>
             <a:r>
-              <a:rPr sz="1200" b="0" i="0">
+              <a:rPr sz="1100" b="0" i="0">
                 <a:solidFill>
                   <a:srgbClr val="64748B"/>
                 </a:solidFill>
                 <a:latin typeface="Arial"/>
               </a:rPr>
-              <a:t>Pre-registered before scoring (docs/preregistration_*.md); same replay, costs and bootstrap as above</a:t>
+              <a:t>Pre-registered before scoring; same replay, costs and day-clustered bootstrap as above</a:t>
+            </a:r>
+          </a:p>
+        </p:txBody>
+      </p:sp>
+      <p:sp>
+        <p:nvSpPr>
+          <p:cNvPr id="10" name="Rounded Rectangle 9"/>
+          <p:cNvSpPr/>
+          <p:nvPr/>
+        </p:nvSpPr>
+        <p:spPr>
+          <a:xfrm>
+            <a:off x="457200" y="5815584"/>
+            <a:ext cx="11277295" cy="512064"/>
+          </a:xfrm>
+          <a:prstGeom prst="roundRect">
+            <a:avLst>
+              <a:gd name="adj" fmla="val 12000"/>
+            </a:avLst>
+          </a:prstGeom>
+          <a:solidFill>
+            <a:srgbClr val="FEF3C7"/>
+          </a:solidFill>
+          <a:ln>
+            <a:noFill/>
+          </a:ln>
+          <a:effectLst/>
+        </p:spPr>
+        <p:style>
+          <a:lnRef idx="1">
+            <a:schemeClr val="accent1"/>
+          </a:lnRef>
+          <a:fillRef idx="3">
+            <a:schemeClr val="accent1"/>
+          </a:fillRef>
+          <a:effectRef idx="2">
+            <a:schemeClr val="accent1"/>
+          </a:effectRef>
+          <a:fontRef idx="minor">
+            <a:schemeClr val="lt1"/>
+          </a:fontRef>
+        </p:style>
+        <p:txBody>
+          <a:bodyPr rtlCol="0" anchor="ctr"/>
+          <a:lstStyle/>
+          <a:p>
+            <a:pPr algn="ctr"/>
+          </a:p>
+        </p:txBody>
+      </p:sp>
+      <p:sp>
+        <p:nvSpPr>
+          <p:cNvPr id="11" name="TextBox 10"/>
+          <p:cNvSpPr txBox="1"/>
+          <p:nvPr/>
+        </p:nvSpPr>
+        <p:spPr>
+          <a:xfrm>
+            <a:off x="548640" y="5815584"/>
+            <a:ext cx="11094415" cy="512064"/>
+          </a:xfrm>
+          <a:prstGeom prst="rect">
+            <a:avLst/>
+          </a:prstGeom>
+          <a:noFill/>
+        </p:spPr>
+        <p:txBody>
+          <a:bodyPr wrap="square" anchor="ctr" lIns="73152" rIns="73152" tIns="36576" bIns="36576">
+            <a:spAutoFit/>
+          </a:bodyPr>
+          <a:lstStyle/>
+          <a:p>
+            <a:pPr algn="l">
+              <a:spcAft>
+                <a:spcPts val="0"/>
+              </a:spcAft>
+            </a:pPr>
+            <a:r>
+              <a:rPr sz="1400" b="0" i="0">
+                <a:solidFill>
+                  <a:srgbClr val="0F172A"/>
+                </a:solidFill>
+                <a:latin typeface="Arial"/>
+              </a:rPr>
+              <a:t>Every agentic upgrade, graded by the market, converges on the same answer: trade less. The market is hard to beat after fees, which is exactly why the product is education, not a trading bot.</a:t>
             </a:r>
           </a:p>
         </p:txBody>
@@ -12041,7 +12197,7 @@
                           </a:solidFill>
                           <a:latin typeface="Arial"/>
                         </a:rPr>
-                        <a:t>LLM agent, Coach, policy …</a:t>
+                        <a:t>LLM agent, Coach, gate audit …</a:t>
                       </a:r>
                     </a:p>
                   </a:txBody>
@@ -12081,13 +12237,13 @@
                     <a:p>
                       <a:pPr algn="l"/>
                       <a:r>
-                        <a:rPr sz="1600" b="0" i="0">
+                        <a:rPr sz="1600" b="1" i="0">
                           <a:solidFill>
                             <a:srgbClr val="0F172A"/>
                           </a:solidFill>
                           <a:latin typeface="Arial"/>
                         </a:rPr>
-                        <a:t>See agentic upgrades</a:t>
+                        <a:t>Help only by trading less</a:t>
                       </a:r>
                     </a:p>
                   </a:txBody>

--- a/presentation/nba_agent_deck.pptx
+++ b/presentation/nba_agent_deck.pptx
@@ -796,7 +796,7 @@
           <a:lstStyle/>
           <a:p>
             <a:r>
-              <a:t>The work is split across the team. The pregame news loop polls several news sources before a game and turns them into fair odds, pull request 7. The player-feature experiment tested isolated player features and probability calibration, pull request 8. In-play news and odds updates are pull request 9. Live, read-only Polymarket prices are pull requests 11 and 12. The replay, the agent, the models M4 and M6, the evaluation, the Coach and the League are on our main branch. Each part had to face the same market grade.</a:t>
+              <a:t>Why an agent and not one classifier? The problem is event-driven: news arrives at random times and 91% of the move comes before the inactive list, about two-thirds before the first official report, so the hard decision is when to act; the agent's trigger, investigate, decide loop makes that decision. It uses tools over as-of data, prices, news, rotations and models, and the tools enforce no look-ahead. Decisions are multi-step with code checks, risk caps and a kill switch, which matters for gambling harm. Learning is graded by the market through the gate, and the placebo shows honestly that it works by trading less. The Coach and League turn the analysis into education, and the orchestrator ties the team's parts together. The counter-argument, a single classifier would do, is answered by our own data: the model alone loses −$2,475 over 711 trades; the decision process around it, anchoring, thresholds and abstention, adds +$2,450, p 0.002. The work is split across the team. The pregame news loop polls several news sources before a game and turns them into fair odds, pull request 7. The player-feature experiment tested isolated player features and probability calibration, pull request 8. In-play news and odds updates are pull request 9. Live, read-only Polymarket prices are pull requests 11 and 12. The replay, the agent, the models M4 and M6, the evaluation, the Coach and the League are on our main branch. Each part had to face the same market grade.</a:t>
             </a:r>
           </a:p>
         </p:txBody>
@@ -1496,7 +1496,7 @@
           <a:lstStyle/>
           <a:p>
             <a:r>
-              <a:t>Our deep-learning component is M6. Its label is the market itself: the move of the home price from the decision time to tip-off, so every decision time is a training row. A 16-unit GRU reads the last six hours of the price in 15-minute steps; it is joined with 18 static features such as the anchor, the clock, M4's news shift and who is out, and an MLP outputs the 10th, 50th and 90th percentiles, trained with pinball loss. It cannot beat “the price won't move”: 0.867 against 0.833 cents. To check that this is not a tuning accident, we ran a pre-declared grid of 9 configurations, GRU sizes, history lengths, an MLP and a CNN, with 3 seeds each: every one is worse than zero move, all 18 of 18 confidence intervals above zero, and none ever predicts the 5.5¢ move needed to pay for a trade. Recalibrating the win model does not help either: Brier 0.183 raw, 0.185 Platt, 0.184 isotonic, against 0.164 for the market, because its miscalibration flips between early and late season.</a:t>
+              <a:t>Deep learning sits in four places. M2 is a GRU over each player's last 20 games giving points and minutes quantiles; it beats gradient boosting, pinball 1.55 against 1.59. M4-NN is a neural win model on M4's features and split: alone it ties logistic regression, Brier 0.184 against 0.183, because 3,400 games is too few for capacity to pay, but plugged into the agent's anchor its news shift gives 0.163, level with the market, not significantly better. The LLM agent is a transformer used as a reasoning policy with tools and code guardrails. M6 is the fourth. Its label is the market itself: the move of the home price from the decision time to tip-off, so every decision time is a training row. A 16-unit GRU reads the last six hours of the price in 15-minute steps; it is joined with 18 static features such as the anchor, the clock, M4's news shift and who is out, and an MLP outputs the 10th, 50th and 90th percentiles, trained with pinball loss. It cannot beat “the price won't move”: 0.867 against 0.833 cents. To check that this is not a tuning accident, we ran a pre-declared grid of 9 configurations, GRU sizes, history lengths, an MLP and a CNN, with 3 seeds each: every one is worse than zero move, all 18 of 18 confidence intervals above zero, and none ever predicts the 5.5¢ move needed to pay for a trade. Recalibrating the win model does not help either: Brier 0.183 raw, 0.185 Platt, 0.184 isotonic, against 0.164 for the market, because its miscalibration flips between early and late season.</a:t>
             </a:r>
           </a:p>
         </p:txBody>
@@ -7804,7 +7804,7 @@
                 </a:solidFill>
                 <a:latin typeface="Arial"/>
               </a:rPr>
-              <a:t>Team contributions</a:t>
+              <a:t>Why an agentic framework, and who built which part</a:t>
             </a:r>
           </a:p>
         </p:txBody>
@@ -7887,17 +7887,186 @@
           </a:p>
         </p:txBody>
       </p:sp>
+      <p:sp>
+        <p:nvSpPr>
+          <p:cNvPr id="7" name="TextBox 6"/>
+          <p:cNvSpPr txBox="1"/>
+          <p:nvPr/>
+        </p:nvSpPr>
+        <p:spPr>
+          <a:xfrm>
+            <a:off x="457200" y="1143000"/>
+            <a:ext cx="5760720" cy="4206240"/>
+          </a:xfrm>
+          <a:prstGeom prst="rect">
+            <a:avLst/>
+          </a:prstGeom>
+          <a:noFill/>
+        </p:spPr>
+        <p:txBody>
+          <a:bodyPr wrap="square" anchor="t" lIns="73152" rIns="73152" tIns="36576" bIns="36576">
+            <a:spAutoFit/>
+          </a:bodyPr>
+          <a:lstStyle/>
+          <a:p>
+            <a:pPr algn="l">
+              <a:spcAft>
+                <a:spcPts val="400"/>
+              </a:spcAft>
+            </a:pPr>
+            <a:r>
+              <a:rPr sz="1500" b="1" i="0">
+                <a:solidFill>
+                  <a:srgbClr val="1E293B"/>
+                </a:solidFill>
+                <a:latin typeface="Arial"/>
+              </a:rPr>
+              <a:t>Why agentic: the problem's structure</a:t>
+            </a:r>
+          </a:p>
+          <a:p>
+            <a:pPr algn="l" marL="292608" indent="-256032">
+              <a:spcAft>
+                <a:spcPts val="400"/>
+              </a:spcAft>
+              <a:buChar char="•"/>
+            </a:pPr>
+            <a:r>
+              <a:rPr sz="1500" b="1" i="0">
+                <a:solidFill>
+                  <a:srgbClr val="0F172A"/>
+                </a:solidFill>
+                <a:latin typeface="Arial"/>
+              </a:rPr>
+              <a:t>When to act:</a:t>
+            </a:r>
+            <a:r>
+              <a:rPr sz="1500" b="0" i="0">
+                <a:solidFill>
+                  <a:srgbClr val="0F172A"/>
+                </a:solidFill>
+                <a:latin typeface="Arial"/>
+              </a:rPr>
+              <a:t> news is asynchronous; 91% of the move before the inactive list, ~⅔ before the first report → trigger → investigate → decide</a:t>
+            </a:r>
+          </a:p>
+          <a:p>
+            <a:pPr algn="l" marL="292608" indent="-256032">
+              <a:spcAft>
+                <a:spcPts val="400"/>
+              </a:spcAft>
+              <a:buChar char="•"/>
+            </a:pPr>
+            <a:r>
+              <a:rPr sz="1500" b="1" i="0">
+                <a:solidFill>
+                  <a:srgbClr val="0F172A"/>
+                </a:solidFill>
+                <a:latin typeface="Arial"/>
+              </a:rPr>
+              <a:t>Tools over as-of data:</a:t>
+            </a:r>
+            <a:r>
+              <a:rPr sz="1500" b="0" i="0">
+                <a:solidFill>
+                  <a:srgbClr val="0F172A"/>
+                </a:solidFill>
+                <a:latin typeface="Arial"/>
+              </a:rPr>
+              <a:t> prices, news, rotations, models; no look-ahead</a:t>
+            </a:r>
+          </a:p>
+          <a:p>
+            <a:pPr algn="l" marL="292608" indent="-256032">
+              <a:spcAft>
+                <a:spcPts val="400"/>
+              </a:spcAft>
+              <a:buChar char="•"/>
+            </a:pPr>
+            <a:r>
+              <a:rPr sz="1500" b="1" i="0">
+                <a:solidFill>
+                  <a:srgbClr val="0F172A"/>
+                </a:solidFill>
+                <a:latin typeface="Arial"/>
+              </a:rPr>
+              <a:t>Multi-step + safety:</a:t>
+            </a:r>
+            <a:r>
+              <a:rPr sz="1500" b="0" i="0">
+                <a:solidFill>
+                  <a:srgbClr val="0F172A"/>
+                </a:solidFill>
+                <a:latin typeface="Arial"/>
+              </a:rPr>
+              <a:t> checks, risk caps, kill switch, blocked orders</a:t>
+            </a:r>
+          </a:p>
+          <a:p>
+            <a:pPr algn="l" marL="292608" indent="-256032">
+              <a:spcAft>
+                <a:spcPts val="400"/>
+              </a:spcAft>
+              <a:buChar char="•"/>
+            </a:pPr>
+            <a:r>
+              <a:rPr sz="1500" b="1" i="0">
+                <a:solidFill>
+                  <a:srgbClr val="0F172A"/>
+                </a:solidFill>
+                <a:latin typeface="Arial"/>
+              </a:rPr>
+              <a:t>Market-graded learning:</a:t>
+            </a:r>
+            <a:r>
+              <a:rPr sz="1500" b="0" i="0">
+                <a:solidFill>
+                  <a:srgbClr val="0F172A"/>
+                </a:solidFill>
+                <a:latin typeface="Arial"/>
+              </a:rPr>
+              <a:t> review → gate → rules; placebo-audited</a:t>
+            </a:r>
+          </a:p>
+          <a:p>
+            <a:pPr algn="l" marL="292608" indent="-256032">
+              <a:spcAft>
+                <a:spcPts val="400"/>
+              </a:spcAft>
+              <a:buChar char="•"/>
+            </a:pPr>
+            <a:r>
+              <a:rPr sz="1500" b="1" i="0">
+                <a:solidFill>
+                  <a:srgbClr val="0F172A"/>
+                </a:solidFill>
+                <a:latin typeface="Arial"/>
+              </a:rPr>
+              <a:t>Human in the loop:</a:t>
+            </a:r>
+            <a:r>
+              <a:rPr sz="1500" b="0" i="0">
+                <a:solidFill>
+                  <a:srgbClr val="0F172A"/>
+                </a:solidFill>
+                <a:latin typeface="Arial"/>
+              </a:rPr>
+              <a:t> Coach and League teach; orchestrator joins the team's parts</a:t>
+            </a:r>
+          </a:p>
+        </p:txBody>
+      </p:sp>
       <p:graphicFrame>
         <p:nvGraphicFramePr>
-          <p:cNvPr id="7" name="Table 6"/>
+          <p:cNvPr id="8" name="Table 7"/>
           <p:cNvGraphicFramePr>
             <a:graphicFrameLocks noGrp="1"/>
           </p:cNvGraphicFramePr>
           <p:nvPr/>
         </p:nvGraphicFramePr>
         <p:xfrm>
-          <a:off x="457200" y="1234439"/>
-          <a:ext cx="11277295" cy="3730752"/>
+          <a:off x="6400800" y="1143000"/>
+          <a:ext cx="5333695" cy="3200400"/>
         </p:xfrm>
         <a:graphic>
           <a:graphicData uri="http://schemas.openxmlformats.org/drawingml/2006/table">
@@ -7906,12 +8075,11 @@
                 <a:tableStyleId>{5C22544A-7EE6-4342-B048-85BDC9FD1C3A}</a:tableStyleId>
               </a:tblPr>
               <a:tblGrid>
-                <a:gridCol w="3017520"/>
-                <a:gridCol w="1097280"/>
-                <a:gridCol w="2560320"/>
-                <a:gridCol w="4602175"/>
+                <a:gridCol w="2743200"/>
+                <a:gridCol w="868680"/>
+                <a:gridCol w="1721815"/>
               </a:tblGrid>
-              <a:tr h="438912">
+              <a:tr h="365760">
                 <a:tc>
                   <a:txBody>
                     <a:bodyPr wrap="square"/>
@@ -7919,7 +8087,7 @@
                     <a:p>
                       <a:pPr algn="l"/>
                       <a:r>
-                        <a:rPr sz="1600" b="1" i="0">
+                        <a:rPr sz="1200" b="1" i="0">
                           <a:solidFill>
                             <a:srgbClr val="FFFFFF"/>
                           </a:solidFill>
@@ -7942,7 +8110,7 @@
                     <a:p>
                       <a:pPr algn="ctr"/>
                       <a:r>
-                        <a:rPr sz="1600" b="1" i="0">
+                        <a:rPr sz="1200" b="1" i="0">
                           <a:solidFill>
                             <a:srgbClr val="FFFFFF"/>
                           </a:solidFill>
@@ -7965,7 +8133,7 @@
                     <a:p>
                       <a:pPr algn="l"/>
                       <a:r>
-                        <a:rPr sz="1600" b="1" i="0">
+                        <a:rPr sz="1200" b="1" i="0">
                           <a:solidFill>
                             <a:srgbClr val="FFFFFF"/>
                           </a:solidFill>
@@ -7981,6 +8149,8 @@
                     </a:solidFill>
                   </a:tcPr>
                 </a:tc>
+              </a:tr>
+              <a:tr h="566928">
                 <a:tc>
                   <a:txBody>
                     <a:bodyPr wrap="square"/>
@@ -7988,32 +8158,7 @@
                     <a:p>
                       <a:pPr algn="l"/>
                       <a:r>
-                        <a:rPr sz="1600" b="1" i="0">
-                          <a:solidFill>
-                            <a:srgbClr val="FFFFFF"/>
-                          </a:solidFill>
-                          <a:latin typeface="Arial"/>
-                        </a:rPr>
-                        <a:t>What it adds</a:t>
-                      </a:r>
-                    </a:p>
-                  </a:txBody>
-                  <a:tcPr marL="73152" marR="73152" marT="36576" marB="36576" anchor="ctr">
-                    <a:solidFill>
-                      <a:srgbClr val="1E293B"/>
-                    </a:solidFill>
-                  </a:tcPr>
-                </a:tc>
-              </a:tr>
-              <a:tr h="658368">
-                <a:tc>
-                  <a:txBody>
-                    <a:bodyPr wrap="square"/>
-                    <a:lstStyle/>
-                    <a:p>
-                      <a:pPr algn="l"/>
-                      <a:r>
-                        <a:rPr sz="1600" b="0" i="0">
+                        <a:rPr sz="1200" b="0" i="0">
                           <a:solidFill>
                             <a:srgbClr val="0F172A"/>
                           </a:solidFill>
@@ -8036,7 +8181,7 @@
                     <a:p>
                       <a:pPr algn="ctr"/>
                       <a:r>
-                        <a:rPr sz="1600" b="0" i="0">
+                        <a:rPr sz="1200" b="0" i="0">
                           <a:solidFill>
                             <a:srgbClr val="0F172A"/>
                           </a:solidFill>
@@ -8059,7 +8204,7 @@
                     <a:p>
                       <a:pPr algn="l"/>
                       <a:r>
-                        <a:rPr sz="1600" b="0" i="0">
+                        <a:rPr sz="1200" b="0" i="0">
                           <a:solidFill>
                             <a:srgbClr val="0F172A"/>
                           </a:solidFill>
@@ -8075,6 +8220,8 @@
                     </a:solidFill>
                   </a:tcPr>
                 </a:tc>
+              </a:tr>
+              <a:tr h="566928">
                 <a:tc>
                   <a:txBody>
                     <a:bodyPr wrap="square"/>
@@ -8082,32 +8229,7 @@
                     <a:p>
                       <a:pPr algn="l"/>
                       <a:r>
-                        <a:rPr sz="1600" b="0" i="0">
-                          <a:solidFill>
-                            <a:srgbClr val="0F172A"/>
-                          </a:solidFill>
-                          <a:latin typeface="Arial"/>
-                        </a:rPr>
-                        <a:t>Multi-source news polling → fair odds</a:t>
-                      </a:r>
-                    </a:p>
-                  </a:txBody>
-                  <a:tcPr marL="73152" marR="73152" marT="36576" marB="36576" anchor="ctr">
-                    <a:solidFill>
-                      <a:srgbClr val="F1F5F9"/>
-                    </a:solidFill>
-                  </a:tcPr>
-                </a:tc>
-              </a:tr>
-              <a:tr h="658368">
-                <a:tc>
-                  <a:txBody>
-                    <a:bodyPr wrap="square"/>
-                    <a:lstStyle/>
-                    <a:p>
-                      <a:pPr algn="l"/>
-                      <a:r>
-                        <a:rPr sz="1600" b="0" i="0">
+                        <a:rPr sz="1200" b="0" i="0">
                           <a:solidFill>
                             <a:srgbClr val="0F172A"/>
                           </a:solidFill>
@@ -8130,7 +8252,7 @@
                     <a:p>
                       <a:pPr algn="ctr"/>
                       <a:r>
-                        <a:rPr sz="1600" b="0" i="0">
+                        <a:rPr sz="1200" b="0" i="0">
                           <a:solidFill>
                             <a:srgbClr val="0F172A"/>
                           </a:solidFill>
@@ -8153,7 +8275,7 @@
                     <a:p>
                       <a:pPr algn="l"/>
                       <a:r>
-                        <a:rPr sz="1600" b="0" i="0">
+                        <a:rPr sz="1200" b="0" i="0">
                           <a:solidFill>
                             <a:srgbClr val="0F172A"/>
                           </a:solidFill>
@@ -8169,6 +8291,8 @@
                     </a:solidFill>
                   </a:tcPr>
                 </a:tc>
+              </a:tr>
+              <a:tr h="566928">
                 <a:tc>
                   <a:txBody>
                     <a:bodyPr wrap="square"/>
@@ -8176,32 +8300,7 @@
                     <a:p>
                       <a:pPr algn="l"/>
                       <a:r>
-                        <a:rPr sz="1600" b="0" i="0">
-                          <a:solidFill>
-                            <a:srgbClr val="0F172A"/>
-                          </a:solidFill>
-                          <a:latin typeface="Arial"/>
-                        </a:rPr>
-                        <a:t>Isolated player features + probability calibration</a:t>
-                      </a:r>
-                    </a:p>
-                  </a:txBody>
-                  <a:tcPr marL="73152" marR="73152" marT="36576" marB="36576" anchor="ctr">
-                    <a:solidFill>
-                      <a:srgbClr val="FFFFFF"/>
-                    </a:solidFill>
-                  </a:tcPr>
-                </a:tc>
-              </a:tr>
-              <a:tr h="658368">
-                <a:tc>
-                  <a:txBody>
-                    <a:bodyPr wrap="square"/>
-                    <a:lstStyle/>
-                    <a:p>
-                      <a:pPr algn="l"/>
-                      <a:r>
-                        <a:rPr sz="1600" b="0" i="0">
+                        <a:rPr sz="1200" b="0" i="0">
                           <a:solidFill>
                             <a:srgbClr val="0F172A"/>
                           </a:solidFill>
@@ -8224,7 +8323,7 @@
                     <a:p>
                       <a:pPr algn="ctr"/>
                       <a:r>
-                        <a:rPr sz="1600" b="0" i="0">
+                        <a:rPr sz="1200" b="0" i="0">
                           <a:solidFill>
                             <a:srgbClr val="0F172A"/>
                           </a:solidFill>
@@ -8247,7 +8346,7 @@
                     <a:p>
                       <a:pPr algn="l"/>
                       <a:r>
-                        <a:rPr sz="1600" b="0" i="0">
+                        <a:rPr sz="1200" b="0" i="0">
                           <a:solidFill>
                             <a:srgbClr val="0F172A"/>
                           </a:solidFill>
@@ -8263,6 +8362,8 @@
                     </a:solidFill>
                   </a:tcPr>
                 </a:tc>
+              </a:tr>
+              <a:tr h="566928">
                 <a:tc>
                   <a:txBody>
                     <a:bodyPr wrap="square"/>
@@ -8270,32 +8371,7 @@
                     <a:p>
                       <a:pPr algn="l"/>
                       <a:r>
-                        <a:rPr sz="1600" b="0" i="0">
-                          <a:solidFill>
-                            <a:srgbClr val="0F172A"/>
-                          </a:solidFill>
-                          <a:latin typeface="Arial"/>
-                        </a:rPr>
-                        <a:t>Independent in-play updates (synthetic scenarios)</a:t>
-                      </a:r>
-                    </a:p>
-                  </a:txBody>
-                  <a:tcPr marL="73152" marR="73152" marT="36576" marB="36576" anchor="ctr">
-                    <a:solidFill>
-                      <a:srgbClr val="F1F5F9"/>
-                    </a:solidFill>
-                  </a:tcPr>
-                </a:tc>
-              </a:tr>
-              <a:tr h="658368">
-                <a:tc>
-                  <a:txBody>
-                    <a:bodyPr wrap="square"/>
-                    <a:lstStyle/>
-                    <a:p>
-                      <a:pPr algn="l"/>
-                      <a:r>
-                        <a:rPr sz="1600" b="0" i="0">
+                        <a:rPr sz="1200" b="0" i="0">
                           <a:solidFill>
                             <a:srgbClr val="0F172A"/>
                           </a:solidFill>
@@ -8318,7 +8394,7 @@
                     <a:p>
                       <a:pPr algn="ctr"/>
                       <a:r>
-                        <a:rPr sz="1600" b="0" i="0">
+                        <a:rPr sz="1200" b="0" i="0">
                           <a:solidFill>
                             <a:srgbClr val="0F172A"/>
                           </a:solidFill>
@@ -8341,7 +8417,7 @@
                     <a:p>
                       <a:pPr algn="l"/>
                       <a:r>
-                        <a:rPr sz="1600" b="0" i="0">
+                        <a:rPr sz="1200" b="0" i="0">
                           <a:solidFill>
                             <a:srgbClr val="0F172A"/>
                           </a:solidFill>
@@ -8357,6 +8433,8 @@
                     </a:solidFill>
                   </a:tcPr>
                 </a:tc>
+              </a:tr>
+              <a:tr h="566928">
                 <a:tc>
                   <a:txBody>
                     <a:bodyPr wrap="square"/>
@@ -8364,32 +8442,7 @@
                     <a:p>
                       <a:pPr algn="l"/>
                       <a:r>
-                        <a:rPr sz="1600" b="0" i="0">
-                          <a:solidFill>
-                            <a:srgbClr val="0F172A"/>
-                          </a:solidFill>
-                          <a:latin typeface="Arial"/>
-                        </a:rPr>
-                        <a:t>Read-only live prices and page</a:t>
-                      </a:r>
-                    </a:p>
-                  </a:txBody>
-                  <a:tcPr marL="73152" marR="73152" marT="36576" marB="36576" anchor="ctr">
-                    <a:solidFill>
-                      <a:srgbClr val="FFFFFF"/>
-                    </a:solidFill>
-                  </a:tcPr>
-                </a:tc>
-              </a:tr>
-              <a:tr h="658368">
-                <a:tc>
-                  <a:txBody>
-                    <a:bodyPr wrap="square"/>
-                    <a:lstStyle/>
-                    <a:p>
-                      <a:pPr algn="l"/>
-                      <a:r>
-                        <a:rPr sz="1600" b="0" i="0">
+                        <a:rPr sz="1200" b="0" i="0">
                           <a:solidFill>
                             <a:srgbClr val="0F172A"/>
                           </a:solidFill>
@@ -8412,7 +8465,7 @@
                     <a:p>
                       <a:pPr algn="ctr"/>
                       <a:r>
-                        <a:rPr sz="1600" b="0" i="0">
+                        <a:rPr sz="1200" b="0" i="0">
                           <a:solidFill>
                             <a:srgbClr val="0F172A"/>
                           </a:solidFill>
@@ -8435,7 +8488,7 @@
                     <a:p>
                       <a:pPr algn="l"/>
                       <a:r>
-                        <a:rPr sz="1600" b="0" i="0">
+                        <a:rPr sz="1200" b="0" i="0">
                           <a:solidFill>
                             <a:srgbClr val="0F172A"/>
                           </a:solidFill>
@@ -8451,29 +8504,6 @@
                     </a:solidFill>
                   </a:tcPr>
                 </a:tc>
-                <a:tc>
-                  <a:txBody>
-                    <a:bodyPr wrap="square"/>
-                    <a:lstStyle/>
-                    <a:p>
-                      <a:pPr algn="l"/>
-                      <a:r>
-                        <a:rPr sz="1600" b="0" i="0">
-                          <a:solidFill>
-                            <a:srgbClr val="0F172A"/>
-                          </a:solidFill>
-                          <a:latin typeface="Arial"/>
-                        </a:rPr>
-                        <a:t>As-of replay, M4 / M6, LangGraph agent, gate, walk-forward, Coach, League</a:t>
-                      </a:r>
-                    </a:p>
-                  </a:txBody>
-                  <a:tcPr marL="73152" marR="73152" marT="36576" marB="36576" anchor="ctr">
-                    <a:solidFill>
-                      <a:srgbClr val="F1F5F9"/>
-                    </a:solidFill>
-                  </a:tcPr>
-                </a:tc>
               </a:tr>
             </a:tbl>
           </a:graphicData>
@@ -8481,14 +8511,14 @@
       </p:graphicFrame>
       <p:sp>
         <p:nvSpPr>
-          <p:cNvPr id="8" name="Rounded Rectangle 7"/>
+          <p:cNvPr id="9" name="Rounded Rectangle 8"/>
           <p:cNvSpPr/>
           <p:nvPr/>
         </p:nvSpPr>
         <p:spPr>
           <a:xfrm>
-            <a:off x="457200" y="5440680"/>
-            <a:ext cx="11277295" cy="685800"/>
+            <a:off x="457200" y="5257800"/>
+            <a:ext cx="11277295" cy="960120"/>
           </a:xfrm>
           <a:prstGeom prst="roundRect">
             <a:avLst>
@@ -8527,14 +8557,14 @@
       </p:sp>
       <p:sp>
         <p:nvSpPr>
-          <p:cNvPr id="9" name="TextBox 8"/>
+          <p:cNvPr id="10" name="TextBox 9"/>
           <p:cNvSpPr txBox="1"/>
           <p:nvPr/>
         </p:nvSpPr>
         <p:spPr>
           <a:xfrm>
-            <a:off x="548640" y="5440680"/>
-            <a:ext cx="11094415" cy="685800"/>
+            <a:off x="548640" y="5257800"/>
+            <a:ext cx="11094415" cy="960120"/>
           </a:xfrm>
           <a:prstGeom prst="rect">
             <a:avLst/>
@@ -8553,13 +8583,13 @@
               </a:spcAft>
             </a:pPr>
             <a:r>
-              <a:rPr sz="1900" b="0" i="0">
+              <a:rPr sz="1700" b="0" i="0">
                 <a:solidFill>
                   <a:srgbClr val="0F172A"/>
                 </a:solidFill>
                 <a:latin typeface="Arial"/>
               </a:rPr>
-              <a:t>Every part is graded the same way: by the market's closing price</a:t>
+              <a:t>“A single classifier would do”? The model alone loses −$2,475 over 711 trades; the decision process around it adds +$2,450 [+$854, +$3,984], p = 0.002</a:t>
             </a:r>
           </a:p>
         </p:txBody>
@@ -14727,7 +14757,7 @@
                 </a:solidFill>
                 <a:latin typeface="Arial"/>
               </a:rPr>
-              <a:t>Deep learning: a GRU trained on the market's own moves</a:t>
+              <a:t>Deep learning: four neural parts, graded by the market</a:t>
             </a:r>
           </a:p>
         </p:txBody>
@@ -14810,182 +14840,495 @@
           </a:p>
         </p:txBody>
       </p:sp>
-      <p:sp>
-        <p:nvSpPr>
-          <p:cNvPr id="7" name="TextBox 6"/>
-          <p:cNvSpPr txBox="1"/>
+      <p:graphicFrame>
+        <p:nvGraphicFramePr>
+          <p:cNvPr id="7" name="Table 6"/>
+          <p:cNvGraphicFramePr>
+            <a:graphicFrameLocks noGrp="1"/>
+          </p:cNvGraphicFramePr>
           <p:nvPr/>
-        </p:nvSpPr>
-        <p:spPr>
-          <a:xfrm>
-            <a:off x="457200" y="1143000"/>
-            <a:ext cx="4572000" cy="4114800"/>
-          </a:xfrm>
-          <a:prstGeom prst="rect">
-            <a:avLst/>
-          </a:prstGeom>
-          <a:noFill/>
-        </p:spPr>
-        <p:txBody>
-          <a:bodyPr wrap="square" anchor="t" lIns="73152" rIns="73152" tIns="36576" bIns="36576">
-            <a:spAutoFit/>
-          </a:bodyPr>
-          <a:lstStyle/>
-          <a:p>
-            <a:pPr algn="l">
-              <a:spcAft>
-                <a:spcPts val="400"/>
-              </a:spcAft>
-            </a:pPr>
-            <a:r>
-              <a:rPr sz="1600" b="1" i="0">
-                <a:solidFill>
-                  <a:srgbClr val="1E293B"/>
-                </a:solidFill>
-                <a:latin typeface="Arial"/>
-              </a:rPr>
-              <a:t>M6 design</a:t>
-            </a:r>
-          </a:p>
-          <a:p>
-            <a:pPr algn="l" marL="292608" indent="-256032">
-              <a:spcAft>
-                <a:spcPts val="400"/>
-              </a:spcAft>
-              <a:buChar char="•"/>
-            </a:pPr>
-            <a:r>
-              <a:rPr sz="1600" b="0" i="0">
-                <a:solidFill>
-                  <a:srgbClr val="0F172A"/>
-                </a:solidFill>
-                <a:latin typeface="Arial"/>
-              </a:rPr>
-              <a:t>Label = price move to tip (the market grades it)</a:t>
-            </a:r>
-          </a:p>
-          <a:p>
-            <a:pPr algn="l" marL="292608" indent="-256032">
-              <a:spcAft>
-                <a:spcPts val="400"/>
-              </a:spcAft>
-              <a:buChar char="•"/>
-            </a:pPr>
-            <a:r>
-              <a:rPr sz="1600" b="0" i="0">
-                <a:solidFill>
-                  <a:srgbClr val="0F172A"/>
-                </a:solidFill>
-                <a:latin typeface="Arial"/>
-              </a:rPr>
-              <a:t>GRU-16 over 6 h of prices, 15-min steps</a:t>
-            </a:r>
-          </a:p>
-          <a:p>
-            <a:pPr algn="l" marL="292608" indent="-256032">
-              <a:spcAft>
-                <a:spcPts val="400"/>
-              </a:spcAft>
-              <a:buChar char="•"/>
-            </a:pPr>
-            <a:r>
-              <a:rPr sz="1600" b="0" i="0">
-                <a:solidFill>
-                  <a:srgbClr val="0F172A"/>
-                </a:solidFill>
-                <a:latin typeface="Arial"/>
-              </a:rPr>
-              <a:t>+ 18 static features → MLP → 10 / 50 / 90th percentiles</a:t>
-            </a:r>
-          </a:p>
-          <a:p>
-            <a:pPr algn="l" marL="292608" indent="-256032">
-              <a:spcAft>
-                <a:spcPts val="400"/>
-              </a:spcAft>
-              <a:buChar char="•"/>
-            </a:pPr>
-            <a:r>
-              <a:rPr sz="1600" b="0" i="0">
-                <a:solidFill>
-                  <a:srgbClr val="0F172A"/>
-                </a:solidFill>
-                <a:latin typeface="Arial"/>
-              </a:rPr>
-              <a:t>Pinball loss, early stopping; leak-tested</a:t>
-            </a:r>
-          </a:p>
-          <a:p>
-            <a:pPr algn="l">
-              <a:spcAft>
-                <a:spcPts val="400"/>
-              </a:spcAft>
-            </a:pPr>
-            <a:r>
-              <a:rPr sz="1600" b="1" i="0">
-                <a:solidFill>
-                  <a:srgbClr val="DC2626"/>
-                </a:solidFill>
-                <a:latin typeface="Arial"/>
-              </a:rPr>
-              <a:t>Result</a:t>
-            </a:r>
-          </a:p>
-          <a:p>
-            <a:pPr algn="l" marL="292608" indent="-256032">
-              <a:spcAft>
-                <a:spcPts val="400"/>
-              </a:spcAft>
-              <a:buChar char="•"/>
-            </a:pPr>
-            <a:r>
-              <a:rPr sz="1600" b="0" i="0">
-                <a:solidFill>
-                  <a:srgbClr val="0F172A"/>
-                </a:solidFill>
-                <a:latin typeface="Arial"/>
-              </a:rPr>
-              <a:t>MAE </a:t>
-            </a:r>
-            <a:r>
-              <a:rPr sz="1600" b="1" i="0">
-                <a:solidFill>
-                  <a:srgbClr val="0F172A"/>
-                </a:solidFill>
-                <a:latin typeface="Arial"/>
-              </a:rPr>
-              <a:t>0.867¢</a:t>
-            </a:r>
-            <a:r>
-              <a:rPr sz="1600" b="0" i="0">
-                <a:solidFill>
-                  <a:srgbClr val="0F172A"/>
-                </a:solidFill>
-                <a:latin typeface="Arial"/>
-              </a:rPr>
-              <a:t> vs zero move </a:t>
-            </a:r>
-            <a:r>
-              <a:rPr sz="1600" b="1" i="0">
-                <a:solidFill>
-                  <a:srgbClr val="0F172A"/>
-                </a:solidFill>
-                <a:latin typeface="Arial"/>
-              </a:rPr>
-              <a:t>0.833¢</a:t>
-            </a:r>
-            <a:r>
-              <a:rPr sz="1600" b="0" i="0">
-                <a:solidFill>
-                  <a:srgbClr val="0F172A"/>
-                </a:solidFill>
-                <a:latin typeface="Arial"/>
-              </a:rPr>
-              <a:t>; agent makes 0 trades</a:t>
-            </a:r>
-          </a:p>
-        </p:txBody>
-      </p:sp>
+        </p:nvGraphicFramePr>
+        <p:xfrm>
+          <a:off x="457200" y="1143000"/>
+          <a:ext cx="7223760" cy="3200400"/>
+        </p:xfrm>
+        <a:graphic>
+          <a:graphicData uri="http://schemas.openxmlformats.org/drawingml/2006/table">
+            <a:tbl>
+              <a:tblPr firstRow="1" bandRow="1">
+                <a:tableStyleId>{5C22544A-7EE6-4342-B048-85BDC9FD1C3A}</a:tableStyleId>
+              </a:tblPr>
+              <a:tblGrid>
+                <a:gridCol w="1828800"/>
+                <a:gridCol w="2743200"/>
+                <a:gridCol w="2651760"/>
+              </a:tblGrid>
+              <a:tr h="365760">
+                <a:tc>
+                  <a:txBody>
+                    <a:bodyPr wrap="square"/>
+                    <a:lstStyle/>
+                    <a:p>
+                      <a:pPr algn="l"/>
+                      <a:r>
+                        <a:rPr sz="1300" b="1" i="0">
+                          <a:solidFill>
+                            <a:srgbClr val="FFFFFF"/>
+                          </a:solidFill>
+                          <a:latin typeface="Arial"/>
+                        </a:rPr>
+                        <a:t>Neural part</a:t>
+                      </a:r>
+                    </a:p>
+                  </a:txBody>
+                  <a:tcPr marL="73152" marR="73152" marT="36576" marB="36576" anchor="ctr">
+                    <a:solidFill>
+                      <a:srgbClr val="1E293B"/>
+                    </a:solidFill>
+                  </a:tcPr>
+                </a:tc>
+                <a:tc>
+                  <a:txBody>
+                    <a:bodyPr wrap="square"/>
+                    <a:lstStyle/>
+                    <a:p>
+                      <a:pPr algn="l"/>
+                      <a:r>
+                        <a:rPr sz="1300" b="1" i="0">
+                          <a:solidFill>
+                            <a:srgbClr val="FFFFFF"/>
+                          </a:solidFill>
+                          <a:latin typeface="Arial"/>
+                        </a:rPr>
+                        <a:t>Design</a:t>
+                      </a:r>
+                    </a:p>
+                  </a:txBody>
+                  <a:tcPr marL="73152" marR="73152" marT="36576" marB="36576" anchor="ctr">
+                    <a:solidFill>
+                      <a:srgbClr val="1E293B"/>
+                    </a:solidFill>
+                  </a:tcPr>
+                </a:tc>
+                <a:tc>
+                  <a:txBody>
+                    <a:bodyPr wrap="square"/>
+                    <a:lstStyle/>
+                    <a:p>
+                      <a:pPr algn="l"/>
+                      <a:r>
+                        <a:rPr sz="1300" b="1" i="0">
+                          <a:solidFill>
+                            <a:srgbClr val="FFFFFF"/>
+                          </a:solidFill>
+                          <a:latin typeface="Arial"/>
+                        </a:rPr>
+                        <a:t>Market-graded result</a:t>
+                      </a:r>
+                    </a:p>
+                  </a:txBody>
+                  <a:tcPr marL="73152" marR="73152" marT="36576" marB="36576" anchor="ctr">
+                    <a:solidFill>
+                      <a:srgbClr val="1E293B"/>
+                    </a:solidFill>
+                  </a:tcPr>
+                </a:tc>
+              </a:tr>
+              <a:tr h="566928">
+                <a:tc>
+                  <a:txBody>
+                    <a:bodyPr wrap="square"/>
+                    <a:lstStyle/>
+                    <a:p>
+                      <a:pPr algn="l"/>
+                      <a:r>
+                        <a:rPr sz="1300" b="0" i="0">
+                          <a:solidFill>
+                            <a:srgbClr val="0F172A"/>
+                          </a:solidFill>
+                          <a:latin typeface="Arial"/>
+                        </a:rPr>
+                        <a:t>M2 player GRU</a:t>
+                      </a:r>
+                    </a:p>
+                  </a:txBody>
+                  <a:tcPr marL="73152" marR="73152" marT="36576" marB="36576" anchor="ctr">
+                    <a:solidFill>
+                      <a:srgbClr val="F1F5F9"/>
+                    </a:solidFill>
+                  </a:tcPr>
+                </a:tc>
+                <a:tc>
+                  <a:txBody>
+                    <a:bodyPr wrap="square"/>
+                    <a:lstStyle/>
+                    <a:p>
+                      <a:pPr algn="l"/>
+                      <a:r>
+                        <a:rPr sz="1300" b="0" i="0">
+                          <a:solidFill>
+                            <a:srgbClr val="0F172A"/>
+                          </a:solidFill>
+                          <a:latin typeface="Arial"/>
+                        </a:rPr>
+                        <a:t>GRU over last 20 games → pts / min quantiles</a:t>
+                      </a:r>
+                    </a:p>
+                  </a:txBody>
+                  <a:tcPr marL="73152" marR="73152" marT="36576" marB="36576" anchor="ctr">
+                    <a:solidFill>
+                      <a:srgbClr val="F1F5F9"/>
+                    </a:solidFill>
+                  </a:tcPr>
+                </a:tc>
+                <a:tc>
+                  <a:txBody>
+                    <a:bodyPr wrap="square"/>
+                    <a:lstStyle/>
+                    <a:p>
+                      <a:pPr algn="l"/>
+                      <a:r>
+                        <a:rPr sz="1300" b="1" i="0">
+                          <a:solidFill>
+                            <a:srgbClr val="0F172A"/>
+                          </a:solidFill>
+                          <a:latin typeface="Arial"/>
+                        </a:rPr>
+                        <a:t>Beats GBM:</a:t>
+                      </a:r>
+                      <a:r>
+                        <a:rPr sz="1300" b="0" i="0">
+                          <a:solidFill>
+                            <a:srgbClr val="0F172A"/>
+                          </a:solidFill>
+                          <a:latin typeface="Arial"/>
+                        </a:rPr>
+                        <a:t> pinball 1.55 vs 1.59</a:t>
+                      </a:r>
+                    </a:p>
+                  </a:txBody>
+                  <a:tcPr marL="73152" marR="73152" marT="36576" marB="36576" anchor="ctr">
+                    <a:solidFill>
+                      <a:srgbClr val="F1F5F9"/>
+                    </a:solidFill>
+                  </a:tcPr>
+                </a:tc>
+              </a:tr>
+              <a:tr h="566928">
+                <a:tc>
+                  <a:txBody>
+                    <a:bodyPr wrap="square"/>
+                    <a:lstStyle/>
+                    <a:p>
+                      <a:pPr algn="l"/>
+                      <a:r>
+                        <a:rPr sz="1300" b="0" i="0">
+                          <a:solidFill>
+                            <a:srgbClr val="0F172A"/>
+                          </a:solidFill>
+                          <a:latin typeface="Arial"/>
+                        </a:rPr>
+                        <a:t>M4-NN win MLP</a:t>
+                      </a:r>
+                    </a:p>
+                  </a:txBody>
+                  <a:tcPr marL="73152" marR="73152" marT="36576" marB="36576" anchor="ctr">
+                    <a:solidFill>
+                      <a:srgbClr val="FFFFFF"/>
+                    </a:solidFill>
+                  </a:tcPr>
+                </a:tc>
+                <a:tc>
+                  <a:txBody>
+                    <a:bodyPr wrap="square"/>
+                    <a:lstStyle/>
+                    <a:p>
+                      <a:pPr algn="l"/>
+                      <a:r>
+                        <a:rPr sz="1300" b="0" i="0">
+                          <a:solidFill>
+                            <a:srgbClr val="0F172A"/>
+                          </a:solidFill>
+                          <a:latin typeface="Arial"/>
+                        </a:rPr>
+                        <a:t>M4's 6 features, BCE, early stop, 3 seeds</a:t>
+                      </a:r>
+                    </a:p>
+                  </a:txBody>
+                  <a:tcPr marL="73152" marR="73152" marT="36576" marB="36576" anchor="ctr">
+                    <a:solidFill>
+                      <a:srgbClr val="FFFFFF"/>
+                    </a:solidFill>
+                  </a:tcPr>
+                </a:tc>
+                <a:tc>
+                  <a:txBody>
+                    <a:bodyPr wrap="square"/>
+                    <a:lstStyle/>
+                    <a:p>
+                      <a:pPr algn="l"/>
+                      <a:r>
+                        <a:rPr sz="1300" b="0" i="0">
+                          <a:solidFill>
+                            <a:srgbClr val="0F172A"/>
+                          </a:solidFill>
+                          <a:latin typeface="Arial"/>
+                        </a:rPr>
+                        <a:t>Brier 0.184 vs M4 0.183: tie</a:t>
+                      </a:r>
+                    </a:p>
+                  </a:txBody>
+                  <a:tcPr marL="73152" marR="73152" marT="36576" marB="36576" anchor="ctr">
+                    <a:solidFill>
+                      <a:srgbClr val="FFFFFF"/>
+                    </a:solidFill>
+                  </a:tcPr>
+                </a:tc>
+              </a:tr>
+              <a:tr h="566928">
+                <a:tc>
+                  <a:txBody>
+                    <a:bodyPr wrap="square"/>
+                    <a:lstStyle/>
+                    <a:p>
+                      <a:pPr algn="l"/>
+                      <a:r>
+                        <a:rPr sz="1300" b="0" i="0">
+                          <a:solidFill>
+                            <a:srgbClr val="0F172A"/>
+                          </a:solidFill>
+                          <a:latin typeface="Arial"/>
+                        </a:rPr>
+                        <a:t>Anchor + NN shift</a:t>
+                      </a:r>
+                    </a:p>
+                  </a:txBody>
+                  <a:tcPr marL="73152" marR="73152" marT="36576" marB="36576" anchor="ctr">
+                    <a:solidFill>
+                      <a:srgbClr val="F1F5F9"/>
+                    </a:solidFill>
+                  </a:tcPr>
+                </a:tc>
+                <a:tc>
+                  <a:txBody>
+                    <a:bodyPr wrap="square"/>
+                    <a:lstStyle/>
+                    <a:p>
+                      <a:pPr algn="l"/>
+                      <a:r>
+                        <a:rPr sz="1300" b="0" i="0">
+                          <a:solidFill>
+                            <a:srgbClr val="0F172A"/>
+                          </a:solidFill>
+                          <a:latin typeface="Arial"/>
+                        </a:rPr>
+                        <a:t>24 h mid + MLP news shift</a:t>
+                      </a:r>
+                    </a:p>
+                  </a:txBody>
+                  <a:tcPr marL="73152" marR="73152" marT="36576" marB="36576" anchor="ctr">
+                    <a:solidFill>
+                      <a:srgbClr val="F1F5F9"/>
+                    </a:solidFill>
+                  </a:tcPr>
+                </a:tc>
+                <a:tc>
+                  <a:txBody>
+                    <a:bodyPr wrap="square"/>
+                    <a:lstStyle/>
+                    <a:p>
+                      <a:pPr algn="l"/>
+                      <a:r>
+                        <a:rPr sz="1300" b="0" i="0">
+                          <a:solidFill>
+                            <a:srgbClr val="0F172A"/>
+                          </a:solidFill>
+                          <a:latin typeface="Arial"/>
+                        </a:rPr>
+                        <a:t>Brier </a:t>
+                      </a:r>
+                      <a:r>
+                        <a:rPr sz="1300" b="1" i="0">
+                          <a:solidFill>
+                            <a:srgbClr val="0F172A"/>
+                          </a:solidFill>
+                          <a:latin typeface="Arial"/>
+                        </a:rPr>
+                        <a:t>0.163</a:t>
+                      </a:r>
+                      <a:r>
+                        <a:rPr sz="1300" b="0" i="0">
+                          <a:solidFill>
+                            <a:srgbClr val="0F172A"/>
+                          </a:solidFill>
+                          <a:latin typeface="Arial"/>
+                        </a:rPr>
+                        <a:t> vs market 0.164: level</a:t>
+                      </a:r>
+                    </a:p>
+                  </a:txBody>
+                  <a:tcPr marL="73152" marR="73152" marT="36576" marB="36576" anchor="ctr">
+                    <a:solidFill>
+                      <a:srgbClr val="F1F5F9"/>
+                    </a:solidFill>
+                  </a:tcPr>
+                </a:tc>
+              </a:tr>
+              <a:tr h="566928">
+                <a:tc>
+                  <a:txBody>
+                    <a:bodyPr wrap="square"/>
+                    <a:lstStyle/>
+                    <a:p>
+                      <a:pPr algn="l"/>
+                      <a:r>
+                        <a:rPr sz="1300" b="0" i="0">
+                          <a:solidFill>
+                            <a:srgbClr val="0F172A"/>
+                          </a:solidFill>
+                          <a:latin typeface="Arial"/>
+                        </a:rPr>
+                        <a:t>M6 impact GRU</a:t>
+                      </a:r>
+                    </a:p>
+                  </a:txBody>
+                  <a:tcPr marL="73152" marR="73152" marT="36576" marB="36576" anchor="ctr">
+                    <a:solidFill>
+                      <a:srgbClr val="FFFFFF"/>
+                    </a:solidFill>
+                  </a:tcPr>
+                </a:tc>
+                <a:tc>
+                  <a:txBody>
+                    <a:bodyPr wrap="square"/>
+                    <a:lstStyle/>
+                    <a:p>
+                      <a:pPr algn="l"/>
+                      <a:r>
+                        <a:rPr sz="1300" b="0" i="0">
+                          <a:solidFill>
+                            <a:srgbClr val="0F172A"/>
+                          </a:solidFill>
+                          <a:latin typeface="Arial"/>
+                        </a:rPr>
+                        <a:t>6 h prices + 18 features → quantiles</a:t>
+                      </a:r>
+                    </a:p>
+                  </a:txBody>
+                  <a:tcPr marL="73152" marR="73152" marT="36576" marB="36576" anchor="ctr">
+                    <a:solidFill>
+                      <a:srgbClr val="FFFFFF"/>
+                    </a:solidFill>
+                  </a:tcPr>
+                </a:tc>
+                <a:tc>
+                  <a:txBody>
+                    <a:bodyPr wrap="square"/>
+                    <a:lstStyle/>
+                    <a:p>
+                      <a:pPr algn="l"/>
+                      <a:r>
+                        <a:rPr sz="1300" b="1" i="0">
+                          <a:solidFill>
+                            <a:srgbClr val="0F172A"/>
+                          </a:solidFill>
+                          <a:latin typeface="Arial"/>
+                        </a:rPr>
+                        <a:t>Fails:</a:t>
+                      </a:r>
+                      <a:r>
+                        <a:rPr sz="1300" b="0" i="0">
+                          <a:solidFill>
+                            <a:srgbClr val="0F172A"/>
+                          </a:solidFill>
+                          <a:latin typeface="Arial"/>
+                        </a:rPr>
+                        <a:t> 9 of 9 configs worse than zero move</a:t>
+                      </a:r>
+                    </a:p>
+                  </a:txBody>
+                  <a:tcPr marL="73152" marR="73152" marT="36576" marB="36576" anchor="ctr">
+                    <a:solidFill>
+                      <a:srgbClr val="FFFFFF"/>
+                    </a:solidFill>
+                  </a:tcPr>
+                </a:tc>
+              </a:tr>
+              <a:tr h="566928">
+                <a:tc>
+                  <a:txBody>
+                    <a:bodyPr wrap="square"/>
+                    <a:lstStyle/>
+                    <a:p>
+                      <a:pPr algn="l"/>
+                      <a:r>
+                        <a:rPr sz="1300" b="0" i="0">
+                          <a:solidFill>
+                            <a:srgbClr val="0F172A"/>
+                          </a:solidFill>
+                          <a:latin typeface="Arial"/>
+                        </a:rPr>
+                        <a:t>LLM tool agent</a:t>
+                      </a:r>
+                    </a:p>
+                  </a:txBody>
+                  <a:tcPr marL="73152" marR="73152" marT="36576" marB="36576" anchor="ctr">
+                    <a:solidFill>
+                      <a:srgbClr val="F1F5F9"/>
+                    </a:solidFill>
+                  </a:tcPr>
+                </a:tc>
+                <a:tc>
+                  <a:txBody>
+                    <a:bodyPr wrap="square"/>
+                    <a:lstStyle/>
+                    <a:p>
+                      <a:pPr algn="l"/>
+                      <a:r>
+                        <a:rPr sz="1300" b="0" i="0">
+                          <a:solidFill>
+                            <a:srgbClr val="0F172A"/>
+                          </a:solidFill>
+                          <a:latin typeface="Arial"/>
+                        </a:rPr>
+                        <a:t>Transformer as policy; code guardrails</a:t>
+                      </a:r>
+                    </a:p>
+                  </a:txBody>
+                  <a:tcPr marL="73152" marR="73152" marT="36576" marB="36576" anchor="ctr">
+                    <a:solidFill>
+                      <a:srgbClr val="F1F5F9"/>
+                    </a:solidFill>
+                  </a:tcPr>
+                </a:tc>
+                <a:tc>
+                  <a:txBody>
+                    <a:bodyPr wrap="square"/>
+                    <a:lstStyle/>
+                    <a:p>
+                      <a:pPr algn="l"/>
+                      <a:r>
+                        <a:rPr sz="1300" b="0" i="0">
+                          <a:solidFill>
+                            <a:srgbClr val="0F172A"/>
+                          </a:solidFill>
+                          <a:latin typeface="Arial"/>
+                        </a:rPr>
+                        <a:t>Slide 11: helps only by trading less</a:t>
+                      </a:r>
+                    </a:p>
+                  </a:txBody>
+                  <a:tcPr marL="73152" marR="73152" marT="36576" marB="36576" anchor="ctr">
+                    <a:solidFill>
+                      <a:srgbClr val="F1F5F9"/>
+                    </a:solidFill>
+                  </a:tcPr>
+                </a:tc>
+              </a:tr>
+            </a:tbl>
+          </a:graphicData>
+        </a:graphic>
+      </p:graphicFrame>
       <p:pic>
         <p:nvPicPr>
           <p:cNvPr id="8" name="Picture 7" descr="m6_robustness.png"/>
@@ -15002,48 +15345,24 @@
         </p:blipFill>
         <p:spPr>
           <a:xfrm>
-            <a:off x="5120640" y="1206550"/>
-            <a:ext cx="6613855" cy="2204618"/>
+            <a:off x="7863840" y="2143810"/>
+            <a:ext cx="3870655" cy="1290218"/>
           </a:xfrm>
           <a:prstGeom prst="rect">
             <a:avLst/>
           </a:prstGeom>
         </p:spPr>
       </p:pic>
-      <p:pic>
-        <p:nvPicPr>
-          <p:cNvPr id="9" name="Picture 8" descr="m6_vs_baselines.png"/>
-          <p:cNvPicPr>
-            <a:picLocks noChangeAspect="1"/>
-          </p:cNvPicPr>
-          <p:nvPr/>
-        </p:nvPicPr>
-        <p:blipFill>
-          <a:blip r:embed="rId4"/>
-          <a:stretch>
-            <a:fillRect/>
-          </a:stretch>
-        </p:blipFill>
-        <p:spPr>
-          <a:xfrm>
-            <a:off x="5445828" y="3520439"/>
-            <a:ext cx="5963478" cy="1828800"/>
-          </a:xfrm>
-          <a:prstGeom prst="rect">
-            <a:avLst/>
-          </a:prstGeom>
-        </p:spPr>
-      </p:pic>
-      <p:sp>
-        <p:nvSpPr>
-          <p:cNvPr id="10" name="TextBox 9"/>
+      <p:sp>
+        <p:nvSpPr>
+          <p:cNvPr id="9" name="TextBox 8"/>
           <p:cNvSpPr txBox="1"/>
           <p:nvPr/>
         </p:nvSpPr>
         <p:spPr>
           <a:xfrm>
-            <a:off x="457200" y="5212080"/>
-            <a:ext cx="11277295" cy="566928"/>
+            <a:off x="457200" y="5074920"/>
+            <a:ext cx="11277295" cy="640080"/>
           </a:xfrm>
           <a:prstGeom prst="rect">
             <a:avLst/>
@@ -15062,36 +15381,36 @@
               </a:spcAft>
             </a:pPr>
             <a:r>
-              <a:rPr sz="1600" b="1" i="0">
+              <a:rPr sz="1500" b="1" i="0">
                 <a:solidFill>
                   <a:srgbClr val="0F172A"/>
                 </a:solidFill>
                 <a:latin typeface="Arial"/>
               </a:rPr>
-              <a:t>Robustness:</a:t>
-            </a:r>
-            <a:r>
-              <a:rPr sz="1600" b="0" i="0">
+              <a:t>Why small and quantile:</a:t>
+            </a:r>
+            <a:r>
+              <a:rPr sz="1500" b="0" i="0">
                 <a:solidFill>
                   <a:srgbClr val="0F172A"/>
                 </a:solidFill>
                 <a:latin typeface="Arial"/>
               </a:rPr>
-              <a:t> 9 configurations × 3 seeds, all worse than zero move (best +0.017¢); none predicts the 5.5¢ needed to trade</a:t>
-            </a:r>
-          </a:p>
-        </p:txBody>
-      </p:sp>
-      <p:sp>
-        <p:nvSpPr>
-          <p:cNvPr id="11" name="TextBox 10"/>
+              <a:t> ~3.4k training games, 3.9M price rows but only ~600 training games of them; GRU-8/16 with early stopping; pinball loss gives a 10–90% band, not a point bet</a:t>
+            </a:r>
+          </a:p>
+        </p:txBody>
+      </p:sp>
+      <p:sp>
+        <p:nvSpPr>
+          <p:cNvPr id="10" name="TextBox 9"/>
           <p:cNvSpPr txBox="1"/>
           <p:nvPr/>
         </p:nvSpPr>
         <p:spPr>
           <a:xfrm>
-            <a:off x="457200" y="5788152"/>
-            <a:ext cx="11277295" cy="566928"/>
+            <a:off x="457200" y="5742432"/>
+            <a:ext cx="11277295" cy="594360"/>
           </a:xfrm>
           <a:prstGeom prst="rect">
             <a:avLst/>
@@ -15110,22 +15429,22 @@
               </a:spcAft>
             </a:pPr>
             <a:r>
-              <a:rPr sz="1600" b="1" i="0">
+              <a:rPr sz="1500" b="1" i="0">
                 <a:solidFill>
                   <a:srgbClr val="0F172A"/>
                 </a:solidFill>
                 <a:latin typeface="Arial"/>
               </a:rPr>
-              <a:t>M4 recalibration:</a:t>
-            </a:r>
-            <a:r>
-              <a:rPr sz="1600" b="0" i="0">
+              <a:t>Null results are the finding:</a:t>
+            </a:r>
+            <a:r>
+              <a:rPr sz="1500" b="0" i="0">
                 <a:solidFill>
                   <a:srgbClr val="0F172A"/>
                 </a:solidFill>
                 <a:latin typeface="Arial"/>
               </a:rPr>
-              <a:t> Brier 0.183 raw, 0.185 Platt, 0.184 isotonic vs market 0.164; miscalibration changes with season phase</a:t>
+              <a:t> in an efficient market, “no move” and the market's own price are hard baselines; deep learning helps only next to the anchor</a:t>
             </a:r>
           </a:p>
         </p:txBody>

--- a/presentation/nba_agent_deck.pptx
+++ b/presentation/nba_agent_deck.pptx
@@ -796,7 +796,7 @@
           <a:lstStyle/>
           <a:p>
             <a:r>
-              <a:t>Why an agent and not one classifier? The problem is event-driven: news arrives at random times and 91% of the move comes before the inactive list, about two-thirds before the first official report, so the hard decision is when to act; the agent's trigger, investigate, decide loop makes that decision. It uses tools over as-of data, prices, news, rotations and models, and the tools enforce no look-ahead. Decisions are multi-step with code checks, risk caps and a kill switch, which matters for gambling harm. Learning is graded by the market through the gate, and the placebo shows honestly that it works by trading less. The Coach and League turn the analysis into education, and the orchestrator ties the team's parts together. The counter-argument, a single classifier would do, is answered by our own data: the model alone loses −$2,475 over 711 trades; the decision process around it, anchoring, thresholds and abstention, adds +$2,450, p 0.002. The work is split across the team. The pregame news loop polls several news sources before a game and turns them into fair odds, pull request 7. The player-feature experiment tested isolated player features and probability calibration, pull request 8. In-play news and odds updates are pull request 9. Live, read-only Polymarket prices are pull requests 11 and 12. The replay, the agent, the models M4 and M6, the evaluation, the Coach and the League are on our main branch. Each part had to face the same market grade.</a:t>
+              <a:t>Why an agent and not one classifier? Each box of the slide 4 diagram answers a feature of the problem. The problem is event-driven: news arrives at random times and 91% of the move comes before the inactive list, about two-thirds before the first official report, so the hard decision is when to act; that is the trigger. What to look at is the as-of tools, which enforce no look-ahead. Whether to trade is the edge test and the LLM sceptic, and the code checks, risk caps and kill switch make sure the LLM can never override a limit, which matters for gambling harm. The learn loop is graded by the market through the gate, and the placebo shows honestly that it works by trading less. The Coach and League are the people in the loop. The counter-argument, a single classifier would do, is answered by our own data: the model alone loses −$2,475 over 711 trades; the decision process around it, the diagram's anchor, edge threshold and pass, adds +$2,450, p 0.002. The work is split across the team. The pregame news loop polls several news sources before a game and turns them into fair odds, pull request 7. The player-feature experiment tested isolated player features and probability calibration, pull request 8. In-play news and odds updates are pull request 9. Live, read-only Polymarket prices are pull requests 11 and 12. The replay, the agent, the models M4 and M6, the evaluation, the Coach and the League are on our main branch. Each part had to face the same market grade.</a:t>
             </a:r>
           </a:p>
         </p:txBody>
@@ -1146,7 +1146,7 @@
           <a:lstStyle/>
           <a:p>
             <a:r>
-              <a:t>This is what the title means. Every component is a hypothesis that must pass an evidence gate on recorded prices, and the grader is the market's closing price. The raw win model fails: −$2,475 over the season, and recalibrating it does not help. The neural impact model fails: all 9 configurations are worse than predicting no move. What passes defers to the market: the market anchor, +$2,450 with p 0.002, and gated learning, which passes only by trading less. The newer agentic parts face the same gate; slide 11. So the finding is the product: if a disciplined agent cannot beat the close, a consumer cannot either. We say “we pass” as often as “we trade”.</a:t>
+              <a:t>This is the agent. The top row is the decide loop, a LangGraph graph. A trigger, news or the clock an hour before tip, wakes it; it then chooses which as-of tools to call, prices, news, rotations, and our models M4 and M6, which only see what was public. It estimates a probability, the market anchor plus the model's news shift, or an LLM analyst; trades only if the gap after spread and fee is at least 4 cents; an LLM sceptic asks whether the news is already priced in and can veto; code re-checks every number; risk caps and a kill switch the LLM cannot override; then a confirm step, and an order or, about 90% of the time, a pass with the reason. One example: CLE at POR. Deni Avdija is out, 32.8 minutes and 26 points a game. M4's shift is −8.7 points, so the anchor of 42.5% becomes 33.8%. The agent bought POR “no” at 55¢, fee 1.73¢, a gap of 9.5¢ after costs, 36 contracts. The close was 62.5¢: closing-line value +7.5¢, profit +$15.57. The bottom row is the learn loop: at the close every trade is settled and graded by CLV, a reviewer proposes one rule, and the gate keeps it only if it helps on held-out days; kept rules feed back into the decision. The Coach and League turn the same analysis into education. The closing price grades every box.</a:t>
             </a:r>
           </a:p>
         </p:txBody>
@@ -1216,7 +1216,7 @@
           <a:lstStyle/>
           <a:p>
             <a:r>
-              <a:t>The data is all public. From Kalshi: every NBA game-winner market for 2025-26, 2,632 markets on 1,316 games, 3,938,368 one-minute rows of bid, ask and volume, and settlements. From ESPN: three seasons of games, 85,422 box-score rows and 3,371 inactive-list entries, which are our news. Models train on games before 1 February; the agent develops on November to January; the test period is 1 February to 12 April, 501 games; the walk-forward retrains monthly; and the 87 play-off games are a holdout scored once. The replay shows the agent only what was public, counts each inactive list as news 30 minutes before tip, and fills at the recorded ask plus the Kalshi fee.</a:t>
+              <a:t>This is what the title means. Every component is a hypothesis that must pass an evidence gate on recorded prices, and the grader is the market's closing price. The raw win model fails: −$2,475 over the season, and recalibrating it does not help. The neural impact model fails: all 9 configurations are worse than predicting no move. What passes defers to the market: the market anchor, +$2,450 with p 0.002, and gated learning, which passes only by trading less. The newer agentic parts face the same gate; slide 11. So the finding is the product: if a disciplined agent cannot beat the close, a consumer cannot either. We say “we pass” as often as “we trade”.</a:t>
             </a:r>
           </a:p>
         </p:txBody>
@@ -1286,7 +1286,7 @@
           <a:lstStyle/>
           <a:p>
             <a:r>
-              <a:t>First, costs. One hour before tip a $20 order pays half the bid-ask spread plus the Kalshi fee: 1.92 cents per contract on average, 5.0% of the price, and 9–14% on cheap contracts. Our best agent would have made +$36 at the mid but lost −$32 after costs. Even very selective, 74 trades out of 771 decision points, only 27 (36%) beat or matched the closing price.</a:t>
+              <a:t>The data is all public. From Kalshi: every NBA game-winner market for 2025-26, 2,632 markets on 1,316 games, 3,938,368 one-minute rows of bid, ask and volume, and settlements. From ESPN: three seasons of games, 85,422 box-score rows and 3,371 inactive-list entries, which are our news. Models train on games before 1 February; the agent develops on November to January; the test period is 1 February to 12 April, 501 games; the walk-forward retrains monthly; and the 87 play-off games are a holdout scored once. The replay shows the agent only what was public, counts each inactive list as news 30 minutes before tip, and fills at the recorded ask plus the Kalshi fee.</a:t>
             </a:r>
           </a:p>
         </p:txBody>
@@ -1356,7 +1356,7 @@
           <a:lstStyle/>
           <a:p>
             <a:r>
-              <a:t>Second, speed. On the 193 test games where the inactive list moved our win model by at least a point, 91% of the price move in the news direction happened before the inactive list, which is when a retail user reading it could act. We then matched the official NBA injury reports: about two-thirds of the move, 67% with a confidence interval of 47–85%, came before the first official report listing the player out, which itself comes a median of about 6 hours before the inactive list. Assuming no publication lag the share is 49%. Official reports only; beat reporters and social media can be earlier still.</a:t>
+              <a:t>First, costs. One hour before tip a $20 order pays half the bid-ask spread plus the Kalshi fee: 1.92 cents per contract on average, 5.0% of the price, and 9–14% on cheap contracts. Our best agent would have made +$36 at the mid but lost −$32 after costs; only 27 (36%) of its 74 trades beat or matched the close. Second, speed. On the 193 test games where the inactive list moved our win model by at least a point, 91% of the price move in the news direction happened before the inactive list, when a retail user could act. Against the official NBA injury reports, about two-thirds, 67% with a confidence interval of 47–85%, came before the first report listing the player out, which comes about 6 hours before the inactive list; 49% assuming no publication lag. These two facts are why the agent passes by default and why its trigger matters.</a:t>
             </a:r>
           </a:p>
         </p:txBody>
@@ -4879,7 +4879,7 @@
                 </a:solidFill>
                 <a:latin typeface="Arial"/>
               </a:rPr>
-              <a:t>Evidence 4: every line drifts down; never trading wins</a:t>
+              <a:t>Evidence 3: every line drifts down; never trading wins</a:t>
             </a:r>
           </a:p>
         </p:txBody>
@@ -7921,7 +7921,7 @@
                 </a:solidFill>
                 <a:latin typeface="Arial"/>
               </a:rPr>
-              <a:t>Why agentic: the problem's structure</a:t>
+              <a:t>Why agentic: each box of slide 4 answers the problem</a:t>
             </a:r>
           </a:p>
           <a:p>
@@ -7938,7 +7938,7 @@
                 </a:solidFill>
                 <a:latin typeface="Arial"/>
               </a:rPr>
-              <a:t>When to act:</a:t>
+              <a:t>When to act = trigger:</a:t>
             </a:r>
             <a:r>
               <a:rPr sz="1500" b="0" i="0">
@@ -7947,7 +7947,7 @@
                 </a:solidFill>
                 <a:latin typeface="Arial"/>
               </a:rPr>
-              <a:t> news is asynchronous; 91% of the move before the inactive list, ~⅔ before the first report → trigger → investigate → decide</a:t>
+              <a:t> news is asynchronous; 91% of the move before the inactive list, ~⅔ before the first report</a:t>
             </a:r>
           </a:p>
           <a:p>
@@ -7964,7 +7964,7 @@
                 </a:solidFill>
                 <a:latin typeface="Arial"/>
               </a:rPr>
-              <a:t>Tools over as-of data:</a:t>
+              <a:t>What to look at = as-of tools:</a:t>
             </a:r>
             <a:r>
               <a:rPr sz="1500" b="0" i="0">
@@ -7973,7 +7973,7 @@
                 </a:solidFill>
                 <a:latin typeface="Arial"/>
               </a:rPr>
-              <a:t> prices, news, rotations, models; no look-ahead</a:t>
+              <a:t> prices, news, rotations, M4 / M6; no look-ahead</a:t>
             </a:r>
           </a:p>
           <a:p>
@@ -7990,7 +7990,7 @@
                 </a:solidFill>
                 <a:latin typeface="Arial"/>
               </a:rPr>
-              <a:t>Multi-step + safety:</a:t>
+              <a:t>Whether to trade = edge + sceptic:</a:t>
             </a:r>
             <a:r>
               <a:rPr sz="1500" b="0" i="0">
@@ -7999,7 +7999,7 @@
                 </a:solidFill>
                 <a:latin typeface="Arial"/>
               </a:rPr>
-              <a:t> checks, risk caps, kill switch, blocked orders</a:t>
+              <a:t> code checks, risk caps, kill switch; LLM can't override</a:t>
             </a:r>
           </a:p>
           <a:p>
@@ -8016,7 +8016,7 @@
                 </a:solidFill>
                 <a:latin typeface="Arial"/>
               </a:rPr>
-              <a:t>Market-graded learning:</a:t>
+              <a:t>Learn loop:</a:t>
             </a:r>
             <a:r>
               <a:rPr sz="1500" b="0" i="0">
@@ -8025,7 +8025,7 @@
                 </a:solidFill>
                 <a:latin typeface="Arial"/>
               </a:rPr>
-              <a:t> review → gate → rules; placebo-audited</a:t>
+              <a:t> CLV → reviewer → held-out gate → rules; placebo-audited</a:t>
             </a:r>
           </a:p>
           <a:p>
@@ -8042,7 +8042,7 @@
                 </a:solidFill>
                 <a:latin typeface="Arial"/>
               </a:rPr>
-              <a:t>Human in the loop:</a:t>
+              <a:t>People:</a:t>
             </a:r>
             <a:r>
               <a:rPr sz="1500" b="0" i="0">
@@ -8051,7 +8051,7 @@
                 </a:solidFill>
                 <a:latin typeface="Arial"/>
               </a:rPr>
-              <a:t> Coach and League teach; orchestrator joins the team's parts</a:t>
+              <a:t> Coach and League teach with the same analysis</a:t>
             </a:r>
           </a:p>
         </p:txBody>
@@ -11636,7 +11636,7 @@
                 </a:solidFill>
                 <a:latin typeface="Arial"/>
               </a:rPr>
-              <a:t>Market-Graded Learning: the closing price is the grader</a:t>
+              <a:t>How the agent works: decide, learn, graded by the close</a:t>
             </a:r>
           </a:p>
         </p:txBody>
@@ -11715,6 +11715,647 @@
                 <a:latin typeface="Arial"/>
               </a:rPr>
               <a:t>4</a:t>
+            </a:r>
+          </a:p>
+        </p:txBody>
+      </p:sp>
+      <p:pic>
+        <p:nvPicPr>
+          <p:cNvPr id="7" name="Picture 6" descr="agent_architecture.png"/>
+          <p:cNvPicPr>
+            <a:picLocks noChangeAspect="1"/>
+          </p:cNvPicPr>
+          <p:nvPr/>
+        </p:nvPicPr>
+        <p:blipFill>
+          <a:blip r:embed="rId3"/>
+          <a:stretch>
+            <a:fillRect/>
+          </a:stretch>
+        </p:blipFill>
+        <p:spPr>
+          <a:xfrm>
+            <a:off x="874978" y="1051560"/>
+            <a:ext cx="10441738" cy="4206240"/>
+          </a:xfrm>
+          <a:prstGeom prst="rect">
+            <a:avLst/>
+          </a:prstGeom>
+        </p:spPr>
+      </p:pic>
+      <p:sp>
+        <p:nvSpPr>
+          <p:cNvPr id="8" name="Rounded Rectangle 7"/>
+          <p:cNvSpPr/>
+          <p:nvPr/>
+        </p:nvSpPr>
+        <p:spPr>
+          <a:xfrm>
+            <a:off x="457200" y="5212080"/>
+            <a:ext cx="2716453" cy="1051560"/>
+          </a:xfrm>
+          <a:prstGeom prst="roundRect">
+            <a:avLst>
+              <a:gd name="adj" fmla="val 12000"/>
+            </a:avLst>
+          </a:prstGeom>
+          <a:solidFill>
+            <a:srgbClr val="FEF3C7"/>
+          </a:solidFill>
+          <a:ln>
+            <a:noFill/>
+          </a:ln>
+          <a:effectLst/>
+        </p:spPr>
+        <p:style>
+          <a:lnRef idx="1">
+            <a:schemeClr val="accent1"/>
+          </a:lnRef>
+          <a:fillRef idx="3">
+            <a:schemeClr val="accent1"/>
+          </a:fillRef>
+          <a:effectRef idx="2">
+            <a:schemeClr val="accent1"/>
+          </a:effectRef>
+          <a:fontRef idx="minor">
+            <a:schemeClr val="lt1"/>
+          </a:fontRef>
+        </p:style>
+        <p:txBody>
+          <a:bodyPr rtlCol="0" anchor="ctr"/>
+          <a:lstStyle/>
+          <a:p>
+            <a:pPr algn="ctr"/>
+          </a:p>
+        </p:txBody>
+      </p:sp>
+      <p:sp>
+        <p:nvSpPr>
+          <p:cNvPr id="9" name="TextBox 8"/>
+          <p:cNvSpPr txBox="1"/>
+          <p:nvPr/>
+        </p:nvSpPr>
+        <p:spPr>
+          <a:xfrm>
+            <a:off x="548640" y="5212080"/>
+            <a:ext cx="2533573" cy="1051560"/>
+          </a:xfrm>
+          <a:prstGeom prst="rect">
+            <a:avLst/>
+          </a:prstGeom>
+          <a:noFill/>
+        </p:spPr>
+        <p:txBody>
+          <a:bodyPr wrap="square" anchor="ctr" lIns="73152" rIns="73152" tIns="36576" bIns="36576">
+            <a:spAutoFit/>
+          </a:bodyPr>
+          <a:lstStyle/>
+          <a:p>
+            <a:pPr algn="l">
+              <a:spcAft>
+                <a:spcPts val="0"/>
+              </a:spcAft>
+            </a:pPr>
+            <a:r>
+              <a:rPr sz="1400" b="1" i="0">
+                <a:solidFill>
+                  <a:srgbClr val="0F172A"/>
+                </a:solidFill>
+                <a:latin typeface="Arial"/>
+              </a:rPr>
+              <a:t>Autonomy:</a:t>
+            </a:r>
+            <a:r>
+              <a:rPr sz="1400" b="0" i="0">
+                <a:solidFill>
+                  <a:srgbClr val="0F172A"/>
+                </a:solidFill>
+                <a:latin typeface="Arial"/>
+              </a:rPr>
+              <a:t> it decides when to act, what to look at, and whether to trade</a:t>
+            </a:r>
+          </a:p>
+        </p:txBody>
+      </p:sp>
+      <p:sp>
+        <p:nvSpPr>
+          <p:cNvPr id="10" name="Rounded Rectangle 9"/>
+          <p:cNvSpPr/>
+          <p:nvPr/>
+        </p:nvSpPr>
+        <p:spPr>
+          <a:xfrm>
+            <a:off x="3310813" y="5212080"/>
+            <a:ext cx="2716453" cy="1051560"/>
+          </a:xfrm>
+          <a:prstGeom prst="roundRect">
+            <a:avLst>
+              <a:gd name="adj" fmla="val 12000"/>
+            </a:avLst>
+          </a:prstGeom>
+          <a:solidFill>
+            <a:srgbClr val="FEF3C7"/>
+          </a:solidFill>
+          <a:ln>
+            <a:noFill/>
+          </a:ln>
+          <a:effectLst/>
+        </p:spPr>
+        <p:style>
+          <a:lnRef idx="1">
+            <a:schemeClr val="accent1"/>
+          </a:lnRef>
+          <a:fillRef idx="3">
+            <a:schemeClr val="accent1"/>
+          </a:fillRef>
+          <a:effectRef idx="2">
+            <a:schemeClr val="accent1"/>
+          </a:effectRef>
+          <a:fontRef idx="minor">
+            <a:schemeClr val="lt1"/>
+          </a:fontRef>
+        </p:style>
+        <p:txBody>
+          <a:bodyPr rtlCol="0" anchor="ctr"/>
+          <a:lstStyle/>
+          <a:p>
+            <a:pPr algn="ctr"/>
+          </a:p>
+        </p:txBody>
+      </p:sp>
+      <p:sp>
+        <p:nvSpPr>
+          <p:cNvPr id="11" name="TextBox 10"/>
+          <p:cNvSpPr txBox="1"/>
+          <p:nvPr/>
+        </p:nvSpPr>
+        <p:spPr>
+          <a:xfrm>
+            <a:off x="3402253" y="5212080"/>
+            <a:ext cx="2533573" cy="1051560"/>
+          </a:xfrm>
+          <a:prstGeom prst="rect">
+            <a:avLst/>
+          </a:prstGeom>
+          <a:noFill/>
+        </p:spPr>
+        <p:txBody>
+          <a:bodyPr wrap="square" anchor="ctr" lIns="73152" rIns="73152" tIns="36576" bIns="36576">
+            <a:spAutoFit/>
+          </a:bodyPr>
+          <a:lstStyle/>
+          <a:p>
+            <a:pPr algn="l">
+              <a:spcAft>
+                <a:spcPts val="0"/>
+              </a:spcAft>
+            </a:pPr>
+            <a:r>
+              <a:rPr sz="1400" b="1" i="0">
+                <a:solidFill>
+                  <a:srgbClr val="0F172A"/>
+                </a:solidFill>
+                <a:latin typeface="Arial"/>
+              </a:rPr>
+              <a:t>Safety:</a:t>
+            </a:r>
+            <a:r>
+              <a:rPr sz="1400" b="0" i="0">
+                <a:solidFill>
+                  <a:srgbClr val="0F172A"/>
+                </a:solidFill>
+                <a:latin typeface="Arial"/>
+              </a:rPr>
+              <a:t> code limits and a kill switch; </a:t>
+            </a:r>
+            <a:r>
+              <a:rPr sz="1400" b="1" i="0">
+                <a:solidFill>
+                  <a:srgbClr val="0F172A"/>
+                </a:solidFill>
+                <a:latin typeface="Arial"/>
+              </a:rPr>
+              <a:t>9 / 9</a:t>
+            </a:r>
+            <a:r>
+              <a:rPr sz="1400" b="0" i="0">
+                <a:solidFill>
+                  <a:srgbClr val="0F172A"/>
+                </a:solidFill>
+                <a:latin typeface="Arial"/>
+              </a:rPr>
+              <a:t> planted violations blocked</a:t>
+            </a:r>
+          </a:p>
+        </p:txBody>
+      </p:sp>
+      <p:sp>
+        <p:nvSpPr>
+          <p:cNvPr id="12" name="Rounded Rectangle 11"/>
+          <p:cNvSpPr/>
+          <p:nvPr/>
+        </p:nvSpPr>
+        <p:spPr>
+          <a:xfrm>
+            <a:off x="6164427" y="5212080"/>
+            <a:ext cx="2716453" cy="1051560"/>
+          </a:xfrm>
+          <a:prstGeom prst="roundRect">
+            <a:avLst>
+              <a:gd name="adj" fmla="val 12000"/>
+            </a:avLst>
+          </a:prstGeom>
+          <a:solidFill>
+            <a:srgbClr val="FEF3C7"/>
+          </a:solidFill>
+          <a:ln>
+            <a:noFill/>
+          </a:ln>
+          <a:effectLst/>
+        </p:spPr>
+        <p:style>
+          <a:lnRef idx="1">
+            <a:schemeClr val="accent1"/>
+          </a:lnRef>
+          <a:fillRef idx="3">
+            <a:schemeClr val="accent1"/>
+          </a:fillRef>
+          <a:effectRef idx="2">
+            <a:schemeClr val="accent1"/>
+          </a:effectRef>
+          <a:fontRef idx="minor">
+            <a:schemeClr val="lt1"/>
+          </a:fontRef>
+        </p:style>
+        <p:txBody>
+          <a:bodyPr rtlCol="0" anchor="ctr"/>
+          <a:lstStyle/>
+          <a:p>
+            <a:pPr algn="ctr"/>
+          </a:p>
+        </p:txBody>
+      </p:sp>
+      <p:sp>
+        <p:nvSpPr>
+          <p:cNvPr id="13" name="TextBox 12"/>
+          <p:cNvSpPr txBox="1"/>
+          <p:nvPr/>
+        </p:nvSpPr>
+        <p:spPr>
+          <a:xfrm>
+            <a:off x="6255867" y="5212080"/>
+            <a:ext cx="2533573" cy="1051560"/>
+          </a:xfrm>
+          <a:prstGeom prst="rect">
+            <a:avLst/>
+          </a:prstGeom>
+          <a:noFill/>
+        </p:spPr>
+        <p:txBody>
+          <a:bodyPr wrap="square" anchor="ctr" lIns="73152" rIns="73152" tIns="36576" bIns="36576">
+            <a:spAutoFit/>
+          </a:bodyPr>
+          <a:lstStyle/>
+          <a:p>
+            <a:pPr algn="l">
+              <a:spcAft>
+                <a:spcPts val="0"/>
+              </a:spcAft>
+            </a:pPr>
+            <a:r>
+              <a:rPr sz="1400" b="1" i="0">
+                <a:solidFill>
+                  <a:srgbClr val="0F172A"/>
+                </a:solidFill>
+                <a:latin typeface="Arial"/>
+              </a:rPr>
+              <a:t>Learning:</a:t>
+            </a:r>
+            <a:r>
+              <a:rPr sz="1400" b="0" i="0">
+                <a:solidFill>
+                  <a:srgbClr val="0F172A"/>
+                </a:solidFill>
+                <a:latin typeface="Arial"/>
+              </a:rPr>
+              <a:t> rules graded by the market on held-out days, placebo-audited</a:t>
+            </a:r>
+          </a:p>
+        </p:txBody>
+      </p:sp>
+      <p:sp>
+        <p:nvSpPr>
+          <p:cNvPr id="14" name="Rounded Rectangle 13"/>
+          <p:cNvSpPr/>
+          <p:nvPr/>
+        </p:nvSpPr>
+        <p:spPr>
+          <a:xfrm>
+            <a:off x="9018041" y="5212080"/>
+            <a:ext cx="2716453" cy="1051560"/>
+          </a:xfrm>
+          <a:prstGeom prst="roundRect">
+            <a:avLst>
+              <a:gd name="adj" fmla="val 12000"/>
+            </a:avLst>
+          </a:prstGeom>
+          <a:solidFill>
+            <a:srgbClr val="FEF3C7"/>
+          </a:solidFill>
+          <a:ln>
+            <a:noFill/>
+          </a:ln>
+          <a:effectLst/>
+        </p:spPr>
+        <p:style>
+          <a:lnRef idx="1">
+            <a:schemeClr val="accent1"/>
+          </a:lnRef>
+          <a:fillRef idx="3">
+            <a:schemeClr val="accent1"/>
+          </a:fillRef>
+          <a:effectRef idx="2">
+            <a:schemeClr val="accent1"/>
+          </a:effectRef>
+          <a:fontRef idx="minor">
+            <a:schemeClr val="lt1"/>
+          </a:fontRef>
+        </p:style>
+        <p:txBody>
+          <a:bodyPr rtlCol="0" anchor="ctr"/>
+          <a:lstStyle/>
+          <a:p>
+            <a:pPr algn="ctr"/>
+          </a:p>
+        </p:txBody>
+      </p:sp>
+      <p:sp>
+        <p:nvSpPr>
+          <p:cNvPr id="15" name="TextBox 14"/>
+          <p:cNvSpPr txBox="1"/>
+          <p:nvPr/>
+        </p:nvSpPr>
+        <p:spPr>
+          <a:xfrm>
+            <a:off x="9109481" y="5212080"/>
+            <a:ext cx="2533573" cy="1051560"/>
+          </a:xfrm>
+          <a:prstGeom prst="rect">
+            <a:avLst/>
+          </a:prstGeom>
+          <a:noFill/>
+        </p:spPr>
+        <p:txBody>
+          <a:bodyPr wrap="square" anchor="ctr" lIns="73152" rIns="73152" tIns="36576" bIns="36576">
+            <a:spAutoFit/>
+          </a:bodyPr>
+          <a:lstStyle/>
+          <a:p>
+            <a:pPr algn="l">
+              <a:spcAft>
+                <a:spcPts val="0"/>
+              </a:spcAft>
+            </a:pPr>
+            <a:r>
+              <a:rPr sz="1400" b="1" i="0">
+                <a:solidFill>
+                  <a:srgbClr val="0F172A"/>
+                </a:solidFill>
+                <a:latin typeface="Arial"/>
+              </a:rPr>
+              <a:t>People in the loop:</a:t>
+            </a:r>
+            <a:r>
+              <a:rPr sz="1400" b="0" i="0">
+                <a:solidFill>
+                  <a:srgbClr val="0F172A"/>
+                </a:solidFill>
+                <a:latin typeface="Arial"/>
+              </a:rPr>
+              <a:t> humans confirm; Coach and League teach with its analysis</a:t>
+            </a:r>
+          </a:p>
+        </p:txBody>
+      </p:sp>
+    </p:spTree>
+  </p:cSld>
+  <p:clrMapOvr>
+    <a:masterClrMapping/>
+  </p:clrMapOvr>
+</p:sld>
+</file>
+
+<file path=ppt/slides/slide5.xml><?xml version="1.0" encoding="utf-8"?>
+<p:sld xmlns:a="http://schemas.openxmlformats.org/drawingml/2006/main" xmlns:p="http://schemas.openxmlformats.org/presentationml/2006/main" xmlns:r="http://schemas.openxmlformats.org/officeDocument/2006/relationships">
+  <p:cSld>
+    <p:spTree>
+      <p:nvGrpSpPr>
+        <p:cNvPr id="1" name=""/>
+        <p:cNvGrpSpPr/>
+        <p:nvPr/>
+      </p:nvGrpSpPr>
+      <p:grpSpPr/>
+      <p:sp>
+        <p:nvSpPr>
+          <p:cNvPr id="2" name="Rectangle 1"/>
+          <p:cNvSpPr/>
+          <p:nvPr/>
+        </p:nvSpPr>
+        <p:spPr>
+          <a:xfrm>
+            <a:off x="0" y="0"/>
+            <a:ext cx="12191695" cy="868680"/>
+          </a:xfrm>
+          <a:prstGeom prst="rect">
+            <a:avLst/>
+          </a:prstGeom>
+          <a:solidFill>
+            <a:srgbClr val="1E293B"/>
+          </a:solidFill>
+          <a:ln>
+            <a:noFill/>
+          </a:ln>
+          <a:effectLst/>
+        </p:spPr>
+        <p:style>
+          <a:lnRef idx="1">
+            <a:schemeClr val="accent1"/>
+          </a:lnRef>
+          <a:fillRef idx="3">
+            <a:schemeClr val="accent1"/>
+          </a:fillRef>
+          <a:effectRef idx="2">
+            <a:schemeClr val="accent1"/>
+          </a:effectRef>
+          <a:fontRef idx="minor">
+            <a:schemeClr val="lt1"/>
+          </a:fontRef>
+        </p:style>
+        <p:txBody>
+          <a:bodyPr rtlCol="0" anchor="ctr"/>
+          <a:lstStyle/>
+          <a:p>
+            <a:pPr algn="ctr"/>
+          </a:p>
+        </p:txBody>
+      </p:sp>
+      <p:sp>
+        <p:nvSpPr>
+          <p:cNvPr id="3" name="Rectangle 2"/>
+          <p:cNvSpPr/>
+          <p:nvPr/>
+        </p:nvSpPr>
+        <p:spPr>
+          <a:xfrm>
+            <a:off x="0" y="868680"/>
+            <a:ext cx="12191695" cy="54864"/>
+          </a:xfrm>
+          <a:prstGeom prst="rect">
+            <a:avLst/>
+          </a:prstGeom>
+          <a:solidFill>
+            <a:srgbClr val="EA580C"/>
+          </a:solidFill>
+          <a:ln>
+            <a:noFill/>
+          </a:ln>
+          <a:effectLst/>
+        </p:spPr>
+        <p:style>
+          <a:lnRef idx="1">
+            <a:schemeClr val="accent1"/>
+          </a:lnRef>
+          <a:fillRef idx="3">
+            <a:schemeClr val="accent1"/>
+          </a:fillRef>
+          <a:effectRef idx="2">
+            <a:schemeClr val="accent1"/>
+          </a:effectRef>
+          <a:fontRef idx="minor">
+            <a:schemeClr val="lt1"/>
+          </a:fontRef>
+        </p:style>
+        <p:txBody>
+          <a:bodyPr rtlCol="0" anchor="ctr"/>
+          <a:lstStyle/>
+          <a:p>
+            <a:pPr algn="ctr"/>
+          </a:p>
+        </p:txBody>
+      </p:sp>
+      <p:sp>
+        <p:nvSpPr>
+          <p:cNvPr id="4" name="TextBox 3"/>
+          <p:cNvSpPr txBox="1"/>
+          <p:nvPr/>
+        </p:nvSpPr>
+        <p:spPr>
+          <a:xfrm>
+            <a:off x="457200" y="109728"/>
+            <a:ext cx="11277295" cy="685800"/>
+          </a:xfrm>
+          <a:prstGeom prst="rect">
+            <a:avLst/>
+          </a:prstGeom>
+          <a:noFill/>
+        </p:spPr>
+        <p:txBody>
+          <a:bodyPr wrap="square" anchor="ctr" lIns="73152" rIns="73152" tIns="36576" bIns="36576">
+            <a:spAutoFit/>
+          </a:bodyPr>
+          <a:lstStyle/>
+          <a:p>
+            <a:pPr algn="l">
+              <a:spcAft>
+                <a:spcPts val="0"/>
+              </a:spcAft>
+            </a:pPr>
+            <a:r>
+              <a:rPr sz="3000" b="1" i="0">
+                <a:solidFill>
+                  <a:srgbClr val="FFFFFF"/>
+                </a:solidFill>
+                <a:latin typeface="Arial"/>
+              </a:rPr>
+              <a:t>Market-Graded Learning: the closing price is the grader</a:t>
+            </a:r>
+          </a:p>
+        </p:txBody>
+      </p:sp>
+      <p:sp>
+        <p:nvSpPr>
+          <p:cNvPr id="5" name="TextBox 4"/>
+          <p:cNvSpPr txBox="1"/>
+          <p:nvPr/>
+        </p:nvSpPr>
+        <p:spPr>
+          <a:xfrm>
+            <a:off x="457200" y="6446520"/>
+            <a:ext cx="9144000" cy="320040"/>
+          </a:xfrm>
+          <a:prstGeom prst="rect">
+            <a:avLst/>
+          </a:prstGeom>
+          <a:noFill/>
+        </p:spPr>
+        <p:txBody>
+          <a:bodyPr wrap="square" anchor="t" lIns="73152" rIns="73152" tIns="36576" bIns="36576">
+            <a:spAutoFit/>
+          </a:bodyPr>
+          <a:lstStyle/>
+          <a:p>
+            <a:pPr algn="l">
+              <a:spcAft>
+                <a:spcPts val="0"/>
+              </a:spcAft>
+            </a:pPr>
+            <a:r>
+              <a:rPr sz="1100" b="0" i="0">
+                <a:solidFill>
+                  <a:srgbClr val="64748B"/>
+                </a:solidFill>
+                <a:latin typeface="Arial"/>
+              </a:rPr>
+              <a:t>DASC7606C Group 12 · Market-Graded Learning: the closing price grades every component</a:t>
+            </a:r>
+          </a:p>
+        </p:txBody>
+      </p:sp>
+      <p:sp>
+        <p:nvSpPr>
+          <p:cNvPr id="6" name="TextBox 5"/>
+          <p:cNvSpPr txBox="1"/>
+          <p:nvPr/>
+        </p:nvSpPr>
+        <p:spPr>
+          <a:xfrm>
+            <a:off x="10820095" y="6446520"/>
+            <a:ext cx="914400" cy="320040"/>
+          </a:xfrm>
+          <a:prstGeom prst="rect">
+            <a:avLst/>
+          </a:prstGeom>
+          <a:noFill/>
+        </p:spPr>
+        <p:txBody>
+          <a:bodyPr wrap="square" anchor="t" lIns="73152" rIns="73152" tIns="36576" bIns="36576">
+            <a:spAutoFit/>
+          </a:bodyPr>
+          <a:lstStyle/>
+          <a:p>
+            <a:pPr algn="r">
+              <a:spcAft>
+                <a:spcPts val="0"/>
+              </a:spcAft>
+            </a:pPr>
+            <a:r>
+              <a:rPr sz="1100" b="0" i="0">
+                <a:solidFill>
+                  <a:srgbClr val="64748B"/>
+                </a:solidFill>
+                <a:latin typeface="Arial"/>
+              </a:rPr>
+              <a:t>5</a:t>
             </a:r>
           </a:p>
         </p:txBody>
@@ -12452,7 +13093,7 @@
 </p:sld>
 </file>
 
-<file path=ppt/slides/slide5.xml><?xml version="1.0" encoding="utf-8"?>
+<file path=ppt/slides/slide6.xml><?xml version="1.0" encoding="utf-8"?>
 <p:sld xmlns:a="http://schemas.openxmlformats.org/drawingml/2006/main" xmlns:p="http://schemas.openxmlformats.org/presentationml/2006/main" xmlns:r="http://schemas.openxmlformats.org/officeDocument/2006/relationships">
   <p:cSld>
     <p:spTree>
@@ -12662,7 +13303,7 @@
                 </a:solidFill>
                 <a:latin typeface="Arial"/>
               </a:rPr>
-              <a:t>5</a:t>
+              <a:t>6</a:t>
             </a:r>
           </a:p>
         </p:txBody>
@@ -13447,7 +14088,7 @@
 </p:sld>
 </file>
 
-<file path=ppt/slides/slide6.xml><?xml version="1.0" encoding="utf-8"?>
+<file path=ppt/slides/slide7.xml><?xml version="1.0" encoding="utf-8"?>
 <p:sld xmlns:a="http://schemas.openxmlformats.org/drawingml/2006/main" xmlns:p="http://schemas.openxmlformats.org/presentationml/2006/main" xmlns:r="http://schemas.openxmlformats.org/officeDocument/2006/relationships">
   <p:cSld>
     <p:spTree>
@@ -13579,7 +14220,7 @@
                 </a:solidFill>
                 <a:latin typeface="Arial"/>
               </a:rPr>
-              <a:t>Evidence 1: costs set a hurdle before you start</a:t>
+              <a:t>Evidence 1: costs, and a price that moves before the news</a:t>
             </a:r>
           </a:p>
         </p:txBody>
@@ -13657,7 +14298,7 @@
                 </a:solidFill>
                 <a:latin typeface="Arial"/>
               </a:rPr>
-              <a:t>6</a:t>
+              <a:t>7</a:t>
             </a:r>
           </a:p>
         </p:txBody>
@@ -13678,441 +14319,8 @@
         </p:blipFill>
         <p:spPr>
           <a:xfrm>
-            <a:off x="1352397" y="1097280"/>
-            <a:ext cx="9486900" cy="3794760"/>
-          </a:xfrm>
-          <a:prstGeom prst="rect">
-            <a:avLst/>
-          </a:prstGeom>
-        </p:spPr>
-      </p:pic>
-      <p:sp>
-        <p:nvSpPr>
-          <p:cNvPr id="8" name="TextBox 7"/>
-          <p:cNvSpPr txBox="1"/>
-          <p:nvPr/>
-        </p:nvSpPr>
-        <p:spPr>
-          <a:xfrm>
-            <a:off x="457200" y="4983480"/>
-            <a:ext cx="5547207" cy="1371600"/>
-          </a:xfrm>
-          <a:prstGeom prst="rect">
-            <a:avLst/>
-          </a:prstGeom>
-          <a:noFill/>
-        </p:spPr>
-        <p:txBody>
-          <a:bodyPr wrap="square" anchor="t" lIns="73152" rIns="73152" tIns="36576" bIns="36576">
-            <a:spAutoFit/>
-          </a:bodyPr>
-          <a:lstStyle/>
-          <a:p>
-            <a:pPr algn="l" marL="292608" indent="-256032">
-              <a:spcAft>
-                <a:spcPts val="400"/>
-              </a:spcAft>
-              <a:buChar char="•"/>
-            </a:pPr>
-            <a:r>
-              <a:rPr sz="1800" b="1" i="0">
-                <a:solidFill>
-                  <a:srgbClr val="0F172A"/>
-                </a:solidFill>
-                <a:latin typeface="Arial"/>
-              </a:rPr>
-              <a:t>1.92¢ per contract</a:t>
-            </a:r>
-            <a:r>
-              <a:rPr sz="1800" b="0" i="0">
-                <a:solidFill>
-                  <a:srgbClr val="0F172A"/>
-                </a:solidFill>
-                <a:latin typeface="Arial"/>
-              </a:rPr>
-              <a:t> = 5.0% of price; </a:t>
-            </a:r>
-            <a:r>
-              <a:rPr sz="1800" b="1" i="0">
-                <a:solidFill>
-                  <a:srgbClr val="0F172A"/>
-                </a:solidFill>
-                <a:latin typeface="Arial"/>
-              </a:rPr>
-              <a:t>9–14%</a:t>
-            </a:r>
-            <a:r>
-              <a:rPr sz="1800" b="0" i="0">
-                <a:solidFill>
-                  <a:srgbClr val="0F172A"/>
-                </a:solidFill>
-                <a:latin typeface="Arial"/>
-              </a:rPr>
-              <a:t> under 20¢</a:t>
-            </a:r>
-          </a:p>
-          <a:p>
-            <a:pPr algn="l" marL="292608" indent="-256032">
-              <a:spcAft>
-                <a:spcPts val="400"/>
-              </a:spcAft>
-              <a:buChar char="•"/>
-            </a:pPr>
-            <a:r>
-              <a:rPr sz="1800" b="0" i="0">
-                <a:solidFill>
-                  <a:srgbClr val="0F172A"/>
-                </a:solidFill>
-                <a:latin typeface="Arial"/>
-              </a:rPr>
-              <a:t>Best agent, Feb–Apr: +$36 at mid → </a:t>
-            </a:r>
-            <a:r>
-              <a:rPr sz="1800" b="1" i="0">
-                <a:solidFill>
-                  <a:srgbClr val="0F172A"/>
-                </a:solidFill>
-                <a:latin typeface="Arial"/>
-              </a:rPr>
-              <a:t>−$32</a:t>
-            </a:r>
-            <a:r>
-              <a:rPr sz="1800" b="0" i="0">
-                <a:solidFill>
-                  <a:srgbClr val="0F172A"/>
-                </a:solidFill>
-                <a:latin typeface="Arial"/>
-              </a:rPr>
-              <a:t> after costs</a:t>
-            </a:r>
-          </a:p>
-        </p:txBody>
-      </p:sp>
-      <p:sp>
-        <p:nvSpPr>
-          <p:cNvPr id="9" name="TextBox 8"/>
-          <p:cNvSpPr txBox="1"/>
-          <p:nvPr/>
-        </p:nvSpPr>
-        <p:spPr>
-          <a:xfrm>
-            <a:off x="6187287" y="4983480"/>
-            <a:ext cx="5547207" cy="1371600"/>
-          </a:xfrm>
-          <a:prstGeom prst="rect">
-            <a:avLst/>
-          </a:prstGeom>
-          <a:noFill/>
-        </p:spPr>
-        <p:txBody>
-          <a:bodyPr wrap="square" anchor="t" lIns="73152" rIns="73152" tIns="36576" bIns="36576">
-            <a:spAutoFit/>
-          </a:bodyPr>
-          <a:lstStyle/>
-          <a:p>
-            <a:pPr algn="l" marL="292608" indent="-256032">
-              <a:spcAft>
-                <a:spcPts val="400"/>
-              </a:spcAft>
-              <a:buChar char="•"/>
-            </a:pPr>
-            <a:r>
-              <a:rPr sz="1800" b="0" i="0">
-                <a:solidFill>
-                  <a:srgbClr val="0F172A"/>
-                </a:solidFill>
-                <a:latin typeface="Arial"/>
-              </a:rPr>
-              <a:t>771 decision points → 153 with gap &gt; 4 pts → </a:t>
-            </a:r>
-            <a:r>
-              <a:rPr sz="1800" b="1" i="0">
-                <a:solidFill>
-                  <a:srgbClr val="0F172A"/>
-                </a:solidFill>
-                <a:latin typeface="Arial"/>
-              </a:rPr>
-              <a:t>74 trades</a:t>
-            </a:r>
-          </a:p>
-          <a:p>
-            <a:pPr algn="l" marL="292608" indent="-256032">
-              <a:spcAft>
-                <a:spcPts val="400"/>
-              </a:spcAft>
-              <a:buChar char="•"/>
-            </a:pPr>
-            <a:r>
-              <a:rPr sz="1800" b="0" i="0">
-                <a:solidFill>
-                  <a:srgbClr val="0F172A"/>
-                </a:solidFill>
-                <a:latin typeface="Arial"/>
-              </a:rPr>
-              <a:t>Only </a:t>
-            </a:r>
-            <a:r>
-              <a:rPr sz="1800" b="1" i="0">
-                <a:solidFill>
-                  <a:srgbClr val="0F172A"/>
-                </a:solidFill>
-                <a:latin typeface="Arial"/>
-              </a:rPr>
-              <a:t>27 (36%)</a:t>
-            </a:r>
-            <a:r>
-              <a:rPr sz="1800" b="0" i="0">
-                <a:solidFill>
-                  <a:srgbClr val="0F172A"/>
-                </a:solidFill>
-                <a:latin typeface="Arial"/>
-              </a:rPr>
-              <a:t> beat or matched the close</a:t>
-            </a:r>
-          </a:p>
-        </p:txBody>
-      </p:sp>
-    </p:spTree>
-  </p:cSld>
-  <p:clrMapOvr>
-    <a:masterClrMapping/>
-  </p:clrMapOvr>
-</p:sld>
-</file>
-
-<file path=ppt/slides/slide7.xml><?xml version="1.0" encoding="utf-8"?>
-<p:sld xmlns:a="http://schemas.openxmlformats.org/drawingml/2006/main" xmlns:p="http://schemas.openxmlformats.org/presentationml/2006/main" xmlns:r="http://schemas.openxmlformats.org/officeDocument/2006/relationships">
-  <p:cSld>
-    <p:spTree>
-      <p:nvGrpSpPr>
-        <p:cNvPr id="1" name=""/>
-        <p:cNvGrpSpPr/>
-        <p:nvPr/>
-      </p:nvGrpSpPr>
-      <p:grpSpPr/>
-      <p:sp>
-        <p:nvSpPr>
-          <p:cNvPr id="2" name="Rectangle 1"/>
-          <p:cNvSpPr/>
-          <p:nvPr/>
-        </p:nvSpPr>
-        <p:spPr>
-          <a:xfrm>
-            <a:off x="0" y="0"/>
-            <a:ext cx="12191695" cy="868680"/>
-          </a:xfrm>
-          <a:prstGeom prst="rect">
-            <a:avLst/>
-          </a:prstGeom>
-          <a:solidFill>
-            <a:srgbClr val="1E293B"/>
-          </a:solidFill>
-          <a:ln>
-            <a:noFill/>
-          </a:ln>
-          <a:effectLst/>
-        </p:spPr>
-        <p:style>
-          <a:lnRef idx="1">
-            <a:schemeClr val="accent1"/>
-          </a:lnRef>
-          <a:fillRef idx="3">
-            <a:schemeClr val="accent1"/>
-          </a:fillRef>
-          <a:effectRef idx="2">
-            <a:schemeClr val="accent1"/>
-          </a:effectRef>
-          <a:fontRef idx="minor">
-            <a:schemeClr val="lt1"/>
-          </a:fontRef>
-        </p:style>
-        <p:txBody>
-          <a:bodyPr rtlCol="0" anchor="ctr"/>
-          <a:lstStyle/>
-          <a:p>
-            <a:pPr algn="ctr"/>
-          </a:p>
-        </p:txBody>
-      </p:sp>
-      <p:sp>
-        <p:nvSpPr>
-          <p:cNvPr id="3" name="Rectangle 2"/>
-          <p:cNvSpPr/>
-          <p:nvPr/>
-        </p:nvSpPr>
-        <p:spPr>
-          <a:xfrm>
-            <a:off x="0" y="868680"/>
-            <a:ext cx="12191695" cy="54864"/>
-          </a:xfrm>
-          <a:prstGeom prst="rect">
-            <a:avLst/>
-          </a:prstGeom>
-          <a:solidFill>
-            <a:srgbClr val="EA580C"/>
-          </a:solidFill>
-          <a:ln>
-            <a:noFill/>
-          </a:ln>
-          <a:effectLst/>
-        </p:spPr>
-        <p:style>
-          <a:lnRef idx="1">
-            <a:schemeClr val="accent1"/>
-          </a:lnRef>
-          <a:fillRef idx="3">
-            <a:schemeClr val="accent1"/>
-          </a:fillRef>
-          <a:effectRef idx="2">
-            <a:schemeClr val="accent1"/>
-          </a:effectRef>
-          <a:fontRef idx="minor">
-            <a:schemeClr val="lt1"/>
-          </a:fontRef>
-        </p:style>
-        <p:txBody>
-          <a:bodyPr rtlCol="0" anchor="ctr"/>
-          <a:lstStyle/>
-          <a:p>
-            <a:pPr algn="ctr"/>
-          </a:p>
-        </p:txBody>
-      </p:sp>
-      <p:sp>
-        <p:nvSpPr>
-          <p:cNvPr id="4" name="TextBox 3"/>
-          <p:cNvSpPr txBox="1"/>
-          <p:nvPr/>
-        </p:nvSpPr>
-        <p:spPr>
-          <a:xfrm>
-            <a:off x="457200" y="109728"/>
-            <a:ext cx="11277295" cy="685800"/>
-          </a:xfrm>
-          <a:prstGeom prst="rect">
-            <a:avLst/>
-          </a:prstGeom>
-          <a:noFill/>
-        </p:spPr>
-        <p:txBody>
-          <a:bodyPr wrap="square" anchor="ctr" lIns="73152" rIns="73152" tIns="36576" bIns="36576">
-            <a:spAutoFit/>
-          </a:bodyPr>
-          <a:lstStyle/>
-          <a:p>
-            <a:pPr algn="l">
-              <a:spcAft>
-                <a:spcPts val="0"/>
-              </a:spcAft>
-            </a:pPr>
-            <a:r>
-              <a:rPr sz="3000" b="1" i="0">
-                <a:solidFill>
-                  <a:srgbClr val="FFFFFF"/>
-                </a:solidFill>
-                <a:latin typeface="Arial"/>
-              </a:rPr>
-              <a:t>Evidence 2: the price moves before the news reaches you</a:t>
-            </a:r>
-          </a:p>
-        </p:txBody>
-      </p:sp>
-      <p:sp>
-        <p:nvSpPr>
-          <p:cNvPr id="5" name="TextBox 4"/>
-          <p:cNvSpPr txBox="1"/>
-          <p:nvPr/>
-        </p:nvSpPr>
-        <p:spPr>
-          <a:xfrm>
-            <a:off x="457200" y="6446520"/>
-            <a:ext cx="9144000" cy="320040"/>
-          </a:xfrm>
-          <a:prstGeom prst="rect">
-            <a:avLst/>
-          </a:prstGeom>
-          <a:noFill/>
-        </p:spPr>
-        <p:txBody>
-          <a:bodyPr wrap="square" anchor="t" lIns="73152" rIns="73152" tIns="36576" bIns="36576">
-            <a:spAutoFit/>
-          </a:bodyPr>
-          <a:lstStyle/>
-          <a:p>
-            <a:pPr algn="l">
-              <a:spcAft>
-                <a:spcPts val="0"/>
-              </a:spcAft>
-            </a:pPr>
-            <a:r>
-              <a:rPr sz="1100" b="0" i="0">
-                <a:solidFill>
-                  <a:srgbClr val="64748B"/>
-                </a:solidFill>
-                <a:latin typeface="Arial"/>
-              </a:rPr>
-              <a:t>DASC7606C Group 12 · Market-Graded Learning: the closing price grades every component</a:t>
-            </a:r>
-          </a:p>
-        </p:txBody>
-      </p:sp>
-      <p:sp>
-        <p:nvSpPr>
-          <p:cNvPr id="6" name="TextBox 5"/>
-          <p:cNvSpPr txBox="1"/>
-          <p:nvPr/>
-        </p:nvSpPr>
-        <p:spPr>
-          <a:xfrm>
-            <a:off x="10820095" y="6446520"/>
-            <a:ext cx="914400" cy="320040"/>
-          </a:xfrm>
-          <a:prstGeom prst="rect">
-            <a:avLst/>
-          </a:prstGeom>
-          <a:noFill/>
-        </p:spPr>
-        <p:txBody>
-          <a:bodyPr wrap="square" anchor="t" lIns="73152" rIns="73152" tIns="36576" bIns="36576">
-            <a:spAutoFit/>
-          </a:bodyPr>
-          <a:lstStyle/>
-          <a:p>
-            <a:pPr algn="r">
-              <a:spcAft>
-                <a:spcPts val="0"/>
-              </a:spcAft>
-            </a:pPr>
-            <a:r>
-              <a:rPr sz="1100" b="0" i="0">
-                <a:solidFill>
-                  <a:srgbClr val="64748B"/>
-                </a:solidFill>
-                <a:latin typeface="Arial"/>
-              </a:rPr>
-              <a:t>7</a:t>
-            </a:r>
-          </a:p>
-        </p:txBody>
-      </p:sp>
-      <p:pic>
-        <p:nvPicPr>
-          <p:cNvPr id="7" name="Picture 6" descr="price_discovery.png"/>
-          <p:cNvPicPr>
-            <a:picLocks noChangeAspect="1"/>
-          </p:cNvPicPr>
-          <p:nvPr/>
-        </p:nvPicPr>
-        <p:blipFill>
-          <a:blip r:embed="rId3"/>
-          <a:stretch>
-            <a:fillRect/>
-          </a:stretch>
-        </p:blipFill>
-        <p:spPr>
-          <a:xfrm>
-            <a:off x="457200" y="1856232"/>
-            <a:ext cx="5120640" cy="2048255"/>
+            <a:off x="457200" y="1139982"/>
+            <a:ext cx="5501487" cy="2200595"/>
           </a:xfrm>
           <a:prstGeom prst="rect">
             <a:avLst/>
@@ -14121,7 +14329,7 @@
       </p:pic>
       <p:pic>
         <p:nvPicPr>
-          <p:cNvPr id="8" name="Picture 7" descr="injury_timing.png"/>
+          <p:cNvPr id="8" name="Picture 7" descr="price_discovery.png"/>
           <p:cNvPicPr>
             <a:picLocks noChangeAspect="1"/>
           </p:cNvPicPr>
@@ -14135,8 +14343,8 @@
         </p:blipFill>
         <p:spPr>
           <a:xfrm>
-            <a:off x="5715000" y="1676460"/>
-            <a:ext cx="6019495" cy="2407798"/>
+            <a:off x="6233007" y="1139982"/>
+            <a:ext cx="5501487" cy="2200595"/>
           </a:xfrm>
           <a:prstGeom prst="rect">
             <a:avLst/>
@@ -14151,8 +14359,8 @@
         </p:nvSpPr>
         <p:spPr>
           <a:xfrm>
-            <a:off x="457200" y="4754880"/>
-            <a:ext cx="11277295" cy="1600200"/>
+            <a:off x="457200" y="3520439"/>
+            <a:ext cx="5501487" cy="457200"/>
           </a:xfrm>
           <a:prstGeom prst="rect">
             <a:avLst/>
@@ -14165,81 +14373,305 @@
           </a:bodyPr>
           <a:lstStyle/>
           <a:p>
+            <a:pPr algn="l">
+              <a:spcAft>
+                <a:spcPts val="0"/>
+              </a:spcAft>
+            </a:pPr>
+            <a:r>
+              <a:rPr sz="2000" b="1" i="0">
+                <a:solidFill>
+                  <a:srgbClr val="EA580C"/>
+                </a:solidFill>
+                <a:latin typeface="Arial"/>
+              </a:rPr>
+              <a:t>Costs</a:t>
+            </a:r>
+          </a:p>
+        </p:txBody>
+      </p:sp>
+      <p:sp>
+        <p:nvSpPr>
+          <p:cNvPr id="10" name="TextBox 9"/>
+          <p:cNvSpPr txBox="1"/>
+          <p:nvPr/>
+        </p:nvSpPr>
+        <p:spPr>
+          <a:xfrm>
+            <a:off x="457200" y="3931920"/>
+            <a:ext cx="5501487" cy="2377440"/>
+          </a:xfrm>
+          <a:prstGeom prst="rect">
+            <a:avLst/>
+          </a:prstGeom>
+          <a:noFill/>
+        </p:spPr>
+        <p:txBody>
+          <a:bodyPr wrap="square" anchor="t" lIns="73152" rIns="73152" tIns="36576" bIns="36576">
+            <a:spAutoFit/>
+          </a:bodyPr>
+          <a:lstStyle/>
+          <a:p>
             <a:pPr algn="l" marL="292608" indent="-256032">
               <a:spcAft>
-                <a:spcPts val="400"/>
+                <a:spcPts val="600"/>
               </a:spcAft>
               <a:buChar char="•"/>
             </a:pPr>
             <a:r>
-              <a:rPr sz="1800" b="1" i="0">
+              <a:rPr sz="1700" b="1" i="0">
                 <a:solidFill>
                   <a:srgbClr val="0F172A"/>
                 </a:solidFill>
                 <a:latin typeface="Arial"/>
               </a:rPr>
-              <a:t>91%</a:t>
-            </a:r>
-            <a:r>
-              <a:rPr sz="1800" b="0" i="0">
+              <a:t>1.92¢ per contract</a:t>
+            </a:r>
+            <a:r>
+              <a:rPr sz="1700" b="0" i="0">
                 <a:solidFill>
                   <a:srgbClr val="0F172A"/>
                 </a:solidFill>
                 <a:latin typeface="Arial"/>
               </a:rPr>
-              <a:t> of the move happens before the inactive list (+1.80 vs +0.18 pts, 193 test games)</a:t>
+              <a:t> = 5.0% of price; </a:t>
+            </a:r>
+            <a:r>
+              <a:rPr sz="1700" b="1" i="0">
+                <a:solidFill>
+                  <a:srgbClr val="0F172A"/>
+                </a:solidFill>
+                <a:latin typeface="Arial"/>
+              </a:rPr>
+              <a:t>9–14%</a:t>
+            </a:r>
+            <a:r>
+              <a:rPr sz="1700" b="0" i="0">
+                <a:solidFill>
+                  <a:srgbClr val="0F172A"/>
+                </a:solidFill>
+                <a:latin typeface="Arial"/>
+              </a:rPr>
+              <a:t> under 20¢</a:t>
             </a:r>
           </a:p>
           <a:p>
             <a:pPr algn="l" marL="292608" indent="-256032">
               <a:spcAft>
-                <a:spcPts val="400"/>
+                <a:spcPts val="600"/>
               </a:spcAft>
               <a:buChar char="•"/>
             </a:pPr>
             <a:r>
-              <a:rPr sz="1800" b="0" i="0">
+              <a:rPr sz="1700" b="0" i="0">
                 <a:solidFill>
                   <a:srgbClr val="0F172A"/>
                 </a:solidFill>
                 <a:latin typeface="Arial"/>
               </a:rPr>
-              <a:t>About </a:t>
-            </a:r>
-            <a:r>
-              <a:rPr sz="1800" b="1" i="0">
+              <a:t>Best agent, Feb–Apr: +$36 at mid → </a:t>
+            </a:r>
+            <a:r>
+              <a:rPr sz="1700" b="1" i="0">
                 <a:solidFill>
                   <a:srgbClr val="0F172A"/>
                 </a:solidFill>
                 <a:latin typeface="Arial"/>
               </a:rPr>
-              <a:t>two-thirds</a:t>
-            </a:r>
-            <a:r>
-              <a:rPr sz="1800" b="0" i="0">
+              <a:t>−$32</a:t>
+            </a:r>
+            <a:r>
+              <a:rPr sz="1700" b="0" i="0">
                 <a:solidFill>
                   <a:srgbClr val="0F172A"/>
                 </a:solidFill>
                 <a:latin typeface="Arial"/>
               </a:rPr>
-              <a:t> (67%, CI 47–85%) comes before the first official injury report, ~6 h earlier</a:t>
+              <a:t> after costs</a:t>
             </a:r>
           </a:p>
           <a:p>
             <a:pPr algn="l" marL="292608" indent="-256032">
               <a:spcAft>
-                <a:spcPts val="400"/>
+                <a:spcPts val="600"/>
               </a:spcAft>
               <a:buChar char="•"/>
             </a:pPr>
             <a:r>
-              <a:rPr sz="1500" b="0" i="0">
+              <a:rPr sz="1700" b="0" i="0">
+                <a:solidFill>
+                  <a:srgbClr val="0F172A"/>
+                </a:solidFill>
+                <a:latin typeface="Arial"/>
+              </a:rPr>
+              <a:t>771 decision points → </a:t>
+            </a:r>
+            <a:r>
+              <a:rPr sz="1700" b="1" i="0">
+                <a:solidFill>
+                  <a:srgbClr val="0F172A"/>
+                </a:solidFill>
+                <a:latin typeface="Arial"/>
+              </a:rPr>
+              <a:t>74 trades</a:t>
+            </a:r>
+            <a:r>
+              <a:rPr sz="1700" b="0" i="0">
+                <a:solidFill>
+                  <a:srgbClr val="0F172A"/>
+                </a:solidFill>
+                <a:latin typeface="Arial"/>
+              </a:rPr>
+              <a:t>; only </a:t>
+            </a:r>
+            <a:r>
+              <a:rPr sz="1700" b="1" i="0">
+                <a:solidFill>
+                  <a:srgbClr val="0F172A"/>
+                </a:solidFill>
+                <a:latin typeface="Arial"/>
+              </a:rPr>
+              <a:t>27 (36%)</a:t>
+            </a:r>
+            <a:r>
+              <a:rPr sz="1700" b="0" i="0">
+                <a:solidFill>
+                  <a:srgbClr val="0F172A"/>
+                </a:solidFill>
+                <a:latin typeface="Arial"/>
+              </a:rPr>
+              <a:t> beat the close</a:t>
+            </a:r>
+          </a:p>
+        </p:txBody>
+      </p:sp>
+      <p:sp>
+        <p:nvSpPr>
+          <p:cNvPr id="11" name="TextBox 10"/>
+          <p:cNvSpPr txBox="1"/>
+          <p:nvPr/>
+        </p:nvSpPr>
+        <p:spPr>
+          <a:xfrm>
+            <a:off x="6233007" y="3520439"/>
+            <a:ext cx="5501487" cy="457200"/>
+          </a:xfrm>
+          <a:prstGeom prst="rect">
+            <a:avLst/>
+          </a:prstGeom>
+          <a:noFill/>
+        </p:spPr>
+        <p:txBody>
+          <a:bodyPr wrap="square" anchor="t" lIns="73152" rIns="73152" tIns="36576" bIns="36576">
+            <a:spAutoFit/>
+          </a:bodyPr>
+          <a:lstStyle/>
+          <a:p>
+            <a:pPr algn="l">
+              <a:spcAft>
+                <a:spcPts val="0"/>
+              </a:spcAft>
+            </a:pPr>
+            <a:r>
+              <a:rPr sz="2000" b="1" i="0">
+                <a:solidFill>
+                  <a:srgbClr val="2563EB"/>
+                </a:solidFill>
+                <a:latin typeface="Arial"/>
+              </a:rPr>
+              <a:t>Speed</a:t>
+            </a:r>
+          </a:p>
+        </p:txBody>
+      </p:sp>
+      <p:sp>
+        <p:nvSpPr>
+          <p:cNvPr id="12" name="TextBox 11"/>
+          <p:cNvSpPr txBox="1"/>
+          <p:nvPr/>
+        </p:nvSpPr>
+        <p:spPr>
+          <a:xfrm>
+            <a:off x="6233007" y="3931920"/>
+            <a:ext cx="5501487" cy="2377440"/>
+          </a:xfrm>
+          <a:prstGeom prst="rect">
+            <a:avLst/>
+          </a:prstGeom>
+          <a:noFill/>
+        </p:spPr>
+        <p:txBody>
+          <a:bodyPr wrap="square" anchor="t" lIns="73152" rIns="73152" tIns="36576" bIns="36576">
+            <a:spAutoFit/>
+          </a:bodyPr>
+          <a:lstStyle/>
+          <a:p>
+            <a:pPr algn="l" marL="292608" indent="-256032">
+              <a:spcAft>
+                <a:spcPts val="600"/>
+              </a:spcAft>
+              <a:buChar char="•"/>
+            </a:pPr>
+            <a:r>
+              <a:rPr sz="1700" b="1" i="0">
+                <a:solidFill>
+                  <a:srgbClr val="0F172A"/>
+                </a:solidFill>
+                <a:latin typeface="Arial"/>
+              </a:rPr>
+              <a:t>91%</a:t>
+            </a:r>
+            <a:r>
+              <a:rPr sz="1700" b="0" i="0">
+                <a:solidFill>
+                  <a:srgbClr val="0F172A"/>
+                </a:solidFill>
+                <a:latin typeface="Arial"/>
+              </a:rPr>
+              <a:t> of the move before the inactive list (+1.80 vs +0.18 pts, 193 games)</a:t>
+            </a:r>
+          </a:p>
+          <a:p>
+            <a:pPr algn="l" marL="292608" indent="-256032">
+              <a:spcAft>
+                <a:spcPts val="600"/>
+              </a:spcAft>
+              <a:buChar char="•"/>
+            </a:pPr>
+            <a:r>
+              <a:rPr sz="1700" b="1" i="0">
+                <a:solidFill>
+                  <a:srgbClr val="0F172A"/>
+                </a:solidFill>
+                <a:latin typeface="Arial"/>
+              </a:rPr>
+              <a:t>~⅔</a:t>
+            </a:r>
+            <a:r>
+              <a:rPr sz="1700" b="0" i="0">
+                <a:solidFill>
+                  <a:srgbClr val="0F172A"/>
+                </a:solidFill>
+                <a:latin typeface="Arial"/>
+              </a:rPr>
+              <a:t> (67%, CI 47–85%) before the first official injury report, ~6 h earlier</a:t>
+            </a:r>
+          </a:p>
+          <a:p>
+            <a:pPr algn="l" marL="292608" indent="-256032">
+              <a:spcAft>
+                <a:spcPts val="600"/>
+              </a:spcAft>
+              <a:buChar char="•"/>
+            </a:pPr>
+            <a:r>
+              <a:rPr sz="1400" b="0" i="0">
                 <a:solidFill>
                   <a:srgbClr val="64748B"/>
                 </a:solidFill>
                 <a:latin typeface="Arial"/>
               </a:rPr>
-              <a:t>49% if reports are public at their slot; official reports only, so news can be earlier</a:t>
+              <a:t>49% with no publication lag; official reports only</a:t>
             </a:r>
           </a:p>
         </p:txBody>
@@ -14384,7 +14816,7 @@
                 </a:solidFill>
                 <a:latin typeface="Arial"/>
               </a:rPr>
-              <a:t>Evidence 3: the market beats our model</a:t>
+              <a:t>Evidence 2: the market beats our model</a:t>
             </a:r>
           </a:p>
         </p:txBody>

--- a/presentation/nba_agent_deck.pptx
+++ b/presentation/nba_agent_deck.pptx
@@ -1006,7 +1006,7 @@
           <a:lstStyle/>
           <a:p>
             <a:r>
-              <a:t>Three parts. First, consumers want to learn: since 2018, 38 US states have legalised sports betting, and the Lancet Public Health Commission estimates 46% of adults worldwide gambled last year. Second, the markets are structurally tilted, which is what we measured: about 5.0% cost per trade, 91% of the price move before the public news, and the market beats our model. Third, published research shows harm: about 80M adults with gambling disorder; online betting lowers credit scores by 2.75 points and raises bankruptcies by about 10%; each dollar of online betting cuts investment by about $0.99. References: Wardle et al., Lancet Public Health 2024; Hollenbeck, Larsen and Proserpio, SSRN 4903302; Baker et al., NBER WP 33108.</a:t>
+              <a:t>Three parts. First, volume is surging. Pew Research, using The Block's data, found that monthly volume on Kalshi and Polymarket more than doubled from $26B in May to $53B in July 2026, mostly sports. Kalshi alone traded a record $61B notional in September 2026, about 46× its daily average a year earlier (TickerTracker, via NEXTPredict). Notional counts each contract at one dollar, so cash paid is lower, but in July Kalshi's sports notional of $31B compared with $11.6B of handle at all US sportsbooks (AGA). It reaches retail users through brokers: Robinhood reported 13.6B event contracts in Q2 2026 and nearly 2 million prediction-market customers; Coinbase routes to Kalshi since January 2026. Investors value Kalshi at $22B (May 2026, talks at about $40 billion reported by Reuters on 29 September) and Polymarket at $21B (Bloomberg, 31 August). Second, price protection is thin. An exchange has no house edge, but every taker pays a fee, 0.07 times p times one minus p per contract on Kalshi, plus the spread, and trades against professional market makers, including Kalshi's own affiliate, Kalshi Trading, which the CFTC has proposed to restrict. Kalshi has been CFTC-regulated since 2020 and self-certified sports contracts in January 2025; the CFTC did not block them. CFTC core principles protect market integrity, surveillance and manipulation, but nobody checks that the price a retail user pays is fair, and there is no federal responsible-gambling duty; sports contracts are open at 18, not 21. States are fighting back: the Third Circuit said New Jersey cannot regulate Kalshi, the Ninth Circuit in August said Nevada can. Our own measurement shows what this gap costs: about 5.0% per trade, and 91% of the price move before the public news. Third, published research shows harm: about 80M adults with gambling disorder (Lancet Public Health 2024); online betting lowers credit scores by 2.75 points and raises bankruptcies by about 10% (Hollenbeck, Larsen and Proserpio, SSRN 4903302). Full sources and dates: docs/market_regulation.md.</a:t>
             </a:r>
           </a:p>
         </p:txBody>
@@ -10063,7 +10063,7 @@
                 </a:solidFill>
                 <a:latin typeface="Arial"/>
               </a:rPr>
-              <a:t>The problem: three things consumers face</a:t>
+              <a:t>The problem: surging, under-protected betting markets</a:t>
             </a:r>
           </a:p>
         </p:txBody>
@@ -10154,8 +10154,8 @@
         </p:nvSpPr>
         <p:spPr>
           <a:xfrm>
-            <a:off x="457200" y="1234439"/>
-            <a:ext cx="3606698" cy="3246120"/>
+            <a:off x="457200" y="1170432"/>
+            <a:ext cx="3606698" cy="3721608"/>
           </a:xfrm>
           <a:prstGeom prst="roundRect">
             <a:avLst>
@@ -10202,8 +10202,8 @@
         </p:nvSpPr>
         <p:spPr>
           <a:xfrm>
-            <a:off x="457200" y="1234439"/>
-            <a:ext cx="109728" cy="3246120"/>
+            <a:off x="457200" y="1170432"/>
+            <a:ext cx="109728" cy="3721608"/>
           </a:xfrm>
           <a:prstGeom prst="rect">
             <a:avLst/>
@@ -10246,7 +10246,7 @@
         </p:nvSpPr>
         <p:spPr>
           <a:xfrm>
-            <a:off x="640080" y="1307592"/>
+            <a:off x="640080" y="1243584"/>
             <a:ext cx="3332378" cy="457200"/>
           </a:xfrm>
           <a:prstGeom prst="rect">
@@ -10266,13 +10266,13 @@
               </a:spcAft>
             </a:pPr>
             <a:r>
-              <a:rPr sz="2000" b="1" i="0">
+              <a:rPr sz="1800" b="1" i="0">
                 <a:solidFill>
                   <a:srgbClr val="2563EB"/>
                 </a:solidFill>
                 <a:latin typeface="Arial"/>
               </a:rPr>
-              <a:t>1  People want to learn</a:t>
+              <a:t>1  Surging volume</a:t>
             </a:r>
           </a:p>
         </p:txBody>
@@ -10285,8 +10285,8 @@
         </p:nvSpPr>
         <p:spPr>
           <a:xfrm>
-            <a:off x="640080" y="1764791"/>
-            <a:ext cx="3332378" cy="2642615"/>
+            <a:off x="640080" y="1700784"/>
+            <a:ext cx="3332378" cy="3118104"/>
           </a:xfrm>
           <a:prstGeom prst="rect">
             <a:avLst/>
@@ -10306,13 +10306,31 @@
               <a:buChar char="•"/>
             </a:pPr>
             <a:r>
-              <a:rPr sz="1800" b="0" i="0">
+              <a:rPr sz="1600" b="0" i="0">
                 <a:solidFill>
                   <a:srgbClr val="0F172A"/>
                 </a:solidFill>
                 <a:latin typeface="Arial"/>
               </a:rPr>
-              <a:t>Mainstream: legal in 38 US states since 2018 ¹</a:t>
+              <a:t>Kalshi + Polymarket: </a:t>
+            </a:r>
+            <a:r>
+              <a:rPr sz="1600" b="1" i="0">
+                <a:solidFill>
+                  <a:srgbClr val="0F172A"/>
+                </a:solidFill>
+                <a:latin typeface="Arial"/>
+              </a:rPr>
+              <a:t>$26B → $53B</a:t>
+            </a:r>
+            <a:r>
+              <a:rPr sz="1600" b="0" i="0">
+                <a:solidFill>
+                  <a:srgbClr val="0F172A"/>
+                </a:solidFill>
+                <a:latin typeface="Arial"/>
+              </a:rPr>
+              <a:t> a month, May → Jul 2026 ¹</a:t>
             </a:r>
           </a:p>
           <a:p>
@@ -10323,13 +10341,31 @@
               <a:buChar char="•"/>
             </a:pPr>
             <a:r>
-              <a:rPr sz="1800" b="0" i="0">
+              <a:rPr sz="1600" b="0" i="0">
                 <a:solidFill>
                   <a:srgbClr val="0F172A"/>
                 </a:solidFill>
                 <a:latin typeface="Arial"/>
               </a:rPr>
-              <a:t>46% of adults worldwide gambled last year ²</a:t>
+              <a:t>Kalshi Sep 2026: </a:t>
+            </a:r>
+            <a:r>
+              <a:rPr sz="1600" b="1" i="0">
+                <a:solidFill>
+                  <a:srgbClr val="0F172A"/>
+                </a:solidFill>
+                <a:latin typeface="Arial"/>
+              </a:rPr>
+              <a:t>$61B</a:t>
+            </a:r>
+            <a:r>
+              <a:rPr sz="1600" b="0" i="0">
+                <a:solidFill>
+                  <a:srgbClr val="0F172A"/>
+                </a:solidFill>
+                <a:latin typeface="Arial"/>
+              </a:rPr>
+              <a:t> notional, ~46× a year earlier ²</a:t>
             </a:r>
           </a:p>
           <a:p>
@@ -10340,13 +10376,30 @@
               <a:buChar char="•"/>
             </a:pPr>
             <a:r>
-              <a:rPr sz="1800" b="0" i="0">
+              <a:rPr sz="1600" b="0" i="0">
                 <a:solidFill>
                   <a:srgbClr val="0F172A"/>
                 </a:solidFill>
                 <a:latin typeface="Arial"/>
               </a:rPr>
-              <a:t>Few understand prices, fees and spreads</a:t>
+              <a:t>Sold in Robinhood (~2M users) and Coinbase apps ³</a:t>
+            </a:r>
+          </a:p>
+          <a:p>
+            <a:pPr algn="l" marL="292608" indent="-256032">
+              <a:spcAft>
+                <a:spcPts val="600"/>
+              </a:spcAft>
+              <a:buChar char="•"/>
+            </a:pPr>
+            <a:r>
+              <a:rPr sz="1600" b="0" i="0">
+                <a:solidFill>
+                  <a:srgbClr val="0F172A"/>
+                </a:solidFill>
+                <a:latin typeface="Arial"/>
+              </a:rPr>
+              <a:t>Valued at $22B (Kalshi), $21B (Polymarket) ⁴</a:t>
             </a:r>
           </a:p>
         </p:txBody>
@@ -10359,8 +10412,8 @@
         </p:nvSpPr>
         <p:spPr>
           <a:xfrm>
-            <a:off x="4292498" y="1234439"/>
-            <a:ext cx="3606698" cy="3246120"/>
+            <a:off x="4292498" y="1170432"/>
+            <a:ext cx="3606698" cy="3721608"/>
           </a:xfrm>
           <a:prstGeom prst="roundRect">
             <a:avLst>
@@ -10407,8 +10460,8 @@
         </p:nvSpPr>
         <p:spPr>
           <a:xfrm>
-            <a:off x="4292498" y="1234439"/>
-            <a:ext cx="109728" cy="3246120"/>
+            <a:off x="4292498" y="1170432"/>
+            <a:ext cx="109728" cy="3721608"/>
           </a:xfrm>
           <a:prstGeom prst="rect">
             <a:avLst/>
@@ -10451,7 +10504,7 @@
         </p:nvSpPr>
         <p:spPr>
           <a:xfrm>
-            <a:off x="4475378" y="1307592"/>
+            <a:off x="4475378" y="1243584"/>
             <a:ext cx="3332378" cy="457200"/>
           </a:xfrm>
           <a:prstGeom prst="rect">
@@ -10471,13 +10524,13 @@
               </a:spcAft>
             </a:pPr>
             <a:r>
-              <a:rPr sz="2000" b="1" i="0">
+              <a:rPr sz="1800" b="1" i="0">
                 <a:solidFill>
                   <a:srgbClr val="EA580C"/>
                 </a:solidFill>
                 <a:latin typeface="Arial"/>
               </a:rPr>
-              <a:t>2  Markets are tilted</a:t>
+              <a:t>2  Thin price protection</a:t>
             </a:r>
           </a:p>
         </p:txBody>
@@ -10490,8 +10543,8 @@
         </p:nvSpPr>
         <p:spPr>
           <a:xfrm>
-            <a:off x="4475378" y="1764791"/>
-            <a:ext cx="3332378" cy="2642615"/>
+            <a:off x="4475378" y="1700784"/>
+            <a:ext cx="3332378" cy="3118104"/>
           </a:xfrm>
           <a:prstGeom prst="rect">
             <a:avLst/>
@@ -10511,13 +10564,13 @@
               <a:buChar char="•"/>
             </a:pPr>
             <a:r>
-              <a:rPr sz="1800" b="0" i="0">
+              <a:rPr sz="1600" b="0" i="0">
                 <a:solidFill>
                   <a:srgbClr val="0F172A"/>
                 </a:solidFill>
                 <a:latin typeface="Arial"/>
               </a:rPr>
-              <a:t>~5.0% cost on every trade</a:t>
+              <a:t>No house edge, but fees, spreads and pro market makers, incl. Kalshi's own ⁵</a:t>
             </a:r>
           </a:p>
           <a:p>
@@ -10528,13 +10581,13 @@
               <a:buChar char="•"/>
             </a:pPr>
             <a:r>
-              <a:rPr sz="1800" b="0" i="0">
+              <a:rPr sz="1600" b="0" i="0">
                 <a:solidFill>
                   <a:srgbClr val="0F172A"/>
                 </a:solidFill>
                 <a:latin typeface="Arial"/>
               </a:rPr>
-              <a:t>91% of the price move comes before the public news</a:t>
+              <a:t>CFTC checks integrity, not fair prices or gambling harm; 18+ ⁶</a:t>
             </a:r>
           </a:p>
           <a:p>
@@ -10545,13 +10598,30 @@
               <a:buChar char="•"/>
             </a:pPr>
             <a:r>
-              <a:rPr sz="1800" b="0" i="0">
+              <a:rPr sz="1600" b="0" i="0">
                 <a:solidFill>
                   <a:srgbClr val="0F172A"/>
                 </a:solidFill>
                 <a:latin typeface="Arial"/>
               </a:rPr>
-              <a:t>The market beats our model; never trading wins</a:t>
+              <a:t>Courts split on state power (3rd vs 9th Cir.) ⁷</a:t>
+            </a:r>
+          </a:p>
+          <a:p>
+            <a:pPr algn="l" marL="292608" indent="-256032">
+              <a:spcAft>
+                <a:spcPts val="600"/>
+              </a:spcAft>
+              <a:buChar char="•"/>
+            </a:pPr>
+            <a:r>
+              <a:rPr sz="1600" b="1" i="0">
+                <a:solidFill>
+                  <a:srgbClr val="0F172A"/>
+                </a:solidFill>
+                <a:latin typeface="Arial"/>
+              </a:rPr>
+              <a:t>Ours: ~5.0% cost per trade; 91% of the move before the news</a:t>
             </a:r>
           </a:p>
         </p:txBody>
@@ -10564,8 +10634,8 @@
         </p:nvSpPr>
         <p:spPr>
           <a:xfrm>
-            <a:off x="8127796" y="1234439"/>
-            <a:ext cx="3606698" cy="3246120"/>
+            <a:off x="8127796" y="1170432"/>
+            <a:ext cx="3606698" cy="3721608"/>
           </a:xfrm>
           <a:prstGeom prst="roundRect">
             <a:avLst>
@@ -10612,8 +10682,8 @@
         </p:nvSpPr>
         <p:spPr>
           <a:xfrm>
-            <a:off x="8127796" y="1234439"/>
-            <a:ext cx="109728" cy="3246120"/>
+            <a:off x="8127796" y="1170432"/>
+            <a:ext cx="109728" cy="3721608"/>
           </a:xfrm>
           <a:prstGeom prst="rect">
             <a:avLst/>
@@ -10656,7 +10726,7 @@
         </p:nvSpPr>
         <p:spPr>
           <a:xfrm>
-            <a:off x="8310676" y="1307592"/>
+            <a:off x="8310676" y="1243584"/>
             <a:ext cx="3332378" cy="457200"/>
           </a:xfrm>
           <a:prstGeom prst="rect">
@@ -10676,7 +10746,7 @@
               </a:spcAft>
             </a:pPr>
             <a:r>
-              <a:rPr sz="2000" b="1" i="0">
+              <a:rPr sz="1800" b="1" i="0">
                 <a:solidFill>
                   <a:srgbClr val="DC2626"/>
                 </a:solidFill>
@@ -10695,8 +10765,8 @@
         </p:nvSpPr>
         <p:spPr>
           <a:xfrm>
-            <a:off x="8310676" y="1764791"/>
-            <a:ext cx="3332378" cy="2642615"/>
+            <a:off x="8310676" y="1700784"/>
+            <a:ext cx="3332378" cy="3118104"/>
           </a:xfrm>
           <a:prstGeom prst="rect">
             <a:avLst/>
@@ -10716,13 +10786,13 @@
               <a:buChar char="•"/>
             </a:pPr>
             <a:r>
-              <a:rPr sz="1800" b="0" i="0">
+              <a:rPr sz="1600" b="0" i="0">
                 <a:solidFill>
                   <a:srgbClr val="0F172A"/>
                 </a:solidFill>
                 <a:latin typeface="Arial"/>
               </a:rPr>
-              <a:t>~80M adults with gambling disorder or problem gambling ²</a:t>
+              <a:t>~80M adults with gambling disorder or problem gambling ⁸</a:t>
             </a:r>
           </a:p>
           <a:p>
@@ -10733,122 +10803,27 @@
               <a:buChar char="•"/>
             </a:pPr>
             <a:r>
-              <a:rPr sz="1800" b="0" i="0">
+              <a:rPr sz="1600" b="0" i="0">
                 <a:solidFill>
                   <a:srgbClr val="0F172A"/>
                 </a:solidFill>
                 <a:latin typeface="Arial"/>
               </a:rPr>
-              <a:t>Online betting: credit scores −2.75 pts, bankruptcies +~10% ¹</a:t>
-            </a:r>
-          </a:p>
-          <a:p>
-            <a:pPr algn="l" marL="292608" indent="-256032">
-              <a:spcAft>
-                <a:spcPts val="600"/>
-              </a:spcAft>
-              <a:buChar char="•"/>
-            </a:pPr>
-            <a:r>
-              <a:rPr sz="1800" b="0" i="0">
-                <a:solidFill>
-                  <a:srgbClr val="0F172A"/>
-                </a:solidFill>
-                <a:latin typeface="Arial"/>
-              </a:rPr>
-              <a:t>$1 of online betting cuts investment ~$0.99 ³</a:t>
-            </a:r>
-          </a:p>
-        </p:txBody>
-      </p:sp>
-      <p:sp>
-        <p:nvSpPr>
-          <p:cNvPr id="19" name="TextBox 18"/>
-          <p:cNvSpPr txBox="1"/>
-          <p:nvPr/>
-        </p:nvSpPr>
-        <p:spPr>
-          <a:xfrm>
-            <a:off x="4292498" y="4526280"/>
-            <a:ext cx="3606698" cy="411480"/>
-          </a:xfrm>
-          <a:prstGeom prst="rect">
-            <a:avLst/>
-          </a:prstGeom>
-          <a:noFill/>
-        </p:spPr>
-        <p:txBody>
-          <a:bodyPr wrap="square" anchor="t" lIns="73152" rIns="73152" tIns="36576" bIns="36576">
-            <a:spAutoFit/>
-          </a:bodyPr>
-          <a:lstStyle/>
-          <a:p>
-            <a:pPr algn="ctr">
-              <a:spcAft>
-                <a:spcPts val="800"/>
-              </a:spcAft>
-            </a:pPr>
-            <a:r>
-              <a:rPr sz="1400" b="0" i="1">
-                <a:solidFill>
-                  <a:srgbClr val="EA580C"/>
-                </a:solidFill>
-                <a:latin typeface="Arial"/>
-              </a:rPr>
-              <a:t>Our measurements</a:t>
-            </a:r>
-          </a:p>
-        </p:txBody>
-      </p:sp>
-      <p:sp>
-        <p:nvSpPr>
-          <p:cNvPr id="20" name="TextBox 19"/>
-          <p:cNvSpPr txBox="1"/>
-          <p:nvPr/>
-        </p:nvSpPr>
-        <p:spPr>
-          <a:xfrm>
-            <a:off x="8127796" y="4526280"/>
-            <a:ext cx="3606698" cy="411480"/>
-          </a:xfrm>
-          <a:prstGeom prst="rect">
-            <a:avLst/>
-          </a:prstGeom>
-          <a:noFill/>
-        </p:spPr>
-        <p:txBody>
-          <a:bodyPr wrap="square" anchor="t" lIns="73152" rIns="73152" tIns="36576" bIns="36576">
-            <a:spAutoFit/>
-          </a:bodyPr>
-          <a:lstStyle/>
-          <a:p>
-            <a:pPr algn="ctr">
-              <a:spcAft>
-                <a:spcPts val="800"/>
-              </a:spcAft>
-            </a:pPr>
-            <a:r>
-              <a:rPr sz="1400" b="0" i="1">
-                <a:solidFill>
-                  <a:srgbClr val="DC2626"/>
-                </a:solidFill>
-                <a:latin typeface="Arial"/>
-              </a:rPr>
-              <a:t>External research</a:t>
-            </a:r>
-          </a:p>
-        </p:txBody>
-      </p:sp>
-      <p:sp>
-        <p:nvSpPr>
-          <p:cNvPr id="21" name="Rounded Rectangle 20"/>
+              <a:t>Online betting: credit scores −2.75 pts, bankruptcies +~10% ⁹</a:t>
+            </a:r>
+          </a:p>
+        </p:txBody>
+      </p:sp>
+      <p:sp>
+        <p:nvSpPr>
+          <p:cNvPr id="19" name="Rounded Rectangle 18"/>
           <p:cNvSpPr/>
           <p:nvPr/>
         </p:nvSpPr>
         <p:spPr>
           <a:xfrm>
-            <a:off x="457200" y="5074920"/>
-            <a:ext cx="11277295" cy="640080"/>
+            <a:off x="457200" y="4974336"/>
+            <a:ext cx="11277295" cy="502920"/>
           </a:xfrm>
           <a:prstGeom prst="roundRect">
             <a:avLst>
@@ -10887,14 +10862,14 @@
       </p:sp>
       <p:sp>
         <p:nvSpPr>
-          <p:cNvPr id="22" name="TextBox 21"/>
+          <p:cNvPr id="20" name="TextBox 19"/>
           <p:cNvSpPr txBox="1"/>
           <p:nvPr/>
         </p:nvSpPr>
         <p:spPr>
           <a:xfrm>
-            <a:off x="548640" y="5074920"/>
-            <a:ext cx="11094415" cy="640080"/>
+            <a:off x="548640" y="4974336"/>
+            <a:ext cx="11094415" cy="502920"/>
           </a:xfrm>
           <a:prstGeom prst="rect">
             <a:avLst/>
@@ -10913,7 +10888,7 @@
               </a:spcAft>
             </a:pPr>
             <a:r>
-              <a:rPr sz="2200" b="0" i="0">
+              <a:rPr sz="2000" b="0" i="0">
                 <a:solidFill>
                   <a:srgbClr val="0F172A"/>
                 </a:solidFill>
@@ -10926,14 +10901,14 @@
       </p:sp>
       <p:sp>
         <p:nvSpPr>
-          <p:cNvPr id="23" name="TextBox 22"/>
+          <p:cNvPr id="21" name="TextBox 20"/>
           <p:cNvSpPr txBox="1"/>
           <p:nvPr/>
         </p:nvSpPr>
         <p:spPr>
           <a:xfrm>
-            <a:off x="457200" y="5897880"/>
-            <a:ext cx="11277295" cy="457200"/>
+            <a:off x="457200" y="5513832"/>
+            <a:ext cx="11277295" cy="841248"/>
           </a:xfrm>
           <a:prstGeom prst="rect">
             <a:avLst/>
@@ -10948,17 +10923,17 @@
           <a:p>
             <a:pPr algn="l">
               <a:spcAft>
-                <a:spcPts val="800"/>
+                <a:spcPts val="0"/>
               </a:spcAft>
             </a:pPr>
             <a:r>
-              <a:rPr sz="1300" b="0" i="0">
+              <a:rPr sz="1000" b="0" i="0">
                 <a:solidFill>
                   <a:srgbClr val="64748B"/>
                 </a:solidFill>
                 <a:latin typeface="Arial"/>
               </a:rPr>
-              <a:t>¹ Hollenbeck, Larsen &amp; Proserpio 2024 (SSRN)   ² Lancet Public Health Commission on gambling 2024   ³ Baker et al. 2024 (NBER WP 33108)</a:t>
+              <a:t>¹ Pew Research, 23 Sep 2026 (The Block data)   ² NEXTPredict / TickerTracker, Sep–Oct 2026   ³ Robinhood Q2 2026 results; Coinbase, 28 Jan 2026   ⁴ Kalshi, 7 May 2026; Bloomberg, 31 Aug 2026   ⁵ Kalshi fee schedule &amp; Rule 2.12; CFTC affiliate proposal 2026   ⁶ DCM core principles; NBA letter to CFTC, 30 Apr 2026   ⁷ KalshiEX v. Flaherty (3d Cir., 6 Apr 2026); KalshiEX v. Assad (9th Cir., 28 Aug 2026)   ⁸ Lancet Public Health 2024   ⁹ Hollenbeck, Larsen &amp; Proserpio 2024 (SSRN)   Full list: docs/market_regulation.md</a:t>
             </a:r>
           </a:p>
         </p:txBody>

--- a/presentation/nba_agent_deck.pptx
+++ b/presentation/nba_agent_deck.pptx
@@ -656,7 +656,7 @@
           <a:lstStyle/>
           <a:p>
             <a:r>
-              <a:t>We then made the agent more agentic and graded each upgrade the same way, pre-registered before scoring. Gate audit: the split gate, which judges a rule on held-out days by CLV dollars, kept 5 of 11 proposed rules where the legacy gate kept 0 of 24. Trades fell from 129 to 53 and CLV dollars improved by +$18 [+1, +34], but mean CLV per trade did not improve and it still does not beat never trading. The placebo test says why: random rules pass the split gate 57% of the time, the same as the reviewer's picks, so learning works by trading less, not by finding better rules. The kill switch is enforced but never tripped at $20 stakes; property tests show it blocks orders after a trip. Kelly sizing was not run. The Coach on simulated users with full compliance raises CLV dollars for every persona: overtrader +$88 [+65, +111], long-shot lover +$72 [+53, +90], cautious +$24 [+14, +36], price chaser +$17 [−4, +33], whose interval includes zero, and cuts trades by 66–87%. But it flags 99% of trades, so again the gain is trading less. The plain LLM made 5 trades in 304 decisions, CLV −$1, the same as never trading; the deterministic agent made 53 trades, CLV −$19. The tool agent and the sceptic are pending: the Gemini quota ran out and they are being re-run on DeepSeek. The orchestrator is built, shown on the right. The learned policy's selection step chose never trade, and the test was not scored. The rule language and memory are built and tested but not evaluated. The message: Every agentic upgrade, graded by the market, converges on the same answer: trade less. The market is hard to beat after fees, which is exactly why the product is education, not a trading bot.</a:t>
+              <a:t>We then made the agent more agentic and graded each upgrade the same way, pre-registered before scoring. Gate audit: the split gate, which judges a rule on held-out days by CLV dollars, kept 5 of 11 proposed rules where the legacy gate kept 0 of 24. Trades fell from 129 to 53 and CLV dollars improved by +$18 [+1, +34], but mean CLV per trade did not improve and it still does not beat never trading. The placebo test says why: random rules pass the split gate 57% of the time, the same as the reviewer's picks, so learning works by trading less, not by finding better rules. The kill switch is enforced but never tripped at $20 stakes; property tests show it blocks orders after a trip. Kelly sizing was not run. The Coach on simulated users with full compliance raises CLV dollars for every persona: overtrader +$88 [+65, +111], long-shot lover +$72 [+53, +90], cautious +$24 [+14, +36], price chaser +$17 [−4, +33], whose interval includes zero, and cuts trades by 66–87%. But it flags 99% of trades, so again the gain is trading less. The plain LLM made 5 trades in 304 decisions, CLV −$1, the same as never trading; the deterministic agent made 53 trades, CLV −$19. The tool agent with the sceptic, re-run on DeepSeek: DeepSeek reasoner: 2 trades, CLV $ +$4 [−3, +15] = never; sceptic vetoed 40/42 (chat: 0 trades). The orchestrator is built, shown on the right. The learned policy's selection step chose never trade, and the test was not scored. The rule language and memory are built and tested but not evaluated. The message: Every agentic upgrade, graded by the market, converges on the same answer: trade less. The market is hard to beat after fees, which is exactly why the product is education, not a trading bot.</a:t>
             </a:r>
           </a:p>
         </p:txBody>
@@ -6248,13 +6248,13 @@
                     <a:p>
                       <a:pPr algn="l"/>
                       <a:r>
-                        <a:rPr sz="1100" b="0" i="1">
+                        <a:rPr sz="1100" b="0" i="0">
                           <a:solidFill>
-                            <a:srgbClr val="64748B"/>
+                            <a:srgbClr val="0F172A"/>
                           </a:solidFill>
                           <a:latin typeface="Arial"/>
                         </a:rPr>
-                        <a:t>pending</a:t>
+                        <a:t>DeepSeek reasoner: 2 trades, CLV $ +$4 [−3, +15] = never; sceptic vetoed 40/42 (chat: 0 trades)</a:t>
                       </a:r>
                     </a:p>
                   </a:txBody>
